--- a/kiro-crew-training.pptx
+++ b/kiro-crew-training.pptx
@@ -34,6 +34,17 @@
     <p:sldId id="282" r:id="rId33"/>
     <p:sldId id="283" r:id="rId34"/>
     <p:sldId id="284" r:id="rId35"/>
+    <p:sldId id="285" r:id="rId36"/>
+    <p:sldId id="286" r:id="rId37"/>
+    <p:sldId id="287" r:id="rId38"/>
+    <p:sldId id="288" r:id="rId39"/>
+    <p:sldId id="289" r:id="rId40"/>
+    <p:sldId id="290" r:id="rId41"/>
+    <p:sldId id="291" r:id="rId42"/>
+    <p:sldId id="292" r:id="rId43"/>
+    <p:sldId id="293" r:id="rId44"/>
+    <p:sldId id="294" r:id="rId45"/>
+    <p:sldId id="295" r:id="rId46"/>
   </p:sldIdLst>
   <p:sldSz cx="9144000" cy="6858000" type="screen4x3"/>
   <p:notesSz cx="6858000" cy="9144000"/>
@@ -5815,7 +5826,7 @@
               </a:defRPr>
             </a:pPr>
             <a:r>
-              <a:t>Part 4: Use Cases</a:t>
+              <a:t>Advanced &amp; Enterprise Topics</a:t>
             </a:r>
           </a:p>
         </p:txBody>
@@ -5850,7 +5861,7 @@
               </a:defRPr>
             </a:pPr>
             <a:r>
-              <a:t>Enterprise integration examples</a:t>
+              <a:t>Full coverage of docs/crew/</a:t>
             </a:r>
           </a:p>
         </p:txBody>
@@ -5911,7 +5922,7 @@
               </a:defRPr>
             </a:pPr>
             <a:r>
-              <a:t>Example: 24/7 PR Monitoring</a:t>
+              <a:t>Security: 8-Layer Defense-in-Depth</a:t>
             </a:r>
           </a:p>
         </p:txBody>
@@ -5941,12 +5952,12 @@
             <a:pPr>
               <a:defRPr sz="1100" b="1">
                 <a:solidFill>
-                  <a:srgbClr val="F59E0B"/>
-                </a:solidFill>
-              </a:defRPr>
-            </a:pPr>
-            <a:r>
-              <a:t>⚠ To Be Verified</a:t>
+                  <a:srgbClr val="10B981"/>
+                </a:solidFill>
+              </a:defRPr>
+            </a:pPr>
+            <a:r>
+              <a:t>✓ Verified</a:t>
             </a:r>
           </a:p>
         </p:txBody>
@@ -5984,133 +5995,124 @@
               </a:defRPr>
             </a:pPr>
             <a:r>
-              <a:t>Scenario: Track open PRs and alert on staleness</a:t>
-            </a:r>
-          </a:p>
-          <a:p>
-            <a:pPr>
-              <a:spcBef>
-                <a:spcPts val="800"/>
-              </a:spcBef>
-              <a:defRPr sz="1800">
-                <a:solidFill>
-                  <a:srgbClr val="F1F5F9"/>
-                </a:solidFill>
-              </a:defRPr>
-            </a:pPr>
-          </a:p>
-          <a:p>
-            <a:pPr>
-              <a:spcBef>
-                <a:spcPts val="800"/>
-              </a:spcBef>
-              <a:defRPr sz="1800">
-                <a:solidFill>
-                  <a:srgbClr val="F1F5F9"/>
-                </a:solidFill>
-              </a:defRPr>
-            </a:pPr>
-            <a:r>
-              <a:t>Implementation:</a:t>
-            </a:r>
-          </a:p>
-          <a:p>
-            <a:pPr>
-              <a:spcBef>
-                <a:spcPts val="800"/>
-              </a:spcBef>
-              <a:defRPr sz="1800">
-                <a:solidFill>
-                  <a:srgbClr val="F1F5F9"/>
-                </a:solidFill>
-              </a:defRPr>
-            </a:pPr>
-            <a:r>
-              <a:t>• Heartbeat watches open PRs</a:t>
-            </a:r>
-          </a:p>
-          <a:p>
-            <a:pPr>
-              <a:spcBef>
-                <a:spcPts val="800"/>
-              </a:spcBef>
-              <a:defRPr sz="1800">
-                <a:solidFill>
-                  <a:srgbClr val="F1F5F9"/>
-                </a:solidFill>
-              </a:defRPr>
-            </a:pPr>
-            <a:r>
-              <a:t>• Alerts when stale (&gt;4 hours no review)</a:t>
-            </a:r>
-          </a:p>
-          <a:p>
-            <a:pPr>
-              <a:spcBef>
-                <a:spcPts val="800"/>
-              </a:spcBef>
-              <a:defRPr sz="1800">
-                <a:solidFill>
-                  <a:srgbClr val="F1F5F9"/>
-                </a:solidFill>
-              </a:defRPr>
-            </a:pPr>
-            <a:r>
-              <a:t>• Auto-pings reviewers via Slack</a:t>
-            </a:r>
-          </a:p>
-          <a:p>
-            <a:pPr>
-              <a:spcBef>
-                <a:spcPts val="800"/>
-              </a:spcBef>
-              <a:defRPr sz="1800">
-                <a:solidFill>
-                  <a:srgbClr val="F1F5F9"/>
-                </a:solidFill>
-              </a:defRPr>
-            </a:pPr>
-          </a:p>
-          <a:p>
-            <a:pPr>
-              <a:spcBef>
-                <a:spcPts val="800"/>
-              </a:spcBef>
-              <a:defRPr sz="1800">
-                <a:solidFill>
-                  <a:srgbClr val="F1F5F9"/>
-                </a:solidFill>
-              </a:defRPr>
-            </a:pPr>
-            <a:r>
-              <a:t>Uses: Heartbeats + Slack integration</a:t>
-            </a:r>
-          </a:p>
-          <a:p>
-            <a:pPr>
-              <a:spcBef>
-                <a:spcPts val="800"/>
-              </a:spcBef>
-              <a:defRPr sz="1800">
-                <a:solidFill>
-                  <a:srgbClr val="F1F5F9"/>
-                </a:solidFill>
-              </a:defRPr>
-            </a:pPr>
-          </a:p>
-          <a:p>
-            <a:pPr>
-              <a:spcBef>
-                <a:spcPts val="800"/>
-              </a:spcBef>
-              <a:defRPr sz="1800">
-                <a:solidFill>
-                  <a:srgbClr val="F1F5F9"/>
-                </a:solidFill>
-              </a:defRPr>
-            </a:pPr>
-            <a:r>
-              <a:t>Note: Example scenario based on documented capabilities</a:t>
+              <a:t>Every tool call passes independent layers (runtime-enforced):</a:t>
+            </a:r>
+          </a:p>
+          <a:p>
+            <a:pPr>
+              <a:spcBef>
+                <a:spcPts val="800"/>
+              </a:spcBef>
+              <a:defRPr sz="1800">
+                <a:solidFill>
+                  <a:srgbClr val="F1F5F9"/>
+                </a:solidFill>
+              </a:defRPr>
+            </a:pPr>
+            <a:r>
+              <a:t>1 Owner lock  2 Denied commands (137)  3 Governance ceiling</a:t>
+            </a:r>
+          </a:p>
+          <a:p>
+            <a:pPr>
+              <a:spcBef>
+                <a:spcPts val="800"/>
+              </a:spcBef>
+              <a:defRPr sz="1800">
+                <a:solidFill>
+                  <a:srgbClr val="F1F5F9"/>
+                </a:solidFill>
+              </a:defRPr>
+            </a:pPr>
+            <a:r>
+              <a:t>4 Sensitive-path block  5 Tool approval  6 Input validation</a:t>
+            </a:r>
+          </a:p>
+          <a:p>
+            <a:pPr>
+              <a:spcBef>
+                <a:spcPts val="800"/>
+              </a:spcBef>
+              <a:defRPr sz="1800">
+                <a:solidFill>
+                  <a:srgbClr val="F1F5F9"/>
+                </a:solidFill>
+              </a:defRPr>
+            </a:pPr>
+            <a:r>
+              <a:t>7 OS sandbox  8 Output redaction  (+ SEL audit, cross-cutting)</a:t>
+            </a:r>
+          </a:p>
+          <a:p>
+            <a:pPr>
+              <a:spcBef>
+                <a:spcPts val="800"/>
+              </a:spcBef>
+              <a:defRPr sz="1800">
+                <a:solidFill>
+                  <a:srgbClr val="F1F5F9"/>
+                </a:solidFill>
+              </a:defRPr>
+            </a:pPr>
+          </a:p>
+          <a:p>
+            <a:pPr>
+              <a:spcBef>
+                <a:spcPts val="800"/>
+              </a:spcBef>
+              <a:defRPr sz="1800">
+                <a:solidFill>
+                  <a:srgbClr val="F1F5F9"/>
+                </a:solidFill>
+              </a:defRPr>
+            </a:pPr>
+            <a:r>
+              <a:t>Sandbox: auto (default) / strict / off; no OS layer on Windows</a:t>
+            </a:r>
+          </a:p>
+          <a:p>
+            <a:pPr>
+              <a:spcBef>
+                <a:spcPts val="800"/>
+              </a:spcBef>
+              <a:defRPr sz="1800">
+                <a:solidFill>
+                  <a:srgbClr val="F1F5F9"/>
+                </a:solidFill>
+              </a:defRPr>
+            </a:pPr>
+            <a:r>
+              <a:t>Approval: Interactive / Trust command / Trust tool / Autopilot</a:t>
+            </a:r>
+          </a:p>
+          <a:p>
+            <a:pPr>
+              <a:spcBef>
+                <a:spcPts val="800"/>
+              </a:spcBef>
+              <a:defRPr sz="1800">
+                <a:solidFill>
+                  <a:srgbClr val="F1F5F9"/>
+                </a:solidFill>
+              </a:defRPr>
+            </a:pPr>
+            <a:r>
+              <a:t>Denied cmds enforced at Crew's gate, not agent config</a:t>
+            </a:r>
+          </a:p>
+          <a:p>
+            <a:pPr>
+              <a:spcBef>
+                <a:spcPts val="800"/>
+              </a:spcBef>
+              <a:defRPr sz="1800">
+                <a:solidFill>
+                  <a:srgbClr val="F1F5F9"/>
+                </a:solidFill>
+              </a:defRPr>
+            </a:pPr>
+            <a:r>
+              <a:t>kirocrew policy show|validate|explain; security events|audit|verify</a:t>
             </a:r>
           </a:p>
         </p:txBody>
@@ -6171,7 +6173,7 @@
               </a:defRPr>
             </a:pPr>
             <a:r>
-              <a:t>Example: Nightly Security Audit</a:t>
+              <a:t>Running 24/7</a:t>
             </a:r>
           </a:p>
         </p:txBody>
@@ -6201,12 +6203,12 @@
             <a:pPr>
               <a:defRPr sz="1100" b="1">
                 <a:solidFill>
-                  <a:srgbClr val="F59E0B"/>
-                </a:solidFill>
-              </a:defRPr>
-            </a:pPr>
-            <a:r>
-              <a:t>⚠ To Be Verified</a:t>
+                  <a:srgbClr val="10B981"/>
+                </a:solidFill>
+              </a:defRPr>
+            </a:pPr>
+            <a:r>
+              <a:t>✓ Verified</a:t>
             </a:r>
           </a:p>
         </p:txBody>
@@ -6244,136 +6246,112 @@
               </a:defRPr>
             </a:pPr>
             <a:r>
-              <a:t>Scenario: Automated security scanning</a:t>
-            </a:r>
-          </a:p>
-          <a:p>
-            <a:pPr>
-              <a:spcBef>
-                <a:spcPts val="800"/>
-              </a:spcBef>
-              <a:defRPr sz="1800">
-                <a:solidFill>
-                  <a:srgbClr val="F1F5F9"/>
-                </a:solidFill>
-              </a:defRPr>
-            </a:pPr>
-          </a:p>
-          <a:p>
-            <a:pPr>
-              <a:spcBef>
-                <a:spcPts val="800"/>
-              </a:spcBef>
-              <a:defRPr sz="1800">
-                <a:solidFill>
-                  <a:srgbClr val="F1F5F9"/>
-                </a:solidFill>
-              </a:defRPr>
-            </a:pPr>
-            <a:r>
-              <a:t>Implementation:</a:t>
-            </a:r>
-          </a:p>
-          <a:p>
-            <a:pPr>
-              <a:spcBef>
-                <a:spcPts val="800"/>
-              </a:spcBef>
-              <a:defRPr sz="1800">
-                <a:solidFill>
-                  <a:srgbClr val="F1F5F9"/>
-                </a:solidFill>
-              </a:defRPr>
-            </a:pPr>
-            <a:r>
-              <a:t>• Cron job at 2am</a:t>
-            </a:r>
-          </a:p>
-          <a:p>
-            <a:pPr>
-              <a:spcBef>
-                <a:spcPts val="800"/>
-              </a:spcBef>
-              <a:defRPr sz="1800">
-                <a:solidFill>
-                  <a:srgbClr val="F1F5F9"/>
-                </a:solidFill>
-              </a:defRPr>
-            </a:pPr>
-            <a:r>
-              <a:t>• Spawns subagents (one per repo)</a:t>
-            </a:r>
-          </a:p>
-          <a:p>
-            <a:pPr>
-              <a:spcBef>
-                <a:spcPts val="800"/>
-              </a:spcBef>
-              <a:defRPr sz="1800">
-                <a:solidFill>
-                  <a:srgbClr val="F1F5F9"/>
-                </a:solidFill>
-              </a:defRPr>
-            </a:pPr>
-            <a:r>
-              <a:t>• Scans for secrets, vulnerabilities, misconfigurations</a:t>
-            </a:r>
-          </a:p>
-          <a:p>
-            <a:pPr>
-              <a:spcBef>
-                <a:spcPts val="800"/>
-              </a:spcBef>
-              <a:defRPr sz="1800">
-                <a:solidFill>
-                  <a:srgbClr val="F1F5F9"/>
-                </a:solidFill>
-              </a:defRPr>
-            </a:pPr>
-            <a:r>
-              <a:t>• Aggregates findings into report</a:t>
-            </a:r>
-          </a:p>
-          <a:p>
-            <a:pPr>
-              <a:spcBef>
-                <a:spcPts val="800"/>
-              </a:spcBef>
-              <a:defRPr sz="1800">
-                <a:solidFill>
-                  <a:srgbClr val="F1F5F9"/>
-                </a:solidFill>
-              </a:defRPr>
-            </a:pPr>
-            <a:r>
-              <a:t>• Files HIGH/CRITICAL tickets</a:t>
-            </a:r>
-          </a:p>
-          <a:p>
-            <a:pPr>
-              <a:spcBef>
-                <a:spcPts val="800"/>
-              </a:spcBef>
-              <a:defRPr sz="1800">
-                <a:solidFill>
-                  <a:srgbClr val="F1F5F9"/>
-                </a:solidFill>
-              </a:defRPr>
-            </a:pPr>
-          </a:p>
-          <a:p>
-            <a:pPr>
-              <a:spcBef>
-                <a:spcPts val="800"/>
-              </a:spcBef>
-              <a:defRPr sz="1800">
-                <a:solidFill>
-                  <a:srgbClr val="F1F5F9"/>
-                </a:solidFill>
-              </a:defRPr>
-            </a:pPr>
-            <a:r>
-              <a:t>Uses: Cron + Subagents + Task automation</a:t>
+              <a:t>Local service: systemd/launchd; runs as user, sudo once for unit</a:t>
+            </a:r>
+          </a:p>
+          <a:p>
+            <a:pPr>
+              <a:spcBef>
+                <a:spcPts val="800"/>
+              </a:spcBef>
+              <a:defRPr sz="1800">
+                <a:solidFill>
+                  <a:srgbClr val="F1F5F9"/>
+                </a:solidFill>
+              </a:defRPr>
+            </a:pPr>
+            <a:r>
+              <a:t>  kirocrew service install | logs -f | restart</a:t>
+            </a:r>
+          </a:p>
+          <a:p>
+            <a:pPr>
+              <a:spcBef>
+                <a:spcPts val="800"/>
+              </a:spcBef>
+              <a:defRPr sz="1800">
+                <a:solidFill>
+                  <a:srgbClr val="F1F5F9"/>
+                </a:solidFill>
+              </a:defRPr>
+            </a:pPr>
+            <a:r>
+              <a:t>Docker: multi-arch GHCR; kiro-cli login + kirocrew token; SLSA</a:t>
+            </a:r>
+          </a:p>
+          <a:p>
+            <a:pPr>
+              <a:spcBef>
+                <a:spcPts val="800"/>
+              </a:spcBef>
+              <a:defRPr sz="1800">
+                <a:solidFill>
+                  <a:srgbClr val="F1F5F9"/>
+                </a:solidFill>
+              </a:defRPr>
+            </a:pPr>
+            <a:r>
+              <a:t>  docker run -d -p 127.0.0.1:5476:5476 -v kirocrew-home:...</a:t>
+            </a:r>
+          </a:p>
+          <a:p>
+            <a:pPr>
+              <a:spcBef>
+                <a:spcPts val="800"/>
+              </a:spcBef>
+              <a:defRPr sz="1800">
+                <a:solidFill>
+                  <a:srgbClr val="F1F5F9"/>
+                </a:solidFill>
+              </a:defRPr>
+            </a:pPr>
+            <a:r>
+              <a:t>Remote host: modern Linux, ~10GB RAM, Node 20+ (slack-mcp)</a:t>
+            </a:r>
+          </a:p>
+          <a:p>
+            <a:pPr>
+              <a:spcBef>
+                <a:spcPts val="800"/>
+              </a:spcBef>
+              <a:defRPr sz="1800">
+                <a:solidFill>
+                  <a:srgbClr val="F1F5F9"/>
+                </a:solidFill>
+              </a:defRPr>
+            </a:pPr>
+            <a:r>
+              <a:t>  ssh -L 5476:localhost:5476 user@host</a:t>
+            </a:r>
+          </a:p>
+          <a:p>
+            <a:pPr>
+              <a:spcBef>
+                <a:spcPts val="800"/>
+              </a:spcBef>
+              <a:defRPr sz="1800">
+                <a:solidFill>
+                  <a:srgbClr val="F1F5F9"/>
+                </a:solidFill>
+              </a:defRPr>
+            </a:pPr>
+            <a:r>
+              <a:t>Sync state: memory + SQLite incl WAL; NOT .env/.local_secret</a:t>
+            </a:r>
+          </a:p>
+          <a:p>
+            <a:pPr>
+              <a:spcBef>
+                <a:spcPts val="800"/>
+              </a:spcBef>
+              <a:defRPr sz="1800">
+                <a:solidFill>
+                  <a:srgbClr val="F1F5F9"/>
+                </a:solidFill>
+              </a:defRPr>
+            </a:pPr>
+            <a:r>
+              <a:t>Mobile: Cloudflare/ngrok/Tailscale + dashboard.url; token 1h/20h</a:t>
             </a:r>
           </a:p>
         </p:txBody>
@@ -6434,7 +6412,7 @@
               </a:defRPr>
             </a:pPr>
             <a:r>
-              <a:t>Example: Incident Response</a:t>
+              <a:t>Interfaces: One Gateway, Many Surfaces</a:t>
             </a:r>
           </a:p>
         </p:txBody>
@@ -6464,12 +6442,12 @@
             <a:pPr>
               <a:defRPr sz="1100" b="1">
                 <a:solidFill>
-                  <a:srgbClr val="F59E0B"/>
-                </a:solidFill>
-              </a:defRPr>
-            </a:pPr>
-            <a:r>
-              <a:t>⚠ To Be Verified</a:t>
+                  <a:srgbClr val="10B981"/>
+                </a:solidFill>
+              </a:defRPr>
+            </a:pPr>
+            <a:r>
+              <a:t>✓ Verified</a:t>
             </a:r>
           </a:p>
         </p:txBody>
@@ -6507,151 +6485,109 @@
               </a:defRPr>
             </a:pPr>
             <a:r>
-              <a:t>Scenario: Automated triage and RCA</a:t>
-            </a:r>
-          </a:p>
-          <a:p>
-            <a:pPr>
-              <a:spcBef>
-                <a:spcPts val="800"/>
-              </a:spcBef>
-              <a:defRPr sz="1800">
-                <a:solidFill>
-                  <a:srgbClr val="F1F5F9"/>
-                </a:solidFill>
-              </a:defRPr>
-            </a:pPr>
-          </a:p>
-          <a:p>
-            <a:pPr>
-              <a:spcBef>
-                <a:spcPts val="800"/>
-              </a:spcBef>
-              <a:defRPr sz="1800">
-                <a:solidFill>
-                  <a:srgbClr val="F1F5F9"/>
-                </a:solidFill>
-              </a:defRPr>
-            </a:pPr>
-            <a:r>
-              <a:t>Implementation:</a:t>
-            </a:r>
-          </a:p>
-          <a:p>
-            <a:pPr>
-              <a:spcBef>
-                <a:spcPts val="800"/>
-              </a:spcBef>
-              <a:defRPr sz="1800">
-                <a:solidFill>
-                  <a:srgbClr val="F1F5F9"/>
-                </a:solidFill>
-              </a:defRPr>
-            </a:pPr>
-            <a:r>
-              <a:t>• Webhook from PagerDuty</a:t>
-            </a:r>
-          </a:p>
-          <a:p>
-            <a:pPr>
-              <a:spcBef>
-                <a:spcPts val="800"/>
-              </a:spcBef>
-              <a:defRPr sz="1800">
-                <a:solidFill>
-                  <a:srgbClr val="F1F5F9"/>
-                </a:solidFill>
-              </a:defRPr>
-            </a:pPr>
-            <a:r>
-              <a:t>• Crew triages alert</a:t>
-            </a:r>
-          </a:p>
-          <a:p>
-            <a:pPr>
-              <a:spcBef>
-                <a:spcPts val="800"/>
-              </a:spcBef>
-              <a:defRPr sz="1800">
-                <a:solidFill>
-                  <a:srgbClr val="F1F5F9"/>
-                </a:solidFill>
-              </a:defRPr>
-            </a:pPr>
-            <a:r>
-              <a:t>• Checks logs, metrics, recent deploys</a:t>
-            </a:r>
-          </a:p>
-          <a:p>
-            <a:pPr>
-              <a:spcBef>
-                <a:spcPts val="800"/>
-              </a:spcBef>
-              <a:defRPr sz="1800">
-                <a:solidFill>
-                  <a:srgbClr val="F1F5F9"/>
-                </a:solidFill>
-              </a:defRPr>
-            </a:pPr>
-            <a:r>
-              <a:t>• Applies known fixes (from memory/lessons)</a:t>
-            </a:r>
-          </a:p>
-          <a:p>
-            <a:pPr>
-              <a:spcBef>
-                <a:spcPts val="800"/>
-              </a:spcBef>
-              <a:defRPr sz="1800">
-                <a:solidFill>
-                  <a:srgbClr val="F1F5F9"/>
-                </a:solidFill>
-              </a:defRPr>
-            </a:pPr>
-            <a:r>
-              <a:t>• Escalates if novel</a:t>
-            </a:r>
-          </a:p>
-          <a:p>
-            <a:pPr>
-              <a:spcBef>
-                <a:spcPts val="800"/>
-              </a:spcBef>
-              <a:defRPr sz="1800">
-                <a:solidFill>
-                  <a:srgbClr val="F1F5F9"/>
-                </a:solidFill>
-              </a:defRPr>
-            </a:pPr>
-            <a:r>
-              <a:t>• Posts RCA when resolved</a:t>
-            </a:r>
-          </a:p>
-          <a:p>
-            <a:pPr>
-              <a:spcBef>
-                <a:spcPts val="800"/>
-              </a:spcBef>
-              <a:defRPr sz="1800">
-                <a:solidFill>
-                  <a:srgbClr val="F1F5F9"/>
-                </a:solidFill>
-              </a:defRPr>
-            </a:pPr>
-          </a:p>
-          <a:p>
-            <a:pPr>
-              <a:spcBef>
-                <a:spcPts val="800"/>
-              </a:spcBef>
-              <a:defRPr sz="1800">
-                <a:solidFill>
-                  <a:srgbClr val="F1F5F9"/>
-                </a:solidFill>
-              </a:defRPr>
-            </a:pPr>
-            <a:r>
-              <a:t>Uses: Webhooks + Memory + Knowledge</a:t>
+              <a:t>Mac app / web dashboard / CLI + Slack/Discord/Telegram/</a:t>
+            </a:r>
+          </a:p>
+          <a:p>
+            <a:pPr>
+              <a:spcBef>
+                <a:spcPts val="800"/>
+              </a:spcBef>
+              <a:defRPr sz="1800">
+                <a:solidFill>
+                  <a:srgbClr val="F1F5F9"/>
+                </a:solidFill>
+              </a:defRPr>
+            </a:pPr>
+            <a:r>
+              <a:t>Teams/Webex/WeCom/WeChat channels</a:t>
+            </a:r>
+          </a:p>
+          <a:p>
+            <a:pPr>
+              <a:spcBef>
+                <a:spcPts val="800"/>
+              </a:spcBef>
+              <a:defRPr sz="1800">
+                <a:solidFill>
+                  <a:srgbClr val="F1F5F9"/>
+                </a:solidFill>
+              </a:defRPr>
+            </a:pPr>
+            <a:r>
+              <a:t>Independent sessions, SHARED memory/skills/lessons/crons</a:t>
+            </a:r>
+          </a:p>
+          <a:p>
+            <a:pPr>
+              <a:spcBef>
+                <a:spcPts val="800"/>
+              </a:spcBef>
+              <a:defRPr sz="1800">
+                <a:solidFill>
+                  <a:srgbClr val="F1F5F9"/>
+                </a:solidFill>
+              </a:defRPr>
+            </a:pPr>
+            <a:r>
+              <a:t>Channels connect outbound - no need to expose dashboard port</a:t>
+            </a:r>
+          </a:p>
+          <a:p>
+            <a:pPr>
+              <a:spcBef>
+                <a:spcPts val="800"/>
+              </a:spcBef>
+              <a:defRPr sz="1800">
+                <a:solidFill>
+                  <a:srgbClr val="F1F5F9"/>
+                </a:solidFill>
+              </a:defRPr>
+            </a:pPr>
+          </a:p>
+          <a:p>
+            <a:pPr>
+              <a:spcBef>
+                <a:spcPts val="800"/>
+              </a:spcBef>
+              <a:defRPr sz="1800">
+                <a:solidFill>
+                  <a:srgbClr val="F1F5F9"/>
+                </a:solidFill>
+              </a:defRPr>
+            </a:pPr>
+            <a:r>
+              <a:t>Dashboard = React SPA localhost:5476 (primary interface)</a:t>
+            </a:r>
+          </a:p>
+          <a:p>
+            <a:pPr>
+              <a:spcBef>
+                <a:spcPts val="800"/>
+              </a:spcBef>
+              <a:defRPr sz="1800">
+                <a:solidFill>
+                  <a:srgbClr val="F1F5F9"/>
+                </a:solidFill>
+              </a:defRPr>
+            </a:pPr>
+            <a:r>
+              <a:t>Cross-surface: dashboard&lt;-&gt;Slack sync, resume sessions</a:t>
+            </a:r>
+          </a:p>
+          <a:p>
+            <a:pPr>
+              <a:spcBef>
+                <a:spcPts val="800"/>
+              </a:spcBef>
+              <a:defRPr sz="1800">
+                <a:solidFill>
+                  <a:srgbClr val="F1F5F9"/>
+                </a:solidFill>
+              </a:defRPr>
+            </a:pPr>
+            <a:r>
+              <a:t>5476 loopback-only default; reverse proxy+TLS or SSH tunnel</a:t>
             </a:r>
           </a:p>
         </p:txBody>
@@ -6712,7 +6648,7 @@
               </a:defRPr>
             </a:pPr>
             <a:r>
-              <a:t>CI/CD Integration (3 Modes)</a:t>
+              <a:t>Chat</a:t>
             </a:r>
           </a:p>
         </p:txBody>
@@ -6785,181 +6721,109 @@
               </a:defRPr>
             </a:pPr>
             <a:r>
-              <a:t>Mode 1: CLI Headless</a:t>
-            </a:r>
-          </a:p>
-          <a:p>
-            <a:pPr>
-              <a:spcBef>
-                <a:spcPts val="800"/>
-              </a:spcBef>
-              <a:defRPr sz="1800">
-                <a:solidFill>
-                  <a:srgbClr val="F1F5F9"/>
-                </a:solidFill>
-              </a:defRPr>
-            </a:pPr>
-            <a:r>
-              <a:t>• kiro-cli chat --no-interactive "&lt;prompt&gt;" in pipeline</a:t>
-            </a:r>
-          </a:p>
-          <a:p>
-            <a:pPr>
-              <a:spcBef>
-                <a:spcPts val="800"/>
-              </a:spcBef>
-              <a:defRPr sz="1800">
-                <a:solidFill>
-                  <a:srgbClr val="F1F5F9"/>
-                </a:solidFill>
-              </a:defRPr>
-            </a:pPr>
-            <a:r>
-              <a:t>• Engine version: --engine v3 (not --v3)</a:t>
-            </a:r>
-          </a:p>
-          <a:p>
-            <a:pPr>
-              <a:spcBef>
-                <a:spcPts val="800"/>
-              </a:spcBef>
-              <a:defRPr sz="1800">
-                <a:solidFill>
-                  <a:srgbClr val="F1F5F9"/>
-                </a:solidFill>
-              </a:defRPr>
-            </a:pPr>
-            <a:r>
-              <a:t>• Use case: Simple code generation</a:t>
-            </a:r>
-          </a:p>
-          <a:p>
-            <a:pPr>
-              <a:spcBef>
-                <a:spcPts val="800"/>
-              </a:spcBef>
-              <a:defRPr sz="1800">
-                <a:solidFill>
-                  <a:srgbClr val="F1F5F9"/>
-                </a:solidFill>
-              </a:defRPr>
-            </a:pPr>
-          </a:p>
-          <a:p>
-            <a:pPr>
-              <a:spcBef>
-                <a:spcPts val="800"/>
-              </a:spcBef>
-              <a:defRPr sz="1800">
-                <a:solidFill>
-                  <a:srgbClr val="F1F5F9"/>
-                </a:solidFill>
-              </a:defRPr>
-            </a:pPr>
-            <a:r>
-              <a:t>Mode 2: Crew Webhooks</a:t>
-            </a:r>
-          </a:p>
-          <a:p>
-            <a:pPr>
-              <a:spcBef>
-                <a:spcPts val="800"/>
-              </a:spcBef>
-              <a:defRPr sz="1800">
-                <a:solidFill>
-                  <a:srgbClr val="F1F5F9"/>
-                </a:solidFill>
-              </a:defRPr>
-            </a:pPr>
-            <a:r>
-              <a:t>• CI pipeline calls Crew on events</a:t>
-            </a:r>
-          </a:p>
-          <a:p>
-            <a:pPr>
-              <a:spcBef>
-                <a:spcPts val="800"/>
-              </a:spcBef>
-              <a:defRPr sz="1800">
-                <a:solidFill>
-                  <a:srgbClr val="F1F5F9"/>
-                </a:solidFill>
-              </a:defRPr>
-            </a:pPr>
-            <a:r>
-              <a:t>• Crew analyzes and reports via Slack/Dashboard</a:t>
-            </a:r>
-          </a:p>
-          <a:p>
-            <a:pPr>
-              <a:spcBef>
-                <a:spcPts val="800"/>
-              </a:spcBef>
-              <a:defRPr sz="1800">
-                <a:solidFill>
-                  <a:srgbClr val="F1F5F9"/>
-                </a:solidFill>
-              </a:defRPr>
-            </a:pPr>
-            <a:r>
-              <a:t>• Use case: Root cause analysis, monitoring</a:t>
-            </a:r>
-          </a:p>
-          <a:p>
-            <a:pPr>
-              <a:spcBef>
-                <a:spcPts val="800"/>
-              </a:spcBef>
-              <a:defRPr sz="1800">
-                <a:solidFill>
-                  <a:srgbClr val="F1F5F9"/>
-                </a:solidFill>
-              </a:defRPr>
-            </a:pPr>
-          </a:p>
-          <a:p>
-            <a:pPr>
-              <a:spcBef>
-                <a:spcPts val="800"/>
-              </a:spcBef>
-              <a:defRPr sz="1800">
-                <a:solidFill>
-                  <a:srgbClr val="F1F5F9"/>
-                </a:solidFill>
-              </a:defRPr>
-            </a:pPr>
-            <a:r>
-              <a:t>Mode 3: Crew Cron</a:t>
-            </a:r>
-          </a:p>
-          <a:p>
-            <a:pPr>
-              <a:spcBef>
-                <a:spcPts val="800"/>
-              </a:spcBef>
-              <a:defRPr sz="1800">
-                <a:solidFill>
-                  <a:srgbClr val="F1F5F9"/>
-                </a:solidFill>
-              </a:defRPr>
-            </a:pPr>
-            <a:r>
-              <a:t>• Periodic checks of CI/PR status</a:t>
-            </a:r>
-          </a:p>
-          <a:p>
-            <a:pPr>
-              <a:spcBef>
-                <a:spcPts val="800"/>
-              </a:spcBef>
-              <a:defRPr sz="1800">
-                <a:solidFill>
-                  <a:srgbClr val="F1F5F9"/>
-                </a:solidFill>
-              </a:defRPr>
-            </a:pPr>
-            <a:r>
-              <a:t>• Use case: Nightly audits, health checks</a:t>
+              <a:t>Send text / @file / voice; streaming replies with live tool calls</a:t>
+            </a:r>
+          </a:p>
+          <a:p>
+            <a:pPr>
+              <a:spcBef>
+                <a:spcPts val="800"/>
+              </a:spcBef>
+              <a:defRPr sz="1800">
+                <a:solidFill>
+                  <a:srgbClr val="F1F5F9"/>
+                </a:solidFill>
+              </a:defRPr>
+            </a:pPr>
+            <a:r>
+              <a:t>Guide: approve/reject, edit &amp; resend, fork, Autopilot</a:t>
+            </a:r>
+          </a:p>
+          <a:p>
+            <a:pPr>
+              <a:spcBef>
+                <a:spcPts val="800"/>
+              </a:spcBef>
+              <a:defRPr sz="1800">
+                <a:solidFill>
+                  <a:srgbClr val="F1F5F9"/>
+                </a:solidFill>
+              </a:defRPr>
+            </a:pPr>
+            <a:r>
+              <a:t>Each tab = independent session sharing long-term memory</a:t>
+            </a:r>
+          </a:p>
+          <a:p>
+            <a:pPr>
+              <a:spcBef>
+                <a:spcPts val="800"/>
+              </a:spcBef>
+              <a:defRPr sz="1800">
+                <a:solidFill>
+                  <a:srgbClr val="F1F5F9"/>
+                </a:solidFill>
+              </a:defRPr>
+            </a:pPr>
+          </a:p>
+          <a:p>
+            <a:pPr>
+              <a:spcBef>
+                <a:spcPts val="800"/>
+              </a:spcBef>
+              <a:defRPr sz="1800">
+                <a:solidFill>
+                  <a:srgbClr val="F1F5F9"/>
+                </a:solidFill>
+              </a:defRPr>
+            </a:pPr>
+            <a:r>
+              <a:t>@ file picker; drag/paste image (vision); mic STT; Piper TTS</a:t>
+            </a:r>
+          </a:p>
+          <a:p>
+            <a:pPr>
+              <a:spcBef>
+                <a:spcPts val="800"/>
+              </a:spcBef>
+              <a:defRPr sz="1800">
+                <a:solidFill>
+                  <a:srgbClr val="F1F5F9"/>
+                </a:solidFill>
+              </a:defRPr>
+            </a:pPr>
+            <a:r>
+              <a:t>Prompt optimizer (Cmd+Shift+Enter); incognito; switch models;</a:t>
+            </a:r>
+          </a:p>
+          <a:p>
+            <a:pPr>
+              <a:spcBef>
+                <a:spcPts val="800"/>
+              </a:spcBef>
+              <a:defRPr sz="1800">
+                <a:solidFill>
+                  <a:srgbClr val="F1F5F9"/>
+                </a:solidFill>
+              </a:defRPr>
+            </a:pPr>
+            <a:r>
+              <a:t>reasoning effort per message</a:t>
+            </a:r>
+          </a:p>
+          <a:p>
+            <a:pPr>
+              <a:spcBef>
+                <a:spcPts val="800"/>
+              </a:spcBef>
+              <a:defRPr sz="1800">
+                <a:solidFill>
+                  <a:srgbClr val="F1F5F9"/>
+                </a:solidFill>
+              </a:defRPr>
+            </a:pPr>
+            <a:r>
+              <a:t>Leaves: Sessions, Message controls, Optimizer, Voice, Widgets</a:t>
             </a:r>
           </a:p>
         </p:txBody>
@@ -6978,7 +6842,7 @@
     <p:bg>
       <p:bgPr>
         <a:solidFill>
-          <a:srgbClr val="1E293B"/>
+          <a:srgbClr val="0F172A"/>
         </a:solidFill>
         <a:effectLst/>
       </p:bgPr>
@@ -6998,8 +6862,8 @@
         </p:nvSpPr>
         <p:spPr>
           <a:xfrm>
-            <a:off x="914400" y="2743200"/>
-            <a:ext cx="7315200" cy="914400"/>
+            <a:off x="457200" y="365760"/>
+            <a:ext cx="6858000" cy="548640"/>
           </a:xfrm>
           <a:prstGeom prst="rect">
             <a:avLst/>
@@ -7012,15 +6876,178 @@
           </a:bodyPr>
           <a:lstStyle/>
           <a:p>
-            <a:pPr algn="ctr">
-              <a:defRPr sz="4400" b="1">
+            <a:pPr>
+              <a:defRPr sz="3200" b="1">
                 <a:solidFill>
                   <a:srgbClr val="2563EB"/>
                 </a:solidFill>
               </a:defRPr>
             </a:pPr>
             <a:r>
-              <a:t>Part 5: Getting Started</a:t>
+              <a:t>Agent Capabilities (Customization Hub)</a:t>
+            </a:r>
+          </a:p>
+        </p:txBody>
+      </p:sp>
+      <p:sp>
+        <p:nvSpPr>
+          <p:cNvPr id="3" name="TextBox 2"/>
+          <p:cNvSpPr txBox="1"/>
+          <p:nvPr/>
+        </p:nvSpPr>
+        <p:spPr>
+          <a:xfrm>
+            <a:off x="7498079" y="411480"/>
+            <a:ext cx="1371600" cy="365760"/>
+          </a:xfrm>
+          <a:prstGeom prst="rect">
+            <a:avLst/>
+          </a:prstGeom>
+          <a:noFill/>
+        </p:spPr>
+        <p:txBody>
+          <a:bodyPr wrap="none">
+            <a:spAutoFit/>
+          </a:bodyPr>
+          <a:lstStyle/>
+          <a:p>
+            <a:pPr>
+              <a:defRPr sz="1100" b="1">
+                <a:solidFill>
+                  <a:srgbClr val="10B981"/>
+                </a:solidFill>
+              </a:defRPr>
+            </a:pPr>
+            <a:r>
+              <a:t>✓ Verified</a:t>
+            </a:r>
+          </a:p>
+        </p:txBody>
+      </p:sp>
+      <p:sp>
+        <p:nvSpPr>
+          <p:cNvPr id="4" name="TextBox 3"/>
+          <p:cNvSpPr txBox="1"/>
+          <p:nvPr/>
+        </p:nvSpPr>
+        <p:spPr>
+          <a:xfrm>
+            <a:off x="640080" y="1188720"/>
+            <a:ext cx="7863840" cy="5212080"/>
+          </a:xfrm>
+          <a:prstGeom prst="rect">
+            <a:avLst/>
+          </a:prstGeom>
+          <a:noFill/>
+        </p:spPr>
+        <p:txBody>
+          <a:bodyPr wrap="square">
+            <a:spAutoFit/>
+          </a:bodyPr>
+          <a:lstStyle/>
+          <a:p>
+            <a:pPr>
+              <a:spcBef>
+                <a:spcPts val="800"/>
+              </a:spcBef>
+              <a:defRPr sz="1800">
+                <a:solidFill>
+                  <a:srgbClr val="F1F5F9"/>
+                </a:solidFill>
+              </a:defRPr>
+            </a:pPr>
+            <a:r>
+              <a:t>Agents - model/prompt/tools/MCP server config</a:t>
+            </a:r>
+          </a:p>
+          <a:p>
+            <a:pPr>
+              <a:spcBef>
+                <a:spcPts val="800"/>
+              </a:spcBef>
+              <a:defRPr sz="1800">
+                <a:solidFill>
+                  <a:srgbClr val="F1F5F9"/>
+                </a:solidFill>
+              </a:defRPr>
+            </a:pPr>
+            <a:r>
+              <a:t>Agent Templates - prebuilt configs to customize</a:t>
+            </a:r>
+          </a:p>
+          <a:p>
+            <a:pPr>
+              <a:spcBef>
+                <a:spcPts val="800"/>
+              </a:spcBef>
+              <a:defRPr sz="1800">
+                <a:solidFill>
+                  <a:srgbClr val="F1F5F9"/>
+                </a:solidFill>
+              </a:defRPr>
+            </a:pPr>
+            <a:r>
+              <a:t>Integrations (MCP) - add external tools/services</a:t>
+            </a:r>
+          </a:p>
+          <a:p>
+            <a:pPr>
+              <a:spcBef>
+                <a:spcPts val="800"/>
+              </a:spcBef>
+              <a:defRPr sz="1800">
+                <a:solidFill>
+                  <a:srgbClr val="F1F5F9"/>
+                </a:solidFill>
+              </a:defRPr>
+            </a:pPr>
+            <a:r>
+              <a:t>Skills - on-demand knowledge files teaching workflows</a:t>
+            </a:r>
+          </a:p>
+          <a:p>
+            <a:pPr>
+              <a:spcBef>
+                <a:spcPts val="800"/>
+              </a:spcBef>
+              <a:defRPr sz="1800">
+                <a:solidFill>
+                  <a:srgbClr val="F1F5F9"/>
+                </a:solidFill>
+              </a:defRPr>
+            </a:pPr>
+            <a:r>
+              <a:t>Steering - workspace-level rules every session inherits</a:t>
+            </a:r>
+          </a:p>
+          <a:p>
+            <a:pPr>
+              <a:spcBef>
+                <a:spcPts val="800"/>
+              </a:spcBef>
+              <a:defRPr sz="1800">
+                <a:solidFill>
+                  <a:srgbClr val="F1F5F9"/>
+                </a:solidFill>
+              </a:defRPr>
+            </a:pPr>
+            <a:r>
+              <a:t>Hooks - automate reactions to events (scripts/context)</a:t>
+            </a:r>
+          </a:p>
+          <a:p>
+            <a:pPr>
+              <a:spcBef>
+                <a:spcPts val="800"/>
+              </a:spcBef>
+              <a:defRPr sz="1800">
+                <a:solidFill>
+                  <a:srgbClr val="F1F5F9"/>
+                </a:solidFill>
+              </a:defRPr>
+            </a:pPr>
+            <a:r>
+              <a:t>Prompts - customize the system prompts shaping behavior</a:t>
             </a:r>
           </a:p>
         </p:txBody>
@@ -7060,7 +7087,7 @@
         <p:spPr>
           <a:xfrm>
             <a:off x="457200" y="365760"/>
-            <a:ext cx="8229600" cy="548640"/>
+            <a:ext cx="6858000" cy="548640"/>
           </a:xfrm>
           <a:prstGeom prst="rect">
             <a:avLst/>
@@ -7081,7 +7108,7 @@
               </a:defRPr>
             </a:pPr>
             <a:r>
-              <a:t>Installation</a:t>
+              <a:t>Configuration</a:t>
             </a:r>
           </a:p>
         </p:txBody>
@@ -7094,8 +7121,8 @@
         </p:nvSpPr>
         <p:spPr>
           <a:xfrm>
-            <a:off x="457200" y="1188720"/>
-            <a:ext cx="4114800" cy="5212080"/>
+            <a:off x="7498079" y="411480"/>
+            <a:ext cx="1371600" cy="365760"/>
           </a:xfrm>
           <a:prstGeom prst="rect">
             <a:avLst/>
@@ -7103,125 +7130,20 @@
           <a:noFill/>
         </p:spPr>
         <p:txBody>
-          <a:bodyPr wrap="square">
+          <a:bodyPr wrap="none">
             <a:spAutoFit/>
           </a:bodyPr>
           <a:lstStyle/>
           <a:p>
             <a:pPr>
-              <a:spcBef>
-                <a:spcPts val="600"/>
-              </a:spcBef>
-              <a:defRPr sz="1600">
-                <a:solidFill>
-                  <a:srgbClr val="F1F5F9"/>
-                </a:solidFill>
-              </a:defRPr>
-            </a:pPr>
-            <a:r>
-              <a:t>Option 1: Desktop App (Recommended)</a:t>
-            </a:r>
-          </a:p>
-          <a:p>
-            <a:pPr>
-              <a:spcBef>
-                <a:spcPts val="600"/>
-              </a:spcBef>
-              <a:defRPr sz="1600">
-                <a:solidFill>
-                  <a:srgbClr val="F1F5F9"/>
-                </a:solidFill>
-              </a:defRPr>
-            </a:pPr>
-            <a:r>
-              <a:t>1. Download (.dmg or .AppImage)</a:t>
-            </a:r>
-          </a:p>
-          <a:p>
-            <a:pPr>
-              <a:spcBef>
-                <a:spcPts val="600"/>
-              </a:spcBef>
-              <a:defRPr sz="1600">
-                <a:solidFill>
-                  <a:srgbClr val="F1F5F9"/>
-                </a:solidFill>
-              </a:defRPr>
-            </a:pPr>
-            <a:r>
-              <a:t>2. Launch (auto-starts Gateway)</a:t>
-            </a:r>
-          </a:p>
-          <a:p>
-            <a:pPr>
-              <a:spcBef>
-                <a:spcPts val="600"/>
-              </a:spcBef>
-              <a:defRPr sz="1600">
-                <a:solidFill>
-                  <a:srgbClr val="F1F5F9"/>
-                </a:solidFill>
-              </a:defRPr>
-            </a:pPr>
-            <a:r>
-              <a:t>3. Authenticate (device-code sign-in)</a:t>
-            </a:r>
-          </a:p>
-          <a:p>
-            <a:pPr>
-              <a:spcBef>
-                <a:spcPts val="600"/>
-              </a:spcBef>
-              <a:defRPr sz="1600">
-                <a:solidFill>
-                  <a:srgbClr val="F1F5F9"/>
-                </a:solidFill>
-              </a:defRPr>
-            </a:pPr>
-            <a:r>
-              <a:t>4. Start chatting</a:t>
-            </a:r>
-          </a:p>
-          <a:p>
-            <a:pPr>
-              <a:spcBef>
-                <a:spcPts val="600"/>
-              </a:spcBef>
-              <a:defRPr sz="1600">
-                <a:solidFill>
-                  <a:srgbClr val="F1F5F9"/>
-                </a:solidFill>
-              </a:defRPr>
-            </a:pPr>
-          </a:p>
-          <a:p>
-            <a:pPr>
-              <a:spcBef>
-                <a:spcPts val="600"/>
-              </a:spcBef>
-              <a:defRPr sz="1600">
-                <a:solidFill>
-                  <a:srgbClr val="F1F5F9"/>
-                </a:solidFill>
-              </a:defRPr>
-            </a:pPr>
-            <a:r>
-              <a:t>No AWS CLI needed</a:t>
-            </a:r>
-          </a:p>
-          <a:p>
-            <a:pPr>
-              <a:spcBef>
-                <a:spcPts val="600"/>
-              </a:spcBef>
-              <a:defRPr sz="1600">
-                <a:solidFill>
-                  <a:srgbClr val="F1F5F9"/>
-                </a:solidFill>
-              </a:defRPr>
-            </a:pPr>
-            <a:r>
-              <a:t>No Bedrock configuration needed</a:t>
+              <a:defRPr sz="1100" b="1">
+                <a:solidFill>
+                  <a:srgbClr val="10B981"/>
+                </a:solidFill>
+              </a:defRPr>
+            </a:pPr>
+            <a:r>
+              <a:t>✓ Verified</a:t>
             </a:r>
           </a:p>
         </p:txBody>
@@ -7234,8 +7156,8 @@
         </p:nvSpPr>
         <p:spPr>
           <a:xfrm>
-            <a:off x="4754880" y="1188720"/>
-            <a:ext cx="4114800" cy="5212080"/>
+            <a:off x="640080" y="1188720"/>
+            <a:ext cx="7863840" cy="5212080"/>
           </a:xfrm>
           <a:prstGeom prst="rect">
             <a:avLst/>
@@ -7250,115 +7172,118 @@
           <a:p>
             <a:pPr>
               <a:spcBef>
-                <a:spcPts val="600"/>
-              </a:spcBef>
-              <a:defRPr sz="1600">
-                <a:solidFill>
-                  <a:srgbClr val="F1F5F9"/>
-                </a:solidFill>
-              </a:defRPr>
-            </a:pPr>
-            <a:r>
-              <a:t>Option 2: CLI Install</a:t>
-            </a:r>
-          </a:p>
-          <a:p>
-            <a:pPr>
-              <a:spcBef>
-                <a:spcPts val="600"/>
-              </a:spcBef>
-              <a:defRPr sz="1600">
-                <a:solidFill>
-                  <a:srgbClr val="F1F5F9"/>
-                </a:solidFill>
-              </a:defRPr>
-            </a:pPr>
-            <a:r>
-              <a:t>curl -fsSL https://download.crew.kiro.dev/cli.sh | sh</a:t>
-            </a:r>
-          </a:p>
-          <a:p>
-            <a:pPr>
-              <a:spcBef>
-                <a:spcPts val="600"/>
-              </a:spcBef>
-              <a:defRPr sz="1600">
-                <a:solidFill>
-                  <a:srgbClr val="F1F5F9"/>
-                </a:solidFill>
-              </a:defRPr>
-            </a:pPr>
-          </a:p>
-          <a:p>
-            <a:pPr>
-              <a:spcBef>
-                <a:spcPts val="600"/>
-              </a:spcBef>
-              <a:defRPr sz="1600">
-                <a:solidFill>
-                  <a:srgbClr val="F1F5F9"/>
-                </a:solidFill>
-              </a:defRPr>
-            </a:pPr>
-            <a:r>
-              <a:t>kirocrew setup</a:t>
-            </a:r>
-          </a:p>
-          <a:p>
-            <a:pPr>
-              <a:spcBef>
-                <a:spcPts val="600"/>
-              </a:spcBef>
-              <a:defRPr sz="1600">
-                <a:solidFill>
-                  <a:srgbClr val="F1F5F9"/>
-                </a:solidFill>
-              </a:defRPr>
-            </a:pPr>
-            <a:r>
-              <a:t>kirocrew doctor</a:t>
-            </a:r>
-          </a:p>
-          <a:p>
-            <a:pPr>
-              <a:spcBef>
-                <a:spcPts val="600"/>
-              </a:spcBef>
-              <a:defRPr sz="1600">
-                <a:solidFill>
-                  <a:srgbClr val="F1F5F9"/>
-                </a:solidFill>
-              </a:defRPr>
-            </a:pPr>
-            <a:r>
-              <a:t>kirocrew gateway</a:t>
-            </a:r>
-          </a:p>
-          <a:p>
-            <a:pPr>
-              <a:spcBef>
-                <a:spcPts val="600"/>
-              </a:spcBef>
-              <a:defRPr sz="1600">
-                <a:solidFill>
-                  <a:srgbClr val="F1F5F9"/>
-                </a:solidFill>
-              </a:defRPr>
-            </a:pPr>
-          </a:p>
-          <a:p>
-            <a:pPr>
-              <a:spcBef>
-                <a:spcPts val="600"/>
-              </a:spcBef>
-              <a:defRPr sz="1600">
-                <a:solidFill>
-                  <a:srgbClr val="F1F5F9"/>
-                </a:solidFill>
-              </a:defRPr>
-            </a:pPr>
-            <a:r>
-              <a:t>open http://localhost:5476</a:t>
+                <a:spcPts val="800"/>
+              </a:spcBef>
+              <a:defRPr sz="1800">
+                <a:solidFill>
+                  <a:srgbClr val="F1F5F9"/>
+                </a:solidFill>
+              </a:defRPr>
+            </a:pPr>
+            <a:r>
+              <a:t>Settings panel: Overview/Imports/Chat/Display/Voice/</a:t>
+            </a:r>
+          </a:p>
+          <a:p>
+            <a:pPr>
+              <a:spcBef>
+                <a:spcPts val="800"/>
+              </a:spcBef>
+              <a:defRPr sz="1800">
+                <a:solidFill>
+                  <a:srgbClr val="F1F5F9"/>
+                </a:solidFill>
+              </a:defRPr>
+            </a:pPr>
+            <a:r>
+              <a:t>Notifications/Shortcuts/Skills/Channels/Browser/Computer Use/</a:t>
+            </a:r>
+          </a:p>
+          <a:p>
+            <a:pPr>
+              <a:spcBef>
+                <a:spcPts val="800"/>
+              </a:spcBef>
+              <a:defRPr sz="1800">
+                <a:solidFill>
+                  <a:srgbClr val="F1F5F9"/>
+                </a:solidFill>
+              </a:defRPr>
+            </a:pPr>
+            <a:r>
+              <a:t>Instances/Security/Developer/About - changes apply immediately</a:t>
+            </a:r>
+          </a:p>
+          <a:p>
+            <a:pPr>
+              <a:spcBef>
+                <a:spcPts val="800"/>
+              </a:spcBef>
+              <a:defRPr sz="1800">
+                <a:solidFill>
+                  <a:srgbClr val="F1F5F9"/>
+                </a:solidFill>
+              </a:defRPr>
+            </a:pPr>
+          </a:p>
+          <a:p>
+            <a:pPr>
+              <a:spcBef>
+                <a:spcPts val="800"/>
+              </a:spcBef>
+              <a:defRPr sz="1800">
+                <a:solidFill>
+                  <a:srgbClr val="F1F5F9"/>
+                </a:solidFill>
+              </a:defRPr>
+            </a:pPr>
+            <a:r>
+              <a:t>kirocrew config get|set|edit (set auto-restarts pool)</a:t>
+            </a:r>
+          </a:p>
+          <a:p>
+            <a:pPr>
+              <a:spcBef>
+                <a:spcPts val="800"/>
+              </a:spcBef>
+              <a:defRPr sz="1800">
+                <a:solidFill>
+                  <a:srgbClr val="F1F5F9"/>
+                </a:solidFill>
+              </a:defRPr>
+            </a:pPr>
+            <a:r>
+              <a:t>config.json (JSON, missing keys -&gt; defaults); 14 themes</a:t>
+            </a:r>
+          </a:p>
+          <a:p>
+            <a:pPr>
+              <a:spcBef>
+                <a:spcPts val="800"/>
+              </a:spcBef>
+              <a:defRPr sz="1800">
+                <a:solidFill>
+                  <a:srgbClr val="F1F5F9"/>
+                </a:solidFill>
+              </a:defRPr>
+            </a:pPr>
+            <a:r>
+              <a:t>Channel creds in ~/.kiro/crew/.env (mode 600)</a:t>
+            </a:r>
+          </a:p>
+          <a:p>
+            <a:pPr>
+              <a:spcBef>
+                <a:spcPts val="800"/>
+              </a:spcBef>
+              <a:defRPr sz="1800">
+                <a:solidFill>
+                  <a:srgbClr val="F1F5F9"/>
+                </a:solidFill>
+              </a:defRPr>
+            </a:pPr>
+            <a:r>
+              <a:t>Env: KIROCREW_HOME (~/.kiro/crew), KIROCREW_PORT (5476)</a:t>
             </a:r>
           </a:p>
         </p:txBody>
@@ -7419,7 +7344,7 @@
               </a:defRPr>
             </a:pPr>
             <a:r>
-              <a:t>First Steps</a:t>
+              <a:t>Multi-instance</a:t>
             </a:r>
           </a:p>
         </p:txBody>
@@ -7492,115 +7417,109 @@
               </a:defRPr>
             </a:pPr>
             <a:r>
-              <a:t>1. Chat - Type and ask anything in dashboard</a:t>
-            </a:r>
-          </a:p>
-          <a:p>
-            <a:pPr>
-              <a:spcBef>
-                <a:spcPts val="800"/>
-              </a:spcBef>
-              <a:defRPr sz="1800">
-                <a:solidFill>
-                  <a:srgbClr val="F1F5F9"/>
-                </a:solidFill>
-              </a:defRPr>
-            </a:pPr>
-          </a:p>
-          <a:p>
-            <a:pPr>
-              <a:spcBef>
-                <a:spcPts val="800"/>
-              </a:spcBef>
-              <a:defRPr sz="1800">
-                <a:solidFill>
-                  <a:srgbClr val="F1F5F9"/>
-                </a:solidFill>
-              </a:defRPr>
-            </a:pPr>
-            <a:r>
-              <a:t>2. Schedule a job - 'Every weekday at 9, summarize my open work'</a:t>
-            </a:r>
-          </a:p>
-          <a:p>
-            <a:pPr>
-              <a:spcBef>
-                <a:spcPts val="800"/>
-              </a:spcBef>
-              <a:defRPr sz="1800">
-                <a:solidFill>
-                  <a:srgbClr val="F1F5F9"/>
-                </a:solidFill>
-              </a:defRPr>
-            </a:pPr>
-          </a:p>
-          <a:p>
-            <a:pPr>
-              <a:spcBef>
-                <a:spcPts val="800"/>
-              </a:spcBef>
-              <a:defRPr sz="1800">
-                <a:solidFill>
-                  <a:srgbClr val="F1F5F9"/>
-                </a:solidFill>
-              </a:defRPr>
-            </a:pPr>
-            <a:r>
-              <a:t>3. Teach a preference - 'Always use pytest over unittest'</a:t>
-            </a:r>
-          </a:p>
-          <a:p>
-            <a:pPr>
-              <a:spcBef>
-                <a:spcPts val="800"/>
-              </a:spcBef>
-              <a:defRPr sz="1800">
-                <a:solidFill>
-                  <a:srgbClr val="F1F5F9"/>
-                </a:solidFill>
-              </a:defRPr>
-            </a:pPr>
-          </a:p>
-          <a:p>
-            <a:pPr>
-              <a:spcBef>
-                <a:spcPts val="800"/>
-              </a:spcBef>
-              <a:defRPr sz="1800">
-                <a:solidFill>
-                  <a:srgbClr val="F1F5F9"/>
-                </a:solidFill>
-              </a:defRPr>
-            </a:pPr>
-            <a:r>
-              <a:t>4. Run autonomous task - Projects panel → describe spec → Run</a:t>
-            </a:r>
-          </a:p>
-          <a:p>
-            <a:pPr>
-              <a:spcBef>
-                <a:spcPts val="800"/>
-              </a:spcBef>
-              <a:defRPr sz="1800">
-                <a:solidFill>
-                  <a:srgbClr val="F1F5F9"/>
-                </a:solidFill>
-              </a:defRPr>
-            </a:pPr>
-          </a:p>
-          <a:p>
-            <a:pPr>
-              <a:spcBef>
-                <a:spcPts val="800"/>
-              </a:spcBef>
-              <a:defRPr sz="1800">
-                <a:solidFill>
-                  <a:srgbClr val="F1F5F9"/>
-                </a:solidFill>
-              </a:defRPr>
-            </a:pPr>
-            <a:r>
-              <a:t>5. Delegate parallel work - 'Research these 3 options in parallel'</a:t>
+              <a:t>Drive multiple remote Crew hosts from one hub via SSH tunnels</a:t>
+            </a:r>
+          </a:p>
+          <a:p>
+            <a:pPr>
+              <a:spcBef>
+                <a:spcPts val="800"/>
+              </a:spcBef>
+              <a:defRPr sz="1800">
+                <a:solidFill>
+                  <a:srgbClr val="F1F5F9"/>
+                </a:solidFill>
+              </a:defRPr>
+            </a:pPr>
+            <a:r>
+              <a:t>Opt-in, off by default:</a:t>
+            </a:r>
+          </a:p>
+          <a:p>
+            <a:pPr>
+              <a:spcBef>
+                <a:spcPts val="800"/>
+              </a:spcBef>
+              <a:defRPr sz="1800">
+                <a:solidFill>
+                  <a:srgbClr val="F1F5F9"/>
+                </a:solidFill>
+              </a:defRPr>
+            </a:pPr>
+            <a:r>
+              <a:t>  kirocrew config set instances.enabled true &amp;&amp; kirocrew restart</a:t>
+            </a:r>
+          </a:p>
+          <a:p>
+            <a:pPr>
+              <a:spcBef>
+                <a:spcPts val="800"/>
+              </a:spcBef>
+              <a:defRPr sz="1800">
+                <a:solidFill>
+                  <a:srgbClr val="F1F5F9"/>
+                </a:solidFill>
+              </a:defRPr>
+            </a:pPr>
+          </a:p>
+          <a:p>
+            <a:pPr>
+              <a:spcBef>
+                <a:spcPts val="800"/>
+              </a:spcBef>
+              <a:defRPr sz="1800">
+                <a:solidFill>
+                  <a:srgbClr val="F1F5F9"/>
+                </a:solidFill>
+              </a:defRPr>
+            </a:pPr>
+            <a:r>
+              <a:t>Warm set cap 5 (LRU); health probe 30s; 2-tier self-heal (&lt;=8)</a:t>
+            </a:r>
+          </a:p>
+          <a:p>
+            <a:pPr>
+              <a:spcBef>
+                <a:spcPts val="800"/>
+              </a:spcBef>
+              <a:defRPr sz="1800">
+                <a:solidFill>
+                  <a:srgbClr val="F1F5F9"/>
+                </a:solidFill>
+              </a:defRPr>
+            </a:pPr>
+            <a:r>
+              <a:t>Add: SSH host/alias, remote port 7777, token TTL 20h</a:t>
+            </a:r>
+          </a:p>
+          <a:p>
+            <a:pPr>
+              <a:spcBef>
+                <a:spcPts val="800"/>
+              </a:spcBef>
+              <a:defRPr sz="1800">
+                <a:solidFill>
+                  <a:srgbClr val="F1F5F9"/>
+                </a:solidFill>
+              </a:defRPr>
+            </a:pPr>
+            <a:r>
+              <a:t>Security: deny-by-default, owner-only, loopback forwards,</a:t>
+            </a:r>
+          </a:p>
+          <a:p>
+            <a:pPr>
+              <a:spcBef>
+                <a:spcPts val="800"/>
+              </a:spcBef>
+              <a:defRPr sz="1800">
+                <a:solidFill>
+                  <a:srgbClr val="F1F5F9"/>
+                </a:solidFill>
+              </a:defRPr>
+            </a:pPr>
+            <a:r>
+              <a:t>argv-list ssh (no shell injection), SEL-audited</a:t>
             </a:r>
           </a:p>
         </p:txBody>
@@ -7661,7 +7580,7 @@
               </a:defRPr>
             </a:pPr>
             <a:r>
-              <a:t>Resources</a:t>
+              <a:t>Snapshot &amp; Restore</a:t>
             </a:r>
           </a:p>
         </p:txBody>
@@ -7734,151 +7653,109 @@
               </a:defRPr>
             </a:pPr>
             <a:r>
-              <a:t>Official Documentation:</a:t>
-            </a:r>
-          </a:p>
-          <a:p>
-            <a:pPr>
-              <a:spcBef>
-                <a:spcPts val="800"/>
-              </a:spcBef>
-              <a:defRPr sz="1800">
-                <a:solidFill>
-                  <a:srgbClr val="F1F5F9"/>
-                </a:solidFill>
-              </a:defRPr>
-            </a:pPr>
-            <a:r>
-              <a:t>• kiro.dev/docs/crew/ - Main docs</a:t>
-            </a:r>
-          </a:p>
-          <a:p>
-            <a:pPr>
-              <a:spcBef>
-                <a:spcPts val="800"/>
-              </a:spcBef>
-              <a:defRPr sz="1800">
-                <a:solidFill>
-                  <a:srgbClr val="F1F5F9"/>
-                </a:solidFill>
-              </a:defRPr>
-            </a:pPr>
-            <a:r>
-              <a:t>• kiro.dev/docs/crew/installation/ - Setup</a:t>
-            </a:r>
-          </a:p>
-          <a:p>
-            <a:pPr>
-              <a:spcBef>
-                <a:spcPts val="800"/>
-              </a:spcBef>
-              <a:defRPr sz="1800">
-                <a:solidFill>
-                  <a:srgbClr val="F1F5F9"/>
-                </a:solidFill>
-              </a:defRPr>
-            </a:pPr>
-            <a:r>
-              <a:t>• kiro.dev/docs/crew/features/ - Features</a:t>
-            </a:r>
-          </a:p>
-          <a:p>
-            <a:pPr>
-              <a:spcBef>
-                <a:spcPts val="800"/>
-              </a:spcBef>
-              <a:defRPr sz="1800">
-                <a:solidFill>
-                  <a:srgbClr val="F1F5F9"/>
-                </a:solidFill>
-              </a:defRPr>
-            </a:pPr>
-          </a:p>
-          <a:p>
-            <a:pPr>
-              <a:spcBef>
-                <a:spcPts val="800"/>
-              </a:spcBef>
-              <a:defRPr sz="1800">
-                <a:solidFill>
-                  <a:srgbClr val="F1F5F9"/>
-                </a:solidFill>
-              </a:defRPr>
-            </a:pPr>
-            <a:r>
-              <a:t>Specific Features:</a:t>
-            </a:r>
-          </a:p>
-          <a:p>
-            <a:pPr>
-              <a:spcBef>
-                <a:spcPts val="800"/>
-              </a:spcBef>
-              <a:defRPr sz="1800">
-                <a:solidFill>
-                  <a:srgbClr val="F1F5F9"/>
-                </a:solidFill>
-              </a:defRPr>
-            </a:pPr>
-            <a:r>
-              <a:t>• kiro.dev/docs/crew/features/memory/ - Memory</a:t>
-            </a:r>
-          </a:p>
-          <a:p>
-            <a:pPr>
-              <a:spcBef>
-                <a:spcPts val="800"/>
-              </a:spcBef>
-              <a:defRPr sz="1800">
-                <a:solidFill>
-                  <a:srgbClr val="F1F5F9"/>
-                </a:solidFill>
-              </a:defRPr>
-            </a:pPr>
-            <a:r>
-              <a:t>• kiro.dev/docs/crew/features/subagents/ - Subagents</a:t>
-            </a:r>
-          </a:p>
-          <a:p>
-            <a:pPr>
-              <a:spcBef>
-                <a:spcPts val="800"/>
-              </a:spcBef>
-              <a:defRPr sz="1800">
-                <a:solidFill>
-                  <a:srgbClr val="F1F5F9"/>
-                </a:solidFill>
-              </a:defRPr>
-            </a:pPr>
-            <a:r>
-              <a:t>• kiro.dev/docs/crew/features/cron/ - Scheduling</a:t>
-            </a:r>
-          </a:p>
-          <a:p>
-            <a:pPr>
-              <a:spcBef>
-                <a:spcPts val="800"/>
-              </a:spcBef>
-              <a:defRPr sz="1800">
-                <a:solidFill>
-                  <a:srgbClr val="F1F5F9"/>
-                </a:solidFill>
-              </a:defRPr>
-            </a:pPr>
-          </a:p>
-          <a:p>
-            <a:pPr>
-              <a:spcBef>
-                <a:spcPts val="800"/>
-              </a:spcBef>
-              <a:defRPr sz="1800">
-                <a:solidFill>
-                  <a:srgbClr val="F1F5F9"/>
-                </a:solidFill>
-              </a:defRPr>
-            </a:pPr>
-            <a:r>
-              <a:t>Pricing: kiro.dev/pricing/</a:t>
+              <a:t>kirocrew snapshot [dir] --keep N | --list</a:t>
+            </a:r>
+          </a:p>
+          <a:p>
+            <a:pPr>
+              <a:spcBef>
+                <a:spcPts val="800"/>
+              </a:spcBef>
+              <a:defRPr sz="1800">
+                <a:solidFill>
+                  <a:srgbClr val="F1F5F9"/>
+                </a:solidFill>
+              </a:defRPr>
+            </a:pPr>
+            <a:r>
+              <a:t>kirocrew restore snap.tar.gz [--components ...] [--dry-run]</a:t>
+            </a:r>
+          </a:p>
+          <a:p>
+            <a:pPr>
+              <a:spcBef>
+                <a:spcPts val="800"/>
+              </a:spcBef>
+              <a:defRPr sz="1800">
+                <a:solidFill>
+                  <a:srgbClr val="F1F5F9"/>
+                </a:solidFill>
+              </a:defRPr>
+            </a:pPr>
+          </a:p>
+          <a:p>
+            <a:pPr>
+              <a:spcBef>
+                <a:spcPts val="800"/>
+              </a:spcBef>
+              <a:defRPr sz="1800">
+                <a:solidFill>
+                  <a:srgbClr val="F1F5F9"/>
+                </a:solidFill>
+              </a:defRPr>
+            </a:pPr>
+            <a:r>
+              <a:t>Includes: Memory, Workspace, Crons, Config, Skills, Notifications</a:t>
+            </a:r>
+          </a:p>
+          <a:p>
+            <a:pPr>
+              <a:spcBef>
+                <a:spcPts val="800"/>
+              </a:spcBef>
+              <a:defRPr sz="1800">
+                <a:solidFill>
+                  <a:srgbClr val="F1F5F9"/>
+                </a:solidFill>
+              </a:defRPr>
+            </a:pPr>
+            <a:r>
+              <a:t>Restore modes: replace (empty) vs merge (existing) - auto-detected</a:t>
+            </a:r>
+          </a:p>
+          <a:p>
+            <a:pPr>
+              <a:spcBef>
+                <a:spcPts val="800"/>
+              </a:spcBef>
+              <a:defRPr sz="1800">
+                <a:solidFill>
+                  <a:srgbClr val="F1F5F9"/>
+                </a:solidFill>
+              </a:defRPr>
+            </a:pPr>
+            <a:r>
+              <a:t>Daily auto snapshot 08:00 UTC, keeps 7</a:t>
+            </a:r>
+          </a:p>
+          <a:p>
+            <a:pPr>
+              <a:spcBef>
+                <a:spcPts val="800"/>
+              </a:spcBef>
+              <a:defRPr sz="1800">
+                <a:solidFill>
+                  <a:srgbClr val="F1F5F9"/>
+                </a:solidFill>
+              </a:defRPr>
+            </a:pPr>
+            <a:r>
+              <a:t>Contains security keys - treat like credentials</a:t>
+            </a:r>
+          </a:p>
+          <a:p>
+            <a:pPr>
+              <a:spcBef>
+                <a:spcPts val="800"/>
+              </a:spcBef>
+              <a:defRPr sz="1800">
+                <a:solidFill>
+                  <a:srgbClr val="F1F5F9"/>
+                </a:solidFill>
+              </a:defRPr>
+            </a:pPr>
+            <a:r>
+              <a:t>NOT covered: kiro-cli/AWS creds, channel defs, app code</a:t>
             </a:r>
           </a:p>
         </p:txBody>
@@ -7917,8 +7794,8 @@
         </p:nvSpPr>
         <p:spPr>
           <a:xfrm>
-            <a:off x="914400" y="2286000"/>
-            <a:ext cx="7315200" cy="914400"/>
+            <a:off x="457200" y="365760"/>
+            <a:ext cx="6858000" cy="548640"/>
           </a:xfrm>
           <a:prstGeom prst="rect">
             <a:avLst/>
@@ -7931,15 +7808,15 @@
           </a:bodyPr>
           <a:lstStyle/>
           <a:p>
-            <a:pPr algn="ctr">
-              <a:defRPr sz="5400" b="1">
-                <a:solidFill>
-                  <a:srgbClr val="F1F5F9"/>
-                </a:solidFill>
-              </a:defRPr>
-            </a:pPr>
-            <a:r>
-              <a:t>Questions?</a:t>
+            <a:pPr>
+              <a:defRPr sz="3200" b="1">
+                <a:solidFill>
+                  <a:srgbClr val="2563EB"/>
+                </a:solidFill>
+              </a:defRPr>
+            </a:pPr>
+            <a:r>
+              <a:t>Apps / App Kit</a:t>
             </a:r>
           </a:p>
         </p:txBody>
@@ -7952,8 +7829,8 @@
         </p:nvSpPr>
         <p:spPr>
           <a:xfrm>
-            <a:off x="914400" y="3383280"/>
-            <a:ext cx="7315200" cy="731520"/>
+            <a:off x="7498079" y="411480"/>
+            <a:ext cx="1371600" cy="365760"/>
           </a:xfrm>
           <a:prstGeom prst="rect">
             <a:avLst/>
@@ -7966,15 +7843,15 @@
           </a:bodyPr>
           <a:lstStyle/>
           <a:p>
-            <a:pPr algn="ctr">
-              <a:defRPr sz="2400">
-                <a:solidFill>
-                  <a:srgbClr val="94A3B8"/>
-                </a:solidFill>
-              </a:defRPr>
-            </a:pPr>
-            <a:r>
-              <a:t>Thank you for your attention</a:t>
+            <a:pPr>
+              <a:defRPr sz="1100" b="1">
+                <a:solidFill>
+                  <a:srgbClr val="10B981"/>
+                </a:solidFill>
+              </a:defRPr>
+            </a:pPr>
+            <a:r>
+              <a:t>✓ Verified</a:t>
             </a:r>
           </a:p>
         </p:txBody>
@@ -7987,8 +7864,8 @@
         </p:nvSpPr>
         <p:spPr>
           <a:xfrm>
-            <a:off x="914400" y="5943600"/>
-            <a:ext cx="7315200" cy="457200"/>
+            <a:off x="640080" y="1188720"/>
+            <a:ext cx="7863840" cy="5212080"/>
           </a:xfrm>
           <a:prstGeom prst="rect">
             <a:avLst/>
@@ -7996,20 +7873,125 @@
           <a:noFill/>
         </p:spPr>
         <p:txBody>
-          <a:bodyPr wrap="none">
+          <a:bodyPr wrap="square">
             <a:spAutoFit/>
           </a:bodyPr>
           <a:lstStyle/>
           <a:p>
-            <a:pPr algn="ctr">
-              <a:defRPr sz="1400">
-                <a:solidFill>
-                  <a:srgbClr val="06B6D4"/>
-                </a:solidFill>
-              </a:defRPr>
-            </a:pPr>
-            <a:r>
-              <a:t>✓ All facts sourced from official docs | Verified 2026-08-31</a:t>
+            <a:pPr>
+              <a:spcBef>
+                <a:spcPts val="800"/>
+              </a:spcBef>
+              <a:defRPr sz="1800">
+                <a:solidFill>
+                  <a:srgbClr val="F1F5F9"/>
+                </a:solidFill>
+              </a:defRPr>
+            </a:pPr>
+            <a:r>
+              <a:t>Apps contribute: agents, skills, MCP servers, crons, UI pages,</a:t>
+            </a:r>
+          </a:p>
+          <a:p>
+            <a:pPr>
+              <a:spcBef>
+                <a:spcPts val="800"/>
+              </a:spcBef>
+              <a:defRPr sz="1800">
+                <a:solidFill>
+                  <a:srgbClr val="F1F5F9"/>
+                </a:solidFill>
+              </a:defRPr>
+            </a:pPr>
+            <a:r>
+              <a:t>backend processes, gateway hooks</a:t>
+            </a:r>
+          </a:p>
+          <a:p>
+            <a:pPr>
+              <a:spcBef>
+                <a:spcPts val="800"/>
+              </a:spcBef>
+              <a:defRPr sz="1800">
+                <a:solidFill>
+                  <a:srgbClr val="F1F5F9"/>
+                </a:solidFill>
+              </a:defRPr>
+            </a:pPr>
+            <a:r>
+              <a:t>Third-party apps DISABLED by default (Settings -&gt; Security)</a:t>
+            </a:r>
+          </a:p>
+          <a:p>
+            <a:pPr>
+              <a:spcBef>
+                <a:spcPts val="800"/>
+              </a:spcBef>
+              <a:defRPr sz="1800">
+                <a:solidFill>
+                  <a:srgbClr val="F1F5F9"/>
+                </a:solidFill>
+              </a:defRPr>
+            </a:pPr>
+          </a:p>
+          <a:p>
+            <a:pPr>
+              <a:spcBef>
+                <a:spcPts val="800"/>
+              </a:spcBef>
+              <a:defRPr sz="1800">
+                <a:solidFill>
+                  <a:srgbClr val="F1F5F9"/>
+                </a:solidFill>
+              </a:defRPr>
+            </a:pPr>
+            <a:r>
+              <a:t>Install from App Store (curated registry, PR to add) or</a:t>
+            </a:r>
+          </a:p>
+          <a:p>
+            <a:pPr>
+              <a:spcBef>
+                <a:spcPts val="800"/>
+              </a:spcBef>
+              <a:defRPr sz="1800">
+                <a:solidFill>
+                  <a:srgbClr val="F1F5F9"/>
+                </a:solidFill>
+              </a:defRPr>
+            </a:pPr>
+            <a:r>
+              <a:t>federated external registries (opt-in)</a:t>
+            </a:r>
+          </a:p>
+          <a:p>
+            <a:pPr>
+              <a:spcBef>
+                <a:spcPts val="800"/>
+              </a:spcBef>
+              <a:defRPr sz="1800">
+                <a:solidFill>
+                  <a:srgbClr val="F1F5F9"/>
+                </a:solidFill>
+              </a:defRPr>
+            </a:pPr>
+            <a:r>
+              <a:t>Lifecycle: gateway-managed / app-managed / locked</a:t>
+            </a:r>
+          </a:p>
+          <a:p>
+            <a:pPr>
+              <a:spcBef>
+                <a:spcPts val="800"/>
+              </a:spcBef>
+              <a:defRPr sz="1800">
+                <a:solidFill>
+                  <a:srgbClr val="F1F5F9"/>
+                </a:solidFill>
+              </a:defRPr>
+            </a:pPr>
+            <a:r>
+              <a:t>Dev: kirocrew app dev &lt;name&gt;; only permissions.api enforced</a:t>
             </a:r>
           </a:p>
         </p:txBody>
@@ -8270,6 +8252,2366 @@
 </p:sld>
 </file>
 
+<file path=ppt/slides/slide30.xml><?xml version="1.0" encoding="utf-8"?>
+<p:sld xmlns:a="http://schemas.openxmlformats.org/drawingml/2006/main" xmlns:p="http://schemas.openxmlformats.org/presentationml/2006/main" xmlns:r="http://schemas.openxmlformats.org/officeDocument/2006/relationships">
+  <p:cSld>
+    <p:bg>
+      <p:bgPr>
+        <a:solidFill>
+          <a:srgbClr val="0F172A"/>
+        </a:solidFill>
+        <a:effectLst/>
+      </p:bgPr>
+    </p:bg>
+    <p:spTree>
+      <p:nvGrpSpPr>
+        <p:cNvPr id="1" name=""/>
+        <p:cNvGrpSpPr/>
+        <p:nvPr/>
+      </p:nvGrpSpPr>
+      <p:grpSpPr/>
+      <p:sp>
+        <p:nvSpPr>
+          <p:cNvPr id="2" name="TextBox 1"/>
+          <p:cNvSpPr txBox="1"/>
+          <p:nvPr/>
+        </p:nvSpPr>
+        <p:spPr>
+          <a:xfrm>
+            <a:off x="457200" y="365760"/>
+            <a:ext cx="6858000" cy="548640"/>
+          </a:xfrm>
+          <a:prstGeom prst="rect">
+            <a:avLst/>
+          </a:prstGeom>
+          <a:noFill/>
+        </p:spPr>
+        <p:txBody>
+          <a:bodyPr wrap="none">
+            <a:spAutoFit/>
+          </a:bodyPr>
+          <a:lstStyle/>
+          <a:p>
+            <a:pPr>
+              <a:defRPr sz="3200" b="1">
+                <a:solidFill>
+                  <a:srgbClr val="2563EB"/>
+                </a:solidFill>
+              </a:defRPr>
+            </a:pPr>
+            <a:r>
+              <a:t>Troubleshooting</a:t>
+            </a:r>
+          </a:p>
+        </p:txBody>
+      </p:sp>
+      <p:sp>
+        <p:nvSpPr>
+          <p:cNvPr id="3" name="TextBox 2"/>
+          <p:cNvSpPr txBox="1"/>
+          <p:nvPr/>
+        </p:nvSpPr>
+        <p:spPr>
+          <a:xfrm>
+            <a:off x="7498079" y="411480"/>
+            <a:ext cx="1371600" cy="365760"/>
+          </a:xfrm>
+          <a:prstGeom prst="rect">
+            <a:avLst/>
+          </a:prstGeom>
+          <a:noFill/>
+        </p:spPr>
+        <p:txBody>
+          <a:bodyPr wrap="none">
+            <a:spAutoFit/>
+          </a:bodyPr>
+          <a:lstStyle/>
+          <a:p>
+            <a:pPr>
+              <a:defRPr sz="1100" b="1">
+                <a:solidFill>
+                  <a:srgbClr val="10B981"/>
+                </a:solidFill>
+              </a:defRPr>
+            </a:pPr>
+            <a:r>
+              <a:t>✓ Verified</a:t>
+            </a:r>
+          </a:p>
+        </p:txBody>
+      </p:sp>
+      <p:sp>
+        <p:nvSpPr>
+          <p:cNvPr id="4" name="TextBox 3"/>
+          <p:cNvSpPr txBox="1"/>
+          <p:nvPr/>
+        </p:nvSpPr>
+        <p:spPr>
+          <a:xfrm>
+            <a:off x="640080" y="1188720"/>
+            <a:ext cx="7863840" cy="5212080"/>
+          </a:xfrm>
+          <a:prstGeom prst="rect">
+            <a:avLst/>
+          </a:prstGeom>
+          <a:noFill/>
+        </p:spPr>
+        <p:txBody>
+          <a:bodyPr wrap="square">
+            <a:spAutoFit/>
+          </a:bodyPr>
+          <a:lstStyle/>
+          <a:p>
+            <a:pPr>
+              <a:spcBef>
+                <a:spcPts val="800"/>
+              </a:spcBef>
+              <a:defRPr sz="1800">
+                <a:solidFill>
+                  <a:srgbClr val="F1F5F9"/>
+                </a:solidFill>
+              </a:defRPr>
+            </a:pPr>
+            <a:r>
+              <a:t>Start with a health check:</a:t>
+            </a:r>
+          </a:p>
+          <a:p>
+            <a:pPr>
+              <a:spcBef>
+                <a:spcPts val="800"/>
+              </a:spcBef>
+              <a:defRPr sz="1800">
+                <a:solidFill>
+                  <a:srgbClr val="F1F5F9"/>
+                </a:solidFill>
+              </a:defRPr>
+            </a:pPr>
+            <a:r>
+              <a:t>  kirocrew doctor [--verbose]   /   kirocrew logs -f</a:t>
+            </a:r>
+          </a:p>
+          <a:p>
+            <a:pPr>
+              <a:spcBef>
+                <a:spcPts val="800"/>
+              </a:spcBef>
+              <a:defRPr sz="1800">
+                <a:solidFill>
+                  <a:srgbClr val="F1F5F9"/>
+                </a:solidFill>
+              </a:defRPr>
+            </a:pPr>
+            <a:r>
+              <a:t>Reports: kiro-cli, auth, embeddings, Slack, config, MCP</a:t>
+            </a:r>
+          </a:p>
+          <a:p>
+            <a:pPr>
+              <a:spcBef>
+                <a:spcPts val="800"/>
+              </a:spcBef>
+              <a:defRPr sz="1800">
+                <a:solidFill>
+                  <a:srgbClr val="F1F5F9"/>
+                </a:solidFill>
+              </a:defRPr>
+            </a:pPr>
+          </a:p>
+          <a:p>
+            <a:pPr>
+              <a:spcBef>
+                <a:spcPts val="800"/>
+              </a:spcBef>
+              <a:defRPr sz="1800">
+                <a:solidFill>
+                  <a:srgbClr val="F1F5F9"/>
+                </a:solidFill>
+              </a:defRPr>
+            </a:pPr>
+            <a:r>
+              <a:t>Categories: install/setup, agent (AcpTimeoutError/</a:t>
+            </a:r>
+          </a:p>
+          <a:p>
+            <a:pPr>
+              <a:spcBef>
+                <a:spcPts val="800"/>
+              </a:spcBef>
+              <a:defRPr sz="1800">
+                <a:solidFill>
+                  <a:srgbClr val="F1F5F9"/>
+                </a:solidFill>
+              </a:defRPr>
+            </a:pPr>
+            <a:r>
+              <a:t>AcpProcessDied), memory/embeddings, Slack, Discord, MCP,</a:t>
+            </a:r>
+          </a:p>
+          <a:p>
+            <a:pPr>
+              <a:spcBef>
+                <a:spcPts val="800"/>
+              </a:spcBef>
+              <a:defRPr sz="1800">
+                <a:solidFill>
+                  <a:srgbClr val="F1F5F9"/>
+                </a:solidFill>
+              </a:defRPr>
+            </a:pPr>
+            <a:r>
+              <a:t>dashboard 403, sessions, task runner, subagents, cron,</a:t>
+            </a:r>
+          </a:p>
+          <a:p>
+            <a:pPr>
+              <a:spcBef>
+                <a:spcPts val="800"/>
+              </a:spcBef>
+              <a:defRPr sz="1800">
+                <a:solidFill>
+                  <a:srgbClr val="F1F5F9"/>
+                </a:solidFill>
+              </a:defRPr>
+            </a:pPr>
+            <a:r>
+              <a:t>config, snapshot, multi-instance, voice, artifact deploy</a:t>
+            </a:r>
+          </a:p>
+        </p:txBody>
+      </p:sp>
+    </p:spTree>
+  </p:cSld>
+  <p:clrMapOvr>
+    <a:masterClrMapping/>
+  </p:clrMapOvr>
+</p:sld>
+</file>
+
+<file path=ppt/slides/slide31.xml><?xml version="1.0" encoding="utf-8"?>
+<p:sld xmlns:a="http://schemas.openxmlformats.org/drawingml/2006/main" xmlns:p="http://schemas.openxmlformats.org/presentationml/2006/main" xmlns:r="http://schemas.openxmlformats.org/officeDocument/2006/relationships">
+  <p:cSld>
+    <p:bg>
+      <p:bgPr>
+        <a:solidFill>
+          <a:srgbClr val="1E293B"/>
+        </a:solidFill>
+        <a:effectLst/>
+      </p:bgPr>
+    </p:bg>
+    <p:spTree>
+      <p:nvGrpSpPr>
+        <p:cNvPr id="1" name=""/>
+        <p:cNvGrpSpPr/>
+        <p:nvPr/>
+      </p:nvGrpSpPr>
+      <p:grpSpPr/>
+      <p:sp>
+        <p:nvSpPr>
+          <p:cNvPr id="2" name="TextBox 1"/>
+          <p:cNvSpPr txBox="1"/>
+          <p:nvPr/>
+        </p:nvSpPr>
+        <p:spPr>
+          <a:xfrm>
+            <a:off x="914400" y="2743200"/>
+            <a:ext cx="7315200" cy="914400"/>
+          </a:xfrm>
+          <a:prstGeom prst="rect">
+            <a:avLst/>
+          </a:prstGeom>
+          <a:noFill/>
+        </p:spPr>
+        <p:txBody>
+          <a:bodyPr wrap="none">
+            <a:spAutoFit/>
+          </a:bodyPr>
+          <a:lstStyle/>
+          <a:p>
+            <a:pPr algn="ctr">
+              <a:defRPr sz="4400" b="1">
+                <a:solidFill>
+                  <a:srgbClr val="2563EB"/>
+                </a:solidFill>
+              </a:defRPr>
+            </a:pPr>
+            <a:r>
+              <a:t>Part 4: Use Cases</a:t>
+            </a:r>
+          </a:p>
+        </p:txBody>
+      </p:sp>
+      <p:sp>
+        <p:nvSpPr>
+          <p:cNvPr id="3" name="TextBox 2"/>
+          <p:cNvSpPr txBox="1"/>
+          <p:nvPr/>
+        </p:nvSpPr>
+        <p:spPr>
+          <a:xfrm>
+            <a:off x="914400" y="3840480"/>
+            <a:ext cx="7315200" cy="548640"/>
+          </a:xfrm>
+          <a:prstGeom prst="rect">
+            <a:avLst/>
+          </a:prstGeom>
+          <a:noFill/>
+        </p:spPr>
+        <p:txBody>
+          <a:bodyPr wrap="none">
+            <a:spAutoFit/>
+          </a:bodyPr>
+          <a:lstStyle/>
+          <a:p>
+            <a:pPr algn="ctr">
+              <a:defRPr sz="2000">
+                <a:solidFill>
+                  <a:srgbClr val="94A3B8"/>
+                </a:solidFill>
+              </a:defRPr>
+            </a:pPr>
+            <a:r>
+              <a:t>Enterprise integration examples</a:t>
+            </a:r>
+          </a:p>
+        </p:txBody>
+      </p:sp>
+    </p:spTree>
+  </p:cSld>
+  <p:clrMapOvr>
+    <a:masterClrMapping/>
+  </p:clrMapOvr>
+</p:sld>
+</file>
+
+<file path=ppt/slides/slide32.xml><?xml version="1.0" encoding="utf-8"?>
+<p:sld xmlns:a="http://schemas.openxmlformats.org/drawingml/2006/main" xmlns:p="http://schemas.openxmlformats.org/presentationml/2006/main" xmlns:r="http://schemas.openxmlformats.org/officeDocument/2006/relationships">
+  <p:cSld>
+    <p:bg>
+      <p:bgPr>
+        <a:solidFill>
+          <a:srgbClr val="0F172A"/>
+        </a:solidFill>
+        <a:effectLst/>
+      </p:bgPr>
+    </p:bg>
+    <p:spTree>
+      <p:nvGrpSpPr>
+        <p:cNvPr id="1" name=""/>
+        <p:cNvGrpSpPr/>
+        <p:nvPr/>
+      </p:nvGrpSpPr>
+      <p:grpSpPr/>
+      <p:sp>
+        <p:nvSpPr>
+          <p:cNvPr id="2" name="TextBox 1"/>
+          <p:cNvSpPr txBox="1"/>
+          <p:nvPr/>
+        </p:nvSpPr>
+        <p:spPr>
+          <a:xfrm>
+            <a:off x="457200" y="365760"/>
+            <a:ext cx="6858000" cy="548640"/>
+          </a:xfrm>
+          <a:prstGeom prst="rect">
+            <a:avLst/>
+          </a:prstGeom>
+          <a:noFill/>
+        </p:spPr>
+        <p:txBody>
+          <a:bodyPr wrap="none">
+            <a:spAutoFit/>
+          </a:bodyPr>
+          <a:lstStyle/>
+          <a:p>
+            <a:pPr>
+              <a:defRPr sz="3200" b="1">
+                <a:solidFill>
+                  <a:srgbClr val="2563EB"/>
+                </a:solidFill>
+              </a:defRPr>
+            </a:pPr>
+            <a:r>
+              <a:t>Example: 24/7 PR Monitoring</a:t>
+            </a:r>
+          </a:p>
+        </p:txBody>
+      </p:sp>
+      <p:sp>
+        <p:nvSpPr>
+          <p:cNvPr id="3" name="TextBox 2"/>
+          <p:cNvSpPr txBox="1"/>
+          <p:nvPr/>
+        </p:nvSpPr>
+        <p:spPr>
+          <a:xfrm>
+            <a:off x="7498079" y="411480"/>
+            <a:ext cx="1371600" cy="365760"/>
+          </a:xfrm>
+          <a:prstGeom prst="rect">
+            <a:avLst/>
+          </a:prstGeom>
+          <a:noFill/>
+        </p:spPr>
+        <p:txBody>
+          <a:bodyPr wrap="none">
+            <a:spAutoFit/>
+          </a:bodyPr>
+          <a:lstStyle/>
+          <a:p>
+            <a:pPr>
+              <a:defRPr sz="1100" b="1">
+                <a:solidFill>
+                  <a:srgbClr val="F59E0B"/>
+                </a:solidFill>
+              </a:defRPr>
+            </a:pPr>
+            <a:r>
+              <a:t>⚠ To Be Verified</a:t>
+            </a:r>
+          </a:p>
+        </p:txBody>
+      </p:sp>
+      <p:sp>
+        <p:nvSpPr>
+          <p:cNvPr id="4" name="TextBox 3"/>
+          <p:cNvSpPr txBox="1"/>
+          <p:nvPr/>
+        </p:nvSpPr>
+        <p:spPr>
+          <a:xfrm>
+            <a:off x="640080" y="1188720"/>
+            <a:ext cx="7863840" cy="5212080"/>
+          </a:xfrm>
+          <a:prstGeom prst="rect">
+            <a:avLst/>
+          </a:prstGeom>
+          <a:noFill/>
+        </p:spPr>
+        <p:txBody>
+          <a:bodyPr wrap="square">
+            <a:spAutoFit/>
+          </a:bodyPr>
+          <a:lstStyle/>
+          <a:p>
+            <a:pPr>
+              <a:spcBef>
+                <a:spcPts val="800"/>
+              </a:spcBef>
+              <a:defRPr sz="1800">
+                <a:solidFill>
+                  <a:srgbClr val="F1F5F9"/>
+                </a:solidFill>
+              </a:defRPr>
+            </a:pPr>
+            <a:r>
+              <a:t>Scenario: Track open PRs and alert on staleness</a:t>
+            </a:r>
+          </a:p>
+          <a:p>
+            <a:pPr>
+              <a:spcBef>
+                <a:spcPts val="800"/>
+              </a:spcBef>
+              <a:defRPr sz="1800">
+                <a:solidFill>
+                  <a:srgbClr val="F1F5F9"/>
+                </a:solidFill>
+              </a:defRPr>
+            </a:pPr>
+          </a:p>
+          <a:p>
+            <a:pPr>
+              <a:spcBef>
+                <a:spcPts val="800"/>
+              </a:spcBef>
+              <a:defRPr sz="1800">
+                <a:solidFill>
+                  <a:srgbClr val="F1F5F9"/>
+                </a:solidFill>
+              </a:defRPr>
+            </a:pPr>
+            <a:r>
+              <a:t>Implementation:</a:t>
+            </a:r>
+          </a:p>
+          <a:p>
+            <a:pPr>
+              <a:spcBef>
+                <a:spcPts val="800"/>
+              </a:spcBef>
+              <a:defRPr sz="1800">
+                <a:solidFill>
+                  <a:srgbClr val="F1F5F9"/>
+                </a:solidFill>
+              </a:defRPr>
+            </a:pPr>
+            <a:r>
+              <a:t>• Heartbeat watches open PRs</a:t>
+            </a:r>
+          </a:p>
+          <a:p>
+            <a:pPr>
+              <a:spcBef>
+                <a:spcPts val="800"/>
+              </a:spcBef>
+              <a:defRPr sz="1800">
+                <a:solidFill>
+                  <a:srgbClr val="F1F5F9"/>
+                </a:solidFill>
+              </a:defRPr>
+            </a:pPr>
+            <a:r>
+              <a:t>• Alerts when stale (&gt;4 hours no review)</a:t>
+            </a:r>
+          </a:p>
+          <a:p>
+            <a:pPr>
+              <a:spcBef>
+                <a:spcPts val="800"/>
+              </a:spcBef>
+              <a:defRPr sz="1800">
+                <a:solidFill>
+                  <a:srgbClr val="F1F5F9"/>
+                </a:solidFill>
+              </a:defRPr>
+            </a:pPr>
+            <a:r>
+              <a:t>• Auto-pings reviewers via Slack</a:t>
+            </a:r>
+          </a:p>
+          <a:p>
+            <a:pPr>
+              <a:spcBef>
+                <a:spcPts val="800"/>
+              </a:spcBef>
+              <a:defRPr sz="1800">
+                <a:solidFill>
+                  <a:srgbClr val="F1F5F9"/>
+                </a:solidFill>
+              </a:defRPr>
+            </a:pPr>
+          </a:p>
+          <a:p>
+            <a:pPr>
+              <a:spcBef>
+                <a:spcPts val="800"/>
+              </a:spcBef>
+              <a:defRPr sz="1800">
+                <a:solidFill>
+                  <a:srgbClr val="F1F5F9"/>
+                </a:solidFill>
+              </a:defRPr>
+            </a:pPr>
+            <a:r>
+              <a:t>Uses: Heartbeats + Slack integration</a:t>
+            </a:r>
+          </a:p>
+          <a:p>
+            <a:pPr>
+              <a:spcBef>
+                <a:spcPts val="800"/>
+              </a:spcBef>
+              <a:defRPr sz="1800">
+                <a:solidFill>
+                  <a:srgbClr val="F1F5F9"/>
+                </a:solidFill>
+              </a:defRPr>
+            </a:pPr>
+          </a:p>
+          <a:p>
+            <a:pPr>
+              <a:spcBef>
+                <a:spcPts val="800"/>
+              </a:spcBef>
+              <a:defRPr sz="1800">
+                <a:solidFill>
+                  <a:srgbClr val="F1F5F9"/>
+                </a:solidFill>
+              </a:defRPr>
+            </a:pPr>
+            <a:r>
+              <a:t>Note: Example scenario based on documented capabilities</a:t>
+            </a:r>
+          </a:p>
+        </p:txBody>
+      </p:sp>
+    </p:spTree>
+  </p:cSld>
+  <p:clrMapOvr>
+    <a:masterClrMapping/>
+  </p:clrMapOvr>
+</p:sld>
+</file>
+
+<file path=ppt/slides/slide33.xml><?xml version="1.0" encoding="utf-8"?>
+<p:sld xmlns:a="http://schemas.openxmlformats.org/drawingml/2006/main" xmlns:p="http://schemas.openxmlformats.org/presentationml/2006/main" xmlns:r="http://schemas.openxmlformats.org/officeDocument/2006/relationships">
+  <p:cSld>
+    <p:bg>
+      <p:bgPr>
+        <a:solidFill>
+          <a:srgbClr val="0F172A"/>
+        </a:solidFill>
+        <a:effectLst/>
+      </p:bgPr>
+    </p:bg>
+    <p:spTree>
+      <p:nvGrpSpPr>
+        <p:cNvPr id="1" name=""/>
+        <p:cNvGrpSpPr/>
+        <p:nvPr/>
+      </p:nvGrpSpPr>
+      <p:grpSpPr/>
+      <p:sp>
+        <p:nvSpPr>
+          <p:cNvPr id="2" name="TextBox 1"/>
+          <p:cNvSpPr txBox="1"/>
+          <p:nvPr/>
+        </p:nvSpPr>
+        <p:spPr>
+          <a:xfrm>
+            <a:off x="457200" y="365760"/>
+            <a:ext cx="6858000" cy="548640"/>
+          </a:xfrm>
+          <a:prstGeom prst="rect">
+            <a:avLst/>
+          </a:prstGeom>
+          <a:noFill/>
+        </p:spPr>
+        <p:txBody>
+          <a:bodyPr wrap="none">
+            <a:spAutoFit/>
+          </a:bodyPr>
+          <a:lstStyle/>
+          <a:p>
+            <a:pPr>
+              <a:defRPr sz="3200" b="1">
+                <a:solidFill>
+                  <a:srgbClr val="2563EB"/>
+                </a:solidFill>
+              </a:defRPr>
+            </a:pPr>
+            <a:r>
+              <a:t>Example: Nightly Security Audit</a:t>
+            </a:r>
+          </a:p>
+        </p:txBody>
+      </p:sp>
+      <p:sp>
+        <p:nvSpPr>
+          <p:cNvPr id="3" name="TextBox 2"/>
+          <p:cNvSpPr txBox="1"/>
+          <p:nvPr/>
+        </p:nvSpPr>
+        <p:spPr>
+          <a:xfrm>
+            <a:off x="7498079" y="411480"/>
+            <a:ext cx="1371600" cy="365760"/>
+          </a:xfrm>
+          <a:prstGeom prst="rect">
+            <a:avLst/>
+          </a:prstGeom>
+          <a:noFill/>
+        </p:spPr>
+        <p:txBody>
+          <a:bodyPr wrap="none">
+            <a:spAutoFit/>
+          </a:bodyPr>
+          <a:lstStyle/>
+          <a:p>
+            <a:pPr>
+              <a:defRPr sz="1100" b="1">
+                <a:solidFill>
+                  <a:srgbClr val="F59E0B"/>
+                </a:solidFill>
+              </a:defRPr>
+            </a:pPr>
+            <a:r>
+              <a:t>⚠ To Be Verified</a:t>
+            </a:r>
+          </a:p>
+        </p:txBody>
+      </p:sp>
+      <p:sp>
+        <p:nvSpPr>
+          <p:cNvPr id="4" name="TextBox 3"/>
+          <p:cNvSpPr txBox="1"/>
+          <p:nvPr/>
+        </p:nvSpPr>
+        <p:spPr>
+          <a:xfrm>
+            <a:off x="640080" y="1188720"/>
+            <a:ext cx="7863840" cy="5212080"/>
+          </a:xfrm>
+          <a:prstGeom prst="rect">
+            <a:avLst/>
+          </a:prstGeom>
+          <a:noFill/>
+        </p:spPr>
+        <p:txBody>
+          <a:bodyPr wrap="square">
+            <a:spAutoFit/>
+          </a:bodyPr>
+          <a:lstStyle/>
+          <a:p>
+            <a:pPr>
+              <a:spcBef>
+                <a:spcPts val="800"/>
+              </a:spcBef>
+              <a:defRPr sz="1800">
+                <a:solidFill>
+                  <a:srgbClr val="F1F5F9"/>
+                </a:solidFill>
+              </a:defRPr>
+            </a:pPr>
+            <a:r>
+              <a:t>Scenario: Automated security scanning</a:t>
+            </a:r>
+          </a:p>
+          <a:p>
+            <a:pPr>
+              <a:spcBef>
+                <a:spcPts val="800"/>
+              </a:spcBef>
+              <a:defRPr sz="1800">
+                <a:solidFill>
+                  <a:srgbClr val="F1F5F9"/>
+                </a:solidFill>
+              </a:defRPr>
+            </a:pPr>
+          </a:p>
+          <a:p>
+            <a:pPr>
+              <a:spcBef>
+                <a:spcPts val="800"/>
+              </a:spcBef>
+              <a:defRPr sz="1800">
+                <a:solidFill>
+                  <a:srgbClr val="F1F5F9"/>
+                </a:solidFill>
+              </a:defRPr>
+            </a:pPr>
+            <a:r>
+              <a:t>Implementation:</a:t>
+            </a:r>
+          </a:p>
+          <a:p>
+            <a:pPr>
+              <a:spcBef>
+                <a:spcPts val="800"/>
+              </a:spcBef>
+              <a:defRPr sz="1800">
+                <a:solidFill>
+                  <a:srgbClr val="F1F5F9"/>
+                </a:solidFill>
+              </a:defRPr>
+            </a:pPr>
+            <a:r>
+              <a:t>• Cron job at 2am</a:t>
+            </a:r>
+          </a:p>
+          <a:p>
+            <a:pPr>
+              <a:spcBef>
+                <a:spcPts val="800"/>
+              </a:spcBef>
+              <a:defRPr sz="1800">
+                <a:solidFill>
+                  <a:srgbClr val="F1F5F9"/>
+                </a:solidFill>
+              </a:defRPr>
+            </a:pPr>
+            <a:r>
+              <a:t>• Spawns subagents (one per repo)</a:t>
+            </a:r>
+          </a:p>
+          <a:p>
+            <a:pPr>
+              <a:spcBef>
+                <a:spcPts val="800"/>
+              </a:spcBef>
+              <a:defRPr sz="1800">
+                <a:solidFill>
+                  <a:srgbClr val="F1F5F9"/>
+                </a:solidFill>
+              </a:defRPr>
+            </a:pPr>
+            <a:r>
+              <a:t>• Scans for secrets, vulnerabilities, misconfigurations</a:t>
+            </a:r>
+          </a:p>
+          <a:p>
+            <a:pPr>
+              <a:spcBef>
+                <a:spcPts val="800"/>
+              </a:spcBef>
+              <a:defRPr sz="1800">
+                <a:solidFill>
+                  <a:srgbClr val="F1F5F9"/>
+                </a:solidFill>
+              </a:defRPr>
+            </a:pPr>
+            <a:r>
+              <a:t>• Aggregates findings into report</a:t>
+            </a:r>
+          </a:p>
+          <a:p>
+            <a:pPr>
+              <a:spcBef>
+                <a:spcPts val="800"/>
+              </a:spcBef>
+              <a:defRPr sz="1800">
+                <a:solidFill>
+                  <a:srgbClr val="F1F5F9"/>
+                </a:solidFill>
+              </a:defRPr>
+            </a:pPr>
+            <a:r>
+              <a:t>• Files HIGH/CRITICAL tickets</a:t>
+            </a:r>
+          </a:p>
+          <a:p>
+            <a:pPr>
+              <a:spcBef>
+                <a:spcPts val="800"/>
+              </a:spcBef>
+              <a:defRPr sz="1800">
+                <a:solidFill>
+                  <a:srgbClr val="F1F5F9"/>
+                </a:solidFill>
+              </a:defRPr>
+            </a:pPr>
+          </a:p>
+          <a:p>
+            <a:pPr>
+              <a:spcBef>
+                <a:spcPts val="800"/>
+              </a:spcBef>
+              <a:defRPr sz="1800">
+                <a:solidFill>
+                  <a:srgbClr val="F1F5F9"/>
+                </a:solidFill>
+              </a:defRPr>
+            </a:pPr>
+            <a:r>
+              <a:t>Uses: Cron + Subagents + Task automation</a:t>
+            </a:r>
+          </a:p>
+        </p:txBody>
+      </p:sp>
+    </p:spTree>
+  </p:cSld>
+  <p:clrMapOvr>
+    <a:masterClrMapping/>
+  </p:clrMapOvr>
+</p:sld>
+</file>
+
+<file path=ppt/slides/slide34.xml><?xml version="1.0" encoding="utf-8"?>
+<p:sld xmlns:a="http://schemas.openxmlformats.org/drawingml/2006/main" xmlns:p="http://schemas.openxmlformats.org/presentationml/2006/main" xmlns:r="http://schemas.openxmlformats.org/officeDocument/2006/relationships">
+  <p:cSld>
+    <p:bg>
+      <p:bgPr>
+        <a:solidFill>
+          <a:srgbClr val="0F172A"/>
+        </a:solidFill>
+        <a:effectLst/>
+      </p:bgPr>
+    </p:bg>
+    <p:spTree>
+      <p:nvGrpSpPr>
+        <p:cNvPr id="1" name=""/>
+        <p:cNvGrpSpPr/>
+        <p:nvPr/>
+      </p:nvGrpSpPr>
+      <p:grpSpPr/>
+      <p:sp>
+        <p:nvSpPr>
+          <p:cNvPr id="2" name="TextBox 1"/>
+          <p:cNvSpPr txBox="1"/>
+          <p:nvPr/>
+        </p:nvSpPr>
+        <p:spPr>
+          <a:xfrm>
+            <a:off x="457200" y="365760"/>
+            <a:ext cx="6858000" cy="548640"/>
+          </a:xfrm>
+          <a:prstGeom prst="rect">
+            <a:avLst/>
+          </a:prstGeom>
+          <a:noFill/>
+        </p:spPr>
+        <p:txBody>
+          <a:bodyPr wrap="none">
+            <a:spAutoFit/>
+          </a:bodyPr>
+          <a:lstStyle/>
+          <a:p>
+            <a:pPr>
+              <a:defRPr sz="3200" b="1">
+                <a:solidFill>
+                  <a:srgbClr val="2563EB"/>
+                </a:solidFill>
+              </a:defRPr>
+            </a:pPr>
+            <a:r>
+              <a:t>Example: Incident Response</a:t>
+            </a:r>
+          </a:p>
+        </p:txBody>
+      </p:sp>
+      <p:sp>
+        <p:nvSpPr>
+          <p:cNvPr id="3" name="TextBox 2"/>
+          <p:cNvSpPr txBox="1"/>
+          <p:nvPr/>
+        </p:nvSpPr>
+        <p:spPr>
+          <a:xfrm>
+            <a:off x="7498079" y="411480"/>
+            <a:ext cx="1371600" cy="365760"/>
+          </a:xfrm>
+          <a:prstGeom prst="rect">
+            <a:avLst/>
+          </a:prstGeom>
+          <a:noFill/>
+        </p:spPr>
+        <p:txBody>
+          <a:bodyPr wrap="none">
+            <a:spAutoFit/>
+          </a:bodyPr>
+          <a:lstStyle/>
+          <a:p>
+            <a:pPr>
+              <a:defRPr sz="1100" b="1">
+                <a:solidFill>
+                  <a:srgbClr val="F59E0B"/>
+                </a:solidFill>
+              </a:defRPr>
+            </a:pPr>
+            <a:r>
+              <a:t>⚠ To Be Verified</a:t>
+            </a:r>
+          </a:p>
+        </p:txBody>
+      </p:sp>
+      <p:sp>
+        <p:nvSpPr>
+          <p:cNvPr id="4" name="TextBox 3"/>
+          <p:cNvSpPr txBox="1"/>
+          <p:nvPr/>
+        </p:nvSpPr>
+        <p:spPr>
+          <a:xfrm>
+            <a:off x="640080" y="1188720"/>
+            <a:ext cx="7863840" cy="5212080"/>
+          </a:xfrm>
+          <a:prstGeom prst="rect">
+            <a:avLst/>
+          </a:prstGeom>
+          <a:noFill/>
+        </p:spPr>
+        <p:txBody>
+          <a:bodyPr wrap="square">
+            <a:spAutoFit/>
+          </a:bodyPr>
+          <a:lstStyle/>
+          <a:p>
+            <a:pPr>
+              <a:spcBef>
+                <a:spcPts val="800"/>
+              </a:spcBef>
+              <a:defRPr sz="1800">
+                <a:solidFill>
+                  <a:srgbClr val="F1F5F9"/>
+                </a:solidFill>
+              </a:defRPr>
+            </a:pPr>
+            <a:r>
+              <a:t>Scenario: Automated triage and RCA</a:t>
+            </a:r>
+          </a:p>
+          <a:p>
+            <a:pPr>
+              <a:spcBef>
+                <a:spcPts val="800"/>
+              </a:spcBef>
+              <a:defRPr sz="1800">
+                <a:solidFill>
+                  <a:srgbClr val="F1F5F9"/>
+                </a:solidFill>
+              </a:defRPr>
+            </a:pPr>
+          </a:p>
+          <a:p>
+            <a:pPr>
+              <a:spcBef>
+                <a:spcPts val="800"/>
+              </a:spcBef>
+              <a:defRPr sz="1800">
+                <a:solidFill>
+                  <a:srgbClr val="F1F5F9"/>
+                </a:solidFill>
+              </a:defRPr>
+            </a:pPr>
+            <a:r>
+              <a:t>Implementation:</a:t>
+            </a:r>
+          </a:p>
+          <a:p>
+            <a:pPr>
+              <a:spcBef>
+                <a:spcPts val="800"/>
+              </a:spcBef>
+              <a:defRPr sz="1800">
+                <a:solidFill>
+                  <a:srgbClr val="F1F5F9"/>
+                </a:solidFill>
+              </a:defRPr>
+            </a:pPr>
+            <a:r>
+              <a:t>• Webhook from PagerDuty</a:t>
+            </a:r>
+          </a:p>
+          <a:p>
+            <a:pPr>
+              <a:spcBef>
+                <a:spcPts val="800"/>
+              </a:spcBef>
+              <a:defRPr sz="1800">
+                <a:solidFill>
+                  <a:srgbClr val="F1F5F9"/>
+                </a:solidFill>
+              </a:defRPr>
+            </a:pPr>
+            <a:r>
+              <a:t>• Crew triages alert</a:t>
+            </a:r>
+          </a:p>
+          <a:p>
+            <a:pPr>
+              <a:spcBef>
+                <a:spcPts val="800"/>
+              </a:spcBef>
+              <a:defRPr sz="1800">
+                <a:solidFill>
+                  <a:srgbClr val="F1F5F9"/>
+                </a:solidFill>
+              </a:defRPr>
+            </a:pPr>
+            <a:r>
+              <a:t>• Checks logs, metrics, recent deploys</a:t>
+            </a:r>
+          </a:p>
+          <a:p>
+            <a:pPr>
+              <a:spcBef>
+                <a:spcPts val="800"/>
+              </a:spcBef>
+              <a:defRPr sz="1800">
+                <a:solidFill>
+                  <a:srgbClr val="F1F5F9"/>
+                </a:solidFill>
+              </a:defRPr>
+            </a:pPr>
+            <a:r>
+              <a:t>• Applies known fixes (from memory/lessons)</a:t>
+            </a:r>
+          </a:p>
+          <a:p>
+            <a:pPr>
+              <a:spcBef>
+                <a:spcPts val="800"/>
+              </a:spcBef>
+              <a:defRPr sz="1800">
+                <a:solidFill>
+                  <a:srgbClr val="F1F5F9"/>
+                </a:solidFill>
+              </a:defRPr>
+            </a:pPr>
+            <a:r>
+              <a:t>• Escalates if novel</a:t>
+            </a:r>
+          </a:p>
+          <a:p>
+            <a:pPr>
+              <a:spcBef>
+                <a:spcPts val="800"/>
+              </a:spcBef>
+              <a:defRPr sz="1800">
+                <a:solidFill>
+                  <a:srgbClr val="F1F5F9"/>
+                </a:solidFill>
+              </a:defRPr>
+            </a:pPr>
+            <a:r>
+              <a:t>• Posts RCA when resolved</a:t>
+            </a:r>
+          </a:p>
+          <a:p>
+            <a:pPr>
+              <a:spcBef>
+                <a:spcPts val="800"/>
+              </a:spcBef>
+              <a:defRPr sz="1800">
+                <a:solidFill>
+                  <a:srgbClr val="F1F5F9"/>
+                </a:solidFill>
+              </a:defRPr>
+            </a:pPr>
+          </a:p>
+          <a:p>
+            <a:pPr>
+              <a:spcBef>
+                <a:spcPts val="800"/>
+              </a:spcBef>
+              <a:defRPr sz="1800">
+                <a:solidFill>
+                  <a:srgbClr val="F1F5F9"/>
+                </a:solidFill>
+              </a:defRPr>
+            </a:pPr>
+            <a:r>
+              <a:t>Uses: Webhooks + Memory + Knowledge</a:t>
+            </a:r>
+          </a:p>
+        </p:txBody>
+      </p:sp>
+    </p:spTree>
+  </p:cSld>
+  <p:clrMapOvr>
+    <a:masterClrMapping/>
+  </p:clrMapOvr>
+</p:sld>
+</file>
+
+<file path=ppt/slides/slide35.xml><?xml version="1.0" encoding="utf-8"?>
+<p:sld xmlns:a="http://schemas.openxmlformats.org/drawingml/2006/main" xmlns:p="http://schemas.openxmlformats.org/presentationml/2006/main" xmlns:r="http://schemas.openxmlformats.org/officeDocument/2006/relationships">
+  <p:cSld>
+    <p:bg>
+      <p:bgPr>
+        <a:solidFill>
+          <a:srgbClr val="0F172A"/>
+        </a:solidFill>
+        <a:effectLst/>
+      </p:bgPr>
+    </p:bg>
+    <p:spTree>
+      <p:nvGrpSpPr>
+        <p:cNvPr id="1" name=""/>
+        <p:cNvGrpSpPr/>
+        <p:nvPr/>
+      </p:nvGrpSpPr>
+      <p:grpSpPr/>
+      <p:sp>
+        <p:nvSpPr>
+          <p:cNvPr id="2" name="TextBox 1"/>
+          <p:cNvSpPr txBox="1"/>
+          <p:nvPr/>
+        </p:nvSpPr>
+        <p:spPr>
+          <a:xfrm>
+            <a:off x="457200" y="365760"/>
+            <a:ext cx="6858000" cy="548640"/>
+          </a:xfrm>
+          <a:prstGeom prst="rect">
+            <a:avLst/>
+          </a:prstGeom>
+          <a:noFill/>
+        </p:spPr>
+        <p:txBody>
+          <a:bodyPr wrap="none">
+            <a:spAutoFit/>
+          </a:bodyPr>
+          <a:lstStyle/>
+          <a:p>
+            <a:pPr>
+              <a:defRPr sz="3200" b="1">
+                <a:solidFill>
+                  <a:srgbClr val="2563EB"/>
+                </a:solidFill>
+              </a:defRPr>
+            </a:pPr>
+            <a:r>
+              <a:t>CI/CD Integration (3 Modes)</a:t>
+            </a:r>
+          </a:p>
+        </p:txBody>
+      </p:sp>
+      <p:sp>
+        <p:nvSpPr>
+          <p:cNvPr id="3" name="TextBox 2"/>
+          <p:cNvSpPr txBox="1"/>
+          <p:nvPr/>
+        </p:nvSpPr>
+        <p:spPr>
+          <a:xfrm>
+            <a:off x="7498079" y="411480"/>
+            <a:ext cx="1371600" cy="365760"/>
+          </a:xfrm>
+          <a:prstGeom prst="rect">
+            <a:avLst/>
+          </a:prstGeom>
+          <a:noFill/>
+        </p:spPr>
+        <p:txBody>
+          <a:bodyPr wrap="none">
+            <a:spAutoFit/>
+          </a:bodyPr>
+          <a:lstStyle/>
+          <a:p>
+            <a:pPr>
+              <a:defRPr sz="1100" b="1">
+                <a:solidFill>
+                  <a:srgbClr val="10B981"/>
+                </a:solidFill>
+              </a:defRPr>
+            </a:pPr>
+            <a:r>
+              <a:t>✓ Verified</a:t>
+            </a:r>
+          </a:p>
+        </p:txBody>
+      </p:sp>
+      <p:sp>
+        <p:nvSpPr>
+          <p:cNvPr id="4" name="TextBox 3"/>
+          <p:cNvSpPr txBox="1"/>
+          <p:nvPr/>
+        </p:nvSpPr>
+        <p:spPr>
+          <a:xfrm>
+            <a:off x="640080" y="1188720"/>
+            <a:ext cx="7863840" cy="5212080"/>
+          </a:xfrm>
+          <a:prstGeom prst="rect">
+            <a:avLst/>
+          </a:prstGeom>
+          <a:noFill/>
+        </p:spPr>
+        <p:txBody>
+          <a:bodyPr wrap="square">
+            <a:spAutoFit/>
+          </a:bodyPr>
+          <a:lstStyle/>
+          <a:p>
+            <a:pPr>
+              <a:spcBef>
+                <a:spcPts val="800"/>
+              </a:spcBef>
+              <a:defRPr sz="1800">
+                <a:solidFill>
+                  <a:srgbClr val="F1F5F9"/>
+                </a:solidFill>
+              </a:defRPr>
+            </a:pPr>
+            <a:r>
+              <a:t>Mode 1: CLI Headless</a:t>
+            </a:r>
+          </a:p>
+          <a:p>
+            <a:pPr>
+              <a:spcBef>
+                <a:spcPts val="800"/>
+              </a:spcBef>
+              <a:defRPr sz="1800">
+                <a:solidFill>
+                  <a:srgbClr val="F1F5F9"/>
+                </a:solidFill>
+              </a:defRPr>
+            </a:pPr>
+            <a:r>
+              <a:t>• kiro-cli chat --no-interactive "&lt;prompt&gt;" in pipeline</a:t>
+            </a:r>
+          </a:p>
+          <a:p>
+            <a:pPr>
+              <a:spcBef>
+                <a:spcPts val="800"/>
+              </a:spcBef>
+              <a:defRPr sz="1800">
+                <a:solidFill>
+                  <a:srgbClr val="F1F5F9"/>
+                </a:solidFill>
+              </a:defRPr>
+            </a:pPr>
+            <a:r>
+              <a:t>• Engine version: --engine v3 (not --v3)</a:t>
+            </a:r>
+          </a:p>
+          <a:p>
+            <a:pPr>
+              <a:spcBef>
+                <a:spcPts val="800"/>
+              </a:spcBef>
+              <a:defRPr sz="1800">
+                <a:solidFill>
+                  <a:srgbClr val="F1F5F9"/>
+                </a:solidFill>
+              </a:defRPr>
+            </a:pPr>
+            <a:r>
+              <a:t>• Use case: Simple code generation</a:t>
+            </a:r>
+          </a:p>
+          <a:p>
+            <a:pPr>
+              <a:spcBef>
+                <a:spcPts val="800"/>
+              </a:spcBef>
+              <a:defRPr sz="1800">
+                <a:solidFill>
+                  <a:srgbClr val="F1F5F9"/>
+                </a:solidFill>
+              </a:defRPr>
+            </a:pPr>
+          </a:p>
+          <a:p>
+            <a:pPr>
+              <a:spcBef>
+                <a:spcPts val="800"/>
+              </a:spcBef>
+              <a:defRPr sz="1800">
+                <a:solidFill>
+                  <a:srgbClr val="F1F5F9"/>
+                </a:solidFill>
+              </a:defRPr>
+            </a:pPr>
+            <a:r>
+              <a:t>Mode 2: Crew Webhooks</a:t>
+            </a:r>
+          </a:p>
+          <a:p>
+            <a:pPr>
+              <a:spcBef>
+                <a:spcPts val="800"/>
+              </a:spcBef>
+              <a:defRPr sz="1800">
+                <a:solidFill>
+                  <a:srgbClr val="F1F5F9"/>
+                </a:solidFill>
+              </a:defRPr>
+            </a:pPr>
+            <a:r>
+              <a:t>• CI pipeline calls Crew on events</a:t>
+            </a:r>
+          </a:p>
+          <a:p>
+            <a:pPr>
+              <a:spcBef>
+                <a:spcPts val="800"/>
+              </a:spcBef>
+              <a:defRPr sz="1800">
+                <a:solidFill>
+                  <a:srgbClr val="F1F5F9"/>
+                </a:solidFill>
+              </a:defRPr>
+            </a:pPr>
+            <a:r>
+              <a:t>• Crew analyzes and reports via Slack/Dashboard</a:t>
+            </a:r>
+          </a:p>
+          <a:p>
+            <a:pPr>
+              <a:spcBef>
+                <a:spcPts val="800"/>
+              </a:spcBef>
+              <a:defRPr sz="1800">
+                <a:solidFill>
+                  <a:srgbClr val="F1F5F9"/>
+                </a:solidFill>
+              </a:defRPr>
+            </a:pPr>
+            <a:r>
+              <a:t>• Use case: Root cause analysis, monitoring</a:t>
+            </a:r>
+          </a:p>
+          <a:p>
+            <a:pPr>
+              <a:spcBef>
+                <a:spcPts val="800"/>
+              </a:spcBef>
+              <a:defRPr sz="1800">
+                <a:solidFill>
+                  <a:srgbClr val="F1F5F9"/>
+                </a:solidFill>
+              </a:defRPr>
+            </a:pPr>
+          </a:p>
+          <a:p>
+            <a:pPr>
+              <a:spcBef>
+                <a:spcPts val="800"/>
+              </a:spcBef>
+              <a:defRPr sz="1800">
+                <a:solidFill>
+                  <a:srgbClr val="F1F5F9"/>
+                </a:solidFill>
+              </a:defRPr>
+            </a:pPr>
+            <a:r>
+              <a:t>Mode 3: Crew Cron</a:t>
+            </a:r>
+          </a:p>
+          <a:p>
+            <a:pPr>
+              <a:spcBef>
+                <a:spcPts val="800"/>
+              </a:spcBef>
+              <a:defRPr sz="1800">
+                <a:solidFill>
+                  <a:srgbClr val="F1F5F9"/>
+                </a:solidFill>
+              </a:defRPr>
+            </a:pPr>
+            <a:r>
+              <a:t>• Periodic checks of CI/PR status</a:t>
+            </a:r>
+          </a:p>
+          <a:p>
+            <a:pPr>
+              <a:spcBef>
+                <a:spcPts val="800"/>
+              </a:spcBef>
+              <a:defRPr sz="1800">
+                <a:solidFill>
+                  <a:srgbClr val="F1F5F9"/>
+                </a:solidFill>
+              </a:defRPr>
+            </a:pPr>
+            <a:r>
+              <a:t>• Use case: Nightly audits, health checks</a:t>
+            </a:r>
+          </a:p>
+        </p:txBody>
+      </p:sp>
+    </p:spTree>
+  </p:cSld>
+  <p:clrMapOvr>
+    <a:masterClrMapping/>
+  </p:clrMapOvr>
+</p:sld>
+</file>
+
+<file path=ppt/slides/slide36.xml><?xml version="1.0" encoding="utf-8"?>
+<p:sld xmlns:a="http://schemas.openxmlformats.org/drawingml/2006/main" xmlns:p="http://schemas.openxmlformats.org/presentationml/2006/main" xmlns:r="http://schemas.openxmlformats.org/officeDocument/2006/relationships">
+  <p:cSld>
+    <p:bg>
+      <p:bgPr>
+        <a:solidFill>
+          <a:srgbClr val="1E293B"/>
+        </a:solidFill>
+        <a:effectLst/>
+      </p:bgPr>
+    </p:bg>
+    <p:spTree>
+      <p:nvGrpSpPr>
+        <p:cNvPr id="1" name=""/>
+        <p:cNvGrpSpPr/>
+        <p:nvPr/>
+      </p:nvGrpSpPr>
+      <p:grpSpPr/>
+      <p:sp>
+        <p:nvSpPr>
+          <p:cNvPr id="2" name="TextBox 1"/>
+          <p:cNvSpPr txBox="1"/>
+          <p:nvPr/>
+        </p:nvSpPr>
+        <p:spPr>
+          <a:xfrm>
+            <a:off x="914400" y="2743200"/>
+            <a:ext cx="7315200" cy="914400"/>
+          </a:xfrm>
+          <a:prstGeom prst="rect">
+            <a:avLst/>
+          </a:prstGeom>
+          <a:noFill/>
+        </p:spPr>
+        <p:txBody>
+          <a:bodyPr wrap="none">
+            <a:spAutoFit/>
+          </a:bodyPr>
+          <a:lstStyle/>
+          <a:p>
+            <a:pPr algn="ctr">
+              <a:defRPr sz="4400" b="1">
+                <a:solidFill>
+                  <a:srgbClr val="2563EB"/>
+                </a:solidFill>
+              </a:defRPr>
+            </a:pPr>
+            <a:r>
+              <a:t>Part 5: Getting Started</a:t>
+            </a:r>
+          </a:p>
+        </p:txBody>
+      </p:sp>
+    </p:spTree>
+  </p:cSld>
+  <p:clrMapOvr>
+    <a:masterClrMapping/>
+  </p:clrMapOvr>
+</p:sld>
+</file>
+
+<file path=ppt/slides/slide37.xml><?xml version="1.0" encoding="utf-8"?>
+<p:sld xmlns:a="http://schemas.openxmlformats.org/drawingml/2006/main" xmlns:p="http://schemas.openxmlformats.org/presentationml/2006/main" xmlns:r="http://schemas.openxmlformats.org/officeDocument/2006/relationships">
+  <p:cSld>
+    <p:bg>
+      <p:bgPr>
+        <a:solidFill>
+          <a:srgbClr val="0F172A"/>
+        </a:solidFill>
+        <a:effectLst/>
+      </p:bgPr>
+    </p:bg>
+    <p:spTree>
+      <p:nvGrpSpPr>
+        <p:cNvPr id="1" name=""/>
+        <p:cNvGrpSpPr/>
+        <p:nvPr/>
+      </p:nvGrpSpPr>
+      <p:grpSpPr/>
+      <p:sp>
+        <p:nvSpPr>
+          <p:cNvPr id="2" name="TextBox 1"/>
+          <p:cNvSpPr txBox="1"/>
+          <p:nvPr/>
+        </p:nvSpPr>
+        <p:spPr>
+          <a:xfrm>
+            <a:off x="457200" y="365760"/>
+            <a:ext cx="8229600" cy="548640"/>
+          </a:xfrm>
+          <a:prstGeom prst="rect">
+            <a:avLst/>
+          </a:prstGeom>
+          <a:noFill/>
+        </p:spPr>
+        <p:txBody>
+          <a:bodyPr wrap="none">
+            <a:spAutoFit/>
+          </a:bodyPr>
+          <a:lstStyle/>
+          <a:p>
+            <a:pPr>
+              <a:defRPr sz="3200" b="1">
+                <a:solidFill>
+                  <a:srgbClr val="2563EB"/>
+                </a:solidFill>
+              </a:defRPr>
+            </a:pPr>
+            <a:r>
+              <a:t>Installation</a:t>
+            </a:r>
+          </a:p>
+        </p:txBody>
+      </p:sp>
+      <p:sp>
+        <p:nvSpPr>
+          <p:cNvPr id="3" name="TextBox 2"/>
+          <p:cNvSpPr txBox="1"/>
+          <p:nvPr/>
+        </p:nvSpPr>
+        <p:spPr>
+          <a:xfrm>
+            <a:off x="457200" y="1188720"/>
+            <a:ext cx="4114800" cy="5212080"/>
+          </a:xfrm>
+          <a:prstGeom prst="rect">
+            <a:avLst/>
+          </a:prstGeom>
+          <a:noFill/>
+        </p:spPr>
+        <p:txBody>
+          <a:bodyPr wrap="square">
+            <a:spAutoFit/>
+          </a:bodyPr>
+          <a:lstStyle/>
+          <a:p>
+            <a:pPr>
+              <a:spcBef>
+                <a:spcPts val="600"/>
+              </a:spcBef>
+              <a:defRPr sz="1600">
+                <a:solidFill>
+                  <a:srgbClr val="F1F5F9"/>
+                </a:solidFill>
+              </a:defRPr>
+            </a:pPr>
+            <a:r>
+              <a:t>Option 1: Desktop App (Recommended)</a:t>
+            </a:r>
+          </a:p>
+          <a:p>
+            <a:pPr>
+              <a:spcBef>
+                <a:spcPts val="600"/>
+              </a:spcBef>
+              <a:defRPr sz="1600">
+                <a:solidFill>
+                  <a:srgbClr val="F1F5F9"/>
+                </a:solidFill>
+              </a:defRPr>
+            </a:pPr>
+            <a:r>
+              <a:t>1. Download (.dmg or .AppImage)</a:t>
+            </a:r>
+          </a:p>
+          <a:p>
+            <a:pPr>
+              <a:spcBef>
+                <a:spcPts val="600"/>
+              </a:spcBef>
+              <a:defRPr sz="1600">
+                <a:solidFill>
+                  <a:srgbClr val="F1F5F9"/>
+                </a:solidFill>
+              </a:defRPr>
+            </a:pPr>
+            <a:r>
+              <a:t>2. Launch (auto-starts Gateway)</a:t>
+            </a:r>
+          </a:p>
+          <a:p>
+            <a:pPr>
+              <a:spcBef>
+                <a:spcPts val="600"/>
+              </a:spcBef>
+              <a:defRPr sz="1600">
+                <a:solidFill>
+                  <a:srgbClr val="F1F5F9"/>
+                </a:solidFill>
+              </a:defRPr>
+            </a:pPr>
+            <a:r>
+              <a:t>3. Authenticate (device-code sign-in)</a:t>
+            </a:r>
+          </a:p>
+          <a:p>
+            <a:pPr>
+              <a:spcBef>
+                <a:spcPts val="600"/>
+              </a:spcBef>
+              <a:defRPr sz="1600">
+                <a:solidFill>
+                  <a:srgbClr val="F1F5F9"/>
+                </a:solidFill>
+              </a:defRPr>
+            </a:pPr>
+            <a:r>
+              <a:t>4. Start chatting</a:t>
+            </a:r>
+          </a:p>
+          <a:p>
+            <a:pPr>
+              <a:spcBef>
+                <a:spcPts val="600"/>
+              </a:spcBef>
+              <a:defRPr sz="1600">
+                <a:solidFill>
+                  <a:srgbClr val="F1F5F9"/>
+                </a:solidFill>
+              </a:defRPr>
+            </a:pPr>
+          </a:p>
+          <a:p>
+            <a:pPr>
+              <a:spcBef>
+                <a:spcPts val="600"/>
+              </a:spcBef>
+              <a:defRPr sz="1600">
+                <a:solidFill>
+                  <a:srgbClr val="F1F5F9"/>
+                </a:solidFill>
+              </a:defRPr>
+            </a:pPr>
+            <a:r>
+              <a:t>No AWS CLI needed</a:t>
+            </a:r>
+          </a:p>
+          <a:p>
+            <a:pPr>
+              <a:spcBef>
+                <a:spcPts val="600"/>
+              </a:spcBef>
+              <a:defRPr sz="1600">
+                <a:solidFill>
+                  <a:srgbClr val="F1F5F9"/>
+                </a:solidFill>
+              </a:defRPr>
+            </a:pPr>
+            <a:r>
+              <a:t>No Bedrock configuration needed</a:t>
+            </a:r>
+          </a:p>
+        </p:txBody>
+      </p:sp>
+      <p:sp>
+        <p:nvSpPr>
+          <p:cNvPr id="4" name="TextBox 3"/>
+          <p:cNvSpPr txBox="1"/>
+          <p:nvPr/>
+        </p:nvSpPr>
+        <p:spPr>
+          <a:xfrm>
+            <a:off x="4754880" y="1188720"/>
+            <a:ext cx="4114800" cy="5212080"/>
+          </a:xfrm>
+          <a:prstGeom prst="rect">
+            <a:avLst/>
+          </a:prstGeom>
+          <a:noFill/>
+        </p:spPr>
+        <p:txBody>
+          <a:bodyPr wrap="square">
+            <a:spAutoFit/>
+          </a:bodyPr>
+          <a:lstStyle/>
+          <a:p>
+            <a:pPr>
+              <a:spcBef>
+                <a:spcPts val="600"/>
+              </a:spcBef>
+              <a:defRPr sz="1600">
+                <a:solidFill>
+                  <a:srgbClr val="F1F5F9"/>
+                </a:solidFill>
+              </a:defRPr>
+            </a:pPr>
+            <a:r>
+              <a:t>Option 2: CLI Install</a:t>
+            </a:r>
+          </a:p>
+          <a:p>
+            <a:pPr>
+              <a:spcBef>
+                <a:spcPts val="600"/>
+              </a:spcBef>
+              <a:defRPr sz="1600">
+                <a:solidFill>
+                  <a:srgbClr val="F1F5F9"/>
+                </a:solidFill>
+              </a:defRPr>
+            </a:pPr>
+            <a:r>
+              <a:t>curl -fsSL https://download.crew.kiro.dev/cli.sh | sh</a:t>
+            </a:r>
+          </a:p>
+          <a:p>
+            <a:pPr>
+              <a:spcBef>
+                <a:spcPts val="600"/>
+              </a:spcBef>
+              <a:defRPr sz="1600">
+                <a:solidFill>
+                  <a:srgbClr val="F1F5F9"/>
+                </a:solidFill>
+              </a:defRPr>
+            </a:pPr>
+          </a:p>
+          <a:p>
+            <a:pPr>
+              <a:spcBef>
+                <a:spcPts val="600"/>
+              </a:spcBef>
+              <a:defRPr sz="1600">
+                <a:solidFill>
+                  <a:srgbClr val="F1F5F9"/>
+                </a:solidFill>
+              </a:defRPr>
+            </a:pPr>
+            <a:r>
+              <a:t>kirocrew setup</a:t>
+            </a:r>
+          </a:p>
+          <a:p>
+            <a:pPr>
+              <a:spcBef>
+                <a:spcPts val="600"/>
+              </a:spcBef>
+              <a:defRPr sz="1600">
+                <a:solidFill>
+                  <a:srgbClr val="F1F5F9"/>
+                </a:solidFill>
+              </a:defRPr>
+            </a:pPr>
+            <a:r>
+              <a:t>kirocrew doctor</a:t>
+            </a:r>
+          </a:p>
+          <a:p>
+            <a:pPr>
+              <a:spcBef>
+                <a:spcPts val="600"/>
+              </a:spcBef>
+              <a:defRPr sz="1600">
+                <a:solidFill>
+                  <a:srgbClr val="F1F5F9"/>
+                </a:solidFill>
+              </a:defRPr>
+            </a:pPr>
+            <a:r>
+              <a:t>kirocrew gateway</a:t>
+            </a:r>
+          </a:p>
+          <a:p>
+            <a:pPr>
+              <a:spcBef>
+                <a:spcPts val="600"/>
+              </a:spcBef>
+              <a:defRPr sz="1600">
+                <a:solidFill>
+                  <a:srgbClr val="F1F5F9"/>
+                </a:solidFill>
+              </a:defRPr>
+            </a:pPr>
+          </a:p>
+          <a:p>
+            <a:pPr>
+              <a:spcBef>
+                <a:spcPts val="600"/>
+              </a:spcBef>
+              <a:defRPr sz="1600">
+                <a:solidFill>
+                  <a:srgbClr val="F1F5F9"/>
+                </a:solidFill>
+              </a:defRPr>
+            </a:pPr>
+            <a:r>
+              <a:t>open http://localhost:5476</a:t>
+            </a:r>
+          </a:p>
+        </p:txBody>
+      </p:sp>
+    </p:spTree>
+  </p:cSld>
+  <p:clrMapOvr>
+    <a:masterClrMapping/>
+  </p:clrMapOvr>
+</p:sld>
+</file>
+
+<file path=ppt/slides/slide38.xml><?xml version="1.0" encoding="utf-8"?>
+<p:sld xmlns:a="http://schemas.openxmlformats.org/drawingml/2006/main" xmlns:p="http://schemas.openxmlformats.org/presentationml/2006/main" xmlns:r="http://schemas.openxmlformats.org/officeDocument/2006/relationships">
+  <p:cSld>
+    <p:bg>
+      <p:bgPr>
+        <a:solidFill>
+          <a:srgbClr val="0F172A"/>
+        </a:solidFill>
+        <a:effectLst/>
+      </p:bgPr>
+    </p:bg>
+    <p:spTree>
+      <p:nvGrpSpPr>
+        <p:cNvPr id="1" name=""/>
+        <p:cNvGrpSpPr/>
+        <p:nvPr/>
+      </p:nvGrpSpPr>
+      <p:grpSpPr/>
+      <p:sp>
+        <p:nvSpPr>
+          <p:cNvPr id="2" name="TextBox 1"/>
+          <p:cNvSpPr txBox="1"/>
+          <p:nvPr/>
+        </p:nvSpPr>
+        <p:spPr>
+          <a:xfrm>
+            <a:off x="457200" y="365760"/>
+            <a:ext cx="6858000" cy="548640"/>
+          </a:xfrm>
+          <a:prstGeom prst="rect">
+            <a:avLst/>
+          </a:prstGeom>
+          <a:noFill/>
+        </p:spPr>
+        <p:txBody>
+          <a:bodyPr wrap="none">
+            <a:spAutoFit/>
+          </a:bodyPr>
+          <a:lstStyle/>
+          <a:p>
+            <a:pPr>
+              <a:defRPr sz="3200" b="1">
+                <a:solidFill>
+                  <a:srgbClr val="2563EB"/>
+                </a:solidFill>
+              </a:defRPr>
+            </a:pPr>
+            <a:r>
+              <a:t>First Steps</a:t>
+            </a:r>
+          </a:p>
+        </p:txBody>
+      </p:sp>
+      <p:sp>
+        <p:nvSpPr>
+          <p:cNvPr id="3" name="TextBox 2"/>
+          <p:cNvSpPr txBox="1"/>
+          <p:nvPr/>
+        </p:nvSpPr>
+        <p:spPr>
+          <a:xfrm>
+            <a:off x="7498079" y="411480"/>
+            <a:ext cx="1371600" cy="365760"/>
+          </a:xfrm>
+          <a:prstGeom prst="rect">
+            <a:avLst/>
+          </a:prstGeom>
+          <a:noFill/>
+        </p:spPr>
+        <p:txBody>
+          <a:bodyPr wrap="none">
+            <a:spAutoFit/>
+          </a:bodyPr>
+          <a:lstStyle/>
+          <a:p>
+            <a:pPr>
+              <a:defRPr sz="1100" b="1">
+                <a:solidFill>
+                  <a:srgbClr val="10B981"/>
+                </a:solidFill>
+              </a:defRPr>
+            </a:pPr>
+            <a:r>
+              <a:t>✓ Verified</a:t>
+            </a:r>
+          </a:p>
+        </p:txBody>
+      </p:sp>
+      <p:sp>
+        <p:nvSpPr>
+          <p:cNvPr id="4" name="TextBox 3"/>
+          <p:cNvSpPr txBox="1"/>
+          <p:nvPr/>
+        </p:nvSpPr>
+        <p:spPr>
+          <a:xfrm>
+            <a:off x="640080" y="1188720"/>
+            <a:ext cx="7863840" cy="5212080"/>
+          </a:xfrm>
+          <a:prstGeom prst="rect">
+            <a:avLst/>
+          </a:prstGeom>
+          <a:noFill/>
+        </p:spPr>
+        <p:txBody>
+          <a:bodyPr wrap="square">
+            <a:spAutoFit/>
+          </a:bodyPr>
+          <a:lstStyle/>
+          <a:p>
+            <a:pPr>
+              <a:spcBef>
+                <a:spcPts val="800"/>
+              </a:spcBef>
+              <a:defRPr sz="1800">
+                <a:solidFill>
+                  <a:srgbClr val="F1F5F9"/>
+                </a:solidFill>
+              </a:defRPr>
+            </a:pPr>
+            <a:r>
+              <a:t>1. Chat - Type and ask anything in dashboard</a:t>
+            </a:r>
+          </a:p>
+          <a:p>
+            <a:pPr>
+              <a:spcBef>
+                <a:spcPts val="800"/>
+              </a:spcBef>
+              <a:defRPr sz="1800">
+                <a:solidFill>
+                  <a:srgbClr val="F1F5F9"/>
+                </a:solidFill>
+              </a:defRPr>
+            </a:pPr>
+          </a:p>
+          <a:p>
+            <a:pPr>
+              <a:spcBef>
+                <a:spcPts val="800"/>
+              </a:spcBef>
+              <a:defRPr sz="1800">
+                <a:solidFill>
+                  <a:srgbClr val="F1F5F9"/>
+                </a:solidFill>
+              </a:defRPr>
+            </a:pPr>
+            <a:r>
+              <a:t>2. Schedule a job - 'Every weekday at 9, summarize my open work'</a:t>
+            </a:r>
+          </a:p>
+          <a:p>
+            <a:pPr>
+              <a:spcBef>
+                <a:spcPts val="800"/>
+              </a:spcBef>
+              <a:defRPr sz="1800">
+                <a:solidFill>
+                  <a:srgbClr val="F1F5F9"/>
+                </a:solidFill>
+              </a:defRPr>
+            </a:pPr>
+          </a:p>
+          <a:p>
+            <a:pPr>
+              <a:spcBef>
+                <a:spcPts val="800"/>
+              </a:spcBef>
+              <a:defRPr sz="1800">
+                <a:solidFill>
+                  <a:srgbClr val="F1F5F9"/>
+                </a:solidFill>
+              </a:defRPr>
+            </a:pPr>
+            <a:r>
+              <a:t>3. Teach a preference - 'Always use pytest over unittest'</a:t>
+            </a:r>
+          </a:p>
+          <a:p>
+            <a:pPr>
+              <a:spcBef>
+                <a:spcPts val="800"/>
+              </a:spcBef>
+              <a:defRPr sz="1800">
+                <a:solidFill>
+                  <a:srgbClr val="F1F5F9"/>
+                </a:solidFill>
+              </a:defRPr>
+            </a:pPr>
+          </a:p>
+          <a:p>
+            <a:pPr>
+              <a:spcBef>
+                <a:spcPts val="800"/>
+              </a:spcBef>
+              <a:defRPr sz="1800">
+                <a:solidFill>
+                  <a:srgbClr val="F1F5F9"/>
+                </a:solidFill>
+              </a:defRPr>
+            </a:pPr>
+            <a:r>
+              <a:t>4. Run autonomous task - Projects panel → describe spec → Run</a:t>
+            </a:r>
+          </a:p>
+          <a:p>
+            <a:pPr>
+              <a:spcBef>
+                <a:spcPts val="800"/>
+              </a:spcBef>
+              <a:defRPr sz="1800">
+                <a:solidFill>
+                  <a:srgbClr val="F1F5F9"/>
+                </a:solidFill>
+              </a:defRPr>
+            </a:pPr>
+          </a:p>
+          <a:p>
+            <a:pPr>
+              <a:spcBef>
+                <a:spcPts val="800"/>
+              </a:spcBef>
+              <a:defRPr sz="1800">
+                <a:solidFill>
+                  <a:srgbClr val="F1F5F9"/>
+                </a:solidFill>
+              </a:defRPr>
+            </a:pPr>
+            <a:r>
+              <a:t>5. Delegate parallel work - 'Research these 3 options in parallel'</a:t>
+            </a:r>
+          </a:p>
+        </p:txBody>
+      </p:sp>
+    </p:spTree>
+  </p:cSld>
+  <p:clrMapOvr>
+    <a:masterClrMapping/>
+  </p:clrMapOvr>
+</p:sld>
+</file>
+
+<file path=ppt/slides/slide39.xml><?xml version="1.0" encoding="utf-8"?>
+<p:sld xmlns:a="http://schemas.openxmlformats.org/drawingml/2006/main" xmlns:p="http://schemas.openxmlformats.org/presentationml/2006/main" xmlns:r="http://schemas.openxmlformats.org/officeDocument/2006/relationships">
+  <p:cSld>
+    <p:bg>
+      <p:bgPr>
+        <a:solidFill>
+          <a:srgbClr val="0F172A"/>
+        </a:solidFill>
+        <a:effectLst/>
+      </p:bgPr>
+    </p:bg>
+    <p:spTree>
+      <p:nvGrpSpPr>
+        <p:cNvPr id="1" name=""/>
+        <p:cNvGrpSpPr/>
+        <p:nvPr/>
+      </p:nvGrpSpPr>
+      <p:grpSpPr/>
+      <p:sp>
+        <p:nvSpPr>
+          <p:cNvPr id="2" name="TextBox 1"/>
+          <p:cNvSpPr txBox="1"/>
+          <p:nvPr/>
+        </p:nvSpPr>
+        <p:spPr>
+          <a:xfrm>
+            <a:off x="457200" y="365760"/>
+            <a:ext cx="6858000" cy="548640"/>
+          </a:xfrm>
+          <a:prstGeom prst="rect">
+            <a:avLst/>
+          </a:prstGeom>
+          <a:noFill/>
+        </p:spPr>
+        <p:txBody>
+          <a:bodyPr wrap="none">
+            <a:spAutoFit/>
+          </a:bodyPr>
+          <a:lstStyle/>
+          <a:p>
+            <a:pPr>
+              <a:defRPr sz="3200" b="1">
+                <a:solidFill>
+                  <a:srgbClr val="2563EB"/>
+                </a:solidFill>
+              </a:defRPr>
+            </a:pPr>
+            <a:r>
+              <a:t>Resources</a:t>
+            </a:r>
+          </a:p>
+        </p:txBody>
+      </p:sp>
+      <p:sp>
+        <p:nvSpPr>
+          <p:cNvPr id="3" name="TextBox 2"/>
+          <p:cNvSpPr txBox="1"/>
+          <p:nvPr/>
+        </p:nvSpPr>
+        <p:spPr>
+          <a:xfrm>
+            <a:off x="7498079" y="411480"/>
+            <a:ext cx="1371600" cy="365760"/>
+          </a:xfrm>
+          <a:prstGeom prst="rect">
+            <a:avLst/>
+          </a:prstGeom>
+          <a:noFill/>
+        </p:spPr>
+        <p:txBody>
+          <a:bodyPr wrap="none">
+            <a:spAutoFit/>
+          </a:bodyPr>
+          <a:lstStyle/>
+          <a:p>
+            <a:pPr>
+              <a:defRPr sz="1100" b="1">
+                <a:solidFill>
+                  <a:srgbClr val="10B981"/>
+                </a:solidFill>
+              </a:defRPr>
+            </a:pPr>
+            <a:r>
+              <a:t>✓ Verified</a:t>
+            </a:r>
+          </a:p>
+        </p:txBody>
+      </p:sp>
+      <p:sp>
+        <p:nvSpPr>
+          <p:cNvPr id="4" name="TextBox 3"/>
+          <p:cNvSpPr txBox="1"/>
+          <p:nvPr/>
+        </p:nvSpPr>
+        <p:spPr>
+          <a:xfrm>
+            <a:off x="640080" y="1188720"/>
+            <a:ext cx="7863840" cy="5212080"/>
+          </a:xfrm>
+          <a:prstGeom prst="rect">
+            <a:avLst/>
+          </a:prstGeom>
+          <a:noFill/>
+        </p:spPr>
+        <p:txBody>
+          <a:bodyPr wrap="square">
+            <a:spAutoFit/>
+          </a:bodyPr>
+          <a:lstStyle/>
+          <a:p>
+            <a:pPr>
+              <a:spcBef>
+                <a:spcPts val="800"/>
+              </a:spcBef>
+              <a:defRPr sz="1800">
+                <a:solidFill>
+                  <a:srgbClr val="F1F5F9"/>
+                </a:solidFill>
+              </a:defRPr>
+            </a:pPr>
+            <a:r>
+              <a:t>Official Documentation:</a:t>
+            </a:r>
+          </a:p>
+          <a:p>
+            <a:pPr>
+              <a:spcBef>
+                <a:spcPts val="800"/>
+              </a:spcBef>
+              <a:defRPr sz="1800">
+                <a:solidFill>
+                  <a:srgbClr val="F1F5F9"/>
+                </a:solidFill>
+              </a:defRPr>
+            </a:pPr>
+            <a:r>
+              <a:t>• kiro.dev/docs/crew/ - Main docs</a:t>
+            </a:r>
+          </a:p>
+          <a:p>
+            <a:pPr>
+              <a:spcBef>
+                <a:spcPts val="800"/>
+              </a:spcBef>
+              <a:defRPr sz="1800">
+                <a:solidFill>
+                  <a:srgbClr val="F1F5F9"/>
+                </a:solidFill>
+              </a:defRPr>
+            </a:pPr>
+            <a:r>
+              <a:t>• kiro.dev/docs/crew/installation/ - Setup</a:t>
+            </a:r>
+          </a:p>
+          <a:p>
+            <a:pPr>
+              <a:spcBef>
+                <a:spcPts val="800"/>
+              </a:spcBef>
+              <a:defRPr sz="1800">
+                <a:solidFill>
+                  <a:srgbClr val="F1F5F9"/>
+                </a:solidFill>
+              </a:defRPr>
+            </a:pPr>
+            <a:r>
+              <a:t>• kiro.dev/docs/crew/features/ - Features</a:t>
+            </a:r>
+          </a:p>
+          <a:p>
+            <a:pPr>
+              <a:spcBef>
+                <a:spcPts val="800"/>
+              </a:spcBef>
+              <a:defRPr sz="1800">
+                <a:solidFill>
+                  <a:srgbClr val="F1F5F9"/>
+                </a:solidFill>
+              </a:defRPr>
+            </a:pPr>
+          </a:p>
+          <a:p>
+            <a:pPr>
+              <a:spcBef>
+                <a:spcPts val="800"/>
+              </a:spcBef>
+              <a:defRPr sz="1800">
+                <a:solidFill>
+                  <a:srgbClr val="F1F5F9"/>
+                </a:solidFill>
+              </a:defRPr>
+            </a:pPr>
+            <a:r>
+              <a:t>Specific Features:</a:t>
+            </a:r>
+          </a:p>
+          <a:p>
+            <a:pPr>
+              <a:spcBef>
+                <a:spcPts val="800"/>
+              </a:spcBef>
+              <a:defRPr sz="1800">
+                <a:solidFill>
+                  <a:srgbClr val="F1F5F9"/>
+                </a:solidFill>
+              </a:defRPr>
+            </a:pPr>
+            <a:r>
+              <a:t>• kiro.dev/docs/crew/features/memory/ - Memory</a:t>
+            </a:r>
+          </a:p>
+          <a:p>
+            <a:pPr>
+              <a:spcBef>
+                <a:spcPts val="800"/>
+              </a:spcBef>
+              <a:defRPr sz="1800">
+                <a:solidFill>
+                  <a:srgbClr val="F1F5F9"/>
+                </a:solidFill>
+              </a:defRPr>
+            </a:pPr>
+            <a:r>
+              <a:t>• kiro.dev/docs/crew/features/subagents/ - Subagents</a:t>
+            </a:r>
+          </a:p>
+          <a:p>
+            <a:pPr>
+              <a:spcBef>
+                <a:spcPts val="800"/>
+              </a:spcBef>
+              <a:defRPr sz="1800">
+                <a:solidFill>
+                  <a:srgbClr val="F1F5F9"/>
+                </a:solidFill>
+              </a:defRPr>
+            </a:pPr>
+            <a:r>
+              <a:t>• kiro.dev/docs/crew/features/cron/ - Scheduling</a:t>
+            </a:r>
+          </a:p>
+          <a:p>
+            <a:pPr>
+              <a:spcBef>
+                <a:spcPts val="800"/>
+              </a:spcBef>
+              <a:defRPr sz="1800">
+                <a:solidFill>
+                  <a:srgbClr val="F1F5F9"/>
+                </a:solidFill>
+              </a:defRPr>
+            </a:pPr>
+          </a:p>
+          <a:p>
+            <a:pPr>
+              <a:spcBef>
+                <a:spcPts val="800"/>
+              </a:spcBef>
+              <a:defRPr sz="1800">
+                <a:solidFill>
+                  <a:srgbClr val="F1F5F9"/>
+                </a:solidFill>
+              </a:defRPr>
+            </a:pPr>
+            <a:r>
+              <a:t>Pricing: kiro.dev/pricing/</a:t>
+            </a:r>
+          </a:p>
+        </p:txBody>
+      </p:sp>
+    </p:spTree>
+  </p:cSld>
+  <p:clrMapOvr>
+    <a:masterClrMapping/>
+  </p:clrMapOvr>
+</p:sld>
+</file>
+
 <file path=ppt/slides/slide4.xml><?xml version="1.0" encoding="utf-8"?>
 <p:sld xmlns:a="http://schemas.openxmlformats.org/drawingml/2006/main" xmlns:p="http://schemas.openxmlformats.org/presentationml/2006/main" xmlns:r="http://schemas.openxmlformats.org/officeDocument/2006/relationships">
   <p:cSld>
@@ -8354,6 +10696,137 @@
             </a:pPr>
             <a:r>
               <a:t>What is Kiro Crew?</a:t>
+            </a:r>
+          </a:p>
+        </p:txBody>
+      </p:sp>
+    </p:spTree>
+  </p:cSld>
+  <p:clrMapOvr>
+    <a:masterClrMapping/>
+  </p:clrMapOvr>
+</p:sld>
+</file>
+
+<file path=ppt/slides/slide40.xml><?xml version="1.0" encoding="utf-8"?>
+<p:sld xmlns:a="http://schemas.openxmlformats.org/drawingml/2006/main" xmlns:p="http://schemas.openxmlformats.org/presentationml/2006/main" xmlns:r="http://schemas.openxmlformats.org/officeDocument/2006/relationships">
+  <p:cSld>
+    <p:bg>
+      <p:bgPr>
+        <a:solidFill>
+          <a:srgbClr val="0F172A"/>
+        </a:solidFill>
+        <a:effectLst/>
+      </p:bgPr>
+    </p:bg>
+    <p:spTree>
+      <p:nvGrpSpPr>
+        <p:cNvPr id="1" name=""/>
+        <p:cNvGrpSpPr/>
+        <p:nvPr/>
+      </p:nvGrpSpPr>
+      <p:grpSpPr/>
+      <p:sp>
+        <p:nvSpPr>
+          <p:cNvPr id="2" name="TextBox 1"/>
+          <p:cNvSpPr txBox="1"/>
+          <p:nvPr/>
+        </p:nvSpPr>
+        <p:spPr>
+          <a:xfrm>
+            <a:off x="914400" y="2286000"/>
+            <a:ext cx="7315200" cy="914400"/>
+          </a:xfrm>
+          <a:prstGeom prst="rect">
+            <a:avLst/>
+          </a:prstGeom>
+          <a:noFill/>
+        </p:spPr>
+        <p:txBody>
+          <a:bodyPr wrap="none">
+            <a:spAutoFit/>
+          </a:bodyPr>
+          <a:lstStyle/>
+          <a:p>
+            <a:pPr algn="ctr">
+              <a:defRPr sz="5400" b="1">
+                <a:solidFill>
+                  <a:srgbClr val="F1F5F9"/>
+                </a:solidFill>
+              </a:defRPr>
+            </a:pPr>
+            <a:r>
+              <a:t>Questions?</a:t>
+            </a:r>
+          </a:p>
+        </p:txBody>
+      </p:sp>
+      <p:sp>
+        <p:nvSpPr>
+          <p:cNvPr id="3" name="TextBox 2"/>
+          <p:cNvSpPr txBox="1"/>
+          <p:nvPr/>
+        </p:nvSpPr>
+        <p:spPr>
+          <a:xfrm>
+            <a:off x="914400" y="3383280"/>
+            <a:ext cx="7315200" cy="731520"/>
+          </a:xfrm>
+          <a:prstGeom prst="rect">
+            <a:avLst/>
+          </a:prstGeom>
+          <a:noFill/>
+        </p:spPr>
+        <p:txBody>
+          <a:bodyPr wrap="none">
+            <a:spAutoFit/>
+          </a:bodyPr>
+          <a:lstStyle/>
+          <a:p>
+            <a:pPr algn="ctr">
+              <a:defRPr sz="2400">
+                <a:solidFill>
+                  <a:srgbClr val="94A3B8"/>
+                </a:solidFill>
+              </a:defRPr>
+            </a:pPr>
+            <a:r>
+              <a:t>Thank you for your attention</a:t>
+            </a:r>
+          </a:p>
+        </p:txBody>
+      </p:sp>
+      <p:sp>
+        <p:nvSpPr>
+          <p:cNvPr id="4" name="TextBox 3"/>
+          <p:cNvSpPr txBox="1"/>
+          <p:nvPr/>
+        </p:nvSpPr>
+        <p:spPr>
+          <a:xfrm>
+            <a:off x="914400" y="5943600"/>
+            <a:ext cx="7315200" cy="457200"/>
+          </a:xfrm>
+          <a:prstGeom prst="rect">
+            <a:avLst/>
+          </a:prstGeom>
+          <a:noFill/>
+        </p:spPr>
+        <p:txBody>
+          <a:bodyPr wrap="none">
+            <a:spAutoFit/>
+          </a:bodyPr>
+          <a:lstStyle/>
+          <a:p>
+            <a:pPr algn="ctr">
+              <a:defRPr sz="1400">
+                <a:solidFill>
+                  <a:srgbClr val="06B6D4"/>
+                </a:solidFill>
+              </a:defRPr>
+            </a:pPr>
+            <a:r>
+              <a:t>✓ All facts sourced from official docs | Verified 2026-08-31</a:t>
             </a:r>
           </a:p>
         </p:txBody>

--- a/kiro-crew-training.pptx
+++ b/kiro-crew-training.pptx
@@ -45,6 +45,8 @@
     <p:sldId id="293" r:id="rId44"/>
     <p:sldId id="294" r:id="rId45"/>
     <p:sldId id="295" r:id="rId46"/>
+    <p:sldId id="296" r:id="rId47"/>
+    <p:sldId id="297" r:id="rId48"/>
   </p:sldIdLst>
   <p:sldSz cx="9144000" cy="6858000" type="screen4x3"/>
   <p:notesSz cx="6858000" cy="9144000"/>
@@ -3915,7 +3917,7 @@
               </a:defRPr>
             </a:pPr>
             <a:r>
-              <a:t>Subagents</a:t>
+              <a:t>Memory: How It's Built &amp; Conflict Resolution</a:t>
             </a:r>
           </a:p>
         </p:txBody>
@@ -3988,151 +3990,94 @@
               </a:defRPr>
             </a:pPr>
             <a:r>
-              <a:t>Parallel background agents for research and investigation</a:t>
-            </a:r>
-          </a:p>
-          <a:p>
-            <a:pPr>
-              <a:spcBef>
-                <a:spcPts val="800"/>
-              </a:spcBef>
-              <a:defRPr sz="1800">
-                <a:solidFill>
-                  <a:srgbClr val="F1F5F9"/>
-                </a:solidFill>
-              </a:defRPr>
-            </a:pPr>
-          </a:p>
-          <a:p>
-            <a:pPr>
-              <a:spcBef>
-                <a:spcPts val="800"/>
-              </a:spcBef>
-              <a:defRPr sz="1800">
-                <a:solidFill>
-                  <a:srgbClr val="F1F5F9"/>
-                </a:solidFill>
-              </a:defRPr>
-            </a:pPr>
-            <a:r>
-              <a:t>Concurrency: 3-32 (auto-sized, NOT 11)</a:t>
-            </a:r>
-          </a:p>
-          <a:p>
-            <a:pPr>
-              <a:spcBef>
-                <a:spcPts val="800"/>
-              </a:spcBef>
-              <a:defRPr sz="1800">
-                <a:solidFill>
-                  <a:srgbClr val="F1F5F9"/>
-                </a:solidFill>
-              </a:defRPr>
-            </a:pPr>
-            <a:r>
-              <a:t>Timeout: 30 minutes hard limit</a:t>
-            </a:r>
-          </a:p>
-          <a:p>
-            <a:pPr>
-              <a:spcBef>
-                <a:spcPts val="800"/>
-              </a:spcBef>
-              <a:defRPr sz="1800">
-                <a:solidFill>
-                  <a:srgbClr val="F1F5F9"/>
-                </a:solidFill>
-              </a:defRPr>
-            </a:pPr>
-            <a:r>
-              <a:t>Stall detection: ~2 minutes</a:t>
-            </a:r>
-          </a:p>
-          <a:p>
-            <a:pPr>
-              <a:spcBef>
-                <a:spcPts val="800"/>
-              </a:spcBef>
-              <a:defRPr sz="1800">
-                <a:solidFill>
-                  <a:srgbClr val="F1F5F9"/>
-                </a:solidFill>
-              </a:defRPr>
-            </a:pPr>
-            <a:r>
-              <a:t>Context: Isolated sessions with memory injection</a:t>
-            </a:r>
-          </a:p>
-          <a:p>
-            <a:pPr>
-              <a:spcBef>
-                <a:spcPts val="800"/>
-              </a:spcBef>
-              <a:defRPr sz="1800">
-                <a:solidFill>
-                  <a:srgbClr val="F1F5F9"/>
-                </a:solidFill>
-              </a:defRPr>
-            </a:pPr>
-          </a:p>
-          <a:p>
-            <a:pPr>
-              <a:spcBef>
-                <a:spcPts val="800"/>
-              </a:spcBef>
-              <a:defRPr sz="1800">
-                <a:solidFill>
-                  <a:srgbClr val="F1F5F9"/>
-                </a:solidFill>
-              </a:defRPr>
-            </a:pPr>
-            <a:r>
-              <a:t>Example: 'Research Redis, PostgreSQL, MongoDB'</a:t>
-            </a:r>
-          </a:p>
-          <a:p>
-            <a:pPr>
-              <a:spcBef>
-                <a:spcPts val="800"/>
-              </a:spcBef>
-              <a:defRPr sz="1800">
-                <a:solidFill>
-                  <a:srgbClr val="F1F5F9"/>
-                </a:solidFill>
-              </a:defRPr>
-            </a:pPr>
-            <a:r>
-              <a:t>→ Spawns 3 parallel agents</a:t>
-            </a:r>
-          </a:p>
-          <a:p>
-            <a:pPr>
-              <a:spcBef>
-                <a:spcPts val="800"/>
-              </a:spcBef>
-              <a:defRPr sz="1800">
-                <a:solidFill>
-                  <a:srgbClr val="F1F5F9"/>
-                </a:solidFill>
-              </a:defRPr>
-            </a:pPr>
-            <a:r>
-              <a:t>→ Each investigates one technology</a:t>
-            </a:r>
-          </a:p>
-          <a:p>
-            <a:pPr>
-              <a:spcBef>
-                <a:spcPts val="800"/>
-              </a:spcBef>
-              <a:defRPr sz="1800">
-                <a:solidFill>
-                  <a:srgbClr val="F1F5F9"/>
-                </a:solidFill>
-              </a:defRPr>
-            </a:pPr>
-            <a:r>
-              <a:t>→ Results aggregated</a:t>
+              <a:t>Consolidation triggers:</a:t>
+            </a:r>
+          </a:p>
+          <a:p>
+            <a:pPr>
+              <a:spcBef>
+                <a:spcPts val="800"/>
+              </a:spcBef>
+              <a:defRPr sz="1800">
+                <a:solidFill>
+                  <a:srgbClr val="F1F5F9"/>
+                </a:solidFill>
+              </a:defRPr>
+            </a:pPr>
+            <a:r>
+              <a:t>  learn_add (immediate) / 30 messages (prefs) / 3h idle (history)</a:t>
+            </a:r>
+          </a:p>
+          <a:p>
+            <a:pPr>
+              <a:spcBef>
+                <a:spcPts val="800"/>
+              </a:spcBef>
+              <a:defRPr sz="1800">
+                <a:solidFill>
+                  <a:srgbClr val="F1F5F9"/>
+                </a:solidFill>
+              </a:defRPr>
+            </a:pPr>
+            <a:r>
+              <a:t>Explicit lessons (say 'remember') vs implicit (correction detected)</a:t>
+            </a:r>
+          </a:p>
+          <a:p>
+            <a:pPr>
+              <a:spcBef>
+                <a:spcPts val="800"/>
+              </a:spcBef>
+              <a:defRPr sz="1800">
+                <a:solidFill>
+                  <a:srgbClr val="F1F5F9"/>
+                </a:solidFill>
+              </a:defRPr>
+            </a:pPr>
+          </a:p>
+          <a:p>
+            <a:pPr>
+              <a:spcBef>
+                <a:spcPts val="800"/>
+              </a:spcBef>
+              <a:defRPr sz="1800">
+                <a:solidFill>
+                  <a:srgbClr val="F1F5F9"/>
+                </a:solidFill>
+              </a:defRPr>
+            </a:pPr>
+            <a:r>
+              <a:t>Conflict resolution priority (highest wins):</a:t>
+            </a:r>
+          </a:p>
+          <a:p>
+            <a:pPr>
+              <a:spcBef>
+                <a:spcPts val="800"/>
+              </a:spcBef>
+              <a:defRPr sz="1800">
+                <a:solidFill>
+                  <a:srgbClr val="F1F5F9"/>
+                </a:solidFill>
+              </a:defRPr>
+            </a:pPr>
+            <a:r>
+              <a:t>  1 Lessons (conf 1.0)  2 Semantic (user)  3 Semantic (LLM &gt;=0.8)</a:t>
+            </a:r>
+          </a:p>
+          <a:p>
+            <a:pPr>
+              <a:spcBef>
+                <a:spcPts val="800"/>
+              </a:spcBef>
+              <a:defRPr sz="1800">
+                <a:solidFill>
+                  <a:srgbClr val="F1F5F9"/>
+                </a:solidFill>
+              </a:defRPr>
+            </a:pPr>
+            <a:r>
+              <a:t>  4 Preferences/Projects  5 Episodic  6 History</a:t>
             </a:r>
           </a:p>
         </p:txBody>
@@ -4193,7 +4138,7 @@
               </a:defRPr>
             </a:pPr>
             <a:r>
-              <a:t>Scheduling (3 Modes)</a:t>
+              <a:t>Memory: Context Assembly &amp; Channel-Aware</a:t>
             </a:r>
           </a:p>
         </p:txBody>
@@ -4266,166 +4211,109 @@
               </a:defRPr>
             </a:pPr>
             <a:r>
-              <a:t>Mode 1: Cron Jobs</a:t>
-            </a:r>
-          </a:p>
-          <a:p>
-            <a:pPr>
-              <a:spcBef>
-                <a:spcPts val="800"/>
-              </a:spcBef>
-              <a:defRPr sz="1800">
-                <a:solidFill>
-                  <a:srgbClr val="F1F5F9"/>
-                </a:solidFill>
-              </a:defRPr>
-            </a:pPr>
-            <a:r>
-              <a:t>• Standard cron expressions or --every N seconds</a:t>
-            </a:r>
-          </a:p>
-          <a:p>
-            <a:pPr>
-              <a:spcBef>
-                <a:spcPts val="800"/>
-              </a:spcBef>
-              <a:defRPr sz="1800">
-                <a:solidFill>
-                  <a:srgbClr val="F1F5F9"/>
-                </a:solidFill>
-              </a:defRPr>
-            </a:pPr>
-            <a:r>
-              <a:t>• Default timeout: 1800s (30 min)</a:t>
-            </a:r>
-          </a:p>
-          <a:p>
-            <a:pPr>
-              <a:spcBef>
-                <a:spcPts val="800"/>
-              </a:spcBef>
-              <a:defRPr sz="1800">
-                <a:solidFill>
-                  <a:srgbClr val="F1F5F9"/>
-                </a:solidFill>
-              </a:defRPr>
-            </a:pPr>
-          </a:p>
-          <a:p>
-            <a:pPr>
-              <a:spcBef>
-                <a:spcPts val="800"/>
-              </a:spcBef>
-              <a:defRPr sz="1800">
-                <a:solidFill>
-                  <a:srgbClr val="F1F5F9"/>
-                </a:solidFill>
-              </a:defRPr>
-            </a:pPr>
-            <a:r>
-              <a:t>Mode 2: Heartbeats</a:t>
-            </a:r>
-          </a:p>
-          <a:p>
-            <a:pPr>
-              <a:spcBef>
-                <a:spcPts val="800"/>
-              </a:spcBef>
-              <a:defRPr sz="1800">
-                <a:solidFill>
-                  <a:srgbClr val="F1F5F9"/>
-                </a:solidFill>
-              </a:defRPr>
-            </a:pPr>
-            <a:r>
-              <a:t>• Reactive monitoring (checks every 60s)</a:t>
-            </a:r>
-          </a:p>
-          <a:p>
-            <a:pPr>
-              <a:spcBef>
-                <a:spcPts val="800"/>
-              </a:spcBef>
-              <a:defRPr sz="1800">
-                <a:solidFill>
-                  <a:srgbClr val="F1F5F9"/>
-                </a:solidFill>
-              </a:defRPr>
-            </a:pPr>
-            <a:r>
-              <a:t>• Only surfaces when something changes</a:t>
-            </a:r>
-          </a:p>
-          <a:p>
-            <a:pPr>
-              <a:spcBef>
-                <a:spcPts val="800"/>
-              </a:spcBef>
-              <a:defRPr sz="1800">
-                <a:solidFill>
-                  <a:srgbClr val="F1F5F9"/>
-                </a:solidFill>
-              </a:defRPr>
-            </a:pPr>
-          </a:p>
-          <a:p>
-            <a:pPr>
-              <a:spcBef>
-                <a:spcPts val="800"/>
-              </a:spcBef>
-              <a:defRPr sz="1800">
-                <a:solidFill>
-                  <a:srgbClr val="F1F5F9"/>
-                </a:solidFill>
-              </a:defRPr>
-            </a:pPr>
-            <a:r>
-              <a:t>Mode 3: Webhooks</a:t>
-            </a:r>
-          </a:p>
-          <a:p>
-            <a:pPr>
-              <a:spcBef>
-                <a:spcPts val="800"/>
-              </a:spcBef>
-              <a:defRPr sz="1800">
-                <a:solidFill>
-                  <a:srgbClr val="F1F5F9"/>
-                </a:solidFill>
-              </a:defRPr>
-            </a:pPr>
-            <a:r>
-              <a:t>• External triggers via HTTP POST</a:t>
-            </a:r>
-          </a:p>
-          <a:p>
-            <a:pPr>
-              <a:spcBef>
-                <a:spcPts val="800"/>
-              </a:spcBef>
-              <a:defRPr sz="1800">
-                <a:solidFill>
-                  <a:srgbClr val="F1F5F9"/>
-                </a:solidFill>
-              </a:defRPr>
-            </a:pPr>
-            <a:r>
-              <a:t>• Max 6 concurrent sessions</a:t>
-            </a:r>
-          </a:p>
-          <a:p>
-            <a:pPr>
-              <a:spcBef>
-                <a:spcPts val="800"/>
-              </a:spcBef>
-              <a:defRPr sz="1800">
-                <a:solidFill>
-                  <a:srgbClr val="F1F5F9"/>
-                </a:solidFill>
-              </a:defRPr>
-            </a:pPr>
-            <a:r>
-              <a:t>• Bearer token authentication</a:t>
+              <a:t>Session start: rules, prompt, thread history (45K compressed),</a:t>
+            </a:r>
+          </a:p>
+          <a:p>
+            <a:pPr>
+              <a:spcBef>
+                <a:spcPts val="800"/>
+              </a:spcBef>
+              <a:defRPr sz="1800">
+                <a:solidFill>
+                  <a:srgbClr val="F1F5F9"/>
+                </a:solidFill>
+              </a:defRPr>
+            </a:pPr>
+            <a:r>
+              <a:t>  prefs/projects/history, skills, lessons, semantic</a:t>
+            </a:r>
+          </a:p>
+          <a:p>
+            <a:pPr>
+              <a:spcBef>
+                <a:spcPts val="800"/>
+              </a:spcBef>
+              <a:defRPr sz="1800">
+                <a:solidFill>
+                  <a:srgbClr val="F1F5F9"/>
+                </a:solidFill>
+              </a:defRPr>
+            </a:pPr>
+            <a:r>
+              <a:t>Per message: episodic (top-8), channel history, triggered skills, hooks</a:t>
+            </a:r>
+          </a:p>
+          <a:p>
+            <a:pPr>
+              <a:spcBef>
+                <a:spcPts val="800"/>
+              </a:spcBef>
+              <a:defRPr sz="1800">
+                <a:solidFill>
+                  <a:srgbClr val="F1F5F9"/>
+                </a:solidFill>
+              </a:defRPr>
+            </a:pPr>
+          </a:p>
+          <a:p>
+            <a:pPr>
+              <a:spcBef>
+                <a:spcPts val="800"/>
+              </a:spcBef>
+              <a:defRPr sz="1800">
+                <a:solidFill>
+                  <a:srgbClr val="F1F5F9"/>
+                </a:solidFill>
+              </a:defRPr>
+            </a:pPr>
+            <a:r>
+              <a:t>Channel-aware recording:</a:t>
+            </a:r>
+          </a:p>
+          <a:p>
+            <a:pPr>
+              <a:spcBef>
+                <a:spcPts val="800"/>
+              </a:spcBef>
+              <a:defRPr sz="1800">
+                <a:solidFill>
+                  <a:srgbClr val="F1F5F9"/>
+                </a:solidFill>
+              </a:defRPr>
+            </a:pPr>
+            <a:r>
+              <a:t>  DM=always | group @mention (50msg/5min) | observe (200msg/1wk)</a:t>
+            </a:r>
+          </a:p>
+          <a:p>
+            <a:pPr>
+              <a:spcBef>
+                <a:spcPts val="800"/>
+              </a:spcBef>
+              <a:defRPr sz="1800">
+                <a:solidFill>
+                  <a:srgbClr val="F1F5F9"/>
+                </a:solidFill>
+              </a:defRPr>
+            </a:pPr>
+            <a:r>
+              <a:t>  | off=none | dashboard=session. Observe records authorized users only</a:t>
+            </a:r>
+          </a:p>
+          <a:p>
+            <a:pPr>
+              <a:spcBef>
+                <a:spcPts val="800"/>
+              </a:spcBef>
+              <a:defRPr sz="1800">
+                <a:solidFill>
+                  <a:srgbClr val="F1F5F9"/>
+                </a:solidFill>
+              </a:defRPr>
+            </a:pPr>
+            <a:r>
+              <a:t>Teach: kirocrew learn add/list/remove; Memory Graph Explorer in dashboard</a:t>
             </a:r>
           </a:p>
         </p:txBody>
@@ -4486,7 +4374,7 @@
               </a:defRPr>
             </a:pPr>
             <a:r>
-              <a:t>Task Runner</a:t>
+              <a:t>Subagents</a:t>
             </a:r>
           </a:p>
         </p:txBody>
@@ -4559,151 +4447,151 @@
               </a:defRPr>
             </a:pPr>
             <a:r>
-              <a:t>Autonomous task execution from specifications</a:t>
-            </a:r>
-          </a:p>
-          <a:p>
-            <a:pPr>
-              <a:spcBef>
-                <a:spcPts val="800"/>
-              </a:spcBef>
-              <a:defRPr sz="1800">
-                <a:solidFill>
-                  <a:srgbClr val="F1F5F9"/>
-                </a:solidFill>
-              </a:defRPr>
-            </a:pPr>
-          </a:p>
-          <a:p>
-            <a:pPr>
-              <a:spcBef>
-                <a:spcPts val="800"/>
-              </a:spcBef>
-              <a:defRPr sz="1800">
-                <a:solidFill>
-                  <a:srgbClr val="F1F5F9"/>
-                </a:solidFill>
-              </a:defRPr>
-            </a:pPr>
-            <a:r>
-              <a:t>Process:</a:t>
-            </a:r>
-          </a:p>
-          <a:p>
-            <a:pPr>
-              <a:spcBef>
-                <a:spcPts val="800"/>
-              </a:spcBef>
-              <a:defRPr sz="1800">
-                <a:solidFill>
-                  <a:srgbClr val="F1F5F9"/>
-                </a:solidFill>
-              </a:defRPr>
-            </a:pPr>
-            <a:r>
-              <a:t>1. Decompose spec into steps</a:t>
-            </a:r>
-          </a:p>
-          <a:p>
-            <a:pPr>
-              <a:spcBef>
-                <a:spcPts val="800"/>
-              </a:spcBef>
-              <a:defRPr sz="1800">
-                <a:solidFill>
-                  <a:srgbClr val="F1F5F9"/>
-                </a:solidFill>
-              </a:defRPr>
-            </a:pPr>
-            <a:r>
-              <a:t>2. Execute with checkpoints</a:t>
-            </a:r>
-          </a:p>
-          <a:p>
-            <a:pPr>
-              <a:spcBef>
-                <a:spcPts val="800"/>
-              </a:spcBef>
-              <a:defRPr sz="1800">
-                <a:solidFill>
-                  <a:srgbClr val="F1F5F9"/>
-                </a:solidFill>
-              </a:defRPr>
-            </a:pPr>
-            <a:r>
-              <a:t>3. Test step completion</a:t>
-            </a:r>
-          </a:p>
-          <a:p>
-            <a:pPr>
-              <a:spcBef>
-                <a:spcPts val="800"/>
-              </a:spcBef>
-              <a:defRPr sz="1800">
-                <a:solidFill>
-                  <a:srgbClr val="F1F5F9"/>
-                </a:solidFill>
-              </a:defRPr>
-            </a:pPr>
-            <a:r>
-              <a:t>4. Retry on failure</a:t>
-            </a:r>
-          </a:p>
-          <a:p>
-            <a:pPr>
-              <a:spcBef>
-                <a:spcPts val="800"/>
-              </a:spcBef>
-              <a:defRPr sz="1800">
-                <a:solidFill>
-                  <a:srgbClr val="F1F5F9"/>
-                </a:solidFill>
-              </a:defRPr>
-            </a:pPr>
-            <a:r>
-              <a:t>5. Resume from failure point</a:t>
-            </a:r>
-          </a:p>
-          <a:p>
-            <a:pPr>
-              <a:spcBef>
-                <a:spcPts val="800"/>
-              </a:spcBef>
-              <a:defRPr sz="1800">
-                <a:solidFill>
-                  <a:srgbClr val="F1F5F9"/>
-                </a:solidFill>
-              </a:defRPr>
-            </a:pPr>
-          </a:p>
-          <a:p>
-            <a:pPr>
-              <a:spcBef>
-                <a:spcPts val="800"/>
-              </a:spcBef>
-              <a:defRPr sz="1800">
-                <a:solidFill>
-                  <a:srgbClr val="F1F5F9"/>
-                </a:solidFill>
-              </a:defRPr>
-            </a:pPr>
-            <a:r>
-              <a:t>Dashboard shows live progress</a:t>
-            </a:r>
-          </a:p>
-          <a:p>
-            <a:pPr>
-              <a:spcBef>
-                <a:spcPts val="800"/>
-              </a:spcBef>
-              <a:defRPr sz="1800">
-                <a:solidFill>
-                  <a:srgbClr val="F1F5F9"/>
-                </a:solidFill>
-              </a:defRPr>
-            </a:pPr>
-            <a:r>
-              <a:t>Source: kiro.dev/docs/crew/features/task-runner/</a:t>
+              <a:t>Parallel background agents for research and investigation</a:t>
+            </a:r>
+          </a:p>
+          <a:p>
+            <a:pPr>
+              <a:spcBef>
+                <a:spcPts val="800"/>
+              </a:spcBef>
+              <a:defRPr sz="1800">
+                <a:solidFill>
+                  <a:srgbClr val="F1F5F9"/>
+                </a:solidFill>
+              </a:defRPr>
+            </a:pPr>
+          </a:p>
+          <a:p>
+            <a:pPr>
+              <a:spcBef>
+                <a:spcPts val="800"/>
+              </a:spcBef>
+              <a:defRPr sz="1800">
+                <a:solidFill>
+                  <a:srgbClr val="F1F5F9"/>
+                </a:solidFill>
+              </a:defRPr>
+            </a:pPr>
+            <a:r>
+              <a:t>Concurrency: 3-32 (auto-sized, NOT 11)</a:t>
+            </a:r>
+          </a:p>
+          <a:p>
+            <a:pPr>
+              <a:spcBef>
+                <a:spcPts val="800"/>
+              </a:spcBef>
+              <a:defRPr sz="1800">
+                <a:solidFill>
+                  <a:srgbClr val="F1F5F9"/>
+                </a:solidFill>
+              </a:defRPr>
+            </a:pPr>
+            <a:r>
+              <a:t>Timeout: 30 minutes hard limit</a:t>
+            </a:r>
+          </a:p>
+          <a:p>
+            <a:pPr>
+              <a:spcBef>
+                <a:spcPts val="800"/>
+              </a:spcBef>
+              <a:defRPr sz="1800">
+                <a:solidFill>
+                  <a:srgbClr val="F1F5F9"/>
+                </a:solidFill>
+              </a:defRPr>
+            </a:pPr>
+            <a:r>
+              <a:t>Stall detection: ~2 minutes</a:t>
+            </a:r>
+          </a:p>
+          <a:p>
+            <a:pPr>
+              <a:spcBef>
+                <a:spcPts val="800"/>
+              </a:spcBef>
+              <a:defRPr sz="1800">
+                <a:solidFill>
+                  <a:srgbClr val="F1F5F9"/>
+                </a:solidFill>
+              </a:defRPr>
+            </a:pPr>
+            <a:r>
+              <a:t>Context: Isolated sessions with memory injection</a:t>
+            </a:r>
+          </a:p>
+          <a:p>
+            <a:pPr>
+              <a:spcBef>
+                <a:spcPts val="800"/>
+              </a:spcBef>
+              <a:defRPr sz="1800">
+                <a:solidFill>
+                  <a:srgbClr val="F1F5F9"/>
+                </a:solidFill>
+              </a:defRPr>
+            </a:pPr>
+          </a:p>
+          <a:p>
+            <a:pPr>
+              <a:spcBef>
+                <a:spcPts val="800"/>
+              </a:spcBef>
+              <a:defRPr sz="1800">
+                <a:solidFill>
+                  <a:srgbClr val="F1F5F9"/>
+                </a:solidFill>
+              </a:defRPr>
+            </a:pPr>
+            <a:r>
+              <a:t>Example: 'Research Redis, PostgreSQL, MongoDB'</a:t>
+            </a:r>
+          </a:p>
+          <a:p>
+            <a:pPr>
+              <a:spcBef>
+                <a:spcPts val="800"/>
+              </a:spcBef>
+              <a:defRPr sz="1800">
+                <a:solidFill>
+                  <a:srgbClr val="F1F5F9"/>
+                </a:solidFill>
+              </a:defRPr>
+            </a:pPr>
+            <a:r>
+              <a:t>→ Spawns 3 parallel agents</a:t>
+            </a:r>
+          </a:p>
+          <a:p>
+            <a:pPr>
+              <a:spcBef>
+                <a:spcPts val="800"/>
+              </a:spcBef>
+              <a:defRPr sz="1800">
+                <a:solidFill>
+                  <a:srgbClr val="F1F5F9"/>
+                </a:solidFill>
+              </a:defRPr>
+            </a:pPr>
+            <a:r>
+              <a:t>→ Each investigates one technology</a:t>
+            </a:r>
+          </a:p>
+          <a:p>
+            <a:pPr>
+              <a:spcBef>
+                <a:spcPts val="800"/>
+              </a:spcBef>
+              <a:defRPr sz="1800">
+                <a:solidFill>
+                  <a:srgbClr val="F1F5F9"/>
+                </a:solidFill>
+              </a:defRPr>
+            </a:pPr>
+            <a:r>
+              <a:t>→ Results aggregated</a:t>
             </a:r>
           </a:p>
         </p:txBody>
@@ -4764,7 +4652,7 @@
               </a:defRPr>
             </a:pPr>
             <a:r>
-              <a:t>Artifacts &amp; Knowledge</a:t>
+              <a:t>Scheduling (3 Modes)</a:t>
             </a:r>
           </a:p>
         </p:txBody>
@@ -4837,139 +4725,166 @@
               </a:defRPr>
             </a:pPr>
             <a:r>
-              <a:t>Artifacts: Persistent outputs with version history</a:t>
-            </a:r>
-          </a:p>
-          <a:p>
-            <a:pPr>
-              <a:spcBef>
-                <a:spcPts val="800"/>
-              </a:spcBef>
-              <a:defRPr sz="1800">
-                <a:solidFill>
-                  <a:srgbClr val="F1F5F9"/>
-                </a:solidFill>
-              </a:defRPr>
-            </a:pPr>
-            <a:r>
-              <a:t>• Kinds: widget, HTML, markdown, SVG, JSON, text</a:t>
-            </a:r>
-          </a:p>
-          <a:p>
-            <a:pPr>
-              <a:spcBef>
-                <a:spcPts val="800"/>
-              </a:spcBef>
-              <a:defRPr sz="1800">
-                <a:solidFill>
-                  <a:srgbClr val="F1F5F9"/>
-                </a:solidFill>
-              </a:defRPr>
-            </a:pPr>
-            <a:r>
-              <a:t>• Live previews in dashboard</a:t>
-            </a:r>
-          </a:p>
-          <a:p>
-            <a:pPr>
-              <a:spcBef>
-                <a:spcPts val="800"/>
-              </a:spcBef>
-              <a:defRPr sz="1800">
-                <a:solidFill>
-                  <a:srgbClr val="F1F5F9"/>
-                </a:solidFill>
-              </a:defRPr>
-            </a:pPr>
-            <a:r>
-              <a:t>• Optional: Deploy to AWS (your account)</a:t>
-            </a:r>
-          </a:p>
-          <a:p>
-            <a:pPr>
-              <a:spcBef>
-                <a:spcPts val="800"/>
-              </a:spcBef>
-              <a:defRPr sz="1800">
-                <a:solidFill>
-                  <a:srgbClr val="F1F5F9"/>
-                </a:solidFill>
-              </a:defRPr>
-            </a:pPr>
-          </a:p>
-          <a:p>
-            <a:pPr>
-              <a:spcBef>
-                <a:spcPts val="800"/>
-              </a:spcBef>
-              <a:defRPr sz="1800">
-                <a:solidFill>
-                  <a:srgbClr val="F1F5F9"/>
-                </a:solidFill>
-              </a:defRPr>
-            </a:pPr>
-            <a:r>
-              <a:t>Knowledge Library: Curated document store</a:t>
-            </a:r>
-          </a:p>
-          <a:p>
-            <a:pPr>
-              <a:spcBef>
-                <a:spcPts val="800"/>
-              </a:spcBef>
-              <a:defRPr sz="1800">
-                <a:solidFill>
-                  <a:srgbClr val="F1F5F9"/>
-                </a:solidFill>
-              </a:defRPr>
-            </a:pPr>
-            <a:r>
-              <a:t>• Sources: local files, folders, URLs</a:t>
-            </a:r>
-          </a:p>
-          <a:p>
-            <a:pPr>
-              <a:spcBef>
-                <a:spcPts val="800"/>
-              </a:spcBef>
-              <a:defRPr sz="1800">
-                <a:solidFill>
-                  <a:srgbClr val="F1F5F9"/>
-                </a:solidFill>
-              </a:defRPr>
-            </a:pPr>
-            <a:r>
-              <a:t>• Ingestion: chunking, embeddings</a:t>
-            </a:r>
-          </a:p>
-          <a:p>
-            <a:pPr>
-              <a:spcBef>
-                <a:spcPts val="800"/>
-              </a:spcBef>
-              <a:defRPr sz="1800">
-                <a:solidFill>
-                  <a:srgbClr val="F1F5F9"/>
-                </a:solidFill>
-              </a:defRPr>
-            </a:pPr>
-            <a:r>
-              <a:t>• Search via local_knowledge_search MCP tool</a:t>
-            </a:r>
-          </a:p>
-          <a:p>
-            <a:pPr>
-              <a:spcBef>
-                <a:spcPts val="800"/>
-              </a:spcBef>
-              <a:defRPr sz="1800">
-                <a:solidFill>
-                  <a:srgbClr val="F1F5F9"/>
-                </a:solidFill>
-              </a:defRPr>
-            </a:pPr>
-            <a:r>
-              <a:t>• Built-in dashboard surface</a:t>
+              <a:t>Mode 1: Cron Jobs</a:t>
+            </a:r>
+          </a:p>
+          <a:p>
+            <a:pPr>
+              <a:spcBef>
+                <a:spcPts val="800"/>
+              </a:spcBef>
+              <a:defRPr sz="1800">
+                <a:solidFill>
+                  <a:srgbClr val="F1F5F9"/>
+                </a:solidFill>
+              </a:defRPr>
+            </a:pPr>
+            <a:r>
+              <a:t>• Standard cron expressions or --every N seconds</a:t>
+            </a:r>
+          </a:p>
+          <a:p>
+            <a:pPr>
+              <a:spcBef>
+                <a:spcPts val="800"/>
+              </a:spcBef>
+              <a:defRPr sz="1800">
+                <a:solidFill>
+                  <a:srgbClr val="F1F5F9"/>
+                </a:solidFill>
+              </a:defRPr>
+            </a:pPr>
+            <a:r>
+              <a:t>• Default timeout: 1800s (30 min)</a:t>
+            </a:r>
+          </a:p>
+          <a:p>
+            <a:pPr>
+              <a:spcBef>
+                <a:spcPts val="800"/>
+              </a:spcBef>
+              <a:defRPr sz="1800">
+                <a:solidFill>
+                  <a:srgbClr val="F1F5F9"/>
+                </a:solidFill>
+              </a:defRPr>
+            </a:pPr>
+          </a:p>
+          <a:p>
+            <a:pPr>
+              <a:spcBef>
+                <a:spcPts val="800"/>
+              </a:spcBef>
+              <a:defRPr sz="1800">
+                <a:solidFill>
+                  <a:srgbClr val="F1F5F9"/>
+                </a:solidFill>
+              </a:defRPr>
+            </a:pPr>
+            <a:r>
+              <a:t>Mode 2: Heartbeats</a:t>
+            </a:r>
+          </a:p>
+          <a:p>
+            <a:pPr>
+              <a:spcBef>
+                <a:spcPts val="800"/>
+              </a:spcBef>
+              <a:defRPr sz="1800">
+                <a:solidFill>
+                  <a:srgbClr val="F1F5F9"/>
+                </a:solidFill>
+              </a:defRPr>
+            </a:pPr>
+            <a:r>
+              <a:t>• Reactive monitoring (checks every 60s)</a:t>
+            </a:r>
+          </a:p>
+          <a:p>
+            <a:pPr>
+              <a:spcBef>
+                <a:spcPts val="800"/>
+              </a:spcBef>
+              <a:defRPr sz="1800">
+                <a:solidFill>
+                  <a:srgbClr val="F1F5F9"/>
+                </a:solidFill>
+              </a:defRPr>
+            </a:pPr>
+            <a:r>
+              <a:t>• Only surfaces when something changes</a:t>
+            </a:r>
+          </a:p>
+          <a:p>
+            <a:pPr>
+              <a:spcBef>
+                <a:spcPts val="800"/>
+              </a:spcBef>
+              <a:defRPr sz="1800">
+                <a:solidFill>
+                  <a:srgbClr val="F1F5F9"/>
+                </a:solidFill>
+              </a:defRPr>
+            </a:pPr>
+          </a:p>
+          <a:p>
+            <a:pPr>
+              <a:spcBef>
+                <a:spcPts val="800"/>
+              </a:spcBef>
+              <a:defRPr sz="1800">
+                <a:solidFill>
+                  <a:srgbClr val="F1F5F9"/>
+                </a:solidFill>
+              </a:defRPr>
+            </a:pPr>
+            <a:r>
+              <a:t>Mode 3: Webhooks</a:t>
+            </a:r>
+          </a:p>
+          <a:p>
+            <a:pPr>
+              <a:spcBef>
+                <a:spcPts val="800"/>
+              </a:spcBef>
+              <a:defRPr sz="1800">
+                <a:solidFill>
+                  <a:srgbClr val="F1F5F9"/>
+                </a:solidFill>
+              </a:defRPr>
+            </a:pPr>
+            <a:r>
+              <a:t>• External triggers via HTTP POST</a:t>
+            </a:r>
+          </a:p>
+          <a:p>
+            <a:pPr>
+              <a:spcBef>
+                <a:spcPts val="800"/>
+              </a:spcBef>
+              <a:defRPr sz="1800">
+                <a:solidFill>
+                  <a:srgbClr val="F1F5F9"/>
+                </a:solidFill>
+              </a:defRPr>
+            </a:pPr>
+            <a:r>
+              <a:t>• Max 6 concurrent sessions</a:t>
+            </a:r>
+          </a:p>
+          <a:p>
+            <a:pPr>
+              <a:spcBef>
+                <a:spcPts val="800"/>
+              </a:spcBef>
+              <a:defRPr sz="1800">
+                <a:solidFill>
+                  <a:srgbClr val="F1F5F9"/>
+                </a:solidFill>
+              </a:defRPr>
+            </a:pPr>
+            <a:r>
+              <a:t>• Bearer token authentication</a:t>
             </a:r>
           </a:p>
         </p:txBody>
@@ -4988,7 +4903,7 @@
     <p:bg>
       <p:bgPr>
         <a:solidFill>
-          <a:srgbClr val="1E293B"/>
+          <a:srgbClr val="0F172A"/>
         </a:solidFill>
         <a:effectLst/>
       </p:bgPr>
@@ -5008,8 +4923,8 @@
         </p:nvSpPr>
         <p:spPr>
           <a:xfrm>
-            <a:off x="914400" y="2743200"/>
-            <a:ext cx="7315200" cy="914400"/>
+            <a:off x="457200" y="365760"/>
+            <a:ext cx="6858000" cy="548640"/>
           </a:xfrm>
           <a:prstGeom prst="rect">
             <a:avLst/>
@@ -5022,15 +4937,232 @@
           </a:bodyPr>
           <a:lstStyle/>
           <a:p>
-            <a:pPr algn="ctr">
-              <a:defRPr sz="4400" b="1">
+            <a:pPr>
+              <a:defRPr sz="3200" b="1">
                 <a:solidFill>
                   <a:srgbClr val="2563EB"/>
                 </a:solidFill>
               </a:defRPr>
             </a:pPr>
             <a:r>
-              <a:t>Subscription &amp; Pricing</a:t>
+              <a:t>Task Runner</a:t>
+            </a:r>
+          </a:p>
+        </p:txBody>
+      </p:sp>
+      <p:sp>
+        <p:nvSpPr>
+          <p:cNvPr id="3" name="TextBox 2"/>
+          <p:cNvSpPr txBox="1"/>
+          <p:nvPr/>
+        </p:nvSpPr>
+        <p:spPr>
+          <a:xfrm>
+            <a:off x="7498079" y="411480"/>
+            <a:ext cx="1371600" cy="365760"/>
+          </a:xfrm>
+          <a:prstGeom prst="rect">
+            <a:avLst/>
+          </a:prstGeom>
+          <a:noFill/>
+        </p:spPr>
+        <p:txBody>
+          <a:bodyPr wrap="none">
+            <a:spAutoFit/>
+          </a:bodyPr>
+          <a:lstStyle/>
+          <a:p>
+            <a:pPr>
+              <a:defRPr sz="1100" b="1">
+                <a:solidFill>
+                  <a:srgbClr val="10B981"/>
+                </a:solidFill>
+              </a:defRPr>
+            </a:pPr>
+            <a:r>
+              <a:t>✓ Verified</a:t>
+            </a:r>
+          </a:p>
+        </p:txBody>
+      </p:sp>
+      <p:sp>
+        <p:nvSpPr>
+          <p:cNvPr id="4" name="TextBox 3"/>
+          <p:cNvSpPr txBox="1"/>
+          <p:nvPr/>
+        </p:nvSpPr>
+        <p:spPr>
+          <a:xfrm>
+            <a:off x="640080" y="1188720"/>
+            <a:ext cx="7863840" cy="5212080"/>
+          </a:xfrm>
+          <a:prstGeom prst="rect">
+            <a:avLst/>
+          </a:prstGeom>
+          <a:noFill/>
+        </p:spPr>
+        <p:txBody>
+          <a:bodyPr wrap="square">
+            <a:spAutoFit/>
+          </a:bodyPr>
+          <a:lstStyle/>
+          <a:p>
+            <a:pPr>
+              <a:spcBef>
+                <a:spcPts val="800"/>
+              </a:spcBef>
+              <a:defRPr sz="1800">
+                <a:solidFill>
+                  <a:srgbClr val="F1F5F9"/>
+                </a:solidFill>
+              </a:defRPr>
+            </a:pPr>
+            <a:r>
+              <a:t>Autonomous task execution from specifications</a:t>
+            </a:r>
+          </a:p>
+          <a:p>
+            <a:pPr>
+              <a:spcBef>
+                <a:spcPts val="800"/>
+              </a:spcBef>
+              <a:defRPr sz="1800">
+                <a:solidFill>
+                  <a:srgbClr val="F1F5F9"/>
+                </a:solidFill>
+              </a:defRPr>
+            </a:pPr>
+          </a:p>
+          <a:p>
+            <a:pPr>
+              <a:spcBef>
+                <a:spcPts val="800"/>
+              </a:spcBef>
+              <a:defRPr sz="1800">
+                <a:solidFill>
+                  <a:srgbClr val="F1F5F9"/>
+                </a:solidFill>
+              </a:defRPr>
+            </a:pPr>
+            <a:r>
+              <a:t>Process:</a:t>
+            </a:r>
+          </a:p>
+          <a:p>
+            <a:pPr>
+              <a:spcBef>
+                <a:spcPts val="800"/>
+              </a:spcBef>
+              <a:defRPr sz="1800">
+                <a:solidFill>
+                  <a:srgbClr val="F1F5F9"/>
+                </a:solidFill>
+              </a:defRPr>
+            </a:pPr>
+            <a:r>
+              <a:t>1. Decompose spec into steps</a:t>
+            </a:r>
+          </a:p>
+          <a:p>
+            <a:pPr>
+              <a:spcBef>
+                <a:spcPts val="800"/>
+              </a:spcBef>
+              <a:defRPr sz="1800">
+                <a:solidFill>
+                  <a:srgbClr val="F1F5F9"/>
+                </a:solidFill>
+              </a:defRPr>
+            </a:pPr>
+            <a:r>
+              <a:t>2. Execute with checkpoints</a:t>
+            </a:r>
+          </a:p>
+          <a:p>
+            <a:pPr>
+              <a:spcBef>
+                <a:spcPts val="800"/>
+              </a:spcBef>
+              <a:defRPr sz="1800">
+                <a:solidFill>
+                  <a:srgbClr val="F1F5F9"/>
+                </a:solidFill>
+              </a:defRPr>
+            </a:pPr>
+            <a:r>
+              <a:t>3. Test step completion</a:t>
+            </a:r>
+          </a:p>
+          <a:p>
+            <a:pPr>
+              <a:spcBef>
+                <a:spcPts val="800"/>
+              </a:spcBef>
+              <a:defRPr sz="1800">
+                <a:solidFill>
+                  <a:srgbClr val="F1F5F9"/>
+                </a:solidFill>
+              </a:defRPr>
+            </a:pPr>
+            <a:r>
+              <a:t>4. Retry on failure</a:t>
+            </a:r>
+          </a:p>
+          <a:p>
+            <a:pPr>
+              <a:spcBef>
+                <a:spcPts val="800"/>
+              </a:spcBef>
+              <a:defRPr sz="1800">
+                <a:solidFill>
+                  <a:srgbClr val="F1F5F9"/>
+                </a:solidFill>
+              </a:defRPr>
+            </a:pPr>
+            <a:r>
+              <a:t>5. Resume from failure point</a:t>
+            </a:r>
+          </a:p>
+          <a:p>
+            <a:pPr>
+              <a:spcBef>
+                <a:spcPts val="800"/>
+              </a:spcBef>
+              <a:defRPr sz="1800">
+                <a:solidFill>
+                  <a:srgbClr val="F1F5F9"/>
+                </a:solidFill>
+              </a:defRPr>
+            </a:pPr>
+          </a:p>
+          <a:p>
+            <a:pPr>
+              <a:spcBef>
+                <a:spcPts val="800"/>
+              </a:spcBef>
+              <a:defRPr sz="1800">
+                <a:solidFill>
+                  <a:srgbClr val="F1F5F9"/>
+                </a:solidFill>
+              </a:defRPr>
+            </a:pPr>
+            <a:r>
+              <a:t>Dashboard shows live progress</a:t>
+            </a:r>
+          </a:p>
+          <a:p>
+            <a:pPr>
+              <a:spcBef>
+                <a:spcPts val="800"/>
+              </a:spcBef>
+              <a:defRPr sz="1800">
+                <a:solidFill>
+                  <a:srgbClr val="F1F5F9"/>
+                </a:solidFill>
+              </a:defRPr>
+            </a:pPr>
+            <a:r>
+              <a:t>Source: kiro.dev/docs/crew/features/task-runner/</a:t>
             </a:r>
           </a:p>
         </p:txBody>
@@ -5091,7 +5223,7 @@
               </a:defRPr>
             </a:pPr>
             <a:r>
-              <a:t>Credit System</a:t>
+              <a:t>Artifacts &amp; Knowledge</a:t>
             </a:r>
           </a:p>
         </p:txBody>
@@ -5164,136 +5296,139 @@
               </a:defRPr>
             </a:pPr>
             <a:r>
-              <a:t>Single subscription for all Kiro surfaces (IDE/CLI/Web/Mobile/Crew)</a:t>
-            </a:r>
-          </a:p>
-          <a:p>
-            <a:pPr>
-              <a:spcBef>
-                <a:spcPts val="800"/>
-              </a:spcBef>
-              <a:defRPr sz="1800">
-                <a:solidFill>
-                  <a:srgbClr val="F1F5F9"/>
-                </a:solidFill>
-              </a:defRPr>
-            </a:pPr>
-          </a:p>
-          <a:p>
-            <a:pPr>
-              <a:spcBef>
-                <a:spcPts val="800"/>
-              </a:spcBef>
-              <a:defRPr sz="1800">
-                <a:solidFill>
-                  <a:srgbClr val="F1F5F9"/>
-                </a:solidFill>
-              </a:defRPr>
-            </a:pPr>
-            <a:r>
-              <a:t>Plans:</a:t>
-            </a:r>
-          </a:p>
-          <a:p>
-            <a:pPr>
-              <a:spcBef>
-                <a:spcPts val="800"/>
-              </a:spcBef>
-              <a:defRPr sz="1800">
-                <a:solidFill>
-                  <a:srgbClr val="F1F5F9"/>
-                </a:solidFill>
-              </a:defRPr>
-            </a:pPr>
-            <a:r>
-              <a:t>• $20/month - 1,000 credits</a:t>
-            </a:r>
-          </a:p>
-          <a:p>
-            <a:pPr>
-              <a:spcBef>
-                <a:spcPts val="800"/>
-              </a:spcBef>
-              <a:defRPr sz="1800">
-                <a:solidFill>
-                  <a:srgbClr val="F1F5F9"/>
-                </a:solidFill>
-              </a:defRPr>
-            </a:pPr>
-            <a:r>
-              <a:t>• $50/month - 2,500 credits</a:t>
-            </a:r>
-          </a:p>
-          <a:p>
-            <a:pPr>
-              <a:spcBef>
-                <a:spcPts val="800"/>
-              </a:spcBef>
-              <a:defRPr sz="1800">
-                <a:solidFill>
-                  <a:srgbClr val="F1F5F9"/>
-                </a:solidFill>
-              </a:defRPr>
-            </a:pPr>
-            <a:r>
-              <a:t>• $100/month - 5,000 credits</a:t>
-            </a:r>
-          </a:p>
-          <a:p>
-            <a:pPr>
-              <a:spcBef>
-                <a:spcPts val="800"/>
-              </a:spcBef>
-              <a:defRPr sz="1800">
-                <a:solidFill>
-                  <a:srgbClr val="F1F5F9"/>
-                </a:solidFill>
-              </a:defRPr>
-            </a:pPr>
-            <a:r>
-              <a:t>• $200/month - 10,000 credits</a:t>
-            </a:r>
-          </a:p>
-          <a:p>
-            <a:pPr>
-              <a:spcBef>
-                <a:spcPts val="800"/>
-              </a:spcBef>
-              <a:defRPr sz="1800">
-                <a:solidFill>
-                  <a:srgbClr val="F1F5F9"/>
-                </a:solidFill>
-              </a:defRPr>
-            </a:pPr>
-            <a:r>
-              <a:t>• Add-on: $0.04/credit</a:t>
-            </a:r>
-          </a:p>
-          <a:p>
-            <a:pPr>
-              <a:spcBef>
-                <a:spcPts val="800"/>
-              </a:spcBef>
-              <a:defRPr sz="1800">
-                <a:solidFill>
-                  <a:srgbClr val="F1F5F9"/>
-                </a:solidFill>
-              </a:defRPr>
-            </a:pPr>
-          </a:p>
-          <a:p>
-            <a:pPr>
-              <a:spcBef>
-                <a:spcPts val="800"/>
-              </a:spcBef>
-              <a:defRPr sz="1800">
-                <a:solidFill>
-                  <a:srgbClr val="F1F5F9"/>
-                </a:solidFill>
-              </a:defRPr>
-            </a:pPr>
-            <a:r>
-              <a:t>Model multipliers: Opus 5 (2.2x), Sonnet family (~1.3x), open-weight (0.05x-0.5x)</a:t>
+              <a:t>Artifacts: Persistent outputs with version history</a:t>
+            </a:r>
+          </a:p>
+          <a:p>
+            <a:pPr>
+              <a:spcBef>
+                <a:spcPts val="800"/>
+              </a:spcBef>
+              <a:defRPr sz="1800">
+                <a:solidFill>
+                  <a:srgbClr val="F1F5F9"/>
+                </a:solidFill>
+              </a:defRPr>
+            </a:pPr>
+            <a:r>
+              <a:t>• Kinds: widget, HTML, markdown, SVG, JSON, text</a:t>
+            </a:r>
+          </a:p>
+          <a:p>
+            <a:pPr>
+              <a:spcBef>
+                <a:spcPts val="800"/>
+              </a:spcBef>
+              <a:defRPr sz="1800">
+                <a:solidFill>
+                  <a:srgbClr val="F1F5F9"/>
+                </a:solidFill>
+              </a:defRPr>
+            </a:pPr>
+            <a:r>
+              <a:t>• Live previews in dashboard</a:t>
+            </a:r>
+          </a:p>
+          <a:p>
+            <a:pPr>
+              <a:spcBef>
+                <a:spcPts val="800"/>
+              </a:spcBef>
+              <a:defRPr sz="1800">
+                <a:solidFill>
+                  <a:srgbClr val="F1F5F9"/>
+                </a:solidFill>
+              </a:defRPr>
+            </a:pPr>
+            <a:r>
+              <a:t>• Optional: Deploy to AWS (your account)</a:t>
+            </a:r>
+          </a:p>
+          <a:p>
+            <a:pPr>
+              <a:spcBef>
+                <a:spcPts val="800"/>
+              </a:spcBef>
+              <a:defRPr sz="1800">
+                <a:solidFill>
+                  <a:srgbClr val="F1F5F9"/>
+                </a:solidFill>
+              </a:defRPr>
+            </a:pPr>
+          </a:p>
+          <a:p>
+            <a:pPr>
+              <a:spcBef>
+                <a:spcPts val="800"/>
+              </a:spcBef>
+              <a:defRPr sz="1800">
+                <a:solidFill>
+                  <a:srgbClr val="F1F5F9"/>
+                </a:solidFill>
+              </a:defRPr>
+            </a:pPr>
+            <a:r>
+              <a:t>Knowledge Library: Curated document store</a:t>
+            </a:r>
+          </a:p>
+          <a:p>
+            <a:pPr>
+              <a:spcBef>
+                <a:spcPts val="800"/>
+              </a:spcBef>
+              <a:defRPr sz="1800">
+                <a:solidFill>
+                  <a:srgbClr val="F1F5F9"/>
+                </a:solidFill>
+              </a:defRPr>
+            </a:pPr>
+            <a:r>
+              <a:t>• Sources: local files, folders, URLs</a:t>
+            </a:r>
+          </a:p>
+          <a:p>
+            <a:pPr>
+              <a:spcBef>
+                <a:spcPts val="800"/>
+              </a:spcBef>
+              <a:defRPr sz="1800">
+                <a:solidFill>
+                  <a:srgbClr val="F1F5F9"/>
+                </a:solidFill>
+              </a:defRPr>
+            </a:pPr>
+            <a:r>
+              <a:t>• Ingestion: chunking, embeddings</a:t>
+            </a:r>
+          </a:p>
+          <a:p>
+            <a:pPr>
+              <a:spcBef>
+                <a:spcPts val="800"/>
+              </a:spcBef>
+              <a:defRPr sz="1800">
+                <a:solidFill>
+                  <a:srgbClr val="F1F5F9"/>
+                </a:solidFill>
+              </a:defRPr>
+            </a:pPr>
+            <a:r>
+              <a:t>• Search via local_knowledge_search MCP tool</a:t>
+            </a:r>
+          </a:p>
+          <a:p>
+            <a:pPr>
+              <a:spcBef>
+                <a:spcPts val="800"/>
+              </a:spcBef>
+              <a:defRPr sz="1800">
+                <a:solidFill>
+                  <a:srgbClr val="F1F5F9"/>
+                </a:solidFill>
+              </a:defRPr>
+            </a:pPr>
+            <a:r>
+              <a:t>• Built-in dashboard surface</a:t>
             </a:r>
           </a:p>
         </p:txBody>
@@ -5312,7 +5447,7 @@
     <p:bg>
       <p:bgPr>
         <a:solidFill>
-          <a:srgbClr val="0F172A"/>
+          <a:srgbClr val="1E293B"/>
         </a:solidFill>
         <a:effectLst/>
       </p:bgPr>
@@ -5332,8 +5467,8 @@
         </p:nvSpPr>
         <p:spPr>
           <a:xfrm>
-            <a:off x="457200" y="365760"/>
-            <a:ext cx="6858000" cy="548640"/>
+            <a:off x="914400" y="2743200"/>
+            <a:ext cx="7315200" cy="914400"/>
           </a:xfrm>
           <a:prstGeom prst="rect">
             <a:avLst/>
@@ -5346,232 +5481,15 @@
           </a:bodyPr>
           <a:lstStyle/>
           <a:p>
-            <a:pPr>
-              <a:defRPr sz="3200" b="1">
+            <a:pPr algn="ctr">
+              <a:defRPr sz="4400" b="1">
                 <a:solidFill>
                   <a:srgbClr val="2563EB"/>
                 </a:solidFill>
               </a:defRPr>
             </a:pPr>
             <a:r>
-              <a:t>Cost Considerations</a:t>
-            </a:r>
-          </a:p>
-        </p:txBody>
-      </p:sp>
-      <p:sp>
-        <p:nvSpPr>
-          <p:cNvPr id="3" name="TextBox 2"/>
-          <p:cNvSpPr txBox="1"/>
-          <p:nvPr/>
-        </p:nvSpPr>
-        <p:spPr>
-          <a:xfrm>
-            <a:off x="7498079" y="411480"/>
-            <a:ext cx="1371600" cy="365760"/>
-          </a:xfrm>
-          <a:prstGeom prst="rect">
-            <a:avLst/>
-          </a:prstGeom>
-          <a:noFill/>
-        </p:spPr>
-        <p:txBody>
-          <a:bodyPr wrap="none">
-            <a:spAutoFit/>
-          </a:bodyPr>
-          <a:lstStyle/>
-          <a:p>
-            <a:pPr>
-              <a:defRPr sz="1100" b="1">
-                <a:solidFill>
-                  <a:srgbClr val="10B981"/>
-                </a:solidFill>
-              </a:defRPr>
-            </a:pPr>
-            <a:r>
-              <a:t>✓ Verified</a:t>
-            </a:r>
-          </a:p>
-        </p:txBody>
-      </p:sp>
-      <p:sp>
-        <p:nvSpPr>
-          <p:cNvPr id="4" name="TextBox 3"/>
-          <p:cNvSpPr txBox="1"/>
-          <p:nvPr/>
-        </p:nvSpPr>
-        <p:spPr>
-          <a:xfrm>
-            <a:off x="640080" y="1188720"/>
-            <a:ext cx="7863840" cy="5212080"/>
-          </a:xfrm>
-          <a:prstGeom prst="rect">
-            <a:avLst/>
-          </a:prstGeom>
-          <a:noFill/>
-        </p:spPr>
-        <p:txBody>
-          <a:bodyPr wrap="square">
-            <a:spAutoFit/>
-          </a:bodyPr>
-          <a:lstStyle/>
-          <a:p>
-            <a:pPr>
-              <a:spcBef>
-                <a:spcPts val="800"/>
-              </a:spcBef>
-              <a:defRPr sz="1800">
-                <a:solidFill>
-                  <a:srgbClr val="F1F5F9"/>
-                </a:solidFill>
-              </a:defRPr>
-            </a:pPr>
-            <a:r>
-              <a:t>Verified from official docs:</a:t>
-            </a:r>
-          </a:p>
-          <a:p>
-            <a:pPr>
-              <a:spcBef>
-                <a:spcPts val="800"/>
-              </a:spcBef>
-              <a:defRPr sz="1800">
-                <a:solidFill>
-                  <a:srgbClr val="F1F5F9"/>
-                </a:solidFill>
-              </a:defRPr>
-            </a:pPr>
-            <a:r>
-              <a:t>• Credits scale with model choice and task complexity</a:t>
-            </a:r>
-          </a:p>
-          <a:p>
-            <a:pPr>
-              <a:spcBef>
-                <a:spcPts val="800"/>
-              </a:spcBef>
-              <a:defRPr sz="1800">
-                <a:solidFill>
-                  <a:srgbClr val="F1F5F9"/>
-                </a:solidFill>
-              </a:defRPr>
-            </a:pPr>
-            <a:r>
-              <a:t>• Model multipliers: Opus 5 2.2x, Sonnet family ~1.3x,</a:t>
-            </a:r>
-          </a:p>
-          <a:p>
-            <a:pPr>
-              <a:spcBef>
-                <a:spcPts val="800"/>
-              </a:spcBef>
-              <a:defRPr sz="1800">
-                <a:solidFill>
-                  <a:srgbClr val="F1F5F9"/>
-                </a:solidFill>
-              </a:defRPr>
-            </a:pPr>
-            <a:r>
-              <a:t>  open-weight 0.05x-0.5x</a:t>
-            </a:r>
-          </a:p>
-          <a:p>
-            <a:pPr>
-              <a:spcBef>
-                <a:spcPts val="800"/>
-              </a:spcBef>
-              <a:defRPr sz="1800">
-                <a:solidFill>
-                  <a:srgbClr val="F1F5F9"/>
-                </a:solidFill>
-              </a:defRPr>
-            </a:pPr>
-            <a:r>
-              <a:t>• Add-on credits $0.04 each; metered to 0.01 precision</a:t>
-            </a:r>
-          </a:p>
-          <a:p>
-            <a:pPr>
-              <a:spcBef>
-                <a:spcPts val="800"/>
-              </a:spcBef>
-              <a:defRPr sz="1800">
-                <a:solidFill>
-                  <a:srgbClr val="F1F5F9"/>
-                </a:solidFill>
-              </a:defRPr>
-            </a:pPr>
-          </a:p>
-          <a:p>
-            <a:pPr>
-              <a:spcBef>
-                <a:spcPts val="800"/>
-              </a:spcBef>
-              <a:defRPr sz="1800">
-                <a:solidFill>
-                  <a:srgbClr val="F1F5F9"/>
-                </a:solidFill>
-              </a:defRPr>
-            </a:pPr>
-            <a:r>
-              <a:t>Not published by Kiro (measure in usage dashboard):</a:t>
-            </a:r>
-          </a:p>
-          <a:p>
-            <a:pPr>
-              <a:spcBef>
-                <a:spcPts val="800"/>
-              </a:spcBef>
-              <a:defRPr sz="1800">
-                <a:solidFill>
-                  <a:srgbClr val="F1F5F9"/>
-                </a:solidFill>
-              </a:defRPr>
-            </a:pPr>
-            <a:r>
-              <a:t>• Per-subagent, per-cron, per-task credit consumption</a:t>
-            </a:r>
-          </a:p>
-          <a:p>
-            <a:pPr>
-              <a:spcBef>
-                <a:spcPts val="800"/>
-              </a:spcBef>
-              <a:defRPr sz="1800">
-                <a:solidFill>
-                  <a:srgbClr val="F1F5F9"/>
-                </a:solidFill>
-              </a:defRPr>
-            </a:pPr>
-          </a:p>
-          <a:p>
-            <a:pPr>
-              <a:spcBef>
-                <a:spcPts val="800"/>
-              </a:spcBef>
-              <a:defRPr sz="1800">
-                <a:solidFill>
-                  <a:srgbClr val="F1F5F9"/>
-                </a:solidFill>
-              </a:defRPr>
-            </a:pPr>
-            <a:r>
-              <a:t>The subscription usage dashboard is the authoritative</a:t>
-            </a:r>
-          </a:p>
-          <a:p>
-            <a:pPr>
-              <a:spcBef>
-                <a:spcPts val="800"/>
-              </a:spcBef>
-              <a:defRPr sz="1800">
-                <a:solidFill>
-                  <a:srgbClr val="F1F5F9"/>
-                </a:solidFill>
-              </a:defRPr>
-            </a:pPr>
-            <a:r>
-              <a:t>source for your own workload's cost.</a:t>
+              <a:t>Subscription &amp; Pricing</a:t>
             </a:r>
           </a:p>
         </p:txBody>
@@ -5784,7 +5702,7 @@
     <p:bg>
       <p:bgPr>
         <a:solidFill>
-          <a:srgbClr val="1E293B"/>
+          <a:srgbClr val="0F172A"/>
         </a:solidFill>
         <a:effectLst/>
       </p:bgPr>
@@ -5804,8 +5722,8 @@
         </p:nvSpPr>
         <p:spPr>
           <a:xfrm>
-            <a:off x="914400" y="2743200"/>
-            <a:ext cx="7315200" cy="914400"/>
+            <a:off x="457200" y="365760"/>
+            <a:ext cx="6858000" cy="548640"/>
           </a:xfrm>
           <a:prstGeom prst="rect">
             <a:avLst/>
@@ -5818,15 +5736,15 @@
           </a:bodyPr>
           <a:lstStyle/>
           <a:p>
-            <a:pPr algn="ctr">
-              <a:defRPr sz="4400" b="1">
+            <a:pPr>
+              <a:defRPr sz="3200" b="1">
                 <a:solidFill>
                   <a:srgbClr val="2563EB"/>
                 </a:solidFill>
               </a:defRPr>
             </a:pPr>
             <a:r>
-              <a:t>Advanced &amp; Enterprise Topics</a:t>
+              <a:t>Credit System</a:t>
             </a:r>
           </a:p>
         </p:txBody>
@@ -5839,8 +5757,8 @@
         </p:nvSpPr>
         <p:spPr>
           <a:xfrm>
-            <a:off x="914400" y="3840480"/>
-            <a:ext cx="7315200" cy="548640"/>
+            <a:off x="7498079" y="411480"/>
+            <a:ext cx="1371600" cy="365760"/>
           </a:xfrm>
           <a:prstGeom prst="rect">
             <a:avLst/>
@@ -5853,15 +5771,182 @@
           </a:bodyPr>
           <a:lstStyle/>
           <a:p>
-            <a:pPr algn="ctr">
-              <a:defRPr sz="2000">
-                <a:solidFill>
-                  <a:srgbClr val="94A3B8"/>
-                </a:solidFill>
-              </a:defRPr>
-            </a:pPr>
-            <a:r>
-              <a:t>Full coverage of docs/crew/</a:t>
+            <a:pPr>
+              <a:defRPr sz="1100" b="1">
+                <a:solidFill>
+                  <a:srgbClr val="10B981"/>
+                </a:solidFill>
+              </a:defRPr>
+            </a:pPr>
+            <a:r>
+              <a:t>✓ Verified</a:t>
+            </a:r>
+          </a:p>
+        </p:txBody>
+      </p:sp>
+      <p:sp>
+        <p:nvSpPr>
+          <p:cNvPr id="4" name="TextBox 3"/>
+          <p:cNvSpPr txBox="1"/>
+          <p:nvPr/>
+        </p:nvSpPr>
+        <p:spPr>
+          <a:xfrm>
+            <a:off x="640080" y="1188720"/>
+            <a:ext cx="7863840" cy="5212080"/>
+          </a:xfrm>
+          <a:prstGeom prst="rect">
+            <a:avLst/>
+          </a:prstGeom>
+          <a:noFill/>
+        </p:spPr>
+        <p:txBody>
+          <a:bodyPr wrap="square">
+            <a:spAutoFit/>
+          </a:bodyPr>
+          <a:lstStyle/>
+          <a:p>
+            <a:pPr>
+              <a:spcBef>
+                <a:spcPts val="800"/>
+              </a:spcBef>
+              <a:defRPr sz="1800">
+                <a:solidFill>
+                  <a:srgbClr val="F1F5F9"/>
+                </a:solidFill>
+              </a:defRPr>
+            </a:pPr>
+            <a:r>
+              <a:t>Single subscription for all Kiro surfaces (IDE/CLI/Web/Mobile/Crew)</a:t>
+            </a:r>
+          </a:p>
+          <a:p>
+            <a:pPr>
+              <a:spcBef>
+                <a:spcPts val="800"/>
+              </a:spcBef>
+              <a:defRPr sz="1800">
+                <a:solidFill>
+                  <a:srgbClr val="F1F5F9"/>
+                </a:solidFill>
+              </a:defRPr>
+            </a:pPr>
+          </a:p>
+          <a:p>
+            <a:pPr>
+              <a:spcBef>
+                <a:spcPts val="800"/>
+              </a:spcBef>
+              <a:defRPr sz="1800">
+                <a:solidFill>
+                  <a:srgbClr val="F1F5F9"/>
+                </a:solidFill>
+              </a:defRPr>
+            </a:pPr>
+            <a:r>
+              <a:t>Plans:</a:t>
+            </a:r>
+          </a:p>
+          <a:p>
+            <a:pPr>
+              <a:spcBef>
+                <a:spcPts val="800"/>
+              </a:spcBef>
+              <a:defRPr sz="1800">
+                <a:solidFill>
+                  <a:srgbClr val="F1F5F9"/>
+                </a:solidFill>
+              </a:defRPr>
+            </a:pPr>
+            <a:r>
+              <a:t>• $20/month - 1,000 credits</a:t>
+            </a:r>
+          </a:p>
+          <a:p>
+            <a:pPr>
+              <a:spcBef>
+                <a:spcPts val="800"/>
+              </a:spcBef>
+              <a:defRPr sz="1800">
+                <a:solidFill>
+                  <a:srgbClr val="F1F5F9"/>
+                </a:solidFill>
+              </a:defRPr>
+            </a:pPr>
+            <a:r>
+              <a:t>• $50/month - 2,500 credits</a:t>
+            </a:r>
+          </a:p>
+          <a:p>
+            <a:pPr>
+              <a:spcBef>
+                <a:spcPts val="800"/>
+              </a:spcBef>
+              <a:defRPr sz="1800">
+                <a:solidFill>
+                  <a:srgbClr val="F1F5F9"/>
+                </a:solidFill>
+              </a:defRPr>
+            </a:pPr>
+            <a:r>
+              <a:t>• $100/month - 5,000 credits</a:t>
+            </a:r>
+          </a:p>
+          <a:p>
+            <a:pPr>
+              <a:spcBef>
+                <a:spcPts val="800"/>
+              </a:spcBef>
+              <a:defRPr sz="1800">
+                <a:solidFill>
+                  <a:srgbClr val="F1F5F9"/>
+                </a:solidFill>
+              </a:defRPr>
+            </a:pPr>
+            <a:r>
+              <a:t>• $200/month - 10,000 credits</a:t>
+            </a:r>
+          </a:p>
+          <a:p>
+            <a:pPr>
+              <a:spcBef>
+                <a:spcPts val="800"/>
+              </a:spcBef>
+              <a:defRPr sz="1800">
+                <a:solidFill>
+                  <a:srgbClr val="F1F5F9"/>
+                </a:solidFill>
+              </a:defRPr>
+            </a:pPr>
+            <a:r>
+              <a:t>• Add-on: $0.04/credit</a:t>
+            </a:r>
+          </a:p>
+          <a:p>
+            <a:pPr>
+              <a:spcBef>
+                <a:spcPts val="800"/>
+              </a:spcBef>
+              <a:defRPr sz="1800">
+                <a:solidFill>
+                  <a:srgbClr val="F1F5F9"/>
+                </a:solidFill>
+              </a:defRPr>
+            </a:pPr>
+          </a:p>
+          <a:p>
+            <a:pPr>
+              <a:spcBef>
+                <a:spcPts val="800"/>
+              </a:spcBef>
+              <a:defRPr sz="1800">
+                <a:solidFill>
+                  <a:srgbClr val="F1F5F9"/>
+                </a:solidFill>
+              </a:defRPr>
+            </a:pPr>
+            <a:r>
+              <a:t>Model multipliers: Opus 5 (2.2x), Sonnet family (~1.3x), open-weight (0.05x-0.5x)</a:t>
             </a:r>
           </a:p>
         </p:txBody>
@@ -5922,7 +6007,7 @@
               </a:defRPr>
             </a:pPr>
             <a:r>
-              <a:t>Security: 8-Layer Defense-in-Depth</a:t>
+              <a:t>Cost Considerations</a:t>
             </a:r>
           </a:p>
         </p:txBody>
@@ -5995,124 +6080,151 @@
               </a:defRPr>
             </a:pPr>
             <a:r>
-              <a:t>Every tool call passes independent layers (runtime-enforced):</a:t>
-            </a:r>
-          </a:p>
-          <a:p>
-            <a:pPr>
-              <a:spcBef>
-                <a:spcPts val="800"/>
-              </a:spcBef>
-              <a:defRPr sz="1800">
-                <a:solidFill>
-                  <a:srgbClr val="F1F5F9"/>
-                </a:solidFill>
-              </a:defRPr>
-            </a:pPr>
-            <a:r>
-              <a:t>1 Owner lock  2 Denied commands (137)  3 Governance ceiling</a:t>
-            </a:r>
-          </a:p>
-          <a:p>
-            <a:pPr>
-              <a:spcBef>
-                <a:spcPts val="800"/>
-              </a:spcBef>
-              <a:defRPr sz="1800">
-                <a:solidFill>
-                  <a:srgbClr val="F1F5F9"/>
-                </a:solidFill>
-              </a:defRPr>
-            </a:pPr>
-            <a:r>
-              <a:t>4 Sensitive-path block  5 Tool approval  6 Input validation</a:t>
-            </a:r>
-          </a:p>
-          <a:p>
-            <a:pPr>
-              <a:spcBef>
-                <a:spcPts val="800"/>
-              </a:spcBef>
-              <a:defRPr sz="1800">
-                <a:solidFill>
-                  <a:srgbClr val="F1F5F9"/>
-                </a:solidFill>
-              </a:defRPr>
-            </a:pPr>
-            <a:r>
-              <a:t>7 OS sandbox  8 Output redaction  (+ SEL audit, cross-cutting)</a:t>
-            </a:r>
-          </a:p>
-          <a:p>
-            <a:pPr>
-              <a:spcBef>
-                <a:spcPts val="800"/>
-              </a:spcBef>
-              <a:defRPr sz="1800">
-                <a:solidFill>
-                  <a:srgbClr val="F1F5F9"/>
-                </a:solidFill>
-              </a:defRPr>
-            </a:pPr>
-          </a:p>
-          <a:p>
-            <a:pPr>
-              <a:spcBef>
-                <a:spcPts val="800"/>
-              </a:spcBef>
-              <a:defRPr sz="1800">
-                <a:solidFill>
-                  <a:srgbClr val="F1F5F9"/>
-                </a:solidFill>
-              </a:defRPr>
-            </a:pPr>
-            <a:r>
-              <a:t>Sandbox: auto (default) / strict / off; no OS layer on Windows</a:t>
-            </a:r>
-          </a:p>
-          <a:p>
-            <a:pPr>
-              <a:spcBef>
-                <a:spcPts val="800"/>
-              </a:spcBef>
-              <a:defRPr sz="1800">
-                <a:solidFill>
-                  <a:srgbClr val="F1F5F9"/>
-                </a:solidFill>
-              </a:defRPr>
-            </a:pPr>
-            <a:r>
-              <a:t>Approval: Interactive / Trust command / Trust tool / Autopilot</a:t>
-            </a:r>
-          </a:p>
-          <a:p>
-            <a:pPr>
-              <a:spcBef>
-                <a:spcPts val="800"/>
-              </a:spcBef>
-              <a:defRPr sz="1800">
-                <a:solidFill>
-                  <a:srgbClr val="F1F5F9"/>
-                </a:solidFill>
-              </a:defRPr>
-            </a:pPr>
-            <a:r>
-              <a:t>Denied cmds enforced at Crew's gate, not agent config</a:t>
-            </a:r>
-          </a:p>
-          <a:p>
-            <a:pPr>
-              <a:spcBef>
-                <a:spcPts val="800"/>
-              </a:spcBef>
-              <a:defRPr sz="1800">
-                <a:solidFill>
-                  <a:srgbClr val="F1F5F9"/>
-                </a:solidFill>
-              </a:defRPr>
-            </a:pPr>
-            <a:r>
-              <a:t>kirocrew policy show|validate|explain; security events|audit|verify</a:t>
+              <a:t>Verified from official docs:</a:t>
+            </a:r>
+          </a:p>
+          <a:p>
+            <a:pPr>
+              <a:spcBef>
+                <a:spcPts val="800"/>
+              </a:spcBef>
+              <a:defRPr sz="1800">
+                <a:solidFill>
+                  <a:srgbClr val="F1F5F9"/>
+                </a:solidFill>
+              </a:defRPr>
+            </a:pPr>
+            <a:r>
+              <a:t>• Credits scale with model choice and task complexity</a:t>
+            </a:r>
+          </a:p>
+          <a:p>
+            <a:pPr>
+              <a:spcBef>
+                <a:spcPts val="800"/>
+              </a:spcBef>
+              <a:defRPr sz="1800">
+                <a:solidFill>
+                  <a:srgbClr val="F1F5F9"/>
+                </a:solidFill>
+              </a:defRPr>
+            </a:pPr>
+            <a:r>
+              <a:t>• Model multipliers: Opus 5 2.2x, Sonnet family ~1.3x,</a:t>
+            </a:r>
+          </a:p>
+          <a:p>
+            <a:pPr>
+              <a:spcBef>
+                <a:spcPts val="800"/>
+              </a:spcBef>
+              <a:defRPr sz="1800">
+                <a:solidFill>
+                  <a:srgbClr val="F1F5F9"/>
+                </a:solidFill>
+              </a:defRPr>
+            </a:pPr>
+            <a:r>
+              <a:t>  open-weight 0.05x-0.5x</a:t>
+            </a:r>
+          </a:p>
+          <a:p>
+            <a:pPr>
+              <a:spcBef>
+                <a:spcPts val="800"/>
+              </a:spcBef>
+              <a:defRPr sz="1800">
+                <a:solidFill>
+                  <a:srgbClr val="F1F5F9"/>
+                </a:solidFill>
+              </a:defRPr>
+            </a:pPr>
+            <a:r>
+              <a:t>• Add-on credits $0.04 each; metered to 0.01 precision</a:t>
+            </a:r>
+          </a:p>
+          <a:p>
+            <a:pPr>
+              <a:spcBef>
+                <a:spcPts val="800"/>
+              </a:spcBef>
+              <a:defRPr sz="1800">
+                <a:solidFill>
+                  <a:srgbClr val="F1F5F9"/>
+                </a:solidFill>
+              </a:defRPr>
+            </a:pPr>
+          </a:p>
+          <a:p>
+            <a:pPr>
+              <a:spcBef>
+                <a:spcPts val="800"/>
+              </a:spcBef>
+              <a:defRPr sz="1800">
+                <a:solidFill>
+                  <a:srgbClr val="F1F5F9"/>
+                </a:solidFill>
+              </a:defRPr>
+            </a:pPr>
+            <a:r>
+              <a:t>Not published by Kiro (measure in usage dashboard):</a:t>
+            </a:r>
+          </a:p>
+          <a:p>
+            <a:pPr>
+              <a:spcBef>
+                <a:spcPts val="800"/>
+              </a:spcBef>
+              <a:defRPr sz="1800">
+                <a:solidFill>
+                  <a:srgbClr val="F1F5F9"/>
+                </a:solidFill>
+              </a:defRPr>
+            </a:pPr>
+            <a:r>
+              <a:t>• Per-subagent, per-cron, per-task credit consumption</a:t>
+            </a:r>
+          </a:p>
+          <a:p>
+            <a:pPr>
+              <a:spcBef>
+                <a:spcPts val="800"/>
+              </a:spcBef>
+              <a:defRPr sz="1800">
+                <a:solidFill>
+                  <a:srgbClr val="F1F5F9"/>
+                </a:solidFill>
+              </a:defRPr>
+            </a:pPr>
+          </a:p>
+          <a:p>
+            <a:pPr>
+              <a:spcBef>
+                <a:spcPts val="800"/>
+              </a:spcBef>
+              <a:defRPr sz="1800">
+                <a:solidFill>
+                  <a:srgbClr val="F1F5F9"/>
+                </a:solidFill>
+              </a:defRPr>
+            </a:pPr>
+            <a:r>
+              <a:t>The subscription usage dashboard is the authoritative</a:t>
+            </a:r>
+          </a:p>
+          <a:p>
+            <a:pPr>
+              <a:spcBef>
+                <a:spcPts val="800"/>
+              </a:spcBef>
+              <a:defRPr sz="1800">
+                <a:solidFill>
+                  <a:srgbClr val="F1F5F9"/>
+                </a:solidFill>
+              </a:defRPr>
+            </a:pPr>
+            <a:r>
+              <a:t>source for your own workload's cost.</a:t>
             </a:r>
           </a:p>
         </p:txBody>
@@ -6131,7 +6243,7 @@
     <p:bg>
       <p:bgPr>
         <a:solidFill>
-          <a:srgbClr val="0F172A"/>
+          <a:srgbClr val="1E293B"/>
         </a:solidFill>
         <a:effectLst/>
       </p:bgPr>
@@ -6151,8 +6263,8 @@
         </p:nvSpPr>
         <p:spPr>
           <a:xfrm>
-            <a:off x="457200" y="365760"/>
-            <a:ext cx="6858000" cy="548640"/>
+            <a:off x="914400" y="2743200"/>
+            <a:ext cx="7315200" cy="914400"/>
           </a:xfrm>
           <a:prstGeom prst="rect">
             <a:avLst/>
@@ -6165,15 +6277,15 @@
           </a:bodyPr>
           <a:lstStyle/>
           <a:p>
-            <a:pPr>
-              <a:defRPr sz="3200" b="1">
+            <a:pPr algn="ctr">
+              <a:defRPr sz="4400" b="1">
                 <a:solidFill>
                   <a:srgbClr val="2563EB"/>
                 </a:solidFill>
               </a:defRPr>
             </a:pPr>
             <a:r>
-              <a:t>Running 24/7</a:t>
+              <a:t>Advanced &amp; Enterprise Topics</a:t>
             </a:r>
           </a:p>
         </p:txBody>
@@ -6186,8 +6298,8 @@
         </p:nvSpPr>
         <p:spPr>
           <a:xfrm>
-            <a:off x="7498079" y="411480"/>
-            <a:ext cx="1371600" cy="365760"/>
+            <a:off x="914400" y="3840480"/>
+            <a:ext cx="7315200" cy="548640"/>
           </a:xfrm>
           <a:prstGeom prst="rect">
             <a:avLst/>
@@ -6200,158 +6312,15 @@
           </a:bodyPr>
           <a:lstStyle/>
           <a:p>
-            <a:pPr>
-              <a:defRPr sz="1100" b="1">
-                <a:solidFill>
-                  <a:srgbClr val="10B981"/>
-                </a:solidFill>
-              </a:defRPr>
-            </a:pPr>
-            <a:r>
-              <a:t>✓ Verified</a:t>
-            </a:r>
-          </a:p>
-        </p:txBody>
-      </p:sp>
-      <p:sp>
-        <p:nvSpPr>
-          <p:cNvPr id="4" name="TextBox 3"/>
-          <p:cNvSpPr txBox="1"/>
-          <p:nvPr/>
-        </p:nvSpPr>
-        <p:spPr>
-          <a:xfrm>
-            <a:off x="640080" y="1188720"/>
-            <a:ext cx="7863840" cy="5212080"/>
-          </a:xfrm>
-          <a:prstGeom prst="rect">
-            <a:avLst/>
-          </a:prstGeom>
-          <a:noFill/>
-        </p:spPr>
-        <p:txBody>
-          <a:bodyPr wrap="square">
-            <a:spAutoFit/>
-          </a:bodyPr>
-          <a:lstStyle/>
-          <a:p>
-            <a:pPr>
-              <a:spcBef>
-                <a:spcPts val="800"/>
-              </a:spcBef>
-              <a:defRPr sz="1800">
-                <a:solidFill>
-                  <a:srgbClr val="F1F5F9"/>
-                </a:solidFill>
-              </a:defRPr>
-            </a:pPr>
-            <a:r>
-              <a:t>Local service: systemd/launchd; runs as user, sudo once for unit</a:t>
-            </a:r>
-          </a:p>
-          <a:p>
-            <a:pPr>
-              <a:spcBef>
-                <a:spcPts val="800"/>
-              </a:spcBef>
-              <a:defRPr sz="1800">
-                <a:solidFill>
-                  <a:srgbClr val="F1F5F9"/>
-                </a:solidFill>
-              </a:defRPr>
-            </a:pPr>
-            <a:r>
-              <a:t>  kirocrew service install | logs -f | restart</a:t>
-            </a:r>
-          </a:p>
-          <a:p>
-            <a:pPr>
-              <a:spcBef>
-                <a:spcPts val="800"/>
-              </a:spcBef>
-              <a:defRPr sz="1800">
-                <a:solidFill>
-                  <a:srgbClr val="F1F5F9"/>
-                </a:solidFill>
-              </a:defRPr>
-            </a:pPr>
-            <a:r>
-              <a:t>Docker: multi-arch GHCR; kiro-cli login + kirocrew token; SLSA</a:t>
-            </a:r>
-          </a:p>
-          <a:p>
-            <a:pPr>
-              <a:spcBef>
-                <a:spcPts val="800"/>
-              </a:spcBef>
-              <a:defRPr sz="1800">
-                <a:solidFill>
-                  <a:srgbClr val="F1F5F9"/>
-                </a:solidFill>
-              </a:defRPr>
-            </a:pPr>
-            <a:r>
-              <a:t>  docker run -d -p 127.0.0.1:5476:5476 -v kirocrew-home:...</a:t>
-            </a:r>
-          </a:p>
-          <a:p>
-            <a:pPr>
-              <a:spcBef>
-                <a:spcPts val="800"/>
-              </a:spcBef>
-              <a:defRPr sz="1800">
-                <a:solidFill>
-                  <a:srgbClr val="F1F5F9"/>
-                </a:solidFill>
-              </a:defRPr>
-            </a:pPr>
-            <a:r>
-              <a:t>Remote host: modern Linux, ~10GB RAM, Node 20+ (slack-mcp)</a:t>
-            </a:r>
-          </a:p>
-          <a:p>
-            <a:pPr>
-              <a:spcBef>
-                <a:spcPts val="800"/>
-              </a:spcBef>
-              <a:defRPr sz="1800">
-                <a:solidFill>
-                  <a:srgbClr val="F1F5F9"/>
-                </a:solidFill>
-              </a:defRPr>
-            </a:pPr>
-            <a:r>
-              <a:t>  ssh -L 5476:localhost:5476 user@host</a:t>
-            </a:r>
-          </a:p>
-          <a:p>
-            <a:pPr>
-              <a:spcBef>
-                <a:spcPts val="800"/>
-              </a:spcBef>
-              <a:defRPr sz="1800">
-                <a:solidFill>
-                  <a:srgbClr val="F1F5F9"/>
-                </a:solidFill>
-              </a:defRPr>
-            </a:pPr>
-            <a:r>
-              <a:t>Sync state: memory + SQLite incl WAL; NOT .env/.local_secret</a:t>
-            </a:r>
-          </a:p>
-          <a:p>
-            <a:pPr>
-              <a:spcBef>
-                <a:spcPts val="800"/>
-              </a:spcBef>
-              <a:defRPr sz="1800">
-                <a:solidFill>
-                  <a:srgbClr val="F1F5F9"/>
-                </a:solidFill>
-              </a:defRPr>
-            </a:pPr>
-            <a:r>
-              <a:t>Mobile: Cloudflare/ngrok/Tailscale + dashboard.url; token 1h/20h</a:t>
+            <a:pPr algn="ctr">
+              <a:defRPr sz="2000">
+                <a:solidFill>
+                  <a:srgbClr val="94A3B8"/>
+                </a:solidFill>
+              </a:defRPr>
+            </a:pPr>
+            <a:r>
+              <a:t>Full coverage of docs/crew/</a:t>
             </a:r>
           </a:p>
         </p:txBody>
@@ -6412,7 +6381,7 @@
               </a:defRPr>
             </a:pPr>
             <a:r>
-              <a:t>Interfaces: One Gateway, Many Surfaces</a:t>
+              <a:t>Security: 8-Layer Defense-in-Depth</a:t>
             </a:r>
           </a:p>
         </p:txBody>
@@ -6485,109 +6454,124 @@
               </a:defRPr>
             </a:pPr>
             <a:r>
-              <a:t>Mac app / web dashboard / CLI + Slack/Discord/Telegram/</a:t>
-            </a:r>
-          </a:p>
-          <a:p>
-            <a:pPr>
-              <a:spcBef>
-                <a:spcPts val="800"/>
-              </a:spcBef>
-              <a:defRPr sz="1800">
-                <a:solidFill>
-                  <a:srgbClr val="F1F5F9"/>
-                </a:solidFill>
-              </a:defRPr>
-            </a:pPr>
-            <a:r>
-              <a:t>Teams/Webex/WeCom/WeChat channels</a:t>
-            </a:r>
-          </a:p>
-          <a:p>
-            <a:pPr>
-              <a:spcBef>
-                <a:spcPts val="800"/>
-              </a:spcBef>
-              <a:defRPr sz="1800">
-                <a:solidFill>
-                  <a:srgbClr val="F1F5F9"/>
-                </a:solidFill>
-              </a:defRPr>
-            </a:pPr>
-            <a:r>
-              <a:t>Independent sessions, SHARED memory/skills/lessons/crons</a:t>
-            </a:r>
-          </a:p>
-          <a:p>
-            <a:pPr>
-              <a:spcBef>
-                <a:spcPts val="800"/>
-              </a:spcBef>
-              <a:defRPr sz="1800">
-                <a:solidFill>
-                  <a:srgbClr val="F1F5F9"/>
-                </a:solidFill>
-              </a:defRPr>
-            </a:pPr>
-            <a:r>
-              <a:t>Channels connect outbound - no need to expose dashboard port</a:t>
-            </a:r>
-          </a:p>
-          <a:p>
-            <a:pPr>
-              <a:spcBef>
-                <a:spcPts val="800"/>
-              </a:spcBef>
-              <a:defRPr sz="1800">
-                <a:solidFill>
-                  <a:srgbClr val="F1F5F9"/>
-                </a:solidFill>
-              </a:defRPr>
-            </a:pPr>
-          </a:p>
-          <a:p>
-            <a:pPr>
-              <a:spcBef>
-                <a:spcPts val="800"/>
-              </a:spcBef>
-              <a:defRPr sz="1800">
-                <a:solidFill>
-                  <a:srgbClr val="F1F5F9"/>
-                </a:solidFill>
-              </a:defRPr>
-            </a:pPr>
-            <a:r>
-              <a:t>Dashboard = React SPA localhost:5476 (primary interface)</a:t>
-            </a:r>
-          </a:p>
-          <a:p>
-            <a:pPr>
-              <a:spcBef>
-                <a:spcPts val="800"/>
-              </a:spcBef>
-              <a:defRPr sz="1800">
-                <a:solidFill>
-                  <a:srgbClr val="F1F5F9"/>
-                </a:solidFill>
-              </a:defRPr>
-            </a:pPr>
-            <a:r>
-              <a:t>Cross-surface: dashboard&lt;-&gt;Slack sync, resume sessions</a:t>
-            </a:r>
-          </a:p>
-          <a:p>
-            <a:pPr>
-              <a:spcBef>
-                <a:spcPts val="800"/>
-              </a:spcBef>
-              <a:defRPr sz="1800">
-                <a:solidFill>
-                  <a:srgbClr val="F1F5F9"/>
-                </a:solidFill>
-              </a:defRPr>
-            </a:pPr>
-            <a:r>
-              <a:t>5476 loopback-only default; reverse proxy+TLS or SSH tunnel</a:t>
+              <a:t>Every tool call passes independent layers (runtime-enforced):</a:t>
+            </a:r>
+          </a:p>
+          <a:p>
+            <a:pPr>
+              <a:spcBef>
+                <a:spcPts val="800"/>
+              </a:spcBef>
+              <a:defRPr sz="1800">
+                <a:solidFill>
+                  <a:srgbClr val="F1F5F9"/>
+                </a:solidFill>
+              </a:defRPr>
+            </a:pPr>
+            <a:r>
+              <a:t>1 Owner lock  2 Denied commands (137)  3 Governance ceiling</a:t>
+            </a:r>
+          </a:p>
+          <a:p>
+            <a:pPr>
+              <a:spcBef>
+                <a:spcPts val="800"/>
+              </a:spcBef>
+              <a:defRPr sz="1800">
+                <a:solidFill>
+                  <a:srgbClr val="F1F5F9"/>
+                </a:solidFill>
+              </a:defRPr>
+            </a:pPr>
+            <a:r>
+              <a:t>4 Sensitive-path block  5 Tool approval  6 Input validation</a:t>
+            </a:r>
+          </a:p>
+          <a:p>
+            <a:pPr>
+              <a:spcBef>
+                <a:spcPts val="800"/>
+              </a:spcBef>
+              <a:defRPr sz="1800">
+                <a:solidFill>
+                  <a:srgbClr val="F1F5F9"/>
+                </a:solidFill>
+              </a:defRPr>
+            </a:pPr>
+            <a:r>
+              <a:t>7 OS sandbox  8 Output redaction  (+ SEL audit, cross-cutting)</a:t>
+            </a:r>
+          </a:p>
+          <a:p>
+            <a:pPr>
+              <a:spcBef>
+                <a:spcPts val="800"/>
+              </a:spcBef>
+              <a:defRPr sz="1800">
+                <a:solidFill>
+                  <a:srgbClr val="F1F5F9"/>
+                </a:solidFill>
+              </a:defRPr>
+            </a:pPr>
+          </a:p>
+          <a:p>
+            <a:pPr>
+              <a:spcBef>
+                <a:spcPts val="800"/>
+              </a:spcBef>
+              <a:defRPr sz="1800">
+                <a:solidFill>
+                  <a:srgbClr val="F1F5F9"/>
+                </a:solidFill>
+              </a:defRPr>
+            </a:pPr>
+            <a:r>
+              <a:t>Sandbox: auto (default) / strict / off; no OS layer on Windows</a:t>
+            </a:r>
+          </a:p>
+          <a:p>
+            <a:pPr>
+              <a:spcBef>
+                <a:spcPts val="800"/>
+              </a:spcBef>
+              <a:defRPr sz="1800">
+                <a:solidFill>
+                  <a:srgbClr val="F1F5F9"/>
+                </a:solidFill>
+              </a:defRPr>
+            </a:pPr>
+            <a:r>
+              <a:t>Approval: Interactive / Trust command / Trust tool / Autopilot</a:t>
+            </a:r>
+          </a:p>
+          <a:p>
+            <a:pPr>
+              <a:spcBef>
+                <a:spcPts val="800"/>
+              </a:spcBef>
+              <a:defRPr sz="1800">
+                <a:solidFill>
+                  <a:srgbClr val="F1F5F9"/>
+                </a:solidFill>
+              </a:defRPr>
+            </a:pPr>
+            <a:r>
+              <a:t>Denied cmds enforced at Crew's gate, not agent config</a:t>
+            </a:r>
+          </a:p>
+          <a:p>
+            <a:pPr>
+              <a:spcBef>
+                <a:spcPts val="800"/>
+              </a:spcBef>
+              <a:defRPr sz="1800">
+                <a:solidFill>
+                  <a:srgbClr val="F1F5F9"/>
+                </a:solidFill>
+              </a:defRPr>
+            </a:pPr>
+            <a:r>
+              <a:t>kirocrew policy show|validate|explain; security events|audit|verify</a:t>
             </a:r>
           </a:p>
         </p:txBody>
@@ -6648,7 +6632,7 @@
               </a:defRPr>
             </a:pPr>
             <a:r>
-              <a:t>Chat</a:t>
+              <a:t>Running 24/7</a:t>
             </a:r>
           </a:p>
         </p:txBody>
@@ -6721,109 +6705,112 @@
               </a:defRPr>
             </a:pPr>
             <a:r>
-              <a:t>Send text / @file / voice; streaming replies with live tool calls</a:t>
-            </a:r>
-          </a:p>
-          <a:p>
-            <a:pPr>
-              <a:spcBef>
-                <a:spcPts val="800"/>
-              </a:spcBef>
-              <a:defRPr sz="1800">
-                <a:solidFill>
-                  <a:srgbClr val="F1F5F9"/>
-                </a:solidFill>
-              </a:defRPr>
-            </a:pPr>
-            <a:r>
-              <a:t>Guide: approve/reject, edit &amp; resend, fork, Autopilot</a:t>
-            </a:r>
-          </a:p>
-          <a:p>
-            <a:pPr>
-              <a:spcBef>
-                <a:spcPts val="800"/>
-              </a:spcBef>
-              <a:defRPr sz="1800">
-                <a:solidFill>
-                  <a:srgbClr val="F1F5F9"/>
-                </a:solidFill>
-              </a:defRPr>
-            </a:pPr>
-            <a:r>
-              <a:t>Each tab = independent session sharing long-term memory</a:t>
-            </a:r>
-          </a:p>
-          <a:p>
-            <a:pPr>
-              <a:spcBef>
-                <a:spcPts val="800"/>
-              </a:spcBef>
-              <a:defRPr sz="1800">
-                <a:solidFill>
-                  <a:srgbClr val="F1F5F9"/>
-                </a:solidFill>
-              </a:defRPr>
-            </a:pPr>
-          </a:p>
-          <a:p>
-            <a:pPr>
-              <a:spcBef>
-                <a:spcPts val="800"/>
-              </a:spcBef>
-              <a:defRPr sz="1800">
-                <a:solidFill>
-                  <a:srgbClr val="F1F5F9"/>
-                </a:solidFill>
-              </a:defRPr>
-            </a:pPr>
-            <a:r>
-              <a:t>@ file picker; drag/paste image (vision); mic STT; Piper TTS</a:t>
-            </a:r>
-          </a:p>
-          <a:p>
-            <a:pPr>
-              <a:spcBef>
-                <a:spcPts val="800"/>
-              </a:spcBef>
-              <a:defRPr sz="1800">
-                <a:solidFill>
-                  <a:srgbClr val="F1F5F9"/>
-                </a:solidFill>
-              </a:defRPr>
-            </a:pPr>
-            <a:r>
-              <a:t>Prompt optimizer (Cmd+Shift+Enter); incognito; switch models;</a:t>
-            </a:r>
-          </a:p>
-          <a:p>
-            <a:pPr>
-              <a:spcBef>
-                <a:spcPts val="800"/>
-              </a:spcBef>
-              <a:defRPr sz="1800">
-                <a:solidFill>
-                  <a:srgbClr val="F1F5F9"/>
-                </a:solidFill>
-              </a:defRPr>
-            </a:pPr>
-            <a:r>
-              <a:t>reasoning effort per message</a:t>
-            </a:r>
-          </a:p>
-          <a:p>
-            <a:pPr>
-              <a:spcBef>
-                <a:spcPts val="800"/>
-              </a:spcBef>
-              <a:defRPr sz="1800">
-                <a:solidFill>
-                  <a:srgbClr val="F1F5F9"/>
-                </a:solidFill>
-              </a:defRPr>
-            </a:pPr>
-            <a:r>
-              <a:t>Leaves: Sessions, Message controls, Optimizer, Voice, Widgets</a:t>
+              <a:t>Local service: systemd/launchd; runs as user, sudo once for unit</a:t>
+            </a:r>
+          </a:p>
+          <a:p>
+            <a:pPr>
+              <a:spcBef>
+                <a:spcPts val="800"/>
+              </a:spcBef>
+              <a:defRPr sz="1800">
+                <a:solidFill>
+                  <a:srgbClr val="F1F5F9"/>
+                </a:solidFill>
+              </a:defRPr>
+            </a:pPr>
+            <a:r>
+              <a:t>  kirocrew service install | logs -f | restart</a:t>
+            </a:r>
+          </a:p>
+          <a:p>
+            <a:pPr>
+              <a:spcBef>
+                <a:spcPts val="800"/>
+              </a:spcBef>
+              <a:defRPr sz="1800">
+                <a:solidFill>
+                  <a:srgbClr val="F1F5F9"/>
+                </a:solidFill>
+              </a:defRPr>
+            </a:pPr>
+            <a:r>
+              <a:t>Docker: multi-arch GHCR; kiro-cli login + kirocrew token; SLSA</a:t>
+            </a:r>
+          </a:p>
+          <a:p>
+            <a:pPr>
+              <a:spcBef>
+                <a:spcPts val="800"/>
+              </a:spcBef>
+              <a:defRPr sz="1800">
+                <a:solidFill>
+                  <a:srgbClr val="F1F5F9"/>
+                </a:solidFill>
+              </a:defRPr>
+            </a:pPr>
+            <a:r>
+              <a:t>  docker run -d -p 127.0.0.1:5476:5476 -v kirocrew-home:...</a:t>
+            </a:r>
+          </a:p>
+          <a:p>
+            <a:pPr>
+              <a:spcBef>
+                <a:spcPts val="800"/>
+              </a:spcBef>
+              <a:defRPr sz="1800">
+                <a:solidFill>
+                  <a:srgbClr val="F1F5F9"/>
+                </a:solidFill>
+              </a:defRPr>
+            </a:pPr>
+            <a:r>
+              <a:t>Remote host: modern Linux, ~10GB RAM, Node 20+ (slack-mcp)</a:t>
+            </a:r>
+          </a:p>
+          <a:p>
+            <a:pPr>
+              <a:spcBef>
+                <a:spcPts val="800"/>
+              </a:spcBef>
+              <a:defRPr sz="1800">
+                <a:solidFill>
+                  <a:srgbClr val="F1F5F9"/>
+                </a:solidFill>
+              </a:defRPr>
+            </a:pPr>
+            <a:r>
+              <a:t>  ssh -L 5476:localhost:5476 user@host</a:t>
+            </a:r>
+          </a:p>
+          <a:p>
+            <a:pPr>
+              <a:spcBef>
+                <a:spcPts val="800"/>
+              </a:spcBef>
+              <a:defRPr sz="1800">
+                <a:solidFill>
+                  <a:srgbClr val="F1F5F9"/>
+                </a:solidFill>
+              </a:defRPr>
+            </a:pPr>
+            <a:r>
+              <a:t>Sync state: memory + SQLite incl WAL; NOT .env/.local_secret</a:t>
+            </a:r>
+          </a:p>
+          <a:p>
+            <a:pPr>
+              <a:spcBef>
+                <a:spcPts val="800"/>
+              </a:spcBef>
+              <a:defRPr sz="1800">
+                <a:solidFill>
+                  <a:srgbClr val="F1F5F9"/>
+                </a:solidFill>
+              </a:defRPr>
+            </a:pPr>
+            <a:r>
+              <a:t>Mobile: Cloudflare/ngrok/Tailscale + dashboard.url; token 1h/20h</a:t>
             </a:r>
           </a:p>
         </p:txBody>
@@ -6884,7 +6871,7 @@
               </a:defRPr>
             </a:pPr>
             <a:r>
-              <a:t>Agent Capabilities (Customization Hub)</a:t>
+              <a:t>Interfaces: One Gateway, Many Surfaces</a:t>
             </a:r>
           </a:p>
         </p:txBody>
@@ -6957,97 +6944,109 @@
               </a:defRPr>
             </a:pPr>
             <a:r>
-              <a:t>Agents - model/prompt/tools/MCP server config</a:t>
-            </a:r>
-          </a:p>
-          <a:p>
-            <a:pPr>
-              <a:spcBef>
-                <a:spcPts val="800"/>
-              </a:spcBef>
-              <a:defRPr sz="1800">
-                <a:solidFill>
-                  <a:srgbClr val="F1F5F9"/>
-                </a:solidFill>
-              </a:defRPr>
-            </a:pPr>
-            <a:r>
-              <a:t>Agent Templates - prebuilt configs to customize</a:t>
-            </a:r>
-          </a:p>
-          <a:p>
-            <a:pPr>
-              <a:spcBef>
-                <a:spcPts val="800"/>
-              </a:spcBef>
-              <a:defRPr sz="1800">
-                <a:solidFill>
-                  <a:srgbClr val="F1F5F9"/>
-                </a:solidFill>
-              </a:defRPr>
-            </a:pPr>
-            <a:r>
-              <a:t>Integrations (MCP) - add external tools/services</a:t>
-            </a:r>
-          </a:p>
-          <a:p>
-            <a:pPr>
-              <a:spcBef>
-                <a:spcPts val="800"/>
-              </a:spcBef>
-              <a:defRPr sz="1800">
-                <a:solidFill>
-                  <a:srgbClr val="F1F5F9"/>
-                </a:solidFill>
-              </a:defRPr>
-            </a:pPr>
-            <a:r>
-              <a:t>Skills - on-demand knowledge files teaching workflows</a:t>
-            </a:r>
-          </a:p>
-          <a:p>
-            <a:pPr>
-              <a:spcBef>
-                <a:spcPts val="800"/>
-              </a:spcBef>
-              <a:defRPr sz="1800">
-                <a:solidFill>
-                  <a:srgbClr val="F1F5F9"/>
-                </a:solidFill>
-              </a:defRPr>
-            </a:pPr>
-            <a:r>
-              <a:t>Steering - workspace-level rules every session inherits</a:t>
-            </a:r>
-          </a:p>
-          <a:p>
-            <a:pPr>
-              <a:spcBef>
-                <a:spcPts val="800"/>
-              </a:spcBef>
-              <a:defRPr sz="1800">
-                <a:solidFill>
-                  <a:srgbClr val="F1F5F9"/>
-                </a:solidFill>
-              </a:defRPr>
-            </a:pPr>
-            <a:r>
-              <a:t>Hooks - automate reactions to events (scripts/context)</a:t>
-            </a:r>
-          </a:p>
-          <a:p>
-            <a:pPr>
-              <a:spcBef>
-                <a:spcPts val="800"/>
-              </a:spcBef>
-              <a:defRPr sz="1800">
-                <a:solidFill>
-                  <a:srgbClr val="F1F5F9"/>
-                </a:solidFill>
-              </a:defRPr>
-            </a:pPr>
-            <a:r>
-              <a:t>Prompts - customize the system prompts shaping behavior</a:t>
+              <a:t>Mac app / web dashboard / CLI + Slack/Discord/Telegram/</a:t>
+            </a:r>
+          </a:p>
+          <a:p>
+            <a:pPr>
+              <a:spcBef>
+                <a:spcPts val="800"/>
+              </a:spcBef>
+              <a:defRPr sz="1800">
+                <a:solidFill>
+                  <a:srgbClr val="F1F5F9"/>
+                </a:solidFill>
+              </a:defRPr>
+            </a:pPr>
+            <a:r>
+              <a:t>Teams/Webex/WeCom/WeChat channels</a:t>
+            </a:r>
+          </a:p>
+          <a:p>
+            <a:pPr>
+              <a:spcBef>
+                <a:spcPts val="800"/>
+              </a:spcBef>
+              <a:defRPr sz="1800">
+                <a:solidFill>
+                  <a:srgbClr val="F1F5F9"/>
+                </a:solidFill>
+              </a:defRPr>
+            </a:pPr>
+            <a:r>
+              <a:t>Independent sessions, SHARED memory/skills/lessons/crons</a:t>
+            </a:r>
+          </a:p>
+          <a:p>
+            <a:pPr>
+              <a:spcBef>
+                <a:spcPts val="800"/>
+              </a:spcBef>
+              <a:defRPr sz="1800">
+                <a:solidFill>
+                  <a:srgbClr val="F1F5F9"/>
+                </a:solidFill>
+              </a:defRPr>
+            </a:pPr>
+            <a:r>
+              <a:t>Channels connect outbound - no need to expose dashboard port</a:t>
+            </a:r>
+          </a:p>
+          <a:p>
+            <a:pPr>
+              <a:spcBef>
+                <a:spcPts val="800"/>
+              </a:spcBef>
+              <a:defRPr sz="1800">
+                <a:solidFill>
+                  <a:srgbClr val="F1F5F9"/>
+                </a:solidFill>
+              </a:defRPr>
+            </a:pPr>
+          </a:p>
+          <a:p>
+            <a:pPr>
+              <a:spcBef>
+                <a:spcPts val="800"/>
+              </a:spcBef>
+              <a:defRPr sz="1800">
+                <a:solidFill>
+                  <a:srgbClr val="F1F5F9"/>
+                </a:solidFill>
+              </a:defRPr>
+            </a:pPr>
+            <a:r>
+              <a:t>Dashboard = React SPA localhost:5476 (primary interface)</a:t>
+            </a:r>
+          </a:p>
+          <a:p>
+            <a:pPr>
+              <a:spcBef>
+                <a:spcPts val="800"/>
+              </a:spcBef>
+              <a:defRPr sz="1800">
+                <a:solidFill>
+                  <a:srgbClr val="F1F5F9"/>
+                </a:solidFill>
+              </a:defRPr>
+            </a:pPr>
+            <a:r>
+              <a:t>Cross-surface: dashboard&lt;-&gt;Slack sync, resume sessions</a:t>
+            </a:r>
+          </a:p>
+          <a:p>
+            <a:pPr>
+              <a:spcBef>
+                <a:spcPts val="800"/>
+              </a:spcBef>
+              <a:defRPr sz="1800">
+                <a:solidFill>
+                  <a:srgbClr val="F1F5F9"/>
+                </a:solidFill>
+              </a:defRPr>
+            </a:pPr>
+            <a:r>
+              <a:t>5476 loopback-only default; reverse proxy+TLS or SSH tunnel</a:t>
             </a:r>
           </a:p>
         </p:txBody>
@@ -7108,7 +7107,7 @@
               </a:defRPr>
             </a:pPr>
             <a:r>
-              <a:t>Configuration</a:t>
+              <a:t>Chat</a:t>
             </a:r>
           </a:p>
         </p:txBody>
@@ -7181,109 +7180,109 @@
               </a:defRPr>
             </a:pPr>
             <a:r>
-              <a:t>Settings panel: Overview/Imports/Chat/Display/Voice/</a:t>
-            </a:r>
-          </a:p>
-          <a:p>
-            <a:pPr>
-              <a:spcBef>
-                <a:spcPts val="800"/>
-              </a:spcBef>
-              <a:defRPr sz="1800">
-                <a:solidFill>
-                  <a:srgbClr val="F1F5F9"/>
-                </a:solidFill>
-              </a:defRPr>
-            </a:pPr>
-            <a:r>
-              <a:t>Notifications/Shortcuts/Skills/Channels/Browser/Computer Use/</a:t>
-            </a:r>
-          </a:p>
-          <a:p>
-            <a:pPr>
-              <a:spcBef>
-                <a:spcPts val="800"/>
-              </a:spcBef>
-              <a:defRPr sz="1800">
-                <a:solidFill>
-                  <a:srgbClr val="F1F5F9"/>
-                </a:solidFill>
-              </a:defRPr>
-            </a:pPr>
-            <a:r>
-              <a:t>Instances/Security/Developer/About - changes apply immediately</a:t>
-            </a:r>
-          </a:p>
-          <a:p>
-            <a:pPr>
-              <a:spcBef>
-                <a:spcPts val="800"/>
-              </a:spcBef>
-              <a:defRPr sz="1800">
-                <a:solidFill>
-                  <a:srgbClr val="F1F5F9"/>
-                </a:solidFill>
-              </a:defRPr>
-            </a:pPr>
-          </a:p>
-          <a:p>
-            <a:pPr>
-              <a:spcBef>
-                <a:spcPts val="800"/>
-              </a:spcBef>
-              <a:defRPr sz="1800">
-                <a:solidFill>
-                  <a:srgbClr val="F1F5F9"/>
-                </a:solidFill>
-              </a:defRPr>
-            </a:pPr>
-            <a:r>
-              <a:t>kirocrew config get|set|edit (set auto-restarts pool)</a:t>
-            </a:r>
-          </a:p>
-          <a:p>
-            <a:pPr>
-              <a:spcBef>
-                <a:spcPts val="800"/>
-              </a:spcBef>
-              <a:defRPr sz="1800">
-                <a:solidFill>
-                  <a:srgbClr val="F1F5F9"/>
-                </a:solidFill>
-              </a:defRPr>
-            </a:pPr>
-            <a:r>
-              <a:t>config.json (JSON, missing keys -&gt; defaults); 14 themes</a:t>
-            </a:r>
-          </a:p>
-          <a:p>
-            <a:pPr>
-              <a:spcBef>
-                <a:spcPts val="800"/>
-              </a:spcBef>
-              <a:defRPr sz="1800">
-                <a:solidFill>
-                  <a:srgbClr val="F1F5F9"/>
-                </a:solidFill>
-              </a:defRPr>
-            </a:pPr>
-            <a:r>
-              <a:t>Channel creds in ~/.kiro/crew/.env (mode 600)</a:t>
-            </a:r>
-          </a:p>
-          <a:p>
-            <a:pPr>
-              <a:spcBef>
-                <a:spcPts val="800"/>
-              </a:spcBef>
-              <a:defRPr sz="1800">
-                <a:solidFill>
-                  <a:srgbClr val="F1F5F9"/>
-                </a:solidFill>
-              </a:defRPr>
-            </a:pPr>
-            <a:r>
-              <a:t>Env: KIROCREW_HOME (~/.kiro/crew), KIROCREW_PORT (5476)</a:t>
+              <a:t>Send text / @file / voice; streaming replies with live tool calls</a:t>
+            </a:r>
+          </a:p>
+          <a:p>
+            <a:pPr>
+              <a:spcBef>
+                <a:spcPts val="800"/>
+              </a:spcBef>
+              <a:defRPr sz="1800">
+                <a:solidFill>
+                  <a:srgbClr val="F1F5F9"/>
+                </a:solidFill>
+              </a:defRPr>
+            </a:pPr>
+            <a:r>
+              <a:t>Guide: approve/reject, edit &amp; resend, fork, Autopilot</a:t>
+            </a:r>
+          </a:p>
+          <a:p>
+            <a:pPr>
+              <a:spcBef>
+                <a:spcPts val="800"/>
+              </a:spcBef>
+              <a:defRPr sz="1800">
+                <a:solidFill>
+                  <a:srgbClr val="F1F5F9"/>
+                </a:solidFill>
+              </a:defRPr>
+            </a:pPr>
+            <a:r>
+              <a:t>Each tab = independent session sharing long-term memory</a:t>
+            </a:r>
+          </a:p>
+          <a:p>
+            <a:pPr>
+              <a:spcBef>
+                <a:spcPts val="800"/>
+              </a:spcBef>
+              <a:defRPr sz="1800">
+                <a:solidFill>
+                  <a:srgbClr val="F1F5F9"/>
+                </a:solidFill>
+              </a:defRPr>
+            </a:pPr>
+          </a:p>
+          <a:p>
+            <a:pPr>
+              <a:spcBef>
+                <a:spcPts val="800"/>
+              </a:spcBef>
+              <a:defRPr sz="1800">
+                <a:solidFill>
+                  <a:srgbClr val="F1F5F9"/>
+                </a:solidFill>
+              </a:defRPr>
+            </a:pPr>
+            <a:r>
+              <a:t>@ file picker; drag/paste image (vision); mic STT; Piper TTS</a:t>
+            </a:r>
+          </a:p>
+          <a:p>
+            <a:pPr>
+              <a:spcBef>
+                <a:spcPts val="800"/>
+              </a:spcBef>
+              <a:defRPr sz="1800">
+                <a:solidFill>
+                  <a:srgbClr val="F1F5F9"/>
+                </a:solidFill>
+              </a:defRPr>
+            </a:pPr>
+            <a:r>
+              <a:t>Prompt optimizer (Cmd+Shift+Enter); incognito; switch models;</a:t>
+            </a:r>
+          </a:p>
+          <a:p>
+            <a:pPr>
+              <a:spcBef>
+                <a:spcPts val="800"/>
+              </a:spcBef>
+              <a:defRPr sz="1800">
+                <a:solidFill>
+                  <a:srgbClr val="F1F5F9"/>
+                </a:solidFill>
+              </a:defRPr>
+            </a:pPr>
+            <a:r>
+              <a:t>reasoning effort per message</a:t>
+            </a:r>
+          </a:p>
+          <a:p>
+            <a:pPr>
+              <a:spcBef>
+                <a:spcPts val="800"/>
+              </a:spcBef>
+              <a:defRPr sz="1800">
+                <a:solidFill>
+                  <a:srgbClr val="F1F5F9"/>
+                </a:solidFill>
+              </a:defRPr>
+            </a:pPr>
+            <a:r>
+              <a:t>Leaves: Sessions, Message controls, Optimizer, Voice, Widgets</a:t>
             </a:r>
           </a:p>
         </p:txBody>
@@ -7344,7 +7343,7 @@
               </a:defRPr>
             </a:pPr>
             <a:r>
-              <a:t>Multi-instance</a:t>
+              <a:t>Agent Capabilities (Customization Hub)</a:t>
             </a:r>
           </a:p>
         </p:txBody>
@@ -7417,109 +7416,97 @@
               </a:defRPr>
             </a:pPr>
             <a:r>
-              <a:t>Drive multiple remote Crew hosts from one hub via SSH tunnels</a:t>
-            </a:r>
-          </a:p>
-          <a:p>
-            <a:pPr>
-              <a:spcBef>
-                <a:spcPts val="800"/>
-              </a:spcBef>
-              <a:defRPr sz="1800">
-                <a:solidFill>
-                  <a:srgbClr val="F1F5F9"/>
-                </a:solidFill>
-              </a:defRPr>
-            </a:pPr>
-            <a:r>
-              <a:t>Opt-in, off by default:</a:t>
-            </a:r>
-          </a:p>
-          <a:p>
-            <a:pPr>
-              <a:spcBef>
-                <a:spcPts val="800"/>
-              </a:spcBef>
-              <a:defRPr sz="1800">
-                <a:solidFill>
-                  <a:srgbClr val="F1F5F9"/>
-                </a:solidFill>
-              </a:defRPr>
-            </a:pPr>
-            <a:r>
-              <a:t>  kirocrew config set instances.enabled true &amp;&amp; kirocrew restart</a:t>
-            </a:r>
-          </a:p>
-          <a:p>
-            <a:pPr>
-              <a:spcBef>
-                <a:spcPts val="800"/>
-              </a:spcBef>
-              <a:defRPr sz="1800">
-                <a:solidFill>
-                  <a:srgbClr val="F1F5F9"/>
-                </a:solidFill>
-              </a:defRPr>
-            </a:pPr>
-          </a:p>
-          <a:p>
-            <a:pPr>
-              <a:spcBef>
-                <a:spcPts val="800"/>
-              </a:spcBef>
-              <a:defRPr sz="1800">
-                <a:solidFill>
-                  <a:srgbClr val="F1F5F9"/>
-                </a:solidFill>
-              </a:defRPr>
-            </a:pPr>
-            <a:r>
-              <a:t>Warm set cap 5 (LRU); health probe 30s; 2-tier self-heal (&lt;=8)</a:t>
-            </a:r>
-          </a:p>
-          <a:p>
-            <a:pPr>
-              <a:spcBef>
-                <a:spcPts val="800"/>
-              </a:spcBef>
-              <a:defRPr sz="1800">
-                <a:solidFill>
-                  <a:srgbClr val="F1F5F9"/>
-                </a:solidFill>
-              </a:defRPr>
-            </a:pPr>
-            <a:r>
-              <a:t>Add: SSH host/alias, remote port 7777, token TTL 20h</a:t>
-            </a:r>
-          </a:p>
-          <a:p>
-            <a:pPr>
-              <a:spcBef>
-                <a:spcPts val="800"/>
-              </a:spcBef>
-              <a:defRPr sz="1800">
-                <a:solidFill>
-                  <a:srgbClr val="F1F5F9"/>
-                </a:solidFill>
-              </a:defRPr>
-            </a:pPr>
-            <a:r>
-              <a:t>Security: deny-by-default, owner-only, loopback forwards,</a:t>
-            </a:r>
-          </a:p>
-          <a:p>
-            <a:pPr>
-              <a:spcBef>
-                <a:spcPts val="800"/>
-              </a:spcBef>
-              <a:defRPr sz="1800">
-                <a:solidFill>
-                  <a:srgbClr val="F1F5F9"/>
-                </a:solidFill>
-              </a:defRPr>
-            </a:pPr>
-            <a:r>
-              <a:t>argv-list ssh (no shell injection), SEL-audited</a:t>
+              <a:t>Agents - model/prompt/tools/MCP server config</a:t>
+            </a:r>
+          </a:p>
+          <a:p>
+            <a:pPr>
+              <a:spcBef>
+                <a:spcPts val="800"/>
+              </a:spcBef>
+              <a:defRPr sz="1800">
+                <a:solidFill>
+                  <a:srgbClr val="F1F5F9"/>
+                </a:solidFill>
+              </a:defRPr>
+            </a:pPr>
+            <a:r>
+              <a:t>Agent Templates - prebuilt configs to customize</a:t>
+            </a:r>
+          </a:p>
+          <a:p>
+            <a:pPr>
+              <a:spcBef>
+                <a:spcPts val="800"/>
+              </a:spcBef>
+              <a:defRPr sz="1800">
+                <a:solidFill>
+                  <a:srgbClr val="F1F5F9"/>
+                </a:solidFill>
+              </a:defRPr>
+            </a:pPr>
+            <a:r>
+              <a:t>Integrations (MCP) - add external tools/services</a:t>
+            </a:r>
+          </a:p>
+          <a:p>
+            <a:pPr>
+              <a:spcBef>
+                <a:spcPts val="800"/>
+              </a:spcBef>
+              <a:defRPr sz="1800">
+                <a:solidFill>
+                  <a:srgbClr val="F1F5F9"/>
+                </a:solidFill>
+              </a:defRPr>
+            </a:pPr>
+            <a:r>
+              <a:t>Skills - on-demand knowledge files teaching workflows</a:t>
+            </a:r>
+          </a:p>
+          <a:p>
+            <a:pPr>
+              <a:spcBef>
+                <a:spcPts val="800"/>
+              </a:spcBef>
+              <a:defRPr sz="1800">
+                <a:solidFill>
+                  <a:srgbClr val="F1F5F9"/>
+                </a:solidFill>
+              </a:defRPr>
+            </a:pPr>
+            <a:r>
+              <a:t>Steering - workspace-level rules every session inherits</a:t>
+            </a:r>
+          </a:p>
+          <a:p>
+            <a:pPr>
+              <a:spcBef>
+                <a:spcPts val="800"/>
+              </a:spcBef>
+              <a:defRPr sz="1800">
+                <a:solidFill>
+                  <a:srgbClr val="F1F5F9"/>
+                </a:solidFill>
+              </a:defRPr>
+            </a:pPr>
+            <a:r>
+              <a:t>Hooks - automate reactions to events (scripts/context)</a:t>
+            </a:r>
+          </a:p>
+          <a:p>
+            <a:pPr>
+              <a:spcBef>
+                <a:spcPts val="800"/>
+              </a:spcBef>
+              <a:defRPr sz="1800">
+                <a:solidFill>
+                  <a:srgbClr val="F1F5F9"/>
+                </a:solidFill>
+              </a:defRPr>
+            </a:pPr>
+            <a:r>
+              <a:t>Prompts - customize the system prompts shaping behavior</a:t>
             </a:r>
           </a:p>
         </p:txBody>
@@ -7580,7 +7567,7 @@
               </a:defRPr>
             </a:pPr>
             <a:r>
-              <a:t>Snapshot &amp; Restore</a:t>
+              <a:t>Configuration</a:t>
             </a:r>
           </a:p>
         </p:txBody>
@@ -7653,109 +7640,109 @@
               </a:defRPr>
             </a:pPr>
             <a:r>
-              <a:t>kirocrew snapshot [dir] --keep N | --list</a:t>
-            </a:r>
-          </a:p>
-          <a:p>
-            <a:pPr>
-              <a:spcBef>
-                <a:spcPts val="800"/>
-              </a:spcBef>
-              <a:defRPr sz="1800">
-                <a:solidFill>
-                  <a:srgbClr val="F1F5F9"/>
-                </a:solidFill>
-              </a:defRPr>
-            </a:pPr>
-            <a:r>
-              <a:t>kirocrew restore snap.tar.gz [--components ...] [--dry-run]</a:t>
-            </a:r>
-          </a:p>
-          <a:p>
-            <a:pPr>
-              <a:spcBef>
-                <a:spcPts val="800"/>
-              </a:spcBef>
-              <a:defRPr sz="1800">
-                <a:solidFill>
-                  <a:srgbClr val="F1F5F9"/>
-                </a:solidFill>
-              </a:defRPr>
-            </a:pPr>
-          </a:p>
-          <a:p>
-            <a:pPr>
-              <a:spcBef>
-                <a:spcPts val="800"/>
-              </a:spcBef>
-              <a:defRPr sz="1800">
-                <a:solidFill>
-                  <a:srgbClr val="F1F5F9"/>
-                </a:solidFill>
-              </a:defRPr>
-            </a:pPr>
-            <a:r>
-              <a:t>Includes: Memory, Workspace, Crons, Config, Skills, Notifications</a:t>
-            </a:r>
-          </a:p>
-          <a:p>
-            <a:pPr>
-              <a:spcBef>
-                <a:spcPts val="800"/>
-              </a:spcBef>
-              <a:defRPr sz="1800">
-                <a:solidFill>
-                  <a:srgbClr val="F1F5F9"/>
-                </a:solidFill>
-              </a:defRPr>
-            </a:pPr>
-            <a:r>
-              <a:t>Restore modes: replace (empty) vs merge (existing) - auto-detected</a:t>
-            </a:r>
-          </a:p>
-          <a:p>
-            <a:pPr>
-              <a:spcBef>
-                <a:spcPts val="800"/>
-              </a:spcBef>
-              <a:defRPr sz="1800">
-                <a:solidFill>
-                  <a:srgbClr val="F1F5F9"/>
-                </a:solidFill>
-              </a:defRPr>
-            </a:pPr>
-            <a:r>
-              <a:t>Daily auto snapshot 08:00 UTC, keeps 7</a:t>
-            </a:r>
-          </a:p>
-          <a:p>
-            <a:pPr>
-              <a:spcBef>
-                <a:spcPts val="800"/>
-              </a:spcBef>
-              <a:defRPr sz="1800">
-                <a:solidFill>
-                  <a:srgbClr val="F1F5F9"/>
-                </a:solidFill>
-              </a:defRPr>
-            </a:pPr>
-            <a:r>
-              <a:t>Contains security keys - treat like credentials</a:t>
-            </a:r>
-          </a:p>
-          <a:p>
-            <a:pPr>
-              <a:spcBef>
-                <a:spcPts val="800"/>
-              </a:spcBef>
-              <a:defRPr sz="1800">
-                <a:solidFill>
-                  <a:srgbClr val="F1F5F9"/>
-                </a:solidFill>
-              </a:defRPr>
-            </a:pPr>
-            <a:r>
-              <a:t>NOT covered: kiro-cli/AWS creds, channel defs, app code</a:t>
+              <a:t>Settings panel: Overview/Imports/Chat/Display/Voice/</a:t>
+            </a:r>
+          </a:p>
+          <a:p>
+            <a:pPr>
+              <a:spcBef>
+                <a:spcPts val="800"/>
+              </a:spcBef>
+              <a:defRPr sz="1800">
+                <a:solidFill>
+                  <a:srgbClr val="F1F5F9"/>
+                </a:solidFill>
+              </a:defRPr>
+            </a:pPr>
+            <a:r>
+              <a:t>Notifications/Shortcuts/Skills/Channels/Browser/Computer Use/</a:t>
+            </a:r>
+          </a:p>
+          <a:p>
+            <a:pPr>
+              <a:spcBef>
+                <a:spcPts val="800"/>
+              </a:spcBef>
+              <a:defRPr sz="1800">
+                <a:solidFill>
+                  <a:srgbClr val="F1F5F9"/>
+                </a:solidFill>
+              </a:defRPr>
+            </a:pPr>
+            <a:r>
+              <a:t>Instances/Security/Developer/About - changes apply immediately</a:t>
+            </a:r>
+          </a:p>
+          <a:p>
+            <a:pPr>
+              <a:spcBef>
+                <a:spcPts val="800"/>
+              </a:spcBef>
+              <a:defRPr sz="1800">
+                <a:solidFill>
+                  <a:srgbClr val="F1F5F9"/>
+                </a:solidFill>
+              </a:defRPr>
+            </a:pPr>
+          </a:p>
+          <a:p>
+            <a:pPr>
+              <a:spcBef>
+                <a:spcPts val="800"/>
+              </a:spcBef>
+              <a:defRPr sz="1800">
+                <a:solidFill>
+                  <a:srgbClr val="F1F5F9"/>
+                </a:solidFill>
+              </a:defRPr>
+            </a:pPr>
+            <a:r>
+              <a:t>kirocrew config get|set|edit (set auto-restarts pool)</a:t>
+            </a:r>
+          </a:p>
+          <a:p>
+            <a:pPr>
+              <a:spcBef>
+                <a:spcPts val="800"/>
+              </a:spcBef>
+              <a:defRPr sz="1800">
+                <a:solidFill>
+                  <a:srgbClr val="F1F5F9"/>
+                </a:solidFill>
+              </a:defRPr>
+            </a:pPr>
+            <a:r>
+              <a:t>config.json (JSON, missing keys -&gt; defaults); 14 themes</a:t>
+            </a:r>
+          </a:p>
+          <a:p>
+            <a:pPr>
+              <a:spcBef>
+                <a:spcPts val="800"/>
+              </a:spcBef>
+              <a:defRPr sz="1800">
+                <a:solidFill>
+                  <a:srgbClr val="F1F5F9"/>
+                </a:solidFill>
+              </a:defRPr>
+            </a:pPr>
+            <a:r>
+              <a:t>Channel creds in ~/.kiro/crew/.env (mode 600)</a:t>
+            </a:r>
+          </a:p>
+          <a:p>
+            <a:pPr>
+              <a:spcBef>
+                <a:spcPts val="800"/>
+              </a:spcBef>
+              <a:defRPr sz="1800">
+                <a:solidFill>
+                  <a:srgbClr val="F1F5F9"/>
+                </a:solidFill>
+              </a:defRPr>
+            </a:pPr>
+            <a:r>
+              <a:t>Env: KIROCREW_HOME (~/.kiro/crew), KIROCREW_PORT (5476)</a:t>
             </a:r>
           </a:p>
         </p:txBody>
@@ -7816,7 +7803,7 @@
               </a:defRPr>
             </a:pPr>
             <a:r>
-              <a:t>Apps / App Kit</a:t>
+              <a:t>Multi-instance</a:t>
             </a:r>
           </a:p>
         </p:txBody>
@@ -7889,109 +7876,109 @@
               </a:defRPr>
             </a:pPr>
             <a:r>
-              <a:t>Apps contribute: agents, skills, MCP servers, crons, UI pages,</a:t>
-            </a:r>
-          </a:p>
-          <a:p>
-            <a:pPr>
-              <a:spcBef>
-                <a:spcPts val="800"/>
-              </a:spcBef>
-              <a:defRPr sz="1800">
-                <a:solidFill>
-                  <a:srgbClr val="F1F5F9"/>
-                </a:solidFill>
-              </a:defRPr>
-            </a:pPr>
-            <a:r>
-              <a:t>backend processes, gateway hooks</a:t>
-            </a:r>
-          </a:p>
-          <a:p>
-            <a:pPr>
-              <a:spcBef>
-                <a:spcPts val="800"/>
-              </a:spcBef>
-              <a:defRPr sz="1800">
-                <a:solidFill>
-                  <a:srgbClr val="F1F5F9"/>
-                </a:solidFill>
-              </a:defRPr>
-            </a:pPr>
-            <a:r>
-              <a:t>Third-party apps DISABLED by default (Settings -&gt; Security)</a:t>
-            </a:r>
-          </a:p>
-          <a:p>
-            <a:pPr>
-              <a:spcBef>
-                <a:spcPts val="800"/>
-              </a:spcBef>
-              <a:defRPr sz="1800">
-                <a:solidFill>
-                  <a:srgbClr val="F1F5F9"/>
-                </a:solidFill>
-              </a:defRPr>
-            </a:pPr>
-          </a:p>
-          <a:p>
-            <a:pPr>
-              <a:spcBef>
-                <a:spcPts val="800"/>
-              </a:spcBef>
-              <a:defRPr sz="1800">
-                <a:solidFill>
-                  <a:srgbClr val="F1F5F9"/>
-                </a:solidFill>
-              </a:defRPr>
-            </a:pPr>
-            <a:r>
-              <a:t>Install from App Store (curated registry, PR to add) or</a:t>
-            </a:r>
-          </a:p>
-          <a:p>
-            <a:pPr>
-              <a:spcBef>
-                <a:spcPts val="800"/>
-              </a:spcBef>
-              <a:defRPr sz="1800">
-                <a:solidFill>
-                  <a:srgbClr val="F1F5F9"/>
-                </a:solidFill>
-              </a:defRPr>
-            </a:pPr>
-            <a:r>
-              <a:t>federated external registries (opt-in)</a:t>
-            </a:r>
-          </a:p>
-          <a:p>
-            <a:pPr>
-              <a:spcBef>
-                <a:spcPts val="800"/>
-              </a:spcBef>
-              <a:defRPr sz="1800">
-                <a:solidFill>
-                  <a:srgbClr val="F1F5F9"/>
-                </a:solidFill>
-              </a:defRPr>
-            </a:pPr>
-            <a:r>
-              <a:t>Lifecycle: gateway-managed / app-managed / locked</a:t>
-            </a:r>
-          </a:p>
-          <a:p>
-            <a:pPr>
-              <a:spcBef>
-                <a:spcPts val="800"/>
-              </a:spcBef>
-              <a:defRPr sz="1800">
-                <a:solidFill>
-                  <a:srgbClr val="F1F5F9"/>
-                </a:solidFill>
-              </a:defRPr>
-            </a:pPr>
-            <a:r>
-              <a:t>Dev: kirocrew app dev &lt;name&gt;; only permissions.api enforced</a:t>
+              <a:t>Drive multiple remote Crew hosts from one hub via SSH tunnels</a:t>
+            </a:r>
+          </a:p>
+          <a:p>
+            <a:pPr>
+              <a:spcBef>
+                <a:spcPts val="800"/>
+              </a:spcBef>
+              <a:defRPr sz="1800">
+                <a:solidFill>
+                  <a:srgbClr val="F1F5F9"/>
+                </a:solidFill>
+              </a:defRPr>
+            </a:pPr>
+            <a:r>
+              <a:t>Opt-in, off by default:</a:t>
+            </a:r>
+          </a:p>
+          <a:p>
+            <a:pPr>
+              <a:spcBef>
+                <a:spcPts val="800"/>
+              </a:spcBef>
+              <a:defRPr sz="1800">
+                <a:solidFill>
+                  <a:srgbClr val="F1F5F9"/>
+                </a:solidFill>
+              </a:defRPr>
+            </a:pPr>
+            <a:r>
+              <a:t>  kirocrew config set instances.enabled true &amp;&amp; kirocrew restart</a:t>
+            </a:r>
+          </a:p>
+          <a:p>
+            <a:pPr>
+              <a:spcBef>
+                <a:spcPts val="800"/>
+              </a:spcBef>
+              <a:defRPr sz="1800">
+                <a:solidFill>
+                  <a:srgbClr val="F1F5F9"/>
+                </a:solidFill>
+              </a:defRPr>
+            </a:pPr>
+          </a:p>
+          <a:p>
+            <a:pPr>
+              <a:spcBef>
+                <a:spcPts val="800"/>
+              </a:spcBef>
+              <a:defRPr sz="1800">
+                <a:solidFill>
+                  <a:srgbClr val="F1F5F9"/>
+                </a:solidFill>
+              </a:defRPr>
+            </a:pPr>
+            <a:r>
+              <a:t>Warm set cap 5 (LRU); health probe 30s; 2-tier self-heal (&lt;=8)</a:t>
+            </a:r>
+          </a:p>
+          <a:p>
+            <a:pPr>
+              <a:spcBef>
+                <a:spcPts val="800"/>
+              </a:spcBef>
+              <a:defRPr sz="1800">
+                <a:solidFill>
+                  <a:srgbClr val="F1F5F9"/>
+                </a:solidFill>
+              </a:defRPr>
+            </a:pPr>
+            <a:r>
+              <a:t>Add: SSH host/alias, remote port 7777, token TTL 20h</a:t>
+            </a:r>
+          </a:p>
+          <a:p>
+            <a:pPr>
+              <a:spcBef>
+                <a:spcPts val="800"/>
+              </a:spcBef>
+              <a:defRPr sz="1800">
+                <a:solidFill>
+                  <a:srgbClr val="F1F5F9"/>
+                </a:solidFill>
+              </a:defRPr>
+            </a:pPr>
+            <a:r>
+              <a:t>Security: deny-by-default, owner-only, loopback forwards,</a:t>
+            </a:r>
+          </a:p>
+          <a:p>
+            <a:pPr>
+              <a:spcBef>
+                <a:spcPts val="800"/>
+              </a:spcBef>
+              <a:defRPr sz="1800">
+                <a:solidFill>
+                  <a:srgbClr val="F1F5F9"/>
+                </a:solidFill>
+              </a:defRPr>
+            </a:pPr>
+            <a:r>
+              <a:t>argv-list ssh (no shell injection), SEL-audited</a:t>
             </a:r>
           </a:p>
         </p:txBody>
@@ -8300,7 +8287,7 @@
               </a:defRPr>
             </a:pPr>
             <a:r>
-              <a:t>Troubleshooting</a:t>
+              <a:t>Snapshot &amp; Restore</a:t>
             </a:r>
           </a:p>
         </p:txBody>
@@ -8373,109 +8360,109 @@
               </a:defRPr>
             </a:pPr>
             <a:r>
-              <a:t>Start with a health check:</a:t>
-            </a:r>
-          </a:p>
-          <a:p>
-            <a:pPr>
-              <a:spcBef>
-                <a:spcPts val="800"/>
-              </a:spcBef>
-              <a:defRPr sz="1800">
-                <a:solidFill>
-                  <a:srgbClr val="F1F5F9"/>
-                </a:solidFill>
-              </a:defRPr>
-            </a:pPr>
-            <a:r>
-              <a:t>  kirocrew doctor [--verbose]   /   kirocrew logs -f</a:t>
-            </a:r>
-          </a:p>
-          <a:p>
-            <a:pPr>
-              <a:spcBef>
-                <a:spcPts val="800"/>
-              </a:spcBef>
-              <a:defRPr sz="1800">
-                <a:solidFill>
-                  <a:srgbClr val="F1F5F9"/>
-                </a:solidFill>
-              </a:defRPr>
-            </a:pPr>
-            <a:r>
-              <a:t>Reports: kiro-cli, auth, embeddings, Slack, config, MCP</a:t>
-            </a:r>
-          </a:p>
-          <a:p>
-            <a:pPr>
-              <a:spcBef>
-                <a:spcPts val="800"/>
-              </a:spcBef>
-              <a:defRPr sz="1800">
-                <a:solidFill>
-                  <a:srgbClr val="F1F5F9"/>
-                </a:solidFill>
-              </a:defRPr>
-            </a:pPr>
-          </a:p>
-          <a:p>
-            <a:pPr>
-              <a:spcBef>
-                <a:spcPts val="800"/>
-              </a:spcBef>
-              <a:defRPr sz="1800">
-                <a:solidFill>
-                  <a:srgbClr val="F1F5F9"/>
-                </a:solidFill>
-              </a:defRPr>
-            </a:pPr>
-            <a:r>
-              <a:t>Categories: install/setup, agent (AcpTimeoutError/</a:t>
-            </a:r>
-          </a:p>
-          <a:p>
-            <a:pPr>
-              <a:spcBef>
-                <a:spcPts val="800"/>
-              </a:spcBef>
-              <a:defRPr sz="1800">
-                <a:solidFill>
-                  <a:srgbClr val="F1F5F9"/>
-                </a:solidFill>
-              </a:defRPr>
-            </a:pPr>
-            <a:r>
-              <a:t>AcpProcessDied), memory/embeddings, Slack, Discord, MCP,</a:t>
-            </a:r>
-          </a:p>
-          <a:p>
-            <a:pPr>
-              <a:spcBef>
-                <a:spcPts val="800"/>
-              </a:spcBef>
-              <a:defRPr sz="1800">
-                <a:solidFill>
-                  <a:srgbClr val="F1F5F9"/>
-                </a:solidFill>
-              </a:defRPr>
-            </a:pPr>
-            <a:r>
-              <a:t>dashboard 403, sessions, task runner, subagents, cron,</a:t>
-            </a:r>
-          </a:p>
-          <a:p>
-            <a:pPr>
-              <a:spcBef>
-                <a:spcPts val="800"/>
-              </a:spcBef>
-              <a:defRPr sz="1800">
-                <a:solidFill>
-                  <a:srgbClr val="F1F5F9"/>
-                </a:solidFill>
-              </a:defRPr>
-            </a:pPr>
-            <a:r>
-              <a:t>config, snapshot, multi-instance, voice, artifact deploy</a:t>
+              <a:t>kirocrew snapshot [dir] --keep N | --list</a:t>
+            </a:r>
+          </a:p>
+          <a:p>
+            <a:pPr>
+              <a:spcBef>
+                <a:spcPts val="800"/>
+              </a:spcBef>
+              <a:defRPr sz="1800">
+                <a:solidFill>
+                  <a:srgbClr val="F1F5F9"/>
+                </a:solidFill>
+              </a:defRPr>
+            </a:pPr>
+            <a:r>
+              <a:t>kirocrew restore snap.tar.gz [--components ...] [--dry-run]</a:t>
+            </a:r>
+          </a:p>
+          <a:p>
+            <a:pPr>
+              <a:spcBef>
+                <a:spcPts val="800"/>
+              </a:spcBef>
+              <a:defRPr sz="1800">
+                <a:solidFill>
+                  <a:srgbClr val="F1F5F9"/>
+                </a:solidFill>
+              </a:defRPr>
+            </a:pPr>
+          </a:p>
+          <a:p>
+            <a:pPr>
+              <a:spcBef>
+                <a:spcPts val="800"/>
+              </a:spcBef>
+              <a:defRPr sz="1800">
+                <a:solidFill>
+                  <a:srgbClr val="F1F5F9"/>
+                </a:solidFill>
+              </a:defRPr>
+            </a:pPr>
+            <a:r>
+              <a:t>Includes: Memory, Workspace, Crons, Config, Skills, Notifications</a:t>
+            </a:r>
+          </a:p>
+          <a:p>
+            <a:pPr>
+              <a:spcBef>
+                <a:spcPts val="800"/>
+              </a:spcBef>
+              <a:defRPr sz="1800">
+                <a:solidFill>
+                  <a:srgbClr val="F1F5F9"/>
+                </a:solidFill>
+              </a:defRPr>
+            </a:pPr>
+            <a:r>
+              <a:t>Restore modes: replace (empty) vs merge (existing) - auto-detected</a:t>
+            </a:r>
+          </a:p>
+          <a:p>
+            <a:pPr>
+              <a:spcBef>
+                <a:spcPts val="800"/>
+              </a:spcBef>
+              <a:defRPr sz="1800">
+                <a:solidFill>
+                  <a:srgbClr val="F1F5F9"/>
+                </a:solidFill>
+              </a:defRPr>
+            </a:pPr>
+            <a:r>
+              <a:t>Daily auto snapshot 08:00 UTC, keeps 7</a:t>
+            </a:r>
+          </a:p>
+          <a:p>
+            <a:pPr>
+              <a:spcBef>
+                <a:spcPts val="800"/>
+              </a:spcBef>
+              <a:defRPr sz="1800">
+                <a:solidFill>
+                  <a:srgbClr val="F1F5F9"/>
+                </a:solidFill>
+              </a:defRPr>
+            </a:pPr>
+            <a:r>
+              <a:t>Contains security keys - treat like credentials</a:t>
+            </a:r>
+          </a:p>
+          <a:p>
+            <a:pPr>
+              <a:spcBef>
+                <a:spcPts val="800"/>
+              </a:spcBef>
+              <a:defRPr sz="1800">
+                <a:solidFill>
+                  <a:srgbClr val="F1F5F9"/>
+                </a:solidFill>
+              </a:defRPr>
+            </a:pPr>
+            <a:r>
+              <a:t>NOT covered: kiro-cli/AWS creds, channel defs, app code</a:t>
             </a:r>
           </a:p>
         </p:txBody>
@@ -8494,7 +8481,7 @@
     <p:bg>
       <p:bgPr>
         <a:solidFill>
-          <a:srgbClr val="1E293B"/>
+          <a:srgbClr val="0F172A"/>
         </a:solidFill>
         <a:effectLst/>
       </p:bgPr>
@@ -8514,8 +8501,8 @@
         </p:nvSpPr>
         <p:spPr>
           <a:xfrm>
-            <a:off x="914400" y="2743200"/>
-            <a:ext cx="7315200" cy="914400"/>
+            <a:off x="457200" y="365760"/>
+            <a:ext cx="6858000" cy="548640"/>
           </a:xfrm>
           <a:prstGeom prst="rect">
             <a:avLst/>
@@ -8528,15 +8515,15 @@
           </a:bodyPr>
           <a:lstStyle/>
           <a:p>
-            <a:pPr algn="ctr">
-              <a:defRPr sz="4400" b="1">
+            <a:pPr>
+              <a:defRPr sz="3200" b="1">
                 <a:solidFill>
                   <a:srgbClr val="2563EB"/>
                 </a:solidFill>
               </a:defRPr>
             </a:pPr>
             <a:r>
-              <a:t>Part 4: Use Cases</a:t>
+              <a:t>Apps / App Kit</a:t>
             </a:r>
           </a:p>
         </p:txBody>
@@ -8549,8 +8536,8 @@
         </p:nvSpPr>
         <p:spPr>
           <a:xfrm>
-            <a:off x="914400" y="3840480"/>
-            <a:ext cx="7315200" cy="548640"/>
+            <a:off x="7498079" y="411480"/>
+            <a:ext cx="1371600" cy="365760"/>
           </a:xfrm>
           <a:prstGeom prst="rect">
             <a:avLst/>
@@ -8563,15 +8550,155 @@
           </a:bodyPr>
           <a:lstStyle/>
           <a:p>
-            <a:pPr algn="ctr">
-              <a:defRPr sz="2000">
-                <a:solidFill>
-                  <a:srgbClr val="94A3B8"/>
-                </a:solidFill>
-              </a:defRPr>
-            </a:pPr>
-            <a:r>
-              <a:t>Enterprise integration examples</a:t>
+            <a:pPr>
+              <a:defRPr sz="1100" b="1">
+                <a:solidFill>
+                  <a:srgbClr val="10B981"/>
+                </a:solidFill>
+              </a:defRPr>
+            </a:pPr>
+            <a:r>
+              <a:t>✓ Verified</a:t>
+            </a:r>
+          </a:p>
+        </p:txBody>
+      </p:sp>
+      <p:sp>
+        <p:nvSpPr>
+          <p:cNvPr id="4" name="TextBox 3"/>
+          <p:cNvSpPr txBox="1"/>
+          <p:nvPr/>
+        </p:nvSpPr>
+        <p:spPr>
+          <a:xfrm>
+            <a:off x="640080" y="1188720"/>
+            <a:ext cx="7863840" cy="5212080"/>
+          </a:xfrm>
+          <a:prstGeom prst="rect">
+            <a:avLst/>
+          </a:prstGeom>
+          <a:noFill/>
+        </p:spPr>
+        <p:txBody>
+          <a:bodyPr wrap="square">
+            <a:spAutoFit/>
+          </a:bodyPr>
+          <a:lstStyle/>
+          <a:p>
+            <a:pPr>
+              <a:spcBef>
+                <a:spcPts val="800"/>
+              </a:spcBef>
+              <a:defRPr sz="1800">
+                <a:solidFill>
+                  <a:srgbClr val="F1F5F9"/>
+                </a:solidFill>
+              </a:defRPr>
+            </a:pPr>
+            <a:r>
+              <a:t>Apps contribute: agents, skills, MCP servers, crons, UI pages,</a:t>
+            </a:r>
+          </a:p>
+          <a:p>
+            <a:pPr>
+              <a:spcBef>
+                <a:spcPts val="800"/>
+              </a:spcBef>
+              <a:defRPr sz="1800">
+                <a:solidFill>
+                  <a:srgbClr val="F1F5F9"/>
+                </a:solidFill>
+              </a:defRPr>
+            </a:pPr>
+            <a:r>
+              <a:t>backend processes, gateway hooks</a:t>
+            </a:r>
+          </a:p>
+          <a:p>
+            <a:pPr>
+              <a:spcBef>
+                <a:spcPts val="800"/>
+              </a:spcBef>
+              <a:defRPr sz="1800">
+                <a:solidFill>
+                  <a:srgbClr val="F1F5F9"/>
+                </a:solidFill>
+              </a:defRPr>
+            </a:pPr>
+            <a:r>
+              <a:t>Third-party apps DISABLED by default (Settings -&gt; Security)</a:t>
+            </a:r>
+          </a:p>
+          <a:p>
+            <a:pPr>
+              <a:spcBef>
+                <a:spcPts val="800"/>
+              </a:spcBef>
+              <a:defRPr sz="1800">
+                <a:solidFill>
+                  <a:srgbClr val="F1F5F9"/>
+                </a:solidFill>
+              </a:defRPr>
+            </a:pPr>
+          </a:p>
+          <a:p>
+            <a:pPr>
+              <a:spcBef>
+                <a:spcPts val="800"/>
+              </a:spcBef>
+              <a:defRPr sz="1800">
+                <a:solidFill>
+                  <a:srgbClr val="F1F5F9"/>
+                </a:solidFill>
+              </a:defRPr>
+            </a:pPr>
+            <a:r>
+              <a:t>Install from App Store (curated registry, PR to add) or</a:t>
+            </a:r>
+          </a:p>
+          <a:p>
+            <a:pPr>
+              <a:spcBef>
+                <a:spcPts val="800"/>
+              </a:spcBef>
+              <a:defRPr sz="1800">
+                <a:solidFill>
+                  <a:srgbClr val="F1F5F9"/>
+                </a:solidFill>
+              </a:defRPr>
+            </a:pPr>
+            <a:r>
+              <a:t>federated external registries (opt-in)</a:t>
+            </a:r>
+          </a:p>
+          <a:p>
+            <a:pPr>
+              <a:spcBef>
+                <a:spcPts val="800"/>
+              </a:spcBef>
+              <a:defRPr sz="1800">
+                <a:solidFill>
+                  <a:srgbClr val="F1F5F9"/>
+                </a:solidFill>
+              </a:defRPr>
+            </a:pPr>
+            <a:r>
+              <a:t>Lifecycle: gateway-managed / app-managed / locked</a:t>
+            </a:r>
+          </a:p>
+          <a:p>
+            <a:pPr>
+              <a:spcBef>
+                <a:spcPts val="800"/>
+              </a:spcBef>
+              <a:defRPr sz="1800">
+                <a:solidFill>
+                  <a:srgbClr val="F1F5F9"/>
+                </a:solidFill>
+              </a:defRPr>
+            </a:pPr>
+            <a:r>
+              <a:t>Dev: kirocrew app dev &lt;name&gt;; only permissions.api enforced</a:t>
             </a:r>
           </a:p>
         </p:txBody>
@@ -8632,7 +8759,7 @@
               </a:defRPr>
             </a:pPr>
             <a:r>
-              <a:t>Example: 24/7 PR Monitoring</a:t>
+              <a:t>Troubleshooting</a:t>
             </a:r>
           </a:p>
         </p:txBody>
@@ -8662,12 +8789,12 @@
             <a:pPr>
               <a:defRPr sz="1100" b="1">
                 <a:solidFill>
-                  <a:srgbClr val="F59E0B"/>
-                </a:solidFill>
-              </a:defRPr>
-            </a:pPr>
-            <a:r>
-              <a:t>⚠ To Be Verified</a:t>
+                  <a:srgbClr val="10B981"/>
+                </a:solidFill>
+              </a:defRPr>
+            </a:pPr>
+            <a:r>
+              <a:t>✓ Verified</a:t>
             </a:r>
           </a:p>
         </p:txBody>
@@ -8705,133 +8832,109 @@
               </a:defRPr>
             </a:pPr>
             <a:r>
-              <a:t>Scenario: Track open PRs and alert on staleness</a:t>
-            </a:r>
-          </a:p>
-          <a:p>
-            <a:pPr>
-              <a:spcBef>
-                <a:spcPts val="800"/>
-              </a:spcBef>
-              <a:defRPr sz="1800">
-                <a:solidFill>
-                  <a:srgbClr val="F1F5F9"/>
-                </a:solidFill>
-              </a:defRPr>
-            </a:pPr>
-          </a:p>
-          <a:p>
-            <a:pPr>
-              <a:spcBef>
-                <a:spcPts val="800"/>
-              </a:spcBef>
-              <a:defRPr sz="1800">
-                <a:solidFill>
-                  <a:srgbClr val="F1F5F9"/>
-                </a:solidFill>
-              </a:defRPr>
-            </a:pPr>
-            <a:r>
-              <a:t>Implementation:</a:t>
-            </a:r>
-          </a:p>
-          <a:p>
-            <a:pPr>
-              <a:spcBef>
-                <a:spcPts val="800"/>
-              </a:spcBef>
-              <a:defRPr sz="1800">
-                <a:solidFill>
-                  <a:srgbClr val="F1F5F9"/>
-                </a:solidFill>
-              </a:defRPr>
-            </a:pPr>
-            <a:r>
-              <a:t>• Heartbeat watches open PRs</a:t>
-            </a:r>
-          </a:p>
-          <a:p>
-            <a:pPr>
-              <a:spcBef>
-                <a:spcPts val="800"/>
-              </a:spcBef>
-              <a:defRPr sz="1800">
-                <a:solidFill>
-                  <a:srgbClr val="F1F5F9"/>
-                </a:solidFill>
-              </a:defRPr>
-            </a:pPr>
-            <a:r>
-              <a:t>• Alerts when stale (&gt;4 hours no review)</a:t>
-            </a:r>
-          </a:p>
-          <a:p>
-            <a:pPr>
-              <a:spcBef>
-                <a:spcPts val="800"/>
-              </a:spcBef>
-              <a:defRPr sz="1800">
-                <a:solidFill>
-                  <a:srgbClr val="F1F5F9"/>
-                </a:solidFill>
-              </a:defRPr>
-            </a:pPr>
-            <a:r>
-              <a:t>• Auto-pings reviewers via Slack</a:t>
-            </a:r>
-          </a:p>
-          <a:p>
-            <a:pPr>
-              <a:spcBef>
-                <a:spcPts val="800"/>
-              </a:spcBef>
-              <a:defRPr sz="1800">
-                <a:solidFill>
-                  <a:srgbClr val="F1F5F9"/>
-                </a:solidFill>
-              </a:defRPr>
-            </a:pPr>
-          </a:p>
-          <a:p>
-            <a:pPr>
-              <a:spcBef>
-                <a:spcPts val="800"/>
-              </a:spcBef>
-              <a:defRPr sz="1800">
-                <a:solidFill>
-                  <a:srgbClr val="F1F5F9"/>
-                </a:solidFill>
-              </a:defRPr>
-            </a:pPr>
-            <a:r>
-              <a:t>Uses: Heartbeats + Slack integration</a:t>
-            </a:r>
-          </a:p>
-          <a:p>
-            <a:pPr>
-              <a:spcBef>
-                <a:spcPts val="800"/>
-              </a:spcBef>
-              <a:defRPr sz="1800">
-                <a:solidFill>
-                  <a:srgbClr val="F1F5F9"/>
-                </a:solidFill>
-              </a:defRPr>
-            </a:pPr>
-          </a:p>
-          <a:p>
-            <a:pPr>
-              <a:spcBef>
-                <a:spcPts val="800"/>
-              </a:spcBef>
-              <a:defRPr sz="1800">
-                <a:solidFill>
-                  <a:srgbClr val="F1F5F9"/>
-                </a:solidFill>
-              </a:defRPr>
-            </a:pPr>
-            <a:r>
-              <a:t>Note: Example scenario based on documented capabilities</a:t>
+              <a:t>Start with a health check:</a:t>
+            </a:r>
+          </a:p>
+          <a:p>
+            <a:pPr>
+              <a:spcBef>
+                <a:spcPts val="800"/>
+              </a:spcBef>
+              <a:defRPr sz="1800">
+                <a:solidFill>
+                  <a:srgbClr val="F1F5F9"/>
+                </a:solidFill>
+              </a:defRPr>
+            </a:pPr>
+            <a:r>
+              <a:t>  kirocrew doctor [--verbose]   /   kirocrew logs -f</a:t>
+            </a:r>
+          </a:p>
+          <a:p>
+            <a:pPr>
+              <a:spcBef>
+                <a:spcPts val="800"/>
+              </a:spcBef>
+              <a:defRPr sz="1800">
+                <a:solidFill>
+                  <a:srgbClr val="F1F5F9"/>
+                </a:solidFill>
+              </a:defRPr>
+            </a:pPr>
+            <a:r>
+              <a:t>Reports: kiro-cli, auth, embeddings, Slack, config, MCP</a:t>
+            </a:r>
+          </a:p>
+          <a:p>
+            <a:pPr>
+              <a:spcBef>
+                <a:spcPts val="800"/>
+              </a:spcBef>
+              <a:defRPr sz="1800">
+                <a:solidFill>
+                  <a:srgbClr val="F1F5F9"/>
+                </a:solidFill>
+              </a:defRPr>
+            </a:pPr>
+          </a:p>
+          <a:p>
+            <a:pPr>
+              <a:spcBef>
+                <a:spcPts val="800"/>
+              </a:spcBef>
+              <a:defRPr sz="1800">
+                <a:solidFill>
+                  <a:srgbClr val="F1F5F9"/>
+                </a:solidFill>
+              </a:defRPr>
+            </a:pPr>
+            <a:r>
+              <a:t>Categories: install/setup, agent (AcpTimeoutError/</a:t>
+            </a:r>
+          </a:p>
+          <a:p>
+            <a:pPr>
+              <a:spcBef>
+                <a:spcPts val="800"/>
+              </a:spcBef>
+              <a:defRPr sz="1800">
+                <a:solidFill>
+                  <a:srgbClr val="F1F5F9"/>
+                </a:solidFill>
+              </a:defRPr>
+            </a:pPr>
+            <a:r>
+              <a:t>AcpProcessDied), memory/embeddings, Slack, Discord, MCP,</a:t>
+            </a:r>
+          </a:p>
+          <a:p>
+            <a:pPr>
+              <a:spcBef>
+                <a:spcPts val="800"/>
+              </a:spcBef>
+              <a:defRPr sz="1800">
+                <a:solidFill>
+                  <a:srgbClr val="F1F5F9"/>
+                </a:solidFill>
+              </a:defRPr>
+            </a:pPr>
+            <a:r>
+              <a:t>dashboard 403, sessions, task runner, subagents, cron,</a:t>
+            </a:r>
+          </a:p>
+          <a:p>
+            <a:pPr>
+              <a:spcBef>
+                <a:spcPts val="800"/>
+              </a:spcBef>
+              <a:defRPr sz="1800">
+                <a:solidFill>
+                  <a:srgbClr val="F1F5F9"/>
+                </a:solidFill>
+              </a:defRPr>
+            </a:pPr>
+            <a:r>
+              <a:t>config, snapshot, multi-instance, voice, artifact deploy</a:t>
             </a:r>
           </a:p>
         </p:txBody>
@@ -8850,7 +8953,7 @@
     <p:bg>
       <p:bgPr>
         <a:solidFill>
-          <a:srgbClr val="0F172A"/>
+          <a:srgbClr val="1E293B"/>
         </a:solidFill>
         <a:effectLst/>
       </p:bgPr>
@@ -8870,8 +8973,8 @@
         </p:nvSpPr>
         <p:spPr>
           <a:xfrm>
-            <a:off x="457200" y="365760"/>
-            <a:ext cx="6858000" cy="548640"/>
+            <a:off x="914400" y="2743200"/>
+            <a:ext cx="7315200" cy="914400"/>
           </a:xfrm>
           <a:prstGeom prst="rect">
             <a:avLst/>
@@ -8884,15 +8987,15 @@
           </a:bodyPr>
           <a:lstStyle/>
           <a:p>
-            <a:pPr>
-              <a:defRPr sz="3200" b="1">
+            <a:pPr algn="ctr">
+              <a:defRPr sz="4400" b="1">
                 <a:solidFill>
                   <a:srgbClr val="2563EB"/>
                 </a:solidFill>
               </a:defRPr>
             </a:pPr>
             <a:r>
-              <a:t>Example: Nightly Security Audit</a:t>
+              <a:t>Part 4: Use Cases</a:t>
             </a:r>
           </a:p>
         </p:txBody>
@@ -8905,8 +9008,8 @@
         </p:nvSpPr>
         <p:spPr>
           <a:xfrm>
-            <a:off x="7498079" y="411480"/>
-            <a:ext cx="1371600" cy="365760"/>
+            <a:off x="914400" y="3840480"/>
+            <a:ext cx="7315200" cy="548640"/>
           </a:xfrm>
           <a:prstGeom prst="rect">
             <a:avLst/>
@@ -8919,182 +9022,15 @@
           </a:bodyPr>
           <a:lstStyle/>
           <a:p>
-            <a:pPr>
-              <a:defRPr sz="1100" b="1">
-                <a:solidFill>
-                  <a:srgbClr val="F59E0B"/>
-                </a:solidFill>
-              </a:defRPr>
-            </a:pPr>
-            <a:r>
-              <a:t>⚠ To Be Verified</a:t>
-            </a:r>
-          </a:p>
-        </p:txBody>
-      </p:sp>
-      <p:sp>
-        <p:nvSpPr>
-          <p:cNvPr id="4" name="TextBox 3"/>
-          <p:cNvSpPr txBox="1"/>
-          <p:nvPr/>
-        </p:nvSpPr>
-        <p:spPr>
-          <a:xfrm>
-            <a:off x="640080" y="1188720"/>
-            <a:ext cx="7863840" cy="5212080"/>
-          </a:xfrm>
-          <a:prstGeom prst="rect">
-            <a:avLst/>
-          </a:prstGeom>
-          <a:noFill/>
-        </p:spPr>
-        <p:txBody>
-          <a:bodyPr wrap="square">
-            <a:spAutoFit/>
-          </a:bodyPr>
-          <a:lstStyle/>
-          <a:p>
-            <a:pPr>
-              <a:spcBef>
-                <a:spcPts val="800"/>
-              </a:spcBef>
-              <a:defRPr sz="1800">
-                <a:solidFill>
-                  <a:srgbClr val="F1F5F9"/>
-                </a:solidFill>
-              </a:defRPr>
-            </a:pPr>
-            <a:r>
-              <a:t>Scenario: Automated security scanning</a:t>
-            </a:r>
-          </a:p>
-          <a:p>
-            <a:pPr>
-              <a:spcBef>
-                <a:spcPts val="800"/>
-              </a:spcBef>
-              <a:defRPr sz="1800">
-                <a:solidFill>
-                  <a:srgbClr val="F1F5F9"/>
-                </a:solidFill>
-              </a:defRPr>
-            </a:pPr>
-          </a:p>
-          <a:p>
-            <a:pPr>
-              <a:spcBef>
-                <a:spcPts val="800"/>
-              </a:spcBef>
-              <a:defRPr sz="1800">
-                <a:solidFill>
-                  <a:srgbClr val="F1F5F9"/>
-                </a:solidFill>
-              </a:defRPr>
-            </a:pPr>
-            <a:r>
-              <a:t>Implementation:</a:t>
-            </a:r>
-          </a:p>
-          <a:p>
-            <a:pPr>
-              <a:spcBef>
-                <a:spcPts val="800"/>
-              </a:spcBef>
-              <a:defRPr sz="1800">
-                <a:solidFill>
-                  <a:srgbClr val="F1F5F9"/>
-                </a:solidFill>
-              </a:defRPr>
-            </a:pPr>
-            <a:r>
-              <a:t>• Cron job at 2am</a:t>
-            </a:r>
-          </a:p>
-          <a:p>
-            <a:pPr>
-              <a:spcBef>
-                <a:spcPts val="800"/>
-              </a:spcBef>
-              <a:defRPr sz="1800">
-                <a:solidFill>
-                  <a:srgbClr val="F1F5F9"/>
-                </a:solidFill>
-              </a:defRPr>
-            </a:pPr>
-            <a:r>
-              <a:t>• Spawns subagents (one per repo)</a:t>
-            </a:r>
-          </a:p>
-          <a:p>
-            <a:pPr>
-              <a:spcBef>
-                <a:spcPts val="800"/>
-              </a:spcBef>
-              <a:defRPr sz="1800">
-                <a:solidFill>
-                  <a:srgbClr val="F1F5F9"/>
-                </a:solidFill>
-              </a:defRPr>
-            </a:pPr>
-            <a:r>
-              <a:t>• Scans for secrets, vulnerabilities, misconfigurations</a:t>
-            </a:r>
-          </a:p>
-          <a:p>
-            <a:pPr>
-              <a:spcBef>
-                <a:spcPts val="800"/>
-              </a:spcBef>
-              <a:defRPr sz="1800">
-                <a:solidFill>
-                  <a:srgbClr val="F1F5F9"/>
-                </a:solidFill>
-              </a:defRPr>
-            </a:pPr>
-            <a:r>
-              <a:t>• Aggregates findings into report</a:t>
-            </a:r>
-          </a:p>
-          <a:p>
-            <a:pPr>
-              <a:spcBef>
-                <a:spcPts val="800"/>
-              </a:spcBef>
-              <a:defRPr sz="1800">
-                <a:solidFill>
-                  <a:srgbClr val="F1F5F9"/>
-                </a:solidFill>
-              </a:defRPr>
-            </a:pPr>
-            <a:r>
-              <a:t>• Files HIGH/CRITICAL tickets</a:t>
-            </a:r>
-          </a:p>
-          <a:p>
-            <a:pPr>
-              <a:spcBef>
-                <a:spcPts val="800"/>
-              </a:spcBef>
-              <a:defRPr sz="1800">
-                <a:solidFill>
-                  <a:srgbClr val="F1F5F9"/>
-                </a:solidFill>
-              </a:defRPr>
-            </a:pPr>
-          </a:p>
-          <a:p>
-            <a:pPr>
-              <a:spcBef>
-                <a:spcPts val="800"/>
-              </a:spcBef>
-              <a:defRPr sz="1800">
-                <a:solidFill>
-                  <a:srgbClr val="F1F5F9"/>
-                </a:solidFill>
-              </a:defRPr>
-            </a:pPr>
-            <a:r>
-              <a:t>Uses: Cron + Subagents + Task automation</a:t>
+            <a:pPr algn="ctr">
+              <a:defRPr sz="2000">
+                <a:solidFill>
+                  <a:srgbClr val="94A3B8"/>
+                </a:solidFill>
+              </a:defRPr>
+            </a:pPr>
+            <a:r>
+              <a:t>Enterprise integration examples</a:t>
             </a:r>
           </a:p>
         </p:txBody>
@@ -9155,7 +9091,7 @@
               </a:defRPr>
             </a:pPr>
             <a:r>
-              <a:t>Example: Incident Response</a:t>
+              <a:t>Example: 24/7 PR Monitoring</a:t>
             </a:r>
           </a:p>
         </p:txBody>
@@ -9228,7 +9164,7 @@
               </a:defRPr>
             </a:pPr>
             <a:r>
-              <a:t>Scenario: Automated triage and RCA</a:t>
+              <a:t>Scenario: Track open PRs and alert on staleness</a:t>
             </a:r>
           </a:p>
           <a:p>
@@ -9270,109 +9206,91 @@
               </a:defRPr>
             </a:pPr>
             <a:r>
-              <a:t>• Webhook from PagerDuty</a:t>
-            </a:r>
-          </a:p>
-          <a:p>
-            <a:pPr>
-              <a:spcBef>
-                <a:spcPts val="800"/>
-              </a:spcBef>
-              <a:defRPr sz="1800">
-                <a:solidFill>
-                  <a:srgbClr val="F1F5F9"/>
-                </a:solidFill>
-              </a:defRPr>
-            </a:pPr>
-            <a:r>
-              <a:t>• Crew triages alert</a:t>
-            </a:r>
-          </a:p>
-          <a:p>
-            <a:pPr>
-              <a:spcBef>
-                <a:spcPts val="800"/>
-              </a:spcBef>
-              <a:defRPr sz="1800">
-                <a:solidFill>
-                  <a:srgbClr val="F1F5F9"/>
-                </a:solidFill>
-              </a:defRPr>
-            </a:pPr>
-            <a:r>
-              <a:t>• Checks logs, metrics, recent deploys</a:t>
-            </a:r>
-          </a:p>
-          <a:p>
-            <a:pPr>
-              <a:spcBef>
-                <a:spcPts val="800"/>
-              </a:spcBef>
-              <a:defRPr sz="1800">
-                <a:solidFill>
-                  <a:srgbClr val="F1F5F9"/>
-                </a:solidFill>
-              </a:defRPr>
-            </a:pPr>
-            <a:r>
-              <a:t>• Applies known fixes (from memory/lessons)</a:t>
-            </a:r>
-          </a:p>
-          <a:p>
-            <a:pPr>
-              <a:spcBef>
-                <a:spcPts val="800"/>
-              </a:spcBef>
-              <a:defRPr sz="1800">
-                <a:solidFill>
-                  <a:srgbClr val="F1F5F9"/>
-                </a:solidFill>
-              </a:defRPr>
-            </a:pPr>
-            <a:r>
-              <a:t>• Escalates if novel</a:t>
-            </a:r>
-          </a:p>
-          <a:p>
-            <a:pPr>
-              <a:spcBef>
-                <a:spcPts val="800"/>
-              </a:spcBef>
-              <a:defRPr sz="1800">
-                <a:solidFill>
-                  <a:srgbClr val="F1F5F9"/>
-                </a:solidFill>
-              </a:defRPr>
-            </a:pPr>
-            <a:r>
-              <a:t>• Posts RCA when resolved</a:t>
-            </a:r>
-          </a:p>
-          <a:p>
-            <a:pPr>
-              <a:spcBef>
-                <a:spcPts val="800"/>
-              </a:spcBef>
-              <a:defRPr sz="1800">
-                <a:solidFill>
-                  <a:srgbClr val="F1F5F9"/>
-                </a:solidFill>
-              </a:defRPr>
-            </a:pPr>
-          </a:p>
-          <a:p>
-            <a:pPr>
-              <a:spcBef>
-                <a:spcPts val="800"/>
-              </a:spcBef>
-              <a:defRPr sz="1800">
-                <a:solidFill>
-                  <a:srgbClr val="F1F5F9"/>
-                </a:solidFill>
-              </a:defRPr>
-            </a:pPr>
-            <a:r>
-              <a:t>Uses: Webhooks + Memory + Knowledge</a:t>
+              <a:t>• Heartbeat watches open PRs</a:t>
+            </a:r>
+          </a:p>
+          <a:p>
+            <a:pPr>
+              <a:spcBef>
+                <a:spcPts val="800"/>
+              </a:spcBef>
+              <a:defRPr sz="1800">
+                <a:solidFill>
+                  <a:srgbClr val="F1F5F9"/>
+                </a:solidFill>
+              </a:defRPr>
+            </a:pPr>
+            <a:r>
+              <a:t>• Alerts when stale (&gt;4 hours no review)</a:t>
+            </a:r>
+          </a:p>
+          <a:p>
+            <a:pPr>
+              <a:spcBef>
+                <a:spcPts val="800"/>
+              </a:spcBef>
+              <a:defRPr sz="1800">
+                <a:solidFill>
+                  <a:srgbClr val="F1F5F9"/>
+                </a:solidFill>
+              </a:defRPr>
+            </a:pPr>
+            <a:r>
+              <a:t>• Auto-pings reviewers via Slack</a:t>
+            </a:r>
+          </a:p>
+          <a:p>
+            <a:pPr>
+              <a:spcBef>
+                <a:spcPts val="800"/>
+              </a:spcBef>
+              <a:defRPr sz="1800">
+                <a:solidFill>
+                  <a:srgbClr val="F1F5F9"/>
+                </a:solidFill>
+              </a:defRPr>
+            </a:pPr>
+          </a:p>
+          <a:p>
+            <a:pPr>
+              <a:spcBef>
+                <a:spcPts val="800"/>
+              </a:spcBef>
+              <a:defRPr sz="1800">
+                <a:solidFill>
+                  <a:srgbClr val="F1F5F9"/>
+                </a:solidFill>
+              </a:defRPr>
+            </a:pPr>
+            <a:r>
+              <a:t>Uses: Heartbeats + Slack integration</a:t>
+            </a:r>
+          </a:p>
+          <a:p>
+            <a:pPr>
+              <a:spcBef>
+                <a:spcPts val="800"/>
+              </a:spcBef>
+              <a:defRPr sz="1800">
+                <a:solidFill>
+                  <a:srgbClr val="F1F5F9"/>
+                </a:solidFill>
+              </a:defRPr>
+            </a:pPr>
+          </a:p>
+          <a:p>
+            <a:pPr>
+              <a:spcBef>
+                <a:spcPts val="800"/>
+              </a:spcBef>
+              <a:defRPr sz="1800">
+                <a:solidFill>
+                  <a:srgbClr val="F1F5F9"/>
+                </a:solidFill>
+              </a:defRPr>
+            </a:pPr>
+            <a:r>
+              <a:t>Note: Example scenario based on documented capabilities</a:t>
             </a:r>
           </a:p>
         </p:txBody>
@@ -9433,7 +9351,7 @@
               </a:defRPr>
             </a:pPr>
             <a:r>
-              <a:t>CI/CD Integration (3 Modes)</a:t>
+              <a:t>Example: Nightly Security Audit</a:t>
             </a:r>
           </a:p>
         </p:txBody>
@@ -9463,12 +9381,12 @@
             <a:pPr>
               <a:defRPr sz="1100" b="1">
                 <a:solidFill>
-                  <a:srgbClr val="10B981"/>
-                </a:solidFill>
-              </a:defRPr>
-            </a:pPr>
-            <a:r>
-              <a:t>✓ Verified</a:t>
+                  <a:srgbClr val="F59E0B"/>
+                </a:solidFill>
+              </a:defRPr>
+            </a:pPr>
+            <a:r>
+              <a:t>⚠ To Be Verified</a:t>
             </a:r>
           </a:p>
         </p:txBody>
@@ -9506,181 +9424,136 @@
               </a:defRPr>
             </a:pPr>
             <a:r>
-              <a:t>Mode 1: CLI Headless</a:t>
-            </a:r>
-          </a:p>
-          <a:p>
-            <a:pPr>
-              <a:spcBef>
-                <a:spcPts val="800"/>
-              </a:spcBef>
-              <a:defRPr sz="1800">
-                <a:solidFill>
-                  <a:srgbClr val="F1F5F9"/>
-                </a:solidFill>
-              </a:defRPr>
-            </a:pPr>
-            <a:r>
-              <a:t>• kiro-cli chat --no-interactive "&lt;prompt&gt;" in pipeline</a:t>
-            </a:r>
-          </a:p>
-          <a:p>
-            <a:pPr>
-              <a:spcBef>
-                <a:spcPts val="800"/>
-              </a:spcBef>
-              <a:defRPr sz="1800">
-                <a:solidFill>
-                  <a:srgbClr val="F1F5F9"/>
-                </a:solidFill>
-              </a:defRPr>
-            </a:pPr>
-            <a:r>
-              <a:t>• Engine version: --engine v3 (not --v3)</a:t>
-            </a:r>
-          </a:p>
-          <a:p>
-            <a:pPr>
-              <a:spcBef>
-                <a:spcPts val="800"/>
-              </a:spcBef>
-              <a:defRPr sz="1800">
-                <a:solidFill>
-                  <a:srgbClr val="F1F5F9"/>
-                </a:solidFill>
-              </a:defRPr>
-            </a:pPr>
-            <a:r>
-              <a:t>• Use case: Simple code generation</a:t>
-            </a:r>
-          </a:p>
-          <a:p>
-            <a:pPr>
-              <a:spcBef>
-                <a:spcPts val="800"/>
-              </a:spcBef>
-              <a:defRPr sz="1800">
-                <a:solidFill>
-                  <a:srgbClr val="F1F5F9"/>
-                </a:solidFill>
-              </a:defRPr>
-            </a:pPr>
-          </a:p>
-          <a:p>
-            <a:pPr>
-              <a:spcBef>
-                <a:spcPts val="800"/>
-              </a:spcBef>
-              <a:defRPr sz="1800">
-                <a:solidFill>
-                  <a:srgbClr val="F1F5F9"/>
-                </a:solidFill>
-              </a:defRPr>
-            </a:pPr>
-            <a:r>
-              <a:t>Mode 2: Crew Webhooks</a:t>
-            </a:r>
-          </a:p>
-          <a:p>
-            <a:pPr>
-              <a:spcBef>
-                <a:spcPts val="800"/>
-              </a:spcBef>
-              <a:defRPr sz="1800">
-                <a:solidFill>
-                  <a:srgbClr val="F1F5F9"/>
-                </a:solidFill>
-              </a:defRPr>
-            </a:pPr>
-            <a:r>
-              <a:t>• CI pipeline calls Crew on events</a:t>
-            </a:r>
-          </a:p>
-          <a:p>
-            <a:pPr>
-              <a:spcBef>
-                <a:spcPts val="800"/>
-              </a:spcBef>
-              <a:defRPr sz="1800">
-                <a:solidFill>
-                  <a:srgbClr val="F1F5F9"/>
-                </a:solidFill>
-              </a:defRPr>
-            </a:pPr>
-            <a:r>
-              <a:t>• Crew analyzes and reports via Slack/Dashboard</a:t>
-            </a:r>
-          </a:p>
-          <a:p>
-            <a:pPr>
-              <a:spcBef>
-                <a:spcPts val="800"/>
-              </a:spcBef>
-              <a:defRPr sz="1800">
-                <a:solidFill>
-                  <a:srgbClr val="F1F5F9"/>
-                </a:solidFill>
-              </a:defRPr>
-            </a:pPr>
-            <a:r>
-              <a:t>• Use case: Root cause analysis, monitoring</a:t>
-            </a:r>
-          </a:p>
-          <a:p>
-            <a:pPr>
-              <a:spcBef>
-                <a:spcPts val="800"/>
-              </a:spcBef>
-              <a:defRPr sz="1800">
-                <a:solidFill>
-                  <a:srgbClr val="F1F5F9"/>
-                </a:solidFill>
-              </a:defRPr>
-            </a:pPr>
-          </a:p>
-          <a:p>
-            <a:pPr>
-              <a:spcBef>
-                <a:spcPts val="800"/>
-              </a:spcBef>
-              <a:defRPr sz="1800">
-                <a:solidFill>
-                  <a:srgbClr val="F1F5F9"/>
-                </a:solidFill>
-              </a:defRPr>
-            </a:pPr>
-            <a:r>
-              <a:t>Mode 3: Crew Cron</a:t>
-            </a:r>
-          </a:p>
-          <a:p>
-            <a:pPr>
-              <a:spcBef>
-                <a:spcPts val="800"/>
-              </a:spcBef>
-              <a:defRPr sz="1800">
-                <a:solidFill>
-                  <a:srgbClr val="F1F5F9"/>
-                </a:solidFill>
-              </a:defRPr>
-            </a:pPr>
-            <a:r>
-              <a:t>• Periodic checks of CI/PR status</a:t>
-            </a:r>
-          </a:p>
-          <a:p>
-            <a:pPr>
-              <a:spcBef>
-                <a:spcPts val="800"/>
-              </a:spcBef>
-              <a:defRPr sz="1800">
-                <a:solidFill>
-                  <a:srgbClr val="F1F5F9"/>
-                </a:solidFill>
-              </a:defRPr>
-            </a:pPr>
-            <a:r>
-              <a:t>• Use case: Nightly audits, health checks</a:t>
+              <a:t>Scenario: Automated security scanning</a:t>
+            </a:r>
+          </a:p>
+          <a:p>
+            <a:pPr>
+              <a:spcBef>
+                <a:spcPts val="800"/>
+              </a:spcBef>
+              <a:defRPr sz="1800">
+                <a:solidFill>
+                  <a:srgbClr val="F1F5F9"/>
+                </a:solidFill>
+              </a:defRPr>
+            </a:pPr>
+          </a:p>
+          <a:p>
+            <a:pPr>
+              <a:spcBef>
+                <a:spcPts val="800"/>
+              </a:spcBef>
+              <a:defRPr sz="1800">
+                <a:solidFill>
+                  <a:srgbClr val="F1F5F9"/>
+                </a:solidFill>
+              </a:defRPr>
+            </a:pPr>
+            <a:r>
+              <a:t>Implementation:</a:t>
+            </a:r>
+          </a:p>
+          <a:p>
+            <a:pPr>
+              <a:spcBef>
+                <a:spcPts val="800"/>
+              </a:spcBef>
+              <a:defRPr sz="1800">
+                <a:solidFill>
+                  <a:srgbClr val="F1F5F9"/>
+                </a:solidFill>
+              </a:defRPr>
+            </a:pPr>
+            <a:r>
+              <a:t>• Cron job at 2am</a:t>
+            </a:r>
+          </a:p>
+          <a:p>
+            <a:pPr>
+              <a:spcBef>
+                <a:spcPts val="800"/>
+              </a:spcBef>
+              <a:defRPr sz="1800">
+                <a:solidFill>
+                  <a:srgbClr val="F1F5F9"/>
+                </a:solidFill>
+              </a:defRPr>
+            </a:pPr>
+            <a:r>
+              <a:t>• Spawns subagents (one per repo)</a:t>
+            </a:r>
+          </a:p>
+          <a:p>
+            <a:pPr>
+              <a:spcBef>
+                <a:spcPts val="800"/>
+              </a:spcBef>
+              <a:defRPr sz="1800">
+                <a:solidFill>
+                  <a:srgbClr val="F1F5F9"/>
+                </a:solidFill>
+              </a:defRPr>
+            </a:pPr>
+            <a:r>
+              <a:t>• Scans for secrets, vulnerabilities, misconfigurations</a:t>
+            </a:r>
+          </a:p>
+          <a:p>
+            <a:pPr>
+              <a:spcBef>
+                <a:spcPts val="800"/>
+              </a:spcBef>
+              <a:defRPr sz="1800">
+                <a:solidFill>
+                  <a:srgbClr val="F1F5F9"/>
+                </a:solidFill>
+              </a:defRPr>
+            </a:pPr>
+            <a:r>
+              <a:t>• Aggregates findings into report</a:t>
+            </a:r>
+          </a:p>
+          <a:p>
+            <a:pPr>
+              <a:spcBef>
+                <a:spcPts val="800"/>
+              </a:spcBef>
+              <a:defRPr sz="1800">
+                <a:solidFill>
+                  <a:srgbClr val="F1F5F9"/>
+                </a:solidFill>
+              </a:defRPr>
+            </a:pPr>
+            <a:r>
+              <a:t>• Files HIGH/CRITICAL tickets</a:t>
+            </a:r>
+          </a:p>
+          <a:p>
+            <a:pPr>
+              <a:spcBef>
+                <a:spcPts val="800"/>
+              </a:spcBef>
+              <a:defRPr sz="1800">
+                <a:solidFill>
+                  <a:srgbClr val="F1F5F9"/>
+                </a:solidFill>
+              </a:defRPr>
+            </a:pPr>
+          </a:p>
+          <a:p>
+            <a:pPr>
+              <a:spcBef>
+                <a:spcPts val="800"/>
+              </a:spcBef>
+              <a:defRPr sz="1800">
+                <a:solidFill>
+                  <a:srgbClr val="F1F5F9"/>
+                </a:solidFill>
+              </a:defRPr>
+            </a:pPr>
+            <a:r>
+              <a:t>Uses: Cron + Subagents + Task automation</a:t>
             </a:r>
           </a:p>
         </p:txBody>
@@ -9699,7 +9572,7 @@
     <p:bg>
       <p:bgPr>
         <a:solidFill>
-          <a:srgbClr val="1E293B"/>
+          <a:srgbClr val="0F172A"/>
         </a:solidFill>
         <a:effectLst/>
       </p:bgPr>
@@ -9719,8 +9592,8 @@
         </p:nvSpPr>
         <p:spPr>
           <a:xfrm>
-            <a:off x="914400" y="2743200"/>
-            <a:ext cx="7315200" cy="914400"/>
+            <a:off x="457200" y="365760"/>
+            <a:ext cx="6858000" cy="548640"/>
           </a:xfrm>
           <a:prstGeom prst="rect">
             <a:avLst/>
@@ -9733,15 +9606,232 @@
           </a:bodyPr>
           <a:lstStyle/>
           <a:p>
-            <a:pPr algn="ctr">
-              <a:defRPr sz="4400" b="1">
+            <a:pPr>
+              <a:defRPr sz="3200" b="1">
                 <a:solidFill>
                   <a:srgbClr val="2563EB"/>
                 </a:solidFill>
               </a:defRPr>
             </a:pPr>
             <a:r>
-              <a:t>Part 5: Getting Started</a:t>
+              <a:t>Example: Incident Response</a:t>
+            </a:r>
+          </a:p>
+        </p:txBody>
+      </p:sp>
+      <p:sp>
+        <p:nvSpPr>
+          <p:cNvPr id="3" name="TextBox 2"/>
+          <p:cNvSpPr txBox="1"/>
+          <p:nvPr/>
+        </p:nvSpPr>
+        <p:spPr>
+          <a:xfrm>
+            <a:off x="7498079" y="411480"/>
+            <a:ext cx="1371600" cy="365760"/>
+          </a:xfrm>
+          <a:prstGeom prst="rect">
+            <a:avLst/>
+          </a:prstGeom>
+          <a:noFill/>
+        </p:spPr>
+        <p:txBody>
+          <a:bodyPr wrap="none">
+            <a:spAutoFit/>
+          </a:bodyPr>
+          <a:lstStyle/>
+          <a:p>
+            <a:pPr>
+              <a:defRPr sz="1100" b="1">
+                <a:solidFill>
+                  <a:srgbClr val="F59E0B"/>
+                </a:solidFill>
+              </a:defRPr>
+            </a:pPr>
+            <a:r>
+              <a:t>⚠ To Be Verified</a:t>
+            </a:r>
+          </a:p>
+        </p:txBody>
+      </p:sp>
+      <p:sp>
+        <p:nvSpPr>
+          <p:cNvPr id="4" name="TextBox 3"/>
+          <p:cNvSpPr txBox="1"/>
+          <p:nvPr/>
+        </p:nvSpPr>
+        <p:spPr>
+          <a:xfrm>
+            <a:off x="640080" y="1188720"/>
+            <a:ext cx="7863840" cy="5212080"/>
+          </a:xfrm>
+          <a:prstGeom prst="rect">
+            <a:avLst/>
+          </a:prstGeom>
+          <a:noFill/>
+        </p:spPr>
+        <p:txBody>
+          <a:bodyPr wrap="square">
+            <a:spAutoFit/>
+          </a:bodyPr>
+          <a:lstStyle/>
+          <a:p>
+            <a:pPr>
+              <a:spcBef>
+                <a:spcPts val="800"/>
+              </a:spcBef>
+              <a:defRPr sz="1800">
+                <a:solidFill>
+                  <a:srgbClr val="F1F5F9"/>
+                </a:solidFill>
+              </a:defRPr>
+            </a:pPr>
+            <a:r>
+              <a:t>Scenario: Automated triage and RCA</a:t>
+            </a:r>
+          </a:p>
+          <a:p>
+            <a:pPr>
+              <a:spcBef>
+                <a:spcPts val="800"/>
+              </a:spcBef>
+              <a:defRPr sz="1800">
+                <a:solidFill>
+                  <a:srgbClr val="F1F5F9"/>
+                </a:solidFill>
+              </a:defRPr>
+            </a:pPr>
+          </a:p>
+          <a:p>
+            <a:pPr>
+              <a:spcBef>
+                <a:spcPts val="800"/>
+              </a:spcBef>
+              <a:defRPr sz="1800">
+                <a:solidFill>
+                  <a:srgbClr val="F1F5F9"/>
+                </a:solidFill>
+              </a:defRPr>
+            </a:pPr>
+            <a:r>
+              <a:t>Implementation:</a:t>
+            </a:r>
+          </a:p>
+          <a:p>
+            <a:pPr>
+              <a:spcBef>
+                <a:spcPts val="800"/>
+              </a:spcBef>
+              <a:defRPr sz="1800">
+                <a:solidFill>
+                  <a:srgbClr val="F1F5F9"/>
+                </a:solidFill>
+              </a:defRPr>
+            </a:pPr>
+            <a:r>
+              <a:t>• Webhook from PagerDuty</a:t>
+            </a:r>
+          </a:p>
+          <a:p>
+            <a:pPr>
+              <a:spcBef>
+                <a:spcPts val="800"/>
+              </a:spcBef>
+              <a:defRPr sz="1800">
+                <a:solidFill>
+                  <a:srgbClr val="F1F5F9"/>
+                </a:solidFill>
+              </a:defRPr>
+            </a:pPr>
+            <a:r>
+              <a:t>• Crew triages alert</a:t>
+            </a:r>
+          </a:p>
+          <a:p>
+            <a:pPr>
+              <a:spcBef>
+                <a:spcPts val="800"/>
+              </a:spcBef>
+              <a:defRPr sz="1800">
+                <a:solidFill>
+                  <a:srgbClr val="F1F5F9"/>
+                </a:solidFill>
+              </a:defRPr>
+            </a:pPr>
+            <a:r>
+              <a:t>• Checks logs, metrics, recent deploys</a:t>
+            </a:r>
+          </a:p>
+          <a:p>
+            <a:pPr>
+              <a:spcBef>
+                <a:spcPts val="800"/>
+              </a:spcBef>
+              <a:defRPr sz="1800">
+                <a:solidFill>
+                  <a:srgbClr val="F1F5F9"/>
+                </a:solidFill>
+              </a:defRPr>
+            </a:pPr>
+            <a:r>
+              <a:t>• Applies known fixes (from memory/lessons)</a:t>
+            </a:r>
+          </a:p>
+          <a:p>
+            <a:pPr>
+              <a:spcBef>
+                <a:spcPts val="800"/>
+              </a:spcBef>
+              <a:defRPr sz="1800">
+                <a:solidFill>
+                  <a:srgbClr val="F1F5F9"/>
+                </a:solidFill>
+              </a:defRPr>
+            </a:pPr>
+            <a:r>
+              <a:t>• Escalates if novel</a:t>
+            </a:r>
+          </a:p>
+          <a:p>
+            <a:pPr>
+              <a:spcBef>
+                <a:spcPts val="800"/>
+              </a:spcBef>
+              <a:defRPr sz="1800">
+                <a:solidFill>
+                  <a:srgbClr val="F1F5F9"/>
+                </a:solidFill>
+              </a:defRPr>
+            </a:pPr>
+            <a:r>
+              <a:t>• Posts RCA when resolved</a:t>
+            </a:r>
+          </a:p>
+          <a:p>
+            <a:pPr>
+              <a:spcBef>
+                <a:spcPts val="800"/>
+              </a:spcBef>
+              <a:defRPr sz="1800">
+                <a:solidFill>
+                  <a:srgbClr val="F1F5F9"/>
+                </a:solidFill>
+              </a:defRPr>
+            </a:pPr>
+          </a:p>
+          <a:p>
+            <a:pPr>
+              <a:spcBef>
+                <a:spcPts val="800"/>
+              </a:spcBef>
+              <a:defRPr sz="1800">
+                <a:solidFill>
+                  <a:srgbClr val="F1F5F9"/>
+                </a:solidFill>
+              </a:defRPr>
+            </a:pPr>
+            <a:r>
+              <a:t>Uses: Webhooks + Memory + Knowledge</a:t>
             </a:r>
           </a:p>
         </p:txBody>
@@ -9781,7 +9871,7 @@
         <p:spPr>
           <a:xfrm>
             <a:off x="457200" y="365760"/>
-            <a:ext cx="8229600" cy="548640"/>
+            <a:ext cx="6858000" cy="548640"/>
           </a:xfrm>
           <a:prstGeom prst="rect">
             <a:avLst/>
@@ -9802,7 +9892,7 @@
               </a:defRPr>
             </a:pPr>
             <a:r>
-              <a:t>Installation</a:t>
+              <a:t>CI/CD Integration (3 Modes)</a:t>
             </a:r>
           </a:p>
         </p:txBody>
@@ -9815,8 +9905,8 @@
         </p:nvSpPr>
         <p:spPr>
           <a:xfrm>
-            <a:off x="457200" y="1188720"/>
-            <a:ext cx="4114800" cy="5212080"/>
+            <a:off x="7498079" y="411480"/>
+            <a:ext cx="1371600" cy="365760"/>
           </a:xfrm>
           <a:prstGeom prst="rect">
             <a:avLst/>
@@ -9824,125 +9914,20 @@
           <a:noFill/>
         </p:spPr>
         <p:txBody>
-          <a:bodyPr wrap="square">
+          <a:bodyPr wrap="none">
             <a:spAutoFit/>
           </a:bodyPr>
           <a:lstStyle/>
           <a:p>
             <a:pPr>
-              <a:spcBef>
-                <a:spcPts val="600"/>
-              </a:spcBef>
-              <a:defRPr sz="1600">
-                <a:solidFill>
-                  <a:srgbClr val="F1F5F9"/>
-                </a:solidFill>
-              </a:defRPr>
-            </a:pPr>
-            <a:r>
-              <a:t>Option 1: Desktop App (Recommended)</a:t>
-            </a:r>
-          </a:p>
-          <a:p>
-            <a:pPr>
-              <a:spcBef>
-                <a:spcPts val="600"/>
-              </a:spcBef>
-              <a:defRPr sz="1600">
-                <a:solidFill>
-                  <a:srgbClr val="F1F5F9"/>
-                </a:solidFill>
-              </a:defRPr>
-            </a:pPr>
-            <a:r>
-              <a:t>1. Download (.dmg or .AppImage)</a:t>
-            </a:r>
-          </a:p>
-          <a:p>
-            <a:pPr>
-              <a:spcBef>
-                <a:spcPts val="600"/>
-              </a:spcBef>
-              <a:defRPr sz="1600">
-                <a:solidFill>
-                  <a:srgbClr val="F1F5F9"/>
-                </a:solidFill>
-              </a:defRPr>
-            </a:pPr>
-            <a:r>
-              <a:t>2. Launch (auto-starts Gateway)</a:t>
-            </a:r>
-          </a:p>
-          <a:p>
-            <a:pPr>
-              <a:spcBef>
-                <a:spcPts val="600"/>
-              </a:spcBef>
-              <a:defRPr sz="1600">
-                <a:solidFill>
-                  <a:srgbClr val="F1F5F9"/>
-                </a:solidFill>
-              </a:defRPr>
-            </a:pPr>
-            <a:r>
-              <a:t>3. Authenticate (device-code sign-in)</a:t>
-            </a:r>
-          </a:p>
-          <a:p>
-            <a:pPr>
-              <a:spcBef>
-                <a:spcPts val="600"/>
-              </a:spcBef>
-              <a:defRPr sz="1600">
-                <a:solidFill>
-                  <a:srgbClr val="F1F5F9"/>
-                </a:solidFill>
-              </a:defRPr>
-            </a:pPr>
-            <a:r>
-              <a:t>4. Start chatting</a:t>
-            </a:r>
-          </a:p>
-          <a:p>
-            <a:pPr>
-              <a:spcBef>
-                <a:spcPts val="600"/>
-              </a:spcBef>
-              <a:defRPr sz="1600">
-                <a:solidFill>
-                  <a:srgbClr val="F1F5F9"/>
-                </a:solidFill>
-              </a:defRPr>
-            </a:pPr>
-          </a:p>
-          <a:p>
-            <a:pPr>
-              <a:spcBef>
-                <a:spcPts val="600"/>
-              </a:spcBef>
-              <a:defRPr sz="1600">
-                <a:solidFill>
-                  <a:srgbClr val="F1F5F9"/>
-                </a:solidFill>
-              </a:defRPr>
-            </a:pPr>
-            <a:r>
-              <a:t>No AWS CLI needed</a:t>
-            </a:r>
-          </a:p>
-          <a:p>
-            <a:pPr>
-              <a:spcBef>
-                <a:spcPts val="600"/>
-              </a:spcBef>
-              <a:defRPr sz="1600">
-                <a:solidFill>
-                  <a:srgbClr val="F1F5F9"/>
-                </a:solidFill>
-              </a:defRPr>
-            </a:pPr>
-            <a:r>
-              <a:t>No Bedrock configuration needed</a:t>
+              <a:defRPr sz="1100" b="1">
+                <a:solidFill>
+                  <a:srgbClr val="10B981"/>
+                </a:solidFill>
+              </a:defRPr>
+            </a:pPr>
+            <a:r>
+              <a:t>✓ Verified</a:t>
             </a:r>
           </a:p>
         </p:txBody>
@@ -9955,8 +9940,8 @@
         </p:nvSpPr>
         <p:spPr>
           <a:xfrm>
-            <a:off x="4754880" y="1188720"/>
-            <a:ext cx="4114800" cy="5212080"/>
+            <a:off x="640080" y="1188720"/>
+            <a:ext cx="7863840" cy="5212080"/>
           </a:xfrm>
           <a:prstGeom prst="rect">
             <a:avLst/>
@@ -9971,115 +9956,190 @@
           <a:p>
             <a:pPr>
               <a:spcBef>
-                <a:spcPts val="600"/>
-              </a:spcBef>
-              <a:defRPr sz="1600">
-                <a:solidFill>
-                  <a:srgbClr val="F1F5F9"/>
-                </a:solidFill>
-              </a:defRPr>
-            </a:pPr>
-            <a:r>
-              <a:t>Option 2: CLI Install</a:t>
-            </a:r>
-          </a:p>
-          <a:p>
-            <a:pPr>
-              <a:spcBef>
-                <a:spcPts val="600"/>
-              </a:spcBef>
-              <a:defRPr sz="1600">
-                <a:solidFill>
-                  <a:srgbClr val="F1F5F9"/>
-                </a:solidFill>
-              </a:defRPr>
-            </a:pPr>
-            <a:r>
-              <a:t>curl -fsSL https://download.crew.kiro.dev/cli.sh | sh</a:t>
-            </a:r>
-          </a:p>
-          <a:p>
-            <a:pPr>
-              <a:spcBef>
-                <a:spcPts val="600"/>
-              </a:spcBef>
-              <a:defRPr sz="1600">
-                <a:solidFill>
-                  <a:srgbClr val="F1F5F9"/>
-                </a:solidFill>
-              </a:defRPr>
-            </a:pPr>
-          </a:p>
-          <a:p>
-            <a:pPr>
-              <a:spcBef>
-                <a:spcPts val="600"/>
-              </a:spcBef>
-              <a:defRPr sz="1600">
-                <a:solidFill>
-                  <a:srgbClr val="F1F5F9"/>
-                </a:solidFill>
-              </a:defRPr>
-            </a:pPr>
-            <a:r>
-              <a:t>kirocrew setup</a:t>
-            </a:r>
-          </a:p>
-          <a:p>
-            <a:pPr>
-              <a:spcBef>
-                <a:spcPts val="600"/>
-              </a:spcBef>
-              <a:defRPr sz="1600">
-                <a:solidFill>
-                  <a:srgbClr val="F1F5F9"/>
-                </a:solidFill>
-              </a:defRPr>
-            </a:pPr>
-            <a:r>
-              <a:t>kirocrew doctor</a:t>
-            </a:r>
-          </a:p>
-          <a:p>
-            <a:pPr>
-              <a:spcBef>
-                <a:spcPts val="600"/>
-              </a:spcBef>
-              <a:defRPr sz="1600">
-                <a:solidFill>
-                  <a:srgbClr val="F1F5F9"/>
-                </a:solidFill>
-              </a:defRPr>
-            </a:pPr>
-            <a:r>
-              <a:t>kirocrew gateway</a:t>
-            </a:r>
-          </a:p>
-          <a:p>
-            <a:pPr>
-              <a:spcBef>
-                <a:spcPts val="600"/>
-              </a:spcBef>
-              <a:defRPr sz="1600">
-                <a:solidFill>
-                  <a:srgbClr val="F1F5F9"/>
-                </a:solidFill>
-              </a:defRPr>
-            </a:pPr>
-          </a:p>
-          <a:p>
-            <a:pPr>
-              <a:spcBef>
-                <a:spcPts val="600"/>
-              </a:spcBef>
-              <a:defRPr sz="1600">
-                <a:solidFill>
-                  <a:srgbClr val="F1F5F9"/>
-                </a:solidFill>
-              </a:defRPr>
-            </a:pPr>
-            <a:r>
-              <a:t>open http://localhost:5476</a:t>
+                <a:spcPts val="800"/>
+              </a:spcBef>
+              <a:defRPr sz="1800">
+                <a:solidFill>
+                  <a:srgbClr val="F1F5F9"/>
+                </a:solidFill>
+              </a:defRPr>
+            </a:pPr>
+            <a:r>
+              <a:t>Mode 1: CLI Headless</a:t>
+            </a:r>
+          </a:p>
+          <a:p>
+            <a:pPr>
+              <a:spcBef>
+                <a:spcPts val="800"/>
+              </a:spcBef>
+              <a:defRPr sz="1800">
+                <a:solidFill>
+                  <a:srgbClr val="F1F5F9"/>
+                </a:solidFill>
+              </a:defRPr>
+            </a:pPr>
+            <a:r>
+              <a:t>• kiro-cli chat --no-interactive "&lt;prompt&gt;" in pipeline</a:t>
+            </a:r>
+          </a:p>
+          <a:p>
+            <a:pPr>
+              <a:spcBef>
+                <a:spcPts val="800"/>
+              </a:spcBef>
+              <a:defRPr sz="1800">
+                <a:solidFill>
+                  <a:srgbClr val="F1F5F9"/>
+                </a:solidFill>
+              </a:defRPr>
+            </a:pPr>
+            <a:r>
+              <a:t>• Engine version: --engine v3 (not --v3)</a:t>
+            </a:r>
+          </a:p>
+          <a:p>
+            <a:pPr>
+              <a:spcBef>
+                <a:spcPts val="800"/>
+              </a:spcBef>
+              <a:defRPr sz="1800">
+                <a:solidFill>
+                  <a:srgbClr val="F1F5F9"/>
+                </a:solidFill>
+              </a:defRPr>
+            </a:pPr>
+            <a:r>
+              <a:t>• Use case: Simple code generation</a:t>
+            </a:r>
+          </a:p>
+          <a:p>
+            <a:pPr>
+              <a:spcBef>
+                <a:spcPts val="800"/>
+              </a:spcBef>
+              <a:defRPr sz="1800">
+                <a:solidFill>
+                  <a:srgbClr val="F1F5F9"/>
+                </a:solidFill>
+              </a:defRPr>
+            </a:pPr>
+          </a:p>
+          <a:p>
+            <a:pPr>
+              <a:spcBef>
+                <a:spcPts val="800"/>
+              </a:spcBef>
+              <a:defRPr sz="1800">
+                <a:solidFill>
+                  <a:srgbClr val="F1F5F9"/>
+                </a:solidFill>
+              </a:defRPr>
+            </a:pPr>
+            <a:r>
+              <a:t>Mode 2: Crew Webhooks</a:t>
+            </a:r>
+          </a:p>
+          <a:p>
+            <a:pPr>
+              <a:spcBef>
+                <a:spcPts val="800"/>
+              </a:spcBef>
+              <a:defRPr sz="1800">
+                <a:solidFill>
+                  <a:srgbClr val="F1F5F9"/>
+                </a:solidFill>
+              </a:defRPr>
+            </a:pPr>
+            <a:r>
+              <a:t>• CI pipeline calls Crew on events</a:t>
+            </a:r>
+          </a:p>
+          <a:p>
+            <a:pPr>
+              <a:spcBef>
+                <a:spcPts val="800"/>
+              </a:spcBef>
+              <a:defRPr sz="1800">
+                <a:solidFill>
+                  <a:srgbClr val="F1F5F9"/>
+                </a:solidFill>
+              </a:defRPr>
+            </a:pPr>
+            <a:r>
+              <a:t>• Crew analyzes and reports via Slack/Dashboard</a:t>
+            </a:r>
+          </a:p>
+          <a:p>
+            <a:pPr>
+              <a:spcBef>
+                <a:spcPts val="800"/>
+              </a:spcBef>
+              <a:defRPr sz="1800">
+                <a:solidFill>
+                  <a:srgbClr val="F1F5F9"/>
+                </a:solidFill>
+              </a:defRPr>
+            </a:pPr>
+            <a:r>
+              <a:t>• Use case: Root cause analysis, monitoring</a:t>
+            </a:r>
+          </a:p>
+          <a:p>
+            <a:pPr>
+              <a:spcBef>
+                <a:spcPts val="800"/>
+              </a:spcBef>
+              <a:defRPr sz="1800">
+                <a:solidFill>
+                  <a:srgbClr val="F1F5F9"/>
+                </a:solidFill>
+              </a:defRPr>
+            </a:pPr>
+          </a:p>
+          <a:p>
+            <a:pPr>
+              <a:spcBef>
+                <a:spcPts val="800"/>
+              </a:spcBef>
+              <a:defRPr sz="1800">
+                <a:solidFill>
+                  <a:srgbClr val="F1F5F9"/>
+                </a:solidFill>
+              </a:defRPr>
+            </a:pPr>
+            <a:r>
+              <a:t>Mode 3: Crew Cron</a:t>
+            </a:r>
+          </a:p>
+          <a:p>
+            <a:pPr>
+              <a:spcBef>
+                <a:spcPts val="800"/>
+              </a:spcBef>
+              <a:defRPr sz="1800">
+                <a:solidFill>
+                  <a:srgbClr val="F1F5F9"/>
+                </a:solidFill>
+              </a:defRPr>
+            </a:pPr>
+            <a:r>
+              <a:t>• Periodic checks of CI/PR status</a:t>
+            </a:r>
+          </a:p>
+          <a:p>
+            <a:pPr>
+              <a:spcBef>
+                <a:spcPts val="800"/>
+              </a:spcBef>
+              <a:defRPr sz="1800">
+                <a:solidFill>
+                  <a:srgbClr val="F1F5F9"/>
+                </a:solidFill>
+              </a:defRPr>
+            </a:pPr>
+            <a:r>
+              <a:t>• Use case: Nightly audits, health checks</a:t>
             </a:r>
           </a:p>
         </p:txBody>
@@ -10098,7 +10158,7 @@
     <p:bg>
       <p:bgPr>
         <a:solidFill>
-          <a:srgbClr val="0F172A"/>
+          <a:srgbClr val="1E293B"/>
         </a:solidFill>
         <a:effectLst/>
       </p:bgPr>
@@ -10118,8 +10178,8 @@
         </p:nvSpPr>
         <p:spPr>
           <a:xfrm>
-            <a:off x="457200" y="365760"/>
-            <a:ext cx="6858000" cy="548640"/>
+            <a:off x="914400" y="2743200"/>
+            <a:ext cx="7315200" cy="914400"/>
           </a:xfrm>
           <a:prstGeom prst="rect">
             <a:avLst/>
@@ -10132,196 +10192,15 @@
           </a:bodyPr>
           <a:lstStyle/>
           <a:p>
-            <a:pPr>
-              <a:defRPr sz="3200" b="1">
+            <a:pPr algn="ctr">
+              <a:defRPr sz="4400" b="1">
                 <a:solidFill>
                   <a:srgbClr val="2563EB"/>
                 </a:solidFill>
               </a:defRPr>
             </a:pPr>
             <a:r>
-              <a:t>First Steps</a:t>
-            </a:r>
-          </a:p>
-        </p:txBody>
-      </p:sp>
-      <p:sp>
-        <p:nvSpPr>
-          <p:cNvPr id="3" name="TextBox 2"/>
-          <p:cNvSpPr txBox="1"/>
-          <p:nvPr/>
-        </p:nvSpPr>
-        <p:spPr>
-          <a:xfrm>
-            <a:off x="7498079" y="411480"/>
-            <a:ext cx="1371600" cy="365760"/>
-          </a:xfrm>
-          <a:prstGeom prst="rect">
-            <a:avLst/>
-          </a:prstGeom>
-          <a:noFill/>
-        </p:spPr>
-        <p:txBody>
-          <a:bodyPr wrap="none">
-            <a:spAutoFit/>
-          </a:bodyPr>
-          <a:lstStyle/>
-          <a:p>
-            <a:pPr>
-              <a:defRPr sz="1100" b="1">
-                <a:solidFill>
-                  <a:srgbClr val="10B981"/>
-                </a:solidFill>
-              </a:defRPr>
-            </a:pPr>
-            <a:r>
-              <a:t>✓ Verified</a:t>
-            </a:r>
-          </a:p>
-        </p:txBody>
-      </p:sp>
-      <p:sp>
-        <p:nvSpPr>
-          <p:cNvPr id="4" name="TextBox 3"/>
-          <p:cNvSpPr txBox="1"/>
-          <p:nvPr/>
-        </p:nvSpPr>
-        <p:spPr>
-          <a:xfrm>
-            <a:off x="640080" y="1188720"/>
-            <a:ext cx="7863840" cy="5212080"/>
-          </a:xfrm>
-          <a:prstGeom prst="rect">
-            <a:avLst/>
-          </a:prstGeom>
-          <a:noFill/>
-        </p:spPr>
-        <p:txBody>
-          <a:bodyPr wrap="square">
-            <a:spAutoFit/>
-          </a:bodyPr>
-          <a:lstStyle/>
-          <a:p>
-            <a:pPr>
-              <a:spcBef>
-                <a:spcPts val="800"/>
-              </a:spcBef>
-              <a:defRPr sz="1800">
-                <a:solidFill>
-                  <a:srgbClr val="F1F5F9"/>
-                </a:solidFill>
-              </a:defRPr>
-            </a:pPr>
-            <a:r>
-              <a:t>1. Chat - Type and ask anything in dashboard</a:t>
-            </a:r>
-          </a:p>
-          <a:p>
-            <a:pPr>
-              <a:spcBef>
-                <a:spcPts val="800"/>
-              </a:spcBef>
-              <a:defRPr sz="1800">
-                <a:solidFill>
-                  <a:srgbClr val="F1F5F9"/>
-                </a:solidFill>
-              </a:defRPr>
-            </a:pPr>
-          </a:p>
-          <a:p>
-            <a:pPr>
-              <a:spcBef>
-                <a:spcPts val="800"/>
-              </a:spcBef>
-              <a:defRPr sz="1800">
-                <a:solidFill>
-                  <a:srgbClr val="F1F5F9"/>
-                </a:solidFill>
-              </a:defRPr>
-            </a:pPr>
-            <a:r>
-              <a:t>2. Schedule a job - 'Every weekday at 9, summarize my open work'</a:t>
-            </a:r>
-          </a:p>
-          <a:p>
-            <a:pPr>
-              <a:spcBef>
-                <a:spcPts val="800"/>
-              </a:spcBef>
-              <a:defRPr sz="1800">
-                <a:solidFill>
-                  <a:srgbClr val="F1F5F9"/>
-                </a:solidFill>
-              </a:defRPr>
-            </a:pPr>
-          </a:p>
-          <a:p>
-            <a:pPr>
-              <a:spcBef>
-                <a:spcPts val="800"/>
-              </a:spcBef>
-              <a:defRPr sz="1800">
-                <a:solidFill>
-                  <a:srgbClr val="F1F5F9"/>
-                </a:solidFill>
-              </a:defRPr>
-            </a:pPr>
-            <a:r>
-              <a:t>3. Teach a preference - 'Always use pytest over unittest'</a:t>
-            </a:r>
-          </a:p>
-          <a:p>
-            <a:pPr>
-              <a:spcBef>
-                <a:spcPts val="800"/>
-              </a:spcBef>
-              <a:defRPr sz="1800">
-                <a:solidFill>
-                  <a:srgbClr val="F1F5F9"/>
-                </a:solidFill>
-              </a:defRPr>
-            </a:pPr>
-          </a:p>
-          <a:p>
-            <a:pPr>
-              <a:spcBef>
-                <a:spcPts val="800"/>
-              </a:spcBef>
-              <a:defRPr sz="1800">
-                <a:solidFill>
-                  <a:srgbClr val="F1F5F9"/>
-                </a:solidFill>
-              </a:defRPr>
-            </a:pPr>
-            <a:r>
-              <a:t>4. Run autonomous task - Projects panel → describe spec → Run</a:t>
-            </a:r>
-          </a:p>
-          <a:p>
-            <a:pPr>
-              <a:spcBef>
-                <a:spcPts val="800"/>
-              </a:spcBef>
-              <a:defRPr sz="1800">
-                <a:solidFill>
-                  <a:srgbClr val="F1F5F9"/>
-                </a:solidFill>
-              </a:defRPr>
-            </a:pPr>
-          </a:p>
-          <a:p>
-            <a:pPr>
-              <a:spcBef>
-                <a:spcPts val="800"/>
-              </a:spcBef>
-              <a:defRPr sz="1800">
-                <a:solidFill>
-                  <a:srgbClr val="F1F5F9"/>
-                </a:solidFill>
-              </a:defRPr>
-            </a:pPr>
-            <a:r>
-              <a:t>5. Delegate parallel work - 'Research these 3 options in parallel'</a:t>
+              <a:t>Part 5: Getting Started</a:t>
             </a:r>
           </a:p>
         </p:txBody>
@@ -10361,7 +10240,7 @@
         <p:spPr>
           <a:xfrm>
             <a:off x="457200" y="365760"/>
-            <a:ext cx="6858000" cy="548640"/>
+            <a:ext cx="8229600" cy="548640"/>
           </a:xfrm>
           <a:prstGeom prst="rect">
             <a:avLst/>
@@ -10382,7 +10261,7 @@
               </a:defRPr>
             </a:pPr>
             <a:r>
-              <a:t>Resources</a:t>
+              <a:t>Installation</a:t>
             </a:r>
           </a:p>
         </p:txBody>
@@ -10395,8 +10274,8 @@
         </p:nvSpPr>
         <p:spPr>
           <a:xfrm>
-            <a:off x="7498079" y="411480"/>
-            <a:ext cx="1371600" cy="365760"/>
+            <a:off x="457200" y="1188720"/>
+            <a:ext cx="4114800" cy="5212080"/>
           </a:xfrm>
           <a:prstGeom prst="rect">
             <a:avLst/>
@@ -10404,20 +10283,125 @@
           <a:noFill/>
         </p:spPr>
         <p:txBody>
-          <a:bodyPr wrap="none">
+          <a:bodyPr wrap="square">
             <a:spAutoFit/>
           </a:bodyPr>
           <a:lstStyle/>
           <a:p>
             <a:pPr>
-              <a:defRPr sz="1100" b="1">
-                <a:solidFill>
-                  <a:srgbClr val="10B981"/>
-                </a:solidFill>
-              </a:defRPr>
-            </a:pPr>
-            <a:r>
-              <a:t>✓ Verified</a:t>
+              <a:spcBef>
+                <a:spcPts val="600"/>
+              </a:spcBef>
+              <a:defRPr sz="1600">
+                <a:solidFill>
+                  <a:srgbClr val="F1F5F9"/>
+                </a:solidFill>
+              </a:defRPr>
+            </a:pPr>
+            <a:r>
+              <a:t>Option 1: Desktop App (Recommended)</a:t>
+            </a:r>
+          </a:p>
+          <a:p>
+            <a:pPr>
+              <a:spcBef>
+                <a:spcPts val="600"/>
+              </a:spcBef>
+              <a:defRPr sz="1600">
+                <a:solidFill>
+                  <a:srgbClr val="F1F5F9"/>
+                </a:solidFill>
+              </a:defRPr>
+            </a:pPr>
+            <a:r>
+              <a:t>1. Download (.dmg or .AppImage)</a:t>
+            </a:r>
+          </a:p>
+          <a:p>
+            <a:pPr>
+              <a:spcBef>
+                <a:spcPts val="600"/>
+              </a:spcBef>
+              <a:defRPr sz="1600">
+                <a:solidFill>
+                  <a:srgbClr val="F1F5F9"/>
+                </a:solidFill>
+              </a:defRPr>
+            </a:pPr>
+            <a:r>
+              <a:t>2. Launch (auto-starts Gateway)</a:t>
+            </a:r>
+          </a:p>
+          <a:p>
+            <a:pPr>
+              <a:spcBef>
+                <a:spcPts val="600"/>
+              </a:spcBef>
+              <a:defRPr sz="1600">
+                <a:solidFill>
+                  <a:srgbClr val="F1F5F9"/>
+                </a:solidFill>
+              </a:defRPr>
+            </a:pPr>
+            <a:r>
+              <a:t>3. Authenticate (device-code sign-in)</a:t>
+            </a:r>
+          </a:p>
+          <a:p>
+            <a:pPr>
+              <a:spcBef>
+                <a:spcPts val="600"/>
+              </a:spcBef>
+              <a:defRPr sz="1600">
+                <a:solidFill>
+                  <a:srgbClr val="F1F5F9"/>
+                </a:solidFill>
+              </a:defRPr>
+            </a:pPr>
+            <a:r>
+              <a:t>4. Start chatting</a:t>
+            </a:r>
+          </a:p>
+          <a:p>
+            <a:pPr>
+              <a:spcBef>
+                <a:spcPts val="600"/>
+              </a:spcBef>
+              <a:defRPr sz="1600">
+                <a:solidFill>
+                  <a:srgbClr val="F1F5F9"/>
+                </a:solidFill>
+              </a:defRPr>
+            </a:pPr>
+          </a:p>
+          <a:p>
+            <a:pPr>
+              <a:spcBef>
+                <a:spcPts val="600"/>
+              </a:spcBef>
+              <a:defRPr sz="1600">
+                <a:solidFill>
+                  <a:srgbClr val="F1F5F9"/>
+                </a:solidFill>
+              </a:defRPr>
+            </a:pPr>
+            <a:r>
+              <a:t>No AWS CLI needed</a:t>
+            </a:r>
+          </a:p>
+          <a:p>
+            <a:pPr>
+              <a:spcBef>
+                <a:spcPts val="600"/>
+              </a:spcBef>
+              <a:defRPr sz="1600">
+                <a:solidFill>
+                  <a:srgbClr val="F1F5F9"/>
+                </a:solidFill>
+              </a:defRPr>
+            </a:pPr>
+            <a:r>
+              <a:t>No Bedrock configuration needed</a:t>
             </a:r>
           </a:p>
         </p:txBody>
@@ -10430,8 +10414,8 @@
         </p:nvSpPr>
         <p:spPr>
           <a:xfrm>
-            <a:off x="640080" y="1188720"/>
-            <a:ext cx="7863840" cy="5212080"/>
+            <a:off x="4754880" y="1188720"/>
+            <a:ext cx="4114800" cy="5212080"/>
           </a:xfrm>
           <a:prstGeom prst="rect">
             <a:avLst/>
@@ -10446,160 +10430,115 @@
           <a:p>
             <a:pPr>
               <a:spcBef>
-                <a:spcPts val="800"/>
-              </a:spcBef>
-              <a:defRPr sz="1800">
-                <a:solidFill>
-                  <a:srgbClr val="F1F5F9"/>
-                </a:solidFill>
-              </a:defRPr>
-            </a:pPr>
-            <a:r>
-              <a:t>Official Documentation:</a:t>
-            </a:r>
-          </a:p>
-          <a:p>
-            <a:pPr>
-              <a:spcBef>
-                <a:spcPts val="800"/>
-              </a:spcBef>
-              <a:defRPr sz="1800">
-                <a:solidFill>
-                  <a:srgbClr val="F1F5F9"/>
-                </a:solidFill>
-              </a:defRPr>
-            </a:pPr>
-            <a:r>
-              <a:t>• kiro.dev/docs/crew/ - Main docs</a:t>
-            </a:r>
-          </a:p>
-          <a:p>
-            <a:pPr>
-              <a:spcBef>
-                <a:spcPts val="800"/>
-              </a:spcBef>
-              <a:defRPr sz="1800">
-                <a:solidFill>
-                  <a:srgbClr val="F1F5F9"/>
-                </a:solidFill>
-              </a:defRPr>
-            </a:pPr>
-            <a:r>
-              <a:t>• kiro.dev/docs/crew/installation/ - Setup</a:t>
-            </a:r>
-          </a:p>
-          <a:p>
-            <a:pPr>
-              <a:spcBef>
-                <a:spcPts val="800"/>
-              </a:spcBef>
-              <a:defRPr sz="1800">
-                <a:solidFill>
-                  <a:srgbClr val="F1F5F9"/>
-                </a:solidFill>
-              </a:defRPr>
-            </a:pPr>
-            <a:r>
-              <a:t>• kiro.dev/docs/crew/features/ - Features</a:t>
-            </a:r>
-          </a:p>
-          <a:p>
-            <a:pPr>
-              <a:spcBef>
-                <a:spcPts val="800"/>
-              </a:spcBef>
-              <a:defRPr sz="1800">
-                <a:solidFill>
-                  <a:srgbClr val="F1F5F9"/>
-                </a:solidFill>
-              </a:defRPr>
-            </a:pPr>
-          </a:p>
-          <a:p>
-            <a:pPr>
-              <a:spcBef>
-                <a:spcPts val="800"/>
-              </a:spcBef>
-              <a:defRPr sz="1800">
-                <a:solidFill>
-                  <a:srgbClr val="F1F5F9"/>
-                </a:solidFill>
-              </a:defRPr>
-            </a:pPr>
-            <a:r>
-              <a:t>Specific Features:</a:t>
-            </a:r>
-          </a:p>
-          <a:p>
-            <a:pPr>
-              <a:spcBef>
-                <a:spcPts val="800"/>
-              </a:spcBef>
-              <a:defRPr sz="1800">
-                <a:solidFill>
-                  <a:srgbClr val="F1F5F9"/>
-                </a:solidFill>
-              </a:defRPr>
-            </a:pPr>
-            <a:r>
-              <a:t>• kiro.dev/docs/crew/features/memory/ - Memory</a:t>
-            </a:r>
-          </a:p>
-          <a:p>
-            <a:pPr>
-              <a:spcBef>
-                <a:spcPts val="800"/>
-              </a:spcBef>
-              <a:defRPr sz="1800">
-                <a:solidFill>
-                  <a:srgbClr val="F1F5F9"/>
-                </a:solidFill>
-              </a:defRPr>
-            </a:pPr>
-            <a:r>
-              <a:t>• kiro.dev/docs/crew/features/subagents/ - Subagents</a:t>
-            </a:r>
-          </a:p>
-          <a:p>
-            <a:pPr>
-              <a:spcBef>
-                <a:spcPts val="800"/>
-              </a:spcBef>
-              <a:defRPr sz="1800">
-                <a:solidFill>
-                  <a:srgbClr val="F1F5F9"/>
-                </a:solidFill>
-              </a:defRPr>
-            </a:pPr>
-            <a:r>
-              <a:t>• kiro.dev/docs/crew/features/cron/ - Scheduling</a:t>
-            </a:r>
-          </a:p>
-          <a:p>
-            <a:pPr>
-              <a:spcBef>
-                <a:spcPts val="800"/>
-              </a:spcBef>
-              <a:defRPr sz="1800">
-                <a:solidFill>
-                  <a:srgbClr val="F1F5F9"/>
-                </a:solidFill>
-              </a:defRPr>
-            </a:pPr>
-          </a:p>
-          <a:p>
-            <a:pPr>
-              <a:spcBef>
-                <a:spcPts val="800"/>
-              </a:spcBef>
-              <a:defRPr sz="1800">
-                <a:solidFill>
-                  <a:srgbClr val="F1F5F9"/>
-                </a:solidFill>
-              </a:defRPr>
-            </a:pPr>
-            <a:r>
-              <a:t>Pricing: kiro.dev/pricing/</a:t>
+                <a:spcPts val="600"/>
+              </a:spcBef>
+              <a:defRPr sz="1600">
+                <a:solidFill>
+                  <a:srgbClr val="F1F5F9"/>
+                </a:solidFill>
+              </a:defRPr>
+            </a:pPr>
+            <a:r>
+              <a:t>Option 2: CLI Install</a:t>
+            </a:r>
+          </a:p>
+          <a:p>
+            <a:pPr>
+              <a:spcBef>
+                <a:spcPts val="600"/>
+              </a:spcBef>
+              <a:defRPr sz="1600">
+                <a:solidFill>
+                  <a:srgbClr val="F1F5F9"/>
+                </a:solidFill>
+              </a:defRPr>
+            </a:pPr>
+            <a:r>
+              <a:t>curl -fsSL https://download.crew.kiro.dev/cli.sh | sh</a:t>
+            </a:r>
+          </a:p>
+          <a:p>
+            <a:pPr>
+              <a:spcBef>
+                <a:spcPts val="600"/>
+              </a:spcBef>
+              <a:defRPr sz="1600">
+                <a:solidFill>
+                  <a:srgbClr val="F1F5F9"/>
+                </a:solidFill>
+              </a:defRPr>
+            </a:pPr>
+          </a:p>
+          <a:p>
+            <a:pPr>
+              <a:spcBef>
+                <a:spcPts val="600"/>
+              </a:spcBef>
+              <a:defRPr sz="1600">
+                <a:solidFill>
+                  <a:srgbClr val="F1F5F9"/>
+                </a:solidFill>
+              </a:defRPr>
+            </a:pPr>
+            <a:r>
+              <a:t>kirocrew setup</a:t>
+            </a:r>
+          </a:p>
+          <a:p>
+            <a:pPr>
+              <a:spcBef>
+                <a:spcPts val="600"/>
+              </a:spcBef>
+              <a:defRPr sz="1600">
+                <a:solidFill>
+                  <a:srgbClr val="F1F5F9"/>
+                </a:solidFill>
+              </a:defRPr>
+            </a:pPr>
+            <a:r>
+              <a:t>kirocrew doctor</a:t>
+            </a:r>
+          </a:p>
+          <a:p>
+            <a:pPr>
+              <a:spcBef>
+                <a:spcPts val="600"/>
+              </a:spcBef>
+              <a:defRPr sz="1600">
+                <a:solidFill>
+                  <a:srgbClr val="F1F5F9"/>
+                </a:solidFill>
+              </a:defRPr>
+            </a:pPr>
+            <a:r>
+              <a:t>kirocrew gateway</a:t>
+            </a:r>
+          </a:p>
+          <a:p>
+            <a:pPr>
+              <a:spcBef>
+                <a:spcPts val="600"/>
+              </a:spcBef>
+              <a:defRPr sz="1600">
+                <a:solidFill>
+                  <a:srgbClr val="F1F5F9"/>
+                </a:solidFill>
+              </a:defRPr>
+            </a:pPr>
+          </a:p>
+          <a:p>
+            <a:pPr>
+              <a:spcBef>
+                <a:spcPts val="600"/>
+              </a:spcBef>
+              <a:defRPr sz="1600">
+                <a:solidFill>
+                  <a:srgbClr val="F1F5F9"/>
+                </a:solidFill>
+              </a:defRPr>
+            </a:pPr>
+            <a:r>
+              <a:t>open http://localhost:5476</a:t>
             </a:r>
           </a:p>
         </p:txBody>
@@ -10709,6 +10648,526 @@
 </file>
 
 <file path=ppt/slides/slide40.xml><?xml version="1.0" encoding="utf-8"?>
+<p:sld xmlns:a="http://schemas.openxmlformats.org/drawingml/2006/main" xmlns:p="http://schemas.openxmlformats.org/presentationml/2006/main" xmlns:r="http://schemas.openxmlformats.org/officeDocument/2006/relationships">
+  <p:cSld>
+    <p:bg>
+      <p:bgPr>
+        <a:solidFill>
+          <a:srgbClr val="0F172A"/>
+        </a:solidFill>
+        <a:effectLst/>
+      </p:bgPr>
+    </p:bg>
+    <p:spTree>
+      <p:nvGrpSpPr>
+        <p:cNvPr id="1" name=""/>
+        <p:cNvGrpSpPr/>
+        <p:nvPr/>
+      </p:nvGrpSpPr>
+      <p:grpSpPr/>
+      <p:sp>
+        <p:nvSpPr>
+          <p:cNvPr id="2" name="TextBox 1"/>
+          <p:cNvSpPr txBox="1"/>
+          <p:nvPr/>
+        </p:nvSpPr>
+        <p:spPr>
+          <a:xfrm>
+            <a:off x="457200" y="365760"/>
+            <a:ext cx="6858000" cy="548640"/>
+          </a:xfrm>
+          <a:prstGeom prst="rect">
+            <a:avLst/>
+          </a:prstGeom>
+          <a:noFill/>
+        </p:spPr>
+        <p:txBody>
+          <a:bodyPr wrap="none">
+            <a:spAutoFit/>
+          </a:bodyPr>
+          <a:lstStyle/>
+          <a:p>
+            <a:pPr>
+              <a:defRPr sz="3200" b="1">
+                <a:solidFill>
+                  <a:srgbClr val="2563EB"/>
+                </a:solidFill>
+              </a:defRPr>
+            </a:pPr>
+            <a:r>
+              <a:t>First Steps</a:t>
+            </a:r>
+          </a:p>
+        </p:txBody>
+      </p:sp>
+      <p:sp>
+        <p:nvSpPr>
+          <p:cNvPr id="3" name="TextBox 2"/>
+          <p:cNvSpPr txBox="1"/>
+          <p:nvPr/>
+        </p:nvSpPr>
+        <p:spPr>
+          <a:xfrm>
+            <a:off x="7498079" y="411480"/>
+            <a:ext cx="1371600" cy="365760"/>
+          </a:xfrm>
+          <a:prstGeom prst="rect">
+            <a:avLst/>
+          </a:prstGeom>
+          <a:noFill/>
+        </p:spPr>
+        <p:txBody>
+          <a:bodyPr wrap="none">
+            <a:spAutoFit/>
+          </a:bodyPr>
+          <a:lstStyle/>
+          <a:p>
+            <a:pPr>
+              <a:defRPr sz="1100" b="1">
+                <a:solidFill>
+                  <a:srgbClr val="10B981"/>
+                </a:solidFill>
+              </a:defRPr>
+            </a:pPr>
+            <a:r>
+              <a:t>✓ Verified</a:t>
+            </a:r>
+          </a:p>
+        </p:txBody>
+      </p:sp>
+      <p:sp>
+        <p:nvSpPr>
+          <p:cNvPr id="4" name="TextBox 3"/>
+          <p:cNvSpPr txBox="1"/>
+          <p:nvPr/>
+        </p:nvSpPr>
+        <p:spPr>
+          <a:xfrm>
+            <a:off x="640080" y="1188720"/>
+            <a:ext cx="7863840" cy="5212080"/>
+          </a:xfrm>
+          <a:prstGeom prst="rect">
+            <a:avLst/>
+          </a:prstGeom>
+          <a:noFill/>
+        </p:spPr>
+        <p:txBody>
+          <a:bodyPr wrap="square">
+            <a:spAutoFit/>
+          </a:bodyPr>
+          <a:lstStyle/>
+          <a:p>
+            <a:pPr>
+              <a:spcBef>
+                <a:spcPts val="800"/>
+              </a:spcBef>
+              <a:defRPr sz="1800">
+                <a:solidFill>
+                  <a:srgbClr val="F1F5F9"/>
+                </a:solidFill>
+              </a:defRPr>
+            </a:pPr>
+            <a:r>
+              <a:t>1. Chat - Type and ask anything in dashboard</a:t>
+            </a:r>
+          </a:p>
+          <a:p>
+            <a:pPr>
+              <a:spcBef>
+                <a:spcPts val="800"/>
+              </a:spcBef>
+              <a:defRPr sz="1800">
+                <a:solidFill>
+                  <a:srgbClr val="F1F5F9"/>
+                </a:solidFill>
+              </a:defRPr>
+            </a:pPr>
+          </a:p>
+          <a:p>
+            <a:pPr>
+              <a:spcBef>
+                <a:spcPts val="800"/>
+              </a:spcBef>
+              <a:defRPr sz="1800">
+                <a:solidFill>
+                  <a:srgbClr val="F1F5F9"/>
+                </a:solidFill>
+              </a:defRPr>
+            </a:pPr>
+            <a:r>
+              <a:t>2. Schedule a job - 'Every weekday at 9, summarize my open work'</a:t>
+            </a:r>
+          </a:p>
+          <a:p>
+            <a:pPr>
+              <a:spcBef>
+                <a:spcPts val="800"/>
+              </a:spcBef>
+              <a:defRPr sz="1800">
+                <a:solidFill>
+                  <a:srgbClr val="F1F5F9"/>
+                </a:solidFill>
+              </a:defRPr>
+            </a:pPr>
+          </a:p>
+          <a:p>
+            <a:pPr>
+              <a:spcBef>
+                <a:spcPts val="800"/>
+              </a:spcBef>
+              <a:defRPr sz="1800">
+                <a:solidFill>
+                  <a:srgbClr val="F1F5F9"/>
+                </a:solidFill>
+              </a:defRPr>
+            </a:pPr>
+            <a:r>
+              <a:t>3. Teach a preference - 'Always use pytest over unittest'</a:t>
+            </a:r>
+          </a:p>
+          <a:p>
+            <a:pPr>
+              <a:spcBef>
+                <a:spcPts val="800"/>
+              </a:spcBef>
+              <a:defRPr sz="1800">
+                <a:solidFill>
+                  <a:srgbClr val="F1F5F9"/>
+                </a:solidFill>
+              </a:defRPr>
+            </a:pPr>
+          </a:p>
+          <a:p>
+            <a:pPr>
+              <a:spcBef>
+                <a:spcPts val="800"/>
+              </a:spcBef>
+              <a:defRPr sz="1800">
+                <a:solidFill>
+                  <a:srgbClr val="F1F5F9"/>
+                </a:solidFill>
+              </a:defRPr>
+            </a:pPr>
+            <a:r>
+              <a:t>4. Run autonomous task - Projects panel → describe spec → Run</a:t>
+            </a:r>
+          </a:p>
+          <a:p>
+            <a:pPr>
+              <a:spcBef>
+                <a:spcPts val="800"/>
+              </a:spcBef>
+              <a:defRPr sz="1800">
+                <a:solidFill>
+                  <a:srgbClr val="F1F5F9"/>
+                </a:solidFill>
+              </a:defRPr>
+            </a:pPr>
+          </a:p>
+          <a:p>
+            <a:pPr>
+              <a:spcBef>
+                <a:spcPts val="800"/>
+              </a:spcBef>
+              <a:defRPr sz="1800">
+                <a:solidFill>
+                  <a:srgbClr val="F1F5F9"/>
+                </a:solidFill>
+              </a:defRPr>
+            </a:pPr>
+            <a:r>
+              <a:t>5. Delegate parallel work - 'Research these 3 options in parallel'</a:t>
+            </a:r>
+          </a:p>
+        </p:txBody>
+      </p:sp>
+    </p:spTree>
+  </p:cSld>
+  <p:clrMapOvr>
+    <a:masterClrMapping/>
+  </p:clrMapOvr>
+</p:sld>
+</file>
+
+<file path=ppt/slides/slide41.xml><?xml version="1.0" encoding="utf-8"?>
+<p:sld xmlns:a="http://schemas.openxmlformats.org/drawingml/2006/main" xmlns:p="http://schemas.openxmlformats.org/presentationml/2006/main" xmlns:r="http://schemas.openxmlformats.org/officeDocument/2006/relationships">
+  <p:cSld>
+    <p:bg>
+      <p:bgPr>
+        <a:solidFill>
+          <a:srgbClr val="0F172A"/>
+        </a:solidFill>
+        <a:effectLst/>
+      </p:bgPr>
+    </p:bg>
+    <p:spTree>
+      <p:nvGrpSpPr>
+        <p:cNvPr id="1" name=""/>
+        <p:cNvGrpSpPr/>
+        <p:nvPr/>
+      </p:nvGrpSpPr>
+      <p:grpSpPr/>
+      <p:sp>
+        <p:nvSpPr>
+          <p:cNvPr id="2" name="TextBox 1"/>
+          <p:cNvSpPr txBox="1"/>
+          <p:nvPr/>
+        </p:nvSpPr>
+        <p:spPr>
+          <a:xfrm>
+            <a:off x="457200" y="365760"/>
+            <a:ext cx="6858000" cy="548640"/>
+          </a:xfrm>
+          <a:prstGeom prst="rect">
+            <a:avLst/>
+          </a:prstGeom>
+          <a:noFill/>
+        </p:spPr>
+        <p:txBody>
+          <a:bodyPr wrap="none">
+            <a:spAutoFit/>
+          </a:bodyPr>
+          <a:lstStyle/>
+          <a:p>
+            <a:pPr>
+              <a:defRPr sz="3200" b="1">
+                <a:solidFill>
+                  <a:srgbClr val="2563EB"/>
+                </a:solidFill>
+              </a:defRPr>
+            </a:pPr>
+            <a:r>
+              <a:t>Resources</a:t>
+            </a:r>
+          </a:p>
+        </p:txBody>
+      </p:sp>
+      <p:sp>
+        <p:nvSpPr>
+          <p:cNvPr id="3" name="TextBox 2"/>
+          <p:cNvSpPr txBox="1"/>
+          <p:nvPr/>
+        </p:nvSpPr>
+        <p:spPr>
+          <a:xfrm>
+            <a:off x="7498079" y="411480"/>
+            <a:ext cx="1371600" cy="365760"/>
+          </a:xfrm>
+          <a:prstGeom prst="rect">
+            <a:avLst/>
+          </a:prstGeom>
+          <a:noFill/>
+        </p:spPr>
+        <p:txBody>
+          <a:bodyPr wrap="none">
+            <a:spAutoFit/>
+          </a:bodyPr>
+          <a:lstStyle/>
+          <a:p>
+            <a:pPr>
+              <a:defRPr sz="1100" b="1">
+                <a:solidFill>
+                  <a:srgbClr val="10B981"/>
+                </a:solidFill>
+              </a:defRPr>
+            </a:pPr>
+            <a:r>
+              <a:t>✓ Verified</a:t>
+            </a:r>
+          </a:p>
+        </p:txBody>
+      </p:sp>
+      <p:sp>
+        <p:nvSpPr>
+          <p:cNvPr id="4" name="TextBox 3"/>
+          <p:cNvSpPr txBox="1"/>
+          <p:nvPr/>
+        </p:nvSpPr>
+        <p:spPr>
+          <a:xfrm>
+            <a:off x="640080" y="1188720"/>
+            <a:ext cx="7863840" cy="5212080"/>
+          </a:xfrm>
+          <a:prstGeom prst="rect">
+            <a:avLst/>
+          </a:prstGeom>
+          <a:noFill/>
+        </p:spPr>
+        <p:txBody>
+          <a:bodyPr wrap="square">
+            <a:spAutoFit/>
+          </a:bodyPr>
+          <a:lstStyle/>
+          <a:p>
+            <a:pPr>
+              <a:spcBef>
+                <a:spcPts val="800"/>
+              </a:spcBef>
+              <a:defRPr sz="1800">
+                <a:solidFill>
+                  <a:srgbClr val="F1F5F9"/>
+                </a:solidFill>
+              </a:defRPr>
+            </a:pPr>
+            <a:r>
+              <a:t>Official Documentation:</a:t>
+            </a:r>
+          </a:p>
+          <a:p>
+            <a:pPr>
+              <a:spcBef>
+                <a:spcPts val="800"/>
+              </a:spcBef>
+              <a:defRPr sz="1800">
+                <a:solidFill>
+                  <a:srgbClr val="F1F5F9"/>
+                </a:solidFill>
+              </a:defRPr>
+            </a:pPr>
+            <a:r>
+              <a:t>• kiro.dev/docs/crew/ - Main docs</a:t>
+            </a:r>
+          </a:p>
+          <a:p>
+            <a:pPr>
+              <a:spcBef>
+                <a:spcPts val="800"/>
+              </a:spcBef>
+              <a:defRPr sz="1800">
+                <a:solidFill>
+                  <a:srgbClr val="F1F5F9"/>
+                </a:solidFill>
+              </a:defRPr>
+            </a:pPr>
+            <a:r>
+              <a:t>• kiro.dev/docs/crew/installation/ - Setup</a:t>
+            </a:r>
+          </a:p>
+          <a:p>
+            <a:pPr>
+              <a:spcBef>
+                <a:spcPts val="800"/>
+              </a:spcBef>
+              <a:defRPr sz="1800">
+                <a:solidFill>
+                  <a:srgbClr val="F1F5F9"/>
+                </a:solidFill>
+              </a:defRPr>
+            </a:pPr>
+            <a:r>
+              <a:t>• kiro.dev/docs/crew/features/ - Features</a:t>
+            </a:r>
+          </a:p>
+          <a:p>
+            <a:pPr>
+              <a:spcBef>
+                <a:spcPts val="800"/>
+              </a:spcBef>
+              <a:defRPr sz="1800">
+                <a:solidFill>
+                  <a:srgbClr val="F1F5F9"/>
+                </a:solidFill>
+              </a:defRPr>
+            </a:pPr>
+          </a:p>
+          <a:p>
+            <a:pPr>
+              <a:spcBef>
+                <a:spcPts val="800"/>
+              </a:spcBef>
+              <a:defRPr sz="1800">
+                <a:solidFill>
+                  <a:srgbClr val="F1F5F9"/>
+                </a:solidFill>
+              </a:defRPr>
+            </a:pPr>
+            <a:r>
+              <a:t>Specific Features:</a:t>
+            </a:r>
+          </a:p>
+          <a:p>
+            <a:pPr>
+              <a:spcBef>
+                <a:spcPts val="800"/>
+              </a:spcBef>
+              <a:defRPr sz="1800">
+                <a:solidFill>
+                  <a:srgbClr val="F1F5F9"/>
+                </a:solidFill>
+              </a:defRPr>
+            </a:pPr>
+            <a:r>
+              <a:t>• kiro.dev/docs/crew/features/memory/ - Memory</a:t>
+            </a:r>
+          </a:p>
+          <a:p>
+            <a:pPr>
+              <a:spcBef>
+                <a:spcPts val="800"/>
+              </a:spcBef>
+              <a:defRPr sz="1800">
+                <a:solidFill>
+                  <a:srgbClr val="F1F5F9"/>
+                </a:solidFill>
+              </a:defRPr>
+            </a:pPr>
+            <a:r>
+              <a:t>• kiro.dev/docs/crew/features/subagents/ - Subagents</a:t>
+            </a:r>
+          </a:p>
+          <a:p>
+            <a:pPr>
+              <a:spcBef>
+                <a:spcPts val="800"/>
+              </a:spcBef>
+              <a:defRPr sz="1800">
+                <a:solidFill>
+                  <a:srgbClr val="F1F5F9"/>
+                </a:solidFill>
+              </a:defRPr>
+            </a:pPr>
+            <a:r>
+              <a:t>• kiro.dev/docs/crew/features/cron/ - Scheduling</a:t>
+            </a:r>
+          </a:p>
+          <a:p>
+            <a:pPr>
+              <a:spcBef>
+                <a:spcPts val="800"/>
+              </a:spcBef>
+              <a:defRPr sz="1800">
+                <a:solidFill>
+                  <a:srgbClr val="F1F5F9"/>
+                </a:solidFill>
+              </a:defRPr>
+            </a:pPr>
+          </a:p>
+          <a:p>
+            <a:pPr>
+              <a:spcBef>
+                <a:spcPts val="800"/>
+              </a:spcBef>
+              <a:defRPr sz="1800">
+                <a:solidFill>
+                  <a:srgbClr val="F1F5F9"/>
+                </a:solidFill>
+              </a:defRPr>
+            </a:pPr>
+            <a:r>
+              <a:t>Pricing: kiro.dev/pricing/</a:t>
+            </a:r>
+          </a:p>
+        </p:txBody>
+      </p:sp>
+    </p:spTree>
+  </p:cSld>
+  <p:clrMapOvr>
+    <a:masterClrMapping/>
+  </p:clrMapOvr>
+</p:sld>
+</file>
+
+<file path=ppt/slides/slide42.xml><?xml version="1.0" encoding="utf-8"?>
 <p:sld xmlns:a="http://schemas.openxmlformats.org/drawingml/2006/main" xmlns:p="http://schemas.openxmlformats.org/presentationml/2006/main" xmlns:r="http://schemas.openxmlformats.org/officeDocument/2006/relationships">
   <p:cSld>
     <p:bg>

--- a/kiro-crew-training.pptx
+++ b/kiro-crew-training.pptx
@@ -47,6 +47,7 @@
     <p:sldId id="295" r:id="rId46"/>
     <p:sldId id="296" r:id="rId47"/>
     <p:sldId id="297" r:id="rId48"/>
+    <p:sldId id="298" r:id="rId49"/>
   </p:sldIdLst>
   <p:sldSz cx="9144000" cy="6858000" type="screen4x3"/>
   <p:notesSz cx="6858000" cy="9144000"/>
@@ -4945,7 +4946,7 @@
               </a:defRPr>
             </a:pPr>
             <a:r>
-              <a:t>Task Runner</a:t>
+              <a:t>Scheduling: Use Cases &amp; Live Demo</a:t>
             </a:r>
           </a:p>
         </p:txBody>
@@ -5018,151 +5019,124 @@
               </a:defRPr>
             </a:pPr>
             <a:r>
-              <a:t>Autonomous task execution from specifications</a:t>
-            </a:r>
-          </a:p>
-          <a:p>
-            <a:pPr>
-              <a:spcBef>
-                <a:spcPts val="800"/>
-              </a:spcBef>
-              <a:defRPr sz="1800">
-                <a:solidFill>
-                  <a:srgbClr val="F1F5F9"/>
-                </a:solidFill>
-              </a:defRPr>
-            </a:pPr>
-          </a:p>
-          <a:p>
-            <a:pPr>
-              <a:spcBef>
-                <a:spcPts val="800"/>
-              </a:spcBef>
-              <a:defRPr sz="1800">
-                <a:solidFill>
-                  <a:srgbClr val="F1F5F9"/>
-                </a:solidFill>
-              </a:defRPr>
-            </a:pPr>
-            <a:r>
-              <a:t>Process:</a:t>
-            </a:r>
-          </a:p>
-          <a:p>
-            <a:pPr>
-              <a:spcBef>
-                <a:spcPts val="800"/>
-              </a:spcBef>
-              <a:defRPr sz="1800">
-                <a:solidFill>
-                  <a:srgbClr val="F1F5F9"/>
-                </a:solidFill>
-              </a:defRPr>
-            </a:pPr>
-            <a:r>
-              <a:t>1. Decompose spec into steps</a:t>
-            </a:r>
-          </a:p>
-          <a:p>
-            <a:pPr>
-              <a:spcBef>
-                <a:spcPts val="800"/>
-              </a:spcBef>
-              <a:defRPr sz="1800">
-                <a:solidFill>
-                  <a:srgbClr val="F1F5F9"/>
-                </a:solidFill>
-              </a:defRPr>
-            </a:pPr>
-            <a:r>
-              <a:t>2. Execute with checkpoints</a:t>
-            </a:r>
-          </a:p>
-          <a:p>
-            <a:pPr>
-              <a:spcBef>
-                <a:spcPts val="800"/>
-              </a:spcBef>
-              <a:defRPr sz="1800">
-                <a:solidFill>
-                  <a:srgbClr val="F1F5F9"/>
-                </a:solidFill>
-              </a:defRPr>
-            </a:pPr>
-            <a:r>
-              <a:t>3. Test step completion</a:t>
-            </a:r>
-          </a:p>
-          <a:p>
-            <a:pPr>
-              <a:spcBef>
-                <a:spcPts val="800"/>
-              </a:spcBef>
-              <a:defRPr sz="1800">
-                <a:solidFill>
-                  <a:srgbClr val="F1F5F9"/>
-                </a:solidFill>
-              </a:defRPr>
-            </a:pPr>
-            <a:r>
-              <a:t>4. Retry on failure</a:t>
-            </a:r>
-          </a:p>
-          <a:p>
-            <a:pPr>
-              <a:spcBef>
-                <a:spcPts val="800"/>
-              </a:spcBef>
-              <a:defRPr sz="1800">
-                <a:solidFill>
-                  <a:srgbClr val="F1F5F9"/>
-                </a:solidFill>
-              </a:defRPr>
-            </a:pPr>
-            <a:r>
-              <a:t>5. Resume from failure point</a:t>
-            </a:r>
-          </a:p>
-          <a:p>
-            <a:pPr>
-              <a:spcBef>
-                <a:spcPts val="800"/>
-              </a:spcBef>
-              <a:defRPr sz="1800">
-                <a:solidFill>
-                  <a:srgbClr val="F1F5F9"/>
-                </a:solidFill>
-              </a:defRPr>
-            </a:pPr>
-          </a:p>
-          <a:p>
-            <a:pPr>
-              <a:spcBef>
-                <a:spcPts val="800"/>
-              </a:spcBef>
-              <a:defRPr sz="1800">
-                <a:solidFill>
-                  <a:srgbClr val="F1F5F9"/>
-                </a:solidFill>
-              </a:defRPr>
-            </a:pPr>
-            <a:r>
-              <a:t>Dashboard shows live progress</a:t>
-            </a:r>
-          </a:p>
-          <a:p>
-            <a:pPr>
-              <a:spcBef>
-                <a:spcPts val="800"/>
-              </a:spcBef>
-              <a:defRPr sz="1800">
-                <a:solidFill>
-                  <a:srgbClr val="F1F5F9"/>
-                </a:solidFill>
-              </a:defRPr>
-            </a:pPr>
-            <a:r>
-              <a:t>Source: kiro.dev/docs/crew/features/task-runner/</a:t>
+              <a:t>Cron -&gt; time-driven: nightly audits, daily digests</a:t>
+            </a:r>
+          </a:p>
+          <a:p>
+            <a:pPr>
+              <a:spcBef>
+                <a:spcPts val="800"/>
+              </a:spcBef>
+              <a:defRPr sz="1800">
+                <a:solidFill>
+                  <a:srgbClr val="F1F5F9"/>
+                </a:solidFill>
+              </a:defRPr>
+            </a:pPr>
+            <a:r>
+              <a:t>  (Enterprise ex: Nightly Security Audit @ 2am + subagents)</a:t>
+            </a:r>
+          </a:p>
+          <a:p>
+            <a:pPr>
+              <a:spcBef>
+                <a:spcPts val="800"/>
+              </a:spcBef>
+              <a:defRPr sz="1800">
+                <a:solidFill>
+                  <a:srgbClr val="F1F5F9"/>
+                </a:solidFill>
+              </a:defRPr>
+            </a:pPr>
+            <a:r>
+              <a:t>Heartbeat -&gt; condition-driven: only wakes on change</a:t>
+            </a:r>
+          </a:p>
+          <a:p>
+            <a:pPr>
+              <a:spcBef>
+                <a:spcPts val="800"/>
+              </a:spcBef>
+              <a:defRPr sz="1800">
+                <a:solidFill>
+                  <a:srgbClr val="F1F5F9"/>
+                </a:solidFill>
+              </a:defRPr>
+            </a:pPr>
+            <a:r>
+              <a:t>  (Enterprise ex: 24/7 PR Monitoring, ping when stale &gt;4h)</a:t>
+            </a:r>
+          </a:p>
+          <a:p>
+            <a:pPr>
+              <a:spcBef>
+                <a:spcPts val="800"/>
+              </a:spcBef>
+              <a:defRPr sz="1800">
+                <a:solidFill>
+                  <a:srgbClr val="F1F5F9"/>
+                </a:solidFill>
+              </a:defRPr>
+            </a:pPr>
+            <a:r>
+              <a:t>Webhook -&gt; event-driven: CI failure, PagerDuty alert</a:t>
+            </a:r>
+          </a:p>
+          <a:p>
+            <a:pPr>
+              <a:spcBef>
+                <a:spcPts val="800"/>
+              </a:spcBef>
+              <a:defRPr sz="1800">
+                <a:solidFill>
+                  <a:srgbClr val="F1F5F9"/>
+                </a:solidFill>
+              </a:defRPr>
+            </a:pPr>
+            <a:r>
+              <a:t>  (Enterprise ex: Incident Response -&gt; triage + RCA)</a:t>
+            </a:r>
+          </a:p>
+          <a:p>
+            <a:pPr>
+              <a:spcBef>
+                <a:spcPts val="800"/>
+              </a:spcBef>
+              <a:defRPr sz="1800">
+                <a:solidFill>
+                  <a:srgbClr val="F1F5F9"/>
+                </a:solidFill>
+              </a:defRPr>
+            </a:pPr>
+          </a:p>
+          <a:p>
+            <a:pPr>
+              <a:spcBef>
+                <a:spcPts val="800"/>
+              </a:spcBef>
+              <a:defRPr sz="1800">
+                <a:solidFill>
+                  <a:srgbClr val="F1F5F9"/>
+                </a:solidFill>
+              </a:defRPr>
+            </a:pPr>
+            <a:r>
+              <a:t>LIVE DEMO (job 66d68a11): kirocrew cron trigger 66d68a11</a:t>
+            </a:r>
+          </a:p>
+          <a:p>
+            <a:pPr>
+              <a:spcBef>
+                <a:spcPts val="800"/>
+              </a:spcBef>
+              <a:defRPr sz="1800">
+                <a:solidFill>
+                  <a:srgbClr val="F1F5F9"/>
+                </a:solidFill>
+              </a:defRPr>
+            </a:pPr>
+            <a:r>
+              <a:t>  daily 01:00 UTC - checks training site returns HTTP 200</a:t>
             </a:r>
           </a:p>
         </p:txBody>
@@ -5223,7 +5197,7 @@
               </a:defRPr>
             </a:pPr>
             <a:r>
-              <a:t>Artifacts &amp; Knowledge</a:t>
+              <a:t>Task Runner</a:t>
             </a:r>
           </a:p>
         </p:txBody>
@@ -5296,139 +5270,151 @@
               </a:defRPr>
             </a:pPr>
             <a:r>
-              <a:t>Artifacts: Persistent outputs with version history</a:t>
-            </a:r>
-          </a:p>
-          <a:p>
-            <a:pPr>
-              <a:spcBef>
-                <a:spcPts val="800"/>
-              </a:spcBef>
-              <a:defRPr sz="1800">
-                <a:solidFill>
-                  <a:srgbClr val="F1F5F9"/>
-                </a:solidFill>
-              </a:defRPr>
-            </a:pPr>
-            <a:r>
-              <a:t>• Kinds: widget, HTML, markdown, SVG, JSON, text</a:t>
-            </a:r>
-          </a:p>
-          <a:p>
-            <a:pPr>
-              <a:spcBef>
-                <a:spcPts val="800"/>
-              </a:spcBef>
-              <a:defRPr sz="1800">
-                <a:solidFill>
-                  <a:srgbClr val="F1F5F9"/>
-                </a:solidFill>
-              </a:defRPr>
-            </a:pPr>
-            <a:r>
-              <a:t>• Live previews in dashboard</a:t>
-            </a:r>
-          </a:p>
-          <a:p>
-            <a:pPr>
-              <a:spcBef>
-                <a:spcPts val="800"/>
-              </a:spcBef>
-              <a:defRPr sz="1800">
-                <a:solidFill>
-                  <a:srgbClr val="F1F5F9"/>
-                </a:solidFill>
-              </a:defRPr>
-            </a:pPr>
-            <a:r>
-              <a:t>• Optional: Deploy to AWS (your account)</a:t>
-            </a:r>
-          </a:p>
-          <a:p>
-            <a:pPr>
-              <a:spcBef>
-                <a:spcPts val="800"/>
-              </a:spcBef>
-              <a:defRPr sz="1800">
-                <a:solidFill>
-                  <a:srgbClr val="F1F5F9"/>
-                </a:solidFill>
-              </a:defRPr>
-            </a:pPr>
-          </a:p>
-          <a:p>
-            <a:pPr>
-              <a:spcBef>
-                <a:spcPts val="800"/>
-              </a:spcBef>
-              <a:defRPr sz="1800">
-                <a:solidFill>
-                  <a:srgbClr val="F1F5F9"/>
-                </a:solidFill>
-              </a:defRPr>
-            </a:pPr>
-            <a:r>
-              <a:t>Knowledge Library: Curated document store</a:t>
-            </a:r>
-          </a:p>
-          <a:p>
-            <a:pPr>
-              <a:spcBef>
-                <a:spcPts val="800"/>
-              </a:spcBef>
-              <a:defRPr sz="1800">
-                <a:solidFill>
-                  <a:srgbClr val="F1F5F9"/>
-                </a:solidFill>
-              </a:defRPr>
-            </a:pPr>
-            <a:r>
-              <a:t>• Sources: local files, folders, URLs</a:t>
-            </a:r>
-          </a:p>
-          <a:p>
-            <a:pPr>
-              <a:spcBef>
-                <a:spcPts val="800"/>
-              </a:spcBef>
-              <a:defRPr sz="1800">
-                <a:solidFill>
-                  <a:srgbClr val="F1F5F9"/>
-                </a:solidFill>
-              </a:defRPr>
-            </a:pPr>
-            <a:r>
-              <a:t>• Ingestion: chunking, embeddings</a:t>
-            </a:r>
-          </a:p>
-          <a:p>
-            <a:pPr>
-              <a:spcBef>
-                <a:spcPts val="800"/>
-              </a:spcBef>
-              <a:defRPr sz="1800">
-                <a:solidFill>
-                  <a:srgbClr val="F1F5F9"/>
-                </a:solidFill>
-              </a:defRPr>
-            </a:pPr>
-            <a:r>
-              <a:t>• Search via local_knowledge_search MCP tool</a:t>
-            </a:r>
-          </a:p>
-          <a:p>
-            <a:pPr>
-              <a:spcBef>
-                <a:spcPts val="800"/>
-              </a:spcBef>
-              <a:defRPr sz="1800">
-                <a:solidFill>
-                  <a:srgbClr val="F1F5F9"/>
-                </a:solidFill>
-              </a:defRPr>
-            </a:pPr>
-            <a:r>
-              <a:t>• Built-in dashboard surface</a:t>
+              <a:t>Autonomous task execution from specifications</a:t>
+            </a:r>
+          </a:p>
+          <a:p>
+            <a:pPr>
+              <a:spcBef>
+                <a:spcPts val="800"/>
+              </a:spcBef>
+              <a:defRPr sz="1800">
+                <a:solidFill>
+                  <a:srgbClr val="F1F5F9"/>
+                </a:solidFill>
+              </a:defRPr>
+            </a:pPr>
+          </a:p>
+          <a:p>
+            <a:pPr>
+              <a:spcBef>
+                <a:spcPts val="800"/>
+              </a:spcBef>
+              <a:defRPr sz="1800">
+                <a:solidFill>
+                  <a:srgbClr val="F1F5F9"/>
+                </a:solidFill>
+              </a:defRPr>
+            </a:pPr>
+            <a:r>
+              <a:t>Process:</a:t>
+            </a:r>
+          </a:p>
+          <a:p>
+            <a:pPr>
+              <a:spcBef>
+                <a:spcPts val="800"/>
+              </a:spcBef>
+              <a:defRPr sz="1800">
+                <a:solidFill>
+                  <a:srgbClr val="F1F5F9"/>
+                </a:solidFill>
+              </a:defRPr>
+            </a:pPr>
+            <a:r>
+              <a:t>1. Decompose spec into steps</a:t>
+            </a:r>
+          </a:p>
+          <a:p>
+            <a:pPr>
+              <a:spcBef>
+                <a:spcPts val="800"/>
+              </a:spcBef>
+              <a:defRPr sz="1800">
+                <a:solidFill>
+                  <a:srgbClr val="F1F5F9"/>
+                </a:solidFill>
+              </a:defRPr>
+            </a:pPr>
+            <a:r>
+              <a:t>2. Execute with checkpoints</a:t>
+            </a:r>
+          </a:p>
+          <a:p>
+            <a:pPr>
+              <a:spcBef>
+                <a:spcPts val="800"/>
+              </a:spcBef>
+              <a:defRPr sz="1800">
+                <a:solidFill>
+                  <a:srgbClr val="F1F5F9"/>
+                </a:solidFill>
+              </a:defRPr>
+            </a:pPr>
+            <a:r>
+              <a:t>3. Test step completion</a:t>
+            </a:r>
+          </a:p>
+          <a:p>
+            <a:pPr>
+              <a:spcBef>
+                <a:spcPts val="800"/>
+              </a:spcBef>
+              <a:defRPr sz="1800">
+                <a:solidFill>
+                  <a:srgbClr val="F1F5F9"/>
+                </a:solidFill>
+              </a:defRPr>
+            </a:pPr>
+            <a:r>
+              <a:t>4. Retry on failure</a:t>
+            </a:r>
+          </a:p>
+          <a:p>
+            <a:pPr>
+              <a:spcBef>
+                <a:spcPts val="800"/>
+              </a:spcBef>
+              <a:defRPr sz="1800">
+                <a:solidFill>
+                  <a:srgbClr val="F1F5F9"/>
+                </a:solidFill>
+              </a:defRPr>
+            </a:pPr>
+            <a:r>
+              <a:t>5. Resume from failure point</a:t>
+            </a:r>
+          </a:p>
+          <a:p>
+            <a:pPr>
+              <a:spcBef>
+                <a:spcPts val="800"/>
+              </a:spcBef>
+              <a:defRPr sz="1800">
+                <a:solidFill>
+                  <a:srgbClr val="F1F5F9"/>
+                </a:solidFill>
+              </a:defRPr>
+            </a:pPr>
+          </a:p>
+          <a:p>
+            <a:pPr>
+              <a:spcBef>
+                <a:spcPts val="800"/>
+              </a:spcBef>
+              <a:defRPr sz="1800">
+                <a:solidFill>
+                  <a:srgbClr val="F1F5F9"/>
+                </a:solidFill>
+              </a:defRPr>
+            </a:pPr>
+            <a:r>
+              <a:t>Dashboard shows live progress</a:t>
+            </a:r>
+          </a:p>
+          <a:p>
+            <a:pPr>
+              <a:spcBef>
+                <a:spcPts val="800"/>
+              </a:spcBef>
+              <a:defRPr sz="1800">
+                <a:solidFill>
+                  <a:srgbClr val="F1F5F9"/>
+                </a:solidFill>
+              </a:defRPr>
+            </a:pPr>
+            <a:r>
+              <a:t>Source: kiro.dev/docs/crew/features/task-runner/</a:t>
             </a:r>
           </a:p>
         </p:txBody>
@@ -5447,7 +5433,7 @@
     <p:bg>
       <p:bgPr>
         <a:solidFill>
-          <a:srgbClr val="1E293B"/>
+          <a:srgbClr val="0F172A"/>
         </a:solidFill>
         <a:effectLst/>
       </p:bgPr>
@@ -5467,8 +5453,8 @@
         </p:nvSpPr>
         <p:spPr>
           <a:xfrm>
-            <a:off x="914400" y="2743200"/>
-            <a:ext cx="7315200" cy="914400"/>
+            <a:off x="457200" y="365760"/>
+            <a:ext cx="6858000" cy="548640"/>
           </a:xfrm>
           <a:prstGeom prst="rect">
             <a:avLst/>
@@ -5481,15 +5467,220 @@
           </a:bodyPr>
           <a:lstStyle/>
           <a:p>
-            <a:pPr algn="ctr">
-              <a:defRPr sz="4400" b="1">
+            <a:pPr>
+              <a:defRPr sz="3200" b="1">
                 <a:solidFill>
                   <a:srgbClr val="2563EB"/>
                 </a:solidFill>
               </a:defRPr>
             </a:pPr>
             <a:r>
-              <a:t>Subscription &amp; Pricing</a:t>
+              <a:t>Artifacts &amp; Knowledge</a:t>
+            </a:r>
+          </a:p>
+        </p:txBody>
+      </p:sp>
+      <p:sp>
+        <p:nvSpPr>
+          <p:cNvPr id="3" name="TextBox 2"/>
+          <p:cNvSpPr txBox="1"/>
+          <p:nvPr/>
+        </p:nvSpPr>
+        <p:spPr>
+          <a:xfrm>
+            <a:off x="7498079" y="411480"/>
+            <a:ext cx="1371600" cy="365760"/>
+          </a:xfrm>
+          <a:prstGeom prst="rect">
+            <a:avLst/>
+          </a:prstGeom>
+          <a:noFill/>
+        </p:spPr>
+        <p:txBody>
+          <a:bodyPr wrap="none">
+            <a:spAutoFit/>
+          </a:bodyPr>
+          <a:lstStyle/>
+          <a:p>
+            <a:pPr>
+              <a:defRPr sz="1100" b="1">
+                <a:solidFill>
+                  <a:srgbClr val="10B981"/>
+                </a:solidFill>
+              </a:defRPr>
+            </a:pPr>
+            <a:r>
+              <a:t>✓ Verified</a:t>
+            </a:r>
+          </a:p>
+        </p:txBody>
+      </p:sp>
+      <p:sp>
+        <p:nvSpPr>
+          <p:cNvPr id="4" name="TextBox 3"/>
+          <p:cNvSpPr txBox="1"/>
+          <p:nvPr/>
+        </p:nvSpPr>
+        <p:spPr>
+          <a:xfrm>
+            <a:off x="640080" y="1188720"/>
+            <a:ext cx="7863840" cy="5212080"/>
+          </a:xfrm>
+          <a:prstGeom prst="rect">
+            <a:avLst/>
+          </a:prstGeom>
+          <a:noFill/>
+        </p:spPr>
+        <p:txBody>
+          <a:bodyPr wrap="square">
+            <a:spAutoFit/>
+          </a:bodyPr>
+          <a:lstStyle/>
+          <a:p>
+            <a:pPr>
+              <a:spcBef>
+                <a:spcPts val="800"/>
+              </a:spcBef>
+              <a:defRPr sz="1800">
+                <a:solidFill>
+                  <a:srgbClr val="F1F5F9"/>
+                </a:solidFill>
+              </a:defRPr>
+            </a:pPr>
+            <a:r>
+              <a:t>Artifacts: Persistent outputs with version history</a:t>
+            </a:r>
+          </a:p>
+          <a:p>
+            <a:pPr>
+              <a:spcBef>
+                <a:spcPts val="800"/>
+              </a:spcBef>
+              <a:defRPr sz="1800">
+                <a:solidFill>
+                  <a:srgbClr val="F1F5F9"/>
+                </a:solidFill>
+              </a:defRPr>
+            </a:pPr>
+            <a:r>
+              <a:t>• Kinds: widget, HTML, markdown, SVG, JSON, text</a:t>
+            </a:r>
+          </a:p>
+          <a:p>
+            <a:pPr>
+              <a:spcBef>
+                <a:spcPts val="800"/>
+              </a:spcBef>
+              <a:defRPr sz="1800">
+                <a:solidFill>
+                  <a:srgbClr val="F1F5F9"/>
+                </a:solidFill>
+              </a:defRPr>
+            </a:pPr>
+            <a:r>
+              <a:t>• Live previews in dashboard</a:t>
+            </a:r>
+          </a:p>
+          <a:p>
+            <a:pPr>
+              <a:spcBef>
+                <a:spcPts val="800"/>
+              </a:spcBef>
+              <a:defRPr sz="1800">
+                <a:solidFill>
+                  <a:srgbClr val="F1F5F9"/>
+                </a:solidFill>
+              </a:defRPr>
+            </a:pPr>
+            <a:r>
+              <a:t>• Optional: Deploy to AWS (your account)</a:t>
+            </a:r>
+          </a:p>
+          <a:p>
+            <a:pPr>
+              <a:spcBef>
+                <a:spcPts val="800"/>
+              </a:spcBef>
+              <a:defRPr sz="1800">
+                <a:solidFill>
+                  <a:srgbClr val="F1F5F9"/>
+                </a:solidFill>
+              </a:defRPr>
+            </a:pPr>
+          </a:p>
+          <a:p>
+            <a:pPr>
+              <a:spcBef>
+                <a:spcPts val="800"/>
+              </a:spcBef>
+              <a:defRPr sz="1800">
+                <a:solidFill>
+                  <a:srgbClr val="F1F5F9"/>
+                </a:solidFill>
+              </a:defRPr>
+            </a:pPr>
+            <a:r>
+              <a:t>Knowledge Library: Curated document store</a:t>
+            </a:r>
+          </a:p>
+          <a:p>
+            <a:pPr>
+              <a:spcBef>
+                <a:spcPts val="800"/>
+              </a:spcBef>
+              <a:defRPr sz="1800">
+                <a:solidFill>
+                  <a:srgbClr val="F1F5F9"/>
+                </a:solidFill>
+              </a:defRPr>
+            </a:pPr>
+            <a:r>
+              <a:t>• Sources: local files, folders, URLs</a:t>
+            </a:r>
+          </a:p>
+          <a:p>
+            <a:pPr>
+              <a:spcBef>
+                <a:spcPts val="800"/>
+              </a:spcBef>
+              <a:defRPr sz="1800">
+                <a:solidFill>
+                  <a:srgbClr val="F1F5F9"/>
+                </a:solidFill>
+              </a:defRPr>
+            </a:pPr>
+            <a:r>
+              <a:t>• Ingestion: chunking, embeddings</a:t>
+            </a:r>
+          </a:p>
+          <a:p>
+            <a:pPr>
+              <a:spcBef>
+                <a:spcPts val="800"/>
+              </a:spcBef>
+              <a:defRPr sz="1800">
+                <a:solidFill>
+                  <a:srgbClr val="F1F5F9"/>
+                </a:solidFill>
+              </a:defRPr>
+            </a:pPr>
+            <a:r>
+              <a:t>• Search via local_knowledge_search MCP tool</a:t>
+            </a:r>
+          </a:p>
+          <a:p>
+            <a:pPr>
+              <a:spcBef>
+                <a:spcPts val="800"/>
+              </a:spcBef>
+              <a:defRPr sz="1800">
+                <a:solidFill>
+                  <a:srgbClr val="F1F5F9"/>
+                </a:solidFill>
+              </a:defRPr>
+            </a:pPr>
+            <a:r>
+              <a:t>• Built-in dashboard surface</a:t>
             </a:r>
           </a:p>
         </p:txBody>
@@ -5702,7 +5893,7 @@
     <p:bg>
       <p:bgPr>
         <a:solidFill>
-          <a:srgbClr val="0F172A"/>
+          <a:srgbClr val="1E293B"/>
         </a:solidFill>
         <a:effectLst/>
       </p:bgPr>
@@ -5722,8 +5913,8 @@
         </p:nvSpPr>
         <p:spPr>
           <a:xfrm>
-            <a:off x="457200" y="365760"/>
-            <a:ext cx="6858000" cy="548640"/>
+            <a:off x="914400" y="2743200"/>
+            <a:ext cx="7315200" cy="914400"/>
           </a:xfrm>
           <a:prstGeom prst="rect">
             <a:avLst/>
@@ -5736,217 +5927,15 @@
           </a:bodyPr>
           <a:lstStyle/>
           <a:p>
-            <a:pPr>
-              <a:defRPr sz="3200" b="1">
+            <a:pPr algn="ctr">
+              <a:defRPr sz="4400" b="1">
                 <a:solidFill>
                   <a:srgbClr val="2563EB"/>
                 </a:solidFill>
               </a:defRPr>
             </a:pPr>
             <a:r>
-              <a:t>Credit System</a:t>
-            </a:r>
-          </a:p>
-        </p:txBody>
-      </p:sp>
-      <p:sp>
-        <p:nvSpPr>
-          <p:cNvPr id="3" name="TextBox 2"/>
-          <p:cNvSpPr txBox="1"/>
-          <p:nvPr/>
-        </p:nvSpPr>
-        <p:spPr>
-          <a:xfrm>
-            <a:off x="7498079" y="411480"/>
-            <a:ext cx="1371600" cy="365760"/>
-          </a:xfrm>
-          <a:prstGeom prst="rect">
-            <a:avLst/>
-          </a:prstGeom>
-          <a:noFill/>
-        </p:spPr>
-        <p:txBody>
-          <a:bodyPr wrap="none">
-            <a:spAutoFit/>
-          </a:bodyPr>
-          <a:lstStyle/>
-          <a:p>
-            <a:pPr>
-              <a:defRPr sz="1100" b="1">
-                <a:solidFill>
-                  <a:srgbClr val="10B981"/>
-                </a:solidFill>
-              </a:defRPr>
-            </a:pPr>
-            <a:r>
-              <a:t>✓ Verified</a:t>
-            </a:r>
-          </a:p>
-        </p:txBody>
-      </p:sp>
-      <p:sp>
-        <p:nvSpPr>
-          <p:cNvPr id="4" name="TextBox 3"/>
-          <p:cNvSpPr txBox="1"/>
-          <p:nvPr/>
-        </p:nvSpPr>
-        <p:spPr>
-          <a:xfrm>
-            <a:off x="640080" y="1188720"/>
-            <a:ext cx="7863840" cy="5212080"/>
-          </a:xfrm>
-          <a:prstGeom prst="rect">
-            <a:avLst/>
-          </a:prstGeom>
-          <a:noFill/>
-        </p:spPr>
-        <p:txBody>
-          <a:bodyPr wrap="square">
-            <a:spAutoFit/>
-          </a:bodyPr>
-          <a:lstStyle/>
-          <a:p>
-            <a:pPr>
-              <a:spcBef>
-                <a:spcPts val="800"/>
-              </a:spcBef>
-              <a:defRPr sz="1800">
-                <a:solidFill>
-                  <a:srgbClr val="F1F5F9"/>
-                </a:solidFill>
-              </a:defRPr>
-            </a:pPr>
-            <a:r>
-              <a:t>Single subscription for all Kiro surfaces (IDE/CLI/Web/Mobile/Crew)</a:t>
-            </a:r>
-          </a:p>
-          <a:p>
-            <a:pPr>
-              <a:spcBef>
-                <a:spcPts val="800"/>
-              </a:spcBef>
-              <a:defRPr sz="1800">
-                <a:solidFill>
-                  <a:srgbClr val="F1F5F9"/>
-                </a:solidFill>
-              </a:defRPr>
-            </a:pPr>
-          </a:p>
-          <a:p>
-            <a:pPr>
-              <a:spcBef>
-                <a:spcPts val="800"/>
-              </a:spcBef>
-              <a:defRPr sz="1800">
-                <a:solidFill>
-                  <a:srgbClr val="F1F5F9"/>
-                </a:solidFill>
-              </a:defRPr>
-            </a:pPr>
-            <a:r>
-              <a:t>Plans:</a:t>
-            </a:r>
-          </a:p>
-          <a:p>
-            <a:pPr>
-              <a:spcBef>
-                <a:spcPts val="800"/>
-              </a:spcBef>
-              <a:defRPr sz="1800">
-                <a:solidFill>
-                  <a:srgbClr val="F1F5F9"/>
-                </a:solidFill>
-              </a:defRPr>
-            </a:pPr>
-            <a:r>
-              <a:t>• $20/month - 1,000 credits</a:t>
-            </a:r>
-          </a:p>
-          <a:p>
-            <a:pPr>
-              <a:spcBef>
-                <a:spcPts val="800"/>
-              </a:spcBef>
-              <a:defRPr sz="1800">
-                <a:solidFill>
-                  <a:srgbClr val="F1F5F9"/>
-                </a:solidFill>
-              </a:defRPr>
-            </a:pPr>
-            <a:r>
-              <a:t>• $50/month - 2,500 credits</a:t>
-            </a:r>
-          </a:p>
-          <a:p>
-            <a:pPr>
-              <a:spcBef>
-                <a:spcPts val="800"/>
-              </a:spcBef>
-              <a:defRPr sz="1800">
-                <a:solidFill>
-                  <a:srgbClr val="F1F5F9"/>
-                </a:solidFill>
-              </a:defRPr>
-            </a:pPr>
-            <a:r>
-              <a:t>• $100/month - 5,000 credits</a:t>
-            </a:r>
-          </a:p>
-          <a:p>
-            <a:pPr>
-              <a:spcBef>
-                <a:spcPts val="800"/>
-              </a:spcBef>
-              <a:defRPr sz="1800">
-                <a:solidFill>
-                  <a:srgbClr val="F1F5F9"/>
-                </a:solidFill>
-              </a:defRPr>
-            </a:pPr>
-            <a:r>
-              <a:t>• $200/month - 10,000 credits</a:t>
-            </a:r>
-          </a:p>
-          <a:p>
-            <a:pPr>
-              <a:spcBef>
-                <a:spcPts val="800"/>
-              </a:spcBef>
-              <a:defRPr sz="1800">
-                <a:solidFill>
-                  <a:srgbClr val="F1F5F9"/>
-                </a:solidFill>
-              </a:defRPr>
-            </a:pPr>
-            <a:r>
-              <a:t>• Add-on: $0.04/credit</a:t>
-            </a:r>
-          </a:p>
-          <a:p>
-            <a:pPr>
-              <a:spcBef>
-                <a:spcPts val="800"/>
-              </a:spcBef>
-              <a:defRPr sz="1800">
-                <a:solidFill>
-                  <a:srgbClr val="F1F5F9"/>
-                </a:solidFill>
-              </a:defRPr>
-            </a:pPr>
-          </a:p>
-          <a:p>
-            <a:pPr>
-              <a:spcBef>
-                <a:spcPts val="800"/>
-              </a:spcBef>
-              <a:defRPr sz="1800">
-                <a:solidFill>
-                  <a:srgbClr val="F1F5F9"/>
-                </a:solidFill>
-              </a:defRPr>
-            </a:pPr>
-            <a:r>
-              <a:t>Model multipliers: Opus 5 (2.2x), Sonnet family (~1.3x), open-weight (0.05x-0.5x)</a:t>
+              <a:t>Subscription &amp; Pricing</a:t>
             </a:r>
           </a:p>
         </p:txBody>
@@ -6007,7 +5996,7 @@
               </a:defRPr>
             </a:pPr>
             <a:r>
-              <a:t>Cost Considerations</a:t>
+              <a:t>Credit System</a:t>
             </a:r>
           </a:p>
         </p:txBody>
@@ -6080,151 +6069,136 @@
               </a:defRPr>
             </a:pPr>
             <a:r>
-              <a:t>Verified from official docs:</a:t>
-            </a:r>
-          </a:p>
-          <a:p>
-            <a:pPr>
-              <a:spcBef>
-                <a:spcPts val="800"/>
-              </a:spcBef>
-              <a:defRPr sz="1800">
-                <a:solidFill>
-                  <a:srgbClr val="F1F5F9"/>
-                </a:solidFill>
-              </a:defRPr>
-            </a:pPr>
-            <a:r>
-              <a:t>• Credits scale with model choice and task complexity</a:t>
-            </a:r>
-          </a:p>
-          <a:p>
-            <a:pPr>
-              <a:spcBef>
-                <a:spcPts val="800"/>
-              </a:spcBef>
-              <a:defRPr sz="1800">
-                <a:solidFill>
-                  <a:srgbClr val="F1F5F9"/>
-                </a:solidFill>
-              </a:defRPr>
-            </a:pPr>
-            <a:r>
-              <a:t>• Model multipliers: Opus 5 2.2x, Sonnet family ~1.3x,</a:t>
-            </a:r>
-          </a:p>
-          <a:p>
-            <a:pPr>
-              <a:spcBef>
-                <a:spcPts val="800"/>
-              </a:spcBef>
-              <a:defRPr sz="1800">
-                <a:solidFill>
-                  <a:srgbClr val="F1F5F9"/>
-                </a:solidFill>
-              </a:defRPr>
-            </a:pPr>
-            <a:r>
-              <a:t>  open-weight 0.05x-0.5x</a:t>
-            </a:r>
-          </a:p>
-          <a:p>
-            <a:pPr>
-              <a:spcBef>
-                <a:spcPts val="800"/>
-              </a:spcBef>
-              <a:defRPr sz="1800">
-                <a:solidFill>
-                  <a:srgbClr val="F1F5F9"/>
-                </a:solidFill>
-              </a:defRPr>
-            </a:pPr>
-            <a:r>
-              <a:t>• Add-on credits $0.04 each; metered to 0.01 precision</a:t>
-            </a:r>
-          </a:p>
-          <a:p>
-            <a:pPr>
-              <a:spcBef>
-                <a:spcPts val="800"/>
-              </a:spcBef>
-              <a:defRPr sz="1800">
-                <a:solidFill>
-                  <a:srgbClr val="F1F5F9"/>
-                </a:solidFill>
-              </a:defRPr>
-            </a:pPr>
-          </a:p>
-          <a:p>
-            <a:pPr>
-              <a:spcBef>
-                <a:spcPts val="800"/>
-              </a:spcBef>
-              <a:defRPr sz="1800">
-                <a:solidFill>
-                  <a:srgbClr val="F1F5F9"/>
-                </a:solidFill>
-              </a:defRPr>
-            </a:pPr>
-            <a:r>
-              <a:t>Not published by Kiro (measure in usage dashboard):</a:t>
-            </a:r>
-          </a:p>
-          <a:p>
-            <a:pPr>
-              <a:spcBef>
-                <a:spcPts val="800"/>
-              </a:spcBef>
-              <a:defRPr sz="1800">
-                <a:solidFill>
-                  <a:srgbClr val="F1F5F9"/>
-                </a:solidFill>
-              </a:defRPr>
-            </a:pPr>
-            <a:r>
-              <a:t>• Per-subagent, per-cron, per-task credit consumption</a:t>
-            </a:r>
-          </a:p>
-          <a:p>
-            <a:pPr>
-              <a:spcBef>
-                <a:spcPts val="800"/>
-              </a:spcBef>
-              <a:defRPr sz="1800">
-                <a:solidFill>
-                  <a:srgbClr val="F1F5F9"/>
-                </a:solidFill>
-              </a:defRPr>
-            </a:pPr>
-          </a:p>
-          <a:p>
-            <a:pPr>
-              <a:spcBef>
-                <a:spcPts val="800"/>
-              </a:spcBef>
-              <a:defRPr sz="1800">
-                <a:solidFill>
-                  <a:srgbClr val="F1F5F9"/>
-                </a:solidFill>
-              </a:defRPr>
-            </a:pPr>
-            <a:r>
-              <a:t>The subscription usage dashboard is the authoritative</a:t>
-            </a:r>
-          </a:p>
-          <a:p>
-            <a:pPr>
-              <a:spcBef>
-                <a:spcPts val="800"/>
-              </a:spcBef>
-              <a:defRPr sz="1800">
-                <a:solidFill>
-                  <a:srgbClr val="F1F5F9"/>
-                </a:solidFill>
-              </a:defRPr>
-            </a:pPr>
-            <a:r>
-              <a:t>source for your own workload's cost.</a:t>
+              <a:t>Single subscription for all Kiro surfaces (IDE/CLI/Web/Mobile/Crew)</a:t>
+            </a:r>
+          </a:p>
+          <a:p>
+            <a:pPr>
+              <a:spcBef>
+                <a:spcPts val="800"/>
+              </a:spcBef>
+              <a:defRPr sz="1800">
+                <a:solidFill>
+                  <a:srgbClr val="F1F5F9"/>
+                </a:solidFill>
+              </a:defRPr>
+            </a:pPr>
+          </a:p>
+          <a:p>
+            <a:pPr>
+              <a:spcBef>
+                <a:spcPts val="800"/>
+              </a:spcBef>
+              <a:defRPr sz="1800">
+                <a:solidFill>
+                  <a:srgbClr val="F1F5F9"/>
+                </a:solidFill>
+              </a:defRPr>
+            </a:pPr>
+            <a:r>
+              <a:t>Plans:</a:t>
+            </a:r>
+          </a:p>
+          <a:p>
+            <a:pPr>
+              <a:spcBef>
+                <a:spcPts val="800"/>
+              </a:spcBef>
+              <a:defRPr sz="1800">
+                <a:solidFill>
+                  <a:srgbClr val="F1F5F9"/>
+                </a:solidFill>
+              </a:defRPr>
+            </a:pPr>
+            <a:r>
+              <a:t>• $20/month - 1,000 credits</a:t>
+            </a:r>
+          </a:p>
+          <a:p>
+            <a:pPr>
+              <a:spcBef>
+                <a:spcPts val="800"/>
+              </a:spcBef>
+              <a:defRPr sz="1800">
+                <a:solidFill>
+                  <a:srgbClr val="F1F5F9"/>
+                </a:solidFill>
+              </a:defRPr>
+            </a:pPr>
+            <a:r>
+              <a:t>• $50/month - 2,500 credits</a:t>
+            </a:r>
+          </a:p>
+          <a:p>
+            <a:pPr>
+              <a:spcBef>
+                <a:spcPts val="800"/>
+              </a:spcBef>
+              <a:defRPr sz="1800">
+                <a:solidFill>
+                  <a:srgbClr val="F1F5F9"/>
+                </a:solidFill>
+              </a:defRPr>
+            </a:pPr>
+            <a:r>
+              <a:t>• $100/month - 5,000 credits</a:t>
+            </a:r>
+          </a:p>
+          <a:p>
+            <a:pPr>
+              <a:spcBef>
+                <a:spcPts val="800"/>
+              </a:spcBef>
+              <a:defRPr sz="1800">
+                <a:solidFill>
+                  <a:srgbClr val="F1F5F9"/>
+                </a:solidFill>
+              </a:defRPr>
+            </a:pPr>
+            <a:r>
+              <a:t>• $200/month - 10,000 credits</a:t>
+            </a:r>
+          </a:p>
+          <a:p>
+            <a:pPr>
+              <a:spcBef>
+                <a:spcPts val="800"/>
+              </a:spcBef>
+              <a:defRPr sz="1800">
+                <a:solidFill>
+                  <a:srgbClr val="F1F5F9"/>
+                </a:solidFill>
+              </a:defRPr>
+            </a:pPr>
+            <a:r>
+              <a:t>• Add-on: $0.04/credit</a:t>
+            </a:r>
+          </a:p>
+          <a:p>
+            <a:pPr>
+              <a:spcBef>
+                <a:spcPts val="800"/>
+              </a:spcBef>
+              <a:defRPr sz="1800">
+                <a:solidFill>
+                  <a:srgbClr val="F1F5F9"/>
+                </a:solidFill>
+              </a:defRPr>
+            </a:pPr>
+          </a:p>
+          <a:p>
+            <a:pPr>
+              <a:spcBef>
+                <a:spcPts val="800"/>
+              </a:spcBef>
+              <a:defRPr sz="1800">
+                <a:solidFill>
+                  <a:srgbClr val="F1F5F9"/>
+                </a:solidFill>
+              </a:defRPr>
+            </a:pPr>
+            <a:r>
+              <a:t>Model multipliers: Opus 5 (2.2x), Sonnet family (~1.3x), open-weight (0.05x-0.5x)</a:t>
             </a:r>
           </a:p>
         </p:txBody>
@@ -6238,6 +6212,284 @@
 </file>
 
 <file path=ppt/slides/slide22.xml><?xml version="1.0" encoding="utf-8"?>
+<p:sld xmlns:a="http://schemas.openxmlformats.org/drawingml/2006/main" xmlns:p="http://schemas.openxmlformats.org/presentationml/2006/main" xmlns:r="http://schemas.openxmlformats.org/officeDocument/2006/relationships">
+  <p:cSld>
+    <p:bg>
+      <p:bgPr>
+        <a:solidFill>
+          <a:srgbClr val="0F172A"/>
+        </a:solidFill>
+        <a:effectLst/>
+      </p:bgPr>
+    </p:bg>
+    <p:spTree>
+      <p:nvGrpSpPr>
+        <p:cNvPr id="1" name=""/>
+        <p:cNvGrpSpPr/>
+        <p:nvPr/>
+      </p:nvGrpSpPr>
+      <p:grpSpPr/>
+      <p:sp>
+        <p:nvSpPr>
+          <p:cNvPr id="2" name="TextBox 1"/>
+          <p:cNvSpPr txBox="1"/>
+          <p:nvPr/>
+        </p:nvSpPr>
+        <p:spPr>
+          <a:xfrm>
+            <a:off x="457200" y="365760"/>
+            <a:ext cx="6858000" cy="548640"/>
+          </a:xfrm>
+          <a:prstGeom prst="rect">
+            <a:avLst/>
+          </a:prstGeom>
+          <a:noFill/>
+        </p:spPr>
+        <p:txBody>
+          <a:bodyPr wrap="none">
+            <a:spAutoFit/>
+          </a:bodyPr>
+          <a:lstStyle/>
+          <a:p>
+            <a:pPr>
+              <a:defRPr sz="3200" b="1">
+                <a:solidFill>
+                  <a:srgbClr val="2563EB"/>
+                </a:solidFill>
+              </a:defRPr>
+            </a:pPr>
+            <a:r>
+              <a:t>Cost Considerations</a:t>
+            </a:r>
+          </a:p>
+        </p:txBody>
+      </p:sp>
+      <p:sp>
+        <p:nvSpPr>
+          <p:cNvPr id="3" name="TextBox 2"/>
+          <p:cNvSpPr txBox="1"/>
+          <p:nvPr/>
+        </p:nvSpPr>
+        <p:spPr>
+          <a:xfrm>
+            <a:off x="7498079" y="411480"/>
+            <a:ext cx="1371600" cy="365760"/>
+          </a:xfrm>
+          <a:prstGeom prst="rect">
+            <a:avLst/>
+          </a:prstGeom>
+          <a:noFill/>
+        </p:spPr>
+        <p:txBody>
+          <a:bodyPr wrap="none">
+            <a:spAutoFit/>
+          </a:bodyPr>
+          <a:lstStyle/>
+          <a:p>
+            <a:pPr>
+              <a:defRPr sz="1100" b="1">
+                <a:solidFill>
+                  <a:srgbClr val="10B981"/>
+                </a:solidFill>
+              </a:defRPr>
+            </a:pPr>
+            <a:r>
+              <a:t>✓ Verified</a:t>
+            </a:r>
+          </a:p>
+        </p:txBody>
+      </p:sp>
+      <p:sp>
+        <p:nvSpPr>
+          <p:cNvPr id="4" name="TextBox 3"/>
+          <p:cNvSpPr txBox="1"/>
+          <p:nvPr/>
+        </p:nvSpPr>
+        <p:spPr>
+          <a:xfrm>
+            <a:off x="640080" y="1188720"/>
+            <a:ext cx="7863840" cy="5212080"/>
+          </a:xfrm>
+          <a:prstGeom prst="rect">
+            <a:avLst/>
+          </a:prstGeom>
+          <a:noFill/>
+        </p:spPr>
+        <p:txBody>
+          <a:bodyPr wrap="square">
+            <a:spAutoFit/>
+          </a:bodyPr>
+          <a:lstStyle/>
+          <a:p>
+            <a:pPr>
+              <a:spcBef>
+                <a:spcPts val="800"/>
+              </a:spcBef>
+              <a:defRPr sz="1800">
+                <a:solidFill>
+                  <a:srgbClr val="F1F5F9"/>
+                </a:solidFill>
+              </a:defRPr>
+            </a:pPr>
+            <a:r>
+              <a:t>Verified from official docs:</a:t>
+            </a:r>
+          </a:p>
+          <a:p>
+            <a:pPr>
+              <a:spcBef>
+                <a:spcPts val="800"/>
+              </a:spcBef>
+              <a:defRPr sz="1800">
+                <a:solidFill>
+                  <a:srgbClr val="F1F5F9"/>
+                </a:solidFill>
+              </a:defRPr>
+            </a:pPr>
+            <a:r>
+              <a:t>• Credits scale with model choice and task complexity</a:t>
+            </a:r>
+          </a:p>
+          <a:p>
+            <a:pPr>
+              <a:spcBef>
+                <a:spcPts val="800"/>
+              </a:spcBef>
+              <a:defRPr sz="1800">
+                <a:solidFill>
+                  <a:srgbClr val="F1F5F9"/>
+                </a:solidFill>
+              </a:defRPr>
+            </a:pPr>
+            <a:r>
+              <a:t>• Model multipliers: Opus 5 2.2x, Sonnet family ~1.3x,</a:t>
+            </a:r>
+          </a:p>
+          <a:p>
+            <a:pPr>
+              <a:spcBef>
+                <a:spcPts val="800"/>
+              </a:spcBef>
+              <a:defRPr sz="1800">
+                <a:solidFill>
+                  <a:srgbClr val="F1F5F9"/>
+                </a:solidFill>
+              </a:defRPr>
+            </a:pPr>
+            <a:r>
+              <a:t>  open-weight 0.05x-0.5x</a:t>
+            </a:r>
+          </a:p>
+          <a:p>
+            <a:pPr>
+              <a:spcBef>
+                <a:spcPts val="800"/>
+              </a:spcBef>
+              <a:defRPr sz="1800">
+                <a:solidFill>
+                  <a:srgbClr val="F1F5F9"/>
+                </a:solidFill>
+              </a:defRPr>
+            </a:pPr>
+            <a:r>
+              <a:t>• Add-on credits $0.04 each; metered to 0.01 precision</a:t>
+            </a:r>
+          </a:p>
+          <a:p>
+            <a:pPr>
+              <a:spcBef>
+                <a:spcPts val="800"/>
+              </a:spcBef>
+              <a:defRPr sz="1800">
+                <a:solidFill>
+                  <a:srgbClr val="F1F5F9"/>
+                </a:solidFill>
+              </a:defRPr>
+            </a:pPr>
+          </a:p>
+          <a:p>
+            <a:pPr>
+              <a:spcBef>
+                <a:spcPts val="800"/>
+              </a:spcBef>
+              <a:defRPr sz="1800">
+                <a:solidFill>
+                  <a:srgbClr val="F1F5F9"/>
+                </a:solidFill>
+              </a:defRPr>
+            </a:pPr>
+            <a:r>
+              <a:t>Not published by Kiro (measure in usage dashboard):</a:t>
+            </a:r>
+          </a:p>
+          <a:p>
+            <a:pPr>
+              <a:spcBef>
+                <a:spcPts val="800"/>
+              </a:spcBef>
+              <a:defRPr sz="1800">
+                <a:solidFill>
+                  <a:srgbClr val="F1F5F9"/>
+                </a:solidFill>
+              </a:defRPr>
+            </a:pPr>
+            <a:r>
+              <a:t>• Per-subagent, per-cron, per-task credit consumption</a:t>
+            </a:r>
+          </a:p>
+          <a:p>
+            <a:pPr>
+              <a:spcBef>
+                <a:spcPts val="800"/>
+              </a:spcBef>
+              <a:defRPr sz="1800">
+                <a:solidFill>
+                  <a:srgbClr val="F1F5F9"/>
+                </a:solidFill>
+              </a:defRPr>
+            </a:pPr>
+          </a:p>
+          <a:p>
+            <a:pPr>
+              <a:spcBef>
+                <a:spcPts val="800"/>
+              </a:spcBef>
+              <a:defRPr sz="1800">
+                <a:solidFill>
+                  <a:srgbClr val="F1F5F9"/>
+                </a:solidFill>
+              </a:defRPr>
+            </a:pPr>
+            <a:r>
+              <a:t>The subscription usage dashboard is the authoritative</a:t>
+            </a:r>
+          </a:p>
+          <a:p>
+            <a:pPr>
+              <a:spcBef>
+                <a:spcPts val="800"/>
+              </a:spcBef>
+              <a:defRPr sz="1800">
+                <a:solidFill>
+                  <a:srgbClr val="F1F5F9"/>
+                </a:solidFill>
+              </a:defRPr>
+            </a:pPr>
+            <a:r>
+              <a:t>source for your own workload's cost.</a:t>
+            </a:r>
+          </a:p>
+        </p:txBody>
+      </p:sp>
+    </p:spTree>
+  </p:cSld>
+  <p:clrMapOvr>
+    <a:masterClrMapping/>
+  </p:clrMapOvr>
+</p:sld>
+</file>
+
+<file path=ppt/slides/slide23.xml><?xml version="1.0" encoding="utf-8"?>
 <p:sld xmlns:a="http://schemas.openxmlformats.org/drawingml/2006/main" xmlns:p="http://schemas.openxmlformats.org/presentationml/2006/main" xmlns:r="http://schemas.openxmlformats.org/officeDocument/2006/relationships">
   <p:cSld>
     <p:bg>
@@ -6321,257 +6573,6 @@
             </a:pPr>
             <a:r>
               <a:t>Full coverage of docs/crew/</a:t>
-            </a:r>
-          </a:p>
-        </p:txBody>
-      </p:sp>
-    </p:spTree>
-  </p:cSld>
-  <p:clrMapOvr>
-    <a:masterClrMapping/>
-  </p:clrMapOvr>
-</p:sld>
-</file>
-
-<file path=ppt/slides/slide23.xml><?xml version="1.0" encoding="utf-8"?>
-<p:sld xmlns:a="http://schemas.openxmlformats.org/drawingml/2006/main" xmlns:p="http://schemas.openxmlformats.org/presentationml/2006/main" xmlns:r="http://schemas.openxmlformats.org/officeDocument/2006/relationships">
-  <p:cSld>
-    <p:bg>
-      <p:bgPr>
-        <a:solidFill>
-          <a:srgbClr val="0F172A"/>
-        </a:solidFill>
-        <a:effectLst/>
-      </p:bgPr>
-    </p:bg>
-    <p:spTree>
-      <p:nvGrpSpPr>
-        <p:cNvPr id="1" name=""/>
-        <p:cNvGrpSpPr/>
-        <p:nvPr/>
-      </p:nvGrpSpPr>
-      <p:grpSpPr/>
-      <p:sp>
-        <p:nvSpPr>
-          <p:cNvPr id="2" name="TextBox 1"/>
-          <p:cNvSpPr txBox="1"/>
-          <p:nvPr/>
-        </p:nvSpPr>
-        <p:spPr>
-          <a:xfrm>
-            <a:off x="457200" y="365760"/>
-            <a:ext cx="6858000" cy="548640"/>
-          </a:xfrm>
-          <a:prstGeom prst="rect">
-            <a:avLst/>
-          </a:prstGeom>
-          <a:noFill/>
-        </p:spPr>
-        <p:txBody>
-          <a:bodyPr wrap="none">
-            <a:spAutoFit/>
-          </a:bodyPr>
-          <a:lstStyle/>
-          <a:p>
-            <a:pPr>
-              <a:defRPr sz="3200" b="1">
-                <a:solidFill>
-                  <a:srgbClr val="2563EB"/>
-                </a:solidFill>
-              </a:defRPr>
-            </a:pPr>
-            <a:r>
-              <a:t>Security: 8-Layer Defense-in-Depth</a:t>
-            </a:r>
-          </a:p>
-        </p:txBody>
-      </p:sp>
-      <p:sp>
-        <p:nvSpPr>
-          <p:cNvPr id="3" name="TextBox 2"/>
-          <p:cNvSpPr txBox="1"/>
-          <p:nvPr/>
-        </p:nvSpPr>
-        <p:spPr>
-          <a:xfrm>
-            <a:off x="7498079" y="411480"/>
-            <a:ext cx="1371600" cy="365760"/>
-          </a:xfrm>
-          <a:prstGeom prst="rect">
-            <a:avLst/>
-          </a:prstGeom>
-          <a:noFill/>
-        </p:spPr>
-        <p:txBody>
-          <a:bodyPr wrap="none">
-            <a:spAutoFit/>
-          </a:bodyPr>
-          <a:lstStyle/>
-          <a:p>
-            <a:pPr>
-              <a:defRPr sz="1100" b="1">
-                <a:solidFill>
-                  <a:srgbClr val="10B981"/>
-                </a:solidFill>
-              </a:defRPr>
-            </a:pPr>
-            <a:r>
-              <a:t>✓ Verified</a:t>
-            </a:r>
-          </a:p>
-        </p:txBody>
-      </p:sp>
-      <p:sp>
-        <p:nvSpPr>
-          <p:cNvPr id="4" name="TextBox 3"/>
-          <p:cNvSpPr txBox="1"/>
-          <p:nvPr/>
-        </p:nvSpPr>
-        <p:spPr>
-          <a:xfrm>
-            <a:off x="640080" y="1188720"/>
-            <a:ext cx="7863840" cy="5212080"/>
-          </a:xfrm>
-          <a:prstGeom prst="rect">
-            <a:avLst/>
-          </a:prstGeom>
-          <a:noFill/>
-        </p:spPr>
-        <p:txBody>
-          <a:bodyPr wrap="square">
-            <a:spAutoFit/>
-          </a:bodyPr>
-          <a:lstStyle/>
-          <a:p>
-            <a:pPr>
-              <a:spcBef>
-                <a:spcPts val="800"/>
-              </a:spcBef>
-              <a:defRPr sz="1800">
-                <a:solidFill>
-                  <a:srgbClr val="F1F5F9"/>
-                </a:solidFill>
-              </a:defRPr>
-            </a:pPr>
-            <a:r>
-              <a:t>Every tool call passes independent layers (runtime-enforced):</a:t>
-            </a:r>
-          </a:p>
-          <a:p>
-            <a:pPr>
-              <a:spcBef>
-                <a:spcPts val="800"/>
-              </a:spcBef>
-              <a:defRPr sz="1800">
-                <a:solidFill>
-                  <a:srgbClr val="F1F5F9"/>
-                </a:solidFill>
-              </a:defRPr>
-            </a:pPr>
-            <a:r>
-              <a:t>1 Owner lock  2 Denied commands (137)  3 Governance ceiling</a:t>
-            </a:r>
-          </a:p>
-          <a:p>
-            <a:pPr>
-              <a:spcBef>
-                <a:spcPts val="800"/>
-              </a:spcBef>
-              <a:defRPr sz="1800">
-                <a:solidFill>
-                  <a:srgbClr val="F1F5F9"/>
-                </a:solidFill>
-              </a:defRPr>
-            </a:pPr>
-            <a:r>
-              <a:t>4 Sensitive-path block  5 Tool approval  6 Input validation</a:t>
-            </a:r>
-          </a:p>
-          <a:p>
-            <a:pPr>
-              <a:spcBef>
-                <a:spcPts val="800"/>
-              </a:spcBef>
-              <a:defRPr sz="1800">
-                <a:solidFill>
-                  <a:srgbClr val="F1F5F9"/>
-                </a:solidFill>
-              </a:defRPr>
-            </a:pPr>
-            <a:r>
-              <a:t>7 OS sandbox  8 Output redaction  (+ SEL audit, cross-cutting)</a:t>
-            </a:r>
-          </a:p>
-          <a:p>
-            <a:pPr>
-              <a:spcBef>
-                <a:spcPts val="800"/>
-              </a:spcBef>
-              <a:defRPr sz="1800">
-                <a:solidFill>
-                  <a:srgbClr val="F1F5F9"/>
-                </a:solidFill>
-              </a:defRPr>
-            </a:pPr>
-          </a:p>
-          <a:p>
-            <a:pPr>
-              <a:spcBef>
-                <a:spcPts val="800"/>
-              </a:spcBef>
-              <a:defRPr sz="1800">
-                <a:solidFill>
-                  <a:srgbClr val="F1F5F9"/>
-                </a:solidFill>
-              </a:defRPr>
-            </a:pPr>
-            <a:r>
-              <a:t>Sandbox: auto (default) / strict / off; no OS layer on Windows</a:t>
-            </a:r>
-          </a:p>
-          <a:p>
-            <a:pPr>
-              <a:spcBef>
-                <a:spcPts val="800"/>
-              </a:spcBef>
-              <a:defRPr sz="1800">
-                <a:solidFill>
-                  <a:srgbClr val="F1F5F9"/>
-                </a:solidFill>
-              </a:defRPr>
-            </a:pPr>
-            <a:r>
-              <a:t>Approval: Interactive / Trust command / Trust tool / Autopilot</a:t>
-            </a:r>
-          </a:p>
-          <a:p>
-            <a:pPr>
-              <a:spcBef>
-                <a:spcPts val="800"/>
-              </a:spcBef>
-              <a:defRPr sz="1800">
-                <a:solidFill>
-                  <a:srgbClr val="F1F5F9"/>
-                </a:solidFill>
-              </a:defRPr>
-            </a:pPr>
-            <a:r>
-              <a:t>Denied cmds enforced at Crew's gate, not agent config</a:t>
-            </a:r>
-          </a:p>
-          <a:p>
-            <a:pPr>
-              <a:spcBef>
-                <a:spcPts val="800"/>
-              </a:spcBef>
-              <a:defRPr sz="1800">
-                <a:solidFill>
-                  <a:srgbClr val="F1F5F9"/>
-                </a:solidFill>
-              </a:defRPr>
-            </a:pPr>
-            <a:r>
-              <a:t>kirocrew policy show|validate|explain; security events|audit|verify</a:t>
             </a:r>
           </a:p>
         </p:txBody>
@@ -6632,7 +6633,7 @@
               </a:defRPr>
             </a:pPr>
             <a:r>
-              <a:t>Running 24/7</a:t>
+              <a:t>Security: 8-Layer Defense-in-Depth</a:t>
             </a:r>
           </a:p>
         </p:txBody>
@@ -6705,112 +6706,124 @@
               </a:defRPr>
             </a:pPr>
             <a:r>
-              <a:t>Local service: systemd/launchd; runs as user, sudo once for unit</a:t>
-            </a:r>
-          </a:p>
-          <a:p>
-            <a:pPr>
-              <a:spcBef>
-                <a:spcPts val="800"/>
-              </a:spcBef>
-              <a:defRPr sz="1800">
-                <a:solidFill>
-                  <a:srgbClr val="F1F5F9"/>
-                </a:solidFill>
-              </a:defRPr>
-            </a:pPr>
-            <a:r>
-              <a:t>  kirocrew service install | logs -f | restart</a:t>
-            </a:r>
-          </a:p>
-          <a:p>
-            <a:pPr>
-              <a:spcBef>
-                <a:spcPts val="800"/>
-              </a:spcBef>
-              <a:defRPr sz="1800">
-                <a:solidFill>
-                  <a:srgbClr val="F1F5F9"/>
-                </a:solidFill>
-              </a:defRPr>
-            </a:pPr>
-            <a:r>
-              <a:t>Docker: multi-arch GHCR; kiro-cli login + kirocrew token; SLSA</a:t>
-            </a:r>
-          </a:p>
-          <a:p>
-            <a:pPr>
-              <a:spcBef>
-                <a:spcPts val="800"/>
-              </a:spcBef>
-              <a:defRPr sz="1800">
-                <a:solidFill>
-                  <a:srgbClr val="F1F5F9"/>
-                </a:solidFill>
-              </a:defRPr>
-            </a:pPr>
-            <a:r>
-              <a:t>  docker run -d -p 127.0.0.1:5476:5476 -v kirocrew-home:...</a:t>
-            </a:r>
-          </a:p>
-          <a:p>
-            <a:pPr>
-              <a:spcBef>
-                <a:spcPts val="800"/>
-              </a:spcBef>
-              <a:defRPr sz="1800">
-                <a:solidFill>
-                  <a:srgbClr val="F1F5F9"/>
-                </a:solidFill>
-              </a:defRPr>
-            </a:pPr>
-            <a:r>
-              <a:t>Remote host: modern Linux, ~10GB RAM, Node 20+ (slack-mcp)</a:t>
-            </a:r>
-          </a:p>
-          <a:p>
-            <a:pPr>
-              <a:spcBef>
-                <a:spcPts val="800"/>
-              </a:spcBef>
-              <a:defRPr sz="1800">
-                <a:solidFill>
-                  <a:srgbClr val="F1F5F9"/>
-                </a:solidFill>
-              </a:defRPr>
-            </a:pPr>
-            <a:r>
-              <a:t>  ssh -L 5476:localhost:5476 user@host</a:t>
-            </a:r>
-          </a:p>
-          <a:p>
-            <a:pPr>
-              <a:spcBef>
-                <a:spcPts val="800"/>
-              </a:spcBef>
-              <a:defRPr sz="1800">
-                <a:solidFill>
-                  <a:srgbClr val="F1F5F9"/>
-                </a:solidFill>
-              </a:defRPr>
-            </a:pPr>
-            <a:r>
-              <a:t>Sync state: memory + SQLite incl WAL; NOT .env/.local_secret</a:t>
-            </a:r>
-          </a:p>
-          <a:p>
-            <a:pPr>
-              <a:spcBef>
-                <a:spcPts val="800"/>
-              </a:spcBef>
-              <a:defRPr sz="1800">
-                <a:solidFill>
-                  <a:srgbClr val="F1F5F9"/>
-                </a:solidFill>
-              </a:defRPr>
-            </a:pPr>
-            <a:r>
-              <a:t>Mobile: Cloudflare/ngrok/Tailscale + dashboard.url; token 1h/20h</a:t>
+              <a:t>Every tool call passes independent layers (runtime-enforced):</a:t>
+            </a:r>
+          </a:p>
+          <a:p>
+            <a:pPr>
+              <a:spcBef>
+                <a:spcPts val="800"/>
+              </a:spcBef>
+              <a:defRPr sz="1800">
+                <a:solidFill>
+                  <a:srgbClr val="F1F5F9"/>
+                </a:solidFill>
+              </a:defRPr>
+            </a:pPr>
+            <a:r>
+              <a:t>1 Owner lock  2 Denied commands (137)  3 Governance ceiling</a:t>
+            </a:r>
+          </a:p>
+          <a:p>
+            <a:pPr>
+              <a:spcBef>
+                <a:spcPts val="800"/>
+              </a:spcBef>
+              <a:defRPr sz="1800">
+                <a:solidFill>
+                  <a:srgbClr val="F1F5F9"/>
+                </a:solidFill>
+              </a:defRPr>
+            </a:pPr>
+            <a:r>
+              <a:t>4 Sensitive-path block  5 Tool approval  6 Input validation</a:t>
+            </a:r>
+          </a:p>
+          <a:p>
+            <a:pPr>
+              <a:spcBef>
+                <a:spcPts val="800"/>
+              </a:spcBef>
+              <a:defRPr sz="1800">
+                <a:solidFill>
+                  <a:srgbClr val="F1F5F9"/>
+                </a:solidFill>
+              </a:defRPr>
+            </a:pPr>
+            <a:r>
+              <a:t>7 OS sandbox  8 Output redaction  (+ SEL audit, cross-cutting)</a:t>
+            </a:r>
+          </a:p>
+          <a:p>
+            <a:pPr>
+              <a:spcBef>
+                <a:spcPts val="800"/>
+              </a:spcBef>
+              <a:defRPr sz="1800">
+                <a:solidFill>
+                  <a:srgbClr val="F1F5F9"/>
+                </a:solidFill>
+              </a:defRPr>
+            </a:pPr>
+          </a:p>
+          <a:p>
+            <a:pPr>
+              <a:spcBef>
+                <a:spcPts val="800"/>
+              </a:spcBef>
+              <a:defRPr sz="1800">
+                <a:solidFill>
+                  <a:srgbClr val="F1F5F9"/>
+                </a:solidFill>
+              </a:defRPr>
+            </a:pPr>
+            <a:r>
+              <a:t>Sandbox: auto (default) / strict / off; no OS layer on Windows</a:t>
+            </a:r>
+          </a:p>
+          <a:p>
+            <a:pPr>
+              <a:spcBef>
+                <a:spcPts val="800"/>
+              </a:spcBef>
+              <a:defRPr sz="1800">
+                <a:solidFill>
+                  <a:srgbClr val="F1F5F9"/>
+                </a:solidFill>
+              </a:defRPr>
+            </a:pPr>
+            <a:r>
+              <a:t>Approval: Interactive / Trust command / Trust tool / Autopilot</a:t>
+            </a:r>
+          </a:p>
+          <a:p>
+            <a:pPr>
+              <a:spcBef>
+                <a:spcPts val="800"/>
+              </a:spcBef>
+              <a:defRPr sz="1800">
+                <a:solidFill>
+                  <a:srgbClr val="F1F5F9"/>
+                </a:solidFill>
+              </a:defRPr>
+            </a:pPr>
+            <a:r>
+              <a:t>Denied cmds enforced at Crew's gate, not agent config</a:t>
+            </a:r>
+          </a:p>
+          <a:p>
+            <a:pPr>
+              <a:spcBef>
+                <a:spcPts val="800"/>
+              </a:spcBef>
+              <a:defRPr sz="1800">
+                <a:solidFill>
+                  <a:srgbClr val="F1F5F9"/>
+                </a:solidFill>
+              </a:defRPr>
+            </a:pPr>
+            <a:r>
+              <a:t>kirocrew policy show|validate|explain; security events|audit|verify</a:t>
             </a:r>
           </a:p>
         </p:txBody>
@@ -6871,7 +6884,7 @@
               </a:defRPr>
             </a:pPr>
             <a:r>
-              <a:t>Interfaces: One Gateway, Many Surfaces</a:t>
+              <a:t>Running 24/7</a:t>
             </a:r>
           </a:p>
         </p:txBody>
@@ -6944,109 +6957,112 @@
               </a:defRPr>
             </a:pPr>
             <a:r>
-              <a:t>Mac app / web dashboard / CLI + Slack/Discord/Telegram/</a:t>
-            </a:r>
-          </a:p>
-          <a:p>
-            <a:pPr>
-              <a:spcBef>
-                <a:spcPts val="800"/>
-              </a:spcBef>
-              <a:defRPr sz="1800">
-                <a:solidFill>
-                  <a:srgbClr val="F1F5F9"/>
-                </a:solidFill>
-              </a:defRPr>
-            </a:pPr>
-            <a:r>
-              <a:t>Teams/Webex/WeCom/WeChat channels</a:t>
-            </a:r>
-          </a:p>
-          <a:p>
-            <a:pPr>
-              <a:spcBef>
-                <a:spcPts val="800"/>
-              </a:spcBef>
-              <a:defRPr sz="1800">
-                <a:solidFill>
-                  <a:srgbClr val="F1F5F9"/>
-                </a:solidFill>
-              </a:defRPr>
-            </a:pPr>
-            <a:r>
-              <a:t>Independent sessions, SHARED memory/skills/lessons/crons</a:t>
-            </a:r>
-          </a:p>
-          <a:p>
-            <a:pPr>
-              <a:spcBef>
-                <a:spcPts val="800"/>
-              </a:spcBef>
-              <a:defRPr sz="1800">
-                <a:solidFill>
-                  <a:srgbClr val="F1F5F9"/>
-                </a:solidFill>
-              </a:defRPr>
-            </a:pPr>
-            <a:r>
-              <a:t>Channels connect outbound - no need to expose dashboard port</a:t>
-            </a:r>
-          </a:p>
-          <a:p>
-            <a:pPr>
-              <a:spcBef>
-                <a:spcPts val="800"/>
-              </a:spcBef>
-              <a:defRPr sz="1800">
-                <a:solidFill>
-                  <a:srgbClr val="F1F5F9"/>
-                </a:solidFill>
-              </a:defRPr>
-            </a:pPr>
-          </a:p>
-          <a:p>
-            <a:pPr>
-              <a:spcBef>
-                <a:spcPts val="800"/>
-              </a:spcBef>
-              <a:defRPr sz="1800">
-                <a:solidFill>
-                  <a:srgbClr val="F1F5F9"/>
-                </a:solidFill>
-              </a:defRPr>
-            </a:pPr>
-            <a:r>
-              <a:t>Dashboard = React SPA localhost:5476 (primary interface)</a:t>
-            </a:r>
-          </a:p>
-          <a:p>
-            <a:pPr>
-              <a:spcBef>
-                <a:spcPts val="800"/>
-              </a:spcBef>
-              <a:defRPr sz="1800">
-                <a:solidFill>
-                  <a:srgbClr val="F1F5F9"/>
-                </a:solidFill>
-              </a:defRPr>
-            </a:pPr>
-            <a:r>
-              <a:t>Cross-surface: dashboard&lt;-&gt;Slack sync, resume sessions</a:t>
-            </a:r>
-          </a:p>
-          <a:p>
-            <a:pPr>
-              <a:spcBef>
-                <a:spcPts val="800"/>
-              </a:spcBef>
-              <a:defRPr sz="1800">
-                <a:solidFill>
-                  <a:srgbClr val="F1F5F9"/>
-                </a:solidFill>
-              </a:defRPr>
-            </a:pPr>
-            <a:r>
-              <a:t>5476 loopback-only default; reverse proxy+TLS or SSH tunnel</a:t>
+              <a:t>Local service: systemd/launchd; runs as user, sudo once for unit</a:t>
+            </a:r>
+          </a:p>
+          <a:p>
+            <a:pPr>
+              <a:spcBef>
+                <a:spcPts val="800"/>
+              </a:spcBef>
+              <a:defRPr sz="1800">
+                <a:solidFill>
+                  <a:srgbClr val="F1F5F9"/>
+                </a:solidFill>
+              </a:defRPr>
+            </a:pPr>
+            <a:r>
+              <a:t>  kirocrew service install | logs -f | restart</a:t>
+            </a:r>
+          </a:p>
+          <a:p>
+            <a:pPr>
+              <a:spcBef>
+                <a:spcPts val="800"/>
+              </a:spcBef>
+              <a:defRPr sz="1800">
+                <a:solidFill>
+                  <a:srgbClr val="F1F5F9"/>
+                </a:solidFill>
+              </a:defRPr>
+            </a:pPr>
+            <a:r>
+              <a:t>Docker: multi-arch GHCR; kiro-cli login + kirocrew token; SLSA</a:t>
+            </a:r>
+          </a:p>
+          <a:p>
+            <a:pPr>
+              <a:spcBef>
+                <a:spcPts val="800"/>
+              </a:spcBef>
+              <a:defRPr sz="1800">
+                <a:solidFill>
+                  <a:srgbClr val="F1F5F9"/>
+                </a:solidFill>
+              </a:defRPr>
+            </a:pPr>
+            <a:r>
+              <a:t>  docker run -d -p 127.0.0.1:5476:5476 -v kirocrew-home:...</a:t>
+            </a:r>
+          </a:p>
+          <a:p>
+            <a:pPr>
+              <a:spcBef>
+                <a:spcPts val="800"/>
+              </a:spcBef>
+              <a:defRPr sz="1800">
+                <a:solidFill>
+                  <a:srgbClr val="F1F5F9"/>
+                </a:solidFill>
+              </a:defRPr>
+            </a:pPr>
+            <a:r>
+              <a:t>Remote host: modern Linux, ~10GB RAM, Node 20+ (slack-mcp)</a:t>
+            </a:r>
+          </a:p>
+          <a:p>
+            <a:pPr>
+              <a:spcBef>
+                <a:spcPts val="800"/>
+              </a:spcBef>
+              <a:defRPr sz="1800">
+                <a:solidFill>
+                  <a:srgbClr val="F1F5F9"/>
+                </a:solidFill>
+              </a:defRPr>
+            </a:pPr>
+            <a:r>
+              <a:t>  ssh -L 5476:localhost:5476 user@host</a:t>
+            </a:r>
+          </a:p>
+          <a:p>
+            <a:pPr>
+              <a:spcBef>
+                <a:spcPts val="800"/>
+              </a:spcBef>
+              <a:defRPr sz="1800">
+                <a:solidFill>
+                  <a:srgbClr val="F1F5F9"/>
+                </a:solidFill>
+              </a:defRPr>
+            </a:pPr>
+            <a:r>
+              <a:t>Sync state: memory + SQLite incl WAL; NOT .env/.local_secret</a:t>
+            </a:r>
+          </a:p>
+          <a:p>
+            <a:pPr>
+              <a:spcBef>
+                <a:spcPts val="800"/>
+              </a:spcBef>
+              <a:defRPr sz="1800">
+                <a:solidFill>
+                  <a:srgbClr val="F1F5F9"/>
+                </a:solidFill>
+              </a:defRPr>
+            </a:pPr>
+            <a:r>
+              <a:t>Mobile: Cloudflare/ngrok/Tailscale + dashboard.url; token 1h/20h</a:t>
             </a:r>
           </a:p>
         </p:txBody>
@@ -7107,7 +7123,7 @@
               </a:defRPr>
             </a:pPr>
             <a:r>
-              <a:t>Chat</a:t>
+              <a:t>Interfaces: One Gateway, Many Surfaces</a:t>
             </a:r>
           </a:p>
         </p:txBody>
@@ -7180,109 +7196,109 @@
               </a:defRPr>
             </a:pPr>
             <a:r>
-              <a:t>Send text / @file / voice; streaming replies with live tool calls</a:t>
-            </a:r>
-          </a:p>
-          <a:p>
-            <a:pPr>
-              <a:spcBef>
-                <a:spcPts val="800"/>
-              </a:spcBef>
-              <a:defRPr sz="1800">
-                <a:solidFill>
-                  <a:srgbClr val="F1F5F9"/>
-                </a:solidFill>
-              </a:defRPr>
-            </a:pPr>
-            <a:r>
-              <a:t>Guide: approve/reject, edit &amp; resend, fork, Autopilot</a:t>
-            </a:r>
-          </a:p>
-          <a:p>
-            <a:pPr>
-              <a:spcBef>
-                <a:spcPts val="800"/>
-              </a:spcBef>
-              <a:defRPr sz="1800">
-                <a:solidFill>
-                  <a:srgbClr val="F1F5F9"/>
-                </a:solidFill>
-              </a:defRPr>
-            </a:pPr>
-            <a:r>
-              <a:t>Each tab = independent session sharing long-term memory</a:t>
-            </a:r>
-          </a:p>
-          <a:p>
-            <a:pPr>
-              <a:spcBef>
-                <a:spcPts val="800"/>
-              </a:spcBef>
-              <a:defRPr sz="1800">
-                <a:solidFill>
-                  <a:srgbClr val="F1F5F9"/>
-                </a:solidFill>
-              </a:defRPr>
-            </a:pPr>
-          </a:p>
-          <a:p>
-            <a:pPr>
-              <a:spcBef>
-                <a:spcPts val="800"/>
-              </a:spcBef>
-              <a:defRPr sz="1800">
-                <a:solidFill>
-                  <a:srgbClr val="F1F5F9"/>
-                </a:solidFill>
-              </a:defRPr>
-            </a:pPr>
-            <a:r>
-              <a:t>@ file picker; drag/paste image (vision); mic STT; Piper TTS</a:t>
-            </a:r>
-          </a:p>
-          <a:p>
-            <a:pPr>
-              <a:spcBef>
-                <a:spcPts val="800"/>
-              </a:spcBef>
-              <a:defRPr sz="1800">
-                <a:solidFill>
-                  <a:srgbClr val="F1F5F9"/>
-                </a:solidFill>
-              </a:defRPr>
-            </a:pPr>
-            <a:r>
-              <a:t>Prompt optimizer (Cmd+Shift+Enter); incognito; switch models;</a:t>
-            </a:r>
-          </a:p>
-          <a:p>
-            <a:pPr>
-              <a:spcBef>
-                <a:spcPts val="800"/>
-              </a:spcBef>
-              <a:defRPr sz="1800">
-                <a:solidFill>
-                  <a:srgbClr val="F1F5F9"/>
-                </a:solidFill>
-              </a:defRPr>
-            </a:pPr>
-            <a:r>
-              <a:t>reasoning effort per message</a:t>
-            </a:r>
-          </a:p>
-          <a:p>
-            <a:pPr>
-              <a:spcBef>
-                <a:spcPts val="800"/>
-              </a:spcBef>
-              <a:defRPr sz="1800">
-                <a:solidFill>
-                  <a:srgbClr val="F1F5F9"/>
-                </a:solidFill>
-              </a:defRPr>
-            </a:pPr>
-            <a:r>
-              <a:t>Leaves: Sessions, Message controls, Optimizer, Voice, Widgets</a:t>
+              <a:t>Mac app / web dashboard / CLI + Slack/Discord/Telegram/</a:t>
+            </a:r>
+          </a:p>
+          <a:p>
+            <a:pPr>
+              <a:spcBef>
+                <a:spcPts val="800"/>
+              </a:spcBef>
+              <a:defRPr sz="1800">
+                <a:solidFill>
+                  <a:srgbClr val="F1F5F9"/>
+                </a:solidFill>
+              </a:defRPr>
+            </a:pPr>
+            <a:r>
+              <a:t>Teams/Webex/WeCom/WeChat channels</a:t>
+            </a:r>
+          </a:p>
+          <a:p>
+            <a:pPr>
+              <a:spcBef>
+                <a:spcPts val="800"/>
+              </a:spcBef>
+              <a:defRPr sz="1800">
+                <a:solidFill>
+                  <a:srgbClr val="F1F5F9"/>
+                </a:solidFill>
+              </a:defRPr>
+            </a:pPr>
+            <a:r>
+              <a:t>Independent sessions, SHARED memory/skills/lessons/crons</a:t>
+            </a:r>
+          </a:p>
+          <a:p>
+            <a:pPr>
+              <a:spcBef>
+                <a:spcPts val="800"/>
+              </a:spcBef>
+              <a:defRPr sz="1800">
+                <a:solidFill>
+                  <a:srgbClr val="F1F5F9"/>
+                </a:solidFill>
+              </a:defRPr>
+            </a:pPr>
+            <a:r>
+              <a:t>Channels connect outbound - no need to expose dashboard port</a:t>
+            </a:r>
+          </a:p>
+          <a:p>
+            <a:pPr>
+              <a:spcBef>
+                <a:spcPts val="800"/>
+              </a:spcBef>
+              <a:defRPr sz="1800">
+                <a:solidFill>
+                  <a:srgbClr val="F1F5F9"/>
+                </a:solidFill>
+              </a:defRPr>
+            </a:pPr>
+          </a:p>
+          <a:p>
+            <a:pPr>
+              <a:spcBef>
+                <a:spcPts val="800"/>
+              </a:spcBef>
+              <a:defRPr sz="1800">
+                <a:solidFill>
+                  <a:srgbClr val="F1F5F9"/>
+                </a:solidFill>
+              </a:defRPr>
+            </a:pPr>
+            <a:r>
+              <a:t>Dashboard = React SPA localhost:5476 (primary interface)</a:t>
+            </a:r>
+          </a:p>
+          <a:p>
+            <a:pPr>
+              <a:spcBef>
+                <a:spcPts val="800"/>
+              </a:spcBef>
+              <a:defRPr sz="1800">
+                <a:solidFill>
+                  <a:srgbClr val="F1F5F9"/>
+                </a:solidFill>
+              </a:defRPr>
+            </a:pPr>
+            <a:r>
+              <a:t>Cross-surface: dashboard&lt;-&gt;Slack sync, resume sessions</a:t>
+            </a:r>
+          </a:p>
+          <a:p>
+            <a:pPr>
+              <a:spcBef>
+                <a:spcPts val="800"/>
+              </a:spcBef>
+              <a:defRPr sz="1800">
+                <a:solidFill>
+                  <a:srgbClr val="F1F5F9"/>
+                </a:solidFill>
+              </a:defRPr>
+            </a:pPr>
+            <a:r>
+              <a:t>5476 loopback-only default; reverse proxy+TLS or SSH tunnel</a:t>
             </a:r>
           </a:p>
         </p:txBody>
@@ -7343,7 +7359,7 @@
               </a:defRPr>
             </a:pPr>
             <a:r>
-              <a:t>Agent Capabilities (Customization Hub)</a:t>
+              <a:t>Chat</a:t>
             </a:r>
           </a:p>
         </p:txBody>
@@ -7416,97 +7432,109 @@
               </a:defRPr>
             </a:pPr>
             <a:r>
-              <a:t>Agents - model/prompt/tools/MCP server config</a:t>
-            </a:r>
-          </a:p>
-          <a:p>
-            <a:pPr>
-              <a:spcBef>
-                <a:spcPts val="800"/>
-              </a:spcBef>
-              <a:defRPr sz="1800">
-                <a:solidFill>
-                  <a:srgbClr val="F1F5F9"/>
-                </a:solidFill>
-              </a:defRPr>
-            </a:pPr>
-            <a:r>
-              <a:t>Agent Templates - prebuilt configs to customize</a:t>
-            </a:r>
-          </a:p>
-          <a:p>
-            <a:pPr>
-              <a:spcBef>
-                <a:spcPts val="800"/>
-              </a:spcBef>
-              <a:defRPr sz="1800">
-                <a:solidFill>
-                  <a:srgbClr val="F1F5F9"/>
-                </a:solidFill>
-              </a:defRPr>
-            </a:pPr>
-            <a:r>
-              <a:t>Integrations (MCP) - add external tools/services</a:t>
-            </a:r>
-          </a:p>
-          <a:p>
-            <a:pPr>
-              <a:spcBef>
-                <a:spcPts val="800"/>
-              </a:spcBef>
-              <a:defRPr sz="1800">
-                <a:solidFill>
-                  <a:srgbClr val="F1F5F9"/>
-                </a:solidFill>
-              </a:defRPr>
-            </a:pPr>
-            <a:r>
-              <a:t>Skills - on-demand knowledge files teaching workflows</a:t>
-            </a:r>
-          </a:p>
-          <a:p>
-            <a:pPr>
-              <a:spcBef>
-                <a:spcPts val="800"/>
-              </a:spcBef>
-              <a:defRPr sz="1800">
-                <a:solidFill>
-                  <a:srgbClr val="F1F5F9"/>
-                </a:solidFill>
-              </a:defRPr>
-            </a:pPr>
-            <a:r>
-              <a:t>Steering - workspace-level rules every session inherits</a:t>
-            </a:r>
-          </a:p>
-          <a:p>
-            <a:pPr>
-              <a:spcBef>
-                <a:spcPts val="800"/>
-              </a:spcBef>
-              <a:defRPr sz="1800">
-                <a:solidFill>
-                  <a:srgbClr val="F1F5F9"/>
-                </a:solidFill>
-              </a:defRPr>
-            </a:pPr>
-            <a:r>
-              <a:t>Hooks - automate reactions to events (scripts/context)</a:t>
-            </a:r>
-          </a:p>
-          <a:p>
-            <a:pPr>
-              <a:spcBef>
-                <a:spcPts val="800"/>
-              </a:spcBef>
-              <a:defRPr sz="1800">
-                <a:solidFill>
-                  <a:srgbClr val="F1F5F9"/>
-                </a:solidFill>
-              </a:defRPr>
-            </a:pPr>
-            <a:r>
-              <a:t>Prompts - customize the system prompts shaping behavior</a:t>
+              <a:t>Send text / @file / voice; streaming replies with live tool calls</a:t>
+            </a:r>
+          </a:p>
+          <a:p>
+            <a:pPr>
+              <a:spcBef>
+                <a:spcPts val="800"/>
+              </a:spcBef>
+              <a:defRPr sz="1800">
+                <a:solidFill>
+                  <a:srgbClr val="F1F5F9"/>
+                </a:solidFill>
+              </a:defRPr>
+            </a:pPr>
+            <a:r>
+              <a:t>Guide: approve/reject, edit &amp; resend, fork, Autopilot</a:t>
+            </a:r>
+          </a:p>
+          <a:p>
+            <a:pPr>
+              <a:spcBef>
+                <a:spcPts val="800"/>
+              </a:spcBef>
+              <a:defRPr sz="1800">
+                <a:solidFill>
+                  <a:srgbClr val="F1F5F9"/>
+                </a:solidFill>
+              </a:defRPr>
+            </a:pPr>
+            <a:r>
+              <a:t>Each tab = independent session sharing long-term memory</a:t>
+            </a:r>
+          </a:p>
+          <a:p>
+            <a:pPr>
+              <a:spcBef>
+                <a:spcPts val="800"/>
+              </a:spcBef>
+              <a:defRPr sz="1800">
+                <a:solidFill>
+                  <a:srgbClr val="F1F5F9"/>
+                </a:solidFill>
+              </a:defRPr>
+            </a:pPr>
+          </a:p>
+          <a:p>
+            <a:pPr>
+              <a:spcBef>
+                <a:spcPts val="800"/>
+              </a:spcBef>
+              <a:defRPr sz="1800">
+                <a:solidFill>
+                  <a:srgbClr val="F1F5F9"/>
+                </a:solidFill>
+              </a:defRPr>
+            </a:pPr>
+            <a:r>
+              <a:t>@ file picker; drag/paste image (vision); mic STT; Piper TTS</a:t>
+            </a:r>
+          </a:p>
+          <a:p>
+            <a:pPr>
+              <a:spcBef>
+                <a:spcPts val="800"/>
+              </a:spcBef>
+              <a:defRPr sz="1800">
+                <a:solidFill>
+                  <a:srgbClr val="F1F5F9"/>
+                </a:solidFill>
+              </a:defRPr>
+            </a:pPr>
+            <a:r>
+              <a:t>Prompt optimizer (Cmd+Shift+Enter); incognito; switch models;</a:t>
+            </a:r>
+          </a:p>
+          <a:p>
+            <a:pPr>
+              <a:spcBef>
+                <a:spcPts val="800"/>
+              </a:spcBef>
+              <a:defRPr sz="1800">
+                <a:solidFill>
+                  <a:srgbClr val="F1F5F9"/>
+                </a:solidFill>
+              </a:defRPr>
+            </a:pPr>
+            <a:r>
+              <a:t>reasoning effort per message</a:t>
+            </a:r>
+          </a:p>
+          <a:p>
+            <a:pPr>
+              <a:spcBef>
+                <a:spcPts val="800"/>
+              </a:spcBef>
+              <a:defRPr sz="1800">
+                <a:solidFill>
+                  <a:srgbClr val="F1F5F9"/>
+                </a:solidFill>
+              </a:defRPr>
+            </a:pPr>
+            <a:r>
+              <a:t>Leaves: Sessions, Message controls, Optimizer, Voice, Widgets</a:t>
             </a:r>
           </a:p>
         </p:txBody>
@@ -7567,7 +7595,7 @@
               </a:defRPr>
             </a:pPr>
             <a:r>
-              <a:t>Configuration</a:t>
+              <a:t>Agent Capabilities (Customization Hub)</a:t>
             </a:r>
           </a:p>
         </p:txBody>
@@ -7640,109 +7668,97 @@
               </a:defRPr>
             </a:pPr>
             <a:r>
-              <a:t>Settings panel: Overview/Imports/Chat/Display/Voice/</a:t>
-            </a:r>
-          </a:p>
-          <a:p>
-            <a:pPr>
-              <a:spcBef>
-                <a:spcPts val="800"/>
-              </a:spcBef>
-              <a:defRPr sz="1800">
-                <a:solidFill>
-                  <a:srgbClr val="F1F5F9"/>
-                </a:solidFill>
-              </a:defRPr>
-            </a:pPr>
-            <a:r>
-              <a:t>Notifications/Shortcuts/Skills/Channels/Browser/Computer Use/</a:t>
-            </a:r>
-          </a:p>
-          <a:p>
-            <a:pPr>
-              <a:spcBef>
-                <a:spcPts val="800"/>
-              </a:spcBef>
-              <a:defRPr sz="1800">
-                <a:solidFill>
-                  <a:srgbClr val="F1F5F9"/>
-                </a:solidFill>
-              </a:defRPr>
-            </a:pPr>
-            <a:r>
-              <a:t>Instances/Security/Developer/About - changes apply immediately</a:t>
-            </a:r>
-          </a:p>
-          <a:p>
-            <a:pPr>
-              <a:spcBef>
-                <a:spcPts val="800"/>
-              </a:spcBef>
-              <a:defRPr sz="1800">
-                <a:solidFill>
-                  <a:srgbClr val="F1F5F9"/>
-                </a:solidFill>
-              </a:defRPr>
-            </a:pPr>
-          </a:p>
-          <a:p>
-            <a:pPr>
-              <a:spcBef>
-                <a:spcPts val="800"/>
-              </a:spcBef>
-              <a:defRPr sz="1800">
-                <a:solidFill>
-                  <a:srgbClr val="F1F5F9"/>
-                </a:solidFill>
-              </a:defRPr>
-            </a:pPr>
-            <a:r>
-              <a:t>kirocrew config get|set|edit (set auto-restarts pool)</a:t>
-            </a:r>
-          </a:p>
-          <a:p>
-            <a:pPr>
-              <a:spcBef>
-                <a:spcPts val="800"/>
-              </a:spcBef>
-              <a:defRPr sz="1800">
-                <a:solidFill>
-                  <a:srgbClr val="F1F5F9"/>
-                </a:solidFill>
-              </a:defRPr>
-            </a:pPr>
-            <a:r>
-              <a:t>config.json (JSON, missing keys -&gt; defaults); 14 themes</a:t>
-            </a:r>
-          </a:p>
-          <a:p>
-            <a:pPr>
-              <a:spcBef>
-                <a:spcPts val="800"/>
-              </a:spcBef>
-              <a:defRPr sz="1800">
-                <a:solidFill>
-                  <a:srgbClr val="F1F5F9"/>
-                </a:solidFill>
-              </a:defRPr>
-            </a:pPr>
-            <a:r>
-              <a:t>Channel creds in ~/.kiro/crew/.env (mode 600)</a:t>
-            </a:r>
-          </a:p>
-          <a:p>
-            <a:pPr>
-              <a:spcBef>
-                <a:spcPts val="800"/>
-              </a:spcBef>
-              <a:defRPr sz="1800">
-                <a:solidFill>
-                  <a:srgbClr val="F1F5F9"/>
-                </a:solidFill>
-              </a:defRPr>
-            </a:pPr>
-            <a:r>
-              <a:t>Env: KIROCREW_HOME (~/.kiro/crew), KIROCREW_PORT (5476)</a:t>
+              <a:t>Agents - model/prompt/tools/MCP server config</a:t>
+            </a:r>
+          </a:p>
+          <a:p>
+            <a:pPr>
+              <a:spcBef>
+                <a:spcPts val="800"/>
+              </a:spcBef>
+              <a:defRPr sz="1800">
+                <a:solidFill>
+                  <a:srgbClr val="F1F5F9"/>
+                </a:solidFill>
+              </a:defRPr>
+            </a:pPr>
+            <a:r>
+              <a:t>Agent Templates - prebuilt configs to customize</a:t>
+            </a:r>
+          </a:p>
+          <a:p>
+            <a:pPr>
+              <a:spcBef>
+                <a:spcPts val="800"/>
+              </a:spcBef>
+              <a:defRPr sz="1800">
+                <a:solidFill>
+                  <a:srgbClr val="F1F5F9"/>
+                </a:solidFill>
+              </a:defRPr>
+            </a:pPr>
+            <a:r>
+              <a:t>Integrations (MCP) - add external tools/services</a:t>
+            </a:r>
+          </a:p>
+          <a:p>
+            <a:pPr>
+              <a:spcBef>
+                <a:spcPts val="800"/>
+              </a:spcBef>
+              <a:defRPr sz="1800">
+                <a:solidFill>
+                  <a:srgbClr val="F1F5F9"/>
+                </a:solidFill>
+              </a:defRPr>
+            </a:pPr>
+            <a:r>
+              <a:t>Skills - on-demand knowledge files teaching workflows</a:t>
+            </a:r>
+          </a:p>
+          <a:p>
+            <a:pPr>
+              <a:spcBef>
+                <a:spcPts val="800"/>
+              </a:spcBef>
+              <a:defRPr sz="1800">
+                <a:solidFill>
+                  <a:srgbClr val="F1F5F9"/>
+                </a:solidFill>
+              </a:defRPr>
+            </a:pPr>
+            <a:r>
+              <a:t>Steering - workspace-level rules every session inherits</a:t>
+            </a:r>
+          </a:p>
+          <a:p>
+            <a:pPr>
+              <a:spcBef>
+                <a:spcPts val="800"/>
+              </a:spcBef>
+              <a:defRPr sz="1800">
+                <a:solidFill>
+                  <a:srgbClr val="F1F5F9"/>
+                </a:solidFill>
+              </a:defRPr>
+            </a:pPr>
+            <a:r>
+              <a:t>Hooks - automate reactions to events (scripts/context)</a:t>
+            </a:r>
+          </a:p>
+          <a:p>
+            <a:pPr>
+              <a:spcBef>
+                <a:spcPts val="800"/>
+              </a:spcBef>
+              <a:defRPr sz="1800">
+                <a:solidFill>
+                  <a:srgbClr val="F1F5F9"/>
+                </a:solidFill>
+              </a:defRPr>
+            </a:pPr>
+            <a:r>
+              <a:t>Prompts - customize the system prompts shaping behavior</a:t>
             </a:r>
           </a:p>
         </p:txBody>
@@ -7803,7 +7819,7 @@
               </a:defRPr>
             </a:pPr>
             <a:r>
-              <a:t>Multi-instance</a:t>
+              <a:t>Configuration</a:t>
             </a:r>
           </a:p>
         </p:txBody>
@@ -7876,109 +7892,109 @@
               </a:defRPr>
             </a:pPr>
             <a:r>
-              <a:t>Drive multiple remote Crew hosts from one hub via SSH tunnels</a:t>
-            </a:r>
-          </a:p>
-          <a:p>
-            <a:pPr>
-              <a:spcBef>
-                <a:spcPts val="800"/>
-              </a:spcBef>
-              <a:defRPr sz="1800">
-                <a:solidFill>
-                  <a:srgbClr val="F1F5F9"/>
-                </a:solidFill>
-              </a:defRPr>
-            </a:pPr>
-            <a:r>
-              <a:t>Opt-in, off by default:</a:t>
-            </a:r>
-          </a:p>
-          <a:p>
-            <a:pPr>
-              <a:spcBef>
-                <a:spcPts val="800"/>
-              </a:spcBef>
-              <a:defRPr sz="1800">
-                <a:solidFill>
-                  <a:srgbClr val="F1F5F9"/>
-                </a:solidFill>
-              </a:defRPr>
-            </a:pPr>
-            <a:r>
-              <a:t>  kirocrew config set instances.enabled true &amp;&amp; kirocrew restart</a:t>
-            </a:r>
-          </a:p>
-          <a:p>
-            <a:pPr>
-              <a:spcBef>
-                <a:spcPts val="800"/>
-              </a:spcBef>
-              <a:defRPr sz="1800">
-                <a:solidFill>
-                  <a:srgbClr val="F1F5F9"/>
-                </a:solidFill>
-              </a:defRPr>
-            </a:pPr>
-          </a:p>
-          <a:p>
-            <a:pPr>
-              <a:spcBef>
-                <a:spcPts val="800"/>
-              </a:spcBef>
-              <a:defRPr sz="1800">
-                <a:solidFill>
-                  <a:srgbClr val="F1F5F9"/>
-                </a:solidFill>
-              </a:defRPr>
-            </a:pPr>
-            <a:r>
-              <a:t>Warm set cap 5 (LRU); health probe 30s; 2-tier self-heal (&lt;=8)</a:t>
-            </a:r>
-          </a:p>
-          <a:p>
-            <a:pPr>
-              <a:spcBef>
-                <a:spcPts val="800"/>
-              </a:spcBef>
-              <a:defRPr sz="1800">
-                <a:solidFill>
-                  <a:srgbClr val="F1F5F9"/>
-                </a:solidFill>
-              </a:defRPr>
-            </a:pPr>
-            <a:r>
-              <a:t>Add: SSH host/alias, remote port 7777, token TTL 20h</a:t>
-            </a:r>
-          </a:p>
-          <a:p>
-            <a:pPr>
-              <a:spcBef>
-                <a:spcPts val="800"/>
-              </a:spcBef>
-              <a:defRPr sz="1800">
-                <a:solidFill>
-                  <a:srgbClr val="F1F5F9"/>
-                </a:solidFill>
-              </a:defRPr>
-            </a:pPr>
-            <a:r>
-              <a:t>Security: deny-by-default, owner-only, loopback forwards,</a:t>
-            </a:r>
-          </a:p>
-          <a:p>
-            <a:pPr>
-              <a:spcBef>
-                <a:spcPts val="800"/>
-              </a:spcBef>
-              <a:defRPr sz="1800">
-                <a:solidFill>
-                  <a:srgbClr val="F1F5F9"/>
-                </a:solidFill>
-              </a:defRPr>
-            </a:pPr>
-            <a:r>
-              <a:t>argv-list ssh (no shell injection), SEL-audited</a:t>
+              <a:t>Settings panel: Overview/Imports/Chat/Display/Voice/</a:t>
+            </a:r>
+          </a:p>
+          <a:p>
+            <a:pPr>
+              <a:spcBef>
+                <a:spcPts val="800"/>
+              </a:spcBef>
+              <a:defRPr sz="1800">
+                <a:solidFill>
+                  <a:srgbClr val="F1F5F9"/>
+                </a:solidFill>
+              </a:defRPr>
+            </a:pPr>
+            <a:r>
+              <a:t>Notifications/Shortcuts/Skills/Channels/Browser/Computer Use/</a:t>
+            </a:r>
+          </a:p>
+          <a:p>
+            <a:pPr>
+              <a:spcBef>
+                <a:spcPts val="800"/>
+              </a:spcBef>
+              <a:defRPr sz="1800">
+                <a:solidFill>
+                  <a:srgbClr val="F1F5F9"/>
+                </a:solidFill>
+              </a:defRPr>
+            </a:pPr>
+            <a:r>
+              <a:t>Instances/Security/Developer/About - changes apply immediately</a:t>
+            </a:r>
+          </a:p>
+          <a:p>
+            <a:pPr>
+              <a:spcBef>
+                <a:spcPts val="800"/>
+              </a:spcBef>
+              <a:defRPr sz="1800">
+                <a:solidFill>
+                  <a:srgbClr val="F1F5F9"/>
+                </a:solidFill>
+              </a:defRPr>
+            </a:pPr>
+          </a:p>
+          <a:p>
+            <a:pPr>
+              <a:spcBef>
+                <a:spcPts val="800"/>
+              </a:spcBef>
+              <a:defRPr sz="1800">
+                <a:solidFill>
+                  <a:srgbClr val="F1F5F9"/>
+                </a:solidFill>
+              </a:defRPr>
+            </a:pPr>
+            <a:r>
+              <a:t>kirocrew config get|set|edit (set auto-restarts pool)</a:t>
+            </a:r>
+          </a:p>
+          <a:p>
+            <a:pPr>
+              <a:spcBef>
+                <a:spcPts val="800"/>
+              </a:spcBef>
+              <a:defRPr sz="1800">
+                <a:solidFill>
+                  <a:srgbClr val="F1F5F9"/>
+                </a:solidFill>
+              </a:defRPr>
+            </a:pPr>
+            <a:r>
+              <a:t>config.json (JSON, missing keys -&gt; defaults); 14 themes</a:t>
+            </a:r>
+          </a:p>
+          <a:p>
+            <a:pPr>
+              <a:spcBef>
+                <a:spcPts val="800"/>
+              </a:spcBef>
+              <a:defRPr sz="1800">
+                <a:solidFill>
+                  <a:srgbClr val="F1F5F9"/>
+                </a:solidFill>
+              </a:defRPr>
+            </a:pPr>
+            <a:r>
+              <a:t>Channel creds in ~/.kiro/crew/.env (mode 600)</a:t>
+            </a:r>
+          </a:p>
+          <a:p>
+            <a:pPr>
+              <a:spcBef>
+                <a:spcPts val="800"/>
+              </a:spcBef>
+              <a:defRPr sz="1800">
+                <a:solidFill>
+                  <a:srgbClr val="F1F5F9"/>
+                </a:solidFill>
+              </a:defRPr>
+            </a:pPr>
+            <a:r>
+              <a:t>Env: KIROCREW_HOME (~/.kiro/crew), KIROCREW_PORT (5476)</a:t>
             </a:r>
           </a:p>
         </p:txBody>
@@ -8287,7 +8303,7 @@
               </a:defRPr>
             </a:pPr>
             <a:r>
-              <a:t>Snapshot &amp; Restore</a:t>
+              <a:t>Multi-instance</a:t>
             </a:r>
           </a:p>
         </p:txBody>
@@ -8360,109 +8376,109 @@
               </a:defRPr>
             </a:pPr>
             <a:r>
-              <a:t>kirocrew snapshot [dir] --keep N | --list</a:t>
-            </a:r>
-          </a:p>
-          <a:p>
-            <a:pPr>
-              <a:spcBef>
-                <a:spcPts val="800"/>
-              </a:spcBef>
-              <a:defRPr sz="1800">
-                <a:solidFill>
-                  <a:srgbClr val="F1F5F9"/>
-                </a:solidFill>
-              </a:defRPr>
-            </a:pPr>
-            <a:r>
-              <a:t>kirocrew restore snap.tar.gz [--components ...] [--dry-run]</a:t>
-            </a:r>
-          </a:p>
-          <a:p>
-            <a:pPr>
-              <a:spcBef>
-                <a:spcPts val="800"/>
-              </a:spcBef>
-              <a:defRPr sz="1800">
-                <a:solidFill>
-                  <a:srgbClr val="F1F5F9"/>
-                </a:solidFill>
-              </a:defRPr>
-            </a:pPr>
-          </a:p>
-          <a:p>
-            <a:pPr>
-              <a:spcBef>
-                <a:spcPts val="800"/>
-              </a:spcBef>
-              <a:defRPr sz="1800">
-                <a:solidFill>
-                  <a:srgbClr val="F1F5F9"/>
-                </a:solidFill>
-              </a:defRPr>
-            </a:pPr>
-            <a:r>
-              <a:t>Includes: Memory, Workspace, Crons, Config, Skills, Notifications</a:t>
-            </a:r>
-          </a:p>
-          <a:p>
-            <a:pPr>
-              <a:spcBef>
-                <a:spcPts val="800"/>
-              </a:spcBef>
-              <a:defRPr sz="1800">
-                <a:solidFill>
-                  <a:srgbClr val="F1F5F9"/>
-                </a:solidFill>
-              </a:defRPr>
-            </a:pPr>
-            <a:r>
-              <a:t>Restore modes: replace (empty) vs merge (existing) - auto-detected</a:t>
-            </a:r>
-          </a:p>
-          <a:p>
-            <a:pPr>
-              <a:spcBef>
-                <a:spcPts val="800"/>
-              </a:spcBef>
-              <a:defRPr sz="1800">
-                <a:solidFill>
-                  <a:srgbClr val="F1F5F9"/>
-                </a:solidFill>
-              </a:defRPr>
-            </a:pPr>
-            <a:r>
-              <a:t>Daily auto snapshot 08:00 UTC, keeps 7</a:t>
-            </a:r>
-          </a:p>
-          <a:p>
-            <a:pPr>
-              <a:spcBef>
-                <a:spcPts val="800"/>
-              </a:spcBef>
-              <a:defRPr sz="1800">
-                <a:solidFill>
-                  <a:srgbClr val="F1F5F9"/>
-                </a:solidFill>
-              </a:defRPr>
-            </a:pPr>
-            <a:r>
-              <a:t>Contains security keys - treat like credentials</a:t>
-            </a:r>
-          </a:p>
-          <a:p>
-            <a:pPr>
-              <a:spcBef>
-                <a:spcPts val="800"/>
-              </a:spcBef>
-              <a:defRPr sz="1800">
-                <a:solidFill>
-                  <a:srgbClr val="F1F5F9"/>
-                </a:solidFill>
-              </a:defRPr>
-            </a:pPr>
-            <a:r>
-              <a:t>NOT covered: kiro-cli/AWS creds, channel defs, app code</a:t>
+              <a:t>Drive multiple remote Crew hosts from one hub via SSH tunnels</a:t>
+            </a:r>
+          </a:p>
+          <a:p>
+            <a:pPr>
+              <a:spcBef>
+                <a:spcPts val="800"/>
+              </a:spcBef>
+              <a:defRPr sz="1800">
+                <a:solidFill>
+                  <a:srgbClr val="F1F5F9"/>
+                </a:solidFill>
+              </a:defRPr>
+            </a:pPr>
+            <a:r>
+              <a:t>Opt-in, off by default:</a:t>
+            </a:r>
+          </a:p>
+          <a:p>
+            <a:pPr>
+              <a:spcBef>
+                <a:spcPts val="800"/>
+              </a:spcBef>
+              <a:defRPr sz="1800">
+                <a:solidFill>
+                  <a:srgbClr val="F1F5F9"/>
+                </a:solidFill>
+              </a:defRPr>
+            </a:pPr>
+            <a:r>
+              <a:t>  kirocrew config set instances.enabled true &amp;&amp; kirocrew restart</a:t>
+            </a:r>
+          </a:p>
+          <a:p>
+            <a:pPr>
+              <a:spcBef>
+                <a:spcPts val="800"/>
+              </a:spcBef>
+              <a:defRPr sz="1800">
+                <a:solidFill>
+                  <a:srgbClr val="F1F5F9"/>
+                </a:solidFill>
+              </a:defRPr>
+            </a:pPr>
+          </a:p>
+          <a:p>
+            <a:pPr>
+              <a:spcBef>
+                <a:spcPts val="800"/>
+              </a:spcBef>
+              <a:defRPr sz="1800">
+                <a:solidFill>
+                  <a:srgbClr val="F1F5F9"/>
+                </a:solidFill>
+              </a:defRPr>
+            </a:pPr>
+            <a:r>
+              <a:t>Warm set cap 5 (LRU); health probe 30s; 2-tier self-heal (&lt;=8)</a:t>
+            </a:r>
+          </a:p>
+          <a:p>
+            <a:pPr>
+              <a:spcBef>
+                <a:spcPts val="800"/>
+              </a:spcBef>
+              <a:defRPr sz="1800">
+                <a:solidFill>
+                  <a:srgbClr val="F1F5F9"/>
+                </a:solidFill>
+              </a:defRPr>
+            </a:pPr>
+            <a:r>
+              <a:t>Add: SSH host/alias, remote port 7777, token TTL 20h</a:t>
+            </a:r>
+          </a:p>
+          <a:p>
+            <a:pPr>
+              <a:spcBef>
+                <a:spcPts val="800"/>
+              </a:spcBef>
+              <a:defRPr sz="1800">
+                <a:solidFill>
+                  <a:srgbClr val="F1F5F9"/>
+                </a:solidFill>
+              </a:defRPr>
+            </a:pPr>
+            <a:r>
+              <a:t>Security: deny-by-default, owner-only, loopback forwards,</a:t>
+            </a:r>
+          </a:p>
+          <a:p>
+            <a:pPr>
+              <a:spcBef>
+                <a:spcPts val="800"/>
+              </a:spcBef>
+              <a:defRPr sz="1800">
+                <a:solidFill>
+                  <a:srgbClr val="F1F5F9"/>
+                </a:solidFill>
+              </a:defRPr>
+            </a:pPr>
+            <a:r>
+              <a:t>argv-list ssh (no shell injection), SEL-audited</a:t>
             </a:r>
           </a:p>
         </p:txBody>
@@ -8523,7 +8539,7 @@
               </a:defRPr>
             </a:pPr>
             <a:r>
-              <a:t>Apps / App Kit</a:t>
+              <a:t>Snapshot &amp; Restore</a:t>
             </a:r>
           </a:p>
         </p:txBody>
@@ -8596,109 +8612,109 @@
               </a:defRPr>
             </a:pPr>
             <a:r>
-              <a:t>Apps contribute: agents, skills, MCP servers, crons, UI pages,</a:t>
-            </a:r>
-          </a:p>
-          <a:p>
-            <a:pPr>
-              <a:spcBef>
-                <a:spcPts val="800"/>
-              </a:spcBef>
-              <a:defRPr sz="1800">
-                <a:solidFill>
-                  <a:srgbClr val="F1F5F9"/>
-                </a:solidFill>
-              </a:defRPr>
-            </a:pPr>
-            <a:r>
-              <a:t>backend processes, gateway hooks</a:t>
-            </a:r>
-          </a:p>
-          <a:p>
-            <a:pPr>
-              <a:spcBef>
-                <a:spcPts val="800"/>
-              </a:spcBef>
-              <a:defRPr sz="1800">
-                <a:solidFill>
-                  <a:srgbClr val="F1F5F9"/>
-                </a:solidFill>
-              </a:defRPr>
-            </a:pPr>
-            <a:r>
-              <a:t>Third-party apps DISABLED by default (Settings -&gt; Security)</a:t>
-            </a:r>
-          </a:p>
-          <a:p>
-            <a:pPr>
-              <a:spcBef>
-                <a:spcPts val="800"/>
-              </a:spcBef>
-              <a:defRPr sz="1800">
-                <a:solidFill>
-                  <a:srgbClr val="F1F5F9"/>
-                </a:solidFill>
-              </a:defRPr>
-            </a:pPr>
-          </a:p>
-          <a:p>
-            <a:pPr>
-              <a:spcBef>
-                <a:spcPts val="800"/>
-              </a:spcBef>
-              <a:defRPr sz="1800">
-                <a:solidFill>
-                  <a:srgbClr val="F1F5F9"/>
-                </a:solidFill>
-              </a:defRPr>
-            </a:pPr>
-            <a:r>
-              <a:t>Install from App Store (curated registry, PR to add) or</a:t>
-            </a:r>
-          </a:p>
-          <a:p>
-            <a:pPr>
-              <a:spcBef>
-                <a:spcPts val="800"/>
-              </a:spcBef>
-              <a:defRPr sz="1800">
-                <a:solidFill>
-                  <a:srgbClr val="F1F5F9"/>
-                </a:solidFill>
-              </a:defRPr>
-            </a:pPr>
-            <a:r>
-              <a:t>federated external registries (opt-in)</a:t>
-            </a:r>
-          </a:p>
-          <a:p>
-            <a:pPr>
-              <a:spcBef>
-                <a:spcPts val="800"/>
-              </a:spcBef>
-              <a:defRPr sz="1800">
-                <a:solidFill>
-                  <a:srgbClr val="F1F5F9"/>
-                </a:solidFill>
-              </a:defRPr>
-            </a:pPr>
-            <a:r>
-              <a:t>Lifecycle: gateway-managed / app-managed / locked</a:t>
-            </a:r>
-          </a:p>
-          <a:p>
-            <a:pPr>
-              <a:spcBef>
-                <a:spcPts val="800"/>
-              </a:spcBef>
-              <a:defRPr sz="1800">
-                <a:solidFill>
-                  <a:srgbClr val="F1F5F9"/>
-                </a:solidFill>
-              </a:defRPr>
-            </a:pPr>
-            <a:r>
-              <a:t>Dev: kirocrew app dev &lt;name&gt;; only permissions.api enforced</a:t>
+              <a:t>kirocrew snapshot [dir] --keep N | --list</a:t>
+            </a:r>
+          </a:p>
+          <a:p>
+            <a:pPr>
+              <a:spcBef>
+                <a:spcPts val="800"/>
+              </a:spcBef>
+              <a:defRPr sz="1800">
+                <a:solidFill>
+                  <a:srgbClr val="F1F5F9"/>
+                </a:solidFill>
+              </a:defRPr>
+            </a:pPr>
+            <a:r>
+              <a:t>kirocrew restore snap.tar.gz [--components ...] [--dry-run]</a:t>
+            </a:r>
+          </a:p>
+          <a:p>
+            <a:pPr>
+              <a:spcBef>
+                <a:spcPts val="800"/>
+              </a:spcBef>
+              <a:defRPr sz="1800">
+                <a:solidFill>
+                  <a:srgbClr val="F1F5F9"/>
+                </a:solidFill>
+              </a:defRPr>
+            </a:pPr>
+          </a:p>
+          <a:p>
+            <a:pPr>
+              <a:spcBef>
+                <a:spcPts val="800"/>
+              </a:spcBef>
+              <a:defRPr sz="1800">
+                <a:solidFill>
+                  <a:srgbClr val="F1F5F9"/>
+                </a:solidFill>
+              </a:defRPr>
+            </a:pPr>
+            <a:r>
+              <a:t>Includes: Memory, Workspace, Crons, Config, Skills, Notifications</a:t>
+            </a:r>
+          </a:p>
+          <a:p>
+            <a:pPr>
+              <a:spcBef>
+                <a:spcPts val="800"/>
+              </a:spcBef>
+              <a:defRPr sz="1800">
+                <a:solidFill>
+                  <a:srgbClr val="F1F5F9"/>
+                </a:solidFill>
+              </a:defRPr>
+            </a:pPr>
+            <a:r>
+              <a:t>Restore modes: replace (empty) vs merge (existing) - auto-detected</a:t>
+            </a:r>
+          </a:p>
+          <a:p>
+            <a:pPr>
+              <a:spcBef>
+                <a:spcPts val="800"/>
+              </a:spcBef>
+              <a:defRPr sz="1800">
+                <a:solidFill>
+                  <a:srgbClr val="F1F5F9"/>
+                </a:solidFill>
+              </a:defRPr>
+            </a:pPr>
+            <a:r>
+              <a:t>Daily auto snapshot 08:00 UTC, keeps 7</a:t>
+            </a:r>
+          </a:p>
+          <a:p>
+            <a:pPr>
+              <a:spcBef>
+                <a:spcPts val="800"/>
+              </a:spcBef>
+              <a:defRPr sz="1800">
+                <a:solidFill>
+                  <a:srgbClr val="F1F5F9"/>
+                </a:solidFill>
+              </a:defRPr>
+            </a:pPr>
+            <a:r>
+              <a:t>Contains security keys - treat like credentials</a:t>
+            </a:r>
+          </a:p>
+          <a:p>
+            <a:pPr>
+              <a:spcBef>
+                <a:spcPts val="800"/>
+              </a:spcBef>
+              <a:defRPr sz="1800">
+                <a:solidFill>
+                  <a:srgbClr val="F1F5F9"/>
+                </a:solidFill>
+              </a:defRPr>
+            </a:pPr>
+            <a:r>
+              <a:t>NOT covered: kiro-cli/AWS creds, channel defs, app code</a:t>
             </a:r>
           </a:p>
         </p:txBody>
@@ -8759,7 +8775,7 @@
               </a:defRPr>
             </a:pPr>
             <a:r>
-              <a:t>Troubleshooting</a:t>
+              <a:t>Apps / App Kit</a:t>
             </a:r>
           </a:p>
         </p:txBody>
@@ -8832,109 +8848,109 @@
               </a:defRPr>
             </a:pPr>
             <a:r>
-              <a:t>Start with a health check:</a:t>
-            </a:r>
-          </a:p>
-          <a:p>
-            <a:pPr>
-              <a:spcBef>
-                <a:spcPts val="800"/>
-              </a:spcBef>
-              <a:defRPr sz="1800">
-                <a:solidFill>
-                  <a:srgbClr val="F1F5F9"/>
-                </a:solidFill>
-              </a:defRPr>
-            </a:pPr>
-            <a:r>
-              <a:t>  kirocrew doctor [--verbose]   /   kirocrew logs -f</a:t>
-            </a:r>
-          </a:p>
-          <a:p>
-            <a:pPr>
-              <a:spcBef>
-                <a:spcPts val="800"/>
-              </a:spcBef>
-              <a:defRPr sz="1800">
-                <a:solidFill>
-                  <a:srgbClr val="F1F5F9"/>
-                </a:solidFill>
-              </a:defRPr>
-            </a:pPr>
-            <a:r>
-              <a:t>Reports: kiro-cli, auth, embeddings, Slack, config, MCP</a:t>
-            </a:r>
-          </a:p>
-          <a:p>
-            <a:pPr>
-              <a:spcBef>
-                <a:spcPts val="800"/>
-              </a:spcBef>
-              <a:defRPr sz="1800">
-                <a:solidFill>
-                  <a:srgbClr val="F1F5F9"/>
-                </a:solidFill>
-              </a:defRPr>
-            </a:pPr>
-          </a:p>
-          <a:p>
-            <a:pPr>
-              <a:spcBef>
-                <a:spcPts val="800"/>
-              </a:spcBef>
-              <a:defRPr sz="1800">
-                <a:solidFill>
-                  <a:srgbClr val="F1F5F9"/>
-                </a:solidFill>
-              </a:defRPr>
-            </a:pPr>
-            <a:r>
-              <a:t>Categories: install/setup, agent (AcpTimeoutError/</a:t>
-            </a:r>
-          </a:p>
-          <a:p>
-            <a:pPr>
-              <a:spcBef>
-                <a:spcPts val="800"/>
-              </a:spcBef>
-              <a:defRPr sz="1800">
-                <a:solidFill>
-                  <a:srgbClr val="F1F5F9"/>
-                </a:solidFill>
-              </a:defRPr>
-            </a:pPr>
-            <a:r>
-              <a:t>AcpProcessDied), memory/embeddings, Slack, Discord, MCP,</a:t>
-            </a:r>
-          </a:p>
-          <a:p>
-            <a:pPr>
-              <a:spcBef>
-                <a:spcPts val="800"/>
-              </a:spcBef>
-              <a:defRPr sz="1800">
-                <a:solidFill>
-                  <a:srgbClr val="F1F5F9"/>
-                </a:solidFill>
-              </a:defRPr>
-            </a:pPr>
-            <a:r>
-              <a:t>dashboard 403, sessions, task runner, subagents, cron,</a:t>
-            </a:r>
-          </a:p>
-          <a:p>
-            <a:pPr>
-              <a:spcBef>
-                <a:spcPts val="800"/>
-              </a:spcBef>
-              <a:defRPr sz="1800">
-                <a:solidFill>
-                  <a:srgbClr val="F1F5F9"/>
-                </a:solidFill>
-              </a:defRPr>
-            </a:pPr>
-            <a:r>
-              <a:t>config, snapshot, multi-instance, voice, artifact deploy</a:t>
+              <a:t>Apps contribute: agents, skills, MCP servers, crons, UI pages,</a:t>
+            </a:r>
+          </a:p>
+          <a:p>
+            <a:pPr>
+              <a:spcBef>
+                <a:spcPts val="800"/>
+              </a:spcBef>
+              <a:defRPr sz="1800">
+                <a:solidFill>
+                  <a:srgbClr val="F1F5F9"/>
+                </a:solidFill>
+              </a:defRPr>
+            </a:pPr>
+            <a:r>
+              <a:t>backend processes, gateway hooks</a:t>
+            </a:r>
+          </a:p>
+          <a:p>
+            <a:pPr>
+              <a:spcBef>
+                <a:spcPts val="800"/>
+              </a:spcBef>
+              <a:defRPr sz="1800">
+                <a:solidFill>
+                  <a:srgbClr val="F1F5F9"/>
+                </a:solidFill>
+              </a:defRPr>
+            </a:pPr>
+            <a:r>
+              <a:t>Third-party apps DISABLED by default (Settings -&gt; Security)</a:t>
+            </a:r>
+          </a:p>
+          <a:p>
+            <a:pPr>
+              <a:spcBef>
+                <a:spcPts val="800"/>
+              </a:spcBef>
+              <a:defRPr sz="1800">
+                <a:solidFill>
+                  <a:srgbClr val="F1F5F9"/>
+                </a:solidFill>
+              </a:defRPr>
+            </a:pPr>
+          </a:p>
+          <a:p>
+            <a:pPr>
+              <a:spcBef>
+                <a:spcPts val="800"/>
+              </a:spcBef>
+              <a:defRPr sz="1800">
+                <a:solidFill>
+                  <a:srgbClr val="F1F5F9"/>
+                </a:solidFill>
+              </a:defRPr>
+            </a:pPr>
+            <a:r>
+              <a:t>Install from App Store (curated registry, PR to add) or</a:t>
+            </a:r>
+          </a:p>
+          <a:p>
+            <a:pPr>
+              <a:spcBef>
+                <a:spcPts val="800"/>
+              </a:spcBef>
+              <a:defRPr sz="1800">
+                <a:solidFill>
+                  <a:srgbClr val="F1F5F9"/>
+                </a:solidFill>
+              </a:defRPr>
+            </a:pPr>
+            <a:r>
+              <a:t>federated external registries (opt-in)</a:t>
+            </a:r>
+          </a:p>
+          <a:p>
+            <a:pPr>
+              <a:spcBef>
+                <a:spcPts val="800"/>
+              </a:spcBef>
+              <a:defRPr sz="1800">
+                <a:solidFill>
+                  <a:srgbClr val="F1F5F9"/>
+                </a:solidFill>
+              </a:defRPr>
+            </a:pPr>
+            <a:r>
+              <a:t>Lifecycle: gateway-managed / app-managed / locked</a:t>
+            </a:r>
+          </a:p>
+          <a:p>
+            <a:pPr>
+              <a:spcBef>
+                <a:spcPts val="800"/>
+              </a:spcBef>
+              <a:defRPr sz="1800">
+                <a:solidFill>
+                  <a:srgbClr val="F1F5F9"/>
+                </a:solidFill>
+              </a:defRPr>
+            </a:pPr>
+            <a:r>
+              <a:t>Dev: kirocrew app dev &lt;name&gt;; only permissions.api enforced</a:t>
             </a:r>
           </a:p>
         </p:txBody>
@@ -8948,6 +8964,242 @@
 </file>
 
 <file path=ppt/slides/slide33.xml><?xml version="1.0" encoding="utf-8"?>
+<p:sld xmlns:a="http://schemas.openxmlformats.org/drawingml/2006/main" xmlns:p="http://schemas.openxmlformats.org/presentationml/2006/main" xmlns:r="http://schemas.openxmlformats.org/officeDocument/2006/relationships">
+  <p:cSld>
+    <p:bg>
+      <p:bgPr>
+        <a:solidFill>
+          <a:srgbClr val="0F172A"/>
+        </a:solidFill>
+        <a:effectLst/>
+      </p:bgPr>
+    </p:bg>
+    <p:spTree>
+      <p:nvGrpSpPr>
+        <p:cNvPr id="1" name=""/>
+        <p:cNvGrpSpPr/>
+        <p:nvPr/>
+      </p:nvGrpSpPr>
+      <p:grpSpPr/>
+      <p:sp>
+        <p:nvSpPr>
+          <p:cNvPr id="2" name="TextBox 1"/>
+          <p:cNvSpPr txBox="1"/>
+          <p:nvPr/>
+        </p:nvSpPr>
+        <p:spPr>
+          <a:xfrm>
+            <a:off x="457200" y="365760"/>
+            <a:ext cx="6858000" cy="548640"/>
+          </a:xfrm>
+          <a:prstGeom prst="rect">
+            <a:avLst/>
+          </a:prstGeom>
+          <a:noFill/>
+        </p:spPr>
+        <p:txBody>
+          <a:bodyPr wrap="none">
+            <a:spAutoFit/>
+          </a:bodyPr>
+          <a:lstStyle/>
+          <a:p>
+            <a:pPr>
+              <a:defRPr sz="3200" b="1">
+                <a:solidFill>
+                  <a:srgbClr val="2563EB"/>
+                </a:solidFill>
+              </a:defRPr>
+            </a:pPr>
+            <a:r>
+              <a:t>Troubleshooting</a:t>
+            </a:r>
+          </a:p>
+        </p:txBody>
+      </p:sp>
+      <p:sp>
+        <p:nvSpPr>
+          <p:cNvPr id="3" name="TextBox 2"/>
+          <p:cNvSpPr txBox="1"/>
+          <p:nvPr/>
+        </p:nvSpPr>
+        <p:spPr>
+          <a:xfrm>
+            <a:off x="7498079" y="411480"/>
+            <a:ext cx="1371600" cy="365760"/>
+          </a:xfrm>
+          <a:prstGeom prst="rect">
+            <a:avLst/>
+          </a:prstGeom>
+          <a:noFill/>
+        </p:spPr>
+        <p:txBody>
+          <a:bodyPr wrap="none">
+            <a:spAutoFit/>
+          </a:bodyPr>
+          <a:lstStyle/>
+          <a:p>
+            <a:pPr>
+              <a:defRPr sz="1100" b="1">
+                <a:solidFill>
+                  <a:srgbClr val="10B981"/>
+                </a:solidFill>
+              </a:defRPr>
+            </a:pPr>
+            <a:r>
+              <a:t>✓ Verified</a:t>
+            </a:r>
+          </a:p>
+        </p:txBody>
+      </p:sp>
+      <p:sp>
+        <p:nvSpPr>
+          <p:cNvPr id="4" name="TextBox 3"/>
+          <p:cNvSpPr txBox="1"/>
+          <p:nvPr/>
+        </p:nvSpPr>
+        <p:spPr>
+          <a:xfrm>
+            <a:off x="640080" y="1188720"/>
+            <a:ext cx="7863840" cy="5212080"/>
+          </a:xfrm>
+          <a:prstGeom prst="rect">
+            <a:avLst/>
+          </a:prstGeom>
+          <a:noFill/>
+        </p:spPr>
+        <p:txBody>
+          <a:bodyPr wrap="square">
+            <a:spAutoFit/>
+          </a:bodyPr>
+          <a:lstStyle/>
+          <a:p>
+            <a:pPr>
+              <a:spcBef>
+                <a:spcPts val="800"/>
+              </a:spcBef>
+              <a:defRPr sz="1800">
+                <a:solidFill>
+                  <a:srgbClr val="F1F5F9"/>
+                </a:solidFill>
+              </a:defRPr>
+            </a:pPr>
+            <a:r>
+              <a:t>Start with a health check:</a:t>
+            </a:r>
+          </a:p>
+          <a:p>
+            <a:pPr>
+              <a:spcBef>
+                <a:spcPts val="800"/>
+              </a:spcBef>
+              <a:defRPr sz="1800">
+                <a:solidFill>
+                  <a:srgbClr val="F1F5F9"/>
+                </a:solidFill>
+              </a:defRPr>
+            </a:pPr>
+            <a:r>
+              <a:t>  kirocrew doctor [--verbose]   /   kirocrew logs -f</a:t>
+            </a:r>
+          </a:p>
+          <a:p>
+            <a:pPr>
+              <a:spcBef>
+                <a:spcPts val="800"/>
+              </a:spcBef>
+              <a:defRPr sz="1800">
+                <a:solidFill>
+                  <a:srgbClr val="F1F5F9"/>
+                </a:solidFill>
+              </a:defRPr>
+            </a:pPr>
+            <a:r>
+              <a:t>Reports: kiro-cli, auth, embeddings, Slack, config, MCP</a:t>
+            </a:r>
+          </a:p>
+          <a:p>
+            <a:pPr>
+              <a:spcBef>
+                <a:spcPts val="800"/>
+              </a:spcBef>
+              <a:defRPr sz="1800">
+                <a:solidFill>
+                  <a:srgbClr val="F1F5F9"/>
+                </a:solidFill>
+              </a:defRPr>
+            </a:pPr>
+          </a:p>
+          <a:p>
+            <a:pPr>
+              <a:spcBef>
+                <a:spcPts val="800"/>
+              </a:spcBef>
+              <a:defRPr sz="1800">
+                <a:solidFill>
+                  <a:srgbClr val="F1F5F9"/>
+                </a:solidFill>
+              </a:defRPr>
+            </a:pPr>
+            <a:r>
+              <a:t>Categories: install/setup, agent (AcpTimeoutError/</a:t>
+            </a:r>
+          </a:p>
+          <a:p>
+            <a:pPr>
+              <a:spcBef>
+                <a:spcPts val="800"/>
+              </a:spcBef>
+              <a:defRPr sz="1800">
+                <a:solidFill>
+                  <a:srgbClr val="F1F5F9"/>
+                </a:solidFill>
+              </a:defRPr>
+            </a:pPr>
+            <a:r>
+              <a:t>AcpProcessDied), memory/embeddings, Slack, Discord, MCP,</a:t>
+            </a:r>
+          </a:p>
+          <a:p>
+            <a:pPr>
+              <a:spcBef>
+                <a:spcPts val="800"/>
+              </a:spcBef>
+              <a:defRPr sz="1800">
+                <a:solidFill>
+                  <a:srgbClr val="F1F5F9"/>
+                </a:solidFill>
+              </a:defRPr>
+            </a:pPr>
+            <a:r>
+              <a:t>dashboard 403, sessions, task runner, subagents, cron,</a:t>
+            </a:r>
+          </a:p>
+          <a:p>
+            <a:pPr>
+              <a:spcBef>
+                <a:spcPts val="800"/>
+              </a:spcBef>
+              <a:defRPr sz="1800">
+                <a:solidFill>
+                  <a:srgbClr val="F1F5F9"/>
+                </a:solidFill>
+              </a:defRPr>
+            </a:pPr>
+            <a:r>
+              <a:t>config, snapshot, multi-instance, voice, artifact deploy</a:t>
+            </a:r>
+          </a:p>
+        </p:txBody>
+      </p:sp>
+    </p:spTree>
+  </p:cSld>
+  <p:clrMapOvr>
+    <a:masterClrMapping/>
+  </p:clrMapOvr>
+</p:sld>
+</file>
+
+<file path=ppt/slides/slide34.xml><?xml version="1.0" encoding="utf-8"?>
 <p:sld xmlns:a="http://schemas.openxmlformats.org/drawingml/2006/main" xmlns:p="http://schemas.openxmlformats.org/presentationml/2006/main" xmlns:r="http://schemas.openxmlformats.org/officeDocument/2006/relationships">
   <p:cSld>
     <p:bg>
@@ -9031,266 +9283,6 @@
             </a:pPr>
             <a:r>
               <a:t>Enterprise integration examples</a:t>
-            </a:r>
-          </a:p>
-        </p:txBody>
-      </p:sp>
-    </p:spTree>
-  </p:cSld>
-  <p:clrMapOvr>
-    <a:masterClrMapping/>
-  </p:clrMapOvr>
-</p:sld>
-</file>
-
-<file path=ppt/slides/slide34.xml><?xml version="1.0" encoding="utf-8"?>
-<p:sld xmlns:a="http://schemas.openxmlformats.org/drawingml/2006/main" xmlns:p="http://schemas.openxmlformats.org/presentationml/2006/main" xmlns:r="http://schemas.openxmlformats.org/officeDocument/2006/relationships">
-  <p:cSld>
-    <p:bg>
-      <p:bgPr>
-        <a:solidFill>
-          <a:srgbClr val="0F172A"/>
-        </a:solidFill>
-        <a:effectLst/>
-      </p:bgPr>
-    </p:bg>
-    <p:spTree>
-      <p:nvGrpSpPr>
-        <p:cNvPr id="1" name=""/>
-        <p:cNvGrpSpPr/>
-        <p:nvPr/>
-      </p:nvGrpSpPr>
-      <p:grpSpPr/>
-      <p:sp>
-        <p:nvSpPr>
-          <p:cNvPr id="2" name="TextBox 1"/>
-          <p:cNvSpPr txBox="1"/>
-          <p:nvPr/>
-        </p:nvSpPr>
-        <p:spPr>
-          <a:xfrm>
-            <a:off x="457200" y="365760"/>
-            <a:ext cx="6858000" cy="548640"/>
-          </a:xfrm>
-          <a:prstGeom prst="rect">
-            <a:avLst/>
-          </a:prstGeom>
-          <a:noFill/>
-        </p:spPr>
-        <p:txBody>
-          <a:bodyPr wrap="none">
-            <a:spAutoFit/>
-          </a:bodyPr>
-          <a:lstStyle/>
-          <a:p>
-            <a:pPr>
-              <a:defRPr sz="3200" b="1">
-                <a:solidFill>
-                  <a:srgbClr val="2563EB"/>
-                </a:solidFill>
-              </a:defRPr>
-            </a:pPr>
-            <a:r>
-              <a:t>Example: 24/7 PR Monitoring</a:t>
-            </a:r>
-          </a:p>
-        </p:txBody>
-      </p:sp>
-      <p:sp>
-        <p:nvSpPr>
-          <p:cNvPr id="3" name="TextBox 2"/>
-          <p:cNvSpPr txBox="1"/>
-          <p:nvPr/>
-        </p:nvSpPr>
-        <p:spPr>
-          <a:xfrm>
-            <a:off x="7498079" y="411480"/>
-            <a:ext cx="1371600" cy="365760"/>
-          </a:xfrm>
-          <a:prstGeom prst="rect">
-            <a:avLst/>
-          </a:prstGeom>
-          <a:noFill/>
-        </p:spPr>
-        <p:txBody>
-          <a:bodyPr wrap="none">
-            <a:spAutoFit/>
-          </a:bodyPr>
-          <a:lstStyle/>
-          <a:p>
-            <a:pPr>
-              <a:defRPr sz="1100" b="1">
-                <a:solidFill>
-                  <a:srgbClr val="F59E0B"/>
-                </a:solidFill>
-              </a:defRPr>
-            </a:pPr>
-            <a:r>
-              <a:t>⚠ To Be Verified</a:t>
-            </a:r>
-          </a:p>
-        </p:txBody>
-      </p:sp>
-      <p:sp>
-        <p:nvSpPr>
-          <p:cNvPr id="4" name="TextBox 3"/>
-          <p:cNvSpPr txBox="1"/>
-          <p:nvPr/>
-        </p:nvSpPr>
-        <p:spPr>
-          <a:xfrm>
-            <a:off x="640080" y="1188720"/>
-            <a:ext cx="7863840" cy="5212080"/>
-          </a:xfrm>
-          <a:prstGeom prst="rect">
-            <a:avLst/>
-          </a:prstGeom>
-          <a:noFill/>
-        </p:spPr>
-        <p:txBody>
-          <a:bodyPr wrap="square">
-            <a:spAutoFit/>
-          </a:bodyPr>
-          <a:lstStyle/>
-          <a:p>
-            <a:pPr>
-              <a:spcBef>
-                <a:spcPts val="800"/>
-              </a:spcBef>
-              <a:defRPr sz="1800">
-                <a:solidFill>
-                  <a:srgbClr val="F1F5F9"/>
-                </a:solidFill>
-              </a:defRPr>
-            </a:pPr>
-            <a:r>
-              <a:t>Scenario: Track open PRs and alert on staleness</a:t>
-            </a:r>
-          </a:p>
-          <a:p>
-            <a:pPr>
-              <a:spcBef>
-                <a:spcPts val="800"/>
-              </a:spcBef>
-              <a:defRPr sz="1800">
-                <a:solidFill>
-                  <a:srgbClr val="F1F5F9"/>
-                </a:solidFill>
-              </a:defRPr>
-            </a:pPr>
-          </a:p>
-          <a:p>
-            <a:pPr>
-              <a:spcBef>
-                <a:spcPts val="800"/>
-              </a:spcBef>
-              <a:defRPr sz="1800">
-                <a:solidFill>
-                  <a:srgbClr val="F1F5F9"/>
-                </a:solidFill>
-              </a:defRPr>
-            </a:pPr>
-            <a:r>
-              <a:t>Implementation:</a:t>
-            </a:r>
-          </a:p>
-          <a:p>
-            <a:pPr>
-              <a:spcBef>
-                <a:spcPts val="800"/>
-              </a:spcBef>
-              <a:defRPr sz="1800">
-                <a:solidFill>
-                  <a:srgbClr val="F1F5F9"/>
-                </a:solidFill>
-              </a:defRPr>
-            </a:pPr>
-            <a:r>
-              <a:t>• Heartbeat watches open PRs</a:t>
-            </a:r>
-          </a:p>
-          <a:p>
-            <a:pPr>
-              <a:spcBef>
-                <a:spcPts val="800"/>
-              </a:spcBef>
-              <a:defRPr sz="1800">
-                <a:solidFill>
-                  <a:srgbClr val="F1F5F9"/>
-                </a:solidFill>
-              </a:defRPr>
-            </a:pPr>
-            <a:r>
-              <a:t>• Alerts when stale (&gt;4 hours no review)</a:t>
-            </a:r>
-          </a:p>
-          <a:p>
-            <a:pPr>
-              <a:spcBef>
-                <a:spcPts val="800"/>
-              </a:spcBef>
-              <a:defRPr sz="1800">
-                <a:solidFill>
-                  <a:srgbClr val="F1F5F9"/>
-                </a:solidFill>
-              </a:defRPr>
-            </a:pPr>
-            <a:r>
-              <a:t>• Auto-pings reviewers via Slack</a:t>
-            </a:r>
-          </a:p>
-          <a:p>
-            <a:pPr>
-              <a:spcBef>
-                <a:spcPts val="800"/>
-              </a:spcBef>
-              <a:defRPr sz="1800">
-                <a:solidFill>
-                  <a:srgbClr val="F1F5F9"/>
-                </a:solidFill>
-              </a:defRPr>
-            </a:pPr>
-          </a:p>
-          <a:p>
-            <a:pPr>
-              <a:spcBef>
-                <a:spcPts val="800"/>
-              </a:spcBef>
-              <a:defRPr sz="1800">
-                <a:solidFill>
-                  <a:srgbClr val="F1F5F9"/>
-                </a:solidFill>
-              </a:defRPr>
-            </a:pPr>
-            <a:r>
-              <a:t>Uses: Heartbeats + Slack integration</a:t>
-            </a:r>
-          </a:p>
-          <a:p>
-            <a:pPr>
-              <a:spcBef>
-                <a:spcPts val="800"/>
-              </a:spcBef>
-              <a:defRPr sz="1800">
-                <a:solidFill>
-                  <a:srgbClr val="F1F5F9"/>
-                </a:solidFill>
-              </a:defRPr>
-            </a:pPr>
-          </a:p>
-          <a:p>
-            <a:pPr>
-              <a:spcBef>
-                <a:spcPts val="800"/>
-              </a:spcBef>
-              <a:defRPr sz="1800">
-                <a:solidFill>
-                  <a:srgbClr val="F1F5F9"/>
-                </a:solidFill>
-              </a:defRPr>
-            </a:pPr>
-            <a:r>
-              <a:t>Note: Example scenario based on documented capabilities</a:t>
             </a:r>
           </a:p>
         </p:txBody>
@@ -9351,7 +9343,7 @@
               </a:defRPr>
             </a:pPr>
             <a:r>
-              <a:t>Example: Nightly Security Audit</a:t>
+              <a:t>Example: 24/7 PR Monitoring</a:t>
             </a:r>
           </a:p>
         </p:txBody>
@@ -9424,7 +9416,7 @@
               </a:defRPr>
             </a:pPr>
             <a:r>
-              <a:t>Scenario: Automated security scanning</a:t>
+              <a:t>Scenario: Track open PRs and alert on staleness</a:t>
             </a:r>
           </a:p>
           <a:p>
@@ -9466,94 +9458,91 @@
               </a:defRPr>
             </a:pPr>
             <a:r>
-              <a:t>• Cron job at 2am</a:t>
-            </a:r>
-          </a:p>
-          <a:p>
-            <a:pPr>
-              <a:spcBef>
-                <a:spcPts val="800"/>
-              </a:spcBef>
-              <a:defRPr sz="1800">
-                <a:solidFill>
-                  <a:srgbClr val="F1F5F9"/>
-                </a:solidFill>
-              </a:defRPr>
-            </a:pPr>
-            <a:r>
-              <a:t>• Spawns subagents (one per repo)</a:t>
-            </a:r>
-          </a:p>
-          <a:p>
-            <a:pPr>
-              <a:spcBef>
-                <a:spcPts val="800"/>
-              </a:spcBef>
-              <a:defRPr sz="1800">
-                <a:solidFill>
-                  <a:srgbClr val="F1F5F9"/>
-                </a:solidFill>
-              </a:defRPr>
-            </a:pPr>
-            <a:r>
-              <a:t>• Scans for secrets, vulnerabilities, misconfigurations</a:t>
-            </a:r>
-          </a:p>
-          <a:p>
-            <a:pPr>
-              <a:spcBef>
-                <a:spcPts val="800"/>
-              </a:spcBef>
-              <a:defRPr sz="1800">
-                <a:solidFill>
-                  <a:srgbClr val="F1F5F9"/>
-                </a:solidFill>
-              </a:defRPr>
-            </a:pPr>
-            <a:r>
-              <a:t>• Aggregates findings into report</a:t>
-            </a:r>
-          </a:p>
-          <a:p>
-            <a:pPr>
-              <a:spcBef>
-                <a:spcPts val="800"/>
-              </a:spcBef>
-              <a:defRPr sz="1800">
-                <a:solidFill>
-                  <a:srgbClr val="F1F5F9"/>
-                </a:solidFill>
-              </a:defRPr>
-            </a:pPr>
-            <a:r>
-              <a:t>• Files HIGH/CRITICAL tickets</a:t>
-            </a:r>
-          </a:p>
-          <a:p>
-            <a:pPr>
-              <a:spcBef>
-                <a:spcPts val="800"/>
-              </a:spcBef>
-              <a:defRPr sz="1800">
-                <a:solidFill>
-                  <a:srgbClr val="F1F5F9"/>
-                </a:solidFill>
-              </a:defRPr>
-            </a:pPr>
-          </a:p>
-          <a:p>
-            <a:pPr>
-              <a:spcBef>
-                <a:spcPts val="800"/>
-              </a:spcBef>
-              <a:defRPr sz="1800">
-                <a:solidFill>
-                  <a:srgbClr val="F1F5F9"/>
-                </a:solidFill>
-              </a:defRPr>
-            </a:pPr>
-            <a:r>
-              <a:t>Uses: Cron + Subagents + Task automation</a:t>
+              <a:t>• Heartbeat watches open PRs</a:t>
+            </a:r>
+          </a:p>
+          <a:p>
+            <a:pPr>
+              <a:spcBef>
+                <a:spcPts val="800"/>
+              </a:spcBef>
+              <a:defRPr sz="1800">
+                <a:solidFill>
+                  <a:srgbClr val="F1F5F9"/>
+                </a:solidFill>
+              </a:defRPr>
+            </a:pPr>
+            <a:r>
+              <a:t>• Alerts when stale (&gt;4 hours no review)</a:t>
+            </a:r>
+          </a:p>
+          <a:p>
+            <a:pPr>
+              <a:spcBef>
+                <a:spcPts val="800"/>
+              </a:spcBef>
+              <a:defRPr sz="1800">
+                <a:solidFill>
+                  <a:srgbClr val="F1F5F9"/>
+                </a:solidFill>
+              </a:defRPr>
+            </a:pPr>
+            <a:r>
+              <a:t>• Auto-pings reviewers via Slack</a:t>
+            </a:r>
+          </a:p>
+          <a:p>
+            <a:pPr>
+              <a:spcBef>
+                <a:spcPts val="800"/>
+              </a:spcBef>
+              <a:defRPr sz="1800">
+                <a:solidFill>
+                  <a:srgbClr val="F1F5F9"/>
+                </a:solidFill>
+              </a:defRPr>
+            </a:pPr>
+          </a:p>
+          <a:p>
+            <a:pPr>
+              <a:spcBef>
+                <a:spcPts val="800"/>
+              </a:spcBef>
+              <a:defRPr sz="1800">
+                <a:solidFill>
+                  <a:srgbClr val="F1F5F9"/>
+                </a:solidFill>
+              </a:defRPr>
+            </a:pPr>
+            <a:r>
+              <a:t>Uses: Heartbeats + Slack integration</a:t>
+            </a:r>
+          </a:p>
+          <a:p>
+            <a:pPr>
+              <a:spcBef>
+                <a:spcPts val="800"/>
+              </a:spcBef>
+              <a:defRPr sz="1800">
+                <a:solidFill>
+                  <a:srgbClr val="F1F5F9"/>
+                </a:solidFill>
+              </a:defRPr>
+            </a:pPr>
+          </a:p>
+          <a:p>
+            <a:pPr>
+              <a:spcBef>
+                <a:spcPts val="800"/>
+              </a:spcBef>
+              <a:defRPr sz="1800">
+                <a:solidFill>
+                  <a:srgbClr val="F1F5F9"/>
+                </a:solidFill>
+              </a:defRPr>
+            </a:pPr>
+            <a:r>
+              <a:t>Note: Example scenario based on documented capabilities</a:t>
             </a:r>
           </a:p>
         </p:txBody>
@@ -9614,7 +9603,7 @@
               </a:defRPr>
             </a:pPr>
             <a:r>
-              <a:t>Example: Incident Response</a:t>
+              <a:t>Example: Nightly Security Audit</a:t>
             </a:r>
           </a:p>
         </p:txBody>
@@ -9687,7 +9676,7 @@
               </a:defRPr>
             </a:pPr>
             <a:r>
-              <a:t>Scenario: Automated triage and RCA</a:t>
+              <a:t>Scenario: Automated security scanning</a:t>
             </a:r>
           </a:p>
           <a:p>
@@ -9729,109 +9718,94 @@
               </a:defRPr>
             </a:pPr>
             <a:r>
-              <a:t>• Webhook from PagerDuty</a:t>
-            </a:r>
-          </a:p>
-          <a:p>
-            <a:pPr>
-              <a:spcBef>
-                <a:spcPts val="800"/>
-              </a:spcBef>
-              <a:defRPr sz="1800">
-                <a:solidFill>
-                  <a:srgbClr val="F1F5F9"/>
-                </a:solidFill>
-              </a:defRPr>
-            </a:pPr>
-            <a:r>
-              <a:t>• Crew triages alert</a:t>
-            </a:r>
-          </a:p>
-          <a:p>
-            <a:pPr>
-              <a:spcBef>
-                <a:spcPts val="800"/>
-              </a:spcBef>
-              <a:defRPr sz="1800">
-                <a:solidFill>
-                  <a:srgbClr val="F1F5F9"/>
-                </a:solidFill>
-              </a:defRPr>
-            </a:pPr>
-            <a:r>
-              <a:t>• Checks logs, metrics, recent deploys</a:t>
-            </a:r>
-          </a:p>
-          <a:p>
-            <a:pPr>
-              <a:spcBef>
-                <a:spcPts val="800"/>
-              </a:spcBef>
-              <a:defRPr sz="1800">
-                <a:solidFill>
-                  <a:srgbClr val="F1F5F9"/>
-                </a:solidFill>
-              </a:defRPr>
-            </a:pPr>
-            <a:r>
-              <a:t>• Applies known fixes (from memory/lessons)</a:t>
-            </a:r>
-          </a:p>
-          <a:p>
-            <a:pPr>
-              <a:spcBef>
-                <a:spcPts val="800"/>
-              </a:spcBef>
-              <a:defRPr sz="1800">
-                <a:solidFill>
-                  <a:srgbClr val="F1F5F9"/>
-                </a:solidFill>
-              </a:defRPr>
-            </a:pPr>
-            <a:r>
-              <a:t>• Escalates if novel</a:t>
-            </a:r>
-          </a:p>
-          <a:p>
-            <a:pPr>
-              <a:spcBef>
-                <a:spcPts val="800"/>
-              </a:spcBef>
-              <a:defRPr sz="1800">
-                <a:solidFill>
-                  <a:srgbClr val="F1F5F9"/>
-                </a:solidFill>
-              </a:defRPr>
-            </a:pPr>
-            <a:r>
-              <a:t>• Posts RCA when resolved</a:t>
-            </a:r>
-          </a:p>
-          <a:p>
-            <a:pPr>
-              <a:spcBef>
-                <a:spcPts val="800"/>
-              </a:spcBef>
-              <a:defRPr sz="1800">
-                <a:solidFill>
-                  <a:srgbClr val="F1F5F9"/>
-                </a:solidFill>
-              </a:defRPr>
-            </a:pPr>
-          </a:p>
-          <a:p>
-            <a:pPr>
-              <a:spcBef>
-                <a:spcPts val="800"/>
-              </a:spcBef>
-              <a:defRPr sz="1800">
-                <a:solidFill>
-                  <a:srgbClr val="F1F5F9"/>
-                </a:solidFill>
-              </a:defRPr>
-            </a:pPr>
-            <a:r>
-              <a:t>Uses: Webhooks + Memory + Knowledge</a:t>
+              <a:t>• Cron job at 2am</a:t>
+            </a:r>
+          </a:p>
+          <a:p>
+            <a:pPr>
+              <a:spcBef>
+                <a:spcPts val="800"/>
+              </a:spcBef>
+              <a:defRPr sz="1800">
+                <a:solidFill>
+                  <a:srgbClr val="F1F5F9"/>
+                </a:solidFill>
+              </a:defRPr>
+            </a:pPr>
+            <a:r>
+              <a:t>• Spawns subagents (one per repo)</a:t>
+            </a:r>
+          </a:p>
+          <a:p>
+            <a:pPr>
+              <a:spcBef>
+                <a:spcPts val="800"/>
+              </a:spcBef>
+              <a:defRPr sz="1800">
+                <a:solidFill>
+                  <a:srgbClr val="F1F5F9"/>
+                </a:solidFill>
+              </a:defRPr>
+            </a:pPr>
+            <a:r>
+              <a:t>• Scans for secrets, vulnerabilities, misconfigurations</a:t>
+            </a:r>
+          </a:p>
+          <a:p>
+            <a:pPr>
+              <a:spcBef>
+                <a:spcPts val="800"/>
+              </a:spcBef>
+              <a:defRPr sz="1800">
+                <a:solidFill>
+                  <a:srgbClr val="F1F5F9"/>
+                </a:solidFill>
+              </a:defRPr>
+            </a:pPr>
+            <a:r>
+              <a:t>• Aggregates findings into report</a:t>
+            </a:r>
+          </a:p>
+          <a:p>
+            <a:pPr>
+              <a:spcBef>
+                <a:spcPts val="800"/>
+              </a:spcBef>
+              <a:defRPr sz="1800">
+                <a:solidFill>
+                  <a:srgbClr val="F1F5F9"/>
+                </a:solidFill>
+              </a:defRPr>
+            </a:pPr>
+            <a:r>
+              <a:t>• Files HIGH/CRITICAL tickets</a:t>
+            </a:r>
+          </a:p>
+          <a:p>
+            <a:pPr>
+              <a:spcBef>
+                <a:spcPts val="800"/>
+              </a:spcBef>
+              <a:defRPr sz="1800">
+                <a:solidFill>
+                  <a:srgbClr val="F1F5F9"/>
+                </a:solidFill>
+              </a:defRPr>
+            </a:pPr>
+          </a:p>
+          <a:p>
+            <a:pPr>
+              <a:spcBef>
+                <a:spcPts val="800"/>
+              </a:spcBef>
+              <a:defRPr sz="1800">
+                <a:solidFill>
+                  <a:srgbClr val="F1F5F9"/>
+                </a:solidFill>
+              </a:defRPr>
+            </a:pPr>
+            <a:r>
+              <a:t>Uses: Cron + Subagents + Task automation</a:t>
             </a:r>
           </a:p>
         </p:txBody>
@@ -9892,7 +9866,7 @@
               </a:defRPr>
             </a:pPr>
             <a:r>
-              <a:t>CI/CD Integration (3 Modes)</a:t>
+              <a:t>Example: Incident Response</a:t>
             </a:r>
           </a:p>
         </p:txBody>
@@ -9922,12 +9896,12 @@
             <a:pPr>
               <a:defRPr sz="1100" b="1">
                 <a:solidFill>
-                  <a:srgbClr val="10B981"/>
-                </a:solidFill>
-              </a:defRPr>
-            </a:pPr>
-            <a:r>
-              <a:t>✓ Verified</a:t>
+                  <a:srgbClr val="F59E0B"/>
+                </a:solidFill>
+              </a:defRPr>
+            </a:pPr>
+            <a:r>
+              <a:t>⚠ To Be Verified</a:t>
             </a:r>
           </a:p>
         </p:txBody>
@@ -9965,181 +9939,151 @@
               </a:defRPr>
             </a:pPr>
             <a:r>
-              <a:t>Mode 1: CLI Headless</a:t>
-            </a:r>
-          </a:p>
-          <a:p>
-            <a:pPr>
-              <a:spcBef>
-                <a:spcPts val="800"/>
-              </a:spcBef>
-              <a:defRPr sz="1800">
-                <a:solidFill>
-                  <a:srgbClr val="F1F5F9"/>
-                </a:solidFill>
-              </a:defRPr>
-            </a:pPr>
-            <a:r>
-              <a:t>• kiro-cli chat --no-interactive "&lt;prompt&gt;" in pipeline</a:t>
-            </a:r>
-          </a:p>
-          <a:p>
-            <a:pPr>
-              <a:spcBef>
-                <a:spcPts val="800"/>
-              </a:spcBef>
-              <a:defRPr sz="1800">
-                <a:solidFill>
-                  <a:srgbClr val="F1F5F9"/>
-                </a:solidFill>
-              </a:defRPr>
-            </a:pPr>
-            <a:r>
-              <a:t>• Engine version: --engine v3 (not --v3)</a:t>
-            </a:r>
-          </a:p>
-          <a:p>
-            <a:pPr>
-              <a:spcBef>
-                <a:spcPts val="800"/>
-              </a:spcBef>
-              <a:defRPr sz="1800">
-                <a:solidFill>
-                  <a:srgbClr val="F1F5F9"/>
-                </a:solidFill>
-              </a:defRPr>
-            </a:pPr>
-            <a:r>
-              <a:t>• Use case: Simple code generation</a:t>
-            </a:r>
-          </a:p>
-          <a:p>
-            <a:pPr>
-              <a:spcBef>
-                <a:spcPts val="800"/>
-              </a:spcBef>
-              <a:defRPr sz="1800">
-                <a:solidFill>
-                  <a:srgbClr val="F1F5F9"/>
-                </a:solidFill>
-              </a:defRPr>
-            </a:pPr>
-          </a:p>
-          <a:p>
-            <a:pPr>
-              <a:spcBef>
-                <a:spcPts val="800"/>
-              </a:spcBef>
-              <a:defRPr sz="1800">
-                <a:solidFill>
-                  <a:srgbClr val="F1F5F9"/>
-                </a:solidFill>
-              </a:defRPr>
-            </a:pPr>
-            <a:r>
-              <a:t>Mode 2: Crew Webhooks</a:t>
-            </a:r>
-          </a:p>
-          <a:p>
-            <a:pPr>
-              <a:spcBef>
-                <a:spcPts val="800"/>
-              </a:spcBef>
-              <a:defRPr sz="1800">
-                <a:solidFill>
-                  <a:srgbClr val="F1F5F9"/>
-                </a:solidFill>
-              </a:defRPr>
-            </a:pPr>
-            <a:r>
-              <a:t>• CI pipeline calls Crew on events</a:t>
-            </a:r>
-          </a:p>
-          <a:p>
-            <a:pPr>
-              <a:spcBef>
-                <a:spcPts val="800"/>
-              </a:spcBef>
-              <a:defRPr sz="1800">
-                <a:solidFill>
-                  <a:srgbClr val="F1F5F9"/>
-                </a:solidFill>
-              </a:defRPr>
-            </a:pPr>
-            <a:r>
-              <a:t>• Crew analyzes and reports via Slack/Dashboard</a:t>
-            </a:r>
-          </a:p>
-          <a:p>
-            <a:pPr>
-              <a:spcBef>
-                <a:spcPts val="800"/>
-              </a:spcBef>
-              <a:defRPr sz="1800">
-                <a:solidFill>
-                  <a:srgbClr val="F1F5F9"/>
-                </a:solidFill>
-              </a:defRPr>
-            </a:pPr>
-            <a:r>
-              <a:t>• Use case: Root cause analysis, monitoring</a:t>
-            </a:r>
-          </a:p>
-          <a:p>
-            <a:pPr>
-              <a:spcBef>
-                <a:spcPts val="800"/>
-              </a:spcBef>
-              <a:defRPr sz="1800">
-                <a:solidFill>
-                  <a:srgbClr val="F1F5F9"/>
-                </a:solidFill>
-              </a:defRPr>
-            </a:pPr>
-          </a:p>
-          <a:p>
-            <a:pPr>
-              <a:spcBef>
-                <a:spcPts val="800"/>
-              </a:spcBef>
-              <a:defRPr sz="1800">
-                <a:solidFill>
-                  <a:srgbClr val="F1F5F9"/>
-                </a:solidFill>
-              </a:defRPr>
-            </a:pPr>
-            <a:r>
-              <a:t>Mode 3: Crew Cron</a:t>
-            </a:r>
-          </a:p>
-          <a:p>
-            <a:pPr>
-              <a:spcBef>
-                <a:spcPts val="800"/>
-              </a:spcBef>
-              <a:defRPr sz="1800">
-                <a:solidFill>
-                  <a:srgbClr val="F1F5F9"/>
-                </a:solidFill>
-              </a:defRPr>
-            </a:pPr>
-            <a:r>
-              <a:t>• Periodic checks of CI/PR status</a:t>
-            </a:r>
-          </a:p>
-          <a:p>
-            <a:pPr>
-              <a:spcBef>
-                <a:spcPts val="800"/>
-              </a:spcBef>
-              <a:defRPr sz="1800">
-                <a:solidFill>
-                  <a:srgbClr val="F1F5F9"/>
-                </a:solidFill>
-              </a:defRPr>
-            </a:pPr>
-            <a:r>
-              <a:t>• Use case: Nightly audits, health checks</a:t>
+              <a:t>Scenario: Automated triage and RCA</a:t>
+            </a:r>
+          </a:p>
+          <a:p>
+            <a:pPr>
+              <a:spcBef>
+                <a:spcPts val="800"/>
+              </a:spcBef>
+              <a:defRPr sz="1800">
+                <a:solidFill>
+                  <a:srgbClr val="F1F5F9"/>
+                </a:solidFill>
+              </a:defRPr>
+            </a:pPr>
+          </a:p>
+          <a:p>
+            <a:pPr>
+              <a:spcBef>
+                <a:spcPts val="800"/>
+              </a:spcBef>
+              <a:defRPr sz="1800">
+                <a:solidFill>
+                  <a:srgbClr val="F1F5F9"/>
+                </a:solidFill>
+              </a:defRPr>
+            </a:pPr>
+            <a:r>
+              <a:t>Implementation:</a:t>
+            </a:r>
+          </a:p>
+          <a:p>
+            <a:pPr>
+              <a:spcBef>
+                <a:spcPts val="800"/>
+              </a:spcBef>
+              <a:defRPr sz="1800">
+                <a:solidFill>
+                  <a:srgbClr val="F1F5F9"/>
+                </a:solidFill>
+              </a:defRPr>
+            </a:pPr>
+            <a:r>
+              <a:t>• Webhook from PagerDuty</a:t>
+            </a:r>
+          </a:p>
+          <a:p>
+            <a:pPr>
+              <a:spcBef>
+                <a:spcPts val="800"/>
+              </a:spcBef>
+              <a:defRPr sz="1800">
+                <a:solidFill>
+                  <a:srgbClr val="F1F5F9"/>
+                </a:solidFill>
+              </a:defRPr>
+            </a:pPr>
+            <a:r>
+              <a:t>• Crew triages alert</a:t>
+            </a:r>
+          </a:p>
+          <a:p>
+            <a:pPr>
+              <a:spcBef>
+                <a:spcPts val="800"/>
+              </a:spcBef>
+              <a:defRPr sz="1800">
+                <a:solidFill>
+                  <a:srgbClr val="F1F5F9"/>
+                </a:solidFill>
+              </a:defRPr>
+            </a:pPr>
+            <a:r>
+              <a:t>• Checks logs, metrics, recent deploys</a:t>
+            </a:r>
+          </a:p>
+          <a:p>
+            <a:pPr>
+              <a:spcBef>
+                <a:spcPts val="800"/>
+              </a:spcBef>
+              <a:defRPr sz="1800">
+                <a:solidFill>
+                  <a:srgbClr val="F1F5F9"/>
+                </a:solidFill>
+              </a:defRPr>
+            </a:pPr>
+            <a:r>
+              <a:t>• Applies known fixes (from memory/lessons)</a:t>
+            </a:r>
+          </a:p>
+          <a:p>
+            <a:pPr>
+              <a:spcBef>
+                <a:spcPts val="800"/>
+              </a:spcBef>
+              <a:defRPr sz="1800">
+                <a:solidFill>
+                  <a:srgbClr val="F1F5F9"/>
+                </a:solidFill>
+              </a:defRPr>
+            </a:pPr>
+            <a:r>
+              <a:t>• Escalates if novel</a:t>
+            </a:r>
+          </a:p>
+          <a:p>
+            <a:pPr>
+              <a:spcBef>
+                <a:spcPts val="800"/>
+              </a:spcBef>
+              <a:defRPr sz="1800">
+                <a:solidFill>
+                  <a:srgbClr val="F1F5F9"/>
+                </a:solidFill>
+              </a:defRPr>
+            </a:pPr>
+            <a:r>
+              <a:t>• Posts RCA when resolved</a:t>
+            </a:r>
+          </a:p>
+          <a:p>
+            <a:pPr>
+              <a:spcBef>
+                <a:spcPts val="800"/>
+              </a:spcBef>
+              <a:defRPr sz="1800">
+                <a:solidFill>
+                  <a:srgbClr val="F1F5F9"/>
+                </a:solidFill>
+              </a:defRPr>
+            </a:pPr>
+          </a:p>
+          <a:p>
+            <a:pPr>
+              <a:spcBef>
+                <a:spcPts val="800"/>
+              </a:spcBef>
+              <a:defRPr sz="1800">
+                <a:solidFill>
+                  <a:srgbClr val="F1F5F9"/>
+                </a:solidFill>
+              </a:defRPr>
+            </a:pPr>
+            <a:r>
+              <a:t>Uses: Webhooks + Memory + Knowledge</a:t>
             </a:r>
           </a:p>
         </p:txBody>
@@ -10153,6 +10097,314 @@
 </file>
 
 <file path=ppt/slides/slide38.xml><?xml version="1.0" encoding="utf-8"?>
+<p:sld xmlns:a="http://schemas.openxmlformats.org/drawingml/2006/main" xmlns:p="http://schemas.openxmlformats.org/presentationml/2006/main" xmlns:r="http://schemas.openxmlformats.org/officeDocument/2006/relationships">
+  <p:cSld>
+    <p:bg>
+      <p:bgPr>
+        <a:solidFill>
+          <a:srgbClr val="0F172A"/>
+        </a:solidFill>
+        <a:effectLst/>
+      </p:bgPr>
+    </p:bg>
+    <p:spTree>
+      <p:nvGrpSpPr>
+        <p:cNvPr id="1" name=""/>
+        <p:cNvGrpSpPr/>
+        <p:nvPr/>
+      </p:nvGrpSpPr>
+      <p:grpSpPr/>
+      <p:sp>
+        <p:nvSpPr>
+          <p:cNvPr id="2" name="TextBox 1"/>
+          <p:cNvSpPr txBox="1"/>
+          <p:nvPr/>
+        </p:nvSpPr>
+        <p:spPr>
+          <a:xfrm>
+            <a:off x="457200" y="365760"/>
+            <a:ext cx="6858000" cy="548640"/>
+          </a:xfrm>
+          <a:prstGeom prst="rect">
+            <a:avLst/>
+          </a:prstGeom>
+          <a:noFill/>
+        </p:spPr>
+        <p:txBody>
+          <a:bodyPr wrap="none">
+            <a:spAutoFit/>
+          </a:bodyPr>
+          <a:lstStyle/>
+          <a:p>
+            <a:pPr>
+              <a:defRPr sz="3200" b="1">
+                <a:solidFill>
+                  <a:srgbClr val="2563EB"/>
+                </a:solidFill>
+              </a:defRPr>
+            </a:pPr>
+            <a:r>
+              <a:t>CI/CD Integration (3 Modes)</a:t>
+            </a:r>
+          </a:p>
+        </p:txBody>
+      </p:sp>
+      <p:sp>
+        <p:nvSpPr>
+          <p:cNvPr id="3" name="TextBox 2"/>
+          <p:cNvSpPr txBox="1"/>
+          <p:nvPr/>
+        </p:nvSpPr>
+        <p:spPr>
+          <a:xfrm>
+            <a:off x="7498079" y="411480"/>
+            <a:ext cx="1371600" cy="365760"/>
+          </a:xfrm>
+          <a:prstGeom prst="rect">
+            <a:avLst/>
+          </a:prstGeom>
+          <a:noFill/>
+        </p:spPr>
+        <p:txBody>
+          <a:bodyPr wrap="none">
+            <a:spAutoFit/>
+          </a:bodyPr>
+          <a:lstStyle/>
+          <a:p>
+            <a:pPr>
+              <a:defRPr sz="1100" b="1">
+                <a:solidFill>
+                  <a:srgbClr val="10B981"/>
+                </a:solidFill>
+              </a:defRPr>
+            </a:pPr>
+            <a:r>
+              <a:t>✓ Verified</a:t>
+            </a:r>
+          </a:p>
+        </p:txBody>
+      </p:sp>
+      <p:sp>
+        <p:nvSpPr>
+          <p:cNvPr id="4" name="TextBox 3"/>
+          <p:cNvSpPr txBox="1"/>
+          <p:nvPr/>
+        </p:nvSpPr>
+        <p:spPr>
+          <a:xfrm>
+            <a:off x="640080" y="1188720"/>
+            <a:ext cx="7863840" cy="5212080"/>
+          </a:xfrm>
+          <a:prstGeom prst="rect">
+            <a:avLst/>
+          </a:prstGeom>
+          <a:noFill/>
+        </p:spPr>
+        <p:txBody>
+          <a:bodyPr wrap="square">
+            <a:spAutoFit/>
+          </a:bodyPr>
+          <a:lstStyle/>
+          <a:p>
+            <a:pPr>
+              <a:spcBef>
+                <a:spcPts val="800"/>
+              </a:spcBef>
+              <a:defRPr sz="1800">
+                <a:solidFill>
+                  <a:srgbClr val="F1F5F9"/>
+                </a:solidFill>
+              </a:defRPr>
+            </a:pPr>
+            <a:r>
+              <a:t>Mode 1: CLI Headless</a:t>
+            </a:r>
+          </a:p>
+          <a:p>
+            <a:pPr>
+              <a:spcBef>
+                <a:spcPts val="800"/>
+              </a:spcBef>
+              <a:defRPr sz="1800">
+                <a:solidFill>
+                  <a:srgbClr val="F1F5F9"/>
+                </a:solidFill>
+              </a:defRPr>
+            </a:pPr>
+            <a:r>
+              <a:t>• kiro-cli chat --no-interactive "&lt;prompt&gt;" in pipeline</a:t>
+            </a:r>
+          </a:p>
+          <a:p>
+            <a:pPr>
+              <a:spcBef>
+                <a:spcPts val="800"/>
+              </a:spcBef>
+              <a:defRPr sz="1800">
+                <a:solidFill>
+                  <a:srgbClr val="F1F5F9"/>
+                </a:solidFill>
+              </a:defRPr>
+            </a:pPr>
+            <a:r>
+              <a:t>• Engine version: --engine v3 (not --v3)</a:t>
+            </a:r>
+          </a:p>
+          <a:p>
+            <a:pPr>
+              <a:spcBef>
+                <a:spcPts val="800"/>
+              </a:spcBef>
+              <a:defRPr sz="1800">
+                <a:solidFill>
+                  <a:srgbClr val="F1F5F9"/>
+                </a:solidFill>
+              </a:defRPr>
+            </a:pPr>
+            <a:r>
+              <a:t>• Use case: Simple code generation</a:t>
+            </a:r>
+          </a:p>
+          <a:p>
+            <a:pPr>
+              <a:spcBef>
+                <a:spcPts val="800"/>
+              </a:spcBef>
+              <a:defRPr sz="1800">
+                <a:solidFill>
+                  <a:srgbClr val="F1F5F9"/>
+                </a:solidFill>
+              </a:defRPr>
+            </a:pPr>
+          </a:p>
+          <a:p>
+            <a:pPr>
+              <a:spcBef>
+                <a:spcPts val="800"/>
+              </a:spcBef>
+              <a:defRPr sz="1800">
+                <a:solidFill>
+                  <a:srgbClr val="F1F5F9"/>
+                </a:solidFill>
+              </a:defRPr>
+            </a:pPr>
+            <a:r>
+              <a:t>Mode 2: Crew Webhooks</a:t>
+            </a:r>
+          </a:p>
+          <a:p>
+            <a:pPr>
+              <a:spcBef>
+                <a:spcPts val="800"/>
+              </a:spcBef>
+              <a:defRPr sz="1800">
+                <a:solidFill>
+                  <a:srgbClr val="F1F5F9"/>
+                </a:solidFill>
+              </a:defRPr>
+            </a:pPr>
+            <a:r>
+              <a:t>• CI pipeline calls Crew on events</a:t>
+            </a:r>
+          </a:p>
+          <a:p>
+            <a:pPr>
+              <a:spcBef>
+                <a:spcPts val="800"/>
+              </a:spcBef>
+              <a:defRPr sz="1800">
+                <a:solidFill>
+                  <a:srgbClr val="F1F5F9"/>
+                </a:solidFill>
+              </a:defRPr>
+            </a:pPr>
+            <a:r>
+              <a:t>• Crew analyzes and reports via Slack/Dashboard</a:t>
+            </a:r>
+          </a:p>
+          <a:p>
+            <a:pPr>
+              <a:spcBef>
+                <a:spcPts val="800"/>
+              </a:spcBef>
+              <a:defRPr sz="1800">
+                <a:solidFill>
+                  <a:srgbClr val="F1F5F9"/>
+                </a:solidFill>
+              </a:defRPr>
+            </a:pPr>
+            <a:r>
+              <a:t>• Use case: Root cause analysis, monitoring</a:t>
+            </a:r>
+          </a:p>
+          <a:p>
+            <a:pPr>
+              <a:spcBef>
+                <a:spcPts val="800"/>
+              </a:spcBef>
+              <a:defRPr sz="1800">
+                <a:solidFill>
+                  <a:srgbClr val="F1F5F9"/>
+                </a:solidFill>
+              </a:defRPr>
+            </a:pPr>
+          </a:p>
+          <a:p>
+            <a:pPr>
+              <a:spcBef>
+                <a:spcPts val="800"/>
+              </a:spcBef>
+              <a:defRPr sz="1800">
+                <a:solidFill>
+                  <a:srgbClr val="F1F5F9"/>
+                </a:solidFill>
+              </a:defRPr>
+            </a:pPr>
+            <a:r>
+              <a:t>Mode 3: Crew Cron</a:t>
+            </a:r>
+          </a:p>
+          <a:p>
+            <a:pPr>
+              <a:spcBef>
+                <a:spcPts val="800"/>
+              </a:spcBef>
+              <a:defRPr sz="1800">
+                <a:solidFill>
+                  <a:srgbClr val="F1F5F9"/>
+                </a:solidFill>
+              </a:defRPr>
+            </a:pPr>
+            <a:r>
+              <a:t>• Periodic checks of CI/PR status</a:t>
+            </a:r>
+          </a:p>
+          <a:p>
+            <a:pPr>
+              <a:spcBef>
+                <a:spcPts val="800"/>
+              </a:spcBef>
+              <a:defRPr sz="1800">
+                <a:solidFill>
+                  <a:srgbClr val="F1F5F9"/>
+                </a:solidFill>
+              </a:defRPr>
+            </a:pPr>
+            <a:r>
+              <a:t>• Use case: Nightly audits, health checks</a:t>
+            </a:r>
+          </a:p>
+        </p:txBody>
+      </p:sp>
+    </p:spTree>
+  </p:cSld>
+  <p:clrMapOvr>
+    <a:masterClrMapping/>
+  </p:clrMapOvr>
+</p:sld>
+</file>
+
+<file path=ppt/slides/slide39.xml><?xml version="1.0" encoding="utf-8"?>
 <p:sld xmlns:a="http://schemas.openxmlformats.org/drawingml/2006/main" xmlns:p="http://schemas.openxmlformats.org/presentationml/2006/main" xmlns:r="http://schemas.openxmlformats.org/officeDocument/2006/relationships">
   <p:cSld>
     <p:bg>
@@ -10201,344 +10453,6 @@
             </a:pPr>
             <a:r>
               <a:t>Part 5: Getting Started</a:t>
-            </a:r>
-          </a:p>
-        </p:txBody>
-      </p:sp>
-    </p:spTree>
-  </p:cSld>
-  <p:clrMapOvr>
-    <a:masterClrMapping/>
-  </p:clrMapOvr>
-</p:sld>
-</file>
-
-<file path=ppt/slides/slide39.xml><?xml version="1.0" encoding="utf-8"?>
-<p:sld xmlns:a="http://schemas.openxmlformats.org/drawingml/2006/main" xmlns:p="http://schemas.openxmlformats.org/presentationml/2006/main" xmlns:r="http://schemas.openxmlformats.org/officeDocument/2006/relationships">
-  <p:cSld>
-    <p:bg>
-      <p:bgPr>
-        <a:solidFill>
-          <a:srgbClr val="0F172A"/>
-        </a:solidFill>
-        <a:effectLst/>
-      </p:bgPr>
-    </p:bg>
-    <p:spTree>
-      <p:nvGrpSpPr>
-        <p:cNvPr id="1" name=""/>
-        <p:cNvGrpSpPr/>
-        <p:nvPr/>
-      </p:nvGrpSpPr>
-      <p:grpSpPr/>
-      <p:sp>
-        <p:nvSpPr>
-          <p:cNvPr id="2" name="TextBox 1"/>
-          <p:cNvSpPr txBox="1"/>
-          <p:nvPr/>
-        </p:nvSpPr>
-        <p:spPr>
-          <a:xfrm>
-            <a:off x="457200" y="365760"/>
-            <a:ext cx="8229600" cy="548640"/>
-          </a:xfrm>
-          <a:prstGeom prst="rect">
-            <a:avLst/>
-          </a:prstGeom>
-          <a:noFill/>
-        </p:spPr>
-        <p:txBody>
-          <a:bodyPr wrap="none">
-            <a:spAutoFit/>
-          </a:bodyPr>
-          <a:lstStyle/>
-          <a:p>
-            <a:pPr>
-              <a:defRPr sz="3200" b="1">
-                <a:solidFill>
-                  <a:srgbClr val="2563EB"/>
-                </a:solidFill>
-              </a:defRPr>
-            </a:pPr>
-            <a:r>
-              <a:t>Installation</a:t>
-            </a:r>
-          </a:p>
-        </p:txBody>
-      </p:sp>
-      <p:sp>
-        <p:nvSpPr>
-          <p:cNvPr id="3" name="TextBox 2"/>
-          <p:cNvSpPr txBox="1"/>
-          <p:nvPr/>
-        </p:nvSpPr>
-        <p:spPr>
-          <a:xfrm>
-            <a:off x="457200" y="1188720"/>
-            <a:ext cx="4114800" cy="5212080"/>
-          </a:xfrm>
-          <a:prstGeom prst="rect">
-            <a:avLst/>
-          </a:prstGeom>
-          <a:noFill/>
-        </p:spPr>
-        <p:txBody>
-          <a:bodyPr wrap="square">
-            <a:spAutoFit/>
-          </a:bodyPr>
-          <a:lstStyle/>
-          <a:p>
-            <a:pPr>
-              <a:spcBef>
-                <a:spcPts val="600"/>
-              </a:spcBef>
-              <a:defRPr sz="1600">
-                <a:solidFill>
-                  <a:srgbClr val="F1F5F9"/>
-                </a:solidFill>
-              </a:defRPr>
-            </a:pPr>
-            <a:r>
-              <a:t>Option 1: Desktop App (Recommended)</a:t>
-            </a:r>
-          </a:p>
-          <a:p>
-            <a:pPr>
-              <a:spcBef>
-                <a:spcPts val="600"/>
-              </a:spcBef>
-              <a:defRPr sz="1600">
-                <a:solidFill>
-                  <a:srgbClr val="F1F5F9"/>
-                </a:solidFill>
-              </a:defRPr>
-            </a:pPr>
-            <a:r>
-              <a:t>1. Download (.dmg or .AppImage)</a:t>
-            </a:r>
-          </a:p>
-          <a:p>
-            <a:pPr>
-              <a:spcBef>
-                <a:spcPts val="600"/>
-              </a:spcBef>
-              <a:defRPr sz="1600">
-                <a:solidFill>
-                  <a:srgbClr val="F1F5F9"/>
-                </a:solidFill>
-              </a:defRPr>
-            </a:pPr>
-            <a:r>
-              <a:t>2. Launch (auto-starts Gateway)</a:t>
-            </a:r>
-          </a:p>
-          <a:p>
-            <a:pPr>
-              <a:spcBef>
-                <a:spcPts val="600"/>
-              </a:spcBef>
-              <a:defRPr sz="1600">
-                <a:solidFill>
-                  <a:srgbClr val="F1F5F9"/>
-                </a:solidFill>
-              </a:defRPr>
-            </a:pPr>
-            <a:r>
-              <a:t>3. Authenticate (device-code sign-in)</a:t>
-            </a:r>
-          </a:p>
-          <a:p>
-            <a:pPr>
-              <a:spcBef>
-                <a:spcPts val="600"/>
-              </a:spcBef>
-              <a:defRPr sz="1600">
-                <a:solidFill>
-                  <a:srgbClr val="F1F5F9"/>
-                </a:solidFill>
-              </a:defRPr>
-            </a:pPr>
-            <a:r>
-              <a:t>4. Start chatting</a:t>
-            </a:r>
-          </a:p>
-          <a:p>
-            <a:pPr>
-              <a:spcBef>
-                <a:spcPts val="600"/>
-              </a:spcBef>
-              <a:defRPr sz="1600">
-                <a:solidFill>
-                  <a:srgbClr val="F1F5F9"/>
-                </a:solidFill>
-              </a:defRPr>
-            </a:pPr>
-          </a:p>
-          <a:p>
-            <a:pPr>
-              <a:spcBef>
-                <a:spcPts val="600"/>
-              </a:spcBef>
-              <a:defRPr sz="1600">
-                <a:solidFill>
-                  <a:srgbClr val="F1F5F9"/>
-                </a:solidFill>
-              </a:defRPr>
-            </a:pPr>
-            <a:r>
-              <a:t>No AWS CLI needed</a:t>
-            </a:r>
-          </a:p>
-          <a:p>
-            <a:pPr>
-              <a:spcBef>
-                <a:spcPts val="600"/>
-              </a:spcBef>
-              <a:defRPr sz="1600">
-                <a:solidFill>
-                  <a:srgbClr val="F1F5F9"/>
-                </a:solidFill>
-              </a:defRPr>
-            </a:pPr>
-            <a:r>
-              <a:t>No Bedrock configuration needed</a:t>
-            </a:r>
-          </a:p>
-        </p:txBody>
-      </p:sp>
-      <p:sp>
-        <p:nvSpPr>
-          <p:cNvPr id="4" name="TextBox 3"/>
-          <p:cNvSpPr txBox="1"/>
-          <p:nvPr/>
-        </p:nvSpPr>
-        <p:spPr>
-          <a:xfrm>
-            <a:off x="4754880" y="1188720"/>
-            <a:ext cx="4114800" cy="5212080"/>
-          </a:xfrm>
-          <a:prstGeom prst="rect">
-            <a:avLst/>
-          </a:prstGeom>
-          <a:noFill/>
-        </p:spPr>
-        <p:txBody>
-          <a:bodyPr wrap="square">
-            <a:spAutoFit/>
-          </a:bodyPr>
-          <a:lstStyle/>
-          <a:p>
-            <a:pPr>
-              <a:spcBef>
-                <a:spcPts val="600"/>
-              </a:spcBef>
-              <a:defRPr sz="1600">
-                <a:solidFill>
-                  <a:srgbClr val="F1F5F9"/>
-                </a:solidFill>
-              </a:defRPr>
-            </a:pPr>
-            <a:r>
-              <a:t>Option 2: CLI Install</a:t>
-            </a:r>
-          </a:p>
-          <a:p>
-            <a:pPr>
-              <a:spcBef>
-                <a:spcPts val="600"/>
-              </a:spcBef>
-              <a:defRPr sz="1600">
-                <a:solidFill>
-                  <a:srgbClr val="F1F5F9"/>
-                </a:solidFill>
-              </a:defRPr>
-            </a:pPr>
-            <a:r>
-              <a:t>curl -fsSL https://download.crew.kiro.dev/cli.sh | sh</a:t>
-            </a:r>
-          </a:p>
-          <a:p>
-            <a:pPr>
-              <a:spcBef>
-                <a:spcPts val="600"/>
-              </a:spcBef>
-              <a:defRPr sz="1600">
-                <a:solidFill>
-                  <a:srgbClr val="F1F5F9"/>
-                </a:solidFill>
-              </a:defRPr>
-            </a:pPr>
-          </a:p>
-          <a:p>
-            <a:pPr>
-              <a:spcBef>
-                <a:spcPts val="600"/>
-              </a:spcBef>
-              <a:defRPr sz="1600">
-                <a:solidFill>
-                  <a:srgbClr val="F1F5F9"/>
-                </a:solidFill>
-              </a:defRPr>
-            </a:pPr>
-            <a:r>
-              <a:t>kirocrew setup</a:t>
-            </a:r>
-          </a:p>
-          <a:p>
-            <a:pPr>
-              <a:spcBef>
-                <a:spcPts val="600"/>
-              </a:spcBef>
-              <a:defRPr sz="1600">
-                <a:solidFill>
-                  <a:srgbClr val="F1F5F9"/>
-                </a:solidFill>
-              </a:defRPr>
-            </a:pPr>
-            <a:r>
-              <a:t>kirocrew doctor</a:t>
-            </a:r>
-          </a:p>
-          <a:p>
-            <a:pPr>
-              <a:spcBef>
-                <a:spcPts val="600"/>
-              </a:spcBef>
-              <a:defRPr sz="1600">
-                <a:solidFill>
-                  <a:srgbClr val="F1F5F9"/>
-                </a:solidFill>
-              </a:defRPr>
-            </a:pPr>
-            <a:r>
-              <a:t>kirocrew gateway</a:t>
-            </a:r>
-          </a:p>
-          <a:p>
-            <a:pPr>
-              <a:spcBef>
-                <a:spcPts val="600"/>
-              </a:spcBef>
-              <a:defRPr sz="1600">
-                <a:solidFill>
-                  <a:srgbClr val="F1F5F9"/>
-                </a:solidFill>
-              </a:defRPr>
-            </a:pPr>
-          </a:p>
-          <a:p>
-            <a:pPr>
-              <a:spcBef>
-                <a:spcPts val="600"/>
-              </a:spcBef>
-              <a:defRPr sz="1600">
-                <a:solidFill>
-                  <a:srgbClr val="F1F5F9"/>
-                </a:solidFill>
-              </a:defRPr>
-            </a:pPr>
-            <a:r>
-              <a:t>open http://localhost:5476</a:t>
             </a:r>
           </a:p>
         </p:txBody>
@@ -10674,7 +10588,7 @@
         <p:spPr>
           <a:xfrm>
             <a:off x="457200" y="365760"/>
-            <a:ext cx="6858000" cy="548640"/>
+            <a:ext cx="8229600" cy="548640"/>
           </a:xfrm>
           <a:prstGeom prst="rect">
             <a:avLst/>
@@ -10695,7 +10609,7 @@
               </a:defRPr>
             </a:pPr>
             <a:r>
-              <a:t>First Steps</a:t>
+              <a:t>Installation</a:t>
             </a:r>
           </a:p>
         </p:txBody>
@@ -10708,8 +10622,8 @@
         </p:nvSpPr>
         <p:spPr>
           <a:xfrm>
-            <a:off x="7498079" y="411480"/>
-            <a:ext cx="1371600" cy="365760"/>
+            <a:off x="457200" y="1188720"/>
+            <a:ext cx="4114800" cy="5212080"/>
           </a:xfrm>
           <a:prstGeom prst="rect">
             <a:avLst/>
@@ -10717,20 +10631,125 @@
           <a:noFill/>
         </p:spPr>
         <p:txBody>
-          <a:bodyPr wrap="none">
+          <a:bodyPr wrap="square">
             <a:spAutoFit/>
           </a:bodyPr>
           <a:lstStyle/>
           <a:p>
             <a:pPr>
-              <a:defRPr sz="1100" b="1">
-                <a:solidFill>
-                  <a:srgbClr val="10B981"/>
-                </a:solidFill>
-              </a:defRPr>
-            </a:pPr>
-            <a:r>
-              <a:t>✓ Verified</a:t>
+              <a:spcBef>
+                <a:spcPts val="600"/>
+              </a:spcBef>
+              <a:defRPr sz="1600">
+                <a:solidFill>
+                  <a:srgbClr val="F1F5F9"/>
+                </a:solidFill>
+              </a:defRPr>
+            </a:pPr>
+            <a:r>
+              <a:t>Option 1: Desktop App (Recommended)</a:t>
+            </a:r>
+          </a:p>
+          <a:p>
+            <a:pPr>
+              <a:spcBef>
+                <a:spcPts val="600"/>
+              </a:spcBef>
+              <a:defRPr sz="1600">
+                <a:solidFill>
+                  <a:srgbClr val="F1F5F9"/>
+                </a:solidFill>
+              </a:defRPr>
+            </a:pPr>
+            <a:r>
+              <a:t>1. Download (.dmg or .AppImage)</a:t>
+            </a:r>
+          </a:p>
+          <a:p>
+            <a:pPr>
+              <a:spcBef>
+                <a:spcPts val="600"/>
+              </a:spcBef>
+              <a:defRPr sz="1600">
+                <a:solidFill>
+                  <a:srgbClr val="F1F5F9"/>
+                </a:solidFill>
+              </a:defRPr>
+            </a:pPr>
+            <a:r>
+              <a:t>2. Launch (auto-starts Gateway)</a:t>
+            </a:r>
+          </a:p>
+          <a:p>
+            <a:pPr>
+              <a:spcBef>
+                <a:spcPts val="600"/>
+              </a:spcBef>
+              <a:defRPr sz="1600">
+                <a:solidFill>
+                  <a:srgbClr val="F1F5F9"/>
+                </a:solidFill>
+              </a:defRPr>
+            </a:pPr>
+            <a:r>
+              <a:t>3. Authenticate (device-code sign-in)</a:t>
+            </a:r>
+          </a:p>
+          <a:p>
+            <a:pPr>
+              <a:spcBef>
+                <a:spcPts val="600"/>
+              </a:spcBef>
+              <a:defRPr sz="1600">
+                <a:solidFill>
+                  <a:srgbClr val="F1F5F9"/>
+                </a:solidFill>
+              </a:defRPr>
+            </a:pPr>
+            <a:r>
+              <a:t>4. Start chatting</a:t>
+            </a:r>
+          </a:p>
+          <a:p>
+            <a:pPr>
+              <a:spcBef>
+                <a:spcPts val="600"/>
+              </a:spcBef>
+              <a:defRPr sz="1600">
+                <a:solidFill>
+                  <a:srgbClr val="F1F5F9"/>
+                </a:solidFill>
+              </a:defRPr>
+            </a:pPr>
+          </a:p>
+          <a:p>
+            <a:pPr>
+              <a:spcBef>
+                <a:spcPts val="600"/>
+              </a:spcBef>
+              <a:defRPr sz="1600">
+                <a:solidFill>
+                  <a:srgbClr val="F1F5F9"/>
+                </a:solidFill>
+              </a:defRPr>
+            </a:pPr>
+            <a:r>
+              <a:t>No AWS CLI needed</a:t>
+            </a:r>
+          </a:p>
+          <a:p>
+            <a:pPr>
+              <a:spcBef>
+                <a:spcPts val="600"/>
+              </a:spcBef>
+              <a:defRPr sz="1600">
+                <a:solidFill>
+                  <a:srgbClr val="F1F5F9"/>
+                </a:solidFill>
+              </a:defRPr>
+            </a:pPr>
+            <a:r>
+              <a:t>No Bedrock configuration needed</a:t>
             </a:r>
           </a:p>
         </p:txBody>
@@ -10743,8 +10762,8 @@
         </p:nvSpPr>
         <p:spPr>
           <a:xfrm>
-            <a:off x="640080" y="1188720"/>
-            <a:ext cx="7863840" cy="5212080"/>
+            <a:off x="4754880" y="1188720"/>
+            <a:ext cx="4114800" cy="5212080"/>
           </a:xfrm>
           <a:prstGeom prst="rect">
             <a:avLst/>
@@ -10759,124 +10778,115 @@
           <a:p>
             <a:pPr>
               <a:spcBef>
-                <a:spcPts val="800"/>
-              </a:spcBef>
-              <a:defRPr sz="1800">
-                <a:solidFill>
-                  <a:srgbClr val="F1F5F9"/>
-                </a:solidFill>
-              </a:defRPr>
-            </a:pPr>
-            <a:r>
-              <a:t>1. Chat - Type and ask anything in dashboard</a:t>
-            </a:r>
-          </a:p>
-          <a:p>
-            <a:pPr>
-              <a:spcBef>
-                <a:spcPts val="800"/>
-              </a:spcBef>
-              <a:defRPr sz="1800">
-                <a:solidFill>
-                  <a:srgbClr val="F1F5F9"/>
-                </a:solidFill>
-              </a:defRPr>
-            </a:pPr>
-          </a:p>
-          <a:p>
-            <a:pPr>
-              <a:spcBef>
-                <a:spcPts val="800"/>
-              </a:spcBef>
-              <a:defRPr sz="1800">
-                <a:solidFill>
-                  <a:srgbClr val="F1F5F9"/>
-                </a:solidFill>
-              </a:defRPr>
-            </a:pPr>
-            <a:r>
-              <a:t>2. Schedule a job - 'Every weekday at 9, summarize my open work'</a:t>
-            </a:r>
-          </a:p>
-          <a:p>
-            <a:pPr>
-              <a:spcBef>
-                <a:spcPts val="800"/>
-              </a:spcBef>
-              <a:defRPr sz="1800">
-                <a:solidFill>
-                  <a:srgbClr val="F1F5F9"/>
-                </a:solidFill>
-              </a:defRPr>
-            </a:pPr>
-          </a:p>
-          <a:p>
-            <a:pPr>
-              <a:spcBef>
-                <a:spcPts val="800"/>
-              </a:spcBef>
-              <a:defRPr sz="1800">
-                <a:solidFill>
-                  <a:srgbClr val="F1F5F9"/>
-                </a:solidFill>
-              </a:defRPr>
-            </a:pPr>
-            <a:r>
-              <a:t>3. Teach a preference - 'Always use pytest over unittest'</a:t>
-            </a:r>
-          </a:p>
-          <a:p>
-            <a:pPr>
-              <a:spcBef>
-                <a:spcPts val="800"/>
-              </a:spcBef>
-              <a:defRPr sz="1800">
-                <a:solidFill>
-                  <a:srgbClr val="F1F5F9"/>
-                </a:solidFill>
-              </a:defRPr>
-            </a:pPr>
-          </a:p>
-          <a:p>
-            <a:pPr>
-              <a:spcBef>
-                <a:spcPts val="800"/>
-              </a:spcBef>
-              <a:defRPr sz="1800">
-                <a:solidFill>
-                  <a:srgbClr val="F1F5F9"/>
-                </a:solidFill>
-              </a:defRPr>
-            </a:pPr>
-            <a:r>
-              <a:t>4. Run autonomous task - Projects panel → describe spec → Run</a:t>
-            </a:r>
-          </a:p>
-          <a:p>
-            <a:pPr>
-              <a:spcBef>
-                <a:spcPts val="800"/>
-              </a:spcBef>
-              <a:defRPr sz="1800">
-                <a:solidFill>
-                  <a:srgbClr val="F1F5F9"/>
-                </a:solidFill>
-              </a:defRPr>
-            </a:pPr>
-          </a:p>
-          <a:p>
-            <a:pPr>
-              <a:spcBef>
-                <a:spcPts val="800"/>
-              </a:spcBef>
-              <a:defRPr sz="1800">
-                <a:solidFill>
-                  <a:srgbClr val="F1F5F9"/>
-                </a:solidFill>
-              </a:defRPr>
-            </a:pPr>
-            <a:r>
-              <a:t>5. Delegate parallel work - 'Research these 3 options in parallel'</a:t>
+                <a:spcPts val="600"/>
+              </a:spcBef>
+              <a:defRPr sz="1600">
+                <a:solidFill>
+                  <a:srgbClr val="F1F5F9"/>
+                </a:solidFill>
+              </a:defRPr>
+            </a:pPr>
+            <a:r>
+              <a:t>Option 2: CLI Install</a:t>
+            </a:r>
+          </a:p>
+          <a:p>
+            <a:pPr>
+              <a:spcBef>
+                <a:spcPts val="600"/>
+              </a:spcBef>
+              <a:defRPr sz="1600">
+                <a:solidFill>
+                  <a:srgbClr val="F1F5F9"/>
+                </a:solidFill>
+              </a:defRPr>
+            </a:pPr>
+            <a:r>
+              <a:t>curl -fsSL https://download.crew.kiro.dev/cli.sh | sh</a:t>
+            </a:r>
+          </a:p>
+          <a:p>
+            <a:pPr>
+              <a:spcBef>
+                <a:spcPts val="600"/>
+              </a:spcBef>
+              <a:defRPr sz="1600">
+                <a:solidFill>
+                  <a:srgbClr val="F1F5F9"/>
+                </a:solidFill>
+              </a:defRPr>
+            </a:pPr>
+          </a:p>
+          <a:p>
+            <a:pPr>
+              <a:spcBef>
+                <a:spcPts val="600"/>
+              </a:spcBef>
+              <a:defRPr sz="1600">
+                <a:solidFill>
+                  <a:srgbClr val="F1F5F9"/>
+                </a:solidFill>
+              </a:defRPr>
+            </a:pPr>
+            <a:r>
+              <a:t>kirocrew setup</a:t>
+            </a:r>
+          </a:p>
+          <a:p>
+            <a:pPr>
+              <a:spcBef>
+                <a:spcPts val="600"/>
+              </a:spcBef>
+              <a:defRPr sz="1600">
+                <a:solidFill>
+                  <a:srgbClr val="F1F5F9"/>
+                </a:solidFill>
+              </a:defRPr>
+            </a:pPr>
+            <a:r>
+              <a:t>kirocrew doctor</a:t>
+            </a:r>
+          </a:p>
+          <a:p>
+            <a:pPr>
+              <a:spcBef>
+                <a:spcPts val="600"/>
+              </a:spcBef>
+              <a:defRPr sz="1600">
+                <a:solidFill>
+                  <a:srgbClr val="F1F5F9"/>
+                </a:solidFill>
+              </a:defRPr>
+            </a:pPr>
+            <a:r>
+              <a:t>kirocrew gateway</a:t>
+            </a:r>
+          </a:p>
+          <a:p>
+            <a:pPr>
+              <a:spcBef>
+                <a:spcPts val="600"/>
+              </a:spcBef>
+              <a:defRPr sz="1600">
+                <a:solidFill>
+                  <a:srgbClr val="F1F5F9"/>
+                </a:solidFill>
+              </a:defRPr>
+            </a:pPr>
+          </a:p>
+          <a:p>
+            <a:pPr>
+              <a:spcBef>
+                <a:spcPts val="600"/>
+              </a:spcBef>
+              <a:defRPr sz="1600">
+                <a:solidFill>
+                  <a:srgbClr val="F1F5F9"/>
+                </a:solidFill>
+              </a:defRPr>
+            </a:pPr>
+            <a:r>
+              <a:t>open http://localhost:5476</a:t>
             </a:r>
           </a:p>
         </p:txBody>
@@ -10937,7 +10947,7 @@
               </a:defRPr>
             </a:pPr>
             <a:r>
-              <a:t>Resources</a:t>
+              <a:t>First Steps</a:t>
             </a:r>
           </a:p>
         </p:txBody>
@@ -11010,151 +11020,115 @@
               </a:defRPr>
             </a:pPr>
             <a:r>
-              <a:t>Official Documentation:</a:t>
-            </a:r>
-          </a:p>
-          <a:p>
-            <a:pPr>
-              <a:spcBef>
-                <a:spcPts val="800"/>
-              </a:spcBef>
-              <a:defRPr sz="1800">
-                <a:solidFill>
-                  <a:srgbClr val="F1F5F9"/>
-                </a:solidFill>
-              </a:defRPr>
-            </a:pPr>
-            <a:r>
-              <a:t>• kiro.dev/docs/crew/ - Main docs</a:t>
-            </a:r>
-          </a:p>
-          <a:p>
-            <a:pPr>
-              <a:spcBef>
-                <a:spcPts val="800"/>
-              </a:spcBef>
-              <a:defRPr sz="1800">
-                <a:solidFill>
-                  <a:srgbClr val="F1F5F9"/>
-                </a:solidFill>
-              </a:defRPr>
-            </a:pPr>
-            <a:r>
-              <a:t>• kiro.dev/docs/crew/installation/ - Setup</a:t>
-            </a:r>
-          </a:p>
-          <a:p>
-            <a:pPr>
-              <a:spcBef>
-                <a:spcPts val="800"/>
-              </a:spcBef>
-              <a:defRPr sz="1800">
-                <a:solidFill>
-                  <a:srgbClr val="F1F5F9"/>
-                </a:solidFill>
-              </a:defRPr>
-            </a:pPr>
-            <a:r>
-              <a:t>• kiro.dev/docs/crew/features/ - Features</a:t>
-            </a:r>
-          </a:p>
-          <a:p>
-            <a:pPr>
-              <a:spcBef>
-                <a:spcPts val="800"/>
-              </a:spcBef>
-              <a:defRPr sz="1800">
-                <a:solidFill>
-                  <a:srgbClr val="F1F5F9"/>
-                </a:solidFill>
-              </a:defRPr>
-            </a:pPr>
-          </a:p>
-          <a:p>
-            <a:pPr>
-              <a:spcBef>
-                <a:spcPts val="800"/>
-              </a:spcBef>
-              <a:defRPr sz="1800">
-                <a:solidFill>
-                  <a:srgbClr val="F1F5F9"/>
-                </a:solidFill>
-              </a:defRPr>
-            </a:pPr>
-            <a:r>
-              <a:t>Specific Features:</a:t>
-            </a:r>
-          </a:p>
-          <a:p>
-            <a:pPr>
-              <a:spcBef>
-                <a:spcPts val="800"/>
-              </a:spcBef>
-              <a:defRPr sz="1800">
-                <a:solidFill>
-                  <a:srgbClr val="F1F5F9"/>
-                </a:solidFill>
-              </a:defRPr>
-            </a:pPr>
-            <a:r>
-              <a:t>• kiro.dev/docs/crew/features/memory/ - Memory</a:t>
-            </a:r>
-          </a:p>
-          <a:p>
-            <a:pPr>
-              <a:spcBef>
-                <a:spcPts val="800"/>
-              </a:spcBef>
-              <a:defRPr sz="1800">
-                <a:solidFill>
-                  <a:srgbClr val="F1F5F9"/>
-                </a:solidFill>
-              </a:defRPr>
-            </a:pPr>
-            <a:r>
-              <a:t>• kiro.dev/docs/crew/features/subagents/ - Subagents</a:t>
-            </a:r>
-          </a:p>
-          <a:p>
-            <a:pPr>
-              <a:spcBef>
-                <a:spcPts val="800"/>
-              </a:spcBef>
-              <a:defRPr sz="1800">
-                <a:solidFill>
-                  <a:srgbClr val="F1F5F9"/>
-                </a:solidFill>
-              </a:defRPr>
-            </a:pPr>
-            <a:r>
-              <a:t>• kiro.dev/docs/crew/features/cron/ - Scheduling</a:t>
-            </a:r>
-          </a:p>
-          <a:p>
-            <a:pPr>
-              <a:spcBef>
-                <a:spcPts val="800"/>
-              </a:spcBef>
-              <a:defRPr sz="1800">
-                <a:solidFill>
-                  <a:srgbClr val="F1F5F9"/>
-                </a:solidFill>
-              </a:defRPr>
-            </a:pPr>
-          </a:p>
-          <a:p>
-            <a:pPr>
-              <a:spcBef>
-                <a:spcPts val="800"/>
-              </a:spcBef>
-              <a:defRPr sz="1800">
-                <a:solidFill>
-                  <a:srgbClr val="F1F5F9"/>
-                </a:solidFill>
-              </a:defRPr>
-            </a:pPr>
-            <a:r>
-              <a:t>Pricing: kiro.dev/pricing/</a:t>
+              <a:t>1. Chat - Type and ask anything in dashboard</a:t>
+            </a:r>
+          </a:p>
+          <a:p>
+            <a:pPr>
+              <a:spcBef>
+                <a:spcPts val="800"/>
+              </a:spcBef>
+              <a:defRPr sz="1800">
+                <a:solidFill>
+                  <a:srgbClr val="F1F5F9"/>
+                </a:solidFill>
+              </a:defRPr>
+            </a:pPr>
+          </a:p>
+          <a:p>
+            <a:pPr>
+              <a:spcBef>
+                <a:spcPts val="800"/>
+              </a:spcBef>
+              <a:defRPr sz="1800">
+                <a:solidFill>
+                  <a:srgbClr val="F1F5F9"/>
+                </a:solidFill>
+              </a:defRPr>
+            </a:pPr>
+            <a:r>
+              <a:t>2. Schedule a job - 'Every weekday at 9, summarize my open work'</a:t>
+            </a:r>
+          </a:p>
+          <a:p>
+            <a:pPr>
+              <a:spcBef>
+                <a:spcPts val="800"/>
+              </a:spcBef>
+              <a:defRPr sz="1800">
+                <a:solidFill>
+                  <a:srgbClr val="F1F5F9"/>
+                </a:solidFill>
+              </a:defRPr>
+            </a:pPr>
+          </a:p>
+          <a:p>
+            <a:pPr>
+              <a:spcBef>
+                <a:spcPts val="800"/>
+              </a:spcBef>
+              <a:defRPr sz="1800">
+                <a:solidFill>
+                  <a:srgbClr val="F1F5F9"/>
+                </a:solidFill>
+              </a:defRPr>
+            </a:pPr>
+            <a:r>
+              <a:t>3. Teach a preference - 'Always use pytest over unittest'</a:t>
+            </a:r>
+          </a:p>
+          <a:p>
+            <a:pPr>
+              <a:spcBef>
+                <a:spcPts val="800"/>
+              </a:spcBef>
+              <a:defRPr sz="1800">
+                <a:solidFill>
+                  <a:srgbClr val="F1F5F9"/>
+                </a:solidFill>
+              </a:defRPr>
+            </a:pPr>
+          </a:p>
+          <a:p>
+            <a:pPr>
+              <a:spcBef>
+                <a:spcPts val="800"/>
+              </a:spcBef>
+              <a:defRPr sz="1800">
+                <a:solidFill>
+                  <a:srgbClr val="F1F5F9"/>
+                </a:solidFill>
+              </a:defRPr>
+            </a:pPr>
+            <a:r>
+              <a:t>4. Run autonomous task - Projects panel → describe spec → Run</a:t>
+            </a:r>
+          </a:p>
+          <a:p>
+            <a:pPr>
+              <a:spcBef>
+                <a:spcPts val="800"/>
+              </a:spcBef>
+              <a:defRPr sz="1800">
+                <a:solidFill>
+                  <a:srgbClr val="F1F5F9"/>
+                </a:solidFill>
+              </a:defRPr>
+            </a:pPr>
+          </a:p>
+          <a:p>
+            <a:pPr>
+              <a:spcBef>
+                <a:spcPts val="800"/>
+              </a:spcBef>
+              <a:defRPr sz="1800">
+                <a:solidFill>
+                  <a:srgbClr val="F1F5F9"/>
+                </a:solidFill>
+              </a:defRPr>
+            </a:pPr>
+            <a:r>
+              <a:t>5. Delegate parallel work - 'Research these 3 options in parallel'</a:t>
             </a:r>
           </a:p>
         </p:txBody>
@@ -11168,6 +11142,284 @@
 </file>
 
 <file path=ppt/slides/slide42.xml><?xml version="1.0" encoding="utf-8"?>
+<p:sld xmlns:a="http://schemas.openxmlformats.org/drawingml/2006/main" xmlns:p="http://schemas.openxmlformats.org/presentationml/2006/main" xmlns:r="http://schemas.openxmlformats.org/officeDocument/2006/relationships">
+  <p:cSld>
+    <p:bg>
+      <p:bgPr>
+        <a:solidFill>
+          <a:srgbClr val="0F172A"/>
+        </a:solidFill>
+        <a:effectLst/>
+      </p:bgPr>
+    </p:bg>
+    <p:spTree>
+      <p:nvGrpSpPr>
+        <p:cNvPr id="1" name=""/>
+        <p:cNvGrpSpPr/>
+        <p:nvPr/>
+      </p:nvGrpSpPr>
+      <p:grpSpPr/>
+      <p:sp>
+        <p:nvSpPr>
+          <p:cNvPr id="2" name="TextBox 1"/>
+          <p:cNvSpPr txBox="1"/>
+          <p:nvPr/>
+        </p:nvSpPr>
+        <p:spPr>
+          <a:xfrm>
+            <a:off x="457200" y="365760"/>
+            <a:ext cx="6858000" cy="548640"/>
+          </a:xfrm>
+          <a:prstGeom prst="rect">
+            <a:avLst/>
+          </a:prstGeom>
+          <a:noFill/>
+        </p:spPr>
+        <p:txBody>
+          <a:bodyPr wrap="none">
+            <a:spAutoFit/>
+          </a:bodyPr>
+          <a:lstStyle/>
+          <a:p>
+            <a:pPr>
+              <a:defRPr sz="3200" b="1">
+                <a:solidFill>
+                  <a:srgbClr val="2563EB"/>
+                </a:solidFill>
+              </a:defRPr>
+            </a:pPr>
+            <a:r>
+              <a:t>Resources</a:t>
+            </a:r>
+          </a:p>
+        </p:txBody>
+      </p:sp>
+      <p:sp>
+        <p:nvSpPr>
+          <p:cNvPr id="3" name="TextBox 2"/>
+          <p:cNvSpPr txBox="1"/>
+          <p:nvPr/>
+        </p:nvSpPr>
+        <p:spPr>
+          <a:xfrm>
+            <a:off x="7498079" y="411480"/>
+            <a:ext cx="1371600" cy="365760"/>
+          </a:xfrm>
+          <a:prstGeom prst="rect">
+            <a:avLst/>
+          </a:prstGeom>
+          <a:noFill/>
+        </p:spPr>
+        <p:txBody>
+          <a:bodyPr wrap="none">
+            <a:spAutoFit/>
+          </a:bodyPr>
+          <a:lstStyle/>
+          <a:p>
+            <a:pPr>
+              <a:defRPr sz="1100" b="1">
+                <a:solidFill>
+                  <a:srgbClr val="10B981"/>
+                </a:solidFill>
+              </a:defRPr>
+            </a:pPr>
+            <a:r>
+              <a:t>✓ Verified</a:t>
+            </a:r>
+          </a:p>
+        </p:txBody>
+      </p:sp>
+      <p:sp>
+        <p:nvSpPr>
+          <p:cNvPr id="4" name="TextBox 3"/>
+          <p:cNvSpPr txBox="1"/>
+          <p:nvPr/>
+        </p:nvSpPr>
+        <p:spPr>
+          <a:xfrm>
+            <a:off x="640080" y="1188720"/>
+            <a:ext cx="7863840" cy="5212080"/>
+          </a:xfrm>
+          <a:prstGeom prst="rect">
+            <a:avLst/>
+          </a:prstGeom>
+          <a:noFill/>
+        </p:spPr>
+        <p:txBody>
+          <a:bodyPr wrap="square">
+            <a:spAutoFit/>
+          </a:bodyPr>
+          <a:lstStyle/>
+          <a:p>
+            <a:pPr>
+              <a:spcBef>
+                <a:spcPts val="800"/>
+              </a:spcBef>
+              <a:defRPr sz="1800">
+                <a:solidFill>
+                  <a:srgbClr val="F1F5F9"/>
+                </a:solidFill>
+              </a:defRPr>
+            </a:pPr>
+            <a:r>
+              <a:t>Official Documentation:</a:t>
+            </a:r>
+          </a:p>
+          <a:p>
+            <a:pPr>
+              <a:spcBef>
+                <a:spcPts val="800"/>
+              </a:spcBef>
+              <a:defRPr sz="1800">
+                <a:solidFill>
+                  <a:srgbClr val="F1F5F9"/>
+                </a:solidFill>
+              </a:defRPr>
+            </a:pPr>
+            <a:r>
+              <a:t>• kiro.dev/docs/crew/ - Main docs</a:t>
+            </a:r>
+          </a:p>
+          <a:p>
+            <a:pPr>
+              <a:spcBef>
+                <a:spcPts val="800"/>
+              </a:spcBef>
+              <a:defRPr sz="1800">
+                <a:solidFill>
+                  <a:srgbClr val="F1F5F9"/>
+                </a:solidFill>
+              </a:defRPr>
+            </a:pPr>
+            <a:r>
+              <a:t>• kiro.dev/docs/crew/installation/ - Setup</a:t>
+            </a:r>
+          </a:p>
+          <a:p>
+            <a:pPr>
+              <a:spcBef>
+                <a:spcPts val="800"/>
+              </a:spcBef>
+              <a:defRPr sz="1800">
+                <a:solidFill>
+                  <a:srgbClr val="F1F5F9"/>
+                </a:solidFill>
+              </a:defRPr>
+            </a:pPr>
+            <a:r>
+              <a:t>• kiro.dev/docs/crew/features/ - Features</a:t>
+            </a:r>
+          </a:p>
+          <a:p>
+            <a:pPr>
+              <a:spcBef>
+                <a:spcPts val="800"/>
+              </a:spcBef>
+              <a:defRPr sz="1800">
+                <a:solidFill>
+                  <a:srgbClr val="F1F5F9"/>
+                </a:solidFill>
+              </a:defRPr>
+            </a:pPr>
+          </a:p>
+          <a:p>
+            <a:pPr>
+              <a:spcBef>
+                <a:spcPts val="800"/>
+              </a:spcBef>
+              <a:defRPr sz="1800">
+                <a:solidFill>
+                  <a:srgbClr val="F1F5F9"/>
+                </a:solidFill>
+              </a:defRPr>
+            </a:pPr>
+            <a:r>
+              <a:t>Specific Features:</a:t>
+            </a:r>
+          </a:p>
+          <a:p>
+            <a:pPr>
+              <a:spcBef>
+                <a:spcPts val="800"/>
+              </a:spcBef>
+              <a:defRPr sz="1800">
+                <a:solidFill>
+                  <a:srgbClr val="F1F5F9"/>
+                </a:solidFill>
+              </a:defRPr>
+            </a:pPr>
+            <a:r>
+              <a:t>• kiro.dev/docs/crew/features/memory/ - Memory</a:t>
+            </a:r>
+          </a:p>
+          <a:p>
+            <a:pPr>
+              <a:spcBef>
+                <a:spcPts val="800"/>
+              </a:spcBef>
+              <a:defRPr sz="1800">
+                <a:solidFill>
+                  <a:srgbClr val="F1F5F9"/>
+                </a:solidFill>
+              </a:defRPr>
+            </a:pPr>
+            <a:r>
+              <a:t>• kiro.dev/docs/crew/features/subagents/ - Subagents</a:t>
+            </a:r>
+          </a:p>
+          <a:p>
+            <a:pPr>
+              <a:spcBef>
+                <a:spcPts val="800"/>
+              </a:spcBef>
+              <a:defRPr sz="1800">
+                <a:solidFill>
+                  <a:srgbClr val="F1F5F9"/>
+                </a:solidFill>
+              </a:defRPr>
+            </a:pPr>
+            <a:r>
+              <a:t>• kiro.dev/docs/crew/features/cron/ - Scheduling</a:t>
+            </a:r>
+          </a:p>
+          <a:p>
+            <a:pPr>
+              <a:spcBef>
+                <a:spcPts val="800"/>
+              </a:spcBef>
+              <a:defRPr sz="1800">
+                <a:solidFill>
+                  <a:srgbClr val="F1F5F9"/>
+                </a:solidFill>
+              </a:defRPr>
+            </a:pPr>
+          </a:p>
+          <a:p>
+            <a:pPr>
+              <a:spcBef>
+                <a:spcPts val="800"/>
+              </a:spcBef>
+              <a:defRPr sz="1800">
+                <a:solidFill>
+                  <a:srgbClr val="F1F5F9"/>
+                </a:solidFill>
+              </a:defRPr>
+            </a:pPr>
+            <a:r>
+              <a:t>Pricing: kiro.dev/pricing/</a:t>
+            </a:r>
+          </a:p>
+        </p:txBody>
+      </p:sp>
+    </p:spTree>
+  </p:cSld>
+  <p:clrMapOvr>
+    <a:masterClrMapping/>
+  </p:clrMapOvr>
+</p:sld>
+</file>
+
+<file path=ppt/slides/slide43.xml><?xml version="1.0" encoding="utf-8"?>
 <p:sld xmlns:a="http://schemas.openxmlformats.org/drawingml/2006/main" xmlns:p="http://schemas.openxmlformats.org/presentationml/2006/main" xmlns:r="http://schemas.openxmlformats.org/officeDocument/2006/relationships">
   <p:cSld>
     <p:bg>

--- a/kiro-crew-training.pptx
+++ b/kiro-crew-training.pptx
@@ -48,6 +48,7 @@
     <p:sldId id="296" r:id="rId47"/>
     <p:sldId id="297" r:id="rId48"/>
     <p:sldId id="298" r:id="rId49"/>
+    <p:sldId id="299" r:id="rId50"/>
   </p:sldIdLst>
   <p:sldSz cx="9144000" cy="6858000" type="screen4x3"/>
   <p:notesSz cx="6858000" cy="9144000"/>
@@ -5475,7 +5476,7 @@
               </a:defRPr>
             </a:pPr>
             <a:r>
-              <a:t>Artifacts &amp; Knowledge</a:t>
+              <a:t>Task Runner: Use Cases &amp; Live Demo</a:t>
             </a:r>
           </a:p>
         </p:txBody>
@@ -5548,139 +5549,124 @@
               </a:defRPr>
             </a:pPr>
             <a:r>
-              <a:t>Artifacts: Persistent outputs with version history</a:t>
-            </a:r>
-          </a:p>
-          <a:p>
-            <a:pPr>
-              <a:spcBef>
-                <a:spcPts val="800"/>
-              </a:spcBef>
-              <a:defRPr sz="1800">
-                <a:solidFill>
-                  <a:srgbClr val="F1F5F9"/>
-                </a:solidFill>
-              </a:defRPr>
-            </a:pPr>
-            <a:r>
-              <a:t>• Kinds: widget, HTML, markdown, SVG, JSON, text</a:t>
-            </a:r>
-          </a:p>
-          <a:p>
-            <a:pPr>
-              <a:spcBef>
-                <a:spcPts val="800"/>
-              </a:spcBef>
-              <a:defRPr sz="1800">
-                <a:solidFill>
-                  <a:srgbClr val="F1F5F9"/>
-                </a:solidFill>
-              </a:defRPr>
-            </a:pPr>
-            <a:r>
-              <a:t>• Live previews in dashboard</a:t>
-            </a:r>
-          </a:p>
-          <a:p>
-            <a:pPr>
-              <a:spcBef>
-                <a:spcPts val="800"/>
-              </a:spcBef>
-              <a:defRPr sz="1800">
-                <a:solidFill>
-                  <a:srgbClr val="F1F5F9"/>
-                </a:solidFill>
-              </a:defRPr>
-            </a:pPr>
-            <a:r>
-              <a:t>• Optional: Deploy to AWS (your account)</a:t>
-            </a:r>
-          </a:p>
-          <a:p>
-            <a:pPr>
-              <a:spcBef>
-                <a:spcPts val="800"/>
-              </a:spcBef>
-              <a:defRPr sz="1800">
-                <a:solidFill>
-                  <a:srgbClr val="F1F5F9"/>
-                </a:solidFill>
-              </a:defRPr>
-            </a:pPr>
-          </a:p>
-          <a:p>
-            <a:pPr>
-              <a:spcBef>
-                <a:spcPts val="800"/>
-              </a:spcBef>
-              <a:defRPr sz="1800">
-                <a:solidFill>
-                  <a:srgbClr val="F1F5F9"/>
-                </a:solidFill>
-              </a:defRPr>
-            </a:pPr>
-            <a:r>
-              <a:t>Knowledge Library: Curated document store</a:t>
-            </a:r>
-          </a:p>
-          <a:p>
-            <a:pPr>
-              <a:spcBef>
-                <a:spcPts val="800"/>
-              </a:spcBef>
-              <a:defRPr sz="1800">
-                <a:solidFill>
-                  <a:srgbClr val="F1F5F9"/>
-                </a:solidFill>
-              </a:defRPr>
-            </a:pPr>
-            <a:r>
-              <a:t>• Sources: local files, folders, URLs</a:t>
-            </a:r>
-          </a:p>
-          <a:p>
-            <a:pPr>
-              <a:spcBef>
-                <a:spcPts val="800"/>
-              </a:spcBef>
-              <a:defRPr sz="1800">
-                <a:solidFill>
-                  <a:srgbClr val="F1F5F9"/>
-                </a:solidFill>
-              </a:defRPr>
-            </a:pPr>
-            <a:r>
-              <a:t>• Ingestion: chunking, embeddings</a:t>
-            </a:r>
-          </a:p>
-          <a:p>
-            <a:pPr>
-              <a:spcBef>
-                <a:spcPts val="800"/>
-              </a:spcBef>
-              <a:defRPr sz="1800">
-                <a:solidFill>
-                  <a:srgbClr val="F1F5F9"/>
-                </a:solidFill>
-              </a:defRPr>
-            </a:pPr>
-            <a:r>
-              <a:t>• Search via local_knowledge_search MCP tool</a:t>
-            </a:r>
-          </a:p>
-          <a:p>
-            <a:pPr>
-              <a:spcBef>
-                <a:spcPts val="800"/>
-              </a:spcBef>
-              <a:defRPr sz="1800">
-                <a:solidFill>
-                  <a:srgbClr val="F1F5F9"/>
-                </a:solidFill>
-              </a:defRPr>
-            </a:pPr>
-            <a:r>
-              <a:t>• Built-in dashboard surface</a:t>
+              <a:t>For multi-step unattended work that must survive failures &amp; resume</a:t>
+            </a:r>
+          </a:p>
+          <a:p>
+            <a:pPr>
+              <a:spcBef>
+                <a:spcPts val="800"/>
+              </a:spcBef>
+              <a:defRPr sz="1800">
+                <a:solidFill>
+                  <a:srgbClr val="F1F5F9"/>
+                </a:solidFill>
+              </a:defRPr>
+            </a:pPr>
+            <a:r>
+              <a:t>  Multi-repo migration -&gt; per-repo checkpoint (Enterprise ex below)</a:t>
+            </a:r>
+          </a:p>
+          <a:p>
+            <a:pPr>
+              <a:spcBef>
+                <a:spcPts val="800"/>
+              </a:spcBef>
+              <a:defRPr sz="1800">
+                <a:solidFill>
+                  <a:srgbClr val="F1F5F9"/>
+                </a:solidFill>
+              </a:defRPr>
+            </a:pPr>
+            <a:r>
+              <a:t>  Large refactor from spec -&gt; execute/test/self-review diff/commit</a:t>
+            </a:r>
+          </a:p>
+          <a:p>
+            <a:pPr>
+              <a:spcBef>
+                <a:spcPts val="800"/>
+              </a:spcBef>
+              <a:defRPr sz="1800">
+                <a:solidFill>
+                  <a:srgbClr val="F1F5F9"/>
+                </a:solidFill>
+              </a:defRPr>
+            </a:pPr>
+            <a:r>
+              <a:t>  Backlog burn-down -&gt; 10+ hr unattended, watchdog 60m/2h</a:t>
+            </a:r>
+          </a:p>
+          <a:p>
+            <a:pPr>
+              <a:spcBef>
+                <a:spcPts val="800"/>
+              </a:spcBef>
+              <a:defRPr sz="1800">
+                <a:solidFill>
+                  <a:srgbClr val="F1F5F9"/>
+                </a:solidFill>
+              </a:defRPr>
+            </a:pPr>
+            <a:r>
+              <a:t>  Test-and-fix loops -&gt; retry on red (MAX_RETRIES 3)</a:t>
+            </a:r>
+          </a:p>
+          <a:p>
+            <a:pPr>
+              <a:spcBef>
+                <a:spcPts val="800"/>
+              </a:spcBef>
+              <a:defRPr sz="1800">
+                <a:solidFill>
+                  <a:srgbClr val="F1F5F9"/>
+                </a:solidFill>
+              </a:defRPr>
+            </a:pPr>
+            <a:r>
+              <a:t>NOT for: chat exploration / recurring (cron) / parallel (subagents)</a:t>
+            </a:r>
+          </a:p>
+          <a:p>
+            <a:pPr>
+              <a:spcBef>
+                <a:spcPts val="800"/>
+              </a:spcBef>
+              <a:defRPr sz="1800">
+                <a:solidFill>
+                  <a:srgbClr val="F1F5F9"/>
+                </a:solidFill>
+              </a:defRPr>
+            </a:pPr>
+          </a:p>
+          <a:p>
+            <a:pPr>
+              <a:spcBef>
+                <a:spcPts val="800"/>
+              </a:spcBef>
+              <a:defRPr sz="1800">
+                <a:solidFill>
+                  <a:srgbClr val="F1F5F9"/>
+                </a:solidFill>
+              </a:defRPr>
+            </a:pPr>
+            <a:r>
+              <a:t>LIVE DEMO: kirocrew run demo-task-spec.md --name 'Training QA' --no-test</a:t>
+            </a:r>
+          </a:p>
+          <a:p>
+            <a:pPr>
+              <a:spcBef>
+                <a:spcPts val="800"/>
+              </a:spcBef>
+              <a:defRPr sz="1800">
+                <a:solidFill>
+                  <a:srgbClr val="F1F5F9"/>
+                </a:solidFill>
+              </a:defRPr>
+            </a:pPr>
+            <a:r>
+              <a:t>  read-only QA of the training site - safe to run on stage</a:t>
             </a:r>
           </a:p>
         </p:txBody>
@@ -5893,7 +5879,7 @@
     <p:bg>
       <p:bgPr>
         <a:solidFill>
-          <a:srgbClr val="1E293B"/>
+          <a:srgbClr val="0F172A"/>
         </a:solidFill>
         <a:effectLst/>
       </p:bgPr>
@@ -5913,8 +5899,8 @@
         </p:nvSpPr>
         <p:spPr>
           <a:xfrm>
-            <a:off x="914400" y="2743200"/>
-            <a:ext cx="7315200" cy="914400"/>
+            <a:off x="457200" y="365760"/>
+            <a:ext cx="6858000" cy="548640"/>
           </a:xfrm>
           <a:prstGeom prst="rect">
             <a:avLst/>
@@ -5927,15 +5913,220 @@
           </a:bodyPr>
           <a:lstStyle/>
           <a:p>
-            <a:pPr algn="ctr">
-              <a:defRPr sz="4400" b="1">
+            <a:pPr>
+              <a:defRPr sz="3200" b="1">
                 <a:solidFill>
                   <a:srgbClr val="2563EB"/>
                 </a:solidFill>
               </a:defRPr>
             </a:pPr>
             <a:r>
-              <a:t>Subscription &amp; Pricing</a:t>
+              <a:t>Artifacts &amp; Knowledge</a:t>
+            </a:r>
+          </a:p>
+        </p:txBody>
+      </p:sp>
+      <p:sp>
+        <p:nvSpPr>
+          <p:cNvPr id="3" name="TextBox 2"/>
+          <p:cNvSpPr txBox="1"/>
+          <p:nvPr/>
+        </p:nvSpPr>
+        <p:spPr>
+          <a:xfrm>
+            <a:off x="7498079" y="411480"/>
+            <a:ext cx="1371600" cy="365760"/>
+          </a:xfrm>
+          <a:prstGeom prst="rect">
+            <a:avLst/>
+          </a:prstGeom>
+          <a:noFill/>
+        </p:spPr>
+        <p:txBody>
+          <a:bodyPr wrap="none">
+            <a:spAutoFit/>
+          </a:bodyPr>
+          <a:lstStyle/>
+          <a:p>
+            <a:pPr>
+              <a:defRPr sz="1100" b="1">
+                <a:solidFill>
+                  <a:srgbClr val="10B981"/>
+                </a:solidFill>
+              </a:defRPr>
+            </a:pPr>
+            <a:r>
+              <a:t>✓ Verified</a:t>
+            </a:r>
+          </a:p>
+        </p:txBody>
+      </p:sp>
+      <p:sp>
+        <p:nvSpPr>
+          <p:cNvPr id="4" name="TextBox 3"/>
+          <p:cNvSpPr txBox="1"/>
+          <p:nvPr/>
+        </p:nvSpPr>
+        <p:spPr>
+          <a:xfrm>
+            <a:off x="640080" y="1188720"/>
+            <a:ext cx="7863840" cy="5212080"/>
+          </a:xfrm>
+          <a:prstGeom prst="rect">
+            <a:avLst/>
+          </a:prstGeom>
+          <a:noFill/>
+        </p:spPr>
+        <p:txBody>
+          <a:bodyPr wrap="square">
+            <a:spAutoFit/>
+          </a:bodyPr>
+          <a:lstStyle/>
+          <a:p>
+            <a:pPr>
+              <a:spcBef>
+                <a:spcPts val="800"/>
+              </a:spcBef>
+              <a:defRPr sz="1800">
+                <a:solidFill>
+                  <a:srgbClr val="F1F5F9"/>
+                </a:solidFill>
+              </a:defRPr>
+            </a:pPr>
+            <a:r>
+              <a:t>Artifacts: Persistent outputs with version history</a:t>
+            </a:r>
+          </a:p>
+          <a:p>
+            <a:pPr>
+              <a:spcBef>
+                <a:spcPts val="800"/>
+              </a:spcBef>
+              <a:defRPr sz="1800">
+                <a:solidFill>
+                  <a:srgbClr val="F1F5F9"/>
+                </a:solidFill>
+              </a:defRPr>
+            </a:pPr>
+            <a:r>
+              <a:t>• Kinds: widget, HTML, markdown, SVG, JSON, text</a:t>
+            </a:r>
+          </a:p>
+          <a:p>
+            <a:pPr>
+              <a:spcBef>
+                <a:spcPts val="800"/>
+              </a:spcBef>
+              <a:defRPr sz="1800">
+                <a:solidFill>
+                  <a:srgbClr val="F1F5F9"/>
+                </a:solidFill>
+              </a:defRPr>
+            </a:pPr>
+            <a:r>
+              <a:t>• Live previews in dashboard</a:t>
+            </a:r>
+          </a:p>
+          <a:p>
+            <a:pPr>
+              <a:spcBef>
+                <a:spcPts val="800"/>
+              </a:spcBef>
+              <a:defRPr sz="1800">
+                <a:solidFill>
+                  <a:srgbClr val="F1F5F9"/>
+                </a:solidFill>
+              </a:defRPr>
+            </a:pPr>
+            <a:r>
+              <a:t>• Optional: Deploy to AWS (your account)</a:t>
+            </a:r>
+          </a:p>
+          <a:p>
+            <a:pPr>
+              <a:spcBef>
+                <a:spcPts val="800"/>
+              </a:spcBef>
+              <a:defRPr sz="1800">
+                <a:solidFill>
+                  <a:srgbClr val="F1F5F9"/>
+                </a:solidFill>
+              </a:defRPr>
+            </a:pPr>
+          </a:p>
+          <a:p>
+            <a:pPr>
+              <a:spcBef>
+                <a:spcPts val="800"/>
+              </a:spcBef>
+              <a:defRPr sz="1800">
+                <a:solidFill>
+                  <a:srgbClr val="F1F5F9"/>
+                </a:solidFill>
+              </a:defRPr>
+            </a:pPr>
+            <a:r>
+              <a:t>Knowledge Library: Curated document store</a:t>
+            </a:r>
+          </a:p>
+          <a:p>
+            <a:pPr>
+              <a:spcBef>
+                <a:spcPts val="800"/>
+              </a:spcBef>
+              <a:defRPr sz="1800">
+                <a:solidFill>
+                  <a:srgbClr val="F1F5F9"/>
+                </a:solidFill>
+              </a:defRPr>
+            </a:pPr>
+            <a:r>
+              <a:t>• Sources: local files, folders, URLs</a:t>
+            </a:r>
+          </a:p>
+          <a:p>
+            <a:pPr>
+              <a:spcBef>
+                <a:spcPts val="800"/>
+              </a:spcBef>
+              <a:defRPr sz="1800">
+                <a:solidFill>
+                  <a:srgbClr val="F1F5F9"/>
+                </a:solidFill>
+              </a:defRPr>
+            </a:pPr>
+            <a:r>
+              <a:t>• Ingestion: chunking, embeddings</a:t>
+            </a:r>
+          </a:p>
+          <a:p>
+            <a:pPr>
+              <a:spcBef>
+                <a:spcPts val="800"/>
+              </a:spcBef>
+              <a:defRPr sz="1800">
+                <a:solidFill>
+                  <a:srgbClr val="F1F5F9"/>
+                </a:solidFill>
+              </a:defRPr>
+            </a:pPr>
+            <a:r>
+              <a:t>• Search via local_knowledge_search MCP tool</a:t>
+            </a:r>
+          </a:p>
+          <a:p>
+            <a:pPr>
+              <a:spcBef>
+                <a:spcPts val="800"/>
+              </a:spcBef>
+              <a:defRPr sz="1800">
+                <a:solidFill>
+                  <a:srgbClr val="F1F5F9"/>
+                </a:solidFill>
+              </a:defRPr>
+            </a:pPr>
+            <a:r>
+              <a:t>• Built-in dashboard surface</a:t>
             </a:r>
           </a:p>
         </p:txBody>
@@ -5954,7 +6145,7 @@
     <p:bg>
       <p:bgPr>
         <a:solidFill>
-          <a:srgbClr val="0F172A"/>
+          <a:srgbClr val="1E293B"/>
         </a:solidFill>
         <a:effectLst/>
       </p:bgPr>
@@ -5974,8 +6165,8 @@
         </p:nvSpPr>
         <p:spPr>
           <a:xfrm>
-            <a:off x="457200" y="365760"/>
-            <a:ext cx="6858000" cy="548640"/>
+            <a:off x="914400" y="2743200"/>
+            <a:ext cx="7315200" cy="914400"/>
           </a:xfrm>
           <a:prstGeom prst="rect">
             <a:avLst/>
@@ -5988,217 +6179,15 @@
           </a:bodyPr>
           <a:lstStyle/>
           <a:p>
-            <a:pPr>
-              <a:defRPr sz="3200" b="1">
+            <a:pPr algn="ctr">
+              <a:defRPr sz="4400" b="1">
                 <a:solidFill>
                   <a:srgbClr val="2563EB"/>
                 </a:solidFill>
               </a:defRPr>
             </a:pPr>
             <a:r>
-              <a:t>Credit System</a:t>
-            </a:r>
-          </a:p>
-        </p:txBody>
-      </p:sp>
-      <p:sp>
-        <p:nvSpPr>
-          <p:cNvPr id="3" name="TextBox 2"/>
-          <p:cNvSpPr txBox="1"/>
-          <p:nvPr/>
-        </p:nvSpPr>
-        <p:spPr>
-          <a:xfrm>
-            <a:off x="7498079" y="411480"/>
-            <a:ext cx="1371600" cy="365760"/>
-          </a:xfrm>
-          <a:prstGeom prst="rect">
-            <a:avLst/>
-          </a:prstGeom>
-          <a:noFill/>
-        </p:spPr>
-        <p:txBody>
-          <a:bodyPr wrap="none">
-            <a:spAutoFit/>
-          </a:bodyPr>
-          <a:lstStyle/>
-          <a:p>
-            <a:pPr>
-              <a:defRPr sz="1100" b="1">
-                <a:solidFill>
-                  <a:srgbClr val="10B981"/>
-                </a:solidFill>
-              </a:defRPr>
-            </a:pPr>
-            <a:r>
-              <a:t>✓ Verified</a:t>
-            </a:r>
-          </a:p>
-        </p:txBody>
-      </p:sp>
-      <p:sp>
-        <p:nvSpPr>
-          <p:cNvPr id="4" name="TextBox 3"/>
-          <p:cNvSpPr txBox="1"/>
-          <p:nvPr/>
-        </p:nvSpPr>
-        <p:spPr>
-          <a:xfrm>
-            <a:off x="640080" y="1188720"/>
-            <a:ext cx="7863840" cy="5212080"/>
-          </a:xfrm>
-          <a:prstGeom prst="rect">
-            <a:avLst/>
-          </a:prstGeom>
-          <a:noFill/>
-        </p:spPr>
-        <p:txBody>
-          <a:bodyPr wrap="square">
-            <a:spAutoFit/>
-          </a:bodyPr>
-          <a:lstStyle/>
-          <a:p>
-            <a:pPr>
-              <a:spcBef>
-                <a:spcPts val="800"/>
-              </a:spcBef>
-              <a:defRPr sz="1800">
-                <a:solidFill>
-                  <a:srgbClr val="F1F5F9"/>
-                </a:solidFill>
-              </a:defRPr>
-            </a:pPr>
-            <a:r>
-              <a:t>Single subscription for all Kiro surfaces (IDE/CLI/Web/Mobile/Crew)</a:t>
-            </a:r>
-          </a:p>
-          <a:p>
-            <a:pPr>
-              <a:spcBef>
-                <a:spcPts val="800"/>
-              </a:spcBef>
-              <a:defRPr sz="1800">
-                <a:solidFill>
-                  <a:srgbClr val="F1F5F9"/>
-                </a:solidFill>
-              </a:defRPr>
-            </a:pPr>
-          </a:p>
-          <a:p>
-            <a:pPr>
-              <a:spcBef>
-                <a:spcPts val="800"/>
-              </a:spcBef>
-              <a:defRPr sz="1800">
-                <a:solidFill>
-                  <a:srgbClr val="F1F5F9"/>
-                </a:solidFill>
-              </a:defRPr>
-            </a:pPr>
-            <a:r>
-              <a:t>Plans:</a:t>
-            </a:r>
-          </a:p>
-          <a:p>
-            <a:pPr>
-              <a:spcBef>
-                <a:spcPts val="800"/>
-              </a:spcBef>
-              <a:defRPr sz="1800">
-                <a:solidFill>
-                  <a:srgbClr val="F1F5F9"/>
-                </a:solidFill>
-              </a:defRPr>
-            </a:pPr>
-            <a:r>
-              <a:t>• $20/month - 1,000 credits</a:t>
-            </a:r>
-          </a:p>
-          <a:p>
-            <a:pPr>
-              <a:spcBef>
-                <a:spcPts val="800"/>
-              </a:spcBef>
-              <a:defRPr sz="1800">
-                <a:solidFill>
-                  <a:srgbClr val="F1F5F9"/>
-                </a:solidFill>
-              </a:defRPr>
-            </a:pPr>
-            <a:r>
-              <a:t>• $50/month - 2,500 credits</a:t>
-            </a:r>
-          </a:p>
-          <a:p>
-            <a:pPr>
-              <a:spcBef>
-                <a:spcPts val="800"/>
-              </a:spcBef>
-              <a:defRPr sz="1800">
-                <a:solidFill>
-                  <a:srgbClr val="F1F5F9"/>
-                </a:solidFill>
-              </a:defRPr>
-            </a:pPr>
-            <a:r>
-              <a:t>• $100/month - 5,000 credits</a:t>
-            </a:r>
-          </a:p>
-          <a:p>
-            <a:pPr>
-              <a:spcBef>
-                <a:spcPts val="800"/>
-              </a:spcBef>
-              <a:defRPr sz="1800">
-                <a:solidFill>
-                  <a:srgbClr val="F1F5F9"/>
-                </a:solidFill>
-              </a:defRPr>
-            </a:pPr>
-            <a:r>
-              <a:t>• $200/month - 10,000 credits</a:t>
-            </a:r>
-          </a:p>
-          <a:p>
-            <a:pPr>
-              <a:spcBef>
-                <a:spcPts val="800"/>
-              </a:spcBef>
-              <a:defRPr sz="1800">
-                <a:solidFill>
-                  <a:srgbClr val="F1F5F9"/>
-                </a:solidFill>
-              </a:defRPr>
-            </a:pPr>
-            <a:r>
-              <a:t>• Add-on: $0.04/credit</a:t>
-            </a:r>
-          </a:p>
-          <a:p>
-            <a:pPr>
-              <a:spcBef>
-                <a:spcPts val="800"/>
-              </a:spcBef>
-              <a:defRPr sz="1800">
-                <a:solidFill>
-                  <a:srgbClr val="F1F5F9"/>
-                </a:solidFill>
-              </a:defRPr>
-            </a:pPr>
-          </a:p>
-          <a:p>
-            <a:pPr>
-              <a:spcBef>
-                <a:spcPts val="800"/>
-              </a:spcBef>
-              <a:defRPr sz="1800">
-                <a:solidFill>
-                  <a:srgbClr val="F1F5F9"/>
-                </a:solidFill>
-              </a:defRPr>
-            </a:pPr>
-            <a:r>
-              <a:t>Model multipliers: Opus 5 (2.2x), Sonnet family (~1.3x), open-weight (0.05x-0.5x)</a:t>
+              <a:t>Subscription &amp; Pricing</a:t>
             </a:r>
           </a:p>
         </p:txBody>
@@ -6259,7 +6248,7 @@
               </a:defRPr>
             </a:pPr>
             <a:r>
-              <a:t>Cost Considerations</a:t>
+              <a:t>Credit System</a:t>
             </a:r>
           </a:p>
         </p:txBody>
@@ -6332,151 +6321,136 @@
               </a:defRPr>
             </a:pPr>
             <a:r>
-              <a:t>Verified from official docs:</a:t>
-            </a:r>
-          </a:p>
-          <a:p>
-            <a:pPr>
-              <a:spcBef>
-                <a:spcPts val="800"/>
-              </a:spcBef>
-              <a:defRPr sz="1800">
-                <a:solidFill>
-                  <a:srgbClr val="F1F5F9"/>
-                </a:solidFill>
-              </a:defRPr>
-            </a:pPr>
-            <a:r>
-              <a:t>• Credits scale with model choice and task complexity</a:t>
-            </a:r>
-          </a:p>
-          <a:p>
-            <a:pPr>
-              <a:spcBef>
-                <a:spcPts val="800"/>
-              </a:spcBef>
-              <a:defRPr sz="1800">
-                <a:solidFill>
-                  <a:srgbClr val="F1F5F9"/>
-                </a:solidFill>
-              </a:defRPr>
-            </a:pPr>
-            <a:r>
-              <a:t>• Model multipliers: Opus 5 2.2x, Sonnet family ~1.3x,</a:t>
-            </a:r>
-          </a:p>
-          <a:p>
-            <a:pPr>
-              <a:spcBef>
-                <a:spcPts val="800"/>
-              </a:spcBef>
-              <a:defRPr sz="1800">
-                <a:solidFill>
-                  <a:srgbClr val="F1F5F9"/>
-                </a:solidFill>
-              </a:defRPr>
-            </a:pPr>
-            <a:r>
-              <a:t>  open-weight 0.05x-0.5x</a:t>
-            </a:r>
-          </a:p>
-          <a:p>
-            <a:pPr>
-              <a:spcBef>
-                <a:spcPts val="800"/>
-              </a:spcBef>
-              <a:defRPr sz="1800">
-                <a:solidFill>
-                  <a:srgbClr val="F1F5F9"/>
-                </a:solidFill>
-              </a:defRPr>
-            </a:pPr>
-            <a:r>
-              <a:t>• Add-on credits $0.04 each; metered to 0.01 precision</a:t>
-            </a:r>
-          </a:p>
-          <a:p>
-            <a:pPr>
-              <a:spcBef>
-                <a:spcPts val="800"/>
-              </a:spcBef>
-              <a:defRPr sz="1800">
-                <a:solidFill>
-                  <a:srgbClr val="F1F5F9"/>
-                </a:solidFill>
-              </a:defRPr>
-            </a:pPr>
-          </a:p>
-          <a:p>
-            <a:pPr>
-              <a:spcBef>
-                <a:spcPts val="800"/>
-              </a:spcBef>
-              <a:defRPr sz="1800">
-                <a:solidFill>
-                  <a:srgbClr val="F1F5F9"/>
-                </a:solidFill>
-              </a:defRPr>
-            </a:pPr>
-            <a:r>
-              <a:t>Not published by Kiro (measure in usage dashboard):</a:t>
-            </a:r>
-          </a:p>
-          <a:p>
-            <a:pPr>
-              <a:spcBef>
-                <a:spcPts val="800"/>
-              </a:spcBef>
-              <a:defRPr sz="1800">
-                <a:solidFill>
-                  <a:srgbClr val="F1F5F9"/>
-                </a:solidFill>
-              </a:defRPr>
-            </a:pPr>
-            <a:r>
-              <a:t>• Per-subagent, per-cron, per-task credit consumption</a:t>
-            </a:r>
-          </a:p>
-          <a:p>
-            <a:pPr>
-              <a:spcBef>
-                <a:spcPts val="800"/>
-              </a:spcBef>
-              <a:defRPr sz="1800">
-                <a:solidFill>
-                  <a:srgbClr val="F1F5F9"/>
-                </a:solidFill>
-              </a:defRPr>
-            </a:pPr>
-          </a:p>
-          <a:p>
-            <a:pPr>
-              <a:spcBef>
-                <a:spcPts val="800"/>
-              </a:spcBef>
-              <a:defRPr sz="1800">
-                <a:solidFill>
-                  <a:srgbClr val="F1F5F9"/>
-                </a:solidFill>
-              </a:defRPr>
-            </a:pPr>
-            <a:r>
-              <a:t>The subscription usage dashboard is the authoritative</a:t>
-            </a:r>
-          </a:p>
-          <a:p>
-            <a:pPr>
-              <a:spcBef>
-                <a:spcPts val="800"/>
-              </a:spcBef>
-              <a:defRPr sz="1800">
-                <a:solidFill>
-                  <a:srgbClr val="F1F5F9"/>
-                </a:solidFill>
-              </a:defRPr>
-            </a:pPr>
-            <a:r>
-              <a:t>source for your own workload's cost.</a:t>
+              <a:t>Single subscription for all Kiro surfaces (IDE/CLI/Web/Mobile/Crew)</a:t>
+            </a:r>
+          </a:p>
+          <a:p>
+            <a:pPr>
+              <a:spcBef>
+                <a:spcPts val="800"/>
+              </a:spcBef>
+              <a:defRPr sz="1800">
+                <a:solidFill>
+                  <a:srgbClr val="F1F5F9"/>
+                </a:solidFill>
+              </a:defRPr>
+            </a:pPr>
+          </a:p>
+          <a:p>
+            <a:pPr>
+              <a:spcBef>
+                <a:spcPts val="800"/>
+              </a:spcBef>
+              <a:defRPr sz="1800">
+                <a:solidFill>
+                  <a:srgbClr val="F1F5F9"/>
+                </a:solidFill>
+              </a:defRPr>
+            </a:pPr>
+            <a:r>
+              <a:t>Plans:</a:t>
+            </a:r>
+          </a:p>
+          <a:p>
+            <a:pPr>
+              <a:spcBef>
+                <a:spcPts val="800"/>
+              </a:spcBef>
+              <a:defRPr sz="1800">
+                <a:solidFill>
+                  <a:srgbClr val="F1F5F9"/>
+                </a:solidFill>
+              </a:defRPr>
+            </a:pPr>
+            <a:r>
+              <a:t>• $20/month - 1,000 credits</a:t>
+            </a:r>
+          </a:p>
+          <a:p>
+            <a:pPr>
+              <a:spcBef>
+                <a:spcPts val="800"/>
+              </a:spcBef>
+              <a:defRPr sz="1800">
+                <a:solidFill>
+                  <a:srgbClr val="F1F5F9"/>
+                </a:solidFill>
+              </a:defRPr>
+            </a:pPr>
+            <a:r>
+              <a:t>• $50/month - 2,500 credits</a:t>
+            </a:r>
+          </a:p>
+          <a:p>
+            <a:pPr>
+              <a:spcBef>
+                <a:spcPts val="800"/>
+              </a:spcBef>
+              <a:defRPr sz="1800">
+                <a:solidFill>
+                  <a:srgbClr val="F1F5F9"/>
+                </a:solidFill>
+              </a:defRPr>
+            </a:pPr>
+            <a:r>
+              <a:t>• $100/month - 5,000 credits</a:t>
+            </a:r>
+          </a:p>
+          <a:p>
+            <a:pPr>
+              <a:spcBef>
+                <a:spcPts val="800"/>
+              </a:spcBef>
+              <a:defRPr sz="1800">
+                <a:solidFill>
+                  <a:srgbClr val="F1F5F9"/>
+                </a:solidFill>
+              </a:defRPr>
+            </a:pPr>
+            <a:r>
+              <a:t>• $200/month - 10,000 credits</a:t>
+            </a:r>
+          </a:p>
+          <a:p>
+            <a:pPr>
+              <a:spcBef>
+                <a:spcPts val="800"/>
+              </a:spcBef>
+              <a:defRPr sz="1800">
+                <a:solidFill>
+                  <a:srgbClr val="F1F5F9"/>
+                </a:solidFill>
+              </a:defRPr>
+            </a:pPr>
+            <a:r>
+              <a:t>• Add-on: $0.04/credit</a:t>
+            </a:r>
+          </a:p>
+          <a:p>
+            <a:pPr>
+              <a:spcBef>
+                <a:spcPts val="800"/>
+              </a:spcBef>
+              <a:defRPr sz="1800">
+                <a:solidFill>
+                  <a:srgbClr val="F1F5F9"/>
+                </a:solidFill>
+              </a:defRPr>
+            </a:pPr>
+          </a:p>
+          <a:p>
+            <a:pPr>
+              <a:spcBef>
+                <a:spcPts val="800"/>
+              </a:spcBef>
+              <a:defRPr sz="1800">
+                <a:solidFill>
+                  <a:srgbClr val="F1F5F9"/>
+                </a:solidFill>
+              </a:defRPr>
+            </a:pPr>
+            <a:r>
+              <a:t>Model multipliers: Opus 5 (2.2x), Sonnet family (~1.3x), open-weight (0.05x-0.5x)</a:t>
             </a:r>
           </a:p>
         </p:txBody>
@@ -6490,6 +6464,284 @@
 </file>
 
 <file path=ppt/slides/slide23.xml><?xml version="1.0" encoding="utf-8"?>
+<p:sld xmlns:a="http://schemas.openxmlformats.org/drawingml/2006/main" xmlns:p="http://schemas.openxmlformats.org/presentationml/2006/main" xmlns:r="http://schemas.openxmlformats.org/officeDocument/2006/relationships">
+  <p:cSld>
+    <p:bg>
+      <p:bgPr>
+        <a:solidFill>
+          <a:srgbClr val="0F172A"/>
+        </a:solidFill>
+        <a:effectLst/>
+      </p:bgPr>
+    </p:bg>
+    <p:spTree>
+      <p:nvGrpSpPr>
+        <p:cNvPr id="1" name=""/>
+        <p:cNvGrpSpPr/>
+        <p:nvPr/>
+      </p:nvGrpSpPr>
+      <p:grpSpPr/>
+      <p:sp>
+        <p:nvSpPr>
+          <p:cNvPr id="2" name="TextBox 1"/>
+          <p:cNvSpPr txBox="1"/>
+          <p:nvPr/>
+        </p:nvSpPr>
+        <p:spPr>
+          <a:xfrm>
+            <a:off x="457200" y="365760"/>
+            <a:ext cx="6858000" cy="548640"/>
+          </a:xfrm>
+          <a:prstGeom prst="rect">
+            <a:avLst/>
+          </a:prstGeom>
+          <a:noFill/>
+        </p:spPr>
+        <p:txBody>
+          <a:bodyPr wrap="none">
+            <a:spAutoFit/>
+          </a:bodyPr>
+          <a:lstStyle/>
+          <a:p>
+            <a:pPr>
+              <a:defRPr sz="3200" b="1">
+                <a:solidFill>
+                  <a:srgbClr val="2563EB"/>
+                </a:solidFill>
+              </a:defRPr>
+            </a:pPr>
+            <a:r>
+              <a:t>Cost Considerations</a:t>
+            </a:r>
+          </a:p>
+        </p:txBody>
+      </p:sp>
+      <p:sp>
+        <p:nvSpPr>
+          <p:cNvPr id="3" name="TextBox 2"/>
+          <p:cNvSpPr txBox="1"/>
+          <p:nvPr/>
+        </p:nvSpPr>
+        <p:spPr>
+          <a:xfrm>
+            <a:off x="7498079" y="411480"/>
+            <a:ext cx="1371600" cy="365760"/>
+          </a:xfrm>
+          <a:prstGeom prst="rect">
+            <a:avLst/>
+          </a:prstGeom>
+          <a:noFill/>
+        </p:spPr>
+        <p:txBody>
+          <a:bodyPr wrap="none">
+            <a:spAutoFit/>
+          </a:bodyPr>
+          <a:lstStyle/>
+          <a:p>
+            <a:pPr>
+              <a:defRPr sz="1100" b="1">
+                <a:solidFill>
+                  <a:srgbClr val="10B981"/>
+                </a:solidFill>
+              </a:defRPr>
+            </a:pPr>
+            <a:r>
+              <a:t>✓ Verified</a:t>
+            </a:r>
+          </a:p>
+        </p:txBody>
+      </p:sp>
+      <p:sp>
+        <p:nvSpPr>
+          <p:cNvPr id="4" name="TextBox 3"/>
+          <p:cNvSpPr txBox="1"/>
+          <p:nvPr/>
+        </p:nvSpPr>
+        <p:spPr>
+          <a:xfrm>
+            <a:off x="640080" y="1188720"/>
+            <a:ext cx="7863840" cy="5212080"/>
+          </a:xfrm>
+          <a:prstGeom prst="rect">
+            <a:avLst/>
+          </a:prstGeom>
+          <a:noFill/>
+        </p:spPr>
+        <p:txBody>
+          <a:bodyPr wrap="square">
+            <a:spAutoFit/>
+          </a:bodyPr>
+          <a:lstStyle/>
+          <a:p>
+            <a:pPr>
+              <a:spcBef>
+                <a:spcPts val="800"/>
+              </a:spcBef>
+              <a:defRPr sz="1800">
+                <a:solidFill>
+                  <a:srgbClr val="F1F5F9"/>
+                </a:solidFill>
+              </a:defRPr>
+            </a:pPr>
+            <a:r>
+              <a:t>Verified from official docs:</a:t>
+            </a:r>
+          </a:p>
+          <a:p>
+            <a:pPr>
+              <a:spcBef>
+                <a:spcPts val="800"/>
+              </a:spcBef>
+              <a:defRPr sz="1800">
+                <a:solidFill>
+                  <a:srgbClr val="F1F5F9"/>
+                </a:solidFill>
+              </a:defRPr>
+            </a:pPr>
+            <a:r>
+              <a:t>• Credits scale with model choice and task complexity</a:t>
+            </a:r>
+          </a:p>
+          <a:p>
+            <a:pPr>
+              <a:spcBef>
+                <a:spcPts val="800"/>
+              </a:spcBef>
+              <a:defRPr sz="1800">
+                <a:solidFill>
+                  <a:srgbClr val="F1F5F9"/>
+                </a:solidFill>
+              </a:defRPr>
+            </a:pPr>
+            <a:r>
+              <a:t>• Model multipliers: Opus 5 2.2x, Sonnet family ~1.3x,</a:t>
+            </a:r>
+          </a:p>
+          <a:p>
+            <a:pPr>
+              <a:spcBef>
+                <a:spcPts val="800"/>
+              </a:spcBef>
+              <a:defRPr sz="1800">
+                <a:solidFill>
+                  <a:srgbClr val="F1F5F9"/>
+                </a:solidFill>
+              </a:defRPr>
+            </a:pPr>
+            <a:r>
+              <a:t>  open-weight 0.05x-0.5x</a:t>
+            </a:r>
+          </a:p>
+          <a:p>
+            <a:pPr>
+              <a:spcBef>
+                <a:spcPts val="800"/>
+              </a:spcBef>
+              <a:defRPr sz="1800">
+                <a:solidFill>
+                  <a:srgbClr val="F1F5F9"/>
+                </a:solidFill>
+              </a:defRPr>
+            </a:pPr>
+            <a:r>
+              <a:t>• Add-on credits $0.04 each; metered to 0.01 precision</a:t>
+            </a:r>
+          </a:p>
+          <a:p>
+            <a:pPr>
+              <a:spcBef>
+                <a:spcPts val="800"/>
+              </a:spcBef>
+              <a:defRPr sz="1800">
+                <a:solidFill>
+                  <a:srgbClr val="F1F5F9"/>
+                </a:solidFill>
+              </a:defRPr>
+            </a:pPr>
+          </a:p>
+          <a:p>
+            <a:pPr>
+              <a:spcBef>
+                <a:spcPts val="800"/>
+              </a:spcBef>
+              <a:defRPr sz="1800">
+                <a:solidFill>
+                  <a:srgbClr val="F1F5F9"/>
+                </a:solidFill>
+              </a:defRPr>
+            </a:pPr>
+            <a:r>
+              <a:t>Not published by Kiro (measure in usage dashboard):</a:t>
+            </a:r>
+          </a:p>
+          <a:p>
+            <a:pPr>
+              <a:spcBef>
+                <a:spcPts val="800"/>
+              </a:spcBef>
+              <a:defRPr sz="1800">
+                <a:solidFill>
+                  <a:srgbClr val="F1F5F9"/>
+                </a:solidFill>
+              </a:defRPr>
+            </a:pPr>
+            <a:r>
+              <a:t>• Per-subagent, per-cron, per-task credit consumption</a:t>
+            </a:r>
+          </a:p>
+          <a:p>
+            <a:pPr>
+              <a:spcBef>
+                <a:spcPts val="800"/>
+              </a:spcBef>
+              <a:defRPr sz="1800">
+                <a:solidFill>
+                  <a:srgbClr val="F1F5F9"/>
+                </a:solidFill>
+              </a:defRPr>
+            </a:pPr>
+          </a:p>
+          <a:p>
+            <a:pPr>
+              <a:spcBef>
+                <a:spcPts val="800"/>
+              </a:spcBef>
+              <a:defRPr sz="1800">
+                <a:solidFill>
+                  <a:srgbClr val="F1F5F9"/>
+                </a:solidFill>
+              </a:defRPr>
+            </a:pPr>
+            <a:r>
+              <a:t>The subscription usage dashboard is the authoritative</a:t>
+            </a:r>
+          </a:p>
+          <a:p>
+            <a:pPr>
+              <a:spcBef>
+                <a:spcPts val="800"/>
+              </a:spcBef>
+              <a:defRPr sz="1800">
+                <a:solidFill>
+                  <a:srgbClr val="F1F5F9"/>
+                </a:solidFill>
+              </a:defRPr>
+            </a:pPr>
+            <a:r>
+              <a:t>source for your own workload's cost.</a:t>
+            </a:r>
+          </a:p>
+        </p:txBody>
+      </p:sp>
+    </p:spTree>
+  </p:cSld>
+  <p:clrMapOvr>
+    <a:masterClrMapping/>
+  </p:clrMapOvr>
+</p:sld>
+</file>
+
+<file path=ppt/slides/slide24.xml><?xml version="1.0" encoding="utf-8"?>
 <p:sld xmlns:a="http://schemas.openxmlformats.org/drawingml/2006/main" xmlns:p="http://schemas.openxmlformats.org/presentationml/2006/main" xmlns:r="http://schemas.openxmlformats.org/officeDocument/2006/relationships">
   <p:cSld>
     <p:bg>
@@ -6573,257 +6825,6 @@
             </a:pPr>
             <a:r>
               <a:t>Full coverage of docs/crew/</a:t>
-            </a:r>
-          </a:p>
-        </p:txBody>
-      </p:sp>
-    </p:spTree>
-  </p:cSld>
-  <p:clrMapOvr>
-    <a:masterClrMapping/>
-  </p:clrMapOvr>
-</p:sld>
-</file>
-
-<file path=ppt/slides/slide24.xml><?xml version="1.0" encoding="utf-8"?>
-<p:sld xmlns:a="http://schemas.openxmlformats.org/drawingml/2006/main" xmlns:p="http://schemas.openxmlformats.org/presentationml/2006/main" xmlns:r="http://schemas.openxmlformats.org/officeDocument/2006/relationships">
-  <p:cSld>
-    <p:bg>
-      <p:bgPr>
-        <a:solidFill>
-          <a:srgbClr val="0F172A"/>
-        </a:solidFill>
-        <a:effectLst/>
-      </p:bgPr>
-    </p:bg>
-    <p:spTree>
-      <p:nvGrpSpPr>
-        <p:cNvPr id="1" name=""/>
-        <p:cNvGrpSpPr/>
-        <p:nvPr/>
-      </p:nvGrpSpPr>
-      <p:grpSpPr/>
-      <p:sp>
-        <p:nvSpPr>
-          <p:cNvPr id="2" name="TextBox 1"/>
-          <p:cNvSpPr txBox="1"/>
-          <p:nvPr/>
-        </p:nvSpPr>
-        <p:spPr>
-          <a:xfrm>
-            <a:off x="457200" y="365760"/>
-            <a:ext cx="6858000" cy="548640"/>
-          </a:xfrm>
-          <a:prstGeom prst="rect">
-            <a:avLst/>
-          </a:prstGeom>
-          <a:noFill/>
-        </p:spPr>
-        <p:txBody>
-          <a:bodyPr wrap="none">
-            <a:spAutoFit/>
-          </a:bodyPr>
-          <a:lstStyle/>
-          <a:p>
-            <a:pPr>
-              <a:defRPr sz="3200" b="1">
-                <a:solidFill>
-                  <a:srgbClr val="2563EB"/>
-                </a:solidFill>
-              </a:defRPr>
-            </a:pPr>
-            <a:r>
-              <a:t>Security: 8-Layer Defense-in-Depth</a:t>
-            </a:r>
-          </a:p>
-        </p:txBody>
-      </p:sp>
-      <p:sp>
-        <p:nvSpPr>
-          <p:cNvPr id="3" name="TextBox 2"/>
-          <p:cNvSpPr txBox="1"/>
-          <p:nvPr/>
-        </p:nvSpPr>
-        <p:spPr>
-          <a:xfrm>
-            <a:off x="7498079" y="411480"/>
-            <a:ext cx="1371600" cy="365760"/>
-          </a:xfrm>
-          <a:prstGeom prst="rect">
-            <a:avLst/>
-          </a:prstGeom>
-          <a:noFill/>
-        </p:spPr>
-        <p:txBody>
-          <a:bodyPr wrap="none">
-            <a:spAutoFit/>
-          </a:bodyPr>
-          <a:lstStyle/>
-          <a:p>
-            <a:pPr>
-              <a:defRPr sz="1100" b="1">
-                <a:solidFill>
-                  <a:srgbClr val="10B981"/>
-                </a:solidFill>
-              </a:defRPr>
-            </a:pPr>
-            <a:r>
-              <a:t>✓ Verified</a:t>
-            </a:r>
-          </a:p>
-        </p:txBody>
-      </p:sp>
-      <p:sp>
-        <p:nvSpPr>
-          <p:cNvPr id="4" name="TextBox 3"/>
-          <p:cNvSpPr txBox="1"/>
-          <p:nvPr/>
-        </p:nvSpPr>
-        <p:spPr>
-          <a:xfrm>
-            <a:off x="640080" y="1188720"/>
-            <a:ext cx="7863840" cy="5212080"/>
-          </a:xfrm>
-          <a:prstGeom prst="rect">
-            <a:avLst/>
-          </a:prstGeom>
-          <a:noFill/>
-        </p:spPr>
-        <p:txBody>
-          <a:bodyPr wrap="square">
-            <a:spAutoFit/>
-          </a:bodyPr>
-          <a:lstStyle/>
-          <a:p>
-            <a:pPr>
-              <a:spcBef>
-                <a:spcPts val="800"/>
-              </a:spcBef>
-              <a:defRPr sz="1800">
-                <a:solidFill>
-                  <a:srgbClr val="F1F5F9"/>
-                </a:solidFill>
-              </a:defRPr>
-            </a:pPr>
-            <a:r>
-              <a:t>Every tool call passes independent layers (runtime-enforced):</a:t>
-            </a:r>
-          </a:p>
-          <a:p>
-            <a:pPr>
-              <a:spcBef>
-                <a:spcPts val="800"/>
-              </a:spcBef>
-              <a:defRPr sz="1800">
-                <a:solidFill>
-                  <a:srgbClr val="F1F5F9"/>
-                </a:solidFill>
-              </a:defRPr>
-            </a:pPr>
-            <a:r>
-              <a:t>1 Owner lock  2 Denied commands (137)  3 Governance ceiling</a:t>
-            </a:r>
-          </a:p>
-          <a:p>
-            <a:pPr>
-              <a:spcBef>
-                <a:spcPts val="800"/>
-              </a:spcBef>
-              <a:defRPr sz="1800">
-                <a:solidFill>
-                  <a:srgbClr val="F1F5F9"/>
-                </a:solidFill>
-              </a:defRPr>
-            </a:pPr>
-            <a:r>
-              <a:t>4 Sensitive-path block  5 Tool approval  6 Input validation</a:t>
-            </a:r>
-          </a:p>
-          <a:p>
-            <a:pPr>
-              <a:spcBef>
-                <a:spcPts val="800"/>
-              </a:spcBef>
-              <a:defRPr sz="1800">
-                <a:solidFill>
-                  <a:srgbClr val="F1F5F9"/>
-                </a:solidFill>
-              </a:defRPr>
-            </a:pPr>
-            <a:r>
-              <a:t>7 OS sandbox  8 Output redaction  (+ SEL audit, cross-cutting)</a:t>
-            </a:r>
-          </a:p>
-          <a:p>
-            <a:pPr>
-              <a:spcBef>
-                <a:spcPts val="800"/>
-              </a:spcBef>
-              <a:defRPr sz="1800">
-                <a:solidFill>
-                  <a:srgbClr val="F1F5F9"/>
-                </a:solidFill>
-              </a:defRPr>
-            </a:pPr>
-          </a:p>
-          <a:p>
-            <a:pPr>
-              <a:spcBef>
-                <a:spcPts val="800"/>
-              </a:spcBef>
-              <a:defRPr sz="1800">
-                <a:solidFill>
-                  <a:srgbClr val="F1F5F9"/>
-                </a:solidFill>
-              </a:defRPr>
-            </a:pPr>
-            <a:r>
-              <a:t>Sandbox: auto (default) / strict / off; no OS layer on Windows</a:t>
-            </a:r>
-          </a:p>
-          <a:p>
-            <a:pPr>
-              <a:spcBef>
-                <a:spcPts val="800"/>
-              </a:spcBef>
-              <a:defRPr sz="1800">
-                <a:solidFill>
-                  <a:srgbClr val="F1F5F9"/>
-                </a:solidFill>
-              </a:defRPr>
-            </a:pPr>
-            <a:r>
-              <a:t>Approval: Interactive / Trust command / Trust tool / Autopilot</a:t>
-            </a:r>
-          </a:p>
-          <a:p>
-            <a:pPr>
-              <a:spcBef>
-                <a:spcPts val="800"/>
-              </a:spcBef>
-              <a:defRPr sz="1800">
-                <a:solidFill>
-                  <a:srgbClr val="F1F5F9"/>
-                </a:solidFill>
-              </a:defRPr>
-            </a:pPr>
-            <a:r>
-              <a:t>Denied cmds enforced at Crew's gate, not agent config</a:t>
-            </a:r>
-          </a:p>
-          <a:p>
-            <a:pPr>
-              <a:spcBef>
-                <a:spcPts val="800"/>
-              </a:spcBef>
-              <a:defRPr sz="1800">
-                <a:solidFill>
-                  <a:srgbClr val="F1F5F9"/>
-                </a:solidFill>
-              </a:defRPr>
-            </a:pPr>
-            <a:r>
-              <a:t>kirocrew policy show|validate|explain; security events|audit|verify</a:t>
             </a:r>
           </a:p>
         </p:txBody>
@@ -6884,7 +6885,7 @@
               </a:defRPr>
             </a:pPr>
             <a:r>
-              <a:t>Running 24/7</a:t>
+              <a:t>Security: 8-Layer Defense-in-Depth</a:t>
             </a:r>
           </a:p>
         </p:txBody>
@@ -6957,112 +6958,124 @@
               </a:defRPr>
             </a:pPr>
             <a:r>
-              <a:t>Local service: systemd/launchd; runs as user, sudo once for unit</a:t>
-            </a:r>
-          </a:p>
-          <a:p>
-            <a:pPr>
-              <a:spcBef>
-                <a:spcPts val="800"/>
-              </a:spcBef>
-              <a:defRPr sz="1800">
-                <a:solidFill>
-                  <a:srgbClr val="F1F5F9"/>
-                </a:solidFill>
-              </a:defRPr>
-            </a:pPr>
-            <a:r>
-              <a:t>  kirocrew service install | logs -f | restart</a:t>
-            </a:r>
-          </a:p>
-          <a:p>
-            <a:pPr>
-              <a:spcBef>
-                <a:spcPts val="800"/>
-              </a:spcBef>
-              <a:defRPr sz="1800">
-                <a:solidFill>
-                  <a:srgbClr val="F1F5F9"/>
-                </a:solidFill>
-              </a:defRPr>
-            </a:pPr>
-            <a:r>
-              <a:t>Docker: multi-arch GHCR; kiro-cli login + kirocrew token; SLSA</a:t>
-            </a:r>
-          </a:p>
-          <a:p>
-            <a:pPr>
-              <a:spcBef>
-                <a:spcPts val="800"/>
-              </a:spcBef>
-              <a:defRPr sz="1800">
-                <a:solidFill>
-                  <a:srgbClr val="F1F5F9"/>
-                </a:solidFill>
-              </a:defRPr>
-            </a:pPr>
-            <a:r>
-              <a:t>  docker run -d -p 127.0.0.1:5476:5476 -v kirocrew-home:...</a:t>
-            </a:r>
-          </a:p>
-          <a:p>
-            <a:pPr>
-              <a:spcBef>
-                <a:spcPts val="800"/>
-              </a:spcBef>
-              <a:defRPr sz="1800">
-                <a:solidFill>
-                  <a:srgbClr val="F1F5F9"/>
-                </a:solidFill>
-              </a:defRPr>
-            </a:pPr>
-            <a:r>
-              <a:t>Remote host: modern Linux, ~10GB RAM, Node 20+ (slack-mcp)</a:t>
-            </a:r>
-          </a:p>
-          <a:p>
-            <a:pPr>
-              <a:spcBef>
-                <a:spcPts val="800"/>
-              </a:spcBef>
-              <a:defRPr sz="1800">
-                <a:solidFill>
-                  <a:srgbClr val="F1F5F9"/>
-                </a:solidFill>
-              </a:defRPr>
-            </a:pPr>
-            <a:r>
-              <a:t>  ssh -L 5476:localhost:5476 user@host</a:t>
-            </a:r>
-          </a:p>
-          <a:p>
-            <a:pPr>
-              <a:spcBef>
-                <a:spcPts val="800"/>
-              </a:spcBef>
-              <a:defRPr sz="1800">
-                <a:solidFill>
-                  <a:srgbClr val="F1F5F9"/>
-                </a:solidFill>
-              </a:defRPr>
-            </a:pPr>
-            <a:r>
-              <a:t>Sync state: memory + SQLite incl WAL; NOT .env/.local_secret</a:t>
-            </a:r>
-          </a:p>
-          <a:p>
-            <a:pPr>
-              <a:spcBef>
-                <a:spcPts val="800"/>
-              </a:spcBef>
-              <a:defRPr sz="1800">
-                <a:solidFill>
-                  <a:srgbClr val="F1F5F9"/>
-                </a:solidFill>
-              </a:defRPr>
-            </a:pPr>
-            <a:r>
-              <a:t>Mobile: Cloudflare/ngrok/Tailscale + dashboard.url; token 1h/20h</a:t>
+              <a:t>Every tool call passes independent layers (runtime-enforced):</a:t>
+            </a:r>
+          </a:p>
+          <a:p>
+            <a:pPr>
+              <a:spcBef>
+                <a:spcPts val="800"/>
+              </a:spcBef>
+              <a:defRPr sz="1800">
+                <a:solidFill>
+                  <a:srgbClr val="F1F5F9"/>
+                </a:solidFill>
+              </a:defRPr>
+            </a:pPr>
+            <a:r>
+              <a:t>1 Owner lock  2 Denied commands (137)  3 Governance ceiling</a:t>
+            </a:r>
+          </a:p>
+          <a:p>
+            <a:pPr>
+              <a:spcBef>
+                <a:spcPts val="800"/>
+              </a:spcBef>
+              <a:defRPr sz="1800">
+                <a:solidFill>
+                  <a:srgbClr val="F1F5F9"/>
+                </a:solidFill>
+              </a:defRPr>
+            </a:pPr>
+            <a:r>
+              <a:t>4 Sensitive-path block  5 Tool approval  6 Input validation</a:t>
+            </a:r>
+          </a:p>
+          <a:p>
+            <a:pPr>
+              <a:spcBef>
+                <a:spcPts val="800"/>
+              </a:spcBef>
+              <a:defRPr sz="1800">
+                <a:solidFill>
+                  <a:srgbClr val="F1F5F9"/>
+                </a:solidFill>
+              </a:defRPr>
+            </a:pPr>
+            <a:r>
+              <a:t>7 OS sandbox  8 Output redaction  (+ SEL audit, cross-cutting)</a:t>
+            </a:r>
+          </a:p>
+          <a:p>
+            <a:pPr>
+              <a:spcBef>
+                <a:spcPts val="800"/>
+              </a:spcBef>
+              <a:defRPr sz="1800">
+                <a:solidFill>
+                  <a:srgbClr val="F1F5F9"/>
+                </a:solidFill>
+              </a:defRPr>
+            </a:pPr>
+          </a:p>
+          <a:p>
+            <a:pPr>
+              <a:spcBef>
+                <a:spcPts val="800"/>
+              </a:spcBef>
+              <a:defRPr sz="1800">
+                <a:solidFill>
+                  <a:srgbClr val="F1F5F9"/>
+                </a:solidFill>
+              </a:defRPr>
+            </a:pPr>
+            <a:r>
+              <a:t>Sandbox: auto (default) / strict / off; no OS layer on Windows</a:t>
+            </a:r>
+          </a:p>
+          <a:p>
+            <a:pPr>
+              <a:spcBef>
+                <a:spcPts val="800"/>
+              </a:spcBef>
+              <a:defRPr sz="1800">
+                <a:solidFill>
+                  <a:srgbClr val="F1F5F9"/>
+                </a:solidFill>
+              </a:defRPr>
+            </a:pPr>
+            <a:r>
+              <a:t>Approval: Interactive / Trust command / Trust tool / Autopilot</a:t>
+            </a:r>
+          </a:p>
+          <a:p>
+            <a:pPr>
+              <a:spcBef>
+                <a:spcPts val="800"/>
+              </a:spcBef>
+              <a:defRPr sz="1800">
+                <a:solidFill>
+                  <a:srgbClr val="F1F5F9"/>
+                </a:solidFill>
+              </a:defRPr>
+            </a:pPr>
+            <a:r>
+              <a:t>Denied cmds enforced at Crew's gate, not agent config</a:t>
+            </a:r>
+          </a:p>
+          <a:p>
+            <a:pPr>
+              <a:spcBef>
+                <a:spcPts val="800"/>
+              </a:spcBef>
+              <a:defRPr sz="1800">
+                <a:solidFill>
+                  <a:srgbClr val="F1F5F9"/>
+                </a:solidFill>
+              </a:defRPr>
+            </a:pPr>
+            <a:r>
+              <a:t>kirocrew policy show|validate|explain; security events|audit|verify</a:t>
             </a:r>
           </a:p>
         </p:txBody>
@@ -7123,7 +7136,7 @@
               </a:defRPr>
             </a:pPr>
             <a:r>
-              <a:t>Interfaces: One Gateway, Many Surfaces</a:t>
+              <a:t>Running 24/7</a:t>
             </a:r>
           </a:p>
         </p:txBody>
@@ -7196,109 +7209,112 @@
               </a:defRPr>
             </a:pPr>
             <a:r>
-              <a:t>Mac app / web dashboard / CLI + Slack/Discord/Telegram/</a:t>
-            </a:r>
-          </a:p>
-          <a:p>
-            <a:pPr>
-              <a:spcBef>
-                <a:spcPts val="800"/>
-              </a:spcBef>
-              <a:defRPr sz="1800">
-                <a:solidFill>
-                  <a:srgbClr val="F1F5F9"/>
-                </a:solidFill>
-              </a:defRPr>
-            </a:pPr>
-            <a:r>
-              <a:t>Teams/Webex/WeCom/WeChat channels</a:t>
-            </a:r>
-          </a:p>
-          <a:p>
-            <a:pPr>
-              <a:spcBef>
-                <a:spcPts val="800"/>
-              </a:spcBef>
-              <a:defRPr sz="1800">
-                <a:solidFill>
-                  <a:srgbClr val="F1F5F9"/>
-                </a:solidFill>
-              </a:defRPr>
-            </a:pPr>
-            <a:r>
-              <a:t>Independent sessions, SHARED memory/skills/lessons/crons</a:t>
-            </a:r>
-          </a:p>
-          <a:p>
-            <a:pPr>
-              <a:spcBef>
-                <a:spcPts val="800"/>
-              </a:spcBef>
-              <a:defRPr sz="1800">
-                <a:solidFill>
-                  <a:srgbClr val="F1F5F9"/>
-                </a:solidFill>
-              </a:defRPr>
-            </a:pPr>
-            <a:r>
-              <a:t>Channels connect outbound - no need to expose dashboard port</a:t>
-            </a:r>
-          </a:p>
-          <a:p>
-            <a:pPr>
-              <a:spcBef>
-                <a:spcPts val="800"/>
-              </a:spcBef>
-              <a:defRPr sz="1800">
-                <a:solidFill>
-                  <a:srgbClr val="F1F5F9"/>
-                </a:solidFill>
-              </a:defRPr>
-            </a:pPr>
-          </a:p>
-          <a:p>
-            <a:pPr>
-              <a:spcBef>
-                <a:spcPts val="800"/>
-              </a:spcBef>
-              <a:defRPr sz="1800">
-                <a:solidFill>
-                  <a:srgbClr val="F1F5F9"/>
-                </a:solidFill>
-              </a:defRPr>
-            </a:pPr>
-            <a:r>
-              <a:t>Dashboard = React SPA localhost:5476 (primary interface)</a:t>
-            </a:r>
-          </a:p>
-          <a:p>
-            <a:pPr>
-              <a:spcBef>
-                <a:spcPts val="800"/>
-              </a:spcBef>
-              <a:defRPr sz="1800">
-                <a:solidFill>
-                  <a:srgbClr val="F1F5F9"/>
-                </a:solidFill>
-              </a:defRPr>
-            </a:pPr>
-            <a:r>
-              <a:t>Cross-surface: dashboard&lt;-&gt;Slack sync, resume sessions</a:t>
-            </a:r>
-          </a:p>
-          <a:p>
-            <a:pPr>
-              <a:spcBef>
-                <a:spcPts val="800"/>
-              </a:spcBef>
-              <a:defRPr sz="1800">
-                <a:solidFill>
-                  <a:srgbClr val="F1F5F9"/>
-                </a:solidFill>
-              </a:defRPr>
-            </a:pPr>
-            <a:r>
-              <a:t>5476 loopback-only default; reverse proxy+TLS or SSH tunnel</a:t>
+              <a:t>Local service: systemd/launchd; runs as user, sudo once for unit</a:t>
+            </a:r>
+          </a:p>
+          <a:p>
+            <a:pPr>
+              <a:spcBef>
+                <a:spcPts val="800"/>
+              </a:spcBef>
+              <a:defRPr sz="1800">
+                <a:solidFill>
+                  <a:srgbClr val="F1F5F9"/>
+                </a:solidFill>
+              </a:defRPr>
+            </a:pPr>
+            <a:r>
+              <a:t>  kirocrew service install | logs -f | restart</a:t>
+            </a:r>
+          </a:p>
+          <a:p>
+            <a:pPr>
+              <a:spcBef>
+                <a:spcPts val="800"/>
+              </a:spcBef>
+              <a:defRPr sz="1800">
+                <a:solidFill>
+                  <a:srgbClr val="F1F5F9"/>
+                </a:solidFill>
+              </a:defRPr>
+            </a:pPr>
+            <a:r>
+              <a:t>Docker: multi-arch GHCR; kiro-cli login + kirocrew token; SLSA</a:t>
+            </a:r>
+          </a:p>
+          <a:p>
+            <a:pPr>
+              <a:spcBef>
+                <a:spcPts val="800"/>
+              </a:spcBef>
+              <a:defRPr sz="1800">
+                <a:solidFill>
+                  <a:srgbClr val="F1F5F9"/>
+                </a:solidFill>
+              </a:defRPr>
+            </a:pPr>
+            <a:r>
+              <a:t>  docker run -d -p 127.0.0.1:5476:5476 -v kirocrew-home:...</a:t>
+            </a:r>
+          </a:p>
+          <a:p>
+            <a:pPr>
+              <a:spcBef>
+                <a:spcPts val="800"/>
+              </a:spcBef>
+              <a:defRPr sz="1800">
+                <a:solidFill>
+                  <a:srgbClr val="F1F5F9"/>
+                </a:solidFill>
+              </a:defRPr>
+            </a:pPr>
+            <a:r>
+              <a:t>Remote host: modern Linux, ~10GB RAM, Node 20+ (slack-mcp)</a:t>
+            </a:r>
+          </a:p>
+          <a:p>
+            <a:pPr>
+              <a:spcBef>
+                <a:spcPts val="800"/>
+              </a:spcBef>
+              <a:defRPr sz="1800">
+                <a:solidFill>
+                  <a:srgbClr val="F1F5F9"/>
+                </a:solidFill>
+              </a:defRPr>
+            </a:pPr>
+            <a:r>
+              <a:t>  ssh -L 5476:localhost:5476 user@host</a:t>
+            </a:r>
+          </a:p>
+          <a:p>
+            <a:pPr>
+              <a:spcBef>
+                <a:spcPts val="800"/>
+              </a:spcBef>
+              <a:defRPr sz="1800">
+                <a:solidFill>
+                  <a:srgbClr val="F1F5F9"/>
+                </a:solidFill>
+              </a:defRPr>
+            </a:pPr>
+            <a:r>
+              <a:t>Sync state: memory + SQLite incl WAL; NOT .env/.local_secret</a:t>
+            </a:r>
+          </a:p>
+          <a:p>
+            <a:pPr>
+              <a:spcBef>
+                <a:spcPts val="800"/>
+              </a:spcBef>
+              <a:defRPr sz="1800">
+                <a:solidFill>
+                  <a:srgbClr val="F1F5F9"/>
+                </a:solidFill>
+              </a:defRPr>
+            </a:pPr>
+            <a:r>
+              <a:t>Mobile: Cloudflare/ngrok/Tailscale + dashboard.url; token 1h/20h</a:t>
             </a:r>
           </a:p>
         </p:txBody>
@@ -7359,7 +7375,7 @@
               </a:defRPr>
             </a:pPr>
             <a:r>
-              <a:t>Chat</a:t>
+              <a:t>Interfaces: One Gateway, Many Surfaces</a:t>
             </a:r>
           </a:p>
         </p:txBody>
@@ -7432,109 +7448,109 @@
               </a:defRPr>
             </a:pPr>
             <a:r>
-              <a:t>Send text / @file / voice; streaming replies with live tool calls</a:t>
-            </a:r>
-          </a:p>
-          <a:p>
-            <a:pPr>
-              <a:spcBef>
-                <a:spcPts val="800"/>
-              </a:spcBef>
-              <a:defRPr sz="1800">
-                <a:solidFill>
-                  <a:srgbClr val="F1F5F9"/>
-                </a:solidFill>
-              </a:defRPr>
-            </a:pPr>
-            <a:r>
-              <a:t>Guide: approve/reject, edit &amp; resend, fork, Autopilot</a:t>
-            </a:r>
-          </a:p>
-          <a:p>
-            <a:pPr>
-              <a:spcBef>
-                <a:spcPts val="800"/>
-              </a:spcBef>
-              <a:defRPr sz="1800">
-                <a:solidFill>
-                  <a:srgbClr val="F1F5F9"/>
-                </a:solidFill>
-              </a:defRPr>
-            </a:pPr>
-            <a:r>
-              <a:t>Each tab = independent session sharing long-term memory</a:t>
-            </a:r>
-          </a:p>
-          <a:p>
-            <a:pPr>
-              <a:spcBef>
-                <a:spcPts val="800"/>
-              </a:spcBef>
-              <a:defRPr sz="1800">
-                <a:solidFill>
-                  <a:srgbClr val="F1F5F9"/>
-                </a:solidFill>
-              </a:defRPr>
-            </a:pPr>
-          </a:p>
-          <a:p>
-            <a:pPr>
-              <a:spcBef>
-                <a:spcPts val="800"/>
-              </a:spcBef>
-              <a:defRPr sz="1800">
-                <a:solidFill>
-                  <a:srgbClr val="F1F5F9"/>
-                </a:solidFill>
-              </a:defRPr>
-            </a:pPr>
-            <a:r>
-              <a:t>@ file picker; drag/paste image (vision); mic STT; Piper TTS</a:t>
-            </a:r>
-          </a:p>
-          <a:p>
-            <a:pPr>
-              <a:spcBef>
-                <a:spcPts val="800"/>
-              </a:spcBef>
-              <a:defRPr sz="1800">
-                <a:solidFill>
-                  <a:srgbClr val="F1F5F9"/>
-                </a:solidFill>
-              </a:defRPr>
-            </a:pPr>
-            <a:r>
-              <a:t>Prompt optimizer (Cmd+Shift+Enter); incognito; switch models;</a:t>
-            </a:r>
-          </a:p>
-          <a:p>
-            <a:pPr>
-              <a:spcBef>
-                <a:spcPts val="800"/>
-              </a:spcBef>
-              <a:defRPr sz="1800">
-                <a:solidFill>
-                  <a:srgbClr val="F1F5F9"/>
-                </a:solidFill>
-              </a:defRPr>
-            </a:pPr>
-            <a:r>
-              <a:t>reasoning effort per message</a:t>
-            </a:r>
-          </a:p>
-          <a:p>
-            <a:pPr>
-              <a:spcBef>
-                <a:spcPts val="800"/>
-              </a:spcBef>
-              <a:defRPr sz="1800">
-                <a:solidFill>
-                  <a:srgbClr val="F1F5F9"/>
-                </a:solidFill>
-              </a:defRPr>
-            </a:pPr>
-            <a:r>
-              <a:t>Leaves: Sessions, Message controls, Optimizer, Voice, Widgets</a:t>
+              <a:t>Mac app / web dashboard / CLI + Slack/Discord/Telegram/</a:t>
+            </a:r>
+          </a:p>
+          <a:p>
+            <a:pPr>
+              <a:spcBef>
+                <a:spcPts val="800"/>
+              </a:spcBef>
+              <a:defRPr sz="1800">
+                <a:solidFill>
+                  <a:srgbClr val="F1F5F9"/>
+                </a:solidFill>
+              </a:defRPr>
+            </a:pPr>
+            <a:r>
+              <a:t>Teams/Webex/WeCom/WeChat channels</a:t>
+            </a:r>
+          </a:p>
+          <a:p>
+            <a:pPr>
+              <a:spcBef>
+                <a:spcPts val="800"/>
+              </a:spcBef>
+              <a:defRPr sz="1800">
+                <a:solidFill>
+                  <a:srgbClr val="F1F5F9"/>
+                </a:solidFill>
+              </a:defRPr>
+            </a:pPr>
+            <a:r>
+              <a:t>Independent sessions, SHARED memory/skills/lessons/crons</a:t>
+            </a:r>
+          </a:p>
+          <a:p>
+            <a:pPr>
+              <a:spcBef>
+                <a:spcPts val="800"/>
+              </a:spcBef>
+              <a:defRPr sz="1800">
+                <a:solidFill>
+                  <a:srgbClr val="F1F5F9"/>
+                </a:solidFill>
+              </a:defRPr>
+            </a:pPr>
+            <a:r>
+              <a:t>Channels connect outbound - no need to expose dashboard port</a:t>
+            </a:r>
+          </a:p>
+          <a:p>
+            <a:pPr>
+              <a:spcBef>
+                <a:spcPts val="800"/>
+              </a:spcBef>
+              <a:defRPr sz="1800">
+                <a:solidFill>
+                  <a:srgbClr val="F1F5F9"/>
+                </a:solidFill>
+              </a:defRPr>
+            </a:pPr>
+          </a:p>
+          <a:p>
+            <a:pPr>
+              <a:spcBef>
+                <a:spcPts val="800"/>
+              </a:spcBef>
+              <a:defRPr sz="1800">
+                <a:solidFill>
+                  <a:srgbClr val="F1F5F9"/>
+                </a:solidFill>
+              </a:defRPr>
+            </a:pPr>
+            <a:r>
+              <a:t>Dashboard = React SPA localhost:5476 (primary interface)</a:t>
+            </a:r>
+          </a:p>
+          <a:p>
+            <a:pPr>
+              <a:spcBef>
+                <a:spcPts val="800"/>
+              </a:spcBef>
+              <a:defRPr sz="1800">
+                <a:solidFill>
+                  <a:srgbClr val="F1F5F9"/>
+                </a:solidFill>
+              </a:defRPr>
+            </a:pPr>
+            <a:r>
+              <a:t>Cross-surface: dashboard&lt;-&gt;Slack sync, resume sessions</a:t>
+            </a:r>
+          </a:p>
+          <a:p>
+            <a:pPr>
+              <a:spcBef>
+                <a:spcPts val="800"/>
+              </a:spcBef>
+              <a:defRPr sz="1800">
+                <a:solidFill>
+                  <a:srgbClr val="F1F5F9"/>
+                </a:solidFill>
+              </a:defRPr>
+            </a:pPr>
+            <a:r>
+              <a:t>5476 loopback-only default; reverse proxy+TLS or SSH tunnel</a:t>
             </a:r>
           </a:p>
         </p:txBody>
@@ -7595,7 +7611,7 @@
               </a:defRPr>
             </a:pPr>
             <a:r>
-              <a:t>Agent Capabilities (Customization Hub)</a:t>
+              <a:t>Chat</a:t>
             </a:r>
           </a:p>
         </p:txBody>
@@ -7668,97 +7684,109 @@
               </a:defRPr>
             </a:pPr>
             <a:r>
-              <a:t>Agents - model/prompt/tools/MCP server config</a:t>
-            </a:r>
-          </a:p>
-          <a:p>
-            <a:pPr>
-              <a:spcBef>
-                <a:spcPts val="800"/>
-              </a:spcBef>
-              <a:defRPr sz="1800">
-                <a:solidFill>
-                  <a:srgbClr val="F1F5F9"/>
-                </a:solidFill>
-              </a:defRPr>
-            </a:pPr>
-            <a:r>
-              <a:t>Agent Templates - prebuilt configs to customize</a:t>
-            </a:r>
-          </a:p>
-          <a:p>
-            <a:pPr>
-              <a:spcBef>
-                <a:spcPts val="800"/>
-              </a:spcBef>
-              <a:defRPr sz="1800">
-                <a:solidFill>
-                  <a:srgbClr val="F1F5F9"/>
-                </a:solidFill>
-              </a:defRPr>
-            </a:pPr>
-            <a:r>
-              <a:t>Integrations (MCP) - add external tools/services</a:t>
-            </a:r>
-          </a:p>
-          <a:p>
-            <a:pPr>
-              <a:spcBef>
-                <a:spcPts val="800"/>
-              </a:spcBef>
-              <a:defRPr sz="1800">
-                <a:solidFill>
-                  <a:srgbClr val="F1F5F9"/>
-                </a:solidFill>
-              </a:defRPr>
-            </a:pPr>
-            <a:r>
-              <a:t>Skills - on-demand knowledge files teaching workflows</a:t>
-            </a:r>
-          </a:p>
-          <a:p>
-            <a:pPr>
-              <a:spcBef>
-                <a:spcPts val="800"/>
-              </a:spcBef>
-              <a:defRPr sz="1800">
-                <a:solidFill>
-                  <a:srgbClr val="F1F5F9"/>
-                </a:solidFill>
-              </a:defRPr>
-            </a:pPr>
-            <a:r>
-              <a:t>Steering - workspace-level rules every session inherits</a:t>
-            </a:r>
-          </a:p>
-          <a:p>
-            <a:pPr>
-              <a:spcBef>
-                <a:spcPts val="800"/>
-              </a:spcBef>
-              <a:defRPr sz="1800">
-                <a:solidFill>
-                  <a:srgbClr val="F1F5F9"/>
-                </a:solidFill>
-              </a:defRPr>
-            </a:pPr>
-            <a:r>
-              <a:t>Hooks - automate reactions to events (scripts/context)</a:t>
-            </a:r>
-          </a:p>
-          <a:p>
-            <a:pPr>
-              <a:spcBef>
-                <a:spcPts val="800"/>
-              </a:spcBef>
-              <a:defRPr sz="1800">
-                <a:solidFill>
-                  <a:srgbClr val="F1F5F9"/>
-                </a:solidFill>
-              </a:defRPr>
-            </a:pPr>
-            <a:r>
-              <a:t>Prompts - customize the system prompts shaping behavior</a:t>
+              <a:t>Send text / @file / voice; streaming replies with live tool calls</a:t>
+            </a:r>
+          </a:p>
+          <a:p>
+            <a:pPr>
+              <a:spcBef>
+                <a:spcPts val="800"/>
+              </a:spcBef>
+              <a:defRPr sz="1800">
+                <a:solidFill>
+                  <a:srgbClr val="F1F5F9"/>
+                </a:solidFill>
+              </a:defRPr>
+            </a:pPr>
+            <a:r>
+              <a:t>Guide: approve/reject, edit &amp; resend, fork, Autopilot</a:t>
+            </a:r>
+          </a:p>
+          <a:p>
+            <a:pPr>
+              <a:spcBef>
+                <a:spcPts val="800"/>
+              </a:spcBef>
+              <a:defRPr sz="1800">
+                <a:solidFill>
+                  <a:srgbClr val="F1F5F9"/>
+                </a:solidFill>
+              </a:defRPr>
+            </a:pPr>
+            <a:r>
+              <a:t>Each tab = independent session sharing long-term memory</a:t>
+            </a:r>
+          </a:p>
+          <a:p>
+            <a:pPr>
+              <a:spcBef>
+                <a:spcPts val="800"/>
+              </a:spcBef>
+              <a:defRPr sz="1800">
+                <a:solidFill>
+                  <a:srgbClr val="F1F5F9"/>
+                </a:solidFill>
+              </a:defRPr>
+            </a:pPr>
+          </a:p>
+          <a:p>
+            <a:pPr>
+              <a:spcBef>
+                <a:spcPts val="800"/>
+              </a:spcBef>
+              <a:defRPr sz="1800">
+                <a:solidFill>
+                  <a:srgbClr val="F1F5F9"/>
+                </a:solidFill>
+              </a:defRPr>
+            </a:pPr>
+            <a:r>
+              <a:t>@ file picker; drag/paste image (vision); mic STT; Piper TTS</a:t>
+            </a:r>
+          </a:p>
+          <a:p>
+            <a:pPr>
+              <a:spcBef>
+                <a:spcPts val="800"/>
+              </a:spcBef>
+              <a:defRPr sz="1800">
+                <a:solidFill>
+                  <a:srgbClr val="F1F5F9"/>
+                </a:solidFill>
+              </a:defRPr>
+            </a:pPr>
+            <a:r>
+              <a:t>Prompt optimizer (Cmd+Shift+Enter); incognito; switch models;</a:t>
+            </a:r>
+          </a:p>
+          <a:p>
+            <a:pPr>
+              <a:spcBef>
+                <a:spcPts val="800"/>
+              </a:spcBef>
+              <a:defRPr sz="1800">
+                <a:solidFill>
+                  <a:srgbClr val="F1F5F9"/>
+                </a:solidFill>
+              </a:defRPr>
+            </a:pPr>
+            <a:r>
+              <a:t>reasoning effort per message</a:t>
+            </a:r>
+          </a:p>
+          <a:p>
+            <a:pPr>
+              <a:spcBef>
+                <a:spcPts val="800"/>
+              </a:spcBef>
+              <a:defRPr sz="1800">
+                <a:solidFill>
+                  <a:srgbClr val="F1F5F9"/>
+                </a:solidFill>
+              </a:defRPr>
+            </a:pPr>
+            <a:r>
+              <a:t>Leaves: Sessions, Message controls, Optimizer, Voice, Widgets</a:t>
             </a:r>
           </a:p>
         </p:txBody>
@@ -7819,7 +7847,7 @@
               </a:defRPr>
             </a:pPr>
             <a:r>
-              <a:t>Configuration</a:t>
+              <a:t>Agent Capabilities (Customization Hub)</a:t>
             </a:r>
           </a:p>
         </p:txBody>
@@ -7892,109 +7920,97 @@
               </a:defRPr>
             </a:pPr>
             <a:r>
-              <a:t>Settings panel: Overview/Imports/Chat/Display/Voice/</a:t>
-            </a:r>
-          </a:p>
-          <a:p>
-            <a:pPr>
-              <a:spcBef>
-                <a:spcPts val="800"/>
-              </a:spcBef>
-              <a:defRPr sz="1800">
-                <a:solidFill>
-                  <a:srgbClr val="F1F5F9"/>
-                </a:solidFill>
-              </a:defRPr>
-            </a:pPr>
-            <a:r>
-              <a:t>Notifications/Shortcuts/Skills/Channels/Browser/Computer Use/</a:t>
-            </a:r>
-          </a:p>
-          <a:p>
-            <a:pPr>
-              <a:spcBef>
-                <a:spcPts val="800"/>
-              </a:spcBef>
-              <a:defRPr sz="1800">
-                <a:solidFill>
-                  <a:srgbClr val="F1F5F9"/>
-                </a:solidFill>
-              </a:defRPr>
-            </a:pPr>
-            <a:r>
-              <a:t>Instances/Security/Developer/About - changes apply immediately</a:t>
-            </a:r>
-          </a:p>
-          <a:p>
-            <a:pPr>
-              <a:spcBef>
-                <a:spcPts val="800"/>
-              </a:spcBef>
-              <a:defRPr sz="1800">
-                <a:solidFill>
-                  <a:srgbClr val="F1F5F9"/>
-                </a:solidFill>
-              </a:defRPr>
-            </a:pPr>
-          </a:p>
-          <a:p>
-            <a:pPr>
-              <a:spcBef>
-                <a:spcPts val="800"/>
-              </a:spcBef>
-              <a:defRPr sz="1800">
-                <a:solidFill>
-                  <a:srgbClr val="F1F5F9"/>
-                </a:solidFill>
-              </a:defRPr>
-            </a:pPr>
-            <a:r>
-              <a:t>kirocrew config get|set|edit (set auto-restarts pool)</a:t>
-            </a:r>
-          </a:p>
-          <a:p>
-            <a:pPr>
-              <a:spcBef>
-                <a:spcPts val="800"/>
-              </a:spcBef>
-              <a:defRPr sz="1800">
-                <a:solidFill>
-                  <a:srgbClr val="F1F5F9"/>
-                </a:solidFill>
-              </a:defRPr>
-            </a:pPr>
-            <a:r>
-              <a:t>config.json (JSON, missing keys -&gt; defaults); 14 themes</a:t>
-            </a:r>
-          </a:p>
-          <a:p>
-            <a:pPr>
-              <a:spcBef>
-                <a:spcPts val="800"/>
-              </a:spcBef>
-              <a:defRPr sz="1800">
-                <a:solidFill>
-                  <a:srgbClr val="F1F5F9"/>
-                </a:solidFill>
-              </a:defRPr>
-            </a:pPr>
-            <a:r>
-              <a:t>Channel creds in ~/.kiro/crew/.env (mode 600)</a:t>
-            </a:r>
-          </a:p>
-          <a:p>
-            <a:pPr>
-              <a:spcBef>
-                <a:spcPts val="800"/>
-              </a:spcBef>
-              <a:defRPr sz="1800">
-                <a:solidFill>
-                  <a:srgbClr val="F1F5F9"/>
-                </a:solidFill>
-              </a:defRPr>
-            </a:pPr>
-            <a:r>
-              <a:t>Env: KIROCREW_HOME (~/.kiro/crew), KIROCREW_PORT (5476)</a:t>
+              <a:t>Agents - model/prompt/tools/MCP server config</a:t>
+            </a:r>
+          </a:p>
+          <a:p>
+            <a:pPr>
+              <a:spcBef>
+                <a:spcPts val="800"/>
+              </a:spcBef>
+              <a:defRPr sz="1800">
+                <a:solidFill>
+                  <a:srgbClr val="F1F5F9"/>
+                </a:solidFill>
+              </a:defRPr>
+            </a:pPr>
+            <a:r>
+              <a:t>Agent Templates - prebuilt configs to customize</a:t>
+            </a:r>
+          </a:p>
+          <a:p>
+            <a:pPr>
+              <a:spcBef>
+                <a:spcPts val="800"/>
+              </a:spcBef>
+              <a:defRPr sz="1800">
+                <a:solidFill>
+                  <a:srgbClr val="F1F5F9"/>
+                </a:solidFill>
+              </a:defRPr>
+            </a:pPr>
+            <a:r>
+              <a:t>Integrations (MCP) - add external tools/services</a:t>
+            </a:r>
+          </a:p>
+          <a:p>
+            <a:pPr>
+              <a:spcBef>
+                <a:spcPts val="800"/>
+              </a:spcBef>
+              <a:defRPr sz="1800">
+                <a:solidFill>
+                  <a:srgbClr val="F1F5F9"/>
+                </a:solidFill>
+              </a:defRPr>
+            </a:pPr>
+            <a:r>
+              <a:t>Skills - on-demand knowledge files teaching workflows</a:t>
+            </a:r>
+          </a:p>
+          <a:p>
+            <a:pPr>
+              <a:spcBef>
+                <a:spcPts val="800"/>
+              </a:spcBef>
+              <a:defRPr sz="1800">
+                <a:solidFill>
+                  <a:srgbClr val="F1F5F9"/>
+                </a:solidFill>
+              </a:defRPr>
+            </a:pPr>
+            <a:r>
+              <a:t>Steering - workspace-level rules every session inherits</a:t>
+            </a:r>
+          </a:p>
+          <a:p>
+            <a:pPr>
+              <a:spcBef>
+                <a:spcPts val="800"/>
+              </a:spcBef>
+              <a:defRPr sz="1800">
+                <a:solidFill>
+                  <a:srgbClr val="F1F5F9"/>
+                </a:solidFill>
+              </a:defRPr>
+            </a:pPr>
+            <a:r>
+              <a:t>Hooks - automate reactions to events (scripts/context)</a:t>
+            </a:r>
+          </a:p>
+          <a:p>
+            <a:pPr>
+              <a:spcBef>
+                <a:spcPts val="800"/>
+              </a:spcBef>
+              <a:defRPr sz="1800">
+                <a:solidFill>
+                  <a:srgbClr val="F1F5F9"/>
+                </a:solidFill>
+              </a:defRPr>
+            </a:pPr>
+            <a:r>
+              <a:t>Prompts - customize the system prompts shaping behavior</a:t>
             </a:r>
           </a:p>
         </p:txBody>
@@ -8303,7 +8319,7 @@
               </a:defRPr>
             </a:pPr>
             <a:r>
-              <a:t>Multi-instance</a:t>
+              <a:t>Configuration</a:t>
             </a:r>
           </a:p>
         </p:txBody>
@@ -8376,109 +8392,109 @@
               </a:defRPr>
             </a:pPr>
             <a:r>
-              <a:t>Drive multiple remote Crew hosts from one hub via SSH tunnels</a:t>
-            </a:r>
-          </a:p>
-          <a:p>
-            <a:pPr>
-              <a:spcBef>
-                <a:spcPts val="800"/>
-              </a:spcBef>
-              <a:defRPr sz="1800">
-                <a:solidFill>
-                  <a:srgbClr val="F1F5F9"/>
-                </a:solidFill>
-              </a:defRPr>
-            </a:pPr>
-            <a:r>
-              <a:t>Opt-in, off by default:</a:t>
-            </a:r>
-          </a:p>
-          <a:p>
-            <a:pPr>
-              <a:spcBef>
-                <a:spcPts val="800"/>
-              </a:spcBef>
-              <a:defRPr sz="1800">
-                <a:solidFill>
-                  <a:srgbClr val="F1F5F9"/>
-                </a:solidFill>
-              </a:defRPr>
-            </a:pPr>
-            <a:r>
-              <a:t>  kirocrew config set instances.enabled true &amp;&amp; kirocrew restart</a:t>
-            </a:r>
-          </a:p>
-          <a:p>
-            <a:pPr>
-              <a:spcBef>
-                <a:spcPts val="800"/>
-              </a:spcBef>
-              <a:defRPr sz="1800">
-                <a:solidFill>
-                  <a:srgbClr val="F1F5F9"/>
-                </a:solidFill>
-              </a:defRPr>
-            </a:pPr>
-          </a:p>
-          <a:p>
-            <a:pPr>
-              <a:spcBef>
-                <a:spcPts val="800"/>
-              </a:spcBef>
-              <a:defRPr sz="1800">
-                <a:solidFill>
-                  <a:srgbClr val="F1F5F9"/>
-                </a:solidFill>
-              </a:defRPr>
-            </a:pPr>
-            <a:r>
-              <a:t>Warm set cap 5 (LRU); health probe 30s; 2-tier self-heal (&lt;=8)</a:t>
-            </a:r>
-          </a:p>
-          <a:p>
-            <a:pPr>
-              <a:spcBef>
-                <a:spcPts val="800"/>
-              </a:spcBef>
-              <a:defRPr sz="1800">
-                <a:solidFill>
-                  <a:srgbClr val="F1F5F9"/>
-                </a:solidFill>
-              </a:defRPr>
-            </a:pPr>
-            <a:r>
-              <a:t>Add: SSH host/alias, remote port 7777, token TTL 20h</a:t>
-            </a:r>
-          </a:p>
-          <a:p>
-            <a:pPr>
-              <a:spcBef>
-                <a:spcPts val="800"/>
-              </a:spcBef>
-              <a:defRPr sz="1800">
-                <a:solidFill>
-                  <a:srgbClr val="F1F5F9"/>
-                </a:solidFill>
-              </a:defRPr>
-            </a:pPr>
-            <a:r>
-              <a:t>Security: deny-by-default, owner-only, loopback forwards,</a:t>
-            </a:r>
-          </a:p>
-          <a:p>
-            <a:pPr>
-              <a:spcBef>
-                <a:spcPts val="800"/>
-              </a:spcBef>
-              <a:defRPr sz="1800">
-                <a:solidFill>
-                  <a:srgbClr val="F1F5F9"/>
-                </a:solidFill>
-              </a:defRPr>
-            </a:pPr>
-            <a:r>
-              <a:t>argv-list ssh (no shell injection), SEL-audited</a:t>
+              <a:t>Settings panel: Overview/Imports/Chat/Display/Voice/</a:t>
+            </a:r>
+          </a:p>
+          <a:p>
+            <a:pPr>
+              <a:spcBef>
+                <a:spcPts val="800"/>
+              </a:spcBef>
+              <a:defRPr sz="1800">
+                <a:solidFill>
+                  <a:srgbClr val="F1F5F9"/>
+                </a:solidFill>
+              </a:defRPr>
+            </a:pPr>
+            <a:r>
+              <a:t>Notifications/Shortcuts/Skills/Channels/Browser/Computer Use/</a:t>
+            </a:r>
+          </a:p>
+          <a:p>
+            <a:pPr>
+              <a:spcBef>
+                <a:spcPts val="800"/>
+              </a:spcBef>
+              <a:defRPr sz="1800">
+                <a:solidFill>
+                  <a:srgbClr val="F1F5F9"/>
+                </a:solidFill>
+              </a:defRPr>
+            </a:pPr>
+            <a:r>
+              <a:t>Instances/Security/Developer/About - changes apply immediately</a:t>
+            </a:r>
+          </a:p>
+          <a:p>
+            <a:pPr>
+              <a:spcBef>
+                <a:spcPts val="800"/>
+              </a:spcBef>
+              <a:defRPr sz="1800">
+                <a:solidFill>
+                  <a:srgbClr val="F1F5F9"/>
+                </a:solidFill>
+              </a:defRPr>
+            </a:pPr>
+          </a:p>
+          <a:p>
+            <a:pPr>
+              <a:spcBef>
+                <a:spcPts val="800"/>
+              </a:spcBef>
+              <a:defRPr sz="1800">
+                <a:solidFill>
+                  <a:srgbClr val="F1F5F9"/>
+                </a:solidFill>
+              </a:defRPr>
+            </a:pPr>
+            <a:r>
+              <a:t>kirocrew config get|set|edit (set auto-restarts pool)</a:t>
+            </a:r>
+          </a:p>
+          <a:p>
+            <a:pPr>
+              <a:spcBef>
+                <a:spcPts val="800"/>
+              </a:spcBef>
+              <a:defRPr sz="1800">
+                <a:solidFill>
+                  <a:srgbClr val="F1F5F9"/>
+                </a:solidFill>
+              </a:defRPr>
+            </a:pPr>
+            <a:r>
+              <a:t>config.json (JSON, missing keys -&gt; defaults); 14 themes</a:t>
+            </a:r>
+          </a:p>
+          <a:p>
+            <a:pPr>
+              <a:spcBef>
+                <a:spcPts val="800"/>
+              </a:spcBef>
+              <a:defRPr sz="1800">
+                <a:solidFill>
+                  <a:srgbClr val="F1F5F9"/>
+                </a:solidFill>
+              </a:defRPr>
+            </a:pPr>
+            <a:r>
+              <a:t>Channel creds in ~/.kiro/crew/.env (mode 600)</a:t>
+            </a:r>
+          </a:p>
+          <a:p>
+            <a:pPr>
+              <a:spcBef>
+                <a:spcPts val="800"/>
+              </a:spcBef>
+              <a:defRPr sz="1800">
+                <a:solidFill>
+                  <a:srgbClr val="F1F5F9"/>
+                </a:solidFill>
+              </a:defRPr>
+            </a:pPr>
+            <a:r>
+              <a:t>Env: KIROCREW_HOME (~/.kiro/crew), KIROCREW_PORT (5476)</a:t>
             </a:r>
           </a:p>
         </p:txBody>
@@ -8539,7 +8555,7 @@
               </a:defRPr>
             </a:pPr>
             <a:r>
-              <a:t>Snapshot &amp; Restore</a:t>
+              <a:t>Multi-instance</a:t>
             </a:r>
           </a:p>
         </p:txBody>
@@ -8612,109 +8628,109 @@
               </a:defRPr>
             </a:pPr>
             <a:r>
-              <a:t>kirocrew snapshot [dir] --keep N | --list</a:t>
-            </a:r>
-          </a:p>
-          <a:p>
-            <a:pPr>
-              <a:spcBef>
-                <a:spcPts val="800"/>
-              </a:spcBef>
-              <a:defRPr sz="1800">
-                <a:solidFill>
-                  <a:srgbClr val="F1F5F9"/>
-                </a:solidFill>
-              </a:defRPr>
-            </a:pPr>
-            <a:r>
-              <a:t>kirocrew restore snap.tar.gz [--components ...] [--dry-run]</a:t>
-            </a:r>
-          </a:p>
-          <a:p>
-            <a:pPr>
-              <a:spcBef>
-                <a:spcPts val="800"/>
-              </a:spcBef>
-              <a:defRPr sz="1800">
-                <a:solidFill>
-                  <a:srgbClr val="F1F5F9"/>
-                </a:solidFill>
-              </a:defRPr>
-            </a:pPr>
-          </a:p>
-          <a:p>
-            <a:pPr>
-              <a:spcBef>
-                <a:spcPts val="800"/>
-              </a:spcBef>
-              <a:defRPr sz="1800">
-                <a:solidFill>
-                  <a:srgbClr val="F1F5F9"/>
-                </a:solidFill>
-              </a:defRPr>
-            </a:pPr>
-            <a:r>
-              <a:t>Includes: Memory, Workspace, Crons, Config, Skills, Notifications</a:t>
-            </a:r>
-          </a:p>
-          <a:p>
-            <a:pPr>
-              <a:spcBef>
-                <a:spcPts val="800"/>
-              </a:spcBef>
-              <a:defRPr sz="1800">
-                <a:solidFill>
-                  <a:srgbClr val="F1F5F9"/>
-                </a:solidFill>
-              </a:defRPr>
-            </a:pPr>
-            <a:r>
-              <a:t>Restore modes: replace (empty) vs merge (existing) - auto-detected</a:t>
-            </a:r>
-          </a:p>
-          <a:p>
-            <a:pPr>
-              <a:spcBef>
-                <a:spcPts val="800"/>
-              </a:spcBef>
-              <a:defRPr sz="1800">
-                <a:solidFill>
-                  <a:srgbClr val="F1F5F9"/>
-                </a:solidFill>
-              </a:defRPr>
-            </a:pPr>
-            <a:r>
-              <a:t>Daily auto snapshot 08:00 UTC, keeps 7</a:t>
-            </a:r>
-          </a:p>
-          <a:p>
-            <a:pPr>
-              <a:spcBef>
-                <a:spcPts val="800"/>
-              </a:spcBef>
-              <a:defRPr sz="1800">
-                <a:solidFill>
-                  <a:srgbClr val="F1F5F9"/>
-                </a:solidFill>
-              </a:defRPr>
-            </a:pPr>
-            <a:r>
-              <a:t>Contains security keys - treat like credentials</a:t>
-            </a:r>
-          </a:p>
-          <a:p>
-            <a:pPr>
-              <a:spcBef>
-                <a:spcPts val="800"/>
-              </a:spcBef>
-              <a:defRPr sz="1800">
-                <a:solidFill>
-                  <a:srgbClr val="F1F5F9"/>
-                </a:solidFill>
-              </a:defRPr>
-            </a:pPr>
-            <a:r>
-              <a:t>NOT covered: kiro-cli/AWS creds, channel defs, app code</a:t>
+              <a:t>Drive multiple remote Crew hosts from one hub via SSH tunnels</a:t>
+            </a:r>
+          </a:p>
+          <a:p>
+            <a:pPr>
+              <a:spcBef>
+                <a:spcPts val="800"/>
+              </a:spcBef>
+              <a:defRPr sz="1800">
+                <a:solidFill>
+                  <a:srgbClr val="F1F5F9"/>
+                </a:solidFill>
+              </a:defRPr>
+            </a:pPr>
+            <a:r>
+              <a:t>Opt-in, off by default:</a:t>
+            </a:r>
+          </a:p>
+          <a:p>
+            <a:pPr>
+              <a:spcBef>
+                <a:spcPts val="800"/>
+              </a:spcBef>
+              <a:defRPr sz="1800">
+                <a:solidFill>
+                  <a:srgbClr val="F1F5F9"/>
+                </a:solidFill>
+              </a:defRPr>
+            </a:pPr>
+            <a:r>
+              <a:t>  kirocrew config set instances.enabled true &amp;&amp; kirocrew restart</a:t>
+            </a:r>
+          </a:p>
+          <a:p>
+            <a:pPr>
+              <a:spcBef>
+                <a:spcPts val="800"/>
+              </a:spcBef>
+              <a:defRPr sz="1800">
+                <a:solidFill>
+                  <a:srgbClr val="F1F5F9"/>
+                </a:solidFill>
+              </a:defRPr>
+            </a:pPr>
+          </a:p>
+          <a:p>
+            <a:pPr>
+              <a:spcBef>
+                <a:spcPts val="800"/>
+              </a:spcBef>
+              <a:defRPr sz="1800">
+                <a:solidFill>
+                  <a:srgbClr val="F1F5F9"/>
+                </a:solidFill>
+              </a:defRPr>
+            </a:pPr>
+            <a:r>
+              <a:t>Warm set cap 5 (LRU); health probe 30s; 2-tier self-heal (&lt;=8)</a:t>
+            </a:r>
+          </a:p>
+          <a:p>
+            <a:pPr>
+              <a:spcBef>
+                <a:spcPts val="800"/>
+              </a:spcBef>
+              <a:defRPr sz="1800">
+                <a:solidFill>
+                  <a:srgbClr val="F1F5F9"/>
+                </a:solidFill>
+              </a:defRPr>
+            </a:pPr>
+            <a:r>
+              <a:t>Add: SSH host/alias, remote port 7777, token TTL 20h</a:t>
+            </a:r>
+          </a:p>
+          <a:p>
+            <a:pPr>
+              <a:spcBef>
+                <a:spcPts val="800"/>
+              </a:spcBef>
+              <a:defRPr sz="1800">
+                <a:solidFill>
+                  <a:srgbClr val="F1F5F9"/>
+                </a:solidFill>
+              </a:defRPr>
+            </a:pPr>
+            <a:r>
+              <a:t>Security: deny-by-default, owner-only, loopback forwards,</a:t>
+            </a:r>
+          </a:p>
+          <a:p>
+            <a:pPr>
+              <a:spcBef>
+                <a:spcPts val="800"/>
+              </a:spcBef>
+              <a:defRPr sz="1800">
+                <a:solidFill>
+                  <a:srgbClr val="F1F5F9"/>
+                </a:solidFill>
+              </a:defRPr>
+            </a:pPr>
+            <a:r>
+              <a:t>argv-list ssh (no shell injection), SEL-audited</a:t>
             </a:r>
           </a:p>
         </p:txBody>
@@ -8775,7 +8791,7 @@
               </a:defRPr>
             </a:pPr>
             <a:r>
-              <a:t>Apps / App Kit</a:t>
+              <a:t>Snapshot &amp; Restore</a:t>
             </a:r>
           </a:p>
         </p:txBody>
@@ -8848,109 +8864,109 @@
               </a:defRPr>
             </a:pPr>
             <a:r>
-              <a:t>Apps contribute: agents, skills, MCP servers, crons, UI pages,</a:t>
-            </a:r>
-          </a:p>
-          <a:p>
-            <a:pPr>
-              <a:spcBef>
-                <a:spcPts val="800"/>
-              </a:spcBef>
-              <a:defRPr sz="1800">
-                <a:solidFill>
-                  <a:srgbClr val="F1F5F9"/>
-                </a:solidFill>
-              </a:defRPr>
-            </a:pPr>
-            <a:r>
-              <a:t>backend processes, gateway hooks</a:t>
-            </a:r>
-          </a:p>
-          <a:p>
-            <a:pPr>
-              <a:spcBef>
-                <a:spcPts val="800"/>
-              </a:spcBef>
-              <a:defRPr sz="1800">
-                <a:solidFill>
-                  <a:srgbClr val="F1F5F9"/>
-                </a:solidFill>
-              </a:defRPr>
-            </a:pPr>
-            <a:r>
-              <a:t>Third-party apps DISABLED by default (Settings -&gt; Security)</a:t>
-            </a:r>
-          </a:p>
-          <a:p>
-            <a:pPr>
-              <a:spcBef>
-                <a:spcPts val="800"/>
-              </a:spcBef>
-              <a:defRPr sz="1800">
-                <a:solidFill>
-                  <a:srgbClr val="F1F5F9"/>
-                </a:solidFill>
-              </a:defRPr>
-            </a:pPr>
-          </a:p>
-          <a:p>
-            <a:pPr>
-              <a:spcBef>
-                <a:spcPts val="800"/>
-              </a:spcBef>
-              <a:defRPr sz="1800">
-                <a:solidFill>
-                  <a:srgbClr val="F1F5F9"/>
-                </a:solidFill>
-              </a:defRPr>
-            </a:pPr>
-            <a:r>
-              <a:t>Install from App Store (curated registry, PR to add) or</a:t>
-            </a:r>
-          </a:p>
-          <a:p>
-            <a:pPr>
-              <a:spcBef>
-                <a:spcPts val="800"/>
-              </a:spcBef>
-              <a:defRPr sz="1800">
-                <a:solidFill>
-                  <a:srgbClr val="F1F5F9"/>
-                </a:solidFill>
-              </a:defRPr>
-            </a:pPr>
-            <a:r>
-              <a:t>federated external registries (opt-in)</a:t>
-            </a:r>
-          </a:p>
-          <a:p>
-            <a:pPr>
-              <a:spcBef>
-                <a:spcPts val="800"/>
-              </a:spcBef>
-              <a:defRPr sz="1800">
-                <a:solidFill>
-                  <a:srgbClr val="F1F5F9"/>
-                </a:solidFill>
-              </a:defRPr>
-            </a:pPr>
-            <a:r>
-              <a:t>Lifecycle: gateway-managed / app-managed / locked</a:t>
-            </a:r>
-          </a:p>
-          <a:p>
-            <a:pPr>
-              <a:spcBef>
-                <a:spcPts val="800"/>
-              </a:spcBef>
-              <a:defRPr sz="1800">
-                <a:solidFill>
-                  <a:srgbClr val="F1F5F9"/>
-                </a:solidFill>
-              </a:defRPr>
-            </a:pPr>
-            <a:r>
-              <a:t>Dev: kirocrew app dev &lt;name&gt;; only permissions.api enforced</a:t>
+              <a:t>kirocrew snapshot [dir] --keep N | --list</a:t>
+            </a:r>
+          </a:p>
+          <a:p>
+            <a:pPr>
+              <a:spcBef>
+                <a:spcPts val="800"/>
+              </a:spcBef>
+              <a:defRPr sz="1800">
+                <a:solidFill>
+                  <a:srgbClr val="F1F5F9"/>
+                </a:solidFill>
+              </a:defRPr>
+            </a:pPr>
+            <a:r>
+              <a:t>kirocrew restore snap.tar.gz [--components ...] [--dry-run]</a:t>
+            </a:r>
+          </a:p>
+          <a:p>
+            <a:pPr>
+              <a:spcBef>
+                <a:spcPts val="800"/>
+              </a:spcBef>
+              <a:defRPr sz="1800">
+                <a:solidFill>
+                  <a:srgbClr val="F1F5F9"/>
+                </a:solidFill>
+              </a:defRPr>
+            </a:pPr>
+          </a:p>
+          <a:p>
+            <a:pPr>
+              <a:spcBef>
+                <a:spcPts val="800"/>
+              </a:spcBef>
+              <a:defRPr sz="1800">
+                <a:solidFill>
+                  <a:srgbClr val="F1F5F9"/>
+                </a:solidFill>
+              </a:defRPr>
+            </a:pPr>
+            <a:r>
+              <a:t>Includes: Memory, Workspace, Crons, Config, Skills, Notifications</a:t>
+            </a:r>
+          </a:p>
+          <a:p>
+            <a:pPr>
+              <a:spcBef>
+                <a:spcPts val="800"/>
+              </a:spcBef>
+              <a:defRPr sz="1800">
+                <a:solidFill>
+                  <a:srgbClr val="F1F5F9"/>
+                </a:solidFill>
+              </a:defRPr>
+            </a:pPr>
+            <a:r>
+              <a:t>Restore modes: replace (empty) vs merge (existing) - auto-detected</a:t>
+            </a:r>
+          </a:p>
+          <a:p>
+            <a:pPr>
+              <a:spcBef>
+                <a:spcPts val="800"/>
+              </a:spcBef>
+              <a:defRPr sz="1800">
+                <a:solidFill>
+                  <a:srgbClr val="F1F5F9"/>
+                </a:solidFill>
+              </a:defRPr>
+            </a:pPr>
+            <a:r>
+              <a:t>Daily auto snapshot 08:00 UTC, keeps 7</a:t>
+            </a:r>
+          </a:p>
+          <a:p>
+            <a:pPr>
+              <a:spcBef>
+                <a:spcPts val="800"/>
+              </a:spcBef>
+              <a:defRPr sz="1800">
+                <a:solidFill>
+                  <a:srgbClr val="F1F5F9"/>
+                </a:solidFill>
+              </a:defRPr>
+            </a:pPr>
+            <a:r>
+              <a:t>Contains security keys - treat like credentials</a:t>
+            </a:r>
+          </a:p>
+          <a:p>
+            <a:pPr>
+              <a:spcBef>
+                <a:spcPts val="800"/>
+              </a:spcBef>
+              <a:defRPr sz="1800">
+                <a:solidFill>
+                  <a:srgbClr val="F1F5F9"/>
+                </a:solidFill>
+              </a:defRPr>
+            </a:pPr>
+            <a:r>
+              <a:t>NOT covered: kiro-cli/AWS creds, channel defs, app code</a:t>
             </a:r>
           </a:p>
         </p:txBody>
@@ -9011,7 +9027,7 @@
               </a:defRPr>
             </a:pPr>
             <a:r>
-              <a:t>Troubleshooting</a:t>
+              <a:t>Apps / App Kit</a:t>
             </a:r>
           </a:p>
         </p:txBody>
@@ -9084,109 +9100,109 @@
               </a:defRPr>
             </a:pPr>
             <a:r>
-              <a:t>Start with a health check:</a:t>
-            </a:r>
-          </a:p>
-          <a:p>
-            <a:pPr>
-              <a:spcBef>
-                <a:spcPts val="800"/>
-              </a:spcBef>
-              <a:defRPr sz="1800">
-                <a:solidFill>
-                  <a:srgbClr val="F1F5F9"/>
-                </a:solidFill>
-              </a:defRPr>
-            </a:pPr>
-            <a:r>
-              <a:t>  kirocrew doctor [--verbose]   /   kirocrew logs -f</a:t>
-            </a:r>
-          </a:p>
-          <a:p>
-            <a:pPr>
-              <a:spcBef>
-                <a:spcPts val="800"/>
-              </a:spcBef>
-              <a:defRPr sz="1800">
-                <a:solidFill>
-                  <a:srgbClr val="F1F5F9"/>
-                </a:solidFill>
-              </a:defRPr>
-            </a:pPr>
-            <a:r>
-              <a:t>Reports: kiro-cli, auth, embeddings, Slack, config, MCP</a:t>
-            </a:r>
-          </a:p>
-          <a:p>
-            <a:pPr>
-              <a:spcBef>
-                <a:spcPts val="800"/>
-              </a:spcBef>
-              <a:defRPr sz="1800">
-                <a:solidFill>
-                  <a:srgbClr val="F1F5F9"/>
-                </a:solidFill>
-              </a:defRPr>
-            </a:pPr>
-          </a:p>
-          <a:p>
-            <a:pPr>
-              <a:spcBef>
-                <a:spcPts val="800"/>
-              </a:spcBef>
-              <a:defRPr sz="1800">
-                <a:solidFill>
-                  <a:srgbClr val="F1F5F9"/>
-                </a:solidFill>
-              </a:defRPr>
-            </a:pPr>
-            <a:r>
-              <a:t>Categories: install/setup, agent (AcpTimeoutError/</a:t>
-            </a:r>
-          </a:p>
-          <a:p>
-            <a:pPr>
-              <a:spcBef>
-                <a:spcPts val="800"/>
-              </a:spcBef>
-              <a:defRPr sz="1800">
-                <a:solidFill>
-                  <a:srgbClr val="F1F5F9"/>
-                </a:solidFill>
-              </a:defRPr>
-            </a:pPr>
-            <a:r>
-              <a:t>AcpProcessDied), memory/embeddings, Slack, Discord, MCP,</a:t>
-            </a:r>
-          </a:p>
-          <a:p>
-            <a:pPr>
-              <a:spcBef>
-                <a:spcPts val="800"/>
-              </a:spcBef>
-              <a:defRPr sz="1800">
-                <a:solidFill>
-                  <a:srgbClr val="F1F5F9"/>
-                </a:solidFill>
-              </a:defRPr>
-            </a:pPr>
-            <a:r>
-              <a:t>dashboard 403, sessions, task runner, subagents, cron,</a:t>
-            </a:r>
-          </a:p>
-          <a:p>
-            <a:pPr>
-              <a:spcBef>
-                <a:spcPts val="800"/>
-              </a:spcBef>
-              <a:defRPr sz="1800">
-                <a:solidFill>
-                  <a:srgbClr val="F1F5F9"/>
-                </a:solidFill>
-              </a:defRPr>
-            </a:pPr>
-            <a:r>
-              <a:t>config, snapshot, multi-instance, voice, artifact deploy</a:t>
+              <a:t>Apps contribute: agents, skills, MCP servers, crons, UI pages,</a:t>
+            </a:r>
+          </a:p>
+          <a:p>
+            <a:pPr>
+              <a:spcBef>
+                <a:spcPts val="800"/>
+              </a:spcBef>
+              <a:defRPr sz="1800">
+                <a:solidFill>
+                  <a:srgbClr val="F1F5F9"/>
+                </a:solidFill>
+              </a:defRPr>
+            </a:pPr>
+            <a:r>
+              <a:t>backend processes, gateway hooks</a:t>
+            </a:r>
+          </a:p>
+          <a:p>
+            <a:pPr>
+              <a:spcBef>
+                <a:spcPts val="800"/>
+              </a:spcBef>
+              <a:defRPr sz="1800">
+                <a:solidFill>
+                  <a:srgbClr val="F1F5F9"/>
+                </a:solidFill>
+              </a:defRPr>
+            </a:pPr>
+            <a:r>
+              <a:t>Third-party apps DISABLED by default (Settings -&gt; Security)</a:t>
+            </a:r>
+          </a:p>
+          <a:p>
+            <a:pPr>
+              <a:spcBef>
+                <a:spcPts val="800"/>
+              </a:spcBef>
+              <a:defRPr sz="1800">
+                <a:solidFill>
+                  <a:srgbClr val="F1F5F9"/>
+                </a:solidFill>
+              </a:defRPr>
+            </a:pPr>
+          </a:p>
+          <a:p>
+            <a:pPr>
+              <a:spcBef>
+                <a:spcPts val="800"/>
+              </a:spcBef>
+              <a:defRPr sz="1800">
+                <a:solidFill>
+                  <a:srgbClr val="F1F5F9"/>
+                </a:solidFill>
+              </a:defRPr>
+            </a:pPr>
+            <a:r>
+              <a:t>Install from App Store (curated registry, PR to add) or</a:t>
+            </a:r>
+          </a:p>
+          <a:p>
+            <a:pPr>
+              <a:spcBef>
+                <a:spcPts val="800"/>
+              </a:spcBef>
+              <a:defRPr sz="1800">
+                <a:solidFill>
+                  <a:srgbClr val="F1F5F9"/>
+                </a:solidFill>
+              </a:defRPr>
+            </a:pPr>
+            <a:r>
+              <a:t>federated external registries (opt-in)</a:t>
+            </a:r>
+          </a:p>
+          <a:p>
+            <a:pPr>
+              <a:spcBef>
+                <a:spcPts val="800"/>
+              </a:spcBef>
+              <a:defRPr sz="1800">
+                <a:solidFill>
+                  <a:srgbClr val="F1F5F9"/>
+                </a:solidFill>
+              </a:defRPr>
+            </a:pPr>
+            <a:r>
+              <a:t>Lifecycle: gateway-managed / app-managed / locked</a:t>
+            </a:r>
+          </a:p>
+          <a:p>
+            <a:pPr>
+              <a:spcBef>
+                <a:spcPts val="800"/>
+              </a:spcBef>
+              <a:defRPr sz="1800">
+                <a:solidFill>
+                  <a:srgbClr val="F1F5F9"/>
+                </a:solidFill>
+              </a:defRPr>
+            </a:pPr>
+            <a:r>
+              <a:t>Dev: kirocrew app dev &lt;name&gt;; only permissions.api enforced</a:t>
             </a:r>
           </a:p>
         </p:txBody>
@@ -9200,6 +9216,242 @@
 </file>
 
 <file path=ppt/slides/slide34.xml><?xml version="1.0" encoding="utf-8"?>
+<p:sld xmlns:a="http://schemas.openxmlformats.org/drawingml/2006/main" xmlns:p="http://schemas.openxmlformats.org/presentationml/2006/main" xmlns:r="http://schemas.openxmlformats.org/officeDocument/2006/relationships">
+  <p:cSld>
+    <p:bg>
+      <p:bgPr>
+        <a:solidFill>
+          <a:srgbClr val="0F172A"/>
+        </a:solidFill>
+        <a:effectLst/>
+      </p:bgPr>
+    </p:bg>
+    <p:spTree>
+      <p:nvGrpSpPr>
+        <p:cNvPr id="1" name=""/>
+        <p:cNvGrpSpPr/>
+        <p:nvPr/>
+      </p:nvGrpSpPr>
+      <p:grpSpPr/>
+      <p:sp>
+        <p:nvSpPr>
+          <p:cNvPr id="2" name="TextBox 1"/>
+          <p:cNvSpPr txBox="1"/>
+          <p:nvPr/>
+        </p:nvSpPr>
+        <p:spPr>
+          <a:xfrm>
+            <a:off x="457200" y="365760"/>
+            <a:ext cx="6858000" cy="548640"/>
+          </a:xfrm>
+          <a:prstGeom prst="rect">
+            <a:avLst/>
+          </a:prstGeom>
+          <a:noFill/>
+        </p:spPr>
+        <p:txBody>
+          <a:bodyPr wrap="none">
+            <a:spAutoFit/>
+          </a:bodyPr>
+          <a:lstStyle/>
+          <a:p>
+            <a:pPr>
+              <a:defRPr sz="3200" b="1">
+                <a:solidFill>
+                  <a:srgbClr val="2563EB"/>
+                </a:solidFill>
+              </a:defRPr>
+            </a:pPr>
+            <a:r>
+              <a:t>Troubleshooting</a:t>
+            </a:r>
+          </a:p>
+        </p:txBody>
+      </p:sp>
+      <p:sp>
+        <p:nvSpPr>
+          <p:cNvPr id="3" name="TextBox 2"/>
+          <p:cNvSpPr txBox="1"/>
+          <p:nvPr/>
+        </p:nvSpPr>
+        <p:spPr>
+          <a:xfrm>
+            <a:off x="7498079" y="411480"/>
+            <a:ext cx="1371600" cy="365760"/>
+          </a:xfrm>
+          <a:prstGeom prst="rect">
+            <a:avLst/>
+          </a:prstGeom>
+          <a:noFill/>
+        </p:spPr>
+        <p:txBody>
+          <a:bodyPr wrap="none">
+            <a:spAutoFit/>
+          </a:bodyPr>
+          <a:lstStyle/>
+          <a:p>
+            <a:pPr>
+              <a:defRPr sz="1100" b="1">
+                <a:solidFill>
+                  <a:srgbClr val="10B981"/>
+                </a:solidFill>
+              </a:defRPr>
+            </a:pPr>
+            <a:r>
+              <a:t>✓ Verified</a:t>
+            </a:r>
+          </a:p>
+        </p:txBody>
+      </p:sp>
+      <p:sp>
+        <p:nvSpPr>
+          <p:cNvPr id="4" name="TextBox 3"/>
+          <p:cNvSpPr txBox="1"/>
+          <p:nvPr/>
+        </p:nvSpPr>
+        <p:spPr>
+          <a:xfrm>
+            <a:off x="640080" y="1188720"/>
+            <a:ext cx="7863840" cy="5212080"/>
+          </a:xfrm>
+          <a:prstGeom prst="rect">
+            <a:avLst/>
+          </a:prstGeom>
+          <a:noFill/>
+        </p:spPr>
+        <p:txBody>
+          <a:bodyPr wrap="square">
+            <a:spAutoFit/>
+          </a:bodyPr>
+          <a:lstStyle/>
+          <a:p>
+            <a:pPr>
+              <a:spcBef>
+                <a:spcPts val="800"/>
+              </a:spcBef>
+              <a:defRPr sz="1800">
+                <a:solidFill>
+                  <a:srgbClr val="F1F5F9"/>
+                </a:solidFill>
+              </a:defRPr>
+            </a:pPr>
+            <a:r>
+              <a:t>Start with a health check:</a:t>
+            </a:r>
+          </a:p>
+          <a:p>
+            <a:pPr>
+              <a:spcBef>
+                <a:spcPts val="800"/>
+              </a:spcBef>
+              <a:defRPr sz="1800">
+                <a:solidFill>
+                  <a:srgbClr val="F1F5F9"/>
+                </a:solidFill>
+              </a:defRPr>
+            </a:pPr>
+            <a:r>
+              <a:t>  kirocrew doctor [--verbose]   /   kirocrew logs -f</a:t>
+            </a:r>
+          </a:p>
+          <a:p>
+            <a:pPr>
+              <a:spcBef>
+                <a:spcPts val="800"/>
+              </a:spcBef>
+              <a:defRPr sz="1800">
+                <a:solidFill>
+                  <a:srgbClr val="F1F5F9"/>
+                </a:solidFill>
+              </a:defRPr>
+            </a:pPr>
+            <a:r>
+              <a:t>Reports: kiro-cli, auth, embeddings, Slack, config, MCP</a:t>
+            </a:r>
+          </a:p>
+          <a:p>
+            <a:pPr>
+              <a:spcBef>
+                <a:spcPts val="800"/>
+              </a:spcBef>
+              <a:defRPr sz="1800">
+                <a:solidFill>
+                  <a:srgbClr val="F1F5F9"/>
+                </a:solidFill>
+              </a:defRPr>
+            </a:pPr>
+          </a:p>
+          <a:p>
+            <a:pPr>
+              <a:spcBef>
+                <a:spcPts val="800"/>
+              </a:spcBef>
+              <a:defRPr sz="1800">
+                <a:solidFill>
+                  <a:srgbClr val="F1F5F9"/>
+                </a:solidFill>
+              </a:defRPr>
+            </a:pPr>
+            <a:r>
+              <a:t>Categories: install/setup, agent (AcpTimeoutError/</a:t>
+            </a:r>
+          </a:p>
+          <a:p>
+            <a:pPr>
+              <a:spcBef>
+                <a:spcPts val="800"/>
+              </a:spcBef>
+              <a:defRPr sz="1800">
+                <a:solidFill>
+                  <a:srgbClr val="F1F5F9"/>
+                </a:solidFill>
+              </a:defRPr>
+            </a:pPr>
+            <a:r>
+              <a:t>AcpProcessDied), memory/embeddings, Slack, Discord, MCP,</a:t>
+            </a:r>
+          </a:p>
+          <a:p>
+            <a:pPr>
+              <a:spcBef>
+                <a:spcPts val="800"/>
+              </a:spcBef>
+              <a:defRPr sz="1800">
+                <a:solidFill>
+                  <a:srgbClr val="F1F5F9"/>
+                </a:solidFill>
+              </a:defRPr>
+            </a:pPr>
+            <a:r>
+              <a:t>dashboard 403, sessions, task runner, subagents, cron,</a:t>
+            </a:r>
+          </a:p>
+          <a:p>
+            <a:pPr>
+              <a:spcBef>
+                <a:spcPts val="800"/>
+              </a:spcBef>
+              <a:defRPr sz="1800">
+                <a:solidFill>
+                  <a:srgbClr val="F1F5F9"/>
+                </a:solidFill>
+              </a:defRPr>
+            </a:pPr>
+            <a:r>
+              <a:t>config, snapshot, multi-instance, voice, artifact deploy</a:t>
+            </a:r>
+          </a:p>
+        </p:txBody>
+      </p:sp>
+    </p:spTree>
+  </p:cSld>
+  <p:clrMapOvr>
+    <a:masterClrMapping/>
+  </p:clrMapOvr>
+</p:sld>
+</file>
+
+<file path=ppt/slides/slide35.xml><?xml version="1.0" encoding="utf-8"?>
 <p:sld xmlns:a="http://schemas.openxmlformats.org/drawingml/2006/main" xmlns:p="http://schemas.openxmlformats.org/presentationml/2006/main" xmlns:r="http://schemas.openxmlformats.org/officeDocument/2006/relationships">
   <p:cSld>
     <p:bg>
@@ -9283,266 +9535,6 @@
             </a:pPr>
             <a:r>
               <a:t>Enterprise integration examples</a:t>
-            </a:r>
-          </a:p>
-        </p:txBody>
-      </p:sp>
-    </p:spTree>
-  </p:cSld>
-  <p:clrMapOvr>
-    <a:masterClrMapping/>
-  </p:clrMapOvr>
-</p:sld>
-</file>
-
-<file path=ppt/slides/slide35.xml><?xml version="1.0" encoding="utf-8"?>
-<p:sld xmlns:a="http://schemas.openxmlformats.org/drawingml/2006/main" xmlns:p="http://schemas.openxmlformats.org/presentationml/2006/main" xmlns:r="http://schemas.openxmlformats.org/officeDocument/2006/relationships">
-  <p:cSld>
-    <p:bg>
-      <p:bgPr>
-        <a:solidFill>
-          <a:srgbClr val="0F172A"/>
-        </a:solidFill>
-        <a:effectLst/>
-      </p:bgPr>
-    </p:bg>
-    <p:spTree>
-      <p:nvGrpSpPr>
-        <p:cNvPr id="1" name=""/>
-        <p:cNvGrpSpPr/>
-        <p:nvPr/>
-      </p:nvGrpSpPr>
-      <p:grpSpPr/>
-      <p:sp>
-        <p:nvSpPr>
-          <p:cNvPr id="2" name="TextBox 1"/>
-          <p:cNvSpPr txBox="1"/>
-          <p:nvPr/>
-        </p:nvSpPr>
-        <p:spPr>
-          <a:xfrm>
-            <a:off x="457200" y="365760"/>
-            <a:ext cx="6858000" cy="548640"/>
-          </a:xfrm>
-          <a:prstGeom prst="rect">
-            <a:avLst/>
-          </a:prstGeom>
-          <a:noFill/>
-        </p:spPr>
-        <p:txBody>
-          <a:bodyPr wrap="none">
-            <a:spAutoFit/>
-          </a:bodyPr>
-          <a:lstStyle/>
-          <a:p>
-            <a:pPr>
-              <a:defRPr sz="3200" b="1">
-                <a:solidFill>
-                  <a:srgbClr val="2563EB"/>
-                </a:solidFill>
-              </a:defRPr>
-            </a:pPr>
-            <a:r>
-              <a:t>Example: 24/7 PR Monitoring</a:t>
-            </a:r>
-          </a:p>
-        </p:txBody>
-      </p:sp>
-      <p:sp>
-        <p:nvSpPr>
-          <p:cNvPr id="3" name="TextBox 2"/>
-          <p:cNvSpPr txBox="1"/>
-          <p:nvPr/>
-        </p:nvSpPr>
-        <p:spPr>
-          <a:xfrm>
-            <a:off x="7498079" y="411480"/>
-            <a:ext cx="1371600" cy="365760"/>
-          </a:xfrm>
-          <a:prstGeom prst="rect">
-            <a:avLst/>
-          </a:prstGeom>
-          <a:noFill/>
-        </p:spPr>
-        <p:txBody>
-          <a:bodyPr wrap="none">
-            <a:spAutoFit/>
-          </a:bodyPr>
-          <a:lstStyle/>
-          <a:p>
-            <a:pPr>
-              <a:defRPr sz="1100" b="1">
-                <a:solidFill>
-                  <a:srgbClr val="F59E0B"/>
-                </a:solidFill>
-              </a:defRPr>
-            </a:pPr>
-            <a:r>
-              <a:t>⚠ To Be Verified</a:t>
-            </a:r>
-          </a:p>
-        </p:txBody>
-      </p:sp>
-      <p:sp>
-        <p:nvSpPr>
-          <p:cNvPr id="4" name="TextBox 3"/>
-          <p:cNvSpPr txBox="1"/>
-          <p:nvPr/>
-        </p:nvSpPr>
-        <p:spPr>
-          <a:xfrm>
-            <a:off x="640080" y="1188720"/>
-            <a:ext cx="7863840" cy="5212080"/>
-          </a:xfrm>
-          <a:prstGeom prst="rect">
-            <a:avLst/>
-          </a:prstGeom>
-          <a:noFill/>
-        </p:spPr>
-        <p:txBody>
-          <a:bodyPr wrap="square">
-            <a:spAutoFit/>
-          </a:bodyPr>
-          <a:lstStyle/>
-          <a:p>
-            <a:pPr>
-              <a:spcBef>
-                <a:spcPts val="800"/>
-              </a:spcBef>
-              <a:defRPr sz="1800">
-                <a:solidFill>
-                  <a:srgbClr val="F1F5F9"/>
-                </a:solidFill>
-              </a:defRPr>
-            </a:pPr>
-            <a:r>
-              <a:t>Scenario: Track open PRs and alert on staleness</a:t>
-            </a:r>
-          </a:p>
-          <a:p>
-            <a:pPr>
-              <a:spcBef>
-                <a:spcPts val="800"/>
-              </a:spcBef>
-              <a:defRPr sz="1800">
-                <a:solidFill>
-                  <a:srgbClr val="F1F5F9"/>
-                </a:solidFill>
-              </a:defRPr>
-            </a:pPr>
-          </a:p>
-          <a:p>
-            <a:pPr>
-              <a:spcBef>
-                <a:spcPts val="800"/>
-              </a:spcBef>
-              <a:defRPr sz="1800">
-                <a:solidFill>
-                  <a:srgbClr val="F1F5F9"/>
-                </a:solidFill>
-              </a:defRPr>
-            </a:pPr>
-            <a:r>
-              <a:t>Implementation:</a:t>
-            </a:r>
-          </a:p>
-          <a:p>
-            <a:pPr>
-              <a:spcBef>
-                <a:spcPts val="800"/>
-              </a:spcBef>
-              <a:defRPr sz="1800">
-                <a:solidFill>
-                  <a:srgbClr val="F1F5F9"/>
-                </a:solidFill>
-              </a:defRPr>
-            </a:pPr>
-            <a:r>
-              <a:t>• Heartbeat watches open PRs</a:t>
-            </a:r>
-          </a:p>
-          <a:p>
-            <a:pPr>
-              <a:spcBef>
-                <a:spcPts val="800"/>
-              </a:spcBef>
-              <a:defRPr sz="1800">
-                <a:solidFill>
-                  <a:srgbClr val="F1F5F9"/>
-                </a:solidFill>
-              </a:defRPr>
-            </a:pPr>
-            <a:r>
-              <a:t>• Alerts when stale (&gt;4 hours no review)</a:t>
-            </a:r>
-          </a:p>
-          <a:p>
-            <a:pPr>
-              <a:spcBef>
-                <a:spcPts val="800"/>
-              </a:spcBef>
-              <a:defRPr sz="1800">
-                <a:solidFill>
-                  <a:srgbClr val="F1F5F9"/>
-                </a:solidFill>
-              </a:defRPr>
-            </a:pPr>
-            <a:r>
-              <a:t>• Auto-pings reviewers via Slack</a:t>
-            </a:r>
-          </a:p>
-          <a:p>
-            <a:pPr>
-              <a:spcBef>
-                <a:spcPts val="800"/>
-              </a:spcBef>
-              <a:defRPr sz="1800">
-                <a:solidFill>
-                  <a:srgbClr val="F1F5F9"/>
-                </a:solidFill>
-              </a:defRPr>
-            </a:pPr>
-          </a:p>
-          <a:p>
-            <a:pPr>
-              <a:spcBef>
-                <a:spcPts val="800"/>
-              </a:spcBef>
-              <a:defRPr sz="1800">
-                <a:solidFill>
-                  <a:srgbClr val="F1F5F9"/>
-                </a:solidFill>
-              </a:defRPr>
-            </a:pPr>
-            <a:r>
-              <a:t>Uses: Heartbeats + Slack integration</a:t>
-            </a:r>
-          </a:p>
-          <a:p>
-            <a:pPr>
-              <a:spcBef>
-                <a:spcPts val="800"/>
-              </a:spcBef>
-              <a:defRPr sz="1800">
-                <a:solidFill>
-                  <a:srgbClr val="F1F5F9"/>
-                </a:solidFill>
-              </a:defRPr>
-            </a:pPr>
-          </a:p>
-          <a:p>
-            <a:pPr>
-              <a:spcBef>
-                <a:spcPts val="800"/>
-              </a:spcBef>
-              <a:defRPr sz="1800">
-                <a:solidFill>
-                  <a:srgbClr val="F1F5F9"/>
-                </a:solidFill>
-              </a:defRPr>
-            </a:pPr>
-            <a:r>
-              <a:t>Note: Example scenario based on documented capabilities</a:t>
             </a:r>
           </a:p>
         </p:txBody>
@@ -9603,7 +9595,7 @@
               </a:defRPr>
             </a:pPr>
             <a:r>
-              <a:t>Example: Nightly Security Audit</a:t>
+              <a:t>Example: 24/7 PR Monitoring</a:t>
             </a:r>
           </a:p>
         </p:txBody>
@@ -9676,7 +9668,7 @@
               </a:defRPr>
             </a:pPr>
             <a:r>
-              <a:t>Scenario: Automated security scanning</a:t>
+              <a:t>Scenario: Track open PRs and alert on staleness</a:t>
             </a:r>
           </a:p>
           <a:p>
@@ -9718,94 +9710,91 @@
               </a:defRPr>
             </a:pPr>
             <a:r>
-              <a:t>• Cron job at 2am</a:t>
-            </a:r>
-          </a:p>
-          <a:p>
-            <a:pPr>
-              <a:spcBef>
-                <a:spcPts val="800"/>
-              </a:spcBef>
-              <a:defRPr sz="1800">
-                <a:solidFill>
-                  <a:srgbClr val="F1F5F9"/>
-                </a:solidFill>
-              </a:defRPr>
-            </a:pPr>
-            <a:r>
-              <a:t>• Spawns subagents (one per repo)</a:t>
-            </a:r>
-          </a:p>
-          <a:p>
-            <a:pPr>
-              <a:spcBef>
-                <a:spcPts val="800"/>
-              </a:spcBef>
-              <a:defRPr sz="1800">
-                <a:solidFill>
-                  <a:srgbClr val="F1F5F9"/>
-                </a:solidFill>
-              </a:defRPr>
-            </a:pPr>
-            <a:r>
-              <a:t>• Scans for secrets, vulnerabilities, misconfigurations</a:t>
-            </a:r>
-          </a:p>
-          <a:p>
-            <a:pPr>
-              <a:spcBef>
-                <a:spcPts val="800"/>
-              </a:spcBef>
-              <a:defRPr sz="1800">
-                <a:solidFill>
-                  <a:srgbClr val="F1F5F9"/>
-                </a:solidFill>
-              </a:defRPr>
-            </a:pPr>
-            <a:r>
-              <a:t>• Aggregates findings into report</a:t>
-            </a:r>
-          </a:p>
-          <a:p>
-            <a:pPr>
-              <a:spcBef>
-                <a:spcPts val="800"/>
-              </a:spcBef>
-              <a:defRPr sz="1800">
-                <a:solidFill>
-                  <a:srgbClr val="F1F5F9"/>
-                </a:solidFill>
-              </a:defRPr>
-            </a:pPr>
-            <a:r>
-              <a:t>• Files HIGH/CRITICAL tickets</a:t>
-            </a:r>
-          </a:p>
-          <a:p>
-            <a:pPr>
-              <a:spcBef>
-                <a:spcPts val="800"/>
-              </a:spcBef>
-              <a:defRPr sz="1800">
-                <a:solidFill>
-                  <a:srgbClr val="F1F5F9"/>
-                </a:solidFill>
-              </a:defRPr>
-            </a:pPr>
-          </a:p>
-          <a:p>
-            <a:pPr>
-              <a:spcBef>
-                <a:spcPts val="800"/>
-              </a:spcBef>
-              <a:defRPr sz="1800">
-                <a:solidFill>
-                  <a:srgbClr val="F1F5F9"/>
-                </a:solidFill>
-              </a:defRPr>
-            </a:pPr>
-            <a:r>
-              <a:t>Uses: Cron + Subagents + Task automation</a:t>
+              <a:t>• Heartbeat watches open PRs</a:t>
+            </a:r>
+          </a:p>
+          <a:p>
+            <a:pPr>
+              <a:spcBef>
+                <a:spcPts val="800"/>
+              </a:spcBef>
+              <a:defRPr sz="1800">
+                <a:solidFill>
+                  <a:srgbClr val="F1F5F9"/>
+                </a:solidFill>
+              </a:defRPr>
+            </a:pPr>
+            <a:r>
+              <a:t>• Alerts when stale (&gt;4 hours no review)</a:t>
+            </a:r>
+          </a:p>
+          <a:p>
+            <a:pPr>
+              <a:spcBef>
+                <a:spcPts val="800"/>
+              </a:spcBef>
+              <a:defRPr sz="1800">
+                <a:solidFill>
+                  <a:srgbClr val="F1F5F9"/>
+                </a:solidFill>
+              </a:defRPr>
+            </a:pPr>
+            <a:r>
+              <a:t>• Auto-pings reviewers via Slack</a:t>
+            </a:r>
+          </a:p>
+          <a:p>
+            <a:pPr>
+              <a:spcBef>
+                <a:spcPts val="800"/>
+              </a:spcBef>
+              <a:defRPr sz="1800">
+                <a:solidFill>
+                  <a:srgbClr val="F1F5F9"/>
+                </a:solidFill>
+              </a:defRPr>
+            </a:pPr>
+          </a:p>
+          <a:p>
+            <a:pPr>
+              <a:spcBef>
+                <a:spcPts val="800"/>
+              </a:spcBef>
+              <a:defRPr sz="1800">
+                <a:solidFill>
+                  <a:srgbClr val="F1F5F9"/>
+                </a:solidFill>
+              </a:defRPr>
+            </a:pPr>
+            <a:r>
+              <a:t>Uses: Heartbeats + Slack integration</a:t>
+            </a:r>
+          </a:p>
+          <a:p>
+            <a:pPr>
+              <a:spcBef>
+                <a:spcPts val="800"/>
+              </a:spcBef>
+              <a:defRPr sz="1800">
+                <a:solidFill>
+                  <a:srgbClr val="F1F5F9"/>
+                </a:solidFill>
+              </a:defRPr>
+            </a:pPr>
+          </a:p>
+          <a:p>
+            <a:pPr>
+              <a:spcBef>
+                <a:spcPts val="800"/>
+              </a:spcBef>
+              <a:defRPr sz="1800">
+                <a:solidFill>
+                  <a:srgbClr val="F1F5F9"/>
+                </a:solidFill>
+              </a:defRPr>
+            </a:pPr>
+            <a:r>
+              <a:t>Note: Example scenario based on documented capabilities</a:t>
             </a:r>
           </a:p>
         </p:txBody>
@@ -9866,7 +9855,7 @@
               </a:defRPr>
             </a:pPr>
             <a:r>
-              <a:t>Example: Incident Response</a:t>
+              <a:t>Example: Nightly Security Audit</a:t>
             </a:r>
           </a:p>
         </p:txBody>
@@ -9939,7 +9928,7 @@
               </a:defRPr>
             </a:pPr>
             <a:r>
-              <a:t>Scenario: Automated triage and RCA</a:t>
+              <a:t>Scenario: Automated security scanning</a:t>
             </a:r>
           </a:p>
           <a:p>
@@ -9981,109 +9970,94 @@
               </a:defRPr>
             </a:pPr>
             <a:r>
-              <a:t>• Webhook from PagerDuty</a:t>
-            </a:r>
-          </a:p>
-          <a:p>
-            <a:pPr>
-              <a:spcBef>
-                <a:spcPts val="800"/>
-              </a:spcBef>
-              <a:defRPr sz="1800">
-                <a:solidFill>
-                  <a:srgbClr val="F1F5F9"/>
-                </a:solidFill>
-              </a:defRPr>
-            </a:pPr>
-            <a:r>
-              <a:t>• Crew triages alert</a:t>
-            </a:r>
-          </a:p>
-          <a:p>
-            <a:pPr>
-              <a:spcBef>
-                <a:spcPts val="800"/>
-              </a:spcBef>
-              <a:defRPr sz="1800">
-                <a:solidFill>
-                  <a:srgbClr val="F1F5F9"/>
-                </a:solidFill>
-              </a:defRPr>
-            </a:pPr>
-            <a:r>
-              <a:t>• Checks logs, metrics, recent deploys</a:t>
-            </a:r>
-          </a:p>
-          <a:p>
-            <a:pPr>
-              <a:spcBef>
-                <a:spcPts val="800"/>
-              </a:spcBef>
-              <a:defRPr sz="1800">
-                <a:solidFill>
-                  <a:srgbClr val="F1F5F9"/>
-                </a:solidFill>
-              </a:defRPr>
-            </a:pPr>
-            <a:r>
-              <a:t>• Applies known fixes (from memory/lessons)</a:t>
-            </a:r>
-          </a:p>
-          <a:p>
-            <a:pPr>
-              <a:spcBef>
-                <a:spcPts val="800"/>
-              </a:spcBef>
-              <a:defRPr sz="1800">
-                <a:solidFill>
-                  <a:srgbClr val="F1F5F9"/>
-                </a:solidFill>
-              </a:defRPr>
-            </a:pPr>
-            <a:r>
-              <a:t>• Escalates if novel</a:t>
-            </a:r>
-          </a:p>
-          <a:p>
-            <a:pPr>
-              <a:spcBef>
-                <a:spcPts val="800"/>
-              </a:spcBef>
-              <a:defRPr sz="1800">
-                <a:solidFill>
-                  <a:srgbClr val="F1F5F9"/>
-                </a:solidFill>
-              </a:defRPr>
-            </a:pPr>
-            <a:r>
-              <a:t>• Posts RCA when resolved</a:t>
-            </a:r>
-          </a:p>
-          <a:p>
-            <a:pPr>
-              <a:spcBef>
-                <a:spcPts val="800"/>
-              </a:spcBef>
-              <a:defRPr sz="1800">
-                <a:solidFill>
-                  <a:srgbClr val="F1F5F9"/>
-                </a:solidFill>
-              </a:defRPr>
-            </a:pPr>
-          </a:p>
-          <a:p>
-            <a:pPr>
-              <a:spcBef>
-                <a:spcPts val="800"/>
-              </a:spcBef>
-              <a:defRPr sz="1800">
-                <a:solidFill>
-                  <a:srgbClr val="F1F5F9"/>
-                </a:solidFill>
-              </a:defRPr>
-            </a:pPr>
-            <a:r>
-              <a:t>Uses: Webhooks + Memory + Knowledge</a:t>
+              <a:t>• Cron job at 2am</a:t>
+            </a:r>
+          </a:p>
+          <a:p>
+            <a:pPr>
+              <a:spcBef>
+                <a:spcPts val="800"/>
+              </a:spcBef>
+              <a:defRPr sz="1800">
+                <a:solidFill>
+                  <a:srgbClr val="F1F5F9"/>
+                </a:solidFill>
+              </a:defRPr>
+            </a:pPr>
+            <a:r>
+              <a:t>• Spawns subagents (one per repo)</a:t>
+            </a:r>
+          </a:p>
+          <a:p>
+            <a:pPr>
+              <a:spcBef>
+                <a:spcPts val="800"/>
+              </a:spcBef>
+              <a:defRPr sz="1800">
+                <a:solidFill>
+                  <a:srgbClr val="F1F5F9"/>
+                </a:solidFill>
+              </a:defRPr>
+            </a:pPr>
+            <a:r>
+              <a:t>• Scans for secrets, vulnerabilities, misconfigurations</a:t>
+            </a:r>
+          </a:p>
+          <a:p>
+            <a:pPr>
+              <a:spcBef>
+                <a:spcPts val="800"/>
+              </a:spcBef>
+              <a:defRPr sz="1800">
+                <a:solidFill>
+                  <a:srgbClr val="F1F5F9"/>
+                </a:solidFill>
+              </a:defRPr>
+            </a:pPr>
+            <a:r>
+              <a:t>• Aggregates findings into report</a:t>
+            </a:r>
+          </a:p>
+          <a:p>
+            <a:pPr>
+              <a:spcBef>
+                <a:spcPts val="800"/>
+              </a:spcBef>
+              <a:defRPr sz="1800">
+                <a:solidFill>
+                  <a:srgbClr val="F1F5F9"/>
+                </a:solidFill>
+              </a:defRPr>
+            </a:pPr>
+            <a:r>
+              <a:t>• Files HIGH/CRITICAL tickets</a:t>
+            </a:r>
+          </a:p>
+          <a:p>
+            <a:pPr>
+              <a:spcBef>
+                <a:spcPts val="800"/>
+              </a:spcBef>
+              <a:defRPr sz="1800">
+                <a:solidFill>
+                  <a:srgbClr val="F1F5F9"/>
+                </a:solidFill>
+              </a:defRPr>
+            </a:pPr>
+          </a:p>
+          <a:p>
+            <a:pPr>
+              <a:spcBef>
+                <a:spcPts val="800"/>
+              </a:spcBef>
+              <a:defRPr sz="1800">
+                <a:solidFill>
+                  <a:srgbClr val="F1F5F9"/>
+                </a:solidFill>
+              </a:defRPr>
+            </a:pPr>
+            <a:r>
+              <a:t>Uses: Cron + Subagents + Task automation</a:t>
             </a:r>
           </a:p>
         </p:txBody>
@@ -10144,7 +10118,7 @@
               </a:defRPr>
             </a:pPr>
             <a:r>
-              <a:t>CI/CD Integration (3 Modes)</a:t>
+              <a:t>Example: Incident Response</a:t>
             </a:r>
           </a:p>
         </p:txBody>
@@ -10174,12 +10148,12 @@
             <a:pPr>
               <a:defRPr sz="1100" b="1">
                 <a:solidFill>
-                  <a:srgbClr val="10B981"/>
-                </a:solidFill>
-              </a:defRPr>
-            </a:pPr>
-            <a:r>
-              <a:t>✓ Verified</a:t>
+                  <a:srgbClr val="F59E0B"/>
+                </a:solidFill>
+              </a:defRPr>
+            </a:pPr>
+            <a:r>
+              <a:t>⚠ To Be Verified</a:t>
             </a:r>
           </a:p>
         </p:txBody>
@@ -10217,181 +10191,151 @@
               </a:defRPr>
             </a:pPr>
             <a:r>
-              <a:t>Mode 1: CLI Headless</a:t>
-            </a:r>
-          </a:p>
-          <a:p>
-            <a:pPr>
-              <a:spcBef>
-                <a:spcPts val="800"/>
-              </a:spcBef>
-              <a:defRPr sz="1800">
-                <a:solidFill>
-                  <a:srgbClr val="F1F5F9"/>
-                </a:solidFill>
-              </a:defRPr>
-            </a:pPr>
-            <a:r>
-              <a:t>• kiro-cli chat --no-interactive "&lt;prompt&gt;" in pipeline</a:t>
-            </a:r>
-          </a:p>
-          <a:p>
-            <a:pPr>
-              <a:spcBef>
-                <a:spcPts val="800"/>
-              </a:spcBef>
-              <a:defRPr sz="1800">
-                <a:solidFill>
-                  <a:srgbClr val="F1F5F9"/>
-                </a:solidFill>
-              </a:defRPr>
-            </a:pPr>
-            <a:r>
-              <a:t>• Engine version: --engine v3 (not --v3)</a:t>
-            </a:r>
-          </a:p>
-          <a:p>
-            <a:pPr>
-              <a:spcBef>
-                <a:spcPts val="800"/>
-              </a:spcBef>
-              <a:defRPr sz="1800">
-                <a:solidFill>
-                  <a:srgbClr val="F1F5F9"/>
-                </a:solidFill>
-              </a:defRPr>
-            </a:pPr>
-            <a:r>
-              <a:t>• Use case: Simple code generation</a:t>
-            </a:r>
-          </a:p>
-          <a:p>
-            <a:pPr>
-              <a:spcBef>
-                <a:spcPts val="800"/>
-              </a:spcBef>
-              <a:defRPr sz="1800">
-                <a:solidFill>
-                  <a:srgbClr val="F1F5F9"/>
-                </a:solidFill>
-              </a:defRPr>
-            </a:pPr>
-          </a:p>
-          <a:p>
-            <a:pPr>
-              <a:spcBef>
-                <a:spcPts val="800"/>
-              </a:spcBef>
-              <a:defRPr sz="1800">
-                <a:solidFill>
-                  <a:srgbClr val="F1F5F9"/>
-                </a:solidFill>
-              </a:defRPr>
-            </a:pPr>
-            <a:r>
-              <a:t>Mode 2: Crew Webhooks</a:t>
-            </a:r>
-          </a:p>
-          <a:p>
-            <a:pPr>
-              <a:spcBef>
-                <a:spcPts val="800"/>
-              </a:spcBef>
-              <a:defRPr sz="1800">
-                <a:solidFill>
-                  <a:srgbClr val="F1F5F9"/>
-                </a:solidFill>
-              </a:defRPr>
-            </a:pPr>
-            <a:r>
-              <a:t>• CI pipeline calls Crew on events</a:t>
-            </a:r>
-          </a:p>
-          <a:p>
-            <a:pPr>
-              <a:spcBef>
-                <a:spcPts val="800"/>
-              </a:spcBef>
-              <a:defRPr sz="1800">
-                <a:solidFill>
-                  <a:srgbClr val="F1F5F9"/>
-                </a:solidFill>
-              </a:defRPr>
-            </a:pPr>
-            <a:r>
-              <a:t>• Crew analyzes and reports via Slack/Dashboard</a:t>
-            </a:r>
-          </a:p>
-          <a:p>
-            <a:pPr>
-              <a:spcBef>
-                <a:spcPts val="800"/>
-              </a:spcBef>
-              <a:defRPr sz="1800">
-                <a:solidFill>
-                  <a:srgbClr val="F1F5F9"/>
-                </a:solidFill>
-              </a:defRPr>
-            </a:pPr>
-            <a:r>
-              <a:t>• Use case: Root cause analysis, monitoring</a:t>
-            </a:r>
-          </a:p>
-          <a:p>
-            <a:pPr>
-              <a:spcBef>
-                <a:spcPts val="800"/>
-              </a:spcBef>
-              <a:defRPr sz="1800">
-                <a:solidFill>
-                  <a:srgbClr val="F1F5F9"/>
-                </a:solidFill>
-              </a:defRPr>
-            </a:pPr>
-          </a:p>
-          <a:p>
-            <a:pPr>
-              <a:spcBef>
-                <a:spcPts val="800"/>
-              </a:spcBef>
-              <a:defRPr sz="1800">
-                <a:solidFill>
-                  <a:srgbClr val="F1F5F9"/>
-                </a:solidFill>
-              </a:defRPr>
-            </a:pPr>
-            <a:r>
-              <a:t>Mode 3: Crew Cron</a:t>
-            </a:r>
-          </a:p>
-          <a:p>
-            <a:pPr>
-              <a:spcBef>
-                <a:spcPts val="800"/>
-              </a:spcBef>
-              <a:defRPr sz="1800">
-                <a:solidFill>
-                  <a:srgbClr val="F1F5F9"/>
-                </a:solidFill>
-              </a:defRPr>
-            </a:pPr>
-            <a:r>
-              <a:t>• Periodic checks of CI/PR status</a:t>
-            </a:r>
-          </a:p>
-          <a:p>
-            <a:pPr>
-              <a:spcBef>
-                <a:spcPts val="800"/>
-              </a:spcBef>
-              <a:defRPr sz="1800">
-                <a:solidFill>
-                  <a:srgbClr val="F1F5F9"/>
-                </a:solidFill>
-              </a:defRPr>
-            </a:pPr>
-            <a:r>
-              <a:t>• Use case: Nightly audits, health checks</a:t>
+              <a:t>Scenario: Automated triage and RCA</a:t>
+            </a:r>
+          </a:p>
+          <a:p>
+            <a:pPr>
+              <a:spcBef>
+                <a:spcPts val="800"/>
+              </a:spcBef>
+              <a:defRPr sz="1800">
+                <a:solidFill>
+                  <a:srgbClr val="F1F5F9"/>
+                </a:solidFill>
+              </a:defRPr>
+            </a:pPr>
+          </a:p>
+          <a:p>
+            <a:pPr>
+              <a:spcBef>
+                <a:spcPts val="800"/>
+              </a:spcBef>
+              <a:defRPr sz="1800">
+                <a:solidFill>
+                  <a:srgbClr val="F1F5F9"/>
+                </a:solidFill>
+              </a:defRPr>
+            </a:pPr>
+            <a:r>
+              <a:t>Implementation:</a:t>
+            </a:r>
+          </a:p>
+          <a:p>
+            <a:pPr>
+              <a:spcBef>
+                <a:spcPts val="800"/>
+              </a:spcBef>
+              <a:defRPr sz="1800">
+                <a:solidFill>
+                  <a:srgbClr val="F1F5F9"/>
+                </a:solidFill>
+              </a:defRPr>
+            </a:pPr>
+            <a:r>
+              <a:t>• Webhook from PagerDuty</a:t>
+            </a:r>
+          </a:p>
+          <a:p>
+            <a:pPr>
+              <a:spcBef>
+                <a:spcPts val="800"/>
+              </a:spcBef>
+              <a:defRPr sz="1800">
+                <a:solidFill>
+                  <a:srgbClr val="F1F5F9"/>
+                </a:solidFill>
+              </a:defRPr>
+            </a:pPr>
+            <a:r>
+              <a:t>• Crew triages alert</a:t>
+            </a:r>
+          </a:p>
+          <a:p>
+            <a:pPr>
+              <a:spcBef>
+                <a:spcPts val="800"/>
+              </a:spcBef>
+              <a:defRPr sz="1800">
+                <a:solidFill>
+                  <a:srgbClr val="F1F5F9"/>
+                </a:solidFill>
+              </a:defRPr>
+            </a:pPr>
+            <a:r>
+              <a:t>• Checks logs, metrics, recent deploys</a:t>
+            </a:r>
+          </a:p>
+          <a:p>
+            <a:pPr>
+              <a:spcBef>
+                <a:spcPts val="800"/>
+              </a:spcBef>
+              <a:defRPr sz="1800">
+                <a:solidFill>
+                  <a:srgbClr val="F1F5F9"/>
+                </a:solidFill>
+              </a:defRPr>
+            </a:pPr>
+            <a:r>
+              <a:t>• Applies known fixes (from memory/lessons)</a:t>
+            </a:r>
+          </a:p>
+          <a:p>
+            <a:pPr>
+              <a:spcBef>
+                <a:spcPts val="800"/>
+              </a:spcBef>
+              <a:defRPr sz="1800">
+                <a:solidFill>
+                  <a:srgbClr val="F1F5F9"/>
+                </a:solidFill>
+              </a:defRPr>
+            </a:pPr>
+            <a:r>
+              <a:t>• Escalates if novel</a:t>
+            </a:r>
+          </a:p>
+          <a:p>
+            <a:pPr>
+              <a:spcBef>
+                <a:spcPts val="800"/>
+              </a:spcBef>
+              <a:defRPr sz="1800">
+                <a:solidFill>
+                  <a:srgbClr val="F1F5F9"/>
+                </a:solidFill>
+              </a:defRPr>
+            </a:pPr>
+            <a:r>
+              <a:t>• Posts RCA when resolved</a:t>
+            </a:r>
+          </a:p>
+          <a:p>
+            <a:pPr>
+              <a:spcBef>
+                <a:spcPts val="800"/>
+              </a:spcBef>
+              <a:defRPr sz="1800">
+                <a:solidFill>
+                  <a:srgbClr val="F1F5F9"/>
+                </a:solidFill>
+              </a:defRPr>
+            </a:pPr>
+          </a:p>
+          <a:p>
+            <a:pPr>
+              <a:spcBef>
+                <a:spcPts val="800"/>
+              </a:spcBef>
+              <a:defRPr sz="1800">
+                <a:solidFill>
+                  <a:srgbClr val="F1F5F9"/>
+                </a:solidFill>
+              </a:defRPr>
+            </a:pPr>
+            <a:r>
+              <a:t>Uses: Webhooks + Memory + Knowledge</a:t>
             </a:r>
           </a:p>
         </p:txBody>
@@ -10410,7 +10354,7 @@
     <p:bg>
       <p:bgPr>
         <a:solidFill>
-          <a:srgbClr val="1E293B"/>
+          <a:srgbClr val="0F172A"/>
         </a:solidFill>
         <a:effectLst/>
       </p:bgPr>
@@ -10430,8 +10374,8 @@
         </p:nvSpPr>
         <p:spPr>
           <a:xfrm>
-            <a:off x="914400" y="2743200"/>
-            <a:ext cx="7315200" cy="914400"/>
+            <a:off x="457200" y="365760"/>
+            <a:ext cx="6858000" cy="548640"/>
           </a:xfrm>
           <a:prstGeom prst="rect">
             <a:avLst/>
@@ -10444,15 +10388,262 @@
           </a:bodyPr>
           <a:lstStyle/>
           <a:p>
-            <a:pPr algn="ctr">
-              <a:defRPr sz="4400" b="1">
+            <a:pPr>
+              <a:defRPr sz="3200" b="1">
                 <a:solidFill>
                   <a:srgbClr val="2563EB"/>
                 </a:solidFill>
               </a:defRPr>
             </a:pPr>
             <a:r>
-              <a:t>Part 5: Getting Started</a:t>
+              <a:t>CI/CD Integration (3 Modes)</a:t>
+            </a:r>
+          </a:p>
+        </p:txBody>
+      </p:sp>
+      <p:sp>
+        <p:nvSpPr>
+          <p:cNvPr id="3" name="TextBox 2"/>
+          <p:cNvSpPr txBox="1"/>
+          <p:nvPr/>
+        </p:nvSpPr>
+        <p:spPr>
+          <a:xfrm>
+            <a:off x="7498079" y="411480"/>
+            <a:ext cx="1371600" cy="365760"/>
+          </a:xfrm>
+          <a:prstGeom prst="rect">
+            <a:avLst/>
+          </a:prstGeom>
+          <a:noFill/>
+        </p:spPr>
+        <p:txBody>
+          <a:bodyPr wrap="none">
+            <a:spAutoFit/>
+          </a:bodyPr>
+          <a:lstStyle/>
+          <a:p>
+            <a:pPr>
+              <a:defRPr sz="1100" b="1">
+                <a:solidFill>
+                  <a:srgbClr val="10B981"/>
+                </a:solidFill>
+              </a:defRPr>
+            </a:pPr>
+            <a:r>
+              <a:t>✓ Verified</a:t>
+            </a:r>
+          </a:p>
+        </p:txBody>
+      </p:sp>
+      <p:sp>
+        <p:nvSpPr>
+          <p:cNvPr id="4" name="TextBox 3"/>
+          <p:cNvSpPr txBox="1"/>
+          <p:nvPr/>
+        </p:nvSpPr>
+        <p:spPr>
+          <a:xfrm>
+            <a:off x="640080" y="1188720"/>
+            <a:ext cx="7863840" cy="5212080"/>
+          </a:xfrm>
+          <a:prstGeom prst="rect">
+            <a:avLst/>
+          </a:prstGeom>
+          <a:noFill/>
+        </p:spPr>
+        <p:txBody>
+          <a:bodyPr wrap="square">
+            <a:spAutoFit/>
+          </a:bodyPr>
+          <a:lstStyle/>
+          <a:p>
+            <a:pPr>
+              <a:spcBef>
+                <a:spcPts val="800"/>
+              </a:spcBef>
+              <a:defRPr sz="1800">
+                <a:solidFill>
+                  <a:srgbClr val="F1F5F9"/>
+                </a:solidFill>
+              </a:defRPr>
+            </a:pPr>
+            <a:r>
+              <a:t>Mode 1: CLI Headless</a:t>
+            </a:r>
+          </a:p>
+          <a:p>
+            <a:pPr>
+              <a:spcBef>
+                <a:spcPts val="800"/>
+              </a:spcBef>
+              <a:defRPr sz="1800">
+                <a:solidFill>
+                  <a:srgbClr val="F1F5F9"/>
+                </a:solidFill>
+              </a:defRPr>
+            </a:pPr>
+            <a:r>
+              <a:t>• kiro-cli chat --no-interactive "&lt;prompt&gt;" in pipeline</a:t>
+            </a:r>
+          </a:p>
+          <a:p>
+            <a:pPr>
+              <a:spcBef>
+                <a:spcPts val="800"/>
+              </a:spcBef>
+              <a:defRPr sz="1800">
+                <a:solidFill>
+                  <a:srgbClr val="F1F5F9"/>
+                </a:solidFill>
+              </a:defRPr>
+            </a:pPr>
+            <a:r>
+              <a:t>• Engine version: --engine v3 (not --v3)</a:t>
+            </a:r>
+          </a:p>
+          <a:p>
+            <a:pPr>
+              <a:spcBef>
+                <a:spcPts val="800"/>
+              </a:spcBef>
+              <a:defRPr sz="1800">
+                <a:solidFill>
+                  <a:srgbClr val="F1F5F9"/>
+                </a:solidFill>
+              </a:defRPr>
+            </a:pPr>
+            <a:r>
+              <a:t>• Use case: Simple code generation</a:t>
+            </a:r>
+          </a:p>
+          <a:p>
+            <a:pPr>
+              <a:spcBef>
+                <a:spcPts val="800"/>
+              </a:spcBef>
+              <a:defRPr sz="1800">
+                <a:solidFill>
+                  <a:srgbClr val="F1F5F9"/>
+                </a:solidFill>
+              </a:defRPr>
+            </a:pPr>
+          </a:p>
+          <a:p>
+            <a:pPr>
+              <a:spcBef>
+                <a:spcPts val="800"/>
+              </a:spcBef>
+              <a:defRPr sz="1800">
+                <a:solidFill>
+                  <a:srgbClr val="F1F5F9"/>
+                </a:solidFill>
+              </a:defRPr>
+            </a:pPr>
+            <a:r>
+              <a:t>Mode 2: Crew Webhooks</a:t>
+            </a:r>
+          </a:p>
+          <a:p>
+            <a:pPr>
+              <a:spcBef>
+                <a:spcPts val="800"/>
+              </a:spcBef>
+              <a:defRPr sz="1800">
+                <a:solidFill>
+                  <a:srgbClr val="F1F5F9"/>
+                </a:solidFill>
+              </a:defRPr>
+            </a:pPr>
+            <a:r>
+              <a:t>• CI pipeline calls Crew on events</a:t>
+            </a:r>
+          </a:p>
+          <a:p>
+            <a:pPr>
+              <a:spcBef>
+                <a:spcPts val="800"/>
+              </a:spcBef>
+              <a:defRPr sz="1800">
+                <a:solidFill>
+                  <a:srgbClr val="F1F5F9"/>
+                </a:solidFill>
+              </a:defRPr>
+            </a:pPr>
+            <a:r>
+              <a:t>• Crew analyzes and reports via Slack/Dashboard</a:t>
+            </a:r>
+          </a:p>
+          <a:p>
+            <a:pPr>
+              <a:spcBef>
+                <a:spcPts val="800"/>
+              </a:spcBef>
+              <a:defRPr sz="1800">
+                <a:solidFill>
+                  <a:srgbClr val="F1F5F9"/>
+                </a:solidFill>
+              </a:defRPr>
+            </a:pPr>
+            <a:r>
+              <a:t>• Use case: Root cause analysis, monitoring</a:t>
+            </a:r>
+          </a:p>
+          <a:p>
+            <a:pPr>
+              <a:spcBef>
+                <a:spcPts val="800"/>
+              </a:spcBef>
+              <a:defRPr sz="1800">
+                <a:solidFill>
+                  <a:srgbClr val="F1F5F9"/>
+                </a:solidFill>
+              </a:defRPr>
+            </a:pPr>
+          </a:p>
+          <a:p>
+            <a:pPr>
+              <a:spcBef>
+                <a:spcPts val="800"/>
+              </a:spcBef>
+              <a:defRPr sz="1800">
+                <a:solidFill>
+                  <a:srgbClr val="F1F5F9"/>
+                </a:solidFill>
+              </a:defRPr>
+            </a:pPr>
+            <a:r>
+              <a:t>Mode 3: Crew Cron</a:t>
+            </a:r>
+          </a:p>
+          <a:p>
+            <a:pPr>
+              <a:spcBef>
+                <a:spcPts val="800"/>
+              </a:spcBef>
+              <a:defRPr sz="1800">
+                <a:solidFill>
+                  <a:srgbClr val="F1F5F9"/>
+                </a:solidFill>
+              </a:defRPr>
+            </a:pPr>
+            <a:r>
+              <a:t>• Periodic checks of CI/PR status</a:t>
+            </a:r>
+          </a:p>
+          <a:p>
+            <a:pPr>
+              <a:spcBef>
+                <a:spcPts val="800"/>
+              </a:spcBef>
+              <a:defRPr sz="1800">
+                <a:solidFill>
+                  <a:srgbClr val="F1F5F9"/>
+                </a:solidFill>
+              </a:defRPr>
+            </a:pPr>
+            <a:r>
+              <a:t>• Use case: Nightly audits, health checks</a:t>
             </a:r>
           </a:p>
         </p:txBody>
@@ -10567,7 +10758,7 @@
     <p:bg>
       <p:bgPr>
         <a:solidFill>
-          <a:srgbClr val="0F172A"/>
+          <a:srgbClr val="1E293B"/>
         </a:solidFill>
         <a:effectLst/>
       </p:bgPr>
@@ -10587,8 +10778,8 @@
         </p:nvSpPr>
         <p:spPr>
           <a:xfrm>
-            <a:off x="457200" y="365760"/>
-            <a:ext cx="8229600" cy="548640"/>
+            <a:off x="914400" y="2743200"/>
+            <a:ext cx="7315200" cy="914400"/>
           </a:xfrm>
           <a:prstGeom prst="rect">
             <a:avLst/>
@@ -10601,292 +10792,15 @@
           </a:bodyPr>
           <a:lstStyle/>
           <a:p>
-            <a:pPr>
-              <a:defRPr sz="3200" b="1">
+            <a:pPr algn="ctr">
+              <a:defRPr sz="4400" b="1">
                 <a:solidFill>
                   <a:srgbClr val="2563EB"/>
                 </a:solidFill>
               </a:defRPr>
             </a:pPr>
             <a:r>
-              <a:t>Installation</a:t>
-            </a:r>
-          </a:p>
-        </p:txBody>
-      </p:sp>
-      <p:sp>
-        <p:nvSpPr>
-          <p:cNvPr id="3" name="TextBox 2"/>
-          <p:cNvSpPr txBox="1"/>
-          <p:nvPr/>
-        </p:nvSpPr>
-        <p:spPr>
-          <a:xfrm>
-            <a:off x="457200" y="1188720"/>
-            <a:ext cx="4114800" cy="5212080"/>
-          </a:xfrm>
-          <a:prstGeom prst="rect">
-            <a:avLst/>
-          </a:prstGeom>
-          <a:noFill/>
-        </p:spPr>
-        <p:txBody>
-          <a:bodyPr wrap="square">
-            <a:spAutoFit/>
-          </a:bodyPr>
-          <a:lstStyle/>
-          <a:p>
-            <a:pPr>
-              <a:spcBef>
-                <a:spcPts val="600"/>
-              </a:spcBef>
-              <a:defRPr sz="1600">
-                <a:solidFill>
-                  <a:srgbClr val="F1F5F9"/>
-                </a:solidFill>
-              </a:defRPr>
-            </a:pPr>
-            <a:r>
-              <a:t>Option 1: Desktop App (Recommended)</a:t>
-            </a:r>
-          </a:p>
-          <a:p>
-            <a:pPr>
-              <a:spcBef>
-                <a:spcPts val="600"/>
-              </a:spcBef>
-              <a:defRPr sz="1600">
-                <a:solidFill>
-                  <a:srgbClr val="F1F5F9"/>
-                </a:solidFill>
-              </a:defRPr>
-            </a:pPr>
-            <a:r>
-              <a:t>1. Download (.dmg or .AppImage)</a:t>
-            </a:r>
-          </a:p>
-          <a:p>
-            <a:pPr>
-              <a:spcBef>
-                <a:spcPts val="600"/>
-              </a:spcBef>
-              <a:defRPr sz="1600">
-                <a:solidFill>
-                  <a:srgbClr val="F1F5F9"/>
-                </a:solidFill>
-              </a:defRPr>
-            </a:pPr>
-            <a:r>
-              <a:t>2. Launch (auto-starts Gateway)</a:t>
-            </a:r>
-          </a:p>
-          <a:p>
-            <a:pPr>
-              <a:spcBef>
-                <a:spcPts val="600"/>
-              </a:spcBef>
-              <a:defRPr sz="1600">
-                <a:solidFill>
-                  <a:srgbClr val="F1F5F9"/>
-                </a:solidFill>
-              </a:defRPr>
-            </a:pPr>
-            <a:r>
-              <a:t>3. Authenticate (device-code sign-in)</a:t>
-            </a:r>
-          </a:p>
-          <a:p>
-            <a:pPr>
-              <a:spcBef>
-                <a:spcPts val="600"/>
-              </a:spcBef>
-              <a:defRPr sz="1600">
-                <a:solidFill>
-                  <a:srgbClr val="F1F5F9"/>
-                </a:solidFill>
-              </a:defRPr>
-            </a:pPr>
-            <a:r>
-              <a:t>4. Start chatting</a:t>
-            </a:r>
-          </a:p>
-          <a:p>
-            <a:pPr>
-              <a:spcBef>
-                <a:spcPts val="600"/>
-              </a:spcBef>
-              <a:defRPr sz="1600">
-                <a:solidFill>
-                  <a:srgbClr val="F1F5F9"/>
-                </a:solidFill>
-              </a:defRPr>
-            </a:pPr>
-          </a:p>
-          <a:p>
-            <a:pPr>
-              <a:spcBef>
-                <a:spcPts val="600"/>
-              </a:spcBef>
-              <a:defRPr sz="1600">
-                <a:solidFill>
-                  <a:srgbClr val="F1F5F9"/>
-                </a:solidFill>
-              </a:defRPr>
-            </a:pPr>
-            <a:r>
-              <a:t>No AWS CLI needed</a:t>
-            </a:r>
-          </a:p>
-          <a:p>
-            <a:pPr>
-              <a:spcBef>
-                <a:spcPts val="600"/>
-              </a:spcBef>
-              <a:defRPr sz="1600">
-                <a:solidFill>
-                  <a:srgbClr val="F1F5F9"/>
-                </a:solidFill>
-              </a:defRPr>
-            </a:pPr>
-            <a:r>
-              <a:t>No Bedrock configuration needed</a:t>
-            </a:r>
-          </a:p>
-        </p:txBody>
-      </p:sp>
-      <p:sp>
-        <p:nvSpPr>
-          <p:cNvPr id="4" name="TextBox 3"/>
-          <p:cNvSpPr txBox="1"/>
-          <p:nvPr/>
-        </p:nvSpPr>
-        <p:spPr>
-          <a:xfrm>
-            <a:off x="4754880" y="1188720"/>
-            <a:ext cx="4114800" cy="5212080"/>
-          </a:xfrm>
-          <a:prstGeom prst="rect">
-            <a:avLst/>
-          </a:prstGeom>
-          <a:noFill/>
-        </p:spPr>
-        <p:txBody>
-          <a:bodyPr wrap="square">
-            <a:spAutoFit/>
-          </a:bodyPr>
-          <a:lstStyle/>
-          <a:p>
-            <a:pPr>
-              <a:spcBef>
-                <a:spcPts val="600"/>
-              </a:spcBef>
-              <a:defRPr sz="1600">
-                <a:solidFill>
-                  <a:srgbClr val="F1F5F9"/>
-                </a:solidFill>
-              </a:defRPr>
-            </a:pPr>
-            <a:r>
-              <a:t>Option 2: CLI Install</a:t>
-            </a:r>
-          </a:p>
-          <a:p>
-            <a:pPr>
-              <a:spcBef>
-                <a:spcPts val="600"/>
-              </a:spcBef>
-              <a:defRPr sz="1600">
-                <a:solidFill>
-                  <a:srgbClr val="F1F5F9"/>
-                </a:solidFill>
-              </a:defRPr>
-            </a:pPr>
-            <a:r>
-              <a:t>curl -fsSL https://download.crew.kiro.dev/cli.sh | sh</a:t>
-            </a:r>
-          </a:p>
-          <a:p>
-            <a:pPr>
-              <a:spcBef>
-                <a:spcPts val="600"/>
-              </a:spcBef>
-              <a:defRPr sz="1600">
-                <a:solidFill>
-                  <a:srgbClr val="F1F5F9"/>
-                </a:solidFill>
-              </a:defRPr>
-            </a:pPr>
-          </a:p>
-          <a:p>
-            <a:pPr>
-              <a:spcBef>
-                <a:spcPts val="600"/>
-              </a:spcBef>
-              <a:defRPr sz="1600">
-                <a:solidFill>
-                  <a:srgbClr val="F1F5F9"/>
-                </a:solidFill>
-              </a:defRPr>
-            </a:pPr>
-            <a:r>
-              <a:t>kirocrew setup</a:t>
-            </a:r>
-          </a:p>
-          <a:p>
-            <a:pPr>
-              <a:spcBef>
-                <a:spcPts val="600"/>
-              </a:spcBef>
-              <a:defRPr sz="1600">
-                <a:solidFill>
-                  <a:srgbClr val="F1F5F9"/>
-                </a:solidFill>
-              </a:defRPr>
-            </a:pPr>
-            <a:r>
-              <a:t>kirocrew doctor</a:t>
-            </a:r>
-          </a:p>
-          <a:p>
-            <a:pPr>
-              <a:spcBef>
-                <a:spcPts val="600"/>
-              </a:spcBef>
-              <a:defRPr sz="1600">
-                <a:solidFill>
-                  <a:srgbClr val="F1F5F9"/>
-                </a:solidFill>
-              </a:defRPr>
-            </a:pPr>
-            <a:r>
-              <a:t>kirocrew gateway</a:t>
-            </a:r>
-          </a:p>
-          <a:p>
-            <a:pPr>
-              <a:spcBef>
-                <a:spcPts val="600"/>
-              </a:spcBef>
-              <a:defRPr sz="1600">
-                <a:solidFill>
-                  <a:srgbClr val="F1F5F9"/>
-                </a:solidFill>
-              </a:defRPr>
-            </a:pPr>
-          </a:p>
-          <a:p>
-            <a:pPr>
-              <a:spcBef>
-                <a:spcPts val="600"/>
-              </a:spcBef>
-              <a:defRPr sz="1600">
-                <a:solidFill>
-                  <a:srgbClr val="F1F5F9"/>
-                </a:solidFill>
-              </a:defRPr>
-            </a:pPr>
-            <a:r>
-              <a:t>open http://localhost:5476</a:t>
+              <a:t>Part 5: Getting Started</a:t>
             </a:r>
           </a:p>
         </p:txBody>
@@ -10926,7 +10840,7 @@
         <p:spPr>
           <a:xfrm>
             <a:off x="457200" y="365760"/>
-            <a:ext cx="6858000" cy="548640"/>
+            <a:ext cx="8229600" cy="548640"/>
           </a:xfrm>
           <a:prstGeom prst="rect">
             <a:avLst/>
@@ -10947,7 +10861,7 @@
               </a:defRPr>
             </a:pPr>
             <a:r>
-              <a:t>First Steps</a:t>
+              <a:t>Installation</a:t>
             </a:r>
           </a:p>
         </p:txBody>
@@ -10960,8 +10874,8 @@
         </p:nvSpPr>
         <p:spPr>
           <a:xfrm>
-            <a:off x="7498079" y="411480"/>
-            <a:ext cx="1371600" cy="365760"/>
+            <a:off x="457200" y="1188720"/>
+            <a:ext cx="4114800" cy="5212080"/>
           </a:xfrm>
           <a:prstGeom prst="rect">
             <a:avLst/>
@@ -10969,20 +10883,125 @@
           <a:noFill/>
         </p:spPr>
         <p:txBody>
-          <a:bodyPr wrap="none">
+          <a:bodyPr wrap="square">
             <a:spAutoFit/>
           </a:bodyPr>
           <a:lstStyle/>
           <a:p>
             <a:pPr>
-              <a:defRPr sz="1100" b="1">
-                <a:solidFill>
-                  <a:srgbClr val="10B981"/>
-                </a:solidFill>
-              </a:defRPr>
-            </a:pPr>
-            <a:r>
-              <a:t>✓ Verified</a:t>
+              <a:spcBef>
+                <a:spcPts val="600"/>
+              </a:spcBef>
+              <a:defRPr sz="1600">
+                <a:solidFill>
+                  <a:srgbClr val="F1F5F9"/>
+                </a:solidFill>
+              </a:defRPr>
+            </a:pPr>
+            <a:r>
+              <a:t>Option 1: Desktop App (Recommended)</a:t>
+            </a:r>
+          </a:p>
+          <a:p>
+            <a:pPr>
+              <a:spcBef>
+                <a:spcPts val="600"/>
+              </a:spcBef>
+              <a:defRPr sz="1600">
+                <a:solidFill>
+                  <a:srgbClr val="F1F5F9"/>
+                </a:solidFill>
+              </a:defRPr>
+            </a:pPr>
+            <a:r>
+              <a:t>1. Download (.dmg or .AppImage)</a:t>
+            </a:r>
+          </a:p>
+          <a:p>
+            <a:pPr>
+              <a:spcBef>
+                <a:spcPts val="600"/>
+              </a:spcBef>
+              <a:defRPr sz="1600">
+                <a:solidFill>
+                  <a:srgbClr val="F1F5F9"/>
+                </a:solidFill>
+              </a:defRPr>
+            </a:pPr>
+            <a:r>
+              <a:t>2. Launch (auto-starts Gateway)</a:t>
+            </a:r>
+          </a:p>
+          <a:p>
+            <a:pPr>
+              <a:spcBef>
+                <a:spcPts val="600"/>
+              </a:spcBef>
+              <a:defRPr sz="1600">
+                <a:solidFill>
+                  <a:srgbClr val="F1F5F9"/>
+                </a:solidFill>
+              </a:defRPr>
+            </a:pPr>
+            <a:r>
+              <a:t>3. Authenticate (device-code sign-in)</a:t>
+            </a:r>
+          </a:p>
+          <a:p>
+            <a:pPr>
+              <a:spcBef>
+                <a:spcPts val="600"/>
+              </a:spcBef>
+              <a:defRPr sz="1600">
+                <a:solidFill>
+                  <a:srgbClr val="F1F5F9"/>
+                </a:solidFill>
+              </a:defRPr>
+            </a:pPr>
+            <a:r>
+              <a:t>4. Start chatting</a:t>
+            </a:r>
+          </a:p>
+          <a:p>
+            <a:pPr>
+              <a:spcBef>
+                <a:spcPts val="600"/>
+              </a:spcBef>
+              <a:defRPr sz="1600">
+                <a:solidFill>
+                  <a:srgbClr val="F1F5F9"/>
+                </a:solidFill>
+              </a:defRPr>
+            </a:pPr>
+          </a:p>
+          <a:p>
+            <a:pPr>
+              <a:spcBef>
+                <a:spcPts val="600"/>
+              </a:spcBef>
+              <a:defRPr sz="1600">
+                <a:solidFill>
+                  <a:srgbClr val="F1F5F9"/>
+                </a:solidFill>
+              </a:defRPr>
+            </a:pPr>
+            <a:r>
+              <a:t>No AWS CLI needed</a:t>
+            </a:r>
+          </a:p>
+          <a:p>
+            <a:pPr>
+              <a:spcBef>
+                <a:spcPts val="600"/>
+              </a:spcBef>
+              <a:defRPr sz="1600">
+                <a:solidFill>
+                  <a:srgbClr val="F1F5F9"/>
+                </a:solidFill>
+              </a:defRPr>
+            </a:pPr>
+            <a:r>
+              <a:t>No Bedrock configuration needed</a:t>
             </a:r>
           </a:p>
         </p:txBody>
@@ -10995,8 +11014,8 @@
         </p:nvSpPr>
         <p:spPr>
           <a:xfrm>
-            <a:off x="640080" y="1188720"/>
-            <a:ext cx="7863840" cy="5212080"/>
+            <a:off x="4754880" y="1188720"/>
+            <a:ext cx="4114800" cy="5212080"/>
           </a:xfrm>
           <a:prstGeom prst="rect">
             <a:avLst/>
@@ -11011,124 +11030,115 @@
           <a:p>
             <a:pPr>
               <a:spcBef>
-                <a:spcPts val="800"/>
-              </a:spcBef>
-              <a:defRPr sz="1800">
-                <a:solidFill>
-                  <a:srgbClr val="F1F5F9"/>
-                </a:solidFill>
-              </a:defRPr>
-            </a:pPr>
-            <a:r>
-              <a:t>1. Chat - Type and ask anything in dashboard</a:t>
-            </a:r>
-          </a:p>
-          <a:p>
-            <a:pPr>
-              <a:spcBef>
-                <a:spcPts val="800"/>
-              </a:spcBef>
-              <a:defRPr sz="1800">
-                <a:solidFill>
-                  <a:srgbClr val="F1F5F9"/>
-                </a:solidFill>
-              </a:defRPr>
-            </a:pPr>
-          </a:p>
-          <a:p>
-            <a:pPr>
-              <a:spcBef>
-                <a:spcPts val="800"/>
-              </a:spcBef>
-              <a:defRPr sz="1800">
-                <a:solidFill>
-                  <a:srgbClr val="F1F5F9"/>
-                </a:solidFill>
-              </a:defRPr>
-            </a:pPr>
-            <a:r>
-              <a:t>2. Schedule a job - 'Every weekday at 9, summarize my open work'</a:t>
-            </a:r>
-          </a:p>
-          <a:p>
-            <a:pPr>
-              <a:spcBef>
-                <a:spcPts val="800"/>
-              </a:spcBef>
-              <a:defRPr sz="1800">
-                <a:solidFill>
-                  <a:srgbClr val="F1F5F9"/>
-                </a:solidFill>
-              </a:defRPr>
-            </a:pPr>
-          </a:p>
-          <a:p>
-            <a:pPr>
-              <a:spcBef>
-                <a:spcPts val="800"/>
-              </a:spcBef>
-              <a:defRPr sz="1800">
-                <a:solidFill>
-                  <a:srgbClr val="F1F5F9"/>
-                </a:solidFill>
-              </a:defRPr>
-            </a:pPr>
-            <a:r>
-              <a:t>3. Teach a preference - 'Always use pytest over unittest'</a:t>
-            </a:r>
-          </a:p>
-          <a:p>
-            <a:pPr>
-              <a:spcBef>
-                <a:spcPts val="800"/>
-              </a:spcBef>
-              <a:defRPr sz="1800">
-                <a:solidFill>
-                  <a:srgbClr val="F1F5F9"/>
-                </a:solidFill>
-              </a:defRPr>
-            </a:pPr>
-          </a:p>
-          <a:p>
-            <a:pPr>
-              <a:spcBef>
-                <a:spcPts val="800"/>
-              </a:spcBef>
-              <a:defRPr sz="1800">
-                <a:solidFill>
-                  <a:srgbClr val="F1F5F9"/>
-                </a:solidFill>
-              </a:defRPr>
-            </a:pPr>
-            <a:r>
-              <a:t>4. Run autonomous task - Projects panel → describe spec → Run</a:t>
-            </a:r>
-          </a:p>
-          <a:p>
-            <a:pPr>
-              <a:spcBef>
-                <a:spcPts val="800"/>
-              </a:spcBef>
-              <a:defRPr sz="1800">
-                <a:solidFill>
-                  <a:srgbClr val="F1F5F9"/>
-                </a:solidFill>
-              </a:defRPr>
-            </a:pPr>
-          </a:p>
-          <a:p>
-            <a:pPr>
-              <a:spcBef>
-                <a:spcPts val="800"/>
-              </a:spcBef>
-              <a:defRPr sz="1800">
-                <a:solidFill>
-                  <a:srgbClr val="F1F5F9"/>
-                </a:solidFill>
-              </a:defRPr>
-            </a:pPr>
-            <a:r>
-              <a:t>5. Delegate parallel work - 'Research these 3 options in parallel'</a:t>
+                <a:spcPts val="600"/>
+              </a:spcBef>
+              <a:defRPr sz="1600">
+                <a:solidFill>
+                  <a:srgbClr val="F1F5F9"/>
+                </a:solidFill>
+              </a:defRPr>
+            </a:pPr>
+            <a:r>
+              <a:t>Option 2: CLI Install</a:t>
+            </a:r>
+          </a:p>
+          <a:p>
+            <a:pPr>
+              <a:spcBef>
+                <a:spcPts val="600"/>
+              </a:spcBef>
+              <a:defRPr sz="1600">
+                <a:solidFill>
+                  <a:srgbClr val="F1F5F9"/>
+                </a:solidFill>
+              </a:defRPr>
+            </a:pPr>
+            <a:r>
+              <a:t>curl -fsSL https://download.crew.kiro.dev/cli.sh | sh</a:t>
+            </a:r>
+          </a:p>
+          <a:p>
+            <a:pPr>
+              <a:spcBef>
+                <a:spcPts val="600"/>
+              </a:spcBef>
+              <a:defRPr sz="1600">
+                <a:solidFill>
+                  <a:srgbClr val="F1F5F9"/>
+                </a:solidFill>
+              </a:defRPr>
+            </a:pPr>
+          </a:p>
+          <a:p>
+            <a:pPr>
+              <a:spcBef>
+                <a:spcPts val="600"/>
+              </a:spcBef>
+              <a:defRPr sz="1600">
+                <a:solidFill>
+                  <a:srgbClr val="F1F5F9"/>
+                </a:solidFill>
+              </a:defRPr>
+            </a:pPr>
+            <a:r>
+              <a:t>kirocrew setup</a:t>
+            </a:r>
+          </a:p>
+          <a:p>
+            <a:pPr>
+              <a:spcBef>
+                <a:spcPts val="600"/>
+              </a:spcBef>
+              <a:defRPr sz="1600">
+                <a:solidFill>
+                  <a:srgbClr val="F1F5F9"/>
+                </a:solidFill>
+              </a:defRPr>
+            </a:pPr>
+            <a:r>
+              <a:t>kirocrew doctor</a:t>
+            </a:r>
+          </a:p>
+          <a:p>
+            <a:pPr>
+              <a:spcBef>
+                <a:spcPts val="600"/>
+              </a:spcBef>
+              <a:defRPr sz="1600">
+                <a:solidFill>
+                  <a:srgbClr val="F1F5F9"/>
+                </a:solidFill>
+              </a:defRPr>
+            </a:pPr>
+            <a:r>
+              <a:t>kirocrew gateway</a:t>
+            </a:r>
+          </a:p>
+          <a:p>
+            <a:pPr>
+              <a:spcBef>
+                <a:spcPts val="600"/>
+              </a:spcBef>
+              <a:defRPr sz="1600">
+                <a:solidFill>
+                  <a:srgbClr val="F1F5F9"/>
+                </a:solidFill>
+              </a:defRPr>
+            </a:pPr>
+          </a:p>
+          <a:p>
+            <a:pPr>
+              <a:spcBef>
+                <a:spcPts val="600"/>
+              </a:spcBef>
+              <a:defRPr sz="1600">
+                <a:solidFill>
+                  <a:srgbClr val="F1F5F9"/>
+                </a:solidFill>
+              </a:defRPr>
+            </a:pPr>
+            <a:r>
+              <a:t>open http://localhost:5476</a:t>
             </a:r>
           </a:p>
         </p:txBody>
@@ -11189,7 +11199,7 @@
               </a:defRPr>
             </a:pPr>
             <a:r>
-              <a:t>Resources</a:t>
+              <a:t>First Steps</a:t>
             </a:r>
           </a:p>
         </p:txBody>
@@ -11262,151 +11272,115 @@
               </a:defRPr>
             </a:pPr>
             <a:r>
-              <a:t>Official Documentation:</a:t>
-            </a:r>
-          </a:p>
-          <a:p>
-            <a:pPr>
-              <a:spcBef>
-                <a:spcPts val="800"/>
-              </a:spcBef>
-              <a:defRPr sz="1800">
-                <a:solidFill>
-                  <a:srgbClr val="F1F5F9"/>
-                </a:solidFill>
-              </a:defRPr>
-            </a:pPr>
-            <a:r>
-              <a:t>• kiro.dev/docs/crew/ - Main docs</a:t>
-            </a:r>
-          </a:p>
-          <a:p>
-            <a:pPr>
-              <a:spcBef>
-                <a:spcPts val="800"/>
-              </a:spcBef>
-              <a:defRPr sz="1800">
-                <a:solidFill>
-                  <a:srgbClr val="F1F5F9"/>
-                </a:solidFill>
-              </a:defRPr>
-            </a:pPr>
-            <a:r>
-              <a:t>• kiro.dev/docs/crew/installation/ - Setup</a:t>
-            </a:r>
-          </a:p>
-          <a:p>
-            <a:pPr>
-              <a:spcBef>
-                <a:spcPts val="800"/>
-              </a:spcBef>
-              <a:defRPr sz="1800">
-                <a:solidFill>
-                  <a:srgbClr val="F1F5F9"/>
-                </a:solidFill>
-              </a:defRPr>
-            </a:pPr>
-            <a:r>
-              <a:t>• kiro.dev/docs/crew/features/ - Features</a:t>
-            </a:r>
-          </a:p>
-          <a:p>
-            <a:pPr>
-              <a:spcBef>
-                <a:spcPts val="800"/>
-              </a:spcBef>
-              <a:defRPr sz="1800">
-                <a:solidFill>
-                  <a:srgbClr val="F1F5F9"/>
-                </a:solidFill>
-              </a:defRPr>
-            </a:pPr>
-          </a:p>
-          <a:p>
-            <a:pPr>
-              <a:spcBef>
-                <a:spcPts val="800"/>
-              </a:spcBef>
-              <a:defRPr sz="1800">
-                <a:solidFill>
-                  <a:srgbClr val="F1F5F9"/>
-                </a:solidFill>
-              </a:defRPr>
-            </a:pPr>
-            <a:r>
-              <a:t>Specific Features:</a:t>
-            </a:r>
-          </a:p>
-          <a:p>
-            <a:pPr>
-              <a:spcBef>
-                <a:spcPts val="800"/>
-              </a:spcBef>
-              <a:defRPr sz="1800">
-                <a:solidFill>
-                  <a:srgbClr val="F1F5F9"/>
-                </a:solidFill>
-              </a:defRPr>
-            </a:pPr>
-            <a:r>
-              <a:t>• kiro.dev/docs/crew/features/memory/ - Memory</a:t>
-            </a:r>
-          </a:p>
-          <a:p>
-            <a:pPr>
-              <a:spcBef>
-                <a:spcPts val="800"/>
-              </a:spcBef>
-              <a:defRPr sz="1800">
-                <a:solidFill>
-                  <a:srgbClr val="F1F5F9"/>
-                </a:solidFill>
-              </a:defRPr>
-            </a:pPr>
-            <a:r>
-              <a:t>• kiro.dev/docs/crew/features/subagents/ - Subagents</a:t>
-            </a:r>
-          </a:p>
-          <a:p>
-            <a:pPr>
-              <a:spcBef>
-                <a:spcPts val="800"/>
-              </a:spcBef>
-              <a:defRPr sz="1800">
-                <a:solidFill>
-                  <a:srgbClr val="F1F5F9"/>
-                </a:solidFill>
-              </a:defRPr>
-            </a:pPr>
-            <a:r>
-              <a:t>• kiro.dev/docs/crew/features/cron/ - Scheduling</a:t>
-            </a:r>
-          </a:p>
-          <a:p>
-            <a:pPr>
-              <a:spcBef>
-                <a:spcPts val="800"/>
-              </a:spcBef>
-              <a:defRPr sz="1800">
-                <a:solidFill>
-                  <a:srgbClr val="F1F5F9"/>
-                </a:solidFill>
-              </a:defRPr>
-            </a:pPr>
-          </a:p>
-          <a:p>
-            <a:pPr>
-              <a:spcBef>
-                <a:spcPts val="800"/>
-              </a:spcBef>
-              <a:defRPr sz="1800">
-                <a:solidFill>
-                  <a:srgbClr val="F1F5F9"/>
-                </a:solidFill>
-              </a:defRPr>
-            </a:pPr>
-            <a:r>
-              <a:t>Pricing: kiro.dev/pricing/</a:t>
+              <a:t>1. Chat - Type and ask anything in dashboard</a:t>
+            </a:r>
+          </a:p>
+          <a:p>
+            <a:pPr>
+              <a:spcBef>
+                <a:spcPts val="800"/>
+              </a:spcBef>
+              <a:defRPr sz="1800">
+                <a:solidFill>
+                  <a:srgbClr val="F1F5F9"/>
+                </a:solidFill>
+              </a:defRPr>
+            </a:pPr>
+          </a:p>
+          <a:p>
+            <a:pPr>
+              <a:spcBef>
+                <a:spcPts val="800"/>
+              </a:spcBef>
+              <a:defRPr sz="1800">
+                <a:solidFill>
+                  <a:srgbClr val="F1F5F9"/>
+                </a:solidFill>
+              </a:defRPr>
+            </a:pPr>
+            <a:r>
+              <a:t>2. Schedule a job - 'Every weekday at 9, summarize my open work'</a:t>
+            </a:r>
+          </a:p>
+          <a:p>
+            <a:pPr>
+              <a:spcBef>
+                <a:spcPts val="800"/>
+              </a:spcBef>
+              <a:defRPr sz="1800">
+                <a:solidFill>
+                  <a:srgbClr val="F1F5F9"/>
+                </a:solidFill>
+              </a:defRPr>
+            </a:pPr>
+          </a:p>
+          <a:p>
+            <a:pPr>
+              <a:spcBef>
+                <a:spcPts val="800"/>
+              </a:spcBef>
+              <a:defRPr sz="1800">
+                <a:solidFill>
+                  <a:srgbClr val="F1F5F9"/>
+                </a:solidFill>
+              </a:defRPr>
+            </a:pPr>
+            <a:r>
+              <a:t>3. Teach a preference - 'Always use pytest over unittest'</a:t>
+            </a:r>
+          </a:p>
+          <a:p>
+            <a:pPr>
+              <a:spcBef>
+                <a:spcPts val="800"/>
+              </a:spcBef>
+              <a:defRPr sz="1800">
+                <a:solidFill>
+                  <a:srgbClr val="F1F5F9"/>
+                </a:solidFill>
+              </a:defRPr>
+            </a:pPr>
+          </a:p>
+          <a:p>
+            <a:pPr>
+              <a:spcBef>
+                <a:spcPts val="800"/>
+              </a:spcBef>
+              <a:defRPr sz="1800">
+                <a:solidFill>
+                  <a:srgbClr val="F1F5F9"/>
+                </a:solidFill>
+              </a:defRPr>
+            </a:pPr>
+            <a:r>
+              <a:t>4. Run autonomous task - Projects panel → describe spec → Run</a:t>
+            </a:r>
+          </a:p>
+          <a:p>
+            <a:pPr>
+              <a:spcBef>
+                <a:spcPts val="800"/>
+              </a:spcBef>
+              <a:defRPr sz="1800">
+                <a:solidFill>
+                  <a:srgbClr val="F1F5F9"/>
+                </a:solidFill>
+              </a:defRPr>
+            </a:pPr>
+          </a:p>
+          <a:p>
+            <a:pPr>
+              <a:spcBef>
+                <a:spcPts val="800"/>
+              </a:spcBef>
+              <a:defRPr sz="1800">
+                <a:solidFill>
+                  <a:srgbClr val="F1F5F9"/>
+                </a:solidFill>
+              </a:defRPr>
+            </a:pPr>
+            <a:r>
+              <a:t>5. Delegate parallel work - 'Research these 3 options in parallel'</a:t>
             </a:r>
           </a:p>
         </p:txBody>
@@ -11420,6 +11394,284 @@
 </file>
 
 <file path=ppt/slides/slide43.xml><?xml version="1.0" encoding="utf-8"?>
+<p:sld xmlns:a="http://schemas.openxmlformats.org/drawingml/2006/main" xmlns:p="http://schemas.openxmlformats.org/presentationml/2006/main" xmlns:r="http://schemas.openxmlformats.org/officeDocument/2006/relationships">
+  <p:cSld>
+    <p:bg>
+      <p:bgPr>
+        <a:solidFill>
+          <a:srgbClr val="0F172A"/>
+        </a:solidFill>
+        <a:effectLst/>
+      </p:bgPr>
+    </p:bg>
+    <p:spTree>
+      <p:nvGrpSpPr>
+        <p:cNvPr id="1" name=""/>
+        <p:cNvGrpSpPr/>
+        <p:nvPr/>
+      </p:nvGrpSpPr>
+      <p:grpSpPr/>
+      <p:sp>
+        <p:nvSpPr>
+          <p:cNvPr id="2" name="TextBox 1"/>
+          <p:cNvSpPr txBox="1"/>
+          <p:nvPr/>
+        </p:nvSpPr>
+        <p:spPr>
+          <a:xfrm>
+            <a:off x="457200" y="365760"/>
+            <a:ext cx="6858000" cy="548640"/>
+          </a:xfrm>
+          <a:prstGeom prst="rect">
+            <a:avLst/>
+          </a:prstGeom>
+          <a:noFill/>
+        </p:spPr>
+        <p:txBody>
+          <a:bodyPr wrap="none">
+            <a:spAutoFit/>
+          </a:bodyPr>
+          <a:lstStyle/>
+          <a:p>
+            <a:pPr>
+              <a:defRPr sz="3200" b="1">
+                <a:solidFill>
+                  <a:srgbClr val="2563EB"/>
+                </a:solidFill>
+              </a:defRPr>
+            </a:pPr>
+            <a:r>
+              <a:t>Resources</a:t>
+            </a:r>
+          </a:p>
+        </p:txBody>
+      </p:sp>
+      <p:sp>
+        <p:nvSpPr>
+          <p:cNvPr id="3" name="TextBox 2"/>
+          <p:cNvSpPr txBox="1"/>
+          <p:nvPr/>
+        </p:nvSpPr>
+        <p:spPr>
+          <a:xfrm>
+            <a:off x="7498079" y="411480"/>
+            <a:ext cx="1371600" cy="365760"/>
+          </a:xfrm>
+          <a:prstGeom prst="rect">
+            <a:avLst/>
+          </a:prstGeom>
+          <a:noFill/>
+        </p:spPr>
+        <p:txBody>
+          <a:bodyPr wrap="none">
+            <a:spAutoFit/>
+          </a:bodyPr>
+          <a:lstStyle/>
+          <a:p>
+            <a:pPr>
+              <a:defRPr sz="1100" b="1">
+                <a:solidFill>
+                  <a:srgbClr val="10B981"/>
+                </a:solidFill>
+              </a:defRPr>
+            </a:pPr>
+            <a:r>
+              <a:t>✓ Verified</a:t>
+            </a:r>
+          </a:p>
+        </p:txBody>
+      </p:sp>
+      <p:sp>
+        <p:nvSpPr>
+          <p:cNvPr id="4" name="TextBox 3"/>
+          <p:cNvSpPr txBox="1"/>
+          <p:nvPr/>
+        </p:nvSpPr>
+        <p:spPr>
+          <a:xfrm>
+            <a:off x="640080" y="1188720"/>
+            <a:ext cx="7863840" cy="5212080"/>
+          </a:xfrm>
+          <a:prstGeom prst="rect">
+            <a:avLst/>
+          </a:prstGeom>
+          <a:noFill/>
+        </p:spPr>
+        <p:txBody>
+          <a:bodyPr wrap="square">
+            <a:spAutoFit/>
+          </a:bodyPr>
+          <a:lstStyle/>
+          <a:p>
+            <a:pPr>
+              <a:spcBef>
+                <a:spcPts val="800"/>
+              </a:spcBef>
+              <a:defRPr sz="1800">
+                <a:solidFill>
+                  <a:srgbClr val="F1F5F9"/>
+                </a:solidFill>
+              </a:defRPr>
+            </a:pPr>
+            <a:r>
+              <a:t>Official Documentation:</a:t>
+            </a:r>
+          </a:p>
+          <a:p>
+            <a:pPr>
+              <a:spcBef>
+                <a:spcPts val="800"/>
+              </a:spcBef>
+              <a:defRPr sz="1800">
+                <a:solidFill>
+                  <a:srgbClr val="F1F5F9"/>
+                </a:solidFill>
+              </a:defRPr>
+            </a:pPr>
+            <a:r>
+              <a:t>• kiro.dev/docs/crew/ - Main docs</a:t>
+            </a:r>
+          </a:p>
+          <a:p>
+            <a:pPr>
+              <a:spcBef>
+                <a:spcPts val="800"/>
+              </a:spcBef>
+              <a:defRPr sz="1800">
+                <a:solidFill>
+                  <a:srgbClr val="F1F5F9"/>
+                </a:solidFill>
+              </a:defRPr>
+            </a:pPr>
+            <a:r>
+              <a:t>• kiro.dev/docs/crew/installation/ - Setup</a:t>
+            </a:r>
+          </a:p>
+          <a:p>
+            <a:pPr>
+              <a:spcBef>
+                <a:spcPts val="800"/>
+              </a:spcBef>
+              <a:defRPr sz="1800">
+                <a:solidFill>
+                  <a:srgbClr val="F1F5F9"/>
+                </a:solidFill>
+              </a:defRPr>
+            </a:pPr>
+            <a:r>
+              <a:t>• kiro.dev/docs/crew/features/ - Features</a:t>
+            </a:r>
+          </a:p>
+          <a:p>
+            <a:pPr>
+              <a:spcBef>
+                <a:spcPts val="800"/>
+              </a:spcBef>
+              <a:defRPr sz="1800">
+                <a:solidFill>
+                  <a:srgbClr val="F1F5F9"/>
+                </a:solidFill>
+              </a:defRPr>
+            </a:pPr>
+          </a:p>
+          <a:p>
+            <a:pPr>
+              <a:spcBef>
+                <a:spcPts val="800"/>
+              </a:spcBef>
+              <a:defRPr sz="1800">
+                <a:solidFill>
+                  <a:srgbClr val="F1F5F9"/>
+                </a:solidFill>
+              </a:defRPr>
+            </a:pPr>
+            <a:r>
+              <a:t>Specific Features:</a:t>
+            </a:r>
+          </a:p>
+          <a:p>
+            <a:pPr>
+              <a:spcBef>
+                <a:spcPts val="800"/>
+              </a:spcBef>
+              <a:defRPr sz="1800">
+                <a:solidFill>
+                  <a:srgbClr val="F1F5F9"/>
+                </a:solidFill>
+              </a:defRPr>
+            </a:pPr>
+            <a:r>
+              <a:t>• kiro.dev/docs/crew/features/memory/ - Memory</a:t>
+            </a:r>
+          </a:p>
+          <a:p>
+            <a:pPr>
+              <a:spcBef>
+                <a:spcPts val="800"/>
+              </a:spcBef>
+              <a:defRPr sz="1800">
+                <a:solidFill>
+                  <a:srgbClr val="F1F5F9"/>
+                </a:solidFill>
+              </a:defRPr>
+            </a:pPr>
+            <a:r>
+              <a:t>• kiro.dev/docs/crew/features/subagents/ - Subagents</a:t>
+            </a:r>
+          </a:p>
+          <a:p>
+            <a:pPr>
+              <a:spcBef>
+                <a:spcPts val="800"/>
+              </a:spcBef>
+              <a:defRPr sz="1800">
+                <a:solidFill>
+                  <a:srgbClr val="F1F5F9"/>
+                </a:solidFill>
+              </a:defRPr>
+            </a:pPr>
+            <a:r>
+              <a:t>• kiro.dev/docs/crew/features/cron/ - Scheduling</a:t>
+            </a:r>
+          </a:p>
+          <a:p>
+            <a:pPr>
+              <a:spcBef>
+                <a:spcPts val="800"/>
+              </a:spcBef>
+              <a:defRPr sz="1800">
+                <a:solidFill>
+                  <a:srgbClr val="F1F5F9"/>
+                </a:solidFill>
+              </a:defRPr>
+            </a:pPr>
+          </a:p>
+          <a:p>
+            <a:pPr>
+              <a:spcBef>
+                <a:spcPts val="800"/>
+              </a:spcBef>
+              <a:defRPr sz="1800">
+                <a:solidFill>
+                  <a:srgbClr val="F1F5F9"/>
+                </a:solidFill>
+              </a:defRPr>
+            </a:pPr>
+            <a:r>
+              <a:t>Pricing: kiro.dev/pricing/</a:t>
+            </a:r>
+          </a:p>
+        </p:txBody>
+      </p:sp>
+    </p:spTree>
+  </p:cSld>
+  <p:clrMapOvr>
+    <a:masterClrMapping/>
+  </p:clrMapOvr>
+</p:sld>
+</file>
+
+<file path=ppt/slides/slide44.xml><?xml version="1.0" encoding="utf-8"?>
 <p:sld xmlns:a="http://schemas.openxmlformats.org/drawingml/2006/main" xmlns:p="http://schemas.openxmlformats.org/presentationml/2006/main" xmlns:r="http://schemas.openxmlformats.org/officeDocument/2006/relationships">
   <p:cSld>
     <p:bg>
